--- a/downloads/presentations/modules/arc-240.pptx
+++ b/downloads/presentations/modules/arc-240.pptx
@@ -615,7 +615,8 @@
               <a:rPr lang="en-US" dirty="0"/>
               <a:t>Core Concepts
 UCUM. UCUM is a standard for units of measure. Unit consistency is essential when interpreting quantitative results, thresholds, reference ranges, or trends.
-Reportable condition mapping. Reportable condition mapping links laboratory tests and results to conditions that may require reporting or investigation. Mapping quality directly affects automated surveillance and AI-supported triage.</a:t>
+Reportable condition mapping. Reportable condition mapping links laboratory tests and results to conditions that may require reporting or investigation. Mapping quality directly affects automated surveillance and AI-supported triage.
+Application guidance: Connect the concept to data quality, model performance, validation evidence, monitoring measures, and decisions that remain under human control.</a:t>
             </a:r>
             <a:endParaRPr lang="en-US" dirty="0"/>
           </a:p>
@@ -705,7 +706,8 @@
               <a:rPr lang="en-US" dirty="0"/>
               <a:t>Public Health Example
 An AI tool that summarizes incoming lab reports for disease investigators may need to identify the test performed, result, organism, specimen source, collection date, result date, performing lab, and ordering provider. If a local test code is mapped incorrectly, the summary may imply evidence for the wrong condition. If units are missing, a quantitative result may be uninterpretable. If the specimen source is omitted, the epidemiologic meaning of the result may change.
-A second example is anomaly detection using laboratory trends. If a laboratory changes its coding system or starts reporting a new test type, a model may interpret the change as a disease signal. Without terminology monitoring, staff may investigate an artifact rather than a true public health event.</a:t>
+A second example is anomaly detection using laboratory trends. If a laboratory changes its coding system or starts reporting a new test type, a model may interpret the change as a disease signal. Without terminology monitoring, staff may investigate an artifact rather than a true public health event.
+Application guidance: Connect the concept to data quality, model performance, validation evidence, monitoring measures, and decisions that remain under human control.</a:t>
             </a:r>
             <a:endParaRPr lang="en-US" dirty="0"/>
           </a:p>
@@ -796,7 +798,8 @@
               <a:t>Technical Deep Dive
 Laboratory data quality begins with required fields. At minimum, many workflows need patient identifiers, specimen collection date, test ordered, result, result date, performing lab, provider, specimen source, units when applicable, and reportable condition mapping. The exact requirements depend on the use case. An AI tool used for summarization may need different fields than a tool used for trend detection or case classification.
 Terminology mapping should be reviewed as an ongoing process. Local codes may change, new tests may be introduced, and laboratories may report results differently across facilities. Mapping decisions should be versioned, tested, and monitored. When an AI tool depends on mapped data, the mapping version becomes part of the model context and should be documented.
-Lab data quality review should include missingness, duplication, test-result pairing, abnormal flags, units, reference ranges, specimen source, date logic, and reportable condition mapping. The review should also identify which issues require human review. Some lab results may be appropriate for automated queueing, while others require epidemiologist interpretation before an AI-generated summary or classification is used.</a:t>
+Lab data quality review should include missingness, duplication, test-result pairing, abnormal flags, units, reference ranges, specimen source, date logic, and reportable condition mapping. The review should also identify which issues require human review. Some lab results may be appropriate for automated queueing, while others require epidemiologist interpretation before an AI-generated summary or classification is used.
+Application guidance: Connect the concept to data quality, model performance, validation evidence, monitoring measures, and decisions that remain under human control.</a:t>
             </a:r>
             <a:endParaRPr lang="en-US" dirty="0"/>
           </a:p>
@@ -887,7 +890,8 @@
               <a:t>Risks, Failure Modes, and Guardrails
 Misleading standardization. A standard code may be present but mapped incorrectly. Guardrails include mapping review, test cases, and terminology stewardship.
 Missing units or specimen details. Incomplete fields can change interpretation. Guardrails include required-field checks and uncertainty flags in AI outputs.
-Duplicate or corrected reports. AI summaries may treat corrections as new events. Guardrails include duplicate logic, correction handling, and source display.</a:t>
+Duplicate or corrected reports. AI summaries may treat corrections as new events. Guardrails include duplicate logic, correction handling, and source display.
+Application guidance: Identify what could go wrong, who could be affected, what safeguards are needed, and what evidence should be reviewed before use expands.</a:t>
             </a:r>
             <a:endParaRPr lang="en-US" dirty="0"/>
           </a:p>
@@ -976,7 +980,8 @@
             <a:r>
               <a:rPr lang="en-US" dirty="0"/>
               <a:t>Risks, Failure Modes, and Guardrails
-Reporting pattern changes. Lab reporting changes may look like disease changes. Guardrails include volume monitoring, partner change logs, and anomaly review.</a:t>
+Reporting pattern changes. Lab reporting changes may look like disease changes. Guardrails include volume monitoring, partner change logs, and anomaly review.
+Application guidance: Identify what could go wrong, who could be affected, what safeguards are needed, and what evidence should be reviewed before use expands.</a:t>
             </a:r>
             <a:endParaRPr lang="en-US" dirty="0"/>
           </a:p>
@@ -1065,7 +1070,8 @@
             <a:r>
               <a:rPr lang="en-US" dirty="0"/>
               <a:t>Application to AI-Supported Workflows
-Generative AI may draft lab summaries, but it should preserve source values and avoid interpreting uncertain or missing fields as facts. Predictive analytics may use lab trends, but model monitoring must distinguish reporting artifacts from disease patterns. NLP may interpret free-text results, but extraction accuracy must be validated. Agentic workflows that trigger tasks from lab results require clear thresholds and human escalation for ambiguous results.</a:t>
+Generative AI may draft lab summaries, but it should preserve source values and avoid interpreting uncertain or missing fields as facts. Predictive analytics may use lab trends, but model monitoring must distinguish reporting artifacts from disease patterns. NLP may interpret free-text results, but extraction accuracy must be validated. Agentic workflows that trigger tasks from lab results require clear thresholds and human escalation for ambiguous results.
+Application guidance: Connect the concept to data quality, model performance, validation evidence, monitoring measures, and decisions that remain under human control.</a:t>
             </a:r>
             <a:endParaRPr lang="en-US" dirty="0"/>
           </a:p>
@@ -1156,7 +1162,8 @@
               <a:t>Reflection Questions
 Which laboratory data quality issues most often affect your surveillance workflows?
 Which local codes require mapping before data can be used reliably?
-Are test-result pairs consistently represented?</a:t>
+Are test-result pairs consistently represented?
+Application guidance: Connect the concept to data quality, model performance, validation evidence, monitoring measures, and decisions that remain under human control.</a:t>
             </a:r>
             <a:endParaRPr lang="en-US" dirty="0"/>
           </a:p>
@@ -1246,7 +1253,8 @@
               <a:rPr lang="en-US" dirty="0"/>
               <a:t>Reflection Questions
 Which missing fields would make AI summarization unsafe?
-How would staff detect a reporting change that affects AI outputs?</a:t>
+How would staff detect a reporting change that affects AI outputs?
+Application guidance: Connect the concept to data quality, model performance, validation evidence, monitoring measures, and decisions that remain under human control.</a:t>
             </a:r>
             <a:endParaRPr lang="en-US" dirty="0"/>
           </a:p>
@@ -1335,7 +1343,8 @@
             <a:r>
               <a:rPr lang="en-US" dirty="0"/>
               <a:t>Practical Exercise
-Create a lab data quality checklist for one AI-supported surveillance use case. Include required lab fields, terminology standards, mapping requirements, missingness checks, unit checks, test-result pairing checks, duplicate report review, correction handling, human review points, and escalation criteria.</a:t>
+Create a lab data quality checklist for one AI-supported surveillance use case. Include required lab fields, terminology standards, mapping requirements, missingness checks, unit checks, test-result pairing checks, duplicate report review, correction handling, human review points, and escalation criteria.
+Application guidance: Use the assignment to test whether you can explain the concept, apply it to a realistic public health situation, and identify what would need review before the work moves forward.</a:t>
             </a:r>
             <a:endParaRPr lang="en-US" dirty="0"/>
           </a:p>
@@ -1426,7 +1435,8 @@
               <a:t>Expected Artifact or Evidence
 Lab data quality checklist
 Terminology mapping questions
-Required-field list</a:t>
+Required-field list
+Application guidance: Connect the concept to data quality, model performance, validation evidence, monitoring measures, and decisions that remain under human control.</a:t>
             </a:r>
             <a:endParaRPr lang="en-US" dirty="0"/>
           </a:p>
@@ -1607,7 +1617,8 @@
             <a:r>
               <a:rPr lang="en-US" dirty="0"/>
               <a:t>Expected Artifact or Evidence
-Data quality issue log</a:t>
+Data quality issue log
+Application guidance: Connect the concept to data quality, model performance, validation evidence, monitoring measures, and decisions that remain under human control.</a:t>
             </a:r>
             <a:endParaRPr lang="en-US" dirty="0"/>
           </a:p>
@@ -1699,7 +1710,8 @@
 Lab data quality checklist
 Terminology mapping questions
 Required-field list
-Data quality issue log</a:t>
+Data quality issue log
+Application guidance: Use the assignment to test whether you can explain the concept, apply it to a realistic public health situation, and identify what would need review before the work moves forward.</a:t>
             </a:r>
             <a:endParaRPr lang="en-US" dirty="0"/>
           </a:p>
@@ -1792,7 +1804,8 @@
 2. What is LOINC commonly used for?
 3. Which issue can make a quantitative lab result difficult to interpret?
 4. What should happen before AI is used to classify lab reports?
-5. What is strong completion evidence for this module?</a:t>
+5. What is strong completion evidence for this module?
+Application guidance: Use the assignment to test whether you can explain the concept, apply it to a realistic public health situation, and identify what would need review before the work moves forward.</a:t>
             </a:r>
             <a:endParaRPr lang="en-US" dirty="0"/>
           </a:p>
@@ -1884,7 +1897,8 @@
 CDC PHIN VADS
 Reportable Condition Mapping Table resources
 APHL laboratory informatics resources
-Jurisdictional ELR onboarding and data quality documentation</a:t>
+Jurisdictional ELR onboarding and data quality documentation
+Application guidance: Connect the concept to data quality, model performance, validation evidence, monitoring measures, and decisions that remain under human control.</a:t>
             </a:r>
             <a:endParaRPr lang="en-US" dirty="0"/>
           </a:p>
@@ -2163,7 +2177,8 @@
 Explain why LOINC, SNOMED CT, UCUM, local codes, and reportable condition mappings matter for AI.
 Identify common laboratory data quality problems that can affect AI outputs.
 Assess whether lab data are fit for a specific AI-supported use case.
-Produce a lab data quality checklist for an AI-supported surveillance workflow.</a:t>
+Produce a lab data quality checklist for an AI-supported surveillance workflow.
+Application guidance: Use the assignment to test whether you can explain the concept, apply it to a realistic public health situation, and identify what would need review before the work moves forward.</a:t>
             </a:r>
             <a:endParaRPr lang="en-US" dirty="0"/>
           </a:p>
@@ -2252,7 +2267,8 @@
             <a:r>
               <a:rPr lang="en-US" dirty="0"/>
               <a:t>Module Overview
-Electronic laboratory reporting supplies critical evidence for infectious disease surveillance, outbreak detection, case investigation, and program monitoring. AI tools that use laboratory data depend on the quality of test codes, result codes, units, specimen information, dates, and mappings to reportable conditions. This module teaches learners how laboratory data quality and terminology mapping affect AI-supported public health work.</a:t>
+Electronic laboratory reporting supplies critical evidence for infectious disease surveillance, outbreak detection, case investigation, and program monitoring. AI tools that use laboratory data depend on the quality of test codes, result codes, units, specimen information, dates, and mappings to reportable conditions. This module teaches learners how laboratory data quality and terminology mapping affect AI-supported public health work.
+Application guidance: Connect the concept to data quality, model performance, validation evidence, monitoring measures, and decisions that remain under human control.</a:t>
             </a:r>
             <a:endParaRPr lang="en-US" dirty="0"/>
           </a:p>
@@ -2341,7 +2357,8 @@
             <a:r>
               <a:rPr lang="en-US" dirty="0"/>
               <a:t>Jurisdiction and Agency Policy Note
-This national-level module is intended for training and planning purposes. It does not replace legal, privacy, procurement, civil rights, records, or agency policy review. Learners should confirm applicable requirements in their own jurisdiction and organization before implementing AI-supported workflows.</a:t>
+This national-level module is intended for training and planning purposes. It does not replace legal, privacy, procurement, civil rights, records, or agency policy review. Learners should confirm applicable requirements in their own jurisdiction and organization before implementing AI-supported workflows.
+Application guidance: Translate this concept into clear decision rights, review steps, documentation expectations, and escalation paths before an AI-supported workflow is approved.</a:t>
             </a:r>
             <a:endParaRPr lang="en-US" dirty="0"/>
           </a:p>
@@ -2432,7 +2449,8 @@
               <a:t>Why This Topic Matters for Public Health AI
 Laboratory data are often treated as objective because they come from tests and instruments, but the data that reach public health systems are still mediated by coding, mapping, transmission, and interpretation. A laboratory result can be difficult to use if the test code is local, the result is free text, the units are missing, the specimen source is ambiguous, or the date fields are inconsistent. AI tools can magnify these problems by turning unclear data into confident summaries or classifications.
 Terminology mapping is central to reliable public health interpretation. LOINC may identify the test performed, SNOMED CT may represent organisms or coded findings, UCUM may represent units, and local codes may need to be mapped before automated logic can interpret them. Reportable condition mapping connects laboratory evidence to public health action. AI tools should not bypass this informatics work.
-For epidemiologists, lab data quality affects case definitions, trend analysis, outbreak signals, and priority setting. For technologists, it affects interface validation, parsing, mapping, and monitoring. For informaticians, it connects laboratory operations, standards, surveillance workflows, and public health authority.</a:t>
+For epidemiologists, lab data quality affects case definitions, trend analysis, outbreak signals, and priority setting. For technologists, it affects interface validation, parsing, mapping, and monitoring. For informaticians, it connects laboratory operations, standards, surveillance workflows, and public health authority.
+Application guidance: Connect the concept to data quality, model performance, validation evidence, monitoring measures, and decisions that remain under human control.</a:t>
             </a:r>
             <a:endParaRPr lang="en-US" dirty="0"/>
           </a:p>
@@ -2523,7 +2541,8 @@
               <a:t>Core Concepts
 ELR. Electronic Laboratory Reporting is the electronic transmission of laboratory reports to public health agencies. ELR can improve timeliness and completeness, but it requires interface onboarding, validation, monitoring, and data quality management.
 LOINC. LOINC is commonly used to identify laboratory tests and observations. Correct LOINC mapping helps public health systems understand what was tested, not only what result was reported.
-SNOMED CT. SNOMED CT is commonly used to represent clinical findings, organisms, and coded results. It can help standardize the interpretation of laboratory evidence and support reportable condition logic.</a:t>
+SNOMED CT. SNOMED CT is commonly used to represent clinical findings, organisms, and coded results. It can help standardize the interpretation of laboratory evidence and support reportable condition logic.
+Application guidance: Connect the concept to data quality, model performance, validation evidence, monitoring measures, and decisions that remain under human control.</a:t>
             </a:r>
             <a:endParaRPr lang="en-US" dirty="0"/>
           </a:p>
@@ -3294,8 +3313,8 @@
         </p:nvSpPr>
         <p:spPr>
           <a:xfrm>
-            <a:off x="9966960" y="6537960"/>
-            <a:ext cx="1645920" cy="201168"/>
+            <a:off x="9646920" y="6537960"/>
+            <a:ext cx="1965960" cy="201168"/>
           </a:xfrm>
           <a:prstGeom prst="rect">
             <a:avLst/>
@@ -3319,7 +3338,7 @@
                 <a:ea typeface="Aptos" pitchFamily="34" charset="-122"/>
                 <a:cs typeface="Aptos" pitchFamily="34" charset="-120"/>
               </a:rPr>
-              <a:t>Â© Paula Soper</a:t>
+              <a:t>Copyright Paula Soper</a:t>
             </a:r>
             <a:endParaRPr lang="en-US" sz="800" dirty="0"/>
           </a:p>
@@ -3414,7 +3433,7 @@
         <p:spPr>
           <a:xfrm>
             <a:off x="868680" y="1508760"/>
-            <a:ext cx="6537960" cy="4160520"/>
+            <a:ext cx="6309360" cy="4160520"/>
           </a:xfrm>
           <a:prstGeom prst="rect">
             <a:avLst/>
@@ -3479,12 +3498,12 @@
         </p:nvSpPr>
         <p:spPr>
           <a:xfrm>
-            <a:off x="7909560" y="1417320"/>
-            <a:ext cx="3154680" cy="1828800"/>
+            <a:off x="7635240" y="1325880"/>
+            <a:ext cx="3474720" cy="1325880"/>
           </a:xfrm>
           <a:prstGeom prst="roundRect">
             <a:avLst>
-              <a:gd name="adj" fmla="val 6000"/>
+              <a:gd name="adj" fmla="val 8276"/>
             </a:avLst>
           </a:prstGeom>
           <a:solidFill>
@@ -3506,8 +3525,8 @@
         </p:nvSpPr>
         <p:spPr>
           <a:xfrm>
-            <a:off x="8074152" y="1563624"/>
-            <a:ext cx="2825496" cy="256032"/>
+            <a:off x="7799832" y="1472184"/>
+            <a:ext cx="3145536" cy="256032"/>
           </a:xfrm>
           <a:prstGeom prst="rect">
             <a:avLst/>
@@ -3531,7 +3550,7 @@
                 <a:ea typeface="Aptos" pitchFamily="34" charset="-122"/>
                 <a:cs typeface="Aptos" pitchFamily="34" charset="-120"/>
               </a:rPr>
-              <a:t>Key idea</a:t>
+              <a:t>Data decision</a:t>
             </a:r>
             <a:endParaRPr lang="en-US" sz="1300" dirty="0"/>
           </a:p>
@@ -3545,8 +3564,8 @@
         </p:nvSpPr>
         <p:spPr>
           <a:xfrm>
-            <a:off x="8074152" y="1920240"/>
-            <a:ext cx="2825496" cy="1188720"/>
+            <a:off x="7799832" y="1828800"/>
+            <a:ext cx="3145536" cy="685800"/>
           </a:xfrm>
           <a:prstGeom prst="rect">
             <a:avLst/>
@@ -3586,15 +3605,206 @@
         </p:nvSpPr>
         <p:spPr>
           <a:xfrm>
-            <a:off x="7909560" y="3520440"/>
-            <a:ext cx="3154680" cy="1737360"/>
+            <a:off x="7635240" y="2788920"/>
+            <a:ext cx="3474720" cy="1536192"/>
           </a:xfrm>
           <a:prstGeom prst="roundRect">
             <a:avLst>
-              <a:gd name="adj" fmla="val 6316"/>
+              <a:gd name="adj" fmla="val 7143"/>
             </a:avLst>
           </a:prstGeom>
           <a:solidFill>
+            <a:srgbClr val="FFFFFF">
+              <a:alpha val="88000"/>
+            </a:srgbClr>
+          </a:solidFill>
+          <a:ln w="12700">
+            <a:solidFill>
+              <a:srgbClr val="D6E8F2"/>
+            </a:solidFill>
+            <a:prstDash val="solid"/>
+          </a:ln>
+        </p:spPr>
+      </p:sp>
+      <p:sp>
+        <p:nvSpPr>
+          <p:cNvPr id="14" name="Shape 12"/>
+          <p:cNvSpPr/>
+          <p:nvPr/>
+        </p:nvSpPr>
+        <p:spPr>
+          <a:xfrm>
+            <a:off x="8138160" y="3474720"/>
+            <a:ext cx="256032" cy="411480"/>
+          </a:xfrm>
+          <a:prstGeom prst="rect">
+            <a:avLst/>
+          </a:prstGeom>
+          <a:solidFill>
+            <a:srgbClr val="0068B7"/>
+          </a:solidFill>
+          <a:ln w="12700">
+            <a:solidFill>
+              <a:srgbClr val="0068B7"/>
+            </a:solidFill>
+            <a:prstDash val="solid"/>
+          </a:ln>
+        </p:spPr>
+      </p:sp>
+      <p:sp>
+        <p:nvSpPr>
+          <p:cNvPr id="15" name="Shape 13"/>
+          <p:cNvSpPr/>
+          <p:nvPr/>
+        </p:nvSpPr>
+        <p:spPr>
+          <a:xfrm>
+            <a:off x="8577072" y="3172968"/>
+            <a:ext cx="256032" cy="713232"/>
+          </a:xfrm>
+          <a:prstGeom prst="rect">
+            <a:avLst/>
+          </a:prstGeom>
+          <a:solidFill>
+            <a:srgbClr val="2F8A28"/>
+          </a:solidFill>
+          <a:ln w="12700">
+            <a:solidFill>
+              <a:srgbClr val="2F8A28"/>
+            </a:solidFill>
+            <a:prstDash val="solid"/>
+          </a:ln>
+        </p:spPr>
+      </p:sp>
+      <p:sp>
+        <p:nvSpPr>
+          <p:cNvPr id="16" name="Shape 14"/>
+          <p:cNvSpPr/>
+          <p:nvPr/>
+        </p:nvSpPr>
+        <p:spPr>
+          <a:xfrm>
+            <a:off x="9015984" y="2880360"/>
+            <a:ext cx="256032" cy="1005840"/>
+          </a:xfrm>
+          <a:prstGeom prst="rect">
+            <a:avLst/>
+          </a:prstGeom>
+          <a:solidFill>
+            <a:srgbClr val="D69A2D"/>
+          </a:solidFill>
+          <a:ln w="12700">
+            <a:solidFill>
+              <a:srgbClr val="D69A2D"/>
+            </a:solidFill>
+            <a:prstDash val="solid"/>
+          </a:ln>
+        </p:spPr>
+      </p:sp>
+      <p:sp>
+        <p:nvSpPr>
+          <p:cNvPr id="17" name="Shape 15"/>
+          <p:cNvSpPr/>
+          <p:nvPr/>
+        </p:nvSpPr>
+        <p:spPr>
+          <a:xfrm>
+            <a:off x="9454896" y="3319272"/>
+            <a:ext cx="256032" cy="566928"/>
+          </a:xfrm>
+          <a:prstGeom prst="rect">
+            <a:avLst/>
+          </a:prstGeom>
+          <a:solidFill>
+            <a:srgbClr val="6A4CA3"/>
+          </a:solidFill>
+          <a:ln w="12700">
+            <a:solidFill>
+              <a:srgbClr val="6A4CA3"/>
+            </a:solidFill>
+            <a:prstDash val="solid"/>
+          </a:ln>
+        </p:spPr>
+      </p:sp>
+      <p:sp>
+        <p:nvSpPr>
+          <p:cNvPr id="18" name="Shape 16"/>
+          <p:cNvSpPr/>
+          <p:nvPr/>
+        </p:nvSpPr>
+        <p:spPr>
+          <a:xfrm>
+            <a:off x="8019288" y="3886200"/>
+            <a:ext cx="2706624" cy="0"/>
+          </a:xfrm>
+          <a:prstGeom prst="line">
+            <a:avLst/>
+          </a:prstGeom>
+          <a:noFill/>
+          <a:ln w="15240">
+            <a:solidFill>
+              <a:srgbClr val="003A63"/>
+            </a:solidFill>
+            <a:prstDash val="solid"/>
+          </a:ln>
+        </p:spPr>
+      </p:sp>
+      <p:sp>
+        <p:nvSpPr>
+          <p:cNvPr id="19" name="Text 17"/>
+          <p:cNvSpPr/>
+          <p:nvPr/>
+        </p:nvSpPr>
+        <p:spPr>
+          <a:xfrm>
+            <a:off x="7863840" y="3017520"/>
+            <a:ext cx="3017520" cy="201168"/>
+          </a:xfrm>
+          <a:prstGeom prst="rect">
+            <a:avLst/>
+          </a:prstGeom>
+          <a:noFill/>
+          <a:ln/>
+        </p:spPr>
+        <p:txBody>
+          <a:bodyPr wrap="square" lIns="0" tIns="0" rIns="0" bIns="0" rtlCol="0" anchor="ctr"/>
+          <a:lstStyle/>
+          <a:p>
+            <a:pPr algn="ctr" indent="0" marL="0">
+              <a:buNone/>
+            </a:pPr>
+            <a:r>
+              <a:rPr lang="en-US" sz="1050" b="1" dirty="0">
+                <a:solidFill>
+                  <a:srgbClr val="003A63"/>
+                </a:solidFill>
+                <a:latin typeface="Aptos" pitchFamily="34" charset="0"/>
+                <a:ea typeface="Aptos" pitchFamily="34" charset="-122"/>
+                <a:cs typeface="Aptos" pitchFamily="34" charset="-120"/>
+              </a:rPr>
+              <a:t>Measure and monitor</a:t>
+            </a:r>
+            <a:endParaRPr lang="en-US" sz="1050" dirty="0"/>
+          </a:p>
+        </p:txBody>
+      </p:sp>
+      <p:sp>
+        <p:nvSpPr>
+          <p:cNvPr id="20" name="Shape 18"/>
+          <p:cNvSpPr/>
+          <p:nvPr/>
+        </p:nvSpPr>
+        <p:spPr>
+          <a:xfrm>
+            <a:off x="7635240" y="4498848"/>
+            <a:ext cx="3474720" cy="1143000"/>
+          </a:xfrm>
+          <a:prstGeom prst="roundRect">
+            <a:avLst>
+              <a:gd name="adj" fmla="val 9600"/>
+            </a:avLst>
+          </a:prstGeom>
+          <a:solidFill>
             <a:srgbClr val="EAF6F8"/>
           </a:solidFill>
           <a:ln w="12700">
@@ -3607,14 +3817,14 @@
       </p:sp>
       <p:sp>
         <p:nvSpPr>
-          <p:cNvPr id="14" name="Text 12"/>
-          <p:cNvSpPr/>
-          <p:nvPr/>
-        </p:nvSpPr>
-        <p:spPr>
-          <a:xfrm>
-            <a:off x="8074152" y="3666744"/>
-            <a:ext cx="2825496" cy="256032"/>
+          <p:cNvPr id="21" name="Text 19"/>
+          <p:cNvSpPr/>
+          <p:nvPr/>
+        </p:nvSpPr>
+        <p:spPr>
+          <a:xfrm>
+            <a:off x="7799832" y="4645152"/>
+            <a:ext cx="3145536" cy="256032"/>
           </a:xfrm>
           <a:prstGeom prst="rect">
             <a:avLst/>
@@ -3638,7 +3848,7 @@
                 <a:ea typeface="Aptos" pitchFamily="34" charset="-122"/>
                 <a:cs typeface="Aptos" pitchFamily="34" charset="-120"/>
               </a:rPr>
-              <a:t>Use this for</a:t>
+              <a:t>How to validate</a:t>
             </a:r>
             <a:endParaRPr lang="en-US" sz="1300" dirty="0"/>
           </a:p>
@@ -3646,14 +3856,14 @@
       </p:sp>
       <p:sp>
         <p:nvSpPr>
-          <p:cNvPr id="15" name="Text 13"/>
-          <p:cNvSpPr/>
-          <p:nvPr/>
-        </p:nvSpPr>
-        <p:spPr>
-          <a:xfrm>
-            <a:off x="8074152" y="4023360"/>
-            <a:ext cx="2825496" cy="1097280"/>
+          <p:cNvPr id="22" name="Text 20"/>
+          <p:cNvSpPr/>
+          <p:nvPr/>
+        </p:nvSpPr>
+        <p:spPr>
+          <a:xfrm>
+            <a:off x="7799832" y="5001768"/>
+            <a:ext cx="3145536" cy="502920"/>
           </a:xfrm>
           <a:prstGeom prst="rect">
             <a:avLst/>
@@ -3679,7 +3889,7 @@
                 <a:ea typeface="Aptos" pitchFamily="34" charset="-122"/>
                 <a:cs typeface="Aptos" pitchFamily="34" charset="-120"/>
               </a:rPr>
-              <a:t>Connect the concept to public health decisions, safeguards, documentation, or implementation work.</a:t>
+              <a:t>Connect the concept to data quality, model performance, validation evidence, monitoring measures, and decisions that remain under human control.</a:t>
             </a:r>
             <a:endParaRPr lang="en-US" sz="1550" dirty="0"/>
           </a:p>
@@ -3853,8 +4063,8 @@
         </p:nvSpPr>
         <p:spPr>
           <a:xfrm>
-            <a:off x="9966960" y="6537960"/>
-            <a:ext cx="1645920" cy="201168"/>
+            <a:off x="9646920" y="6537960"/>
+            <a:ext cx="1965960" cy="201168"/>
           </a:xfrm>
           <a:prstGeom prst="rect">
             <a:avLst/>
@@ -3878,7 +4088,7 @@
                 <a:ea typeface="Aptos" pitchFamily="34" charset="-122"/>
                 <a:cs typeface="Aptos" pitchFamily="34" charset="-120"/>
               </a:rPr>
-              <a:t>Â© Paula Soper</a:t>
+              <a:t>Copyright Paula Soper</a:t>
             </a:r>
             <a:endParaRPr lang="en-US" sz="800" dirty="0"/>
           </a:p>
@@ -3925,77 +4135,13 @@
       </p:sp>
       <p:sp>
         <p:nvSpPr>
-          <p:cNvPr id="8" name="Shape 6"/>
+          <p:cNvPr id="8" name="Text 6"/>
           <p:cNvSpPr/>
           <p:nvPr/>
         </p:nvSpPr>
         <p:spPr>
           <a:xfrm>
             <a:off x="640080" y="658368"/>
-            <a:ext cx="420624" cy="420624"/>
-          </a:xfrm>
-          <a:prstGeom prst="ellipse">
-            <a:avLst/>
-          </a:prstGeom>
-          <a:solidFill>
-            <a:srgbClr val="0068B7"/>
-          </a:solidFill>
-          <a:ln w="12700">
-            <a:solidFill>
-              <a:srgbClr val="0068B7"/>
-            </a:solidFill>
-            <a:prstDash val="solid"/>
-          </a:ln>
-        </p:spPr>
-      </p:sp>
-      <p:sp>
-        <p:nvSpPr>
-          <p:cNvPr id="9" name="Text 7"/>
-          <p:cNvSpPr/>
-          <p:nvPr/>
-        </p:nvSpPr>
-        <p:spPr>
-          <a:xfrm>
-            <a:off x="640080" y="731520"/>
-            <a:ext cx="420624" cy="164592"/>
-          </a:xfrm>
-          <a:prstGeom prst="rect">
-            <a:avLst/>
-          </a:prstGeom>
-          <a:noFill/>
-          <a:ln/>
-        </p:spPr>
-        <p:txBody>
-          <a:bodyPr wrap="square" lIns="0" tIns="0" rIns="0" bIns="0" rtlCol="0" anchor="ctr"/>
-          <a:lstStyle/>
-          <a:p>
-            <a:pPr algn="ctr" indent="0" marL="0">
-              <a:buNone/>
-            </a:pPr>
-            <a:r>
-              <a:rPr lang="en-US" sz="1100" b="1" dirty="0">
-                <a:solidFill>
-                  <a:srgbClr val="FFFFFF"/>
-                </a:solidFill>
-                <a:latin typeface="Aptos" pitchFamily="34" charset="0"/>
-                <a:ea typeface="Aptos" pitchFamily="34" charset="-122"/>
-                <a:cs typeface="Aptos" pitchFamily="34" charset="-120"/>
-              </a:rPr>
-              <a:t>6</a:t>
-            </a:r>
-            <a:endParaRPr lang="en-US" sz="1100" dirty="0"/>
-          </a:p>
-        </p:txBody>
-      </p:sp>
-      <p:sp>
-        <p:nvSpPr>
-          <p:cNvPr id="10" name="Text 8"/>
-          <p:cNvSpPr/>
-          <p:nvPr/>
-        </p:nvSpPr>
-        <p:spPr>
-          <a:xfrm>
-            <a:off x="640080" y="621792"/>
             <a:ext cx="10881360" cy="713232"/>
           </a:xfrm>
           <a:prstGeom prst="rect">
@@ -4030,14 +4176,14 @@
       </p:sp>
       <p:sp>
         <p:nvSpPr>
-          <p:cNvPr id="11" name="Text 9"/>
+          <p:cNvPr id="9" name="Text 7"/>
           <p:cNvSpPr/>
           <p:nvPr/>
         </p:nvSpPr>
         <p:spPr>
           <a:xfrm>
             <a:off x="868680" y="1508760"/>
-            <a:ext cx="6537960" cy="4160520"/>
+            <a:ext cx="6309360" cy="4160520"/>
           </a:xfrm>
           <a:prstGeom prst="rect">
             <a:avLst/>
@@ -4096,18 +4242,18 @@
       </p:sp>
       <p:sp>
         <p:nvSpPr>
-          <p:cNvPr id="12" name="Shape 10"/>
-          <p:cNvSpPr/>
-          <p:nvPr/>
-        </p:nvSpPr>
-        <p:spPr>
-          <a:xfrm>
-            <a:off x="7909560" y="1417320"/>
-            <a:ext cx="3154680" cy="1828800"/>
+          <p:cNvPr id="10" name="Shape 8"/>
+          <p:cNvSpPr/>
+          <p:nvPr/>
+        </p:nvSpPr>
+        <p:spPr>
+          <a:xfrm>
+            <a:off x="7635240" y="1325880"/>
+            <a:ext cx="3474720" cy="1325880"/>
           </a:xfrm>
           <a:prstGeom prst="roundRect">
             <a:avLst>
-              <a:gd name="adj" fmla="val 6000"/>
+              <a:gd name="adj" fmla="val 8276"/>
             </a:avLst>
           </a:prstGeom>
           <a:solidFill>
@@ -4123,14 +4269,14 @@
       </p:sp>
       <p:sp>
         <p:nvSpPr>
-          <p:cNvPr id="13" name="Text 11"/>
-          <p:cNvSpPr/>
-          <p:nvPr/>
-        </p:nvSpPr>
-        <p:spPr>
-          <a:xfrm>
-            <a:off x="8074152" y="1563624"/>
-            <a:ext cx="2825496" cy="256032"/>
+          <p:cNvPr id="11" name="Text 9"/>
+          <p:cNvSpPr/>
+          <p:nvPr/>
+        </p:nvSpPr>
+        <p:spPr>
+          <a:xfrm>
+            <a:off x="7799832" y="1472184"/>
+            <a:ext cx="3145536" cy="256032"/>
           </a:xfrm>
           <a:prstGeom prst="rect">
             <a:avLst/>
@@ -4154,7 +4300,7 @@
                 <a:ea typeface="Aptos" pitchFamily="34" charset="-122"/>
                 <a:cs typeface="Aptos" pitchFamily="34" charset="-120"/>
               </a:rPr>
-              <a:t>Key idea</a:t>
+              <a:t>Data decision</a:t>
             </a:r>
             <a:endParaRPr lang="en-US" sz="1300" dirty="0"/>
           </a:p>
@@ -4162,14 +4308,14 @@
       </p:sp>
       <p:sp>
         <p:nvSpPr>
-          <p:cNvPr id="14" name="Text 12"/>
-          <p:cNvSpPr/>
-          <p:nvPr/>
-        </p:nvSpPr>
-        <p:spPr>
-          <a:xfrm>
-            <a:off x="8074152" y="1920240"/>
-            <a:ext cx="2825496" cy="1188720"/>
+          <p:cNvPr id="12" name="Text 10"/>
+          <p:cNvSpPr/>
+          <p:nvPr/>
+        </p:nvSpPr>
+        <p:spPr>
+          <a:xfrm>
+            <a:off x="7799832" y="1828800"/>
+            <a:ext cx="3145536" cy="685800"/>
           </a:xfrm>
           <a:prstGeom prst="rect">
             <a:avLst/>
@@ -4203,21 +4349,212 @@
       </p:sp>
       <p:sp>
         <p:nvSpPr>
-          <p:cNvPr id="15" name="Shape 13"/>
-          <p:cNvSpPr/>
-          <p:nvPr/>
-        </p:nvSpPr>
-        <p:spPr>
-          <a:xfrm>
-            <a:off x="7909560" y="3520440"/>
-            <a:ext cx="3154680" cy="1737360"/>
+          <p:cNvPr id="13" name="Shape 11"/>
+          <p:cNvSpPr/>
+          <p:nvPr/>
+        </p:nvSpPr>
+        <p:spPr>
+          <a:xfrm>
+            <a:off x="7635240" y="2788920"/>
+            <a:ext cx="3474720" cy="1536192"/>
           </a:xfrm>
           <a:prstGeom prst="roundRect">
             <a:avLst>
-              <a:gd name="adj" fmla="val 6316"/>
+              <a:gd name="adj" fmla="val 7143"/>
             </a:avLst>
           </a:prstGeom>
           <a:solidFill>
+            <a:srgbClr val="FFFFFF">
+              <a:alpha val="88000"/>
+            </a:srgbClr>
+          </a:solidFill>
+          <a:ln w="12700">
+            <a:solidFill>
+              <a:srgbClr val="D6E8F2"/>
+            </a:solidFill>
+            <a:prstDash val="solid"/>
+          </a:ln>
+        </p:spPr>
+      </p:sp>
+      <p:sp>
+        <p:nvSpPr>
+          <p:cNvPr id="14" name="Shape 12"/>
+          <p:cNvSpPr/>
+          <p:nvPr/>
+        </p:nvSpPr>
+        <p:spPr>
+          <a:xfrm>
+            <a:off x="8138160" y="3474720"/>
+            <a:ext cx="256032" cy="411480"/>
+          </a:xfrm>
+          <a:prstGeom prst="rect">
+            <a:avLst/>
+          </a:prstGeom>
+          <a:solidFill>
+            <a:srgbClr val="0068B7"/>
+          </a:solidFill>
+          <a:ln w="12700">
+            <a:solidFill>
+              <a:srgbClr val="0068B7"/>
+            </a:solidFill>
+            <a:prstDash val="solid"/>
+          </a:ln>
+        </p:spPr>
+      </p:sp>
+      <p:sp>
+        <p:nvSpPr>
+          <p:cNvPr id="15" name="Shape 13"/>
+          <p:cNvSpPr/>
+          <p:nvPr/>
+        </p:nvSpPr>
+        <p:spPr>
+          <a:xfrm>
+            <a:off x="8577072" y="3172968"/>
+            <a:ext cx="256032" cy="713232"/>
+          </a:xfrm>
+          <a:prstGeom prst="rect">
+            <a:avLst/>
+          </a:prstGeom>
+          <a:solidFill>
+            <a:srgbClr val="2F8A28"/>
+          </a:solidFill>
+          <a:ln w="12700">
+            <a:solidFill>
+              <a:srgbClr val="2F8A28"/>
+            </a:solidFill>
+            <a:prstDash val="solid"/>
+          </a:ln>
+        </p:spPr>
+      </p:sp>
+      <p:sp>
+        <p:nvSpPr>
+          <p:cNvPr id="16" name="Shape 14"/>
+          <p:cNvSpPr/>
+          <p:nvPr/>
+        </p:nvSpPr>
+        <p:spPr>
+          <a:xfrm>
+            <a:off x="9015984" y="2880360"/>
+            <a:ext cx="256032" cy="1005840"/>
+          </a:xfrm>
+          <a:prstGeom prst="rect">
+            <a:avLst/>
+          </a:prstGeom>
+          <a:solidFill>
+            <a:srgbClr val="D69A2D"/>
+          </a:solidFill>
+          <a:ln w="12700">
+            <a:solidFill>
+              <a:srgbClr val="D69A2D"/>
+            </a:solidFill>
+            <a:prstDash val="solid"/>
+          </a:ln>
+        </p:spPr>
+      </p:sp>
+      <p:sp>
+        <p:nvSpPr>
+          <p:cNvPr id="17" name="Shape 15"/>
+          <p:cNvSpPr/>
+          <p:nvPr/>
+        </p:nvSpPr>
+        <p:spPr>
+          <a:xfrm>
+            <a:off x="9454896" y="3319272"/>
+            <a:ext cx="256032" cy="566928"/>
+          </a:xfrm>
+          <a:prstGeom prst="rect">
+            <a:avLst/>
+          </a:prstGeom>
+          <a:solidFill>
+            <a:srgbClr val="6A4CA3"/>
+          </a:solidFill>
+          <a:ln w="12700">
+            <a:solidFill>
+              <a:srgbClr val="6A4CA3"/>
+            </a:solidFill>
+            <a:prstDash val="solid"/>
+          </a:ln>
+        </p:spPr>
+      </p:sp>
+      <p:sp>
+        <p:nvSpPr>
+          <p:cNvPr id="18" name="Shape 16"/>
+          <p:cNvSpPr/>
+          <p:nvPr/>
+        </p:nvSpPr>
+        <p:spPr>
+          <a:xfrm>
+            <a:off x="8019288" y="3886200"/>
+            <a:ext cx="2706624" cy="0"/>
+          </a:xfrm>
+          <a:prstGeom prst="line">
+            <a:avLst/>
+          </a:prstGeom>
+          <a:noFill/>
+          <a:ln w="15240">
+            <a:solidFill>
+              <a:srgbClr val="003A63"/>
+            </a:solidFill>
+            <a:prstDash val="solid"/>
+          </a:ln>
+        </p:spPr>
+      </p:sp>
+      <p:sp>
+        <p:nvSpPr>
+          <p:cNvPr id="19" name="Text 17"/>
+          <p:cNvSpPr/>
+          <p:nvPr/>
+        </p:nvSpPr>
+        <p:spPr>
+          <a:xfrm>
+            <a:off x="7863840" y="3017520"/>
+            <a:ext cx="3017520" cy="201168"/>
+          </a:xfrm>
+          <a:prstGeom prst="rect">
+            <a:avLst/>
+          </a:prstGeom>
+          <a:noFill/>
+          <a:ln/>
+        </p:spPr>
+        <p:txBody>
+          <a:bodyPr wrap="square" lIns="0" tIns="0" rIns="0" bIns="0" rtlCol="0" anchor="ctr"/>
+          <a:lstStyle/>
+          <a:p>
+            <a:pPr algn="ctr" indent="0" marL="0">
+              <a:buNone/>
+            </a:pPr>
+            <a:r>
+              <a:rPr lang="en-US" sz="1050" b="1" dirty="0">
+                <a:solidFill>
+                  <a:srgbClr val="003A63"/>
+                </a:solidFill>
+                <a:latin typeface="Aptos" pitchFamily="34" charset="0"/>
+                <a:ea typeface="Aptos" pitchFamily="34" charset="-122"/>
+                <a:cs typeface="Aptos" pitchFamily="34" charset="-120"/>
+              </a:rPr>
+              <a:t>Measure and monitor</a:t>
+            </a:r>
+            <a:endParaRPr lang="en-US" sz="1050" dirty="0"/>
+          </a:p>
+        </p:txBody>
+      </p:sp>
+      <p:sp>
+        <p:nvSpPr>
+          <p:cNvPr id="20" name="Shape 18"/>
+          <p:cNvSpPr/>
+          <p:nvPr/>
+        </p:nvSpPr>
+        <p:spPr>
+          <a:xfrm>
+            <a:off x="7635240" y="4498848"/>
+            <a:ext cx="3474720" cy="1143000"/>
+          </a:xfrm>
+          <a:prstGeom prst="roundRect">
+            <a:avLst>
+              <a:gd name="adj" fmla="val 9600"/>
+            </a:avLst>
+          </a:prstGeom>
+          <a:solidFill>
             <a:srgbClr val="EAF6F8"/>
           </a:solidFill>
           <a:ln w="12700">
@@ -4230,14 +4567,14 @@
       </p:sp>
       <p:sp>
         <p:nvSpPr>
-          <p:cNvPr id="16" name="Text 14"/>
-          <p:cNvSpPr/>
-          <p:nvPr/>
-        </p:nvSpPr>
-        <p:spPr>
-          <a:xfrm>
-            <a:off x="8074152" y="3666744"/>
-            <a:ext cx="2825496" cy="256032"/>
+          <p:cNvPr id="21" name="Text 19"/>
+          <p:cNvSpPr/>
+          <p:nvPr/>
+        </p:nvSpPr>
+        <p:spPr>
+          <a:xfrm>
+            <a:off x="7799832" y="4645152"/>
+            <a:ext cx="3145536" cy="256032"/>
           </a:xfrm>
           <a:prstGeom prst="rect">
             <a:avLst/>
@@ -4261,7 +4598,7 @@
                 <a:ea typeface="Aptos" pitchFamily="34" charset="-122"/>
                 <a:cs typeface="Aptos" pitchFamily="34" charset="-120"/>
               </a:rPr>
-              <a:t>Use this for</a:t>
+              <a:t>How to validate</a:t>
             </a:r>
             <a:endParaRPr lang="en-US" sz="1300" dirty="0"/>
           </a:p>
@@ -4269,14 +4606,14 @@
       </p:sp>
       <p:sp>
         <p:nvSpPr>
-          <p:cNvPr id="17" name="Text 15"/>
-          <p:cNvSpPr/>
-          <p:nvPr/>
-        </p:nvSpPr>
-        <p:spPr>
-          <a:xfrm>
-            <a:off x="8074152" y="4023360"/>
-            <a:ext cx="2825496" cy="1097280"/>
+          <p:cNvPr id="22" name="Text 20"/>
+          <p:cNvSpPr/>
+          <p:nvPr/>
+        </p:nvSpPr>
+        <p:spPr>
+          <a:xfrm>
+            <a:off x="7799832" y="5001768"/>
+            <a:ext cx="3145536" cy="502920"/>
           </a:xfrm>
           <a:prstGeom prst="rect">
             <a:avLst/>
@@ -4302,7 +4639,7 @@
                 <a:ea typeface="Aptos" pitchFamily="34" charset="-122"/>
                 <a:cs typeface="Aptos" pitchFamily="34" charset="-120"/>
               </a:rPr>
-              <a:t>Connect the concept to public health decisions, safeguards, documentation, or implementation work.</a:t>
+              <a:t>Connect the concept to data quality, model performance, validation evidence, monitoring measures, and decisions that remain under human control.</a:t>
             </a:r>
             <a:endParaRPr lang="en-US" sz="1550" dirty="0"/>
           </a:p>
@@ -4476,8 +4813,8 @@
         </p:nvSpPr>
         <p:spPr>
           <a:xfrm>
-            <a:off x="9966960" y="6537960"/>
-            <a:ext cx="1645920" cy="201168"/>
+            <a:off x="9646920" y="6537960"/>
+            <a:ext cx="1965960" cy="201168"/>
           </a:xfrm>
           <a:prstGeom prst="rect">
             <a:avLst/>
@@ -4501,7 +4838,7 @@
                 <a:ea typeface="Aptos" pitchFamily="34" charset="-122"/>
                 <a:cs typeface="Aptos" pitchFamily="34" charset="-120"/>
               </a:rPr>
-              <a:t>Â© Paula Soper</a:t>
+              <a:t>Copyright Paula Soper</a:t>
             </a:r>
             <a:endParaRPr lang="en-US" sz="800" dirty="0"/>
           </a:p>
@@ -4548,77 +4885,13 @@
       </p:sp>
       <p:sp>
         <p:nvSpPr>
-          <p:cNvPr id="8" name="Shape 6"/>
+          <p:cNvPr id="8" name="Text 6"/>
           <p:cNvSpPr/>
           <p:nvPr/>
         </p:nvSpPr>
         <p:spPr>
           <a:xfrm>
             <a:off x="640080" y="658368"/>
-            <a:ext cx="420624" cy="420624"/>
-          </a:xfrm>
-          <a:prstGeom prst="ellipse">
-            <a:avLst/>
-          </a:prstGeom>
-          <a:solidFill>
-            <a:srgbClr val="0068B7"/>
-          </a:solidFill>
-          <a:ln w="12700">
-            <a:solidFill>
-              <a:srgbClr val="0068B7"/>
-            </a:solidFill>
-            <a:prstDash val="solid"/>
-          </a:ln>
-        </p:spPr>
-      </p:sp>
-      <p:sp>
-        <p:nvSpPr>
-          <p:cNvPr id="9" name="Text 7"/>
-          <p:cNvSpPr/>
-          <p:nvPr/>
-        </p:nvSpPr>
-        <p:spPr>
-          <a:xfrm>
-            <a:off x="640080" y="731520"/>
-            <a:ext cx="420624" cy="164592"/>
-          </a:xfrm>
-          <a:prstGeom prst="rect">
-            <a:avLst/>
-          </a:prstGeom>
-          <a:noFill/>
-          <a:ln/>
-        </p:spPr>
-        <p:txBody>
-          <a:bodyPr wrap="square" lIns="0" tIns="0" rIns="0" bIns="0" rtlCol="0" anchor="ctr"/>
-          <a:lstStyle/>
-          <a:p>
-            <a:pPr algn="ctr" indent="0" marL="0">
-              <a:buNone/>
-            </a:pPr>
-            <a:r>
-              <a:rPr lang="en-US" sz="1100" b="1" dirty="0">
-                <a:solidFill>
-                  <a:srgbClr val="FFFFFF"/>
-                </a:solidFill>
-                <a:latin typeface="Aptos" pitchFamily="34" charset="0"/>
-                <a:ea typeface="Aptos" pitchFamily="34" charset="-122"/>
-                <a:cs typeface="Aptos" pitchFamily="34" charset="-120"/>
-              </a:rPr>
-              <a:t>7</a:t>
-            </a:r>
-            <a:endParaRPr lang="en-US" sz="1100" dirty="0"/>
-          </a:p>
-        </p:txBody>
-      </p:sp>
-      <p:sp>
-        <p:nvSpPr>
-          <p:cNvPr id="10" name="Text 8"/>
-          <p:cNvSpPr/>
-          <p:nvPr/>
-        </p:nvSpPr>
-        <p:spPr>
-          <a:xfrm>
-            <a:off x="640080" y="621792"/>
             <a:ext cx="10881360" cy="713232"/>
           </a:xfrm>
           <a:prstGeom prst="rect">
@@ -4653,14 +4926,14 @@
       </p:sp>
       <p:sp>
         <p:nvSpPr>
-          <p:cNvPr id="11" name="Text 9"/>
+          <p:cNvPr id="9" name="Text 7"/>
           <p:cNvSpPr/>
           <p:nvPr/>
         </p:nvSpPr>
         <p:spPr>
           <a:xfrm>
             <a:off x="868680" y="1508760"/>
-            <a:ext cx="6537960" cy="4160520"/>
+            <a:ext cx="6309360" cy="4160520"/>
           </a:xfrm>
           <a:prstGeom prst="rect">
             <a:avLst/>
@@ -4719,18 +4992,18 @@
       </p:sp>
       <p:sp>
         <p:nvSpPr>
-          <p:cNvPr id="12" name="Shape 10"/>
-          <p:cNvSpPr/>
-          <p:nvPr/>
-        </p:nvSpPr>
-        <p:spPr>
-          <a:xfrm>
-            <a:off x="7909560" y="1417320"/>
-            <a:ext cx="3154680" cy="1828800"/>
+          <p:cNvPr id="10" name="Shape 8"/>
+          <p:cNvSpPr/>
+          <p:nvPr/>
+        </p:nvSpPr>
+        <p:spPr>
+          <a:xfrm>
+            <a:off x="7635240" y="1325880"/>
+            <a:ext cx="3474720" cy="1325880"/>
           </a:xfrm>
           <a:prstGeom prst="roundRect">
             <a:avLst>
-              <a:gd name="adj" fmla="val 6000"/>
+              <a:gd name="adj" fmla="val 8276"/>
             </a:avLst>
           </a:prstGeom>
           <a:solidFill>
@@ -4746,14 +5019,14 @@
       </p:sp>
       <p:sp>
         <p:nvSpPr>
-          <p:cNvPr id="13" name="Text 11"/>
-          <p:cNvSpPr/>
-          <p:nvPr/>
-        </p:nvSpPr>
-        <p:spPr>
-          <a:xfrm>
-            <a:off x="8074152" y="1563624"/>
-            <a:ext cx="2825496" cy="256032"/>
+          <p:cNvPr id="11" name="Text 9"/>
+          <p:cNvSpPr/>
+          <p:nvPr/>
+        </p:nvSpPr>
+        <p:spPr>
+          <a:xfrm>
+            <a:off x="7799832" y="1472184"/>
+            <a:ext cx="3145536" cy="256032"/>
           </a:xfrm>
           <a:prstGeom prst="rect">
             <a:avLst/>
@@ -4777,7 +5050,7 @@
                 <a:ea typeface="Aptos" pitchFamily="34" charset="-122"/>
                 <a:cs typeface="Aptos" pitchFamily="34" charset="-120"/>
               </a:rPr>
-              <a:t>Key idea</a:t>
+              <a:t>Data decision</a:t>
             </a:r>
             <a:endParaRPr lang="en-US" sz="1300" dirty="0"/>
           </a:p>
@@ -4785,14 +5058,14 @@
       </p:sp>
       <p:sp>
         <p:nvSpPr>
-          <p:cNvPr id="14" name="Text 12"/>
-          <p:cNvSpPr/>
-          <p:nvPr/>
-        </p:nvSpPr>
-        <p:spPr>
-          <a:xfrm>
-            <a:off x="8074152" y="1920240"/>
-            <a:ext cx="2825496" cy="1188720"/>
+          <p:cNvPr id="12" name="Text 10"/>
+          <p:cNvSpPr/>
+          <p:nvPr/>
+        </p:nvSpPr>
+        <p:spPr>
+          <a:xfrm>
+            <a:off x="7799832" y="1828800"/>
+            <a:ext cx="3145536" cy="685800"/>
           </a:xfrm>
           <a:prstGeom prst="rect">
             <a:avLst/>
@@ -4826,21 +5099,212 @@
       </p:sp>
       <p:sp>
         <p:nvSpPr>
-          <p:cNvPr id="15" name="Shape 13"/>
-          <p:cNvSpPr/>
-          <p:nvPr/>
-        </p:nvSpPr>
-        <p:spPr>
-          <a:xfrm>
-            <a:off x="7909560" y="3520440"/>
-            <a:ext cx="3154680" cy="1737360"/>
+          <p:cNvPr id="13" name="Shape 11"/>
+          <p:cNvSpPr/>
+          <p:nvPr/>
+        </p:nvSpPr>
+        <p:spPr>
+          <a:xfrm>
+            <a:off x="7635240" y="2788920"/>
+            <a:ext cx="3474720" cy="1536192"/>
           </a:xfrm>
           <a:prstGeom prst="roundRect">
             <a:avLst>
-              <a:gd name="adj" fmla="val 6316"/>
+              <a:gd name="adj" fmla="val 7143"/>
             </a:avLst>
           </a:prstGeom>
           <a:solidFill>
+            <a:srgbClr val="FFFFFF">
+              <a:alpha val="88000"/>
+            </a:srgbClr>
+          </a:solidFill>
+          <a:ln w="12700">
+            <a:solidFill>
+              <a:srgbClr val="D6E8F2"/>
+            </a:solidFill>
+            <a:prstDash val="solid"/>
+          </a:ln>
+        </p:spPr>
+      </p:sp>
+      <p:sp>
+        <p:nvSpPr>
+          <p:cNvPr id="14" name="Shape 12"/>
+          <p:cNvSpPr/>
+          <p:nvPr/>
+        </p:nvSpPr>
+        <p:spPr>
+          <a:xfrm>
+            <a:off x="8138160" y="3474720"/>
+            <a:ext cx="256032" cy="411480"/>
+          </a:xfrm>
+          <a:prstGeom prst="rect">
+            <a:avLst/>
+          </a:prstGeom>
+          <a:solidFill>
+            <a:srgbClr val="0068B7"/>
+          </a:solidFill>
+          <a:ln w="12700">
+            <a:solidFill>
+              <a:srgbClr val="0068B7"/>
+            </a:solidFill>
+            <a:prstDash val="solid"/>
+          </a:ln>
+        </p:spPr>
+      </p:sp>
+      <p:sp>
+        <p:nvSpPr>
+          <p:cNvPr id="15" name="Shape 13"/>
+          <p:cNvSpPr/>
+          <p:nvPr/>
+        </p:nvSpPr>
+        <p:spPr>
+          <a:xfrm>
+            <a:off x="8577072" y="3172968"/>
+            <a:ext cx="256032" cy="713232"/>
+          </a:xfrm>
+          <a:prstGeom prst="rect">
+            <a:avLst/>
+          </a:prstGeom>
+          <a:solidFill>
+            <a:srgbClr val="2F8A28"/>
+          </a:solidFill>
+          <a:ln w="12700">
+            <a:solidFill>
+              <a:srgbClr val="2F8A28"/>
+            </a:solidFill>
+            <a:prstDash val="solid"/>
+          </a:ln>
+        </p:spPr>
+      </p:sp>
+      <p:sp>
+        <p:nvSpPr>
+          <p:cNvPr id="16" name="Shape 14"/>
+          <p:cNvSpPr/>
+          <p:nvPr/>
+        </p:nvSpPr>
+        <p:spPr>
+          <a:xfrm>
+            <a:off x="9015984" y="2880360"/>
+            <a:ext cx="256032" cy="1005840"/>
+          </a:xfrm>
+          <a:prstGeom prst="rect">
+            <a:avLst/>
+          </a:prstGeom>
+          <a:solidFill>
+            <a:srgbClr val="D69A2D"/>
+          </a:solidFill>
+          <a:ln w="12700">
+            <a:solidFill>
+              <a:srgbClr val="D69A2D"/>
+            </a:solidFill>
+            <a:prstDash val="solid"/>
+          </a:ln>
+        </p:spPr>
+      </p:sp>
+      <p:sp>
+        <p:nvSpPr>
+          <p:cNvPr id="17" name="Shape 15"/>
+          <p:cNvSpPr/>
+          <p:nvPr/>
+        </p:nvSpPr>
+        <p:spPr>
+          <a:xfrm>
+            <a:off x="9454896" y="3319272"/>
+            <a:ext cx="256032" cy="566928"/>
+          </a:xfrm>
+          <a:prstGeom prst="rect">
+            <a:avLst/>
+          </a:prstGeom>
+          <a:solidFill>
+            <a:srgbClr val="6A4CA3"/>
+          </a:solidFill>
+          <a:ln w="12700">
+            <a:solidFill>
+              <a:srgbClr val="6A4CA3"/>
+            </a:solidFill>
+            <a:prstDash val="solid"/>
+          </a:ln>
+        </p:spPr>
+      </p:sp>
+      <p:sp>
+        <p:nvSpPr>
+          <p:cNvPr id="18" name="Shape 16"/>
+          <p:cNvSpPr/>
+          <p:nvPr/>
+        </p:nvSpPr>
+        <p:spPr>
+          <a:xfrm>
+            <a:off x="8019288" y="3886200"/>
+            <a:ext cx="2706624" cy="0"/>
+          </a:xfrm>
+          <a:prstGeom prst="line">
+            <a:avLst/>
+          </a:prstGeom>
+          <a:noFill/>
+          <a:ln w="15240">
+            <a:solidFill>
+              <a:srgbClr val="003A63"/>
+            </a:solidFill>
+            <a:prstDash val="solid"/>
+          </a:ln>
+        </p:spPr>
+      </p:sp>
+      <p:sp>
+        <p:nvSpPr>
+          <p:cNvPr id="19" name="Text 17"/>
+          <p:cNvSpPr/>
+          <p:nvPr/>
+        </p:nvSpPr>
+        <p:spPr>
+          <a:xfrm>
+            <a:off x="7863840" y="3017520"/>
+            <a:ext cx="3017520" cy="201168"/>
+          </a:xfrm>
+          <a:prstGeom prst="rect">
+            <a:avLst/>
+          </a:prstGeom>
+          <a:noFill/>
+          <a:ln/>
+        </p:spPr>
+        <p:txBody>
+          <a:bodyPr wrap="square" lIns="0" tIns="0" rIns="0" bIns="0" rtlCol="0" anchor="ctr"/>
+          <a:lstStyle/>
+          <a:p>
+            <a:pPr algn="ctr" indent="0" marL="0">
+              <a:buNone/>
+            </a:pPr>
+            <a:r>
+              <a:rPr lang="en-US" sz="1050" b="1" dirty="0">
+                <a:solidFill>
+                  <a:srgbClr val="003A63"/>
+                </a:solidFill>
+                <a:latin typeface="Aptos" pitchFamily="34" charset="0"/>
+                <a:ea typeface="Aptos" pitchFamily="34" charset="-122"/>
+                <a:cs typeface="Aptos" pitchFamily="34" charset="-120"/>
+              </a:rPr>
+              <a:t>Measure and monitor</a:t>
+            </a:r>
+            <a:endParaRPr lang="en-US" sz="1050" dirty="0"/>
+          </a:p>
+        </p:txBody>
+      </p:sp>
+      <p:sp>
+        <p:nvSpPr>
+          <p:cNvPr id="20" name="Shape 18"/>
+          <p:cNvSpPr/>
+          <p:nvPr/>
+        </p:nvSpPr>
+        <p:spPr>
+          <a:xfrm>
+            <a:off x="7635240" y="4498848"/>
+            <a:ext cx="3474720" cy="1143000"/>
+          </a:xfrm>
+          <a:prstGeom prst="roundRect">
+            <a:avLst>
+              <a:gd name="adj" fmla="val 9600"/>
+            </a:avLst>
+          </a:prstGeom>
+          <a:solidFill>
             <a:srgbClr val="EAF6F8"/>
           </a:solidFill>
           <a:ln w="12700">
@@ -4853,14 +5317,14 @@
       </p:sp>
       <p:sp>
         <p:nvSpPr>
-          <p:cNvPr id="16" name="Text 14"/>
-          <p:cNvSpPr/>
-          <p:nvPr/>
-        </p:nvSpPr>
-        <p:spPr>
-          <a:xfrm>
-            <a:off x="8074152" y="3666744"/>
-            <a:ext cx="2825496" cy="256032"/>
+          <p:cNvPr id="21" name="Text 19"/>
+          <p:cNvSpPr/>
+          <p:nvPr/>
+        </p:nvSpPr>
+        <p:spPr>
+          <a:xfrm>
+            <a:off x="7799832" y="4645152"/>
+            <a:ext cx="3145536" cy="256032"/>
           </a:xfrm>
           <a:prstGeom prst="rect">
             <a:avLst/>
@@ -4884,7 +5348,7 @@
                 <a:ea typeface="Aptos" pitchFamily="34" charset="-122"/>
                 <a:cs typeface="Aptos" pitchFamily="34" charset="-120"/>
               </a:rPr>
-              <a:t>Use this for</a:t>
+              <a:t>How to validate</a:t>
             </a:r>
             <a:endParaRPr lang="en-US" sz="1300" dirty="0"/>
           </a:p>
@@ -4892,14 +5356,14 @@
       </p:sp>
       <p:sp>
         <p:nvSpPr>
-          <p:cNvPr id="17" name="Text 15"/>
-          <p:cNvSpPr/>
-          <p:nvPr/>
-        </p:nvSpPr>
-        <p:spPr>
-          <a:xfrm>
-            <a:off x="8074152" y="4023360"/>
-            <a:ext cx="2825496" cy="1097280"/>
+          <p:cNvPr id="22" name="Text 20"/>
+          <p:cNvSpPr/>
+          <p:nvPr/>
+        </p:nvSpPr>
+        <p:spPr>
+          <a:xfrm>
+            <a:off x="7799832" y="5001768"/>
+            <a:ext cx="3145536" cy="502920"/>
           </a:xfrm>
           <a:prstGeom prst="rect">
             <a:avLst/>
@@ -4925,7 +5389,7 @@
                 <a:ea typeface="Aptos" pitchFamily="34" charset="-122"/>
                 <a:cs typeface="Aptos" pitchFamily="34" charset="-120"/>
               </a:rPr>
-              <a:t>Connect the concept to public health decisions, safeguards, documentation, or implementation work.</a:t>
+              <a:t>Connect the concept to data quality, model performance, validation evidence, monitoring measures, and decisions that remain under human control.</a:t>
             </a:r>
             <a:endParaRPr lang="en-US" sz="1550" dirty="0"/>
           </a:p>
@@ -5099,8 +5563,8 @@
         </p:nvSpPr>
         <p:spPr>
           <a:xfrm>
-            <a:off x="9966960" y="6537960"/>
-            <a:ext cx="1645920" cy="201168"/>
+            <a:off x="9646920" y="6537960"/>
+            <a:ext cx="1965960" cy="201168"/>
           </a:xfrm>
           <a:prstGeom prst="rect">
             <a:avLst/>
@@ -5124,7 +5588,7 @@
                 <a:ea typeface="Aptos" pitchFamily="34" charset="-122"/>
                 <a:cs typeface="Aptos" pitchFamily="34" charset="-120"/>
               </a:rPr>
-              <a:t>Â© Paula Soper</a:t>
+              <a:t>Copyright Paula Soper</a:t>
             </a:r>
             <a:endParaRPr lang="en-US" sz="800" dirty="0"/>
           </a:p>
@@ -5171,77 +5635,13 @@
       </p:sp>
       <p:sp>
         <p:nvSpPr>
-          <p:cNvPr id="8" name="Shape 6"/>
+          <p:cNvPr id="8" name="Text 6"/>
           <p:cNvSpPr/>
           <p:nvPr/>
         </p:nvSpPr>
         <p:spPr>
           <a:xfrm>
             <a:off x="640080" y="658368"/>
-            <a:ext cx="420624" cy="420624"/>
-          </a:xfrm>
-          <a:prstGeom prst="ellipse">
-            <a:avLst/>
-          </a:prstGeom>
-          <a:solidFill>
-            <a:srgbClr val="0068B7"/>
-          </a:solidFill>
-          <a:ln w="12700">
-            <a:solidFill>
-              <a:srgbClr val="0068B7"/>
-            </a:solidFill>
-            <a:prstDash val="solid"/>
-          </a:ln>
-        </p:spPr>
-      </p:sp>
-      <p:sp>
-        <p:nvSpPr>
-          <p:cNvPr id="9" name="Text 7"/>
-          <p:cNvSpPr/>
-          <p:nvPr/>
-        </p:nvSpPr>
-        <p:spPr>
-          <a:xfrm>
-            <a:off x="640080" y="731520"/>
-            <a:ext cx="420624" cy="164592"/>
-          </a:xfrm>
-          <a:prstGeom prst="rect">
-            <a:avLst/>
-          </a:prstGeom>
-          <a:noFill/>
-          <a:ln/>
-        </p:spPr>
-        <p:txBody>
-          <a:bodyPr wrap="square" lIns="0" tIns="0" rIns="0" bIns="0" rtlCol="0" anchor="ctr"/>
-          <a:lstStyle/>
-          <a:p>
-            <a:pPr algn="ctr" indent="0" marL="0">
-              <a:buNone/>
-            </a:pPr>
-            <a:r>
-              <a:rPr lang="en-US" sz="1100" b="1" dirty="0">
-                <a:solidFill>
-                  <a:srgbClr val="FFFFFF"/>
-                </a:solidFill>
-                <a:latin typeface="Aptos" pitchFamily="34" charset="0"/>
-                <a:ea typeface="Aptos" pitchFamily="34" charset="-122"/>
-                <a:cs typeface="Aptos" pitchFamily="34" charset="-120"/>
-              </a:rPr>
-              <a:t>8</a:t>
-            </a:r>
-            <a:endParaRPr lang="en-US" sz="1100" dirty="0"/>
-          </a:p>
-        </p:txBody>
-      </p:sp>
-      <p:sp>
-        <p:nvSpPr>
-          <p:cNvPr id="10" name="Text 8"/>
-          <p:cNvSpPr/>
-          <p:nvPr/>
-        </p:nvSpPr>
-        <p:spPr>
-          <a:xfrm>
-            <a:off x="640080" y="621792"/>
             <a:ext cx="10881360" cy="713232"/>
           </a:xfrm>
           <a:prstGeom prst="rect">
@@ -5276,14 +5676,14 @@
       </p:sp>
       <p:sp>
         <p:nvSpPr>
-          <p:cNvPr id="11" name="Text 9"/>
+          <p:cNvPr id="9" name="Text 7"/>
           <p:cNvSpPr/>
           <p:nvPr/>
         </p:nvSpPr>
         <p:spPr>
           <a:xfrm>
             <a:off x="868680" y="1508760"/>
-            <a:ext cx="6537960" cy="4160520"/>
+            <a:ext cx="6309360" cy="4160520"/>
           </a:xfrm>
           <a:prstGeom prst="rect">
             <a:avLst/>
@@ -5342,18 +5742,18 @@
       </p:sp>
       <p:sp>
         <p:nvSpPr>
-          <p:cNvPr id="12" name="Shape 10"/>
-          <p:cNvSpPr/>
-          <p:nvPr/>
-        </p:nvSpPr>
-        <p:spPr>
-          <a:xfrm>
-            <a:off x="7909560" y="1417320"/>
-            <a:ext cx="3154680" cy="1828800"/>
+          <p:cNvPr id="10" name="Shape 8"/>
+          <p:cNvSpPr/>
+          <p:nvPr/>
+        </p:nvSpPr>
+        <p:spPr>
+          <a:xfrm>
+            <a:off x="7635240" y="1325880"/>
+            <a:ext cx="3474720" cy="1325880"/>
           </a:xfrm>
           <a:prstGeom prst="roundRect">
             <a:avLst>
-              <a:gd name="adj" fmla="val 6000"/>
+              <a:gd name="adj" fmla="val 8276"/>
             </a:avLst>
           </a:prstGeom>
           <a:solidFill>
@@ -5369,14 +5769,14 @@
       </p:sp>
       <p:sp>
         <p:nvSpPr>
-          <p:cNvPr id="13" name="Text 11"/>
-          <p:cNvSpPr/>
-          <p:nvPr/>
-        </p:nvSpPr>
-        <p:spPr>
-          <a:xfrm>
-            <a:off x="8074152" y="1563624"/>
-            <a:ext cx="2825496" cy="256032"/>
+          <p:cNvPr id="11" name="Text 9"/>
+          <p:cNvSpPr/>
+          <p:nvPr/>
+        </p:nvSpPr>
+        <p:spPr>
+          <a:xfrm>
+            <a:off x="7799832" y="1472184"/>
+            <a:ext cx="3145536" cy="256032"/>
           </a:xfrm>
           <a:prstGeom prst="rect">
             <a:avLst/>
@@ -5400,7 +5800,7 @@
                 <a:ea typeface="Aptos" pitchFamily="34" charset="-122"/>
                 <a:cs typeface="Aptos" pitchFamily="34" charset="-120"/>
               </a:rPr>
-              <a:t>Key idea</a:t>
+              <a:t>Risk check</a:t>
             </a:r>
             <a:endParaRPr lang="en-US" sz="1300" dirty="0"/>
           </a:p>
@@ -5408,14 +5808,14 @@
       </p:sp>
       <p:sp>
         <p:nvSpPr>
-          <p:cNvPr id="14" name="Text 12"/>
-          <p:cNvSpPr/>
-          <p:nvPr/>
-        </p:nvSpPr>
-        <p:spPr>
-          <a:xfrm>
-            <a:off x="8074152" y="1920240"/>
-            <a:ext cx="2825496" cy="1188720"/>
+          <p:cNvPr id="12" name="Text 10"/>
+          <p:cNvSpPr/>
+          <p:nvPr/>
+        </p:nvSpPr>
+        <p:spPr>
+          <a:xfrm>
+            <a:off x="7799832" y="1828800"/>
+            <a:ext cx="3145536" cy="685800"/>
           </a:xfrm>
           <a:prstGeom prst="rect">
             <a:avLst/>
@@ -5449,21 +5849,174 @@
       </p:sp>
       <p:sp>
         <p:nvSpPr>
-          <p:cNvPr id="15" name="Shape 13"/>
-          <p:cNvSpPr/>
-          <p:nvPr/>
-        </p:nvSpPr>
-        <p:spPr>
-          <a:xfrm>
-            <a:off x="7909560" y="3520440"/>
-            <a:ext cx="3154680" cy="1737360"/>
+          <p:cNvPr id="13" name="Shape 11"/>
+          <p:cNvSpPr/>
+          <p:nvPr/>
+        </p:nvSpPr>
+        <p:spPr>
+          <a:xfrm>
+            <a:off x="7635240" y="2788920"/>
+            <a:ext cx="3474720" cy="1536192"/>
           </a:xfrm>
           <a:prstGeom prst="roundRect">
             <a:avLst>
-              <a:gd name="adj" fmla="val 6316"/>
+              <a:gd name="adj" fmla="val 7143"/>
             </a:avLst>
           </a:prstGeom>
           <a:solidFill>
+            <a:srgbClr val="FFFFFF">
+              <a:alpha val="88000"/>
+            </a:srgbClr>
+          </a:solidFill>
+          <a:ln w="12700">
+            <a:solidFill>
+              <a:srgbClr val="D6E8F2"/>
+            </a:solidFill>
+            <a:prstDash val="solid"/>
+          </a:ln>
+        </p:spPr>
+      </p:sp>
+      <p:sp>
+        <p:nvSpPr>
+          <p:cNvPr id="14" name="Shape 12"/>
+          <p:cNvSpPr/>
+          <p:nvPr/>
+        </p:nvSpPr>
+        <p:spPr>
+          <a:xfrm>
+            <a:off x="8046720" y="3108960"/>
+            <a:ext cx="2651760" cy="896112"/>
+          </a:xfrm>
+          <a:prstGeom prst="arc">
+            <a:avLst/>
+          </a:prstGeom>
+          <a:noFill/>
+          <a:ln w="25400">
+            <a:solidFill>
+              <a:srgbClr val="0068B7"/>
+            </a:solidFill>
+            <a:prstDash val="solid"/>
+          </a:ln>
+        </p:spPr>
+      </p:sp>
+      <p:sp>
+        <p:nvSpPr>
+          <p:cNvPr id="15" name="Text 13"/>
+          <p:cNvSpPr/>
+          <p:nvPr/>
+        </p:nvSpPr>
+        <p:spPr>
+          <a:xfrm>
+            <a:off x="7909560" y="3099816"/>
+            <a:ext cx="2926080" cy="256032"/>
+          </a:xfrm>
+          <a:prstGeom prst="rect">
+            <a:avLst/>
+          </a:prstGeom>
+          <a:noFill/>
+          <a:ln/>
+        </p:spPr>
+        <p:txBody>
+          <a:bodyPr wrap="square" lIns="0" tIns="0" rIns="0" bIns="0" rtlCol="0" anchor="ctr"/>
+          <a:lstStyle/>
+          <a:p>
+            <a:pPr algn="ctr" indent="0" marL="0">
+              <a:buNone/>
+            </a:pPr>
+            <a:r>
+              <a:rPr lang="en-US" sz="1500" b="1" dirty="0">
+                <a:solidFill>
+                  <a:srgbClr val="003A63"/>
+                </a:solidFill>
+                <a:latin typeface="Aptos" pitchFamily="34" charset="0"/>
+                <a:ea typeface="Aptos" pitchFamily="34" charset="-122"/>
+                <a:cs typeface="Aptos" pitchFamily="34" charset="-120"/>
+              </a:rPr>
+              <a:t>Risk</a:t>
+            </a:r>
+            <a:endParaRPr lang="en-US" sz="1500" dirty="0"/>
+          </a:p>
+        </p:txBody>
+      </p:sp>
+      <p:sp>
+        <p:nvSpPr>
+          <p:cNvPr id="16" name="Shape 14"/>
+          <p:cNvSpPr/>
+          <p:nvPr/>
+        </p:nvSpPr>
+        <p:spPr>
+          <a:xfrm>
+            <a:off x="8366760" y="3639312"/>
+            <a:ext cx="2011680" cy="0"/>
+          </a:xfrm>
+          <a:prstGeom prst="line">
+            <a:avLst/>
+          </a:prstGeom>
+          <a:noFill/>
+          <a:ln w="63500">
+            <a:solidFill>
+              <a:srgbClr val="2F8A28"/>
+            </a:solidFill>
+            <a:prstDash val="solid"/>
+          </a:ln>
+        </p:spPr>
+      </p:sp>
+      <p:sp>
+        <p:nvSpPr>
+          <p:cNvPr id="17" name="Text 15"/>
+          <p:cNvSpPr/>
+          <p:nvPr/>
+        </p:nvSpPr>
+        <p:spPr>
+          <a:xfrm>
+            <a:off x="7909560" y="3849624"/>
+            <a:ext cx="2926080" cy="164592"/>
+          </a:xfrm>
+          <a:prstGeom prst="rect">
+            <a:avLst/>
+          </a:prstGeom>
+          <a:noFill/>
+          <a:ln/>
+        </p:spPr>
+        <p:txBody>
+          <a:bodyPr wrap="square" lIns="0" tIns="0" rIns="0" bIns="0" rtlCol="0" anchor="ctr"/>
+          <a:lstStyle/>
+          <a:p>
+            <a:pPr algn="ctr" indent="0" marL="0">
+              <a:buNone/>
+            </a:pPr>
+            <a:r>
+              <a:rPr lang="en-US" sz="900" dirty="0">
+                <a:solidFill>
+                  <a:srgbClr val="003A63"/>
+                </a:solidFill>
+                <a:latin typeface="Aptos" pitchFamily="34" charset="0"/>
+                <a:ea typeface="Aptos" pitchFamily="34" charset="-122"/>
+                <a:cs typeface="Aptos" pitchFamily="34" charset="-120"/>
+              </a:rPr>
+              <a:t>Human review</a:t>
+            </a:r>
+            <a:endParaRPr lang="en-US" sz="900" dirty="0"/>
+          </a:p>
+        </p:txBody>
+      </p:sp>
+      <p:sp>
+        <p:nvSpPr>
+          <p:cNvPr id="18" name="Shape 16"/>
+          <p:cNvSpPr/>
+          <p:nvPr/>
+        </p:nvSpPr>
+        <p:spPr>
+          <a:xfrm>
+            <a:off x="7635240" y="4498848"/>
+            <a:ext cx="3474720" cy="1143000"/>
+          </a:xfrm>
+          <a:prstGeom prst="roundRect">
+            <a:avLst>
+              <a:gd name="adj" fmla="val 9600"/>
+            </a:avLst>
+          </a:prstGeom>
+          <a:solidFill>
             <a:srgbClr val="EAF6F8"/>
           </a:solidFill>
           <a:ln w="12700">
@@ -5476,14 +6029,14 @@
       </p:sp>
       <p:sp>
         <p:nvSpPr>
-          <p:cNvPr id="16" name="Text 14"/>
-          <p:cNvSpPr/>
-          <p:nvPr/>
-        </p:nvSpPr>
-        <p:spPr>
-          <a:xfrm>
-            <a:off x="8074152" y="3666744"/>
-            <a:ext cx="2825496" cy="256032"/>
+          <p:cNvPr id="19" name="Text 17"/>
+          <p:cNvSpPr/>
+          <p:nvPr/>
+        </p:nvSpPr>
+        <p:spPr>
+          <a:xfrm>
+            <a:off x="7799832" y="4645152"/>
+            <a:ext cx="3145536" cy="256032"/>
           </a:xfrm>
           <a:prstGeom prst="rect">
             <a:avLst/>
@@ -5507,7 +6060,7 @@
                 <a:ea typeface="Aptos" pitchFamily="34" charset="-122"/>
                 <a:cs typeface="Aptos" pitchFamily="34" charset="-120"/>
               </a:rPr>
-              <a:t>Use this for</a:t>
+              <a:t>Safeguard to plan</a:t>
             </a:r>
             <a:endParaRPr lang="en-US" sz="1300" dirty="0"/>
           </a:p>
@@ -5515,14 +6068,14 @@
       </p:sp>
       <p:sp>
         <p:nvSpPr>
-          <p:cNvPr id="17" name="Text 15"/>
-          <p:cNvSpPr/>
-          <p:nvPr/>
-        </p:nvSpPr>
-        <p:spPr>
-          <a:xfrm>
-            <a:off x="8074152" y="4023360"/>
-            <a:ext cx="2825496" cy="1097280"/>
+          <p:cNvPr id="20" name="Text 18"/>
+          <p:cNvSpPr/>
+          <p:nvPr/>
+        </p:nvSpPr>
+        <p:spPr>
+          <a:xfrm>
+            <a:off x="7799832" y="5001768"/>
+            <a:ext cx="3145536" cy="502920"/>
           </a:xfrm>
           <a:prstGeom prst="rect">
             <a:avLst/>
@@ -5548,7 +6101,7 @@
                 <a:ea typeface="Aptos" pitchFamily="34" charset="-122"/>
                 <a:cs typeface="Aptos" pitchFamily="34" charset="-120"/>
               </a:rPr>
-              <a:t>Connect the concept to public health decisions, safeguards, documentation, or implementation work.</a:t>
+              <a:t>Identify what could go wrong, who could be affected, what safeguards are needed, and what evidence should be reviewed before use expands.</a:t>
             </a:r>
             <a:endParaRPr lang="en-US" sz="1550" dirty="0"/>
           </a:p>
@@ -5722,8 +6275,8 @@
         </p:nvSpPr>
         <p:spPr>
           <a:xfrm>
-            <a:off x="9966960" y="6537960"/>
-            <a:ext cx="1645920" cy="201168"/>
+            <a:off x="9646920" y="6537960"/>
+            <a:ext cx="1965960" cy="201168"/>
           </a:xfrm>
           <a:prstGeom prst="rect">
             <a:avLst/>
@@ -5747,7 +6300,7 @@
                 <a:ea typeface="Aptos" pitchFamily="34" charset="-122"/>
                 <a:cs typeface="Aptos" pitchFamily="34" charset="-120"/>
               </a:rPr>
-              <a:t>Â© Paula Soper</a:t>
+              <a:t>Copyright Paula Soper</a:t>
             </a:r>
             <a:endParaRPr lang="en-US" sz="800" dirty="0"/>
           </a:p>
@@ -5842,7 +6395,7 @@
         <p:spPr>
           <a:xfrm>
             <a:off x="868680" y="1508760"/>
-            <a:ext cx="6537960" cy="4160520"/>
+            <a:ext cx="6309360" cy="4160520"/>
           </a:xfrm>
           <a:prstGeom prst="rect">
             <a:avLst/>
@@ -5907,12 +6460,12 @@
         </p:nvSpPr>
         <p:spPr>
           <a:xfrm>
-            <a:off x="7909560" y="1417320"/>
-            <a:ext cx="3154680" cy="1828800"/>
+            <a:off x="7635240" y="1325880"/>
+            <a:ext cx="3474720" cy="1325880"/>
           </a:xfrm>
           <a:prstGeom prst="roundRect">
             <a:avLst>
-              <a:gd name="adj" fmla="val 6000"/>
+              <a:gd name="adj" fmla="val 8276"/>
             </a:avLst>
           </a:prstGeom>
           <a:solidFill>
@@ -5934,8 +6487,8 @@
         </p:nvSpPr>
         <p:spPr>
           <a:xfrm>
-            <a:off x="8074152" y="1563624"/>
-            <a:ext cx="2825496" cy="256032"/>
+            <a:off x="7799832" y="1472184"/>
+            <a:ext cx="3145536" cy="256032"/>
           </a:xfrm>
           <a:prstGeom prst="rect">
             <a:avLst/>
@@ -5959,7 +6512,7 @@
                 <a:ea typeface="Aptos" pitchFamily="34" charset="-122"/>
                 <a:cs typeface="Aptos" pitchFamily="34" charset="-120"/>
               </a:rPr>
-              <a:t>Key idea</a:t>
+              <a:t>Risk check</a:t>
             </a:r>
             <a:endParaRPr lang="en-US" sz="1300" dirty="0"/>
           </a:p>
@@ -5973,8 +6526,8 @@
         </p:nvSpPr>
         <p:spPr>
           <a:xfrm>
-            <a:off x="8074152" y="1920240"/>
-            <a:ext cx="2825496" cy="1188720"/>
+            <a:off x="7799832" y="1828800"/>
+            <a:ext cx="3145536" cy="685800"/>
           </a:xfrm>
           <a:prstGeom prst="rect">
             <a:avLst/>
@@ -6014,15 +6567,168 @@
         </p:nvSpPr>
         <p:spPr>
           <a:xfrm>
-            <a:off x="7909560" y="3520440"/>
-            <a:ext cx="3154680" cy="1737360"/>
+            <a:off x="7635240" y="2788920"/>
+            <a:ext cx="3474720" cy="1536192"/>
           </a:xfrm>
           <a:prstGeom prst="roundRect">
             <a:avLst>
-              <a:gd name="adj" fmla="val 6316"/>
+              <a:gd name="adj" fmla="val 7143"/>
             </a:avLst>
           </a:prstGeom>
           <a:solidFill>
+            <a:srgbClr val="FFFFFF">
+              <a:alpha val="88000"/>
+            </a:srgbClr>
+          </a:solidFill>
+          <a:ln w="12700">
+            <a:solidFill>
+              <a:srgbClr val="D6E8F2"/>
+            </a:solidFill>
+            <a:prstDash val="solid"/>
+          </a:ln>
+        </p:spPr>
+      </p:sp>
+      <p:sp>
+        <p:nvSpPr>
+          <p:cNvPr id="14" name="Shape 12"/>
+          <p:cNvSpPr/>
+          <p:nvPr/>
+        </p:nvSpPr>
+        <p:spPr>
+          <a:xfrm>
+            <a:off x="8046720" y="3108960"/>
+            <a:ext cx="2651760" cy="896112"/>
+          </a:xfrm>
+          <a:prstGeom prst="arc">
+            <a:avLst/>
+          </a:prstGeom>
+          <a:noFill/>
+          <a:ln w="25400">
+            <a:solidFill>
+              <a:srgbClr val="0068B7"/>
+            </a:solidFill>
+            <a:prstDash val="solid"/>
+          </a:ln>
+        </p:spPr>
+      </p:sp>
+      <p:sp>
+        <p:nvSpPr>
+          <p:cNvPr id="15" name="Text 13"/>
+          <p:cNvSpPr/>
+          <p:nvPr/>
+        </p:nvSpPr>
+        <p:spPr>
+          <a:xfrm>
+            <a:off x="7909560" y="3099816"/>
+            <a:ext cx="2926080" cy="256032"/>
+          </a:xfrm>
+          <a:prstGeom prst="rect">
+            <a:avLst/>
+          </a:prstGeom>
+          <a:noFill/>
+          <a:ln/>
+        </p:spPr>
+        <p:txBody>
+          <a:bodyPr wrap="square" lIns="0" tIns="0" rIns="0" bIns="0" rtlCol="0" anchor="ctr"/>
+          <a:lstStyle/>
+          <a:p>
+            <a:pPr algn="ctr" indent="0" marL="0">
+              <a:buNone/>
+            </a:pPr>
+            <a:r>
+              <a:rPr lang="en-US" sz="1500" b="1" dirty="0">
+                <a:solidFill>
+                  <a:srgbClr val="003A63"/>
+                </a:solidFill>
+                <a:latin typeface="Aptos" pitchFamily="34" charset="0"/>
+                <a:ea typeface="Aptos" pitchFamily="34" charset="-122"/>
+                <a:cs typeface="Aptos" pitchFamily="34" charset="-120"/>
+              </a:rPr>
+              <a:t>Risk</a:t>
+            </a:r>
+            <a:endParaRPr lang="en-US" sz="1500" dirty="0"/>
+          </a:p>
+        </p:txBody>
+      </p:sp>
+      <p:sp>
+        <p:nvSpPr>
+          <p:cNvPr id="16" name="Shape 14"/>
+          <p:cNvSpPr/>
+          <p:nvPr/>
+        </p:nvSpPr>
+        <p:spPr>
+          <a:xfrm>
+            <a:off x="8366760" y="3639312"/>
+            <a:ext cx="2011680" cy="0"/>
+          </a:xfrm>
+          <a:prstGeom prst="line">
+            <a:avLst/>
+          </a:prstGeom>
+          <a:noFill/>
+          <a:ln w="63500">
+            <a:solidFill>
+              <a:srgbClr val="2F8A28"/>
+            </a:solidFill>
+            <a:prstDash val="solid"/>
+          </a:ln>
+        </p:spPr>
+      </p:sp>
+      <p:sp>
+        <p:nvSpPr>
+          <p:cNvPr id="17" name="Text 15"/>
+          <p:cNvSpPr/>
+          <p:nvPr/>
+        </p:nvSpPr>
+        <p:spPr>
+          <a:xfrm>
+            <a:off x="7909560" y="3849624"/>
+            <a:ext cx="2926080" cy="164592"/>
+          </a:xfrm>
+          <a:prstGeom prst="rect">
+            <a:avLst/>
+          </a:prstGeom>
+          <a:noFill/>
+          <a:ln/>
+        </p:spPr>
+        <p:txBody>
+          <a:bodyPr wrap="square" lIns="0" tIns="0" rIns="0" bIns="0" rtlCol="0" anchor="ctr"/>
+          <a:lstStyle/>
+          <a:p>
+            <a:pPr algn="ctr" indent="0" marL="0">
+              <a:buNone/>
+            </a:pPr>
+            <a:r>
+              <a:rPr lang="en-US" sz="900" dirty="0">
+                <a:solidFill>
+                  <a:srgbClr val="003A63"/>
+                </a:solidFill>
+                <a:latin typeface="Aptos" pitchFamily="34" charset="0"/>
+                <a:ea typeface="Aptos" pitchFamily="34" charset="-122"/>
+                <a:cs typeface="Aptos" pitchFamily="34" charset="-120"/>
+              </a:rPr>
+              <a:t>Human review</a:t>
+            </a:r>
+            <a:endParaRPr lang="en-US" sz="900" dirty="0"/>
+          </a:p>
+        </p:txBody>
+      </p:sp>
+      <p:sp>
+        <p:nvSpPr>
+          <p:cNvPr id="18" name="Shape 16"/>
+          <p:cNvSpPr/>
+          <p:nvPr/>
+        </p:nvSpPr>
+        <p:spPr>
+          <a:xfrm>
+            <a:off x="7635240" y="4498848"/>
+            <a:ext cx="3474720" cy="1143000"/>
+          </a:xfrm>
+          <a:prstGeom prst="roundRect">
+            <a:avLst>
+              <a:gd name="adj" fmla="val 9600"/>
+            </a:avLst>
+          </a:prstGeom>
+          <a:solidFill>
             <a:srgbClr val="EAF6F8"/>
           </a:solidFill>
           <a:ln w="12700">
@@ -6035,14 +6741,14 @@
       </p:sp>
       <p:sp>
         <p:nvSpPr>
-          <p:cNvPr id="14" name="Text 12"/>
-          <p:cNvSpPr/>
-          <p:nvPr/>
-        </p:nvSpPr>
-        <p:spPr>
-          <a:xfrm>
-            <a:off x="8074152" y="3666744"/>
-            <a:ext cx="2825496" cy="256032"/>
+          <p:cNvPr id="19" name="Text 17"/>
+          <p:cNvSpPr/>
+          <p:nvPr/>
+        </p:nvSpPr>
+        <p:spPr>
+          <a:xfrm>
+            <a:off x="7799832" y="4645152"/>
+            <a:ext cx="3145536" cy="256032"/>
           </a:xfrm>
           <a:prstGeom prst="rect">
             <a:avLst/>
@@ -6066,7 +6772,7 @@
                 <a:ea typeface="Aptos" pitchFamily="34" charset="-122"/>
                 <a:cs typeface="Aptos" pitchFamily="34" charset="-120"/>
               </a:rPr>
-              <a:t>Use this for</a:t>
+              <a:t>Safeguard to plan</a:t>
             </a:r>
             <a:endParaRPr lang="en-US" sz="1300" dirty="0"/>
           </a:p>
@@ -6074,14 +6780,14 @@
       </p:sp>
       <p:sp>
         <p:nvSpPr>
-          <p:cNvPr id="15" name="Text 13"/>
-          <p:cNvSpPr/>
-          <p:nvPr/>
-        </p:nvSpPr>
-        <p:spPr>
-          <a:xfrm>
-            <a:off x="8074152" y="4023360"/>
-            <a:ext cx="2825496" cy="1097280"/>
+          <p:cNvPr id="20" name="Text 18"/>
+          <p:cNvSpPr/>
+          <p:nvPr/>
+        </p:nvSpPr>
+        <p:spPr>
+          <a:xfrm>
+            <a:off x="7799832" y="5001768"/>
+            <a:ext cx="3145536" cy="502920"/>
           </a:xfrm>
           <a:prstGeom prst="rect">
             <a:avLst/>
@@ -6107,7 +6813,7 @@
                 <a:ea typeface="Aptos" pitchFamily="34" charset="-122"/>
                 <a:cs typeface="Aptos" pitchFamily="34" charset="-120"/>
               </a:rPr>
-              <a:t>Connect the concept to public health decisions, safeguards, documentation, or implementation work.</a:t>
+              <a:t>Identify what could go wrong, who could be affected, what safeguards are needed, and what evidence should be reviewed before use expands.</a:t>
             </a:r>
             <a:endParaRPr lang="en-US" sz="1550" dirty="0"/>
           </a:p>
@@ -6281,8 +6987,8 @@
         </p:nvSpPr>
         <p:spPr>
           <a:xfrm>
-            <a:off x="9966960" y="6537960"/>
-            <a:ext cx="1645920" cy="201168"/>
+            <a:off x="9646920" y="6537960"/>
+            <a:ext cx="1965960" cy="201168"/>
           </a:xfrm>
           <a:prstGeom prst="rect">
             <a:avLst/>
@@ -6306,7 +7012,7 @@
                 <a:ea typeface="Aptos" pitchFamily="34" charset="-122"/>
                 <a:cs typeface="Aptos" pitchFamily="34" charset="-120"/>
               </a:rPr>
-              <a:t>Â© Paula Soper</a:t>
+              <a:t>Copyright Paula Soper</a:t>
             </a:r>
             <a:endParaRPr lang="en-US" sz="800" dirty="0"/>
           </a:p>
@@ -6353,77 +7059,13 @@
       </p:sp>
       <p:sp>
         <p:nvSpPr>
-          <p:cNvPr id="8" name="Shape 6"/>
+          <p:cNvPr id="8" name="Text 6"/>
           <p:cNvSpPr/>
           <p:nvPr/>
         </p:nvSpPr>
         <p:spPr>
           <a:xfrm>
             <a:off x="640080" y="658368"/>
-            <a:ext cx="420624" cy="420624"/>
-          </a:xfrm>
-          <a:prstGeom prst="ellipse">
-            <a:avLst/>
-          </a:prstGeom>
-          <a:solidFill>
-            <a:srgbClr val="0068B7"/>
-          </a:solidFill>
-          <a:ln w="12700">
-            <a:solidFill>
-              <a:srgbClr val="0068B7"/>
-            </a:solidFill>
-            <a:prstDash val="solid"/>
-          </a:ln>
-        </p:spPr>
-      </p:sp>
-      <p:sp>
-        <p:nvSpPr>
-          <p:cNvPr id="9" name="Text 7"/>
-          <p:cNvSpPr/>
-          <p:nvPr/>
-        </p:nvSpPr>
-        <p:spPr>
-          <a:xfrm>
-            <a:off x="640080" y="731520"/>
-            <a:ext cx="420624" cy="164592"/>
-          </a:xfrm>
-          <a:prstGeom prst="rect">
-            <a:avLst/>
-          </a:prstGeom>
-          <a:noFill/>
-          <a:ln/>
-        </p:spPr>
-        <p:txBody>
-          <a:bodyPr wrap="square" lIns="0" tIns="0" rIns="0" bIns="0" rtlCol="0" anchor="ctr"/>
-          <a:lstStyle/>
-          <a:p>
-            <a:pPr algn="ctr" indent="0" marL="0">
-              <a:buNone/>
-            </a:pPr>
-            <a:r>
-              <a:rPr lang="en-US" sz="1100" b="1" dirty="0">
-                <a:solidFill>
-                  <a:srgbClr val="FFFFFF"/>
-                </a:solidFill>
-                <a:latin typeface="Aptos" pitchFamily="34" charset="0"/>
-                <a:ea typeface="Aptos" pitchFamily="34" charset="-122"/>
-                <a:cs typeface="Aptos" pitchFamily="34" charset="-120"/>
-              </a:rPr>
-              <a:t>9</a:t>
-            </a:r>
-            <a:endParaRPr lang="en-US" sz="1100" dirty="0"/>
-          </a:p>
-        </p:txBody>
-      </p:sp>
-      <p:sp>
-        <p:nvSpPr>
-          <p:cNvPr id="10" name="Text 8"/>
-          <p:cNvSpPr/>
-          <p:nvPr/>
-        </p:nvSpPr>
-        <p:spPr>
-          <a:xfrm>
-            <a:off x="640080" y="621792"/>
             <a:ext cx="10881360" cy="713232"/>
           </a:xfrm>
           <a:prstGeom prst="rect">
@@ -6458,14 +7100,14 @@
       </p:sp>
       <p:sp>
         <p:nvSpPr>
-          <p:cNvPr id="11" name="Text 9"/>
+          <p:cNvPr id="9" name="Text 7"/>
           <p:cNvSpPr/>
           <p:nvPr/>
         </p:nvSpPr>
         <p:spPr>
           <a:xfrm>
             <a:off x="868680" y="1508760"/>
-            <a:ext cx="6537960" cy="4160520"/>
+            <a:ext cx="6309360" cy="4160520"/>
           </a:xfrm>
           <a:prstGeom prst="rect">
             <a:avLst/>
@@ -6524,18 +7166,18 @@
       </p:sp>
       <p:sp>
         <p:nvSpPr>
-          <p:cNvPr id="12" name="Shape 10"/>
-          <p:cNvSpPr/>
-          <p:nvPr/>
-        </p:nvSpPr>
-        <p:spPr>
-          <a:xfrm>
-            <a:off x="7909560" y="1417320"/>
-            <a:ext cx="3154680" cy="1828800"/>
+          <p:cNvPr id="10" name="Shape 8"/>
+          <p:cNvSpPr/>
+          <p:nvPr/>
+        </p:nvSpPr>
+        <p:spPr>
+          <a:xfrm>
+            <a:off x="7635240" y="1325880"/>
+            <a:ext cx="3474720" cy="1325880"/>
           </a:xfrm>
           <a:prstGeom prst="roundRect">
             <a:avLst>
-              <a:gd name="adj" fmla="val 6000"/>
+              <a:gd name="adj" fmla="val 8276"/>
             </a:avLst>
           </a:prstGeom>
           <a:solidFill>
@@ -6551,14 +7193,14 @@
       </p:sp>
       <p:sp>
         <p:nvSpPr>
-          <p:cNvPr id="13" name="Text 11"/>
-          <p:cNvSpPr/>
-          <p:nvPr/>
-        </p:nvSpPr>
-        <p:spPr>
-          <a:xfrm>
-            <a:off x="8074152" y="1563624"/>
-            <a:ext cx="2825496" cy="256032"/>
+          <p:cNvPr id="11" name="Text 9"/>
+          <p:cNvSpPr/>
+          <p:nvPr/>
+        </p:nvSpPr>
+        <p:spPr>
+          <a:xfrm>
+            <a:off x="7799832" y="1472184"/>
+            <a:ext cx="3145536" cy="256032"/>
           </a:xfrm>
           <a:prstGeom prst="rect">
             <a:avLst/>
@@ -6582,7 +7224,7 @@
                 <a:ea typeface="Aptos" pitchFamily="34" charset="-122"/>
                 <a:cs typeface="Aptos" pitchFamily="34" charset="-120"/>
               </a:rPr>
-              <a:t>Key idea</a:t>
+              <a:t>Data decision</a:t>
             </a:r>
             <a:endParaRPr lang="en-US" sz="1300" dirty="0"/>
           </a:p>
@@ -6590,14 +7232,14 @@
       </p:sp>
       <p:sp>
         <p:nvSpPr>
-          <p:cNvPr id="14" name="Text 12"/>
-          <p:cNvSpPr/>
-          <p:nvPr/>
-        </p:nvSpPr>
-        <p:spPr>
-          <a:xfrm>
-            <a:off x="8074152" y="1920240"/>
-            <a:ext cx="2825496" cy="1188720"/>
+          <p:cNvPr id="12" name="Text 10"/>
+          <p:cNvSpPr/>
+          <p:nvPr/>
+        </p:nvSpPr>
+        <p:spPr>
+          <a:xfrm>
+            <a:off x="7799832" y="1828800"/>
+            <a:ext cx="3145536" cy="685800"/>
           </a:xfrm>
           <a:prstGeom prst="rect">
             <a:avLst/>
@@ -6631,21 +7273,212 @@
       </p:sp>
       <p:sp>
         <p:nvSpPr>
-          <p:cNvPr id="15" name="Shape 13"/>
-          <p:cNvSpPr/>
-          <p:nvPr/>
-        </p:nvSpPr>
-        <p:spPr>
-          <a:xfrm>
-            <a:off x="7909560" y="3520440"/>
-            <a:ext cx="3154680" cy="1737360"/>
+          <p:cNvPr id="13" name="Shape 11"/>
+          <p:cNvSpPr/>
+          <p:nvPr/>
+        </p:nvSpPr>
+        <p:spPr>
+          <a:xfrm>
+            <a:off x="7635240" y="2788920"/>
+            <a:ext cx="3474720" cy="1536192"/>
           </a:xfrm>
           <a:prstGeom prst="roundRect">
             <a:avLst>
-              <a:gd name="adj" fmla="val 6316"/>
+              <a:gd name="adj" fmla="val 7143"/>
             </a:avLst>
           </a:prstGeom>
           <a:solidFill>
+            <a:srgbClr val="FFFFFF">
+              <a:alpha val="88000"/>
+            </a:srgbClr>
+          </a:solidFill>
+          <a:ln w="12700">
+            <a:solidFill>
+              <a:srgbClr val="D6E8F2"/>
+            </a:solidFill>
+            <a:prstDash val="solid"/>
+          </a:ln>
+        </p:spPr>
+      </p:sp>
+      <p:sp>
+        <p:nvSpPr>
+          <p:cNvPr id="14" name="Shape 12"/>
+          <p:cNvSpPr/>
+          <p:nvPr/>
+        </p:nvSpPr>
+        <p:spPr>
+          <a:xfrm>
+            <a:off x="8138160" y="3474720"/>
+            <a:ext cx="256032" cy="411480"/>
+          </a:xfrm>
+          <a:prstGeom prst="rect">
+            <a:avLst/>
+          </a:prstGeom>
+          <a:solidFill>
+            <a:srgbClr val="0068B7"/>
+          </a:solidFill>
+          <a:ln w="12700">
+            <a:solidFill>
+              <a:srgbClr val="0068B7"/>
+            </a:solidFill>
+            <a:prstDash val="solid"/>
+          </a:ln>
+        </p:spPr>
+      </p:sp>
+      <p:sp>
+        <p:nvSpPr>
+          <p:cNvPr id="15" name="Shape 13"/>
+          <p:cNvSpPr/>
+          <p:nvPr/>
+        </p:nvSpPr>
+        <p:spPr>
+          <a:xfrm>
+            <a:off x="8577072" y="3172968"/>
+            <a:ext cx="256032" cy="713232"/>
+          </a:xfrm>
+          <a:prstGeom prst="rect">
+            <a:avLst/>
+          </a:prstGeom>
+          <a:solidFill>
+            <a:srgbClr val="2F8A28"/>
+          </a:solidFill>
+          <a:ln w="12700">
+            <a:solidFill>
+              <a:srgbClr val="2F8A28"/>
+            </a:solidFill>
+            <a:prstDash val="solid"/>
+          </a:ln>
+        </p:spPr>
+      </p:sp>
+      <p:sp>
+        <p:nvSpPr>
+          <p:cNvPr id="16" name="Shape 14"/>
+          <p:cNvSpPr/>
+          <p:nvPr/>
+        </p:nvSpPr>
+        <p:spPr>
+          <a:xfrm>
+            <a:off x="9015984" y="2880360"/>
+            <a:ext cx="256032" cy="1005840"/>
+          </a:xfrm>
+          <a:prstGeom prst="rect">
+            <a:avLst/>
+          </a:prstGeom>
+          <a:solidFill>
+            <a:srgbClr val="D69A2D"/>
+          </a:solidFill>
+          <a:ln w="12700">
+            <a:solidFill>
+              <a:srgbClr val="D69A2D"/>
+            </a:solidFill>
+            <a:prstDash val="solid"/>
+          </a:ln>
+        </p:spPr>
+      </p:sp>
+      <p:sp>
+        <p:nvSpPr>
+          <p:cNvPr id="17" name="Shape 15"/>
+          <p:cNvSpPr/>
+          <p:nvPr/>
+        </p:nvSpPr>
+        <p:spPr>
+          <a:xfrm>
+            <a:off x="9454896" y="3319272"/>
+            <a:ext cx="256032" cy="566928"/>
+          </a:xfrm>
+          <a:prstGeom prst="rect">
+            <a:avLst/>
+          </a:prstGeom>
+          <a:solidFill>
+            <a:srgbClr val="6A4CA3"/>
+          </a:solidFill>
+          <a:ln w="12700">
+            <a:solidFill>
+              <a:srgbClr val="6A4CA3"/>
+            </a:solidFill>
+            <a:prstDash val="solid"/>
+          </a:ln>
+        </p:spPr>
+      </p:sp>
+      <p:sp>
+        <p:nvSpPr>
+          <p:cNvPr id="18" name="Shape 16"/>
+          <p:cNvSpPr/>
+          <p:nvPr/>
+        </p:nvSpPr>
+        <p:spPr>
+          <a:xfrm>
+            <a:off x="8019288" y="3886200"/>
+            <a:ext cx="2706624" cy="0"/>
+          </a:xfrm>
+          <a:prstGeom prst="line">
+            <a:avLst/>
+          </a:prstGeom>
+          <a:noFill/>
+          <a:ln w="15240">
+            <a:solidFill>
+              <a:srgbClr val="003A63"/>
+            </a:solidFill>
+            <a:prstDash val="solid"/>
+          </a:ln>
+        </p:spPr>
+      </p:sp>
+      <p:sp>
+        <p:nvSpPr>
+          <p:cNvPr id="19" name="Text 17"/>
+          <p:cNvSpPr/>
+          <p:nvPr/>
+        </p:nvSpPr>
+        <p:spPr>
+          <a:xfrm>
+            <a:off x="7863840" y="3017520"/>
+            <a:ext cx="3017520" cy="201168"/>
+          </a:xfrm>
+          <a:prstGeom prst="rect">
+            <a:avLst/>
+          </a:prstGeom>
+          <a:noFill/>
+          <a:ln/>
+        </p:spPr>
+        <p:txBody>
+          <a:bodyPr wrap="square" lIns="0" tIns="0" rIns="0" bIns="0" rtlCol="0" anchor="ctr"/>
+          <a:lstStyle/>
+          <a:p>
+            <a:pPr algn="ctr" indent="0" marL="0">
+              <a:buNone/>
+            </a:pPr>
+            <a:r>
+              <a:rPr lang="en-US" sz="1050" b="1" dirty="0">
+                <a:solidFill>
+                  <a:srgbClr val="003A63"/>
+                </a:solidFill>
+                <a:latin typeface="Aptos" pitchFamily="34" charset="0"/>
+                <a:ea typeface="Aptos" pitchFamily="34" charset="-122"/>
+                <a:cs typeface="Aptos" pitchFamily="34" charset="-120"/>
+              </a:rPr>
+              <a:t>Measure and monitor</a:t>
+            </a:r>
+            <a:endParaRPr lang="en-US" sz="1050" dirty="0"/>
+          </a:p>
+        </p:txBody>
+      </p:sp>
+      <p:sp>
+        <p:nvSpPr>
+          <p:cNvPr id="20" name="Shape 18"/>
+          <p:cNvSpPr/>
+          <p:nvPr/>
+        </p:nvSpPr>
+        <p:spPr>
+          <a:xfrm>
+            <a:off x="7635240" y="4498848"/>
+            <a:ext cx="3474720" cy="1143000"/>
+          </a:xfrm>
+          <a:prstGeom prst="roundRect">
+            <a:avLst>
+              <a:gd name="adj" fmla="val 9600"/>
+            </a:avLst>
+          </a:prstGeom>
+          <a:solidFill>
             <a:srgbClr val="EAF6F8"/>
           </a:solidFill>
           <a:ln w="12700">
@@ -6658,14 +7491,14 @@
       </p:sp>
       <p:sp>
         <p:nvSpPr>
-          <p:cNvPr id="16" name="Text 14"/>
-          <p:cNvSpPr/>
-          <p:nvPr/>
-        </p:nvSpPr>
-        <p:spPr>
-          <a:xfrm>
-            <a:off x="8074152" y="3666744"/>
-            <a:ext cx="2825496" cy="256032"/>
+          <p:cNvPr id="21" name="Text 19"/>
+          <p:cNvSpPr/>
+          <p:nvPr/>
+        </p:nvSpPr>
+        <p:spPr>
+          <a:xfrm>
+            <a:off x="7799832" y="4645152"/>
+            <a:ext cx="3145536" cy="256032"/>
           </a:xfrm>
           <a:prstGeom prst="rect">
             <a:avLst/>
@@ -6689,7 +7522,7 @@
                 <a:ea typeface="Aptos" pitchFamily="34" charset="-122"/>
                 <a:cs typeface="Aptos" pitchFamily="34" charset="-120"/>
               </a:rPr>
-              <a:t>Use this for</a:t>
+              <a:t>How to validate</a:t>
             </a:r>
             <a:endParaRPr lang="en-US" sz="1300" dirty="0"/>
           </a:p>
@@ -6697,14 +7530,14 @@
       </p:sp>
       <p:sp>
         <p:nvSpPr>
-          <p:cNvPr id="17" name="Text 15"/>
-          <p:cNvSpPr/>
-          <p:nvPr/>
-        </p:nvSpPr>
-        <p:spPr>
-          <a:xfrm>
-            <a:off x="8074152" y="4023360"/>
-            <a:ext cx="2825496" cy="1097280"/>
+          <p:cNvPr id="22" name="Text 20"/>
+          <p:cNvSpPr/>
+          <p:nvPr/>
+        </p:nvSpPr>
+        <p:spPr>
+          <a:xfrm>
+            <a:off x="7799832" y="5001768"/>
+            <a:ext cx="3145536" cy="502920"/>
           </a:xfrm>
           <a:prstGeom prst="rect">
             <a:avLst/>
@@ -6730,7 +7563,7 @@
                 <a:ea typeface="Aptos" pitchFamily="34" charset="-122"/>
                 <a:cs typeface="Aptos" pitchFamily="34" charset="-120"/>
               </a:rPr>
-              <a:t>Connect the concept to public health decisions, safeguards, documentation, or implementation work.</a:t>
+              <a:t>Connect the concept to data quality, model performance, validation evidence, monitoring measures, and decisions that remain under human control.</a:t>
             </a:r>
             <a:endParaRPr lang="en-US" sz="1550" dirty="0"/>
           </a:p>
@@ -6904,8 +7737,8 @@
         </p:nvSpPr>
         <p:spPr>
           <a:xfrm>
-            <a:off x="9966960" y="6537960"/>
-            <a:ext cx="1645920" cy="201168"/>
+            <a:off x="9646920" y="6537960"/>
+            <a:ext cx="1965960" cy="201168"/>
           </a:xfrm>
           <a:prstGeom prst="rect">
             <a:avLst/>
@@ -6929,7 +7762,7 @@
                 <a:ea typeface="Aptos" pitchFamily="34" charset="-122"/>
                 <a:cs typeface="Aptos" pitchFamily="34" charset="-120"/>
               </a:rPr>
-              <a:t>Â© Paula Soper</a:t>
+              <a:t>Copyright Paula Soper</a:t>
             </a:r>
             <a:endParaRPr lang="en-US" sz="800" dirty="0"/>
           </a:p>
@@ -6976,77 +7809,13 @@
       </p:sp>
       <p:sp>
         <p:nvSpPr>
-          <p:cNvPr id="8" name="Shape 6"/>
+          <p:cNvPr id="8" name="Text 6"/>
           <p:cNvSpPr/>
           <p:nvPr/>
         </p:nvSpPr>
         <p:spPr>
           <a:xfrm>
             <a:off x="640080" y="658368"/>
-            <a:ext cx="420624" cy="420624"/>
-          </a:xfrm>
-          <a:prstGeom prst="ellipse">
-            <a:avLst/>
-          </a:prstGeom>
-          <a:solidFill>
-            <a:srgbClr val="0068B7"/>
-          </a:solidFill>
-          <a:ln w="12700">
-            <a:solidFill>
-              <a:srgbClr val="0068B7"/>
-            </a:solidFill>
-            <a:prstDash val="solid"/>
-          </a:ln>
-        </p:spPr>
-      </p:sp>
-      <p:sp>
-        <p:nvSpPr>
-          <p:cNvPr id="9" name="Text 7"/>
-          <p:cNvSpPr/>
-          <p:nvPr/>
-        </p:nvSpPr>
-        <p:spPr>
-          <a:xfrm>
-            <a:off x="640080" y="731520"/>
-            <a:ext cx="420624" cy="164592"/>
-          </a:xfrm>
-          <a:prstGeom prst="rect">
-            <a:avLst/>
-          </a:prstGeom>
-          <a:noFill/>
-          <a:ln/>
-        </p:spPr>
-        <p:txBody>
-          <a:bodyPr wrap="square" lIns="0" tIns="0" rIns="0" bIns="0" rtlCol="0" anchor="ctr"/>
-          <a:lstStyle/>
-          <a:p>
-            <a:pPr algn="ctr" indent="0" marL="0">
-              <a:buNone/>
-            </a:pPr>
-            <a:r>
-              <a:rPr lang="en-US" sz="1100" b="1" dirty="0">
-                <a:solidFill>
-                  <a:srgbClr val="FFFFFF"/>
-                </a:solidFill>
-                <a:latin typeface="Aptos" pitchFamily="34" charset="0"/>
-                <a:ea typeface="Aptos" pitchFamily="34" charset="-122"/>
-                <a:cs typeface="Aptos" pitchFamily="34" charset="-120"/>
-              </a:rPr>
-              <a:t>10</a:t>
-            </a:r>
-            <a:endParaRPr lang="en-US" sz="1100" dirty="0"/>
-          </a:p>
-        </p:txBody>
-      </p:sp>
-      <p:sp>
-        <p:nvSpPr>
-          <p:cNvPr id="10" name="Text 8"/>
-          <p:cNvSpPr/>
-          <p:nvPr/>
-        </p:nvSpPr>
-        <p:spPr>
-          <a:xfrm>
-            <a:off x="640080" y="621792"/>
             <a:ext cx="10881360" cy="713232"/>
           </a:xfrm>
           <a:prstGeom prst="rect">
@@ -7081,14 +7850,14 @@
       </p:sp>
       <p:sp>
         <p:nvSpPr>
-          <p:cNvPr id="11" name="Text 9"/>
+          <p:cNvPr id="9" name="Text 7"/>
           <p:cNvSpPr/>
           <p:nvPr/>
         </p:nvSpPr>
         <p:spPr>
           <a:xfrm>
             <a:off x="868680" y="1508760"/>
-            <a:ext cx="6537960" cy="4160520"/>
+            <a:ext cx="6309360" cy="4160520"/>
           </a:xfrm>
           <a:prstGeom prst="rect">
             <a:avLst/>
@@ -7147,18 +7916,18 @@
       </p:sp>
       <p:sp>
         <p:nvSpPr>
-          <p:cNvPr id="12" name="Shape 10"/>
-          <p:cNvSpPr/>
-          <p:nvPr/>
-        </p:nvSpPr>
-        <p:spPr>
-          <a:xfrm>
-            <a:off x="7909560" y="1417320"/>
-            <a:ext cx="3154680" cy="1828800"/>
+          <p:cNvPr id="10" name="Shape 8"/>
+          <p:cNvSpPr/>
+          <p:nvPr/>
+        </p:nvSpPr>
+        <p:spPr>
+          <a:xfrm>
+            <a:off x="7635240" y="1325880"/>
+            <a:ext cx="3474720" cy="1325880"/>
           </a:xfrm>
           <a:prstGeom prst="roundRect">
             <a:avLst>
-              <a:gd name="adj" fmla="val 6000"/>
+              <a:gd name="adj" fmla="val 8276"/>
             </a:avLst>
           </a:prstGeom>
           <a:solidFill>
@@ -7174,14 +7943,14 @@
       </p:sp>
       <p:sp>
         <p:nvSpPr>
-          <p:cNvPr id="13" name="Text 11"/>
-          <p:cNvSpPr/>
-          <p:nvPr/>
-        </p:nvSpPr>
-        <p:spPr>
-          <a:xfrm>
-            <a:off x="8074152" y="1563624"/>
-            <a:ext cx="2825496" cy="256032"/>
+          <p:cNvPr id="11" name="Text 9"/>
+          <p:cNvSpPr/>
+          <p:nvPr/>
+        </p:nvSpPr>
+        <p:spPr>
+          <a:xfrm>
+            <a:off x="7799832" y="1472184"/>
+            <a:ext cx="3145536" cy="256032"/>
           </a:xfrm>
           <a:prstGeom prst="rect">
             <a:avLst/>
@@ -7205,7 +7974,7 @@
                 <a:ea typeface="Aptos" pitchFamily="34" charset="-122"/>
                 <a:cs typeface="Aptos" pitchFamily="34" charset="-120"/>
               </a:rPr>
-              <a:t>Key idea</a:t>
+              <a:t>Data decision</a:t>
             </a:r>
             <a:endParaRPr lang="en-US" sz="1300" dirty="0"/>
           </a:p>
@@ -7213,14 +7982,14 @@
       </p:sp>
       <p:sp>
         <p:nvSpPr>
-          <p:cNvPr id="14" name="Text 12"/>
-          <p:cNvSpPr/>
-          <p:nvPr/>
-        </p:nvSpPr>
-        <p:spPr>
-          <a:xfrm>
-            <a:off x="8074152" y="1920240"/>
-            <a:ext cx="2825496" cy="1188720"/>
+          <p:cNvPr id="12" name="Text 10"/>
+          <p:cNvSpPr/>
+          <p:nvPr/>
+        </p:nvSpPr>
+        <p:spPr>
+          <a:xfrm>
+            <a:off x="7799832" y="1828800"/>
+            <a:ext cx="3145536" cy="685800"/>
           </a:xfrm>
           <a:prstGeom prst="rect">
             <a:avLst/>
@@ -7254,21 +8023,212 @@
       </p:sp>
       <p:sp>
         <p:nvSpPr>
-          <p:cNvPr id="15" name="Shape 13"/>
-          <p:cNvSpPr/>
-          <p:nvPr/>
-        </p:nvSpPr>
-        <p:spPr>
-          <a:xfrm>
-            <a:off x="7909560" y="3520440"/>
-            <a:ext cx="3154680" cy="1737360"/>
+          <p:cNvPr id="13" name="Shape 11"/>
+          <p:cNvSpPr/>
+          <p:nvPr/>
+        </p:nvSpPr>
+        <p:spPr>
+          <a:xfrm>
+            <a:off x="7635240" y="2788920"/>
+            <a:ext cx="3474720" cy="1536192"/>
           </a:xfrm>
           <a:prstGeom prst="roundRect">
             <a:avLst>
-              <a:gd name="adj" fmla="val 6316"/>
+              <a:gd name="adj" fmla="val 7143"/>
             </a:avLst>
           </a:prstGeom>
           <a:solidFill>
+            <a:srgbClr val="FFFFFF">
+              <a:alpha val="88000"/>
+            </a:srgbClr>
+          </a:solidFill>
+          <a:ln w="12700">
+            <a:solidFill>
+              <a:srgbClr val="D6E8F2"/>
+            </a:solidFill>
+            <a:prstDash val="solid"/>
+          </a:ln>
+        </p:spPr>
+      </p:sp>
+      <p:sp>
+        <p:nvSpPr>
+          <p:cNvPr id="14" name="Shape 12"/>
+          <p:cNvSpPr/>
+          <p:nvPr/>
+        </p:nvSpPr>
+        <p:spPr>
+          <a:xfrm>
+            <a:off x="8138160" y="3474720"/>
+            <a:ext cx="256032" cy="411480"/>
+          </a:xfrm>
+          <a:prstGeom prst="rect">
+            <a:avLst/>
+          </a:prstGeom>
+          <a:solidFill>
+            <a:srgbClr val="0068B7"/>
+          </a:solidFill>
+          <a:ln w="12700">
+            <a:solidFill>
+              <a:srgbClr val="0068B7"/>
+            </a:solidFill>
+            <a:prstDash val="solid"/>
+          </a:ln>
+        </p:spPr>
+      </p:sp>
+      <p:sp>
+        <p:nvSpPr>
+          <p:cNvPr id="15" name="Shape 13"/>
+          <p:cNvSpPr/>
+          <p:nvPr/>
+        </p:nvSpPr>
+        <p:spPr>
+          <a:xfrm>
+            <a:off x="8577072" y="3172968"/>
+            <a:ext cx="256032" cy="713232"/>
+          </a:xfrm>
+          <a:prstGeom prst="rect">
+            <a:avLst/>
+          </a:prstGeom>
+          <a:solidFill>
+            <a:srgbClr val="2F8A28"/>
+          </a:solidFill>
+          <a:ln w="12700">
+            <a:solidFill>
+              <a:srgbClr val="2F8A28"/>
+            </a:solidFill>
+            <a:prstDash val="solid"/>
+          </a:ln>
+        </p:spPr>
+      </p:sp>
+      <p:sp>
+        <p:nvSpPr>
+          <p:cNvPr id="16" name="Shape 14"/>
+          <p:cNvSpPr/>
+          <p:nvPr/>
+        </p:nvSpPr>
+        <p:spPr>
+          <a:xfrm>
+            <a:off x="9015984" y="2880360"/>
+            <a:ext cx="256032" cy="1005840"/>
+          </a:xfrm>
+          <a:prstGeom prst="rect">
+            <a:avLst/>
+          </a:prstGeom>
+          <a:solidFill>
+            <a:srgbClr val="D69A2D"/>
+          </a:solidFill>
+          <a:ln w="12700">
+            <a:solidFill>
+              <a:srgbClr val="D69A2D"/>
+            </a:solidFill>
+            <a:prstDash val="solid"/>
+          </a:ln>
+        </p:spPr>
+      </p:sp>
+      <p:sp>
+        <p:nvSpPr>
+          <p:cNvPr id="17" name="Shape 15"/>
+          <p:cNvSpPr/>
+          <p:nvPr/>
+        </p:nvSpPr>
+        <p:spPr>
+          <a:xfrm>
+            <a:off x="9454896" y="3319272"/>
+            <a:ext cx="256032" cy="566928"/>
+          </a:xfrm>
+          <a:prstGeom prst="rect">
+            <a:avLst/>
+          </a:prstGeom>
+          <a:solidFill>
+            <a:srgbClr val="6A4CA3"/>
+          </a:solidFill>
+          <a:ln w="12700">
+            <a:solidFill>
+              <a:srgbClr val="6A4CA3"/>
+            </a:solidFill>
+            <a:prstDash val="solid"/>
+          </a:ln>
+        </p:spPr>
+      </p:sp>
+      <p:sp>
+        <p:nvSpPr>
+          <p:cNvPr id="18" name="Shape 16"/>
+          <p:cNvSpPr/>
+          <p:nvPr/>
+        </p:nvSpPr>
+        <p:spPr>
+          <a:xfrm>
+            <a:off x="8019288" y="3886200"/>
+            <a:ext cx="2706624" cy="0"/>
+          </a:xfrm>
+          <a:prstGeom prst="line">
+            <a:avLst/>
+          </a:prstGeom>
+          <a:noFill/>
+          <a:ln w="15240">
+            <a:solidFill>
+              <a:srgbClr val="003A63"/>
+            </a:solidFill>
+            <a:prstDash val="solid"/>
+          </a:ln>
+        </p:spPr>
+      </p:sp>
+      <p:sp>
+        <p:nvSpPr>
+          <p:cNvPr id="19" name="Text 17"/>
+          <p:cNvSpPr/>
+          <p:nvPr/>
+        </p:nvSpPr>
+        <p:spPr>
+          <a:xfrm>
+            <a:off x="7863840" y="3017520"/>
+            <a:ext cx="3017520" cy="201168"/>
+          </a:xfrm>
+          <a:prstGeom prst="rect">
+            <a:avLst/>
+          </a:prstGeom>
+          <a:noFill/>
+          <a:ln/>
+        </p:spPr>
+        <p:txBody>
+          <a:bodyPr wrap="square" lIns="0" tIns="0" rIns="0" bIns="0" rtlCol="0" anchor="ctr"/>
+          <a:lstStyle/>
+          <a:p>
+            <a:pPr algn="ctr" indent="0" marL="0">
+              <a:buNone/>
+            </a:pPr>
+            <a:r>
+              <a:rPr lang="en-US" sz="1050" b="1" dirty="0">
+                <a:solidFill>
+                  <a:srgbClr val="003A63"/>
+                </a:solidFill>
+                <a:latin typeface="Aptos" pitchFamily="34" charset="0"/>
+                <a:ea typeface="Aptos" pitchFamily="34" charset="-122"/>
+                <a:cs typeface="Aptos" pitchFamily="34" charset="-120"/>
+              </a:rPr>
+              <a:t>Measure and monitor</a:t>
+            </a:r>
+            <a:endParaRPr lang="en-US" sz="1050" dirty="0"/>
+          </a:p>
+        </p:txBody>
+      </p:sp>
+      <p:sp>
+        <p:nvSpPr>
+          <p:cNvPr id="20" name="Shape 18"/>
+          <p:cNvSpPr/>
+          <p:nvPr/>
+        </p:nvSpPr>
+        <p:spPr>
+          <a:xfrm>
+            <a:off x="7635240" y="4498848"/>
+            <a:ext cx="3474720" cy="1143000"/>
+          </a:xfrm>
+          <a:prstGeom prst="roundRect">
+            <a:avLst>
+              <a:gd name="adj" fmla="val 9600"/>
+            </a:avLst>
+          </a:prstGeom>
+          <a:solidFill>
             <a:srgbClr val="EAF6F8"/>
           </a:solidFill>
           <a:ln w="12700">
@@ -7281,14 +8241,14 @@
       </p:sp>
       <p:sp>
         <p:nvSpPr>
-          <p:cNvPr id="16" name="Text 14"/>
-          <p:cNvSpPr/>
-          <p:nvPr/>
-        </p:nvSpPr>
-        <p:spPr>
-          <a:xfrm>
-            <a:off x="8074152" y="3666744"/>
-            <a:ext cx="2825496" cy="256032"/>
+          <p:cNvPr id="21" name="Text 19"/>
+          <p:cNvSpPr/>
+          <p:nvPr/>
+        </p:nvSpPr>
+        <p:spPr>
+          <a:xfrm>
+            <a:off x="7799832" y="4645152"/>
+            <a:ext cx="3145536" cy="256032"/>
           </a:xfrm>
           <a:prstGeom prst="rect">
             <a:avLst/>
@@ -7312,7 +8272,7 @@
                 <a:ea typeface="Aptos" pitchFamily="34" charset="-122"/>
                 <a:cs typeface="Aptos" pitchFamily="34" charset="-120"/>
               </a:rPr>
-              <a:t>Use this for</a:t>
+              <a:t>How to validate</a:t>
             </a:r>
             <a:endParaRPr lang="en-US" sz="1300" dirty="0"/>
           </a:p>
@@ -7320,14 +8280,14 @@
       </p:sp>
       <p:sp>
         <p:nvSpPr>
-          <p:cNvPr id="17" name="Text 15"/>
-          <p:cNvSpPr/>
-          <p:nvPr/>
-        </p:nvSpPr>
-        <p:spPr>
-          <a:xfrm>
-            <a:off x="8074152" y="4023360"/>
-            <a:ext cx="2825496" cy="1097280"/>
+          <p:cNvPr id="22" name="Text 20"/>
+          <p:cNvSpPr/>
+          <p:nvPr/>
+        </p:nvSpPr>
+        <p:spPr>
+          <a:xfrm>
+            <a:off x="7799832" y="5001768"/>
+            <a:ext cx="3145536" cy="502920"/>
           </a:xfrm>
           <a:prstGeom prst="rect">
             <a:avLst/>
@@ -7353,7 +8313,7 @@
                 <a:ea typeface="Aptos" pitchFamily="34" charset="-122"/>
                 <a:cs typeface="Aptos" pitchFamily="34" charset="-120"/>
               </a:rPr>
-              <a:t>Connect the concept to public health decisions, safeguards, documentation, or implementation work.</a:t>
+              <a:t>Connect the concept to data quality, model performance, validation evidence, monitoring measures, and decisions that remain under human control.</a:t>
             </a:r>
             <a:endParaRPr lang="en-US" sz="1550" dirty="0"/>
           </a:p>
@@ -7527,8 +8487,8 @@
         </p:nvSpPr>
         <p:spPr>
           <a:xfrm>
-            <a:off x="9966960" y="6537960"/>
-            <a:ext cx="1645920" cy="201168"/>
+            <a:off x="9646920" y="6537960"/>
+            <a:ext cx="1965960" cy="201168"/>
           </a:xfrm>
           <a:prstGeom prst="rect">
             <a:avLst/>
@@ -7552,7 +8512,7 @@
                 <a:ea typeface="Aptos" pitchFamily="34" charset="-122"/>
                 <a:cs typeface="Aptos" pitchFamily="34" charset="-120"/>
               </a:rPr>
-              <a:t>Â© Paula Soper</a:t>
+              <a:t>Copyright Paula Soper</a:t>
             </a:r>
             <a:endParaRPr lang="en-US" sz="800" dirty="0"/>
           </a:p>
@@ -7647,7 +8607,7 @@
         <p:spPr>
           <a:xfrm>
             <a:off x="868680" y="1508760"/>
-            <a:ext cx="6537960" cy="4160520"/>
+            <a:ext cx="6309360" cy="4160520"/>
           </a:xfrm>
           <a:prstGeom prst="rect">
             <a:avLst/>
@@ -7698,12 +8658,12 @@
         </p:nvSpPr>
         <p:spPr>
           <a:xfrm>
-            <a:off x="7909560" y="1417320"/>
-            <a:ext cx="3154680" cy="1828800"/>
+            <a:off x="7635240" y="1325880"/>
+            <a:ext cx="3474720" cy="1325880"/>
           </a:xfrm>
           <a:prstGeom prst="roundRect">
             <a:avLst>
-              <a:gd name="adj" fmla="val 6000"/>
+              <a:gd name="adj" fmla="val 8276"/>
             </a:avLst>
           </a:prstGeom>
           <a:solidFill>
@@ -7725,8 +8685,8 @@
         </p:nvSpPr>
         <p:spPr>
           <a:xfrm>
-            <a:off x="8074152" y="1563624"/>
-            <a:ext cx="2825496" cy="256032"/>
+            <a:off x="7799832" y="1472184"/>
+            <a:ext cx="3145536" cy="256032"/>
           </a:xfrm>
           <a:prstGeom prst="rect">
             <a:avLst/>
@@ -7750,7 +8710,7 @@
                 <a:ea typeface="Aptos" pitchFamily="34" charset="-122"/>
                 <a:cs typeface="Aptos" pitchFamily="34" charset="-120"/>
               </a:rPr>
-              <a:t>Key idea</a:t>
+              <a:t>Data decision</a:t>
             </a:r>
             <a:endParaRPr lang="en-US" sz="1300" dirty="0"/>
           </a:p>
@@ -7764,8 +8724,8 @@
         </p:nvSpPr>
         <p:spPr>
           <a:xfrm>
-            <a:off x="8074152" y="1920240"/>
-            <a:ext cx="2825496" cy="1188720"/>
+            <a:off x="7799832" y="1828800"/>
+            <a:ext cx="3145536" cy="685800"/>
           </a:xfrm>
           <a:prstGeom prst="rect">
             <a:avLst/>
@@ -7805,15 +8765,206 @@
         </p:nvSpPr>
         <p:spPr>
           <a:xfrm>
-            <a:off x="7909560" y="3520440"/>
-            <a:ext cx="3154680" cy="1737360"/>
+            <a:off x="7635240" y="2788920"/>
+            <a:ext cx="3474720" cy="1536192"/>
           </a:xfrm>
           <a:prstGeom prst="roundRect">
             <a:avLst>
-              <a:gd name="adj" fmla="val 6316"/>
+              <a:gd name="adj" fmla="val 7143"/>
             </a:avLst>
           </a:prstGeom>
           <a:solidFill>
+            <a:srgbClr val="FFFFFF">
+              <a:alpha val="88000"/>
+            </a:srgbClr>
+          </a:solidFill>
+          <a:ln w="12700">
+            <a:solidFill>
+              <a:srgbClr val="D6E8F2"/>
+            </a:solidFill>
+            <a:prstDash val="solid"/>
+          </a:ln>
+        </p:spPr>
+      </p:sp>
+      <p:sp>
+        <p:nvSpPr>
+          <p:cNvPr id="14" name="Shape 12"/>
+          <p:cNvSpPr/>
+          <p:nvPr/>
+        </p:nvSpPr>
+        <p:spPr>
+          <a:xfrm>
+            <a:off x="8138160" y="3474720"/>
+            <a:ext cx="256032" cy="411480"/>
+          </a:xfrm>
+          <a:prstGeom prst="rect">
+            <a:avLst/>
+          </a:prstGeom>
+          <a:solidFill>
+            <a:srgbClr val="0068B7"/>
+          </a:solidFill>
+          <a:ln w="12700">
+            <a:solidFill>
+              <a:srgbClr val="0068B7"/>
+            </a:solidFill>
+            <a:prstDash val="solid"/>
+          </a:ln>
+        </p:spPr>
+      </p:sp>
+      <p:sp>
+        <p:nvSpPr>
+          <p:cNvPr id="15" name="Shape 13"/>
+          <p:cNvSpPr/>
+          <p:nvPr/>
+        </p:nvSpPr>
+        <p:spPr>
+          <a:xfrm>
+            <a:off x="8577072" y="3172968"/>
+            <a:ext cx="256032" cy="713232"/>
+          </a:xfrm>
+          <a:prstGeom prst="rect">
+            <a:avLst/>
+          </a:prstGeom>
+          <a:solidFill>
+            <a:srgbClr val="2F8A28"/>
+          </a:solidFill>
+          <a:ln w="12700">
+            <a:solidFill>
+              <a:srgbClr val="2F8A28"/>
+            </a:solidFill>
+            <a:prstDash val="solid"/>
+          </a:ln>
+        </p:spPr>
+      </p:sp>
+      <p:sp>
+        <p:nvSpPr>
+          <p:cNvPr id="16" name="Shape 14"/>
+          <p:cNvSpPr/>
+          <p:nvPr/>
+        </p:nvSpPr>
+        <p:spPr>
+          <a:xfrm>
+            <a:off x="9015984" y="2880360"/>
+            <a:ext cx="256032" cy="1005840"/>
+          </a:xfrm>
+          <a:prstGeom prst="rect">
+            <a:avLst/>
+          </a:prstGeom>
+          <a:solidFill>
+            <a:srgbClr val="D69A2D"/>
+          </a:solidFill>
+          <a:ln w="12700">
+            <a:solidFill>
+              <a:srgbClr val="D69A2D"/>
+            </a:solidFill>
+            <a:prstDash val="solid"/>
+          </a:ln>
+        </p:spPr>
+      </p:sp>
+      <p:sp>
+        <p:nvSpPr>
+          <p:cNvPr id="17" name="Shape 15"/>
+          <p:cNvSpPr/>
+          <p:nvPr/>
+        </p:nvSpPr>
+        <p:spPr>
+          <a:xfrm>
+            <a:off x="9454896" y="3319272"/>
+            <a:ext cx="256032" cy="566928"/>
+          </a:xfrm>
+          <a:prstGeom prst="rect">
+            <a:avLst/>
+          </a:prstGeom>
+          <a:solidFill>
+            <a:srgbClr val="6A4CA3"/>
+          </a:solidFill>
+          <a:ln w="12700">
+            <a:solidFill>
+              <a:srgbClr val="6A4CA3"/>
+            </a:solidFill>
+            <a:prstDash val="solid"/>
+          </a:ln>
+        </p:spPr>
+      </p:sp>
+      <p:sp>
+        <p:nvSpPr>
+          <p:cNvPr id="18" name="Shape 16"/>
+          <p:cNvSpPr/>
+          <p:nvPr/>
+        </p:nvSpPr>
+        <p:spPr>
+          <a:xfrm>
+            <a:off x="8019288" y="3886200"/>
+            <a:ext cx="2706624" cy="0"/>
+          </a:xfrm>
+          <a:prstGeom prst="line">
+            <a:avLst/>
+          </a:prstGeom>
+          <a:noFill/>
+          <a:ln w="15240">
+            <a:solidFill>
+              <a:srgbClr val="003A63"/>
+            </a:solidFill>
+            <a:prstDash val="solid"/>
+          </a:ln>
+        </p:spPr>
+      </p:sp>
+      <p:sp>
+        <p:nvSpPr>
+          <p:cNvPr id="19" name="Text 17"/>
+          <p:cNvSpPr/>
+          <p:nvPr/>
+        </p:nvSpPr>
+        <p:spPr>
+          <a:xfrm>
+            <a:off x="7863840" y="3017520"/>
+            <a:ext cx="3017520" cy="201168"/>
+          </a:xfrm>
+          <a:prstGeom prst="rect">
+            <a:avLst/>
+          </a:prstGeom>
+          <a:noFill/>
+          <a:ln/>
+        </p:spPr>
+        <p:txBody>
+          <a:bodyPr wrap="square" lIns="0" tIns="0" rIns="0" bIns="0" rtlCol="0" anchor="ctr"/>
+          <a:lstStyle/>
+          <a:p>
+            <a:pPr algn="ctr" indent="0" marL="0">
+              <a:buNone/>
+            </a:pPr>
+            <a:r>
+              <a:rPr lang="en-US" sz="1050" b="1" dirty="0">
+                <a:solidFill>
+                  <a:srgbClr val="003A63"/>
+                </a:solidFill>
+                <a:latin typeface="Aptos" pitchFamily="34" charset="0"/>
+                <a:ea typeface="Aptos" pitchFamily="34" charset="-122"/>
+                <a:cs typeface="Aptos" pitchFamily="34" charset="-120"/>
+              </a:rPr>
+              <a:t>Measure and monitor</a:t>
+            </a:r>
+            <a:endParaRPr lang="en-US" sz="1050" dirty="0"/>
+          </a:p>
+        </p:txBody>
+      </p:sp>
+      <p:sp>
+        <p:nvSpPr>
+          <p:cNvPr id="20" name="Shape 18"/>
+          <p:cNvSpPr/>
+          <p:nvPr/>
+        </p:nvSpPr>
+        <p:spPr>
+          <a:xfrm>
+            <a:off x="7635240" y="4498848"/>
+            <a:ext cx="3474720" cy="1143000"/>
+          </a:xfrm>
+          <a:prstGeom prst="roundRect">
+            <a:avLst>
+              <a:gd name="adj" fmla="val 9600"/>
+            </a:avLst>
+          </a:prstGeom>
+          <a:solidFill>
             <a:srgbClr val="EAF6F8"/>
           </a:solidFill>
           <a:ln w="12700">
@@ -7826,14 +8977,14 @@
       </p:sp>
       <p:sp>
         <p:nvSpPr>
-          <p:cNvPr id="14" name="Text 12"/>
-          <p:cNvSpPr/>
-          <p:nvPr/>
-        </p:nvSpPr>
-        <p:spPr>
-          <a:xfrm>
-            <a:off x="8074152" y="3666744"/>
-            <a:ext cx="2825496" cy="256032"/>
+          <p:cNvPr id="21" name="Text 19"/>
+          <p:cNvSpPr/>
+          <p:nvPr/>
+        </p:nvSpPr>
+        <p:spPr>
+          <a:xfrm>
+            <a:off x="7799832" y="4645152"/>
+            <a:ext cx="3145536" cy="256032"/>
           </a:xfrm>
           <a:prstGeom prst="rect">
             <a:avLst/>
@@ -7857,7 +9008,7 @@
                 <a:ea typeface="Aptos" pitchFamily="34" charset="-122"/>
                 <a:cs typeface="Aptos" pitchFamily="34" charset="-120"/>
               </a:rPr>
-              <a:t>Use this for</a:t>
+              <a:t>How to validate</a:t>
             </a:r>
             <a:endParaRPr lang="en-US" sz="1300" dirty="0"/>
           </a:p>
@@ -7865,14 +9016,14 @@
       </p:sp>
       <p:sp>
         <p:nvSpPr>
-          <p:cNvPr id="15" name="Text 13"/>
-          <p:cNvSpPr/>
-          <p:nvPr/>
-        </p:nvSpPr>
-        <p:spPr>
-          <a:xfrm>
-            <a:off x="8074152" y="4023360"/>
-            <a:ext cx="2825496" cy="1097280"/>
+          <p:cNvPr id="22" name="Text 20"/>
+          <p:cNvSpPr/>
+          <p:nvPr/>
+        </p:nvSpPr>
+        <p:spPr>
+          <a:xfrm>
+            <a:off x="7799832" y="5001768"/>
+            <a:ext cx="3145536" cy="502920"/>
           </a:xfrm>
           <a:prstGeom prst="rect">
             <a:avLst/>
@@ -7898,7 +9049,7 @@
                 <a:ea typeface="Aptos" pitchFamily="34" charset="-122"/>
                 <a:cs typeface="Aptos" pitchFamily="34" charset="-120"/>
               </a:rPr>
-              <a:t>Connect the concept to public health decisions, safeguards, documentation, or implementation work.</a:t>
+              <a:t>Connect the concept to data quality, model performance, validation evidence, monitoring measures, and decisions that remain under human control.</a:t>
             </a:r>
             <a:endParaRPr lang="en-US" sz="1550" dirty="0"/>
           </a:p>
@@ -8072,8 +9223,8 @@
         </p:nvSpPr>
         <p:spPr>
           <a:xfrm>
-            <a:off x="9966960" y="6537960"/>
-            <a:ext cx="1645920" cy="201168"/>
+            <a:off x="9646920" y="6537960"/>
+            <a:ext cx="1965960" cy="201168"/>
           </a:xfrm>
           <a:prstGeom prst="rect">
             <a:avLst/>
@@ -8097,7 +9248,7 @@
                 <a:ea typeface="Aptos" pitchFamily="34" charset="-122"/>
                 <a:cs typeface="Aptos" pitchFamily="34" charset="-120"/>
               </a:rPr>
-              <a:t>Â© Paula Soper</a:t>
+              <a:t>Copyright Paula Soper</a:t>
             </a:r>
             <a:endParaRPr lang="en-US" sz="800" dirty="0"/>
           </a:p>
@@ -8144,77 +9295,13 @@
       </p:sp>
       <p:sp>
         <p:nvSpPr>
-          <p:cNvPr id="8" name="Shape 6"/>
+          <p:cNvPr id="8" name="Text 6"/>
           <p:cNvSpPr/>
           <p:nvPr/>
         </p:nvSpPr>
         <p:spPr>
           <a:xfrm>
             <a:off x="640080" y="658368"/>
-            <a:ext cx="420624" cy="420624"/>
-          </a:xfrm>
-          <a:prstGeom prst="ellipse">
-            <a:avLst/>
-          </a:prstGeom>
-          <a:solidFill>
-            <a:srgbClr val="0068B7"/>
-          </a:solidFill>
-          <a:ln w="12700">
-            <a:solidFill>
-              <a:srgbClr val="0068B7"/>
-            </a:solidFill>
-            <a:prstDash val="solid"/>
-          </a:ln>
-        </p:spPr>
-      </p:sp>
-      <p:sp>
-        <p:nvSpPr>
-          <p:cNvPr id="9" name="Text 7"/>
-          <p:cNvSpPr/>
-          <p:nvPr/>
-        </p:nvSpPr>
-        <p:spPr>
-          <a:xfrm>
-            <a:off x="640080" y="731520"/>
-            <a:ext cx="420624" cy="164592"/>
-          </a:xfrm>
-          <a:prstGeom prst="rect">
-            <a:avLst/>
-          </a:prstGeom>
-          <a:noFill/>
-          <a:ln/>
-        </p:spPr>
-        <p:txBody>
-          <a:bodyPr wrap="square" lIns="0" tIns="0" rIns="0" bIns="0" rtlCol="0" anchor="ctr"/>
-          <a:lstStyle/>
-          <a:p>
-            <a:pPr algn="ctr" indent="0" marL="0">
-              <a:buNone/>
-            </a:pPr>
-            <a:r>
-              <a:rPr lang="en-US" sz="1100" b="1" dirty="0">
-                <a:solidFill>
-                  <a:srgbClr val="FFFFFF"/>
-                </a:solidFill>
-                <a:latin typeface="Aptos" pitchFamily="34" charset="0"/>
-                <a:ea typeface="Aptos" pitchFamily="34" charset="-122"/>
-                <a:cs typeface="Aptos" pitchFamily="34" charset="-120"/>
-              </a:rPr>
-              <a:t>11</a:t>
-            </a:r>
-            <a:endParaRPr lang="en-US" sz="1100" dirty="0"/>
-          </a:p>
-        </p:txBody>
-      </p:sp>
-      <p:sp>
-        <p:nvSpPr>
-          <p:cNvPr id="10" name="Text 8"/>
-          <p:cNvSpPr/>
-          <p:nvPr/>
-        </p:nvSpPr>
-        <p:spPr>
-          <a:xfrm>
-            <a:off x="640080" y="621792"/>
             <a:ext cx="10881360" cy="713232"/>
           </a:xfrm>
           <a:prstGeom prst="rect">
@@ -8249,14 +9336,14 @@
       </p:sp>
       <p:sp>
         <p:nvSpPr>
-          <p:cNvPr id="11" name="Text 9"/>
+          <p:cNvPr id="9" name="Text 7"/>
           <p:cNvSpPr/>
           <p:nvPr/>
         </p:nvSpPr>
         <p:spPr>
           <a:xfrm>
             <a:off x="868680" y="1508760"/>
-            <a:ext cx="6537960" cy="4160520"/>
+            <a:ext cx="6309360" cy="4160520"/>
           </a:xfrm>
           <a:prstGeom prst="rect">
             <a:avLst/>
@@ -8301,18 +9388,18 @@
       </p:sp>
       <p:sp>
         <p:nvSpPr>
-          <p:cNvPr id="12" name="Shape 10"/>
-          <p:cNvSpPr/>
-          <p:nvPr/>
-        </p:nvSpPr>
-        <p:spPr>
-          <a:xfrm>
-            <a:off x="7909560" y="1417320"/>
-            <a:ext cx="3154680" cy="1828800"/>
+          <p:cNvPr id="10" name="Shape 8"/>
+          <p:cNvSpPr/>
+          <p:nvPr/>
+        </p:nvSpPr>
+        <p:spPr>
+          <a:xfrm>
+            <a:off x="7635240" y="1325880"/>
+            <a:ext cx="3474720" cy="1325880"/>
           </a:xfrm>
           <a:prstGeom prst="roundRect">
             <a:avLst>
-              <a:gd name="adj" fmla="val 6000"/>
+              <a:gd name="adj" fmla="val 8276"/>
             </a:avLst>
           </a:prstGeom>
           <a:solidFill>
@@ -8328,14 +9415,14 @@
       </p:sp>
       <p:sp>
         <p:nvSpPr>
-          <p:cNvPr id="13" name="Text 11"/>
-          <p:cNvSpPr/>
-          <p:nvPr/>
-        </p:nvSpPr>
-        <p:spPr>
-          <a:xfrm>
-            <a:off x="8074152" y="1563624"/>
-            <a:ext cx="2825496" cy="256032"/>
+          <p:cNvPr id="11" name="Text 9"/>
+          <p:cNvSpPr/>
+          <p:nvPr/>
+        </p:nvSpPr>
+        <p:spPr>
+          <a:xfrm>
+            <a:off x="7799832" y="1472184"/>
+            <a:ext cx="3145536" cy="256032"/>
           </a:xfrm>
           <a:prstGeom prst="rect">
             <a:avLst/>
@@ -8359,7 +9446,7 @@
                 <a:ea typeface="Aptos" pitchFamily="34" charset="-122"/>
                 <a:cs typeface="Aptos" pitchFamily="34" charset="-120"/>
               </a:rPr>
-              <a:t>Key idea</a:t>
+              <a:t>Data decision</a:t>
             </a:r>
             <a:endParaRPr lang="en-US" sz="1300" dirty="0"/>
           </a:p>
@@ -8367,14 +9454,14 @@
       </p:sp>
       <p:sp>
         <p:nvSpPr>
-          <p:cNvPr id="14" name="Text 12"/>
-          <p:cNvSpPr/>
-          <p:nvPr/>
-        </p:nvSpPr>
-        <p:spPr>
-          <a:xfrm>
-            <a:off x="8074152" y="1920240"/>
-            <a:ext cx="2825496" cy="1188720"/>
+          <p:cNvPr id="12" name="Text 10"/>
+          <p:cNvSpPr/>
+          <p:nvPr/>
+        </p:nvSpPr>
+        <p:spPr>
+          <a:xfrm>
+            <a:off x="7799832" y="1828800"/>
+            <a:ext cx="3145536" cy="685800"/>
           </a:xfrm>
           <a:prstGeom prst="rect">
             <a:avLst/>
@@ -8408,21 +9495,212 @@
       </p:sp>
       <p:sp>
         <p:nvSpPr>
-          <p:cNvPr id="15" name="Shape 13"/>
-          <p:cNvSpPr/>
-          <p:nvPr/>
-        </p:nvSpPr>
-        <p:spPr>
-          <a:xfrm>
-            <a:off x="7909560" y="3520440"/>
-            <a:ext cx="3154680" cy="1737360"/>
+          <p:cNvPr id="13" name="Shape 11"/>
+          <p:cNvSpPr/>
+          <p:nvPr/>
+        </p:nvSpPr>
+        <p:spPr>
+          <a:xfrm>
+            <a:off x="7635240" y="2788920"/>
+            <a:ext cx="3474720" cy="1536192"/>
           </a:xfrm>
           <a:prstGeom prst="roundRect">
             <a:avLst>
-              <a:gd name="adj" fmla="val 6316"/>
+              <a:gd name="adj" fmla="val 7143"/>
             </a:avLst>
           </a:prstGeom>
           <a:solidFill>
+            <a:srgbClr val="FFFFFF">
+              <a:alpha val="88000"/>
+            </a:srgbClr>
+          </a:solidFill>
+          <a:ln w="12700">
+            <a:solidFill>
+              <a:srgbClr val="D6E8F2"/>
+            </a:solidFill>
+            <a:prstDash val="solid"/>
+          </a:ln>
+        </p:spPr>
+      </p:sp>
+      <p:sp>
+        <p:nvSpPr>
+          <p:cNvPr id="14" name="Shape 12"/>
+          <p:cNvSpPr/>
+          <p:nvPr/>
+        </p:nvSpPr>
+        <p:spPr>
+          <a:xfrm>
+            <a:off x="8138160" y="3474720"/>
+            <a:ext cx="256032" cy="411480"/>
+          </a:xfrm>
+          <a:prstGeom prst="rect">
+            <a:avLst/>
+          </a:prstGeom>
+          <a:solidFill>
+            <a:srgbClr val="0068B7"/>
+          </a:solidFill>
+          <a:ln w="12700">
+            <a:solidFill>
+              <a:srgbClr val="0068B7"/>
+            </a:solidFill>
+            <a:prstDash val="solid"/>
+          </a:ln>
+        </p:spPr>
+      </p:sp>
+      <p:sp>
+        <p:nvSpPr>
+          <p:cNvPr id="15" name="Shape 13"/>
+          <p:cNvSpPr/>
+          <p:nvPr/>
+        </p:nvSpPr>
+        <p:spPr>
+          <a:xfrm>
+            <a:off x="8577072" y="3172968"/>
+            <a:ext cx="256032" cy="713232"/>
+          </a:xfrm>
+          <a:prstGeom prst="rect">
+            <a:avLst/>
+          </a:prstGeom>
+          <a:solidFill>
+            <a:srgbClr val="2F8A28"/>
+          </a:solidFill>
+          <a:ln w="12700">
+            <a:solidFill>
+              <a:srgbClr val="2F8A28"/>
+            </a:solidFill>
+            <a:prstDash val="solid"/>
+          </a:ln>
+        </p:spPr>
+      </p:sp>
+      <p:sp>
+        <p:nvSpPr>
+          <p:cNvPr id="16" name="Shape 14"/>
+          <p:cNvSpPr/>
+          <p:nvPr/>
+        </p:nvSpPr>
+        <p:spPr>
+          <a:xfrm>
+            <a:off x="9015984" y="2880360"/>
+            <a:ext cx="256032" cy="1005840"/>
+          </a:xfrm>
+          <a:prstGeom prst="rect">
+            <a:avLst/>
+          </a:prstGeom>
+          <a:solidFill>
+            <a:srgbClr val="D69A2D"/>
+          </a:solidFill>
+          <a:ln w="12700">
+            <a:solidFill>
+              <a:srgbClr val="D69A2D"/>
+            </a:solidFill>
+            <a:prstDash val="solid"/>
+          </a:ln>
+        </p:spPr>
+      </p:sp>
+      <p:sp>
+        <p:nvSpPr>
+          <p:cNvPr id="17" name="Shape 15"/>
+          <p:cNvSpPr/>
+          <p:nvPr/>
+        </p:nvSpPr>
+        <p:spPr>
+          <a:xfrm>
+            <a:off x="9454896" y="3319272"/>
+            <a:ext cx="256032" cy="566928"/>
+          </a:xfrm>
+          <a:prstGeom prst="rect">
+            <a:avLst/>
+          </a:prstGeom>
+          <a:solidFill>
+            <a:srgbClr val="6A4CA3"/>
+          </a:solidFill>
+          <a:ln w="12700">
+            <a:solidFill>
+              <a:srgbClr val="6A4CA3"/>
+            </a:solidFill>
+            <a:prstDash val="solid"/>
+          </a:ln>
+        </p:spPr>
+      </p:sp>
+      <p:sp>
+        <p:nvSpPr>
+          <p:cNvPr id="18" name="Shape 16"/>
+          <p:cNvSpPr/>
+          <p:nvPr/>
+        </p:nvSpPr>
+        <p:spPr>
+          <a:xfrm>
+            <a:off x="8019288" y="3886200"/>
+            <a:ext cx="2706624" cy="0"/>
+          </a:xfrm>
+          <a:prstGeom prst="line">
+            <a:avLst/>
+          </a:prstGeom>
+          <a:noFill/>
+          <a:ln w="15240">
+            <a:solidFill>
+              <a:srgbClr val="003A63"/>
+            </a:solidFill>
+            <a:prstDash val="solid"/>
+          </a:ln>
+        </p:spPr>
+      </p:sp>
+      <p:sp>
+        <p:nvSpPr>
+          <p:cNvPr id="19" name="Text 17"/>
+          <p:cNvSpPr/>
+          <p:nvPr/>
+        </p:nvSpPr>
+        <p:spPr>
+          <a:xfrm>
+            <a:off x="7863840" y="3017520"/>
+            <a:ext cx="3017520" cy="201168"/>
+          </a:xfrm>
+          <a:prstGeom prst="rect">
+            <a:avLst/>
+          </a:prstGeom>
+          <a:noFill/>
+          <a:ln/>
+        </p:spPr>
+        <p:txBody>
+          <a:bodyPr wrap="square" lIns="0" tIns="0" rIns="0" bIns="0" rtlCol="0" anchor="ctr"/>
+          <a:lstStyle/>
+          <a:p>
+            <a:pPr algn="ctr" indent="0" marL="0">
+              <a:buNone/>
+            </a:pPr>
+            <a:r>
+              <a:rPr lang="en-US" sz="1050" b="1" dirty="0">
+                <a:solidFill>
+                  <a:srgbClr val="003A63"/>
+                </a:solidFill>
+                <a:latin typeface="Aptos" pitchFamily="34" charset="0"/>
+                <a:ea typeface="Aptos" pitchFamily="34" charset="-122"/>
+                <a:cs typeface="Aptos" pitchFamily="34" charset="-120"/>
+              </a:rPr>
+              <a:t>Measure and monitor</a:t>
+            </a:r>
+            <a:endParaRPr lang="en-US" sz="1050" dirty="0"/>
+          </a:p>
+        </p:txBody>
+      </p:sp>
+      <p:sp>
+        <p:nvSpPr>
+          <p:cNvPr id="20" name="Shape 18"/>
+          <p:cNvSpPr/>
+          <p:nvPr/>
+        </p:nvSpPr>
+        <p:spPr>
+          <a:xfrm>
+            <a:off x="7635240" y="4498848"/>
+            <a:ext cx="3474720" cy="1143000"/>
+          </a:xfrm>
+          <a:prstGeom prst="roundRect">
+            <a:avLst>
+              <a:gd name="adj" fmla="val 9600"/>
+            </a:avLst>
+          </a:prstGeom>
+          <a:solidFill>
             <a:srgbClr val="EAF6F8"/>
           </a:solidFill>
           <a:ln w="12700">
@@ -8435,14 +9713,14 @@
       </p:sp>
       <p:sp>
         <p:nvSpPr>
-          <p:cNvPr id="16" name="Text 14"/>
-          <p:cNvSpPr/>
-          <p:nvPr/>
-        </p:nvSpPr>
-        <p:spPr>
-          <a:xfrm>
-            <a:off x="8074152" y="3666744"/>
-            <a:ext cx="2825496" cy="256032"/>
+          <p:cNvPr id="21" name="Text 19"/>
+          <p:cNvSpPr/>
+          <p:nvPr/>
+        </p:nvSpPr>
+        <p:spPr>
+          <a:xfrm>
+            <a:off x="7799832" y="4645152"/>
+            <a:ext cx="3145536" cy="256032"/>
           </a:xfrm>
           <a:prstGeom prst="rect">
             <a:avLst/>
@@ -8466,7 +9744,7 @@
                 <a:ea typeface="Aptos" pitchFamily="34" charset="-122"/>
                 <a:cs typeface="Aptos" pitchFamily="34" charset="-120"/>
               </a:rPr>
-              <a:t>Use this for</a:t>
+              <a:t>How to validate</a:t>
             </a:r>
             <a:endParaRPr lang="en-US" sz="1300" dirty="0"/>
           </a:p>
@@ -8474,14 +9752,14 @@
       </p:sp>
       <p:sp>
         <p:nvSpPr>
-          <p:cNvPr id="17" name="Text 15"/>
-          <p:cNvSpPr/>
-          <p:nvPr/>
-        </p:nvSpPr>
-        <p:spPr>
-          <a:xfrm>
-            <a:off x="8074152" y="4023360"/>
-            <a:ext cx="2825496" cy="1097280"/>
+          <p:cNvPr id="22" name="Text 20"/>
+          <p:cNvSpPr/>
+          <p:nvPr/>
+        </p:nvSpPr>
+        <p:spPr>
+          <a:xfrm>
+            <a:off x="7799832" y="5001768"/>
+            <a:ext cx="3145536" cy="502920"/>
           </a:xfrm>
           <a:prstGeom prst="rect">
             <a:avLst/>
@@ -8507,7 +9785,7 @@
                 <a:ea typeface="Aptos" pitchFamily="34" charset="-122"/>
                 <a:cs typeface="Aptos" pitchFamily="34" charset="-120"/>
               </a:rPr>
-              <a:t>Connect the concept to public health decisions, safeguards, documentation, or implementation work.</a:t>
+              <a:t>Use the assignment to test whether you can explain the concept, apply it to a realistic public health situation, and identify what would need review before the work moves forward.</a:t>
             </a:r>
             <a:endParaRPr lang="en-US" sz="1550" dirty="0"/>
           </a:p>
@@ -8681,8 +9959,8 @@
         </p:nvSpPr>
         <p:spPr>
           <a:xfrm>
-            <a:off x="9966960" y="6537960"/>
-            <a:ext cx="1645920" cy="201168"/>
+            <a:off x="9646920" y="6537960"/>
+            <a:ext cx="1965960" cy="201168"/>
           </a:xfrm>
           <a:prstGeom prst="rect">
             <a:avLst/>
@@ -8706,7 +9984,7 @@
                 <a:ea typeface="Aptos" pitchFamily="34" charset="-122"/>
                 <a:cs typeface="Aptos" pitchFamily="34" charset="-120"/>
               </a:rPr>
-              <a:t>Â© Paula Soper</a:t>
+              <a:t>Copyright Paula Soper</a:t>
             </a:r>
             <a:endParaRPr lang="en-US" sz="800" dirty="0"/>
           </a:p>
@@ -8753,77 +10031,13 @@
       </p:sp>
       <p:sp>
         <p:nvSpPr>
-          <p:cNvPr id="8" name="Shape 6"/>
+          <p:cNvPr id="8" name="Text 6"/>
           <p:cNvSpPr/>
           <p:nvPr/>
         </p:nvSpPr>
         <p:spPr>
           <a:xfrm>
             <a:off x="640080" y="658368"/>
-            <a:ext cx="420624" cy="420624"/>
-          </a:xfrm>
-          <a:prstGeom prst="ellipse">
-            <a:avLst/>
-          </a:prstGeom>
-          <a:solidFill>
-            <a:srgbClr val="0068B7"/>
-          </a:solidFill>
-          <a:ln w="12700">
-            <a:solidFill>
-              <a:srgbClr val="0068B7"/>
-            </a:solidFill>
-            <a:prstDash val="solid"/>
-          </a:ln>
-        </p:spPr>
-      </p:sp>
-      <p:sp>
-        <p:nvSpPr>
-          <p:cNvPr id="9" name="Text 7"/>
-          <p:cNvSpPr/>
-          <p:nvPr/>
-        </p:nvSpPr>
-        <p:spPr>
-          <a:xfrm>
-            <a:off x="640080" y="731520"/>
-            <a:ext cx="420624" cy="164592"/>
-          </a:xfrm>
-          <a:prstGeom prst="rect">
-            <a:avLst/>
-          </a:prstGeom>
-          <a:noFill/>
-          <a:ln/>
-        </p:spPr>
-        <p:txBody>
-          <a:bodyPr wrap="square" lIns="0" tIns="0" rIns="0" bIns="0" rtlCol="0" anchor="ctr"/>
-          <a:lstStyle/>
-          <a:p>
-            <a:pPr algn="ctr" indent="0" marL="0">
-              <a:buNone/>
-            </a:pPr>
-            <a:r>
-              <a:rPr lang="en-US" sz="1100" b="1" dirty="0">
-                <a:solidFill>
-                  <a:srgbClr val="FFFFFF"/>
-                </a:solidFill>
-                <a:latin typeface="Aptos" pitchFamily="34" charset="0"/>
-                <a:ea typeface="Aptos" pitchFamily="34" charset="-122"/>
-                <a:cs typeface="Aptos" pitchFamily="34" charset="-120"/>
-              </a:rPr>
-              <a:t>12</a:t>
-            </a:r>
-            <a:endParaRPr lang="en-US" sz="1100" dirty="0"/>
-          </a:p>
-        </p:txBody>
-      </p:sp>
-      <p:sp>
-        <p:nvSpPr>
-          <p:cNvPr id="10" name="Text 8"/>
-          <p:cNvSpPr/>
-          <p:nvPr/>
-        </p:nvSpPr>
-        <p:spPr>
-          <a:xfrm>
-            <a:off x="640080" y="621792"/>
             <a:ext cx="10881360" cy="713232"/>
           </a:xfrm>
           <a:prstGeom prst="rect">
@@ -8858,14 +10072,14 @@
       </p:sp>
       <p:sp>
         <p:nvSpPr>
-          <p:cNvPr id="11" name="Text 9"/>
+          <p:cNvPr id="9" name="Text 7"/>
           <p:cNvSpPr/>
           <p:nvPr/>
         </p:nvSpPr>
         <p:spPr>
           <a:xfrm>
             <a:off x="868680" y="1508760"/>
-            <a:ext cx="6537960" cy="4160520"/>
+            <a:ext cx="6309360" cy="4160520"/>
           </a:xfrm>
           <a:prstGeom prst="rect">
             <a:avLst/>
@@ -8924,18 +10138,18 @@
       </p:sp>
       <p:sp>
         <p:nvSpPr>
-          <p:cNvPr id="12" name="Shape 10"/>
-          <p:cNvSpPr/>
-          <p:nvPr/>
-        </p:nvSpPr>
-        <p:spPr>
-          <a:xfrm>
-            <a:off x="7909560" y="1417320"/>
-            <a:ext cx="3154680" cy="1828800"/>
+          <p:cNvPr id="10" name="Shape 8"/>
+          <p:cNvSpPr/>
+          <p:nvPr/>
+        </p:nvSpPr>
+        <p:spPr>
+          <a:xfrm>
+            <a:off x="7635240" y="1325880"/>
+            <a:ext cx="3474720" cy="1325880"/>
           </a:xfrm>
           <a:prstGeom prst="roundRect">
             <a:avLst>
-              <a:gd name="adj" fmla="val 6000"/>
+              <a:gd name="adj" fmla="val 8276"/>
             </a:avLst>
           </a:prstGeom>
           <a:solidFill>
@@ -8951,14 +10165,14 @@
       </p:sp>
       <p:sp>
         <p:nvSpPr>
-          <p:cNvPr id="13" name="Text 11"/>
-          <p:cNvSpPr/>
-          <p:nvPr/>
-        </p:nvSpPr>
-        <p:spPr>
-          <a:xfrm>
-            <a:off x="8074152" y="1563624"/>
-            <a:ext cx="2825496" cy="256032"/>
+          <p:cNvPr id="11" name="Text 9"/>
+          <p:cNvSpPr/>
+          <p:nvPr/>
+        </p:nvSpPr>
+        <p:spPr>
+          <a:xfrm>
+            <a:off x="7799832" y="1472184"/>
+            <a:ext cx="3145536" cy="256032"/>
           </a:xfrm>
           <a:prstGeom prst="rect">
             <a:avLst/>
@@ -8982,7 +10196,7 @@
                 <a:ea typeface="Aptos" pitchFamily="34" charset="-122"/>
                 <a:cs typeface="Aptos" pitchFamily="34" charset="-120"/>
               </a:rPr>
-              <a:t>Key idea</a:t>
+              <a:t>Data decision</a:t>
             </a:r>
             <a:endParaRPr lang="en-US" sz="1300" dirty="0"/>
           </a:p>
@@ -8990,14 +10204,14 @@
       </p:sp>
       <p:sp>
         <p:nvSpPr>
-          <p:cNvPr id="14" name="Text 12"/>
-          <p:cNvSpPr/>
-          <p:nvPr/>
-        </p:nvSpPr>
-        <p:spPr>
-          <a:xfrm>
-            <a:off x="8074152" y="1920240"/>
-            <a:ext cx="2825496" cy="1188720"/>
+          <p:cNvPr id="12" name="Text 10"/>
+          <p:cNvSpPr/>
+          <p:nvPr/>
+        </p:nvSpPr>
+        <p:spPr>
+          <a:xfrm>
+            <a:off x="7799832" y="1828800"/>
+            <a:ext cx="3145536" cy="685800"/>
           </a:xfrm>
           <a:prstGeom prst="rect">
             <a:avLst/>
@@ -9031,21 +10245,212 @@
       </p:sp>
       <p:sp>
         <p:nvSpPr>
-          <p:cNvPr id="15" name="Shape 13"/>
-          <p:cNvSpPr/>
-          <p:nvPr/>
-        </p:nvSpPr>
-        <p:spPr>
-          <a:xfrm>
-            <a:off x="7909560" y="3520440"/>
-            <a:ext cx="3154680" cy="1737360"/>
+          <p:cNvPr id="13" name="Shape 11"/>
+          <p:cNvSpPr/>
+          <p:nvPr/>
+        </p:nvSpPr>
+        <p:spPr>
+          <a:xfrm>
+            <a:off x="7635240" y="2788920"/>
+            <a:ext cx="3474720" cy="1536192"/>
           </a:xfrm>
           <a:prstGeom prst="roundRect">
             <a:avLst>
-              <a:gd name="adj" fmla="val 6316"/>
+              <a:gd name="adj" fmla="val 7143"/>
             </a:avLst>
           </a:prstGeom>
           <a:solidFill>
+            <a:srgbClr val="FFFFFF">
+              <a:alpha val="88000"/>
+            </a:srgbClr>
+          </a:solidFill>
+          <a:ln w="12700">
+            <a:solidFill>
+              <a:srgbClr val="D6E8F2"/>
+            </a:solidFill>
+            <a:prstDash val="solid"/>
+          </a:ln>
+        </p:spPr>
+      </p:sp>
+      <p:sp>
+        <p:nvSpPr>
+          <p:cNvPr id="14" name="Shape 12"/>
+          <p:cNvSpPr/>
+          <p:nvPr/>
+        </p:nvSpPr>
+        <p:spPr>
+          <a:xfrm>
+            <a:off x="8138160" y="3474720"/>
+            <a:ext cx="256032" cy="411480"/>
+          </a:xfrm>
+          <a:prstGeom prst="rect">
+            <a:avLst/>
+          </a:prstGeom>
+          <a:solidFill>
+            <a:srgbClr val="0068B7"/>
+          </a:solidFill>
+          <a:ln w="12700">
+            <a:solidFill>
+              <a:srgbClr val="0068B7"/>
+            </a:solidFill>
+            <a:prstDash val="solid"/>
+          </a:ln>
+        </p:spPr>
+      </p:sp>
+      <p:sp>
+        <p:nvSpPr>
+          <p:cNvPr id="15" name="Shape 13"/>
+          <p:cNvSpPr/>
+          <p:nvPr/>
+        </p:nvSpPr>
+        <p:spPr>
+          <a:xfrm>
+            <a:off x="8577072" y="3172968"/>
+            <a:ext cx="256032" cy="713232"/>
+          </a:xfrm>
+          <a:prstGeom prst="rect">
+            <a:avLst/>
+          </a:prstGeom>
+          <a:solidFill>
+            <a:srgbClr val="2F8A28"/>
+          </a:solidFill>
+          <a:ln w="12700">
+            <a:solidFill>
+              <a:srgbClr val="2F8A28"/>
+            </a:solidFill>
+            <a:prstDash val="solid"/>
+          </a:ln>
+        </p:spPr>
+      </p:sp>
+      <p:sp>
+        <p:nvSpPr>
+          <p:cNvPr id="16" name="Shape 14"/>
+          <p:cNvSpPr/>
+          <p:nvPr/>
+        </p:nvSpPr>
+        <p:spPr>
+          <a:xfrm>
+            <a:off x="9015984" y="2880360"/>
+            <a:ext cx="256032" cy="1005840"/>
+          </a:xfrm>
+          <a:prstGeom prst="rect">
+            <a:avLst/>
+          </a:prstGeom>
+          <a:solidFill>
+            <a:srgbClr val="D69A2D"/>
+          </a:solidFill>
+          <a:ln w="12700">
+            <a:solidFill>
+              <a:srgbClr val="D69A2D"/>
+            </a:solidFill>
+            <a:prstDash val="solid"/>
+          </a:ln>
+        </p:spPr>
+      </p:sp>
+      <p:sp>
+        <p:nvSpPr>
+          <p:cNvPr id="17" name="Shape 15"/>
+          <p:cNvSpPr/>
+          <p:nvPr/>
+        </p:nvSpPr>
+        <p:spPr>
+          <a:xfrm>
+            <a:off x="9454896" y="3319272"/>
+            <a:ext cx="256032" cy="566928"/>
+          </a:xfrm>
+          <a:prstGeom prst="rect">
+            <a:avLst/>
+          </a:prstGeom>
+          <a:solidFill>
+            <a:srgbClr val="6A4CA3"/>
+          </a:solidFill>
+          <a:ln w="12700">
+            <a:solidFill>
+              <a:srgbClr val="6A4CA3"/>
+            </a:solidFill>
+            <a:prstDash val="solid"/>
+          </a:ln>
+        </p:spPr>
+      </p:sp>
+      <p:sp>
+        <p:nvSpPr>
+          <p:cNvPr id="18" name="Shape 16"/>
+          <p:cNvSpPr/>
+          <p:nvPr/>
+        </p:nvSpPr>
+        <p:spPr>
+          <a:xfrm>
+            <a:off x="8019288" y="3886200"/>
+            <a:ext cx="2706624" cy="0"/>
+          </a:xfrm>
+          <a:prstGeom prst="line">
+            <a:avLst/>
+          </a:prstGeom>
+          <a:noFill/>
+          <a:ln w="15240">
+            <a:solidFill>
+              <a:srgbClr val="003A63"/>
+            </a:solidFill>
+            <a:prstDash val="solid"/>
+          </a:ln>
+        </p:spPr>
+      </p:sp>
+      <p:sp>
+        <p:nvSpPr>
+          <p:cNvPr id="19" name="Text 17"/>
+          <p:cNvSpPr/>
+          <p:nvPr/>
+        </p:nvSpPr>
+        <p:spPr>
+          <a:xfrm>
+            <a:off x="7863840" y="3017520"/>
+            <a:ext cx="3017520" cy="201168"/>
+          </a:xfrm>
+          <a:prstGeom prst="rect">
+            <a:avLst/>
+          </a:prstGeom>
+          <a:noFill/>
+          <a:ln/>
+        </p:spPr>
+        <p:txBody>
+          <a:bodyPr wrap="square" lIns="0" tIns="0" rIns="0" bIns="0" rtlCol="0" anchor="ctr"/>
+          <a:lstStyle/>
+          <a:p>
+            <a:pPr algn="ctr" indent="0" marL="0">
+              <a:buNone/>
+            </a:pPr>
+            <a:r>
+              <a:rPr lang="en-US" sz="1050" b="1" dirty="0">
+                <a:solidFill>
+                  <a:srgbClr val="003A63"/>
+                </a:solidFill>
+                <a:latin typeface="Aptos" pitchFamily="34" charset="0"/>
+                <a:ea typeface="Aptos" pitchFamily="34" charset="-122"/>
+                <a:cs typeface="Aptos" pitchFamily="34" charset="-120"/>
+              </a:rPr>
+              <a:t>Measure and monitor</a:t>
+            </a:r>
+            <a:endParaRPr lang="en-US" sz="1050" dirty="0"/>
+          </a:p>
+        </p:txBody>
+      </p:sp>
+      <p:sp>
+        <p:nvSpPr>
+          <p:cNvPr id="20" name="Shape 18"/>
+          <p:cNvSpPr/>
+          <p:nvPr/>
+        </p:nvSpPr>
+        <p:spPr>
+          <a:xfrm>
+            <a:off x="7635240" y="4498848"/>
+            <a:ext cx="3474720" cy="1143000"/>
+          </a:xfrm>
+          <a:prstGeom prst="roundRect">
+            <a:avLst>
+              <a:gd name="adj" fmla="val 9600"/>
+            </a:avLst>
+          </a:prstGeom>
+          <a:solidFill>
             <a:srgbClr val="EAF6F8"/>
           </a:solidFill>
           <a:ln w="12700">
@@ -9058,14 +10463,14 @@
       </p:sp>
       <p:sp>
         <p:nvSpPr>
-          <p:cNvPr id="16" name="Text 14"/>
-          <p:cNvSpPr/>
-          <p:nvPr/>
-        </p:nvSpPr>
-        <p:spPr>
-          <a:xfrm>
-            <a:off x="8074152" y="3666744"/>
-            <a:ext cx="2825496" cy="256032"/>
+          <p:cNvPr id="21" name="Text 19"/>
+          <p:cNvSpPr/>
+          <p:nvPr/>
+        </p:nvSpPr>
+        <p:spPr>
+          <a:xfrm>
+            <a:off x="7799832" y="4645152"/>
+            <a:ext cx="3145536" cy="256032"/>
           </a:xfrm>
           <a:prstGeom prst="rect">
             <a:avLst/>
@@ -9089,7 +10494,7 @@
                 <a:ea typeface="Aptos" pitchFamily="34" charset="-122"/>
                 <a:cs typeface="Aptos" pitchFamily="34" charset="-120"/>
               </a:rPr>
-              <a:t>Use this for</a:t>
+              <a:t>How to validate</a:t>
             </a:r>
             <a:endParaRPr lang="en-US" sz="1300" dirty="0"/>
           </a:p>
@@ -9097,14 +10502,14 @@
       </p:sp>
       <p:sp>
         <p:nvSpPr>
-          <p:cNvPr id="17" name="Text 15"/>
-          <p:cNvSpPr/>
-          <p:nvPr/>
-        </p:nvSpPr>
-        <p:spPr>
-          <a:xfrm>
-            <a:off x="8074152" y="4023360"/>
-            <a:ext cx="2825496" cy="1097280"/>
+          <p:cNvPr id="22" name="Text 20"/>
+          <p:cNvSpPr/>
+          <p:nvPr/>
+        </p:nvSpPr>
+        <p:spPr>
+          <a:xfrm>
+            <a:off x="7799832" y="5001768"/>
+            <a:ext cx="3145536" cy="502920"/>
           </a:xfrm>
           <a:prstGeom prst="rect">
             <a:avLst/>
@@ -9130,7 +10535,7 @@
                 <a:ea typeface="Aptos" pitchFamily="34" charset="-122"/>
                 <a:cs typeface="Aptos" pitchFamily="34" charset="-120"/>
               </a:rPr>
-              <a:t>Connect the concept to public health decisions, safeguards, documentation, or implementation work.</a:t>
+              <a:t>Connect the concept to data quality, model performance, validation evidence, monitoring measures, and decisions that remain under human control.</a:t>
             </a:r>
             <a:endParaRPr lang="en-US" sz="1550" dirty="0"/>
           </a:p>
@@ -9304,8 +10709,8 @@
         </p:nvSpPr>
         <p:spPr>
           <a:xfrm>
-            <a:off x="9966960" y="6537960"/>
-            <a:ext cx="1645920" cy="201168"/>
+            <a:off x="9646920" y="6537960"/>
+            <a:ext cx="1965960" cy="201168"/>
           </a:xfrm>
           <a:prstGeom prst="rect">
             <a:avLst/>
@@ -9329,7 +10734,7 @@
                 <a:ea typeface="Aptos" pitchFamily="34" charset="-122"/>
                 <a:cs typeface="Aptos" pitchFamily="34" charset="-120"/>
               </a:rPr>
-              <a:t>Â© Paula Soper</a:t>
+              <a:t>Copyright Paula Soper</a:t>
             </a:r>
             <a:endParaRPr lang="en-US" sz="800" dirty="0"/>
           </a:p>
@@ -9692,46 +11097,7 @@
       </p:sp>
       <p:sp>
         <p:nvSpPr>
-          <p:cNvPr id="15" name="Text 13"/>
-          <p:cNvSpPr/>
-          <p:nvPr/>
-        </p:nvSpPr>
-        <p:spPr>
-          <a:xfrm>
-            <a:off x="8695944" y="3941064"/>
-            <a:ext cx="201168" cy="256032"/>
-          </a:xfrm>
-          <a:prstGeom prst="rect">
-            <a:avLst/>
-          </a:prstGeom>
-          <a:noFill/>
-          <a:ln/>
-        </p:spPr>
-        <p:txBody>
-          <a:bodyPr wrap="square" lIns="0" tIns="0" rIns="0" bIns="0" rtlCol="0" anchor="ctr"/>
-          <a:lstStyle/>
-          <a:p>
-            <a:pPr algn="ctr" indent="0" marL="0">
-              <a:buNone/>
-            </a:pPr>
-            <a:r>
-              <a:rPr lang="en-US" sz="1800" b="1" dirty="0">
-                <a:solidFill>
-                  <a:srgbClr val="0068B7"/>
-                </a:solidFill>
-                <a:latin typeface="Aptos" pitchFamily="34" charset="0"/>
-                <a:ea typeface="Aptos" pitchFamily="34" charset="-122"/>
-                <a:cs typeface="Aptos" pitchFamily="34" charset="-120"/>
-              </a:rPr>
-              <a:t>â†’</a:t>
-            </a:r>
-            <a:endParaRPr lang="en-US" sz="1800" dirty="0"/>
-          </a:p>
-        </p:txBody>
-      </p:sp>
-      <p:sp>
-        <p:nvSpPr>
-          <p:cNvPr id="16" name="Shape 14"/>
+          <p:cNvPr id="15" name="Shape 13"/>
           <p:cNvSpPr/>
           <p:nvPr/>
         </p:nvSpPr>
@@ -9758,7 +11124,7 @@
       </p:sp>
       <p:sp>
         <p:nvSpPr>
-          <p:cNvPr id="17" name="Text 15"/>
+          <p:cNvPr id="16" name="Text 14"/>
           <p:cNvSpPr/>
           <p:nvPr/>
         </p:nvSpPr>
@@ -9799,46 +11165,7 @@
       </p:sp>
       <p:sp>
         <p:nvSpPr>
-          <p:cNvPr id="18" name="Text 16"/>
-          <p:cNvSpPr/>
-          <p:nvPr/>
-        </p:nvSpPr>
-        <p:spPr>
-          <a:xfrm>
-            <a:off x="9985248" y="3941064"/>
-            <a:ext cx="201168" cy="256032"/>
-          </a:xfrm>
-          <a:prstGeom prst="rect">
-            <a:avLst/>
-          </a:prstGeom>
-          <a:noFill/>
-          <a:ln/>
-        </p:spPr>
-        <p:txBody>
-          <a:bodyPr wrap="square" lIns="0" tIns="0" rIns="0" bIns="0" rtlCol="0" anchor="ctr"/>
-          <a:lstStyle/>
-          <a:p>
-            <a:pPr algn="ctr" indent="0" marL="0">
-              <a:buNone/>
-            </a:pPr>
-            <a:r>
-              <a:rPr lang="en-US" sz="1800" b="1" dirty="0">
-                <a:solidFill>
-                  <a:srgbClr val="0068B7"/>
-                </a:solidFill>
-                <a:latin typeface="Aptos" pitchFamily="34" charset="0"/>
-                <a:ea typeface="Aptos" pitchFamily="34" charset="-122"/>
-                <a:cs typeface="Aptos" pitchFamily="34" charset="-120"/>
-              </a:rPr>
-              <a:t>â†’</a:t>
-            </a:r>
-            <a:endParaRPr lang="en-US" sz="1800" dirty="0"/>
-          </a:p>
-        </p:txBody>
-      </p:sp>
-      <p:sp>
-        <p:nvSpPr>
-          <p:cNvPr id="19" name="Shape 17"/>
+          <p:cNvPr id="17" name="Shape 15"/>
           <p:cNvSpPr/>
           <p:nvPr/>
         </p:nvSpPr>
@@ -9865,7 +11192,7 @@
       </p:sp>
       <p:sp>
         <p:nvSpPr>
-          <p:cNvPr id="20" name="Text 18"/>
+          <p:cNvPr id="18" name="Text 16"/>
           <p:cNvSpPr/>
           <p:nvPr/>
         </p:nvSpPr>
@@ -10072,8 +11399,8 @@
         </p:nvSpPr>
         <p:spPr>
           <a:xfrm>
-            <a:off x="9966960" y="6537960"/>
-            <a:ext cx="1645920" cy="201168"/>
+            <a:off x="9646920" y="6537960"/>
+            <a:ext cx="1965960" cy="201168"/>
           </a:xfrm>
           <a:prstGeom prst="rect">
             <a:avLst/>
@@ -10097,7 +11424,7 @@
                 <a:ea typeface="Aptos" pitchFamily="34" charset="-122"/>
                 <a:cs typeface="Aptos" pitchFamily="34" charset="-120"/>
               </a:rPr>
-              <a:t>Â© Paula Soper</a:t>
+              <a:t>Copyright Paula Soper</a:t>
             </a:r>
             <a:endParaRPr lang="en-US" sz="800" dirty="0"/>
           </a:p>
@@ -10192,7 +11519,7 @@
         <p:spPr>
           <a:xfrm>
             <a:off x="868680" y="1508760"/>
-            <a:ext cx="6537960" cy="4160520"/>
+            <a:ext cx="6309360" cy="4160520"/>
           </a:xfrm>
           <a:prstGeom prst="rect">
             <a:avLst/>
@@ -10229,12 +11556,12 @@
         </p:nvSpPr>
         <p:spPr>
           <a:xfrm>
-            <a:off x="7909560" y="1417320"/>
-            <a:ext cx="3154680" cy="1828800"/>
+            <a:off x="7635240" y="1325880"/>
+            <a:ext cx="3474720" cy="1325880"/>
           </a:xfrm>
           <a:prstGeom prst="roundRect">
             <a:avLst>
-              <a:gd name="adj" fmla="val 6000"/>
+              <a:gd name="adj" fmla="val 8276"/>
             </a:avLst>
           </a:prstGeom>
           <a:solidFill>
@@ -10256,8 +11583,8 @@
         </p:nvSpPr>
         <p:spPr>
           <a:xfrm>
-            <a:off x="8074152" y="1563624"/>
-            <a:ext cx="2825496" cy="256032"/>
+            <a:off x="7799832" y="1472184"/>
+            <a:ext cx="3145536" cy="256032"/>
           </a:xfrm>
           <a:prstGeom prst="rect">
             <a:avLst/>
@@ -10281,7 +11608,7 @@
                 <a:ea typeface="Aptos" pitchFamily="34" charset="-122"/>
                 <a:cs typeface="Aptos" pitchFamily="34" charset="-120"/>
               </a:rPr>
-              <a:t>Key idea</a:t>
+              <a:t>Data decision</a:t>
             </a:r>
             <a:endParaRPr lang="en-US" sz="1300" dirty="0"/>
           </a:p>
@@ -10295,8 +11622,8 @@
         </p:nvSpPr>
         <p:spPr>
           <a:xfrm>
-            <a:off x="8074152" y="1920240"/>
-            <a:ext cx="2825496" cy="1188720"/>
+            <a:off x="7799832" y="1828800"/>
+            <a:ext cx="3145536" cy="685800"/>
           </a:xfrm>
           <a:prstGeom prst="rect">
             <a:avLst/>
@@ -10336,15 +11663,206 @@
         </p:nvSpPr>
         <p:spPr>
           <a:xfrm>
-            <a:off x="7909560" y="3520440"/>
-            <a:ext cx="3154680" cy="1737360"/>
+            <a:off x="7635240" y="2788920"/>
+            <a:ext cx="3474720" cy="1536192"/>
           </a:xfrm>
           <a:prstGeom prst="roundRect">
             <a:avLst>
-              <a:gd name="adj" fmla="val 6316"/>
+              <a:gd name="adj" fmla="val 7143"/>
             </a:avLst>
           </a:prstGeom>
           <a:solidFill>
+            <a:srgbClr val="FFFFFF">
+              <a:alpha val="88000"/>
+            </a:srgbClr>
+          </a:solidFill>
+          <a:ln w="12700">
+            <a:solidFill>
+              <a:srgbClr val="D6E8F2"/>
+            </a:solidFill>
+            <a:prstDash val="solid"/>
+          </a:ln>
+        </p:spPr>
+      </p:sp>
+      <p:sp>
+        <p:nvSpPr>
+          <p:cNvPr id="14" name="Shape 12"/>
+          <p:cNvSpPr/>
+          <p:nvPr/>
+        </p:nvSpPr>
+        <p:spPr>
+          <a:xfrm>
+            <a:off x="8138160" y="3474720"/>
+            <a:ext cx="256032" cy="411480"/>
+          </a:xfrm>
+          <a:prstGeom prst="rect">
+            <a:avLst/>
+          </a:prstGeom>
+          <a:solidFill>
+            <a:srgbClr val="0068B7"/>
+          </a:solidFill>
+          <a:ln w="12700">
+            <a:solidFill>
+              <a:srgbClr val="0068B7"/>
+            </a:solidFill>
+            <a:prstDash val="solid"/>
+          </a:ln>
+        </p:spPr>
+      </p:sp>
+      <p:sp>
+        <p:nvSpPr>
+          <p:cNvPr id="15" name="Shape 13"/>
+          <p:cNvSpPr/>
+          <p:nvPr/>
+        </p:nvSpPr>
+        <p:spPr>
+          <a:xfrm>
+            <a:off x="8577072" y="3172968"/>
+            <a:ext cx="256032" cy="713232"/>
+          </a:xfrm>
+          <a:prstGeom prst="rect">
+            <a:avLst/>
+          </a:prstGeom>
+          <a:solidFill>
+            <a:srgbClr val="2F8A28"/>
+          </a:solidFill>
+          <a:ln w="12700">
+            <a:solidFill>
+              <a:srgbClr val="2F8A28"/>
+            </a:solidFill>
+            <a:prstDash val="solid"/>
+          </a:ln>
+        </p:spPr>
+      </p:sp>
+      <p:sp>
+        <p:nvSpPr>
+          <p:cNvPr id="16" name="Shape 14"/>
+          <p:cNvSpPr/>
+          <p:nvPr/>
+        </p:nvSpPr>
+        <p:spPr>
+          <a:xfrm>
+            <a:off x="9015984" y="2880360"/>
+            <a:ext cx="256032" cy="1005840"/>
+          </a:xfrm>
+          <a:prstGeom prst="rect">
+            <a:avLst/>
+          </a:prstGeom>
+          <a:solidFill>
+            <a:srgbClr val="D69A2D"/>
+          </a:solidFill>
+          <a:ln w="12700">
+            <a:solidFill>
+              <a:srgbClr val="D69A2D"/>
+            </a:solidFill>
+            <a:prstDash val="solid"/>
+          </a:ln>
+        </p:spPr>
+      </p:sp>
+      <p:sp>
+        <p:nvSpPr>
+          <p:cNvPr id="17" name="Shape 15"/>
+          <p:cNvSpPr/>
+          <p:nvPr/>
+        </p:nvSpPr>
+        <p:spPr>
+          <a:xfrm>
+            <a:off x="9454896" y="3319272"/>
+            <a:ext cx="256032" cy="566928"/>
+          </a:xfrm>
+          <a:prstGeom prst="rect">
+            <a:avLst/>
+          </a:prstGeom>
+          <a:solidFill>
+            <a:srgbClr val="6A4CA3"/>
+          </a:solidFill>
+          <a:ln w="12700">
+            <a:solidFill>
+              <a:srgbClr val="6A4CA3"/>
+            </a:solidFill>
+            <a:prstDash val="solid"/>
+          </a:ln>
+        </p:spPr>
+      </p:sp>
+      <p:sp>
+        <p:nvSpPr>
+          <p:cNvPr id="18" name="Shape 16"/>
+          <p:cNvSpPr/>
+          <p:nvPr/>
+        </p:nvSpPr>
+        <p:spPr>
+          <a:xfrm>
+            <a:off x="8019288" y="3886200"/>
+            <a:ext cx="2706624" cy="0"/>
+          </a:xfrm>
+          <a:prstGeom prst="line">
+            <a:avLst/>
+          </a:prstGeom>
+          <a:noFill/>
+          <a:ln w="15240">
+            <a:solidFill>
+              <a:srgbClr val="003A63"/>
+            </a:solidFill>
+            <a:prstDash val="solid"/>
+          </a:ln>
+        </p:spPr>
+      </p:sp>
+      <p:sp>
+        <p:nvSpPr>
+          <p:cNvPr id="19" name="Text 17"/>
+          <p:cNvSpPr/>
+          <p:nvPr/>
+        </p:nvSpPr>
+        <p:spPr>
+          <a:xfrm>
+            <a:off x="7863840" y="3017520"/>
+            <a:ext cx="3017520" cy="201168"/>
+          </a:xfrm>
+          <a:prstGeom prst="rect">
+            <a:avLst/>
+          </a:prstGeom>
+          <a:noFill/>
+          <a:ln/>
+        </p:spPr>
+        <p:txBody>
+          <a:bodyPr wrap="square" lIns="0" tIns="0" rIns="0" bIns="0" rtlCol="0" anchor="ctr"/>
+          <a:lstStyle/>
+          <a:p>
+            <a:pPr algn="ctr" indent="0" marL="0">
+              <a:buNone/>
+            </a:pPr>
+            <a:r>
+              <a:rPr lang="en-US" sz="1050" b="1" dirty="0">
+                <a:solidFill>
+                  <a:srgbClr val="003A63"/>
+                </a:solidFill>
+                <a:latin typeface="Aptos" pitchFamily="34" charset="0"/>
+                <a:ea typeface="Aptos" pitchFamily="34" charset="-122"/>
+                <a:cs typeface="Aptos" pitchFamily="34" charset="-120"/>
+              </a:rPr>
+              <a:t>Measure and monitor</a:t>
+            </a:r>
+            <a:endParaRPr lang="en-US" sz="1050" dirty="0"/>
+          </a:p>
+        </p:txBody>
+      </p:sp>
+      <p:sp>
+        <p:nvSpPr>
+          <p:cNvPr id="20" name="Shape 18"/>
+          <p:cNvSpPr/>
+          <p:nvPr/>
+        </p:nvSpPr>
+        <p:spPr>
+          <a:xfrm>
+            <a:off x="7635240" y="4498848"/>
+            <a:ext cx="3474720" cy="1143000"/>
+          </a:xfrm>
+          <a:prstGeom prst="roundRect">
+            <a:avLst>
+              <a:gd name="adj" fmla="val 9600"/>
+            </a:avLst>
+          </a:prstGeom>
+          <a:solidFill>
             <a:srgbClr val="EAF6F8"/>
           </a:solidFill>
           <a:ln w="12700">
@@ -10357,14 +11875,14 @@
       </p:sp>
       <p:sp>
         <p:nvSpPr>
-          <p:cNvPr id="14" name="Text 12"/>
-          <p:cNvSpPr/>
-          <p:nvPr/>
-        </p:nvSpPr>
-        <p:spPr>
-          <a:xfrm>
-            <a:off x="8074152" y="3666744"/>
-            <a:ext cx="2825496" cy="256032"/>
+          <p:cNvPr id="21" name="Text 19"/>
+          <p:cNvSpPr/>
+          <p:nvPr/>
+        </p:nvSpPr>
+        <p:spPr>
+          <a:xfrm>
+            <a:off x="7799832" y="4645152"/>
+            <a:ext cx="3145536" cy="256032"/>
           </a:xfrm>
           <a:prstGeom prst="rect">
             <a:avLst/>
@@ -10388,7 +11906,7 @@
                 <a:ea typeface="Aptos" pitchFamily="34" charset="-122"/>
                 <a:cs typeface="Aptos" pitchFamily="34" charset="-120"/>
               </a:rPr>
-              <a:t>Use this for</a:t>
+              <a:t>How to validate</a:t>
             </a:r>
             <a:endParaRPr lang="en-US" sz="1300" dirty="0"/>
           </a:p>
@@ -10396,14 +11914,14 @@
       </p:sp>
       <p:sp>
         <p:nvSpPr>
-          <p:cNvPr id="15" name="Text 13"/>
-          <p:cNvSpPr/>
-          <p:nvPr/>
-        </p:nvSpPr>
-        <p:spPr>
-          <a:xfrm>
-            <a:off x="8074152" y="4023360"/>
-            <a:ext cx="2825496" cy="1097280"/>
+          <p:cNvPr id="22" name="Text 20"/>
+          <p:cNvSpPr/>
+          <p:nvPr/>
+        </p:nvSpPr>
+        <p:spPr>
+          <a:xfrm>
+            <a:off x="7799832" y="5001768"/>
+            <a:ext cx="3145536" cy="502920"/>
           </a:xfrm>
           <a:prstGeom prst="rect">
             <a:avLst/>
@@ -10429,7 +11947,7 @@
                 <a:ea typeface="Aptos" pitchFamily="34" charset="-122"/>
                 <a:cs typeface="Aptos" pitchFamily="34" charset="-120"/>
               </a:rPr>
-              <a:t>Connect the concept to public health decisions, safeguards, documentation, or implementation work.</a:t>
+              <a:t>Connect the concept to data quality, model performance, validation evidence, monitoring measures, and decisions that remain under human control.</a:t>
             </a:r>
             <a:endParaRPr lang="en-US" sz="1550" dirty="0"/>
           </a:p>
@@ -10603,8 +12121,8 @@
         </p:nvSpPr>
         <p:spPr>
           <a:xfrm>
-            <a:off x="9966960" y="6537960"/>
-            <a:ext cx="1645920" cy="201168"/>
+            <a:off x="9646920" y="6537960"/>
+            <a:ext cx="1965960" cy="201168"/>
           </a:xfrm>
           <a:prstGeom prst="rect">
             <a:avLst/>
@@ -10628,7 +12146,7 @@
                 <a:ea typeface="Aptos" pitchFamily="34" charset="-122"/>
                 <a:cs typeface="Aptos" pitchFamily="34" charset="-120"/>
               </a:rPr>
-              <a:t>Â© Paula Soper</a:t>
+              <a:t>Copyright Paula Soper</a:t>
             </a:r>
             <a:endParaRPr lang="en-US" sz="800" dirty="0"/>
           </a:p>
@@ -10675,77 +12193,13 @@
       </p:sp>
       <p:sp>
         <p:nvSpPr>
-          <p:cNvPr id="8" name="Shape 6"/>
+          <p:cNvPr id="8" name="Text 6"/>
           <p:cNvSpPr/>
           <p:nvPr/>
         </p:nvSpPr>
         <p:spPr>
           <a:xfrm>
             <a:off x="640080" y="658368"/>
-            <a:ext cx="420624" cy="420624"/>
-          </a:xfrm>
-          <a:prstGeom prst="ellipse">
-            <a:avLst/>
-          </a:prstGeom>
-          <a:solidFill>
-            <a:srgbClr val="0068B7"/>
-          </a:solidFill>
-          <a:ln w="12700">
-            <a:solidFill>
-              <a:srgbClr val="0068B7"/>
-            </a:solidFill>
-            <a:prstDash val="solid"/>
-          </a:ln>
-        </p:spPr>
-      </p:sp>
-      <p:sp>
-        <p:nvSpPr>
-          <p:cNvPr id="9" name="Text 7"/>
-          <p:cNvSpPr/>
-          <p:nvPr/>
-        </p:nvSpPr>
-        <p:spPr>
-          <a:xfrm>
-            <a:off x="640080" y="731520"/>
-            <a:ext cx="420624" cy="164592"/>
-          </a:xfrm>
-          <a:prstGeom prst="rect">
-            <a:avLst/>
-          </a:prstGeom>
-          <a:noFill/>
-          <a:ln/>
-        </p:spPr>
-        <p:txBody>
-          <a:bodyPr wrap="square" lIns="0" tIns="0" rIns="0" bIns="0" rtlCol="0" anchor="ctr"/>
-          <a:lstStyle/>
-          <a:p>
-            <a:pPr algn="ctr" indent="0" marL="0">
-              <a:buNone/>
-            </a:pPr>
-            <a:r>
-              <a:rPr lang="en-US" sz="1100" b="1" dirty="0">
-                <a:solidFill>
-                  <a:srgbClr val="FFFFFF"/>
-                </a:solidFill>
-                <a:latin typeface="Aptos" pitchFamily="34" charset="0"/>
-                <a:ea typeface="Aptos" pitchFamily="34" charset="-122"/>
-                <a:cs typeface="Aptos" pitchFamily="34" charset="-120"/>
-              </a:rPr>
-              <a:t>13</a:t>
-            </a:r>
-            <a:endParaRPr lang="en-US" sz="1100" dirty="0"/>
-          </a:p>
-        </p:txBody>
-      </p:sp>
-      <p:sp>
-        <p:nvSpPr>
-          <p:cNvPr id="10" name="Text 8"/>
-          <p:cNvSpPr/>
-          <p:nvPr/>
-        </p:nvSpPr>
-        <p:spPr>
-          <a:xfrm>
-            <a:off x="640080" y="621792"/>
             <a:ext cx="10881360" cy="713232"/>
           </a:xfrm>
           <a:prstGeom prst="rect">
@@ -10780,14 +12234,14 @@
       </p:sp>
       <p:sp>
         <p:nvSpPr>
-          <p:cNvPr id="11" name="Text 9"/>
+          <p:cNvPr id="9" name="Text 7"/>
           <p:cNvSpPr/>
           <p:nvPr/>
         </p:nvSpPr>
         <p:spPr>
           <a:xfrm>
             <a:off x="868680" y="1508760"/>
-            <a:ext cx="6537960" cy="4160520"/>
+            <a:ext cx="6309360" cy="4160520"/>
           </a:xfrm>
           <a:prstGeom prst="rect">
             <a:avLst/>
@@ -10846,18 +12300,18 @@
       </p:sp>
       <p:sp>
         <p:nvSpPr>
-          <p:cNvPr id="12" name="Shape 10"/>
-          <p:cNvSpPr/>
-          <p:nvPr/>
-        </p:nvSpPr>
-        <p:spPr>
-          <a:xfrm>
-            <a:off x="7909560" y="1417320"/>
-            <a:ext cx="3154680" cy="1828800"/>
+          <p:cNvPr id="10" name="Shape 8"/>
+          <p:cNvSpPr/>
+          <p:nvPr/>
+        </p:nvSpPr>
+        <p:spPr>
+          <a:xfrm>
+            <a:off x="7635240" y="1325880"/>
+            <a:ext cx="3474720" cy="1325880"/>
           </a:xfrm>
           <a:prstGeom prst="roundRect">
             <a:avLst>
-              <a:gd name="adj" fmla="val 6000"/>
+              <a:gd name="adj" fmla="val 8276"/>
             </a:avLst>
           </a:prstGeom>
           <a:solidFill>
@@ -10873,14 +12327,14 @@
       </p:sp>
       <p:sp>
         <p:nvSpPr>
-          <p:cNvPr id="13" name="Text 11"/>
-          <p:cNvSpPr/>
-          <p:nvPr/>
-        </p:nvSpPr>
-        <p:spPr>
-          <a:xfrm>
-            <a:off x="8074152" y="1563624"/>
-            <a:ext cx="2825496" cy="256032"/>
+          <p:cNvPr id="11" name="Text 9"/>
+          <p:cNvSpPr/>
+          <p:nvPr/>
+        </p:nvSpPr>
+        <p:spPr>
+          <a:xfrm>
+            <a:off x="7799832" y="1472184"/>
+            <a:ext cx="3145536" cy="256032"/>
           </a:xfrm>
           <a:prstGeom prst="rect">
             <a:avLst/>
@@ -10904,7 +12358,7 @@
                 <a:ea typeface="Aptos" pitchFamily="34" charset="-122"/>
                 <a:cs typeface="Aptos" pitchFamily="34" charset="-120"/>
               </a:rPr>
-              <a:t>Key idea</a:t>
+              <a:t>Data decision</a:t>
             </a:r>
             <a:endParaRPr lang="en-US" sz="1300" dirty="0"/>
           </a:p>
@@ -10912,14 +12366,14 @@
       </p:sp>
       <p:sp>
         <p:nvSpPr>
-          <p:cNvPr id="14" name="Text 12"/>
-          <p:cNvSpPr/>
-          <p:nvPr/>
-        </p:nvSpPr>
-        <p:spPr>
-          <a:xfrm>
-            <a:off x="8074152" y="1920240"/>
-            <a:ext cx="2825496" cy="1188720"/>
+          <p:cNvPr id="12" name="Text 10"/>
+          <p:cNvSpPr/>
+          <p:nvPr/>
+        </p:nvSpPr>
+        <p:spPr>
+          <a:xfrm>
+            <a:off x="7799832" y="1828800"/>
+            <a:ext cx="3145536" cy="685800"/>
           </a:xfrm>
           <a:prstGeom prst="rect">
             <a:avLst/>
@@ -10953,21 +12407,212 @@
       </p:sp>
       <p:sp>
         <p:nvSpPr>
-          <p:cNvPr id="15" name="Shape 13"/>
-          <p:cNvSpPr/>
-          <p:nvPr/>
-        </p:nvSpPr>
-        <p:spPr>
-          <a:xfrm>
-            <a:off x="7909560" y="3520440"/>
-            <a:ext cx="3154680" cy="1737360"/>
+          <p:cNvPr id="13" name="Shape 11"/>
+          <p:cNvSpPr/>
+          <p:nvPr/>
+        </p:nvSpPr>
+        <p:spPr>
+          <a:xfrm>
+            <a:off x="7635240" y="2788920"/>
+            <a:ext cx="3474720" cy="1536192"/>
           </a:xfrm>
           <a:prstGeom prst="roundRect">
             <a:avLst>
-              <a:gd name="adj" fmla="val 6316"/>
+              <a:gd name="adj" fmla="val 7143"/>
             </a:avLst>
           </a:prstGeom>
           <a:solidFill>
+            <a:srgbClr val="FFFFFF">
+              <a:alpha val="88000"/>
+            </a:srgbClr>
+          </a:solidFill>
+          <a:ln w="12700">
+            <a:solidFill>
+              <a:srgbClr val="D6E8F2"/>
+            </a:solidFill>
+            <a:prstDash val="solid"/>
+          </a:ln>
+        </p:spPr>
+      </p:sp>
+      <p:sp>
+        <p:nvSpPr>
+          <p:cNvPr id="14" name="Shape 12"/>
+          <p:cNvSpPr/>
+          <p:nvPr/>
+        </p:nvSpPr>
+        <p:spPr>
+          <a:xfrm>
+            <a:off x="8138160" y="3474720"/>
+            <a:ext cx="256032" cy="411480"/>
+          </a:xfrm>
+          <a:prstGeom prst="rect">
+            <a:avLst/>
+          </a:prstGeom>
+          <a:solidFill>
+            <a:srgbClr val="0068B7"/>
+          </a:solidFill>
+          <a:ln w="12700">
+            <a:solidFill>
+              <a:srgbClr val="0068B7"/>
+            </a:solidFill>
+            <a:prstDash val="solid"/>
+          </a:ln>
+        </p:spPr>
+      </p:sp>
+      <p:sp>
+        <p:nvSpPr>
+          <p:cNvPr id="15" name="Shape 13"/>
+          <p:cNvSpPr/>
+          <p:nvPr/>
+        </p:nvSpPr>
+        <p:spPr>
+          <a:xfrm>
+            <a:off x="8577072" y="3172968"/>
+            <a:ext cx="256032" cy="713232"/>
+          </a:xfrm>
+          <a:prstGeom prst="rect">
+            <a:avLst/>
+          </a:prstGeom>
+          <a:solidFill>
+            <a:srgbClr val="2F8A28"/>
+          </a:solidFill>
+          <a:ln w="12700">
+            <a:solidFill>
+              <a:srgbClr val="2F8A28"/>
+            </a:solidFill>
+            <a:prstDash val="solid"/>
+          </a:ln>
+        </p:spPr>
+      </p:sp>
+      <p:sp>
+        <p:nvSpPr>
+          <p:cNvPr id="16" name="Shape 14"/>
+          <p:cNvSpPr/>
+          <p:nvPr/>
+        </p:nvSpPr>
+        <p:spPr>
+          <a:xfrm>
+            <a:off x="9015984" y="2880360"/>
+            <a:ext cx="256032" cy="1005840"/>
+          </a:xfrm>
+          <a:prstGeom prst="rect">
+            <a:avLst/>
+          </a:prstGeom>
+          <a:solidFill>
+            <a:srgbClr val="D69A2D"/>
+          </a:solidFill>
+          <a:ln w="12700">
+            <a:solidFill>
+              <a:srgbClr val="D69A2D"/>
+            </a:solidFill>
+            <a:prstDash val="solid"/>
+          </a:ln>
+        </p:spPr>
+      </p:sp>
+      <p:sp>
+        <p:nvSpPr>
+          <p:cNvPr id="17" name="Shape 15"/>
+          <p:cNvSpPr/>
+          <p:nvPr/>
+        </p:nvSpPr>
+        <p:spPr>
+          <a:xfrm>
+            <a:off x="9454896" y="3319272"/>
+            <a:ext cx="256032" cy="566928"/>
+          </a:xfrm>
+          <a:prstGeom prst="rect">
+            <a:avLst/>
+          </a:prstGeom>
+          <a:solidFill>
+            <a:srgbClr val="6A4CA3"/>
+          </a:solidFill>
+          <a:ln w="12700">
+            <a:solidFill>
+              <a:srgbClr val="6A4CA3"/>
+            </a:solidFill>
+            <a:prstDash val="solid"/>
+          </a:ln>
+        </p:spPr>
+      </p:sp>
+      <p:sp>
+        <p:nvSpPr>
+          <p:cNvPr id="18" name="Shape 16"/>
+          <p:cNvSpPr/>
+          <p:nvPr/>
+        </p:nvSpPr>
+        <p:spPr>
+          <a:xfrm>
+            <a:off x="8019288" y="3886200"/>
+            <a:ext cx="2706624" cy="0"/>
+          </a:xfrm>
+          <a:prstGeom prst="line">
+            <a:avLst/>
+          </a:prstGeom>
+          <a:noFill/>
+          <a:ln w="15240">
+            <a:solidFill>
+              <a:srgbClr val="003A63"/>
+            </a:solidFill>
+            <a:prstDash val="solid"/>
+          </a:ln>
+        </p:spPr>
+      </p:sp>
+      <p:sp>
+        <p:nvSpPr>
+          <p:cNvPr id="19" name="Text 17"/>
+          <p:cNvSpPr/>
+          <p:nvPr/>
+        </p:nvSpPr>
+        <p:spPr>
+          <a:xfrm>
+            <a:off x="7863840" y="3017520"/>
+            <a:ext cx="3017520" cy="201168"/>
+          </a:xfrm>
+          <a:prstGeom prst="rect">
+            <a:avLst/>
+          </a:prstGeom>
+          <a:noFill/>
+          <a:ln/>
+        </p:spPr>
+        <p:txBody>
+          <a:bodyPr wrap="square" lIns="0" tIns="0" rIns="0" bIns="0" rtlCol="0" anchor="ctr"/>
+          <a:lstStyle/>
+          <a:p>
+            <a:pPr algn="ctr" indent="0" marL="0">
+              <a:buNone/>
+            </a:pPr>
+            <a:r>
+              <a:rPr lang="en-US" sz="1050" b="1" dirty="0">
+                <a:solidFill>
+                  <a:srgbClr val="003A63"/>
+                </a:solidFill>
+                <a:latin typeface="Aptos" pitchFamily="34" charset="0"/>
+                <a:ea typeface="Aptos" pitchFamily="34" charset="-122"/>
+                <a:cs typeface="Aptos" pitchFamily="34" charset="-120"/>
+              </a:rPr>
+              <a:t>Measure and monitor</a:t>
+            </a:r>
+            <a:endParaRPr lang="en-US" sz="1050" dirty="0"/>
+          </a:p>
+        </p:txBody>
+      </p:sp>
+      <p:sp>
+        <p:nvSpPr>
+          <p:cNvPr id="20" name="Shape 18"/>
+          <p:cNvSpPr/>
+          <p:nvPr/>
+        </p:nvSpPr>
+        <p:spPr>
+          <a:xfrm>
+            <a:off x="7635240" y="4498848"/>
+            <a:ext cx="3474720" cy="1143000"/>
+          </a:xfrm>
+          <a:prstGeom prst="roundRect">
+            <a:avLst>
+              <a:gd name="adj" fmla="val 9600"/>
+            </a:avLst>
+          </a:prstGeom>
+          <a:solidFill>
             <a:srgbClr val="EAF6F8"/>
           </a:solidFill>
           <a:ln w="12700">
@@ -10980,14 +12625,14 @@
       </p:sp>
       <p:sp>
         <p:nvSpPr>
-          <p:cNvPr id="16" name="Text 14"/>
-          <p:cNvSpPr/>
-          <p:nvPr/>
-        </p:nvSpPr>
-        <p:spPr>
-          <a:xfrm>
-            <a:off x="8074152" y="3666744"/>
-            <a:ext cx="2825496" cy="256032"/>
+          <p:cNvPr id="21" name="Text 19"/>
+          <p:cNvSpPr/>
+          <p:nvPr/>
+        </p:nvSpPr>
+        <p:spPr>
+          <a:xfrm>
+            <a:off x="7799832" y="4645152"/>
+            <a:ext cx="3145536" cy="256032"/>
           </a:xfrm>
           <a:prstGeom prst="rect">
             <a:avLst/>
@@ -11011,7 +12656,7 @@
                 <a:ea typeface="Aptos" pitchFamily="34" charset="-122"/>
                 <a:cs typeface="Aptos" pitchFamily="34" charset="-120"/>
               </a:rPr>
-              <a:t>Use this for</a:t>
+              <a:t>How to validate</a:t>
             </a:r>
             <a:endParaRPr lang="en-US" sz="1300" dirty="0"/>
           </a:p>
@@ -11019,14 +12664,14 @@
       </p:sp>
       <p:sp>
         <p:nvSpPr>
-          <p:cNvPr id="17" name="Text 15"/>
-          <p:cNvSpPr/>
-          <p:nvPr/>
-        </p:nvSpPr>
-        <p:spPr>
-          <a:xfrm>
-            <a:off x="8074152" y="4023360"/>
-            <a:ext cx="2825496" cy="1097280"/>
+          <p:cNvPr id="22" name="Text 20"/>
+          <p:cNvSpPr/>
+          <p:nvPr/>
+        </p:nvSpPr>
+        <p:spPr>
+          <a:xfrm>
+            <a:off x="7799832" y="5001768"/>
+            <a:ext cx="3145536" cy="502920"/>
           </a:xfrm>
           <a:prstGeom prst="rect">
             <a:avLst/>
@@ -11052,7 +12697,7 @@
                 <a:ea typeface="Aptos" pitchFamily="34" charset="-122"/>
                 <a:cs typeface="Aptos" pitchFamily="34" charset="-120"/>
               </a:rPr>
-              <a:t>Connect the concept to public health decisions, safeguards, documentation, or implementation work.</a:t>
+              <a:t>Use the assignment to test whether you can explain the concept, apply it to a realistic public health situation, and identify what would need review before the work moves forward.</a:t>
             </a:r>
             <a:endParaRPr lang="en-US" sz="1550" dirty="0"/>
           </a:p>
@@ -11226,8 +12871,8 @@
         </p:nvSpPr>
         <p:spPr>
           <a:xfrm>
-            <a:off x="9966960" y="6537960"/>
-            <a:ext cx="1645920" cy="201168"/>
+            <a:off x="9646920" y="6537960"/>
+            <a:ext cx="1965960" cy="201168"/>
           </a:xfrm>
           <a:prstGeom prst="rect">
             <a:avLst/>
@@ -11251,7 +12896,7 @@
                 <a:ea typeface="Aptos" pitchFamily="34" charset="-122"/>
                 <a:cs typeface="Aptos" pitchFamily="34" charset="-120"/>
               </a:rPr>
-              <a:t>Â© Paula Soper</a:t>
+              <a:t>Copyright Paula Soper</a:t>
             </a:r>
             <a:endParaRPr lang="en-US" sz="800" dirty="0"/>
           </a:p>
@@ -11298,77 +12943,13 @@
       </p:sp>
       <p:sp>
         <p:nvSpPr>
-          <p:cNvPr id="8" name="Shape 6"/>
+          <p:cNvPr id="8" name="Text 6"/>
           <p:cNvSpPr/>
           <p:nvPr/>
         </p:nvSpPr>
         <p:spPr>
           <a:xfrm>
             <a:off x="640080" y="658368"/>
-            <a:ext cx="420624" cy="420624"/>
-          </a:xfrm>
-          <a:prstGeom prst="ellipse">
-            <a:avLst/>
-          </a:prstGeom>
-          <a:solidFill>
-            <a:srgbClr val="0068B7"/>
-          </a:solidFill>
-          <a:ln w="12700">
-            <a:solidFill>
-              <a:srgbClr val="0068B7"/>
-            </a:solidFill>
-            <a:prstDash val="solid"/>
-          </a:ln>
-        </p:spPr>
-      </p:sp>
-      <p:sp>
-        <p:nvSpPr>
-          <p:cNvPr id="9" name="Text 7"/>
-          <p:cNvSpPr/>
-          <p:nvPr/>
-        </p:nvSpPr>
-        <p:spPr>
-          <a:xfrm>
-            <a:off x="640080" y="731520"/>
-            <a:ext cx="420624" cy="164592"/>
-          </a:xfrm>
-          <a:prstGeom prst="rect">
-            <a:avLst/>
-          </a:prstGeom>
-          <a:noFill/>
-          <a:ln/>
-        </p:spPr>
-        <p:txBody>
-          <a:bodyPr wrap="square" lIns="0" tIns="0" rIns="0" bIns="0" rtlCol="0" anchor="ctr"/>
-          <a:lstStyle/>
-          <a:p>
-            <a:pPr algn="ctr" indent="0" marL="0">
-              <a:buNone/>
-            </a:pPr>
-            <a:r>
-              <a:rPr lang="en-US" sz="1100" b="1" dirty="0">
-                <a:solidFill>
-                  <a:srgbClr val="FFFFFF"/>
-                </a:solidFill>
-                <a:latin typeface="Aptos" pitchFamily="34" charset="0"/>
-                <a:ea typeface="Aptos" pitchFamily="34" charset="-122"/>
-                <a:cs typeface="Aptos" pitchFamily="34" charset="-120"/>
-              </a:rPr>
-              <a:t>14</a:t>
-            </a:r>
-            <a:endParaRPr lang="en-US" sz="1100" dirty="0"/>
-          </a:p>
-        </p:txBody>
-      </p:sp>
-      <p:sp>
-        <p:nvSpPr>
-          <p:cNvPr id="10" name="Text 8"/>
-          <p:cNvSpPr/>
-          <p:nvPr/>
-        </p:nvSpPr>
-        <p:spPr>
-          <a:xfrm>
-            <a:off x="640080" y="621792"/>
             <a:ext cx="10881360" cy="713232"/>
           </a:xfrm>
           <a:prstGeom prst="rect">
@@ -11403,14 +12984,14 @@
       </p:sp>
       <p:sp>
         <p:nvSpPr>
-          <p:cNvPr id="11" name="Text 9"/>
+          <p:cNvPr id="9" name="Text 7"/>
           <p:cNvSpPr/>
           <p:nvPr/>
         </p:nvSpPr>
         <p:spPr>
           <a:xfrm>
             <a:off x="868680" y="1508760"/>
-            <a:ext cx="6537960" cy="4160520"/>
+            <a:ext cx="6309360" cy="4160520"/>
           </a:xfrm>
           <a:prstGeom prst="rect">
             <a:avLst/>
@@ -11469,18 +13050,18 @@
       </p:sp>
       <p:sp>
         <p:nvSpPr>
-          <p:cNvPr id="12" name="Shape 10"/>
-          <p:cNvSpPr/>
-          <p:nvPr/>
-        </p:nvSpPr>
-        <p:spPr>
-          <a:xfrm>
-            <a:off x="7909560" y="1417320"/>
-            <a:ext cx="3154680" cy="1828800"/>
+          <p:cNvPr id="10" name="Shape 8"/>
+          <p:cNvSpPr/>
+          <p:nvPr/>
+        </p:nvSpPr>
+        <p:spPr>
+          <a:xfrm>
+            <a:off x="7635240" y="1325880"/>
+            <a:ext cx="3474720" cy="1325880"/>
           </a:xfrm>
           <a:prstGeom prst="roundRect">
             <a:avLst>
-              <a:gd name="adj" fmla="val 6000"/>
+              <a:gd name="adj" fmla="val 8276"/>
             </a:avLst>
           </a:prstGeom>
           <a:solidFill>
@@ -11496,14 +13077,14 @@
       </p:sp>
       <p:sp>
         <p:nvSpPr>
-          <p:cNvPr id="13" name="Text 11"/>
-          <p:cNvSpPr/>
-          <p:nvPr/>
-        </p:nvSpPr>
-        <p:spPr>
-          <a:xfrm>
-            <a:off x="8074152" y="1563624"/>
-            <a:ext cx="2825496" cy="256032"/>
+          <p:cNvPr id="11" name="Text 9"/>
+          <p:cNvSpPr/>
+          <p:nvPr/>
+        </p:nvSpPr>
+        <p:spPr>
+          <a:xfrm>
+            <a:off x="7799832" y="1472184"/>
+            <a:ext cx="3145536" cy="256032"/>
           </a:xfrm>
           <a:prstGeom prst="rect">
             <a:avLst/>
@@ -11527,7 +13108,7 @@
                 <a:ea typeface="Aptos" pitchFamily="34" charset="-122"/>
                 <a:cs typeface="Aptos" pitchFamily="34" charset="-120"/>
               </a:rPr>
-              <a:t>Key idea</a:t>
+              <a:t>Data decision</a:t>
             </a:r>
             <a:endParaRPr lang="en-US" sz="1300" dirty="0"/>
           </a:p>
@@ -11535,14 +13116,14 @@
       </p:sp>
       <p:sp>
         <p:nvSpPr>
-          <p:cNvPr id="14" name="Text 12"/>
-          <p:cNvSpPr/>
-          <p:nvPr/>
-        </p:nvSpPr>
-        <p:spPr>
-          <a:xfrm>
-            <a:off x="8074152" y="1920240"/>
-            <a:ext cx="2825496" cy="1188720"/>
+          <p:cNvPr id="12" name="Text 10"/>
+          <p:cNvSpPr/>
+          <p:nvPr/>
+        </p:nvSpPr>
+        <p:spPr>
+          <a:xfrm>
+            <a:off x="7799832" y="1828800"/>
+            <a:ext cx="3145536" cy="685800"/>
           </a:xfrm>
           <a:prstGeom prst="rect">
             <a:avLst/>
@@ -11576,21 +13157,212 @@
       </p:sp>
       <p:sp>
         <p:nvSpPr>
-          <p:cNvPr id="15" name="Shape 13"/>
-          <p:cNvSpPr/>
-          <p:nvPr/>
-        </p:nvSpPr>
-        <p:spPr>
-          <a:xfrm>
-            <a:off x="7909560" y="3520440"/>
-            <a:ext cx="3154680" cy="1737360"/>
+          <p:cNvPr id="13" name="Shape 11"/>
+          <p:cNvSpPr/>
+          <p:nvPr/>
+        </p:nvSpPr>
+        <p:spPr>
+          <a:xfrm>
+            <a:off x="7635240" y="2788920"/>
+            <a:ext cx="3474720" cy="1536192"/>
           </a:xfrm>
           <a:prstGeom prst="roundRect">
             <a:avLst>
-              <a:gd name="adj" fmla="val 6316"/>
+              <a:gd name="adj" fmla="val 7143"/>
             </a:avLst>
           </a:prstGeom>
           <a:solidFill>
+            <a:srgbClr val="FFFFFF">
+              <a:alpha val="88000"/>
+            </a:srgbClr>
+          </a:solidFill>
+          <a:ln w="12700">
+            <a:solidFill>
+              <a:srgbClr val="D6E8F2"/>
+            </a:solidFill>
+            <a:prstDash val="solid"/>
+          </a:ln>
+        </p:spPr>
+      </p:sp>
+      <p:sp>
+        <p:nvSpPr>
+          <p:cNvPr id="14" name="Shape 12"/>
+          <p:cNvSpPr/>
+          <p:nvPr/>
+        </p:nvSpPr>
+        <p:spPr>
+          <a:xfrm>
+            <a:off x="8138160" y="3474720"/>
+            <a:ext cx="256032" cy="411480"/>
+          </a:xfrm>
+          <a:prstGeom prst="rect">
+            <a:avLst/>
+          </a:prstGeom>
+          <a:solidFill>
+            <a:srgbClr val="0068B7"/>
+          </a:solidFill>
+          <a:ln w="12700">
+            <a:solidFill>
+              <a:srgbClr val="0068B7"/>
+            </a:solidFill>
+            <a:prstDash val="solid"/>
+          </a:ln>
+        </p:spPr>
+      </p:sp>
+      <p:sp>
+        <p:nvSpPr>
+          <p:cNvPr id="15" name="Shape 13"/>
+          <p:cNvSpPr/>
+          <p:nvPr/>
+        </p:nvSpPr>
+        <p:spPr>
+          <a:xfrm>
+            <a:off x="8577072" y="3172968"/>
+            <a:ext cx="256032" cy="713232"/>
+          </a:xfrm>
+          <a:prstGeom prst="rect">
+            <a:avLst/>
+          </a:prstGeom>
+          <a:solidFill>
+            <a:srgbClr val="2F8A28"/>
+          </a:solidFill>
+          <a:ln w="12700">
+            <a:solidFill>
+              <a:srgbClr val="2F8A28"/>
+            </a:solidFill>
+            <a:prstDash val="solid"/>
+          </a:ln>
+        </p:spPr>
+      </p:sp>
+      <p:sp>
+        <p:nvSpPr>
+          <p:cNvPr id="16" name="Shape 14"/>
+          <p:cNvSpPr/>
+          <p:nvPr/>
+        </p:nvSpPr>
+        <p:spPr>
+          <a:xfrm>
+            <a:off x="9015984" y="2880360"/>
+            <a:ext cx="256032" cy="1005840"/>
+          </a:xfrm>
+          <a:prstGeom prst="rect">
+            <a:avLst/>
+          </a:prstGeom>
+          <a:solidFill>
+            <a:srgbClr val="D69A2D"/>
+          </a:solidFill>
+          <a:ln w="12700">
+            <a:solidFill>
+              <a:srgbClr val="D69A2D"/>
+            </a:solidFill>
+            <a:prstDash val="solid"/>
+          </a:ln>
+        </p:spPr>
+      </p:sp>
+      <p:sp>
+        <p:nvSpPr>
+          <p:cNvPr id="17" name="Shape 15"/>
+          <p:cNvSpPr/>
+          <p:nvPr/>
+        </p:nvSpPr>
+        <p:spPr>
+          <a:xfrm>
+            <a:off x="9454896" y="3319272"/>
+            <a:ext cx="256032" cy="566928"/>
+          </a:xfrm>
+          <a:prstGeom prst="rect">
+            <a:avLst/>
+          </a:prstGeom>
+          <a:solidFill>
+            <a:srgbClr val="6A4CA3"/>
+          </a:solidFill>
+          <a:ln w="12700">
+            <a:solidFill>
+              <a:srgbClr val="6A4CA3"/>
+            </a:solidFill>
+            <a:prstDash val="solid"/>
+          </a:ln>
+        </p:spPr>
+      </p:sp>
+      <p:sp>
+        <p:nvSpPr>
+          <p:cNvPr id="18" name="Shape 16"/>
+          <p:cNvSpPr/>
+          <p:nvPr/>
+        </p:nvSpPr>
+        <p:spPr>
+          <a:xfrm>
+            <a:off x="8019288" y="3886200"/>
+            <a:ext cx="2706624" cy="0"/>
+          </a:xfrm>
+          <a:prstGeom prst="line">
+            <a:avLst/>
+          </a:prstGeom>
+          <a:noFill/>
+          <a:ln w="15240">
+            <a:solidFill>
+              <a:srgbClr val="003A63"/>
+            </a:solidFill>
+            <a:prstDash val="solid"/>
+          </a:ln>
+        </p:spPr>
+      </p:sp>
+      <p:sp>
+        <p:nvSpPr>
+          <p:cNvPr id="19" name="Text 17"/>
+          <p:cNvSpPr/>
+          <p:nvPr/>
+        </p:nvSpPr>
+        <p:spPr>
+          <a:xfrm>
+            <a:off x="7863840" y="3017520"/>
+            <a:ext cx="3017520" cy="201168"/>
+          </a:xfrm>
+          <a:prstGeom prst="rect">
+            <a:avLst/>
+          </a:prstGeom>
+          <a:noFill/>
+          <a:ln/>
+        </p:spPr>
+        <p:txBody>
+          <a:bodyPr wrap="square" lIns="0" tIns="0" rIns="0" bIns="0" rtlCol="0" anchor="ctr"/>
+          <a:lstStyle/>
+          <a:p>
+            <a:pPr algn="ctr" indent="0" marL="0">
+              <a:buNone/>
+            </a:pPr>
+            <a:r>
+              <a:rPr lang="en-US" sz="1050" b="1" dirty="0">
+                <a:solidFill>
+                  <a:srgbClr val="003A63"/>
+                </a:solidFill>
+                <a:latin typeface="Aptos" pitchFamily="34" charset="0"/>
+                <a:ea typeface="Aptos" pitchFamily="34" charset="-122"/>
+                <a:cs typeface="Aptos" pitchFamily="34" charset="-120"/>
+              </a:rPr>
+              <a:t>Measure and monitor</a:t>
+            </a:r>
+            <a:endParaRPr lang="en-US" sz="1050" dirty="0"/>
+          </a:p>
+        </p:txBody>
+      </p:sp>
+      <p:sp>
+        <p:nvSpPr>
+          <p:cNvPr id="20" name="Shape 18"/>
+          <p:cNvSpPr/>
+          <p:nvPr/>
+        </p:nvSpPr>
+        <p:spPr>
+          <a:xfrm>
+            <a:off x="7635240" y="4498848"/>
+            <a:ext cx="3474720" cy="1143000"/>
+          </a:xfrm>
+          <a:prstGeom prst="roundRect">
+            <a:avLst>
+              <a:gd name="adj" fmla="val 9600"/>
+            </a:avLst>
+          </a:prstGeom>
+          <a:solidFill>
             <a:srgbClr val="EAF6F8"/>
           </a:solidFill>
           <a:ln w="12700">
@@ -11603,14 +13375,14 @@
       </p:sp>
       <p:sp>
         <p:nvSpPr>
-          <p:cNvPr id="16" name="Text 14"/>
-          <p:cNvSpPr/>
-          <p:nvPr/>
-        </p:nvSpPr>
-        <p:spPr>
-          <a:xfrm>
-            <a:off x="8074152" y="3666744"/>
-            <a:ext cx="2825496" cy="256032"/>
+          <p:cNvPr id="21" name="Text 19"/>
+          <p:cNvSpPr/>
+          <p:nvPr/>
+        </p:nvSpPr>
+        <p:spPr>
+          <a:xfrm>
+            <a:off x="7799832" y="4645152"/>
+            <a:ext cx="3145536" cy="256032"/>
           </a:xfrm>
           <a:prstGeom prst="rect">
             <a:avLst/>
@@ -11634,7 +13406,7 @@
                 <a:ea typeface="Aptos" pitchFamily="34" charset="-122"/>
                 <a:cs typeface="Aptos" pitchFamily="34" charset="-120"/>
               </a:rPr>
-              <a:t>Use this for</a:t>
+              <a:t>How to validate</a:t>
             </a:r>
             <a:endParaRPr lang="en-US" sz="1300" dirty="0"/>
           </a:p>
@@ -11642,14 +13414,14 @@
       </p:sp>
       <p:sp>
         <p:nvSpPr>
-          <p:cNvPr id="17" name="Text 15"/>
-          <p:cNvSpPr/>
-          <p:nvPr/>
-        </p:nvSpPr>
-        <p:spPr>
-          <a:xfrm>
-            <a:off x="8074152" y="4023360"/>
-            <a:ext cx="2825496" cy="1097280"/>
+          <p:cNvPr id="22" name="Text 20"/>
+          <p:cNvSpPr/>
+          <p:nvPr/>
+        </p:nvSpPr>
+        <p:spPr>
+          <a:xfrm>
+            <a:off x="7799832" y="5001768"/>
+            <a:ext cx="3145536" cy="502920"/>
           </a:xfrm>
           <a:prstGeom prst="rect">
             <a:avLst/>
@@ -11675,7 +13447,7 @@
                 <a:ea typeface="Aptos" pitchFamily="34" charset="-122"/>
                 <a:cs typeface="Aptos" pitchFamily="34" charset="-120"/>
               </a:rPr>
-              <a:t>Connect the concept to public health decisions, safeguards, documentation, or implementation work.</a:t>
+              <a:t>Use the assignment to test whether you can explain the concept, apply it to a realistic public health situation, and identify what would need review before the work moves forward.</a:t>
             </a:r>
             <a:endParaRPr lang="en-US" sz="1550" dirty="0"/>
           </a:p>
@@ -11849,8 +13621,8 @@
         </p:nvSpPr>
         <p:spPr>
           <a:xfrm>
-            <a:off x="9966960" y="6537960"/>
-            <a:ext cx="1645920" cy="201168"/>
+            <a:off x="9646920" y="6537960"/>
+            <a:ext cx="1965960" cy="201168"/>
           </a:xfrm>
           <a:prstGeom prst="rect">
             <a:avLst/>
@@ -11874,7 +13646,7 @@
                 <a:ea typeface="Aptos" pitchFamily="34" charset="-122"/>
                 <a:cs typeface="Aptos" pitchFamily="34" charset="-120"/>
               </a:rPr>
-              <a:t>Â© Paula Soper</a:t>
+              <a:t>Copyright Paula Soper</a:t>
             </a:r>
             <a:endParaRPr lang="en-US" sz="800" dirty="0"/>
           </a:p>
@@ -11921,77 +13693,13 @@
       </p:sp>
       <p:sp>
         <p:nvSpPr>
-          <p:cNvPr id="8" name="Shape 6"/>
+          <p:cNvPr id="8" name="Text 6"/>
           <p:cNvSpPr/>
           <p:nvPr/>
         </p:nvSpPr>
         <p:spPr>
           <a:xfrm>
             <a:off x="640080" y="658368"/>
-            <a:ext cx="420624" cy="420624"/>
-          </a:xfrm>
-          <a:prstGeom prst="ellipse">
-            <a:avLst/>
-          </a:prstGeom>
-          <a:solidFill>
-            <a:srgbClr val="0068B7"/>
-          </a:solidFill>
-          <a:ln w="12700">
-            <a:solidFill>
-              <a:srgbClr val="0068B7"/>
-            </a:solidFill>
-            <a:prstDash val="solid"/>
-          </a:ln>
-        </p:spPr>
-      </p:sp>
-      <p:sp>
-        <p:nvSpPr>
-          <p:cNvPr id="9" name="Text 7"/>
-          <p:cNvSpPr/>
-          <p:nvPr/>
-        </p:nvSpPr>
-        <p:spPr>
-          <a:xfrm>
-            <a:off x="640080" y="731520"/>
-            <a:ext cx="420624" cy="164592"/>
-          </a:xfrm>
-          <a:prstGeom prst="rect">
-            <a:avLst/>
-          </a:prstGeom>
-          <a:noFill/>
-          <a:ln/>
-        </p:spPr>
-        <p:txBody>
-          <a:bodyPr wrap="square" lIns="0" tIns="0" rIns="0" bIns="0" rtlCol="0" anchor="ctr"/>
-          <a:lstStyle/>
-          <a:p>
-            <a:pPr algn="ctr" indent="0" marL="0">
-              <a:buNone/>
-            </a:pPr>
-            <a:r>
-              <a:rPr lang="en-US" sz="1100" b="1" dirty="0">
-                <a:solidFill>
-                  <a:srgbClr val="FFFFFF"/>
-                </a:solidFill>
-                <a:latin typeface="Aptos" pitchFamily="34" charset="0"/>
-                <a:ea typeface="Aptos" pitchFamily="34" charset="-122"/>
-                <a:cs typeface="Aptos" pitchFamily="34" charset="-120"/>
-              </a:rPr>
-              <a:t>15</a:t>
-            </a:r>
-            <a:endParaRPr lang="en-US" sz="1100" dirty="0"/>
-          </a:p>
-        </p:txBody>
-      </p:sp>
-      <p:sp>
-        <p:nvSpPr>
-          <p:cNvPr id="10" name="Text 8"/>
-          <p:cNvSpPr/>
-          <p:nvPr/>
-        </p:nvSpPr>
-        <p:spPr>
-          <a:xfrm>
-            <a:off x="640080" y="621792"/>
             <a:ext cx="10881360" cy="713232"/>
           </a:xfrm>
           <a:prstGeom prst="rect">
@@ -12026,14 +13734,14 @@
       </p:sp>
       <p:sp>
         <p:nvSpPr>
-          <p:cNvPr id="11" name="Text 9"/>
+          <p:cNvPr id="9" name="Text 7"/>
           <p:cNvSpPr/>
           <p:nvPr/>
         </p:nvSpPr>
         <p:spPr>
           <a:xfrm>
             <a:off x="868680" y="1508760"/>
-            <a:ext cx="6537960" cy="4160520"/>
+            <a:ext cx="6309360" cy="4160520"/>
           </a:xfrm>
           <a:prstGeom prst="rect">
             <a:avLst/>
@@ -12092,18 +13800,18 @@
       </p:sp>
       <p:sp>
         <p:nvSpPr>
-          <p:cNvPr id="12" name="Shape 10"/>
-          <p:cNvSpPr/>
-          <p:nvPr/>
-        </p:nvSpPr>
-        <p:spPr>
-          <a:xfrm>
-            <a:off x="7909560" y="1417320"/>
-            <a:ext cx="3154680" cy="1828800"/>
+          <p:cNvPr id="10" name="Shape 8"/>
+          <p:cNvSpPr/>
+          <p:nvPr/>
+        </p:nvSpPr>
+        <p:spPr>
+          <a:xfrm>
+            <a:off x="7635240" y="1325880"/>
+            <a:ext cx="3474720" cy="1325880"/>
           </a:xfrm>
           <a:prstGeom prst="roundRect">
             <a:avLst>
-              <a:gd name="adj" fmla="val 6000"/>
+              <a:gd name="adj" fmla="val 8276"/>
             </a:avLst>
           </a:prstGeom>
           <a:solidFill>
@@ -12119,14 +13827,14 @@
       </p:sp>
       <p:sp>
         <p:nvSpPr>
-          <p:cNvPr id="13" name="Text 11"/>
-          <p:cNvSpPr/>
-          <p:nvPr/>
-        </p:nvSpPr>
-        <p:spPr>
-          <a:xfrm>
-            <a:off x="8074152" y="1563624"/>
-            <a:ext cx="2825496" cy="256032"/>
+          <p:cNvPr id="11" name="Text 9"/>
+          <p:cNvSpPr/>
+          <p:nvPr/>
+        </p:nvSpPr>
+        <p:spPr>
+          <a:xfrm>
+            <a:off x="7799832" y="1472184"/>
+            <a:ext cx="3145536" cy="256032"/>
           </a:xfrm>
           <a:prstGeom prst="rect">
             <a:avLst/>
@@ -12150,7 +13858,7 @@
                 <a:ea typeface="Aptos" pitchFamily="34" charset="-122"/>
                 <a:cs typeface="Aptos" pitchFamily="34" charset="-120"/>
               </a:rPr>
-              <a:t>Key idea</a:t>
+              <a:t>Data decision</a:t>
             </a:r>
             <a:endParaRPr lang="en-US" sz="1300" dirty="0"/>
           </a:p>
@@ -12158,14 +13866,14 @@
       </p:sp>
       <p:sp>
         <p:nvSpPr>
-          <p:cNvPr id="14" name="Text 12"/>
-          <p:cNvSpPr/>
-          <p:nvPr/>
-        </p:nvSpPr>
-        <p:spPr>
-          <a:xfrm>
-            <a:off x="8074152" y="1920240"/>
-            <a:ext cx="2825496" cy="1188720"/>
+          <p:cNvPr id="12" name="Text 10"/>
+          <p:cNvSpPr/>
+          <p:nvPr/>
+        </p:nvSpPr>
+        <p:spPr>
+          <a:xfrm>
+            <a:off x="7799832" y="1828800"/>
+            <a:ext cx="3145536" cy="685800"/>
           </a:xfrm>
           <a:prstGeom prst="rect">
             <a:avLst/>
@@ -12199,21 +13907,212 @@
       </p:sp>
       <p:sp>
         <p:nvSpPr>
-          <p:cNvPr id="15" name="Shape 13"/>
-          <p:cNvSpPr/>
-          <p:nvPr/>
-        </p:nvSpPr>
-        <p:spPr>
-          <a:xfrm>
-            <a:off x="7909560" y="3520440"/>
-            <a:ext cx="3154680" cy="1737360"/>
+          <p:cNvPr id="13" name="Shape 11"/>
+          <p:cNvSpPr/>
+          <p:nvPr/>
+        </p:nvSpPr>
+        <p:spPr>
+          <a:xfrm>
+            <a:off x="7635240" y="2788920"/>
+            <a:ext cx="3474720" cy="1536192"/>
           </a:xfrm>
           <a:prstGeom prst="roundRect">
             <a:avLst>
-              <a:gd name="adj" fmla="val 6316"/>
+              <a:gd name="adj" fmla="val 7143"/>
             </a:avLst>
           </a:prstGeom>
           <a:solidFill>
+            <a:srgbClr val="FFFFFF">
+              <a:alpha val="88000"/>
+            </a:srgbClr>
+          </a:solidFill>
+          <a:ln w="12700">
+            <a:solidFill>
+              <a:srgbClr val="D6E8F2"/>
+            </a:solidFill>
+            <a:prstDash val="solid"/>
+          </a:ln>
+        </p:spPr>
+      </p:sp>
+      <p:sp>
+        <p:nvSpPr>
+          <p:cNvPr id="14" name="Shape 12"/>
+          <p:cNvSpPr/>
+          <p:nvPr/>
+        </p:nvSpPr>
+        <p:spPr>
+          <a:xfrm>
+            <a:off x="8138160" y="3474720"/>
+            <a:ext cx="256032" cy="411480"/>
+          </a:xfrm>
+          <a:prstGeom prst="rect">
+            <a:avLst/>
+          </a:prstGeom>
+          <a:solidFill>
+            <a:srgbClr val="0068B7"/>
+          </a:solidFill>
+          <a:ln w="12700">
+            <a:solidFill>
+              <a:srgbClr val="0068B7"/>
+            </a:solidFill>
+            <a:prstDash val="solid"/>
+          </a:ln>
+        </p:spPr>
+      </p:sp>
+      <p:sp>
+        <p:nvSpPr>
+          <p:cNvPr id="15" name="Shape 13"/>
+          <p:cNvSpPr/>
+          <p:nvPr/>
+        </p:nvSpPr>
+        <p:spPr>
+          <a:xfrm>
+            <a:off x="8577072" y="3172968"/>
+            <a:ext cx="256032" cy="713232"/>
+          </a:xfrm>
+          <a:prstGeom prst="rect">
+            <a:avLst/>
+          </a:prstGeom>
+          <a:solidFill>
+            <a:srgbClr val="2F8A28"/>
+          </a:solidFill>
+          <a:ln w="12700">
+            <a:solidFill>
+              <a:srgbClr val="2F8A28"/>
+            </a:solidFill>
+            <a:prstDash val="solid"/>
+          </a:ln>
+        </p:spPr>
+      </p:sp>
+      <p:sp>
+        <p:nvSpPr>
+          <p:cNvPr id="16" name="Shape 14"/>
+          <p:cNvSpPr/>
+          <p:nvPr/>
+        </p:nvSpPr>
+        <p:spPr>
+          <a:xfrm>
+            <a:off x="9015984" y="2880360"/>
+            <a:ext cx="256032" cy="1005840"/>
+          </a:xfrm>
+          <a:prstGeom prst="rect">
+            <a:avLst/>
+          </a:prstGeom>
+          <a:solidFill>
+            <a:srgbClr val="D69A2D"/>
+          </a:solidFill>
+          <a:ln w="12700">
+            <a:solidFill>
+              <a:srgbClr val="D69A2D"/>
+            </a:solidFill>
+            <a:prstDash val="solid"/>
+          </a:ln>
+        </p:spPr>
+      </p:sp>
+      <p:sp>
+        <p:nvSpPr>
+          <p:cNvPr id="17" name="Shape 15"/>
+          <p:cNvSpPr/>
+          <p:nvPr/>
+        </p:nvSpPr>
+        <p:spPr>
+          <a:xfrm>
+            <a:off x="9454896" y="3319272"/>
+            <a:ext cx="256032" cy="566928"/>
+          </a:xfrm>
+          <a:prstGeom prst="rect">
+            <a:avLst/>
+          </a:prstGeom>
+          <a:solidFill>
+            <a:srgbClr val="6A4CA3"/>
+          </a:solidFill>
+          <a:ln w="12700">
+            <a:solidFill>
+              <a:srgbClr val="6A4CA3"/>
+            </a:solidFill>
+            <a:prstDash val="solid"/>
+          </a:ln>
+        </p:spPr>
+      </p:sp>
+      <p:sp>
+        <p:nvSpPr>
+          <p:cNvPr id="18" name="Shape 16"/>
+          <p:cNvSpPr/>
+          <p:nvPr/>
+        </p:nvSpPr>
+        <p:spPr>
+          <a:xfrm>
+            <a:off x="8019288" y="3886200"/>
+            <a:ext cx="2706624" cy="0"/>
+          </a:xfrm>
+          <a:prstGeom prst="line">
+            <a:avLst/>
+          </a:prstGeom>
+          <a:noFill/>
+          <a:ln w="15240">
+            <a:solidFill>
+              <a:srgbClr val="003A63"/>
+            </a:solidFill>
+            <a:prstDash val="solid"/>
+          </a:ln>
+        </p:spPr>
+      </p:sp>
+      <p:sp>
+        <p:nvSpPr>
+          <p:cNvPr id="19" name="Text 17"/>
+          <p:cNvSpPr/>
+          <p:nvPr/>
+        </p:nvSpPr>
+        <p:spPr>
+          <a:xfrm>
+            <a:off x="7863840" y="3017520"/>
+            <a:ext cx="3017520" cy="201168"/>
+          </a:xfrm>
+          <a:prstGeom prst="rect">
+            <a:avLst/>
+          </a:prstGeom>
+          <a:noFill/>
+          <a:ln/>
+        </p:spPr>
+        <p:txBody>
+          <a:bodyPr wrap="square" lIns="0" tIns="0" rIns="0" bIns="0" rtlCol="0" anchor="ctr"/>
+          <a:lstStyle/>
+          <a:p>
+            <a:pPr algn="ctr" indent="0" marL="0">
+              <a:buNone/>
+            </a:pPr>
+            <a:r>
+              <a:rPr lang="en-US" sz="1050" b="1" dirty="0">
+                <a:solidFill>
+                  <a:srgbClr val="003A63"/>
+                </a:solidFill>
+                <a:latin typeface="Aptos" pitchFamily="34" charset="0"/>
+                <a:ea typeface="Aptos" pitchFamily="34" charset="-122"/>
+                <a:cs typeface="Aptos" pitchFamily="34" charset="-120"/>
+              </a:rPr>
+              <a:t>Measure and monitor</a:t>
+            </a:r>
+            <a:endParaRPr lang="en-US" sz="1050" dirty="0"/>
+          </a:p>
+        </p:txBody>
+      </p:sp>
+      <p:sp>
+        <p:nvSpPr>
+          <p:cNvPr id="20" name="Shape 18"/>
+          <p:cNvSpPr/>
+          <p:nvPr/>
+        </p:nvSpPr>
+        <p:spPr>
+          <a:xfrm>
+            <a:off x="7635240" y="4498848"/>
+            <a:ext cx="3474720" cy="1143000"/>
+          </a:xfrm>
+          <a:prstGeom prst="roundRect">
+            <a:avLst>
+              <a:gd name="adj" fmla="val 9600"/>
+            </a:avLst>
+          </a:prstGeom>
+          <a:solidFill>
             <a:srgbClr val="EAF6F8"/>
           </a:solidFill>
           <a:ln w="12700">
@@ -12226,14 +14125,14 @@
       </p:sp>
       <p:sp>
         <p:nvSpPr>
-          <p:cNvPr id="16" name="Text 14"/>
-          <p:cNvSpPr/>
-          <p:nvPr/>
-        </p:nvSpPr>
-        <p:spPr>
-          <a:xfrm>
-            <a:off x="8074152" y="3666744"/>
-            <a:ext cx="2825496" cy="256032"/>
+          <p:cNvPr id="21" name="Text 19"/>
+          <p:cNvSpPr/>
+          <p:nvPr/>
+        </p:nvSpPr>
+        <p:spPr>
+          <a:xfrm>
+            <a:off x="7799832" y="4645152"/>
+            <a:ext cx="3145536" cy="256032"/>
           </a:xfrm>
           <a:prstGeom prst="rect">
             <a:avLst/>
@@ -12257,7 +14156,7 @@
                 <a:ea typeface="Aptos" pitchFamily="34" charset="-122"/>
                 <a:cs typeface="Aptos" pitchFamily="34" charset="-120"/>
               </a:rPr>
-              <a:t>Use this for</a:t>
+              <a:t>How to validate</a:t>
             </a:r>
             <a:endParaRPr lang="en-US" sz="1300" dirty="0"/>
           </a:p>
@@ -12265,14 +14164,14 @@
       </p:sp>
       <p:sp>
         <p:nvSpPr>
-          <p:cNvPr id="17" name="Text 15"/>
-          <p:cNvSpPr/>
-          <p:nvPr/>
-        </p:nvSpPr>
-        <p:spPr>
-          <a:xfrm>
-            <a:off x="8074152" y="4023360"/>
-            <a:ext cx="2825496" cy="1097280"/>
+          <p:cNvPr id="22" name="Text 20"/>
+          <p:cNvSpPr/>
+          <p:nvPr/>
+        </p:nvSpPr>
+        <p:spPr>
+          <a:xfrm>
+            <a:off x="7799832" y="5001768"/>
+            <a:ext cx="3145536" cy="502920"/>
           </a:xfrm>
           <a:prstGeom prst="rect">
             <a:avLst/>
@@ -12298,7 +14197,7 @@
                 <a:ea typeface="Aptos" pitchFamily="34" charset="-122"/>
                 <a:cs typeface="Aptos" pitchFamily="34" charset="-120"/>
               </a:rPr>
-              <a:t>Connect the concept to public health decisions, safeguards, documentation, or implementation work.</a:t>
+              <a:t>Connect the concept to data quality, model performance, validation evidence, monitoring measures, and decisions that remain under human control.</a:t>
             </a:r>
             <a:endParaRPr lang="en-US" sz="1550" dirty="0"/>
           </a:p>
@@ -12472,8 +14371,8 @@
         </p:nvSpPr>
         <p:spPr>
           <a:xfrm>
-            <a:off x="9966960" y="6537960"/>
-            <a:ext cx="1645920" cy="201168"/>
+            <a:off x="9646920" y="6537960"/>
+            <a:ext cx="1965960" cy="201168"/>
           </a:xfrm>
           <a:prstGeom prst="rect">
             <a:avLst/>
@@ -12497,7 +14396,7 @@
                 <a:ea typeface="Aptos" pitchFamily="34" charset="-122"/>
                 <a:cs typeface="Aptos" pitchFamily="34" charset="-120"/>
               </a:rPr>
-              <a:t>Â© Paula Soper</a:t>
+              <a:t>Copyright Paula Soper</a:t>
             </a:r>
             <a:endParaRPr lang="en-US" sz="800" dirty="0"/>
           </a:p>
@@ -12840,46 +14739,7 @@
       </p:sp>
       <p:sp>
         <p:nvSpPr>
-          <p:cNvPr id="15" name="Text 13"/>
-          <p:cNvSpPr/>
-          <p:nvPr/>
-        </p:nvSpPr>
-        <p:spPr>
-          <a:xfrm>
-            <a:off x="8817864" y="4187952"/>
-            <a:ext cx="201168" cy="256032"/>
-          </a:xfrm>
-          <a:prstGeom prst="rect">
-            <a:avLst/>
-          </a:prstGeom>
-          <a:noFill/>
-          <a:ln/>
-        </p:spPr>
-        <p:txBody>
-          <a:bodyPr wrap="square" lIns="0" tIns="0" rIns="0" bIns="0" rtlCol="0" anchor="ctr"/>
-          <a:lstStyle/>
-          <a:p>
-            <a:pPr algn="ctr" indent="0" marL="0">
-              <a:buNone/>
-            </a:pPr>
-            <a:r>
-              <a:rPr lang="en-US" sz="1800" b="1" dirty="0">
-                <a:solidFill>
-                  <a:srgbClr val="0068B7"/>
-                </a:solidFill>
-                <a:latin typeface="Aptos" pitchFamily="34" charset="0"/>
-                <a:ea typeface="Aptos" pitchFamily="34" charset="-122"/>
-                <a:cs typeface="Aptos" pitchFamily="34" charset="-120"/>
-              </a:rPr>
-              <a:t>â†’</a:t>
-            </a:r>
-            <a:endParaRPr lang="en-US" sz="1800" dirty="0"/>
-          </a:p>
-        </p:txBody>
-      </p:sp>
-      <p:sp>
-        <p:nvSpPr>
-          <p:cNvPr id="16" name="Shape 14"/>
+          <p:cNvPr id="15" name="Shape 13"/>
           <p:cNvSpPr/>
           <p:nvPr/>
         </p:nvSpPr>
@@ -12906,7 +14766,7 @@
       </p:sp>
       <p:sp>
         <p:nvSpPr>
-          <p:cNvPr id="17" name="Text 15"/>
+          <p:cNvPr id="16" name="Text 14"/>
           <p:cNvSpPr/>
           <p:nvPr/>
         </p:nvSpPr>
@@ -12947,46 +14807,7 @@
       </p:sp>
       <p:sp>
         <p:nvSpPr>
-          <p:cNvPr id="18" name="Text 16"/>
-          <p:cNvSpPr/>
-          <p:nvPr/>
-        </p:nvSpPr>
-        <p:spPr>
-          <a:xfrm>
-            <a:off x="10046208" y="4187952"/>
-            <a:ext cx="201168" cy="256032"/>
-          </a:xfrm>
-          <a:prstGeom prst="rect">
-            <a:avLst/>
-          </a:prstGeom>
-          <a:noFill/>
-          <a:ln/>
-        </p:spPr>
-        <p:txBody>
-          <a:bodyPr wrap="square" lIns="0" tIns="0" rIns="0" bIns="0" rtlCol="0" anchor="ctr"/>
-          <a:lstStyle/>
-          <a:p>
-            <a:pPr algn="ctr" indent="0" marL="0">
-              <a:buNone/>
-            </a:pPr>
-            <a:r>
-              <a:rPr lang="en-US" sz="1800" b="1" dirty="0">
-                <a:solidFill>
-                  <a:srgbClr val="0068B7"/>
-                </a:solidFill>
-                <a:latin typeface="Aptos" pitchFamily="34" charset="0"/>
-                <a:ea typeface="Aptos" pitchFamily="34" charset="-122"/>
-                <a:cs typeface="Aptos" pitchFamily="34" charset="-120"/>
-              </a:rPr>
-              <a:t>â†’</a:t>
-            </a:r>
-            <a:endParaRPr lang="en-US" sz="1800" dirty="0"/>
-          </a:p>
-        </p:txBody>
-      </p:sp>
-      <p:sp>
-        <p:nvSpPr>
-          <p:cNvPr id="19" name="Shape 17"/>
+          <p:cNvPr id="17" name="Shape 15"/>
           <p:cNvSpPr/>
           <p:nvPr/>
         </p:nvSpPr>
@@ -13013,7 +14834,7 @@
       </p:sp>
       <p:sp>
         <p:nvSpPr>
-          <p:cNvPr id="20" name="Text 18"/>
+          <p:cNvPr id="18" name="Text 16"/>
           <p:cNvSpPr/>
           <p:nvPr/>
         </p:nvSpPr>
@@ -13220,8 +15041,8 @@
         </p:nvSpPr>
         <p:spPr>
           <a:xfrm>
-            <a:off x="9966960" y="6537960"/>
-            <a:ext cx="1645920" cy="201168"/>
+            <a:off x="9646920" y="6537960"/>
+            <a:ext cx="1965960" cy="201168"/>
           </a:xfrm>
           <a:prstGeom prst="rect">
             <a:avLst/>
@@ -13245,7 +15066,7 @@
                 <a:ea typeface="Aptos" pitchFamily="34" charset="-122"/>
                 <a:cs typeface="Aptos" pitchFamily="34" charset="-120"/>
               </a:rPr>
-              <a:t>Â© Paula Soper</a:t>
+              <a:t>Copyright Paula Soper</a:t>
             </a:r>
             <a:endParaRPr lang="en-US" sz="800" dirty="0"/>
           </a:p>
@@ -13588,46 +15409,7 @@
       </p:sp>
       <p:sp>
         <p:nvSpPr>
-          <p:cNvPr id="15" name="Text 13"/>
-          <p:cNvSpPr/>
-          <p:nvPr/>
-        </p:nvSpPr>
-        <p:spPr>
-          <a:xfrm>
-            <a:off x="8817864" y="4187952"/>
-            <a:ext cx="201168" cy="256032"/>
-          </a:xfrm>
-          <a:prstGeom prst="rect">
-            <a:avLst/>
-          </a:prstGeom>
-          <a:noFill/>
-          <a:ln/>
-        </p:spPr>
-        <p:txBody>
-          <a:bodyPr wrap="square" lIns="0" tIns="0" rIns="0" bIns="0" rtlCol="0" anchor="ctr"/>
-          <a:lstStyle/>
-          <a:p>
-            <a:pPr algn="ctr" indent="0" marL="0">
-              <a:buNone/>
-            </a:pPr>
-            <a:r>
-              <a:rPr lang="en-US" sz="1800" b="1" dirty="0">
-                <a:solidFill>
-                  <a:srgbClr val="0068B7"/>
-                </a:solidFill>
-                <a:latin typeface="Aptos" pitchFamily="34" charset="0"/>
-                <a:ea typeface="Aptos" pitchFamily="34" charset="-122"/>
-                <a:cs typeface="Aptos" pitchFamily="34" charset="-120"/>
-              </a:rPr>
-              <a:t>â†’</a:t>
-            </a:r>
-            <a:endParaRPr lang="en-US" sz="1800" dirty="0"/>
-          </a:p>
-        </p:txBody>
-      </p:sp>
-      <p:sp>
-        <p:nvSpPr>
-          <p:cNvPr id="16" name="Shape 14"/>
+          <p:cNvPr id="15" name="Shape 13"/>
           <p:cNvSpPr/>
           <p:nvPr/>
         </p:nvSpPr>
@@ -13654,7 +15436,7 @@
       </p:sp>
       <p:sp>
         <p:nvSpPr>
-          <p:cNvPr id="17" name="Text 15"/>
+          <p:cNvPr id="16" name="Text 14"/>
           <p:cNvSpPr/>
           <p:nvPr/>
         </p:nvSpPr>
@@ -13695,46 +15477,7 @@
       </p:sp>
       <p:sp>
         <p:nvSpPr>
-          <p:cNvPr id="18" name="Text 16"/>
-          <p:cNvSpPr/>
-          <p:nvPr/>
-        </p:nvSpPr>
-        <p:spPr>
-          <a:xfrm>
-            <a:off x="10046208" y="4187952"/>
-            <a:ext cx="201168" cy="256032"/>
-          </a:xfrm>
-          <a:prstGeom prst="rect">
-            <a:avLst/>
-          </a:prstGeom>
-          <a:noFill/>
-          <a:ln/>
-        </p:spPr>
-        <p:txBody>
-          <a:bodyPr wrap="square" lIns="0" tIns="0" rIns="0" bIns="0" rtlCol="0" anchor="ctr"/>
-          <a:lstStyle/>
-          <a:p>
-            <a:pPr algn="ctr" indent="0" marL="0">
-              <a:buNone/>
-            </a:pPr>
-            <a:r>
-              <a:rPr lang="en-US" sz="1800" b="1" dirty="0">
-                <a:solidFill>
-                  <a:srgbClr val="0068B7"/>
-                </a:solidFill>
-                <a:latin typeface="Aptos" pitchFamily="34" charset="0"/>
-                <a:ea typeface="Aptos" pitchFamily="34" charset="-122"/>
-                <a:cs typeface="Aptos" pitchFamily="34" charset="-120"/>
-              </a:rPr>
-              <a:t>â†’</a:t>
-            </a:r>
-            <a:endParaRPr lang="en-US" sz="1800" dirty="0"/>
-          </a:p>
-        </p:txBody>
-      </p:sp>
-      <p:sp>
-        <p:nvSpPr>
-          <p:cNvPr id="19" name="Shape 17"/>
+          <p:cNvPr id="17" name="Shape 15"/>
           <p:cNvSpPr/>
           <p:nvPr/>
         </p:nvSpPr>
@@ -13761,7 +15504,7 @@
       </p:sp>
       <p:sp>
         <p:nvSpPr>
-          <p:cNvPr id="20" name="Text 18"/>
+          <p:cNvPr id="18" name="Text 16"/>
           <p:cNvSpPr/>
           <p:nvPr/>
         </p:nvSpPr>
@@ -13968,8 +15711,8 @@
         </p:nvSpPr>
         <p:spPr>
           <a:xfrm>
-            <a:off x="9966960" y="6537960"/>
-            <a:ext cx="1645920" cy="201168"/>
+            <a:off x="9646920" y="6537960"/>
+            <a:ext cx="1965960" cy="201168"/>
           </a:xfrm>
           <a:prstGeom prst="rect">
             <a:avLst/>
@@ -13993,7 +15736,7 @@
                 <a:ea typeface="Aptos" pitchFamily="34" charset="-122"/>
                 <a:cs typeface="Aptos" pitchFamily="34" charset="-120"/>
               </a:rPr>
-              <a:t>Â© Paula Soper</a:t>
+              <a:t>Copyright Paula Soper</a:t>
             </a:r>
             <a:endParaRPr lang="en-US" sz="800" dirty="0"/>
           </a:p>
@@ -14040,77 +15783,13 @@
       </p:sp>
       <p:sp>
         <p:nvSpPr>
-          <p:cNvPr id="8" name="Shape 6"/>
+          <p:cNvPr id="8" name="Text 6"/>
           <p:cNvSpPr/>
           <p:nvPr/>
         </p:nvSpPr>
         <p:spPr>
           <a:xfrm>
             <a:off x="640080" y="658368"/>
-            <a:ext cx="420624" cy="420624"/>
-          </a:xfrm>
-          <a:prstGeom prst="ellipse">
-            <a:avLst/>
-          </a:prstGeom>
-          <a:solidFill>
-            <a:srgbClr val="0068B7"/>
-          </a:solidFill>
-          <a:ln w="12700">
-            <a:solidFill>
-              <a:srgbClr val="0068B7"/>
-            </a:solidFill>
-            <a:prstDash val="solid"/>
-          </a:ln>
-        </p:spPr>
-      </p:sp>
-      <p:sp>
-        <p:nvSpPr>
-          <p:cNvPr id="9" name="Text 7"/>
-          <p:cNvSpPr/>
-          <p:nvPr/>
-        </p:nvSpPr>
-        <p:spPr>
-          <a:xfrm>
-            <a:off x="640080" y="731520"/>
-            <a:ext cx="420624" cy="164592"/>
-          </a:xfrm>
-          <a:prstGeom prst="rect">
-            <a:avLst/>
-          </a:prstGeom>
-          <a:noFill/>
-          <a:ln/>
-        </p:spPr>
-        <p:txBody>
-          <a:bodyPr wrap="square" lIns="0" tIns="0" rIns="0" bIns="0" rtlCol="0" anchor="ctr"/>
-          <a:lstStyle/>
-          <a:p>
-            <a:pPr algn="ctr" indent="0" marL="0">
-              <a:buNone/>
-            </a:pPr>
-            <a:r>
-              <a:rPr lang="en-US" sz="1100" b="1" dirty="0">
-                <a:solidFill>
-                  <a:srgbClr val="FFFFFF"/>
-                </a:solidFill>
-                <a:latin typeface="Aptos" pitchFamily="34" charset="0"/>
-                <a:ea typeface="Aptos" pitchFamily="34" charset="-122"/>
-                <a:cs typeface="Aptos" pitchFamily="34" charset="-120"/>
-              </a:rPr>
-              <a:t>1</a:t>
-            </a:r>
-            <a:endParaRPr lang="en-US" sz="1100" dirty="0"/>
-          </a:p>
-        </p:txBody>
-      </p:sp>
-      <p:sp>
-        <p:nvSpPr>
-          <p:cNvPr id="10" name="Text 8"/>
-          <p:cNvSpPr/>
-          <p:nvPr/>
-        </p:nvSpPr>
-        <p:spPr>
-          <a:xfrm>
-            <a:off x="640080" y="621792"/>
             <a:ext cx="10881360" cy="713232"/>
           </a:xfrm>
           <a:prstGeom prst="rect">
@@ -14145,14 +15824,14 @@
       </p:sp>
       <p:sp>
         <p:nvSpPr>
-          <p:cNvPr id="11" name="Text 9"/>
+          <p:cNvPr id="9" name="Text 7"/>
           <p:cNvSpPr/>
           <p:nvPr/>
         </p:nvSpPr>
         <p:spPr>
           <a:xfrm>
             <a:off x="868680" y="1508760"/>
-            <a:ext cx="6537960" cy="4160520"/>
+            <a:ext cx="6309360" cy="4160520"/>
           </a:xfrm>
           <a:prstGeom prst="rect">
             <a:avLst/>
@@ -14211,18 +15890,18 @@
       </p:sp>
       <p:sp>
         <p:nvSpPr>
-          <p:cNvPr id="12" name="Shape 10"/>
-          <p:cNvSpPr/>
-          <p:nvPr/>
-        </p:nvSpPr>
-        <p:spPr>
-          <a:xfrm>
-            <a:off x="7909560" y="1417320"/>
-            <a:ext cx="3154680" cy="1828800"/>
+          <p:cNvPr id="10" name="Shape 8"/>
+          <p:cNvSpPr/>
+          <p:nvPr/>
+        </p:nvSpPr>
+        <p:spPr>
+          <a:xfrm>
+            <a:off x="7635240" y="1325880"/>
+            <a:ext cx="3474720" cy="1325880"/>
           </a:xfrm>
           <a:prstGeom prst="roundRect">
             <a:avLst>
-              <a:gd name="adj" fmla="val 6000"/>
+              <a:gd name="adj" fmla="val 8276"/>
             </a:avLst>
           </a:prstGeom>
           <a:solidFill>
@@ -14238,14 +15917,14 @@
       </p:sp>
       <p:sp>
         <p:nvSpPr>
-          <p:cNvPr id="13" name="Text 11"/>
-          <p:cNvSpPr/>
-          <p:nvPr/>
-        </p:nvSpPr>
-        <p:spPr>
-          <a:xfrm>
-            <a:off x="8074152" y="1563624"/>
-            <a:ext cx="2825496" cy="256032"/>
+          <p:cNvPr id="11" name="Text 9"/>
+          <p:cNvSpPr/>
+          <p:nvPr/>
+        </p:nvSpPr>
+        <p:spPr>
+          <a:xfrm>
+            <a:off x="7799832" y="1472184"/>
+            <a:ext cx="3145536" cy="256032"/>
           </a:xfrm>
           <a:prstGeom prst="rect">
             <a:avLst/>
@@ -14269,7 +15948,7 @@
                 <a:ea typeface="Aptos" pitchFamily="34" charset="-122"/>
                 <a:cs typeface="Aptos" pitchFamily="34" charset="-120"/>
               </a:rPr>
-              <a:t>Key idea</a:t>
+              <a:t>Data decision</a:t>
             </a:r>
             <a:endParaRPr lang="en-US" sz="1300" dirty="0"/>
           </a:p>
@@ -14277,14 +15956,14 @@
       </p:sp>
       <p:sp>
         <p:nvSpPr>
-          <p:cNvPr id="14" name="Text 12"/>
-          <p:cNvSpPr/>
-          <p:nvPr/>
-        </p:nvSpPr>
-        <p:spPr>
-          <a:xfrm>
-            <a:off x="8074152" y="1920240"/>
-            <a:ext cx="2825496" cy="1188720"/>
+          <p:cNvPr id="12" name="Text 10"/>
+          <p:cNvSpPr/>
+          <p:nvPr/>
+        </p:nvSpPr>
+        <p:spPr>
+          <a:xfrm>
+            <a:off x="7799832" y="1828800"/>
+            <a:ext cx="3145536" cy="685800"/>
           </a:xfrm>
           <a:prstGeom prst="rect">
             <a:avLst/>
@@ -14318,21 +15997,212 @@
       </p:sp>
       <p:sp>
         <p:nvSpPr>
-          <p:cNvPr id="15" name="Shape 13"/>
-          <p:cNvSpPr/>
-          <p:nvPr/>
-        </p:nvSpPr>
-        <p:spPr>
-          <a:xfrm>
-            <a:off x="7909560" y="3520440"/>
-            <a:ext cx="3154680" cy="1737360"/>
+          <p:cNvPr id="13" name="Shape 11"/>
+          <p:cNvSpPr/>
+          <p:nvPr/>
+        </p:nvSpPr>
+        <p:spPr>
+          <a:xfrm>
+            <a:off x="7635240" y="2788920"/>
+            <a:ext cx="3474720" cy="1536192"/>
           </a:xfrm>
           <a:prstGeom prst="roundRect">
             <a:avLst>
-              <a:gd name="adj" fmla="val 6316"/>
+              <a:gd name="adj" fmla="val 7143"/>
             </a:avLst>
           </a:prstGeom>
           <a:solidFill>
+            <a:srgbClr val="FFFFFF">
+              <a:alpha val="88000"/>
+            </a:srgbClr>
+          </a:solidFill>
+          <a:ln w="12700">
+            <a:solidFill>
+              <a:srgbClr val="D6E8F2"/>
+            </a:solidFill>
+            <a:prstDash val="solid"/>
+          </a:ln>
+        </p:spPr>
+      </p:sp>
+      <p:sp>
+        <p:nvSpPr>
+          <p:cNvPr id="14" name="Shape 12"/>
+          <p:cNvSpPr/>
+          <p:nvPr/>
+        </p:nvSpPr>
+        <p:spPr>
+          <a:xfrm>
+            <a:off x="8138160" y="3474720"/>
+            <a:ext cx="256032" cy="411480"/>
+          </a:xfrm>
+          <a:prstGeom prst="rect">
+            <a:avLst/>
+          </a:prstGeom>
+          <a:solidFill>
+            <a:srgbClr val="0068B7"/>
+          </a:solidFill>
+          <a:ln w="12700">
+            <a:solidFill>
+              <a:srgbClr val="0068B7"/>
+            </a:solidFill>
+            <a:prstDash val="solid"/>
+          </a:ln>
+        </p:spPr>
+      </p:sp>
+      <p:sp>
+        <p:nvSpPr>
+          <p:cNvPr id="15" name="Shape 13"/>
+          <p:cNvSpPr/>
+          <p:nvPr/>
+        </p:nvSpPr>
+        <p:spPr>
+          <a:xfrm>
+            <a:off x="8577072" y="3172968"/>
+            <a:ext cx="256032" cy="713232"/>
+          </a:xfrm>
+          <a:prstGeom prst="rect">
+            <a:avLst/>
+          </a:prstGeom>
+          <a:solidFill>
+            <a:srgbClr val="2F8A28"/>
+          </a:solidFill>
+          <a:ln w="12700">
+            <a:solidFill>
+              <a:srgbClr val="2F8A28"/>
+            </a:solidFill>
+            <a:prstDash val="solid"/>
+          </a:ln>
+        </p:spPr>
+      </p:sp>
+      <p:sp>
+        <p:nvSpPr>
+          <p:cNvPr id="16" name="Shape 14"/>
+          <p:cNvSpPr/>
+          <p:nvPr/>
+        </p:nvSpPr>
+        <p:spPr>
+          <a:xfrm>
+            <a:off x="9015984" y="2880360"/>
+            <a:ext cx="256032" cy="1005840"/>
+          </a:xfrm>
+          <a:prstGeom prst="rect">
+            <a:avLst/>
+          </a:prstGeom>
+          <a:solidFill>
+            <a:srgbClr val="D69A2D"/>
+          </a:solidFill>
+          <a:ln w="12700">
+            <a:solidFill>
+              <a:srgbClr val="D69A2D"/>
+            </a:solidFill>
+            <a:prstDash val="solid"/>
+          </a:ln>
+        </p:spPr>
+      </p:sp>
+      <p:sp>
+        <p:nvSpPr>
+          <p:cNvPr id="17" name="Shape 15"/>
+          <p:cNvSpPr/>
+          <p:nvPr/>
+        </p:nvSpPr>
+        <p:spPr>
+          <a:xfrm>
+            <a:off x="9454896" y="3319272"/>
+            <a:ext cx="256032" cy="566928"/>
+          </a:xfrm>
+          <a:prstGeom prst="rect">
+            <a:avLst/>
+          </a:prstGeom>
+          <a:solidFill>
+            <a:srgbClr val="6A4CA3"/>
+          </a:solidFill>
+          <a:ln w="12700">
+            <a:solidFill>
+              <a:srgbClr val="6A4CA3"/>
+            </a:solidFill>
+            <a:prstDash val="solid"/>
+          </a:ln>
+        </p:spPr>
+      </p:sp>
+      <p:sp>
+        <p:nvSpPr>
+          <p:cNvPr id="18" name="Shape 16"/>
+          <p:cNvSpPr/>
+          <p:nvPr/>
+        </p:nvSpPr>
+        <p:spPr>
+          <a:xfrm>
+            <a:off x="8019288" y="3886200"/>
+            <a:ext cx="2706624" cy="0"/>
+          </a:xfrm>
+          <a:prstGeom prst="line">
+            <a:avLst/>
+          </a:prstGeom>
+          <a:noFill/>
+          <a:ln w="15240">
+            <a:solidFill>
+              <a:srgbClr val="003A63"/>
+            </a:solidFill>
+            <a:prstDash val="solid"/>
+          </a:ln>
+        </p:spPr>
+      </p:sp>
+      <p:sp>
+        <p:nvSpPr>
+          <p:cNvPr id="19" name="Text 17"/>
+          <p:cNvSpPr/>
+          <p:nvPr/>
+        </p:nvSpPr>
+        <p:spPr>
+          <a:xfrm>
+            <a:off x="7863840" y="3017520"/>
+            <a:ext cx="3017520" cy="201168"/>
+          </a:xfrm>
+          <a:prstGeom prst="rect">
+            <a:avLst/>
+          </a:prstGeom>
+          <a:noFill/>
+          <a:ln/>
+        </p:spPr>
+        <p:txBody>
+          <a:bodyPr wrap="square" lIns="0" tIns="0" rIns="0" bIns="0" rtlCol="0" anchor="ctr"/>
+          <a:lstStyle/>
+          <a:p>
+            <a:pPr algn="ctr" indent="0" marL="0">
+              <a:buNone/>
+            </a:pPr>
+            <a:r>
+              <a:rPr lang="en-US" sz="1050" b="1" dirty="0">
+                <a:solidFill>
+                  <a:srgbClr val="003A63"/>
+                </a:solidFill>
+                <a:latin typeface="Aptos" pitchFamily="34" charset="0"/>
+                <a:ea typeface="Aptos" pitchFamily="34" charset="-122"/>
+                <a:cs typeface="Aptos" pitchFamily="34" charset="-120"/>
+              </a:rPr>
+              <a:t>Measure and monitor</a:t>
+            </a:r>
+            <a:endParaRPr lang="en-US" sz="1050" dirty="0"/>
+          </a:p>
+        </p:txBody>
+      </p:sp>
+      <p:sp>
+        <p:nvSpPr>
+          <p:cNvPr id="20" name="Shape 18"/>
+          <p:cNvSpPr/>
+          <p:nvPr/>
+        </p:nvSpPr>
+        <p:spPr>
+          <a:xfrm>
+            <a:off x="7635240" y="4498848"/>
+            <a:ext cx="3474720" cy="1143000"/>
+          </a:xfrm>
+          <a:prstGeom prst="roundRect">
+            <a:avLst>
+              <a:gd name="adj" fmla="val 9600"/>
+            </a:avLst>
+          </a:prstGeom>
+          <a:solidFill>
             <a:srgbClr val="EAF6F8"/>
           </a:solidFill>
           <a:ln w="12700">
@@ -14345,14 +16215,14 @@
       </p:sp>
       <p:sp>
         <p:nvSpPr>
-          <p:cNvPr id="16" name="Text 14"/>
-          <p:cNvSpPr/>
-          <p:nvPr/>
-        </p:nvSpPr>
-        <p:spPr>
-          <a:xfrm>
-            <a:off x="8074152" y="3666744"/>
-            <a:ext cx="2825496" cy="256032"/>
+          <p:cNvPr id="21" name="Text 19"/>
+          <p:cNvSpPr/>
+          <p:nvPr/>
+        </p:nvSpPr>
+        <p:spPr>
+          <a:xfrm>
+            <a:off x="7799832" y="4645152"/>
+            <a:ext cx="3145536" cy="256032"/>
           </a:xfrm>
           <a:prstGeom prst="rect">
             <a:avLst/>
@@ -14376,7 +16246,7 @@
                 <a:ea typeface="Aptos" pitchFamily="34" charset="-122"/>
                 <a:cs typeface="Aptos" pitchFamily="34" charset="-120"/>
               </a:rPr>
-              <a:t>Use this for</a:t>
+              <a:t>How to validate</a:t>
             </a:r>
             <a:endParaRPr lang="en-US" sz="1300" dirty="0"/>
           </a:p>
@@ -14384,14 +16254,14 @@
       </p:sp>
       <p:sp>
         <p:nvSpPr>
-          <p:cNvPr id="17" name="Text 15"/>
-          <p:cNvSpPr/>
-          <p:nvPr/>
-        </p:nvSpPr>
-        <p:spPr>
-          <a:xfrm>
-            <a:off x="8074152" y="4023360"/>
-            <a:ext cx="2825496" cy="1097280"/>
+          <p:cNvPr id="22" name="Text 20"/>
+          <p:cNvSpPr/>
+          <p:nvPr/>
+        </p:nvSpPr>
+        <p:spPr>
+          <a:xfrm>
+            <a:off x="7799832" y="5001768"/>
+            <a:ext cx="3145536" cy="502920"/>
           </a:xfrm>
           <a:prstGeom prst="rect">
             <a:avLst/>
@@ -14417,7 +16287,7 @@
                 <a:ea typeface="Aptos" pitchFamily="34" charset="-122"/>
                 <a:cs typeface="Aptos" pitchFamily="34" charset="-120"/>
               </a:rPr>
-              <a:t>Connect the concept to public health decisions, safeguards, documentation, or implementation work.</a:t>
+              <a:t>Use the assignment to test whether you can explain the concept, apply it to a realistic public health situation, and identify what would need review before the work moves forward.</a:t>
             </a:r>
             <a:endParaRPr lang="en-US" sz="1550" dirty="0"/>
           </a:p>
@@ -14591,8 +16461,8 @@
         </p:nvSpPr>
         <p:spPr>
           <a:xfrm>
-            <a:off x="9966960" y="6537960"/>
-            <a:ext cx="1645920" cy="201168"/>
+            <a:off x="9646920" y="6537960"/>
+            <a:ext cx="1965960" cy="201168"/>
           </a:xfrm>
           <a:prstGeom prst="rect">
             <a:avLst/>
@@ -14616,7 +16486,7 @@
                 <a:ea typeface="Aptos" pitchFamily="34" charset="-122"/>
                 <a:cs typeface="Aptos" pitchFamily="34" charset="-120"/>
               </a:rPr>
-              <a:t>Â© Paula Soper</a:t>
+              <a:t>Copyright Paula Soper</a:t>
             </a:r>
             <a:endParaRPr lang="en-US" sz="800" dirty="0"/>
           </a:p>
@@ -14663,77 +16533,13 @@
       </p:sp>
       <p:sp>
         <p:nvSpPr>
-          <p:cNvPr id="8" name="Shape 6"/>
+          <p:cNvPr id="8" name="Text 6"/>
           <p:cNvSpPr/>
           <p:nvPr/>
         </p:nvSpPr>
         <p:spPr>
           <a:xfrm>
             <a:off x="640080" y="658368"/>
-            <a:ext cx="420624" cy="420624"/>
-          </a:xfrm>
-          <a:prstGeom prst="ellipse">
-            <a:avLst/>
-          </a:prstGeom>
-          <a:solidFill>
-            <a:srgbClr val="0068B7"/>
-          </a:solidFill>
-          <a:ln w="12700">
-            <a:solidFill>
-              <a:srgbClr val="0068B7"/>
-            </a:solidFill>
-            <a:prstDash val="solid"/>
-          </a:ln>
-        </p:spPr>
-      </p:sp>
-      <p:sp>
-        <p:nvSpPr>
-          <p:cNvPr id="9" name="Text 7"/>
-          <p:cNvSpPr/>
-          <p:nvPr/>
-        </p:nvSpPr>
-        <p:spPr>
-          <a:xfrm>
-            <a:off x="640080" y="731520"/>
-            <a:ext cx="420624" cy="164592"/>
-          </a:xfrm>
-          <a:prstGeom prst="rect">
-            <a:avLst/>
-          </a:prstGeom>
-          <a:noFill/>
-          <a:ln/>
-        </p:spPr>
-        <p:txBody>
-          <a:bodyPr wrap="square" lIns="0" tIns="0" rIns="0" bIns="0" rtlCol="0" anchor="ctr"/>
-          <a:lstStyle/>
-          <a:p>
-            <a:pPr algn="ctr" indent="0" marL="0">
-              <a:buNone/>
-            </a:pPr>
-            <a:r>
-              <a:rPr lang="en-US" sz="1100" b="1" dirty="0">
-                <a:solidFill>
-                  <a:srgbClr val="FFFFFF"/>
-                </a:solidFill>
-                <a:latin typeface="Aptos" pitchFamily="34" charset="0"/>
-                <a:ea typeface="Aptos" pitchFamily="34" charset="-122"/>
-                <a:cs typeface="Aptos" pitchFamily="34" charset="-120"/>
-              </a:rPr>
-              <a:t>2</a:t>
-            </a:r>
-            <a:endParaRPr lang="en-US" sz="1100" dirty="0"/>
-          </a:p>
-        </p:txBody>
-      </p:sp>
-      <p:sp>
-        <p:nvSpPr>
-          <p:cNvPr id="10" name="Text 8"/>
-          <p:cNvSpPr/>
-          <p:nvPr/>
-        </p:nvSpPr>
-        <p:spPr>
-          <a:xfrm>
-            <a:off x="640080" y="621792"/>
             <a:ext cx="10881360" cy="713232"/>
           </a:xfrm>
           <a:prstGeom prst="rect">
@@ -14768,14 +16574,14 @@
       </p:sp>
       <p:sp>
         <p:nvSpPr>
-          <p:cNvPr id="11" name="Text 9"/>
+          <p:cNvPr id="9" name="Text 7"/>
           <p:cNvSpPr/>
           <p:nvPr/>
         </p:nvSpPr>
         <p:spPr>
           <a:xfrm>
             <a:off x="868680" y="1508760"/>
-            <a:ext cx="6537960" cy="4160520"/>
+            <a:ext cx="6309360" cy="4160520"/>
           </a:xfrm>
           <a:prstGeom prst="rect">
             <a:avLst/>
@@ -14834,18 +16640,18 @@
       </p:sp>
       <p:sp>
         <p:nvSpPr>
-          <p:cNvPr id="12" name="Shape 10"/>
-          <p:cNvSpPr/>
-          <p:nvPr/>
-        </p:nvSpPr>
-        <p:spPr>
-          <a:xfrm>
-            <a:off x="7909560" y="1417320"/>
-            <a:ext cx="3154680" cy="1828800"/>
+          <p:cNvPr id="10" name="Shape 8"/>
+          <p:cNvSpPr/>
+          <p:nvPr/>
+        </p:nvSpPr>
+        <p:spPr>
+          <a:xfrm>
+            <a:off x="7635240" y="1325880"/>
+            <a:ext cx="3474720" cy="1325880"/>
           </a:xfrm>
           <a:prstGeom prst="roundRect">
             <a:avLst>
-              <a:gd name="adj" fmla="val 6000"/>
+              <a:gd name="adj" fmla="val 8276"/>
             </a:avLst>
           </a:prstGeom>
           <a:solidFill>
@@ -14861,14 +16667,14 @@
       </p:sp>
       <p:sp>
         <p:nvSpPr>
-          <p:cNvPr id="13" name="Text 11"/>
-          <p:cNvSpPr/>
-          <p:nvPr/>
-        </p:nvSpPr>
-        <p:spPr>
-          <a:xfrm>
-            <a:off x="8074152" y="1563624"/>
-            <a:ext cx="2825496" cy="256032"/>
+          <p:cNvPr id="11" name="Text 9"/>
+          <p:cNvSpPr/>
+          <p:nvPr/>
+        </p:nvSpPr>
+        <p:spPr>
+          <a:xfrm>
+            <a:off x="7799832" y="1472184"/>
+            <a:ext cx="3145536" cy="256032"/>
           </a:xfrm>
           <a:prstGeom prst="rect">
             <a:avLst/>
@@ -14892,7 +16698,7 @@
                 <a:ea typeface="Aptos" pitchFamily="34" charset="-122"/>
                 <a:cs typeface="Aptos" pitchFamily="34" charset="-120"/>
               </a:rPr>
-              <a:t>Key idea</a:t>
+              <a:t>Data decision</a:t>
             </a:r>
             <a:endParaRPr lang="en-US" sz="1300" dirty="0"/>
           </a:p>
@@ -14900,14 +16706,14 @@
       </p:sp>
       <p:sp>
         <p:nvSpPr>
-          <p:cNvPr id="14" name="Text 12"/>
-          <p:cNvSpPr/>
-          <p:nvPr/>
-        </p:nvSpPr>
-        <p:spPr>
-          <a:xfrm>
-            <a:off x="8074152" y="1920240"/>
-            <a:ext cx="2825496" cy="1188720"/>
+          <p:cNvPr id="12" name="Text 10"/>
+          <p:cNvSpPr/>
+          <p:nvPr/>
+        </p:nvSpPr>
+        <p:spPr>
+          <a:xfrm>
+            <a:off x="7799832" y="1828800"/>
+            <a:ext cx="3145536" cy="685800"/>
           </a:xfrm>
           <a:prstGeom prst="rect">
             <a:avLst/>
@@ -14941,21 +16747,212 @@
       </p:sp>
       <p:sp>
         <p:nvSpPr>
-          <p:cNvPr id="15" name="Shape 13"/>
-          <p:cNvSpPr/>
-          <p:nvPr/>
-        </p:nvSpPr>
-        <p:spPr>
-          <a:xfrm>
-            <a:off x="7909560" y="3520440"/>
-            <a:ext cx="3154680" cy="1737360"/>
+          <p:cNvPr id="13" name="Shape 11"/>
+          <p:cNvSpPr/>
+          <p:nvPr/>
+        </p:nvSpPr>
+        <p:spPr>
+          <a:xfrm>
+            <a:off x="7635240" y="2788920"/>
+            <a:ext cx="3474720" cy="1536192"/>
           </a:xfrm>
           <a:prstGeom prst="roundRect">
             <a:avLst>
-              <a:gd name="adj" fmla="val 6316"/>
+              <a:gd name="adj" fmla="val 7143"/>
             </a:avLst>
           </a:prstGeom>
           <a:solidFill>
+            <a:srgbClr val="FFFFFF">
+              <a:alpha val="88000"/>
+            </a:srgbClr>
+          </a:solidFill>
+          <a:ln w="12700">
+            <a:solidFill>
+              <a:srgbClr val="D6E8F2"/>
+            </a:solidFill>
+            <a:prstDash val="solid"/>
+          </a:ln>
+        </p:spPr>
+      </p:sp>
+      <p:sp>
+        <p:nvSpPr>
+          <p:cNvPr id="14" name="Shape 12"/>
+          <p:cNvSpPr/>
+          <p:nvPr/>
+        </p:nvSpPr>
+        <p:spPr>
+          <a:xfrm>
+            <a:off x="8138160" y="3474720"/>
+            <a:ext cx="256032" cy="411480"/>
+          </a:xfrm>
+          <a:prstGeom prst="rect">
+            <a:avLst/>
+          </a:prstGeom>
+          <a:solidFill>
+            <a:srgbClr val="0068B7"/>
+          </a:solidFill>
+          <a:ln w="12700">
+            <a:solidFill>
+              <a:srgbClr val="0068B7"/>
+            </a:solidFill>
+            <a:prstDash val="solid"/>
+          </a:ln>
+        </p:spPr>
+      </p:sp>
+      <p:sp>
+        <p:nvSpPr>
+          <p:cNvPr id="15" name="Shape 13"/>
+          <p:cNvSpPr/>
+          <p:nvPr/>
+        </p:nvSpPr>
+        <p:spPr>
+          <a:xfrm>
+            <a:off x="8577072" y="3172968"/>
+            <a:ext cx="256032" cy="713232"/>
+          </a:xfrm>
+          <a:prstGeom prst="rect">
+            <a:avLst/>
+          </a:prstGeom>
+          <a:solidFill>
+            <a:srgbClr val="2F8A28"/>
+          </a:solidFill>
+          <a:ln w="12700">
+            <a:solidFill>
+              <a:srgbClr val="2F8A28"/>
+            </a:solidFill>
+            <a:prstDash val="solid"/>
+          </a:ln>
+        </p:spPr>
+      </p:sp>
+      <p:sp>
+        <p:nvSpPr>
+          <p:cNvPr id="16" name="Shape 14"/>
+          <p:cNvSpPr/>
+          <p:nvPr/>
+        </p:nvSpPr>
+        <p:spPr>
+          <a:xfrm>
+            <a:off x="9015984" y="2880360"/>
+            <a:ext cx="256032" cy="1005840"/>
+          </a:xfrm>
+          <a:prstGeom prst="rect">
+            <a:avLst/>
+          </a:prstGeom>
+          <a:solidFill>
+            <a:srgbClr val="D69A2D"/>
+          </a:solidFill>
+          <a:ln w="12700">
+            <a:solidFill>
+              <a:srgbClr val="D69A2D"/>
+            </a:solidFill>
+            <a:prstDash val="solid"/>
+          </a:ln>
+        </p:spPr>
+      </p:sp>
+      <p:sp>
+        <p:nvSpPr>
+          <p:cNvPr id="17" name="Shape 15"/>
+          <p:cNvSpPr/>
+          <p:nvPr/>
+        </p:nvSpPr>
+        <p:spPr>
+          <a:xfrm>
+            <a:off x="9454896" y="3319272"/>
+            <a:ext cx="256032" cy="566928"/>
+          </a:xfrm>
+          <a:prstGeom prst="rect">
+            <a:avLst/>
+          </a:prstGeom>
+          <a:solidFill>
+            <a:srgbClr val="6A4CA3"/>
+          </a:solidFill>
+          <a:ln w="12700">
+            <a:solidFill>
+              <a:srgbClr val="6A4CA3"/>
+            </a:solidFill>
+            <a:prstDash val="solid"/>
+          </a:ln>
+        </p:spPr>
+      </p:sp>
+      <p:sp>
+        <p:nvSpPr>
+          <p:cNvPr id="18" name="Shape 16"/>
+          <p:cNvSpPr/>
+          <p:nvPr/>
+        </p:nvSpPr>
+        <p:spPr>
+          <a:xfrm>
+            <a:off x="8019288" y="3886200"/>
+            <a:ext cx="2706624" cy="0"/>
+          </a:xfrm>
+          <a:prstGeom prst="line">
+            <a:avLst/>
+          </a:prstGeom>
+          <a:noFill/>
+          <a:ln w="15240">
+            <a:solidFill>
+              <a:srgbClr val="003A63"/>
+            </a:solidFill>
+            <a:prstDash val="solid"/>
+          </a:ln>
+        </p:spPr>
+      </p:sp>
+      <p:sp>
+        <p:nvSpPr>
+          <p:cNvPr id="19" name="Text 17"/>
+          <p:cNvSpPr/>
+          <p:nvPr/>
+        </p:nvSpPr>
+        <p:spPr>
+          <a:xfrm>
+            <a:off x="7863840" y="3017520"/>
+            <a:ext cx="3017520" cy="201168"/>
+          </a:xfrm>
+          <a:prstGeom prst="rect">
+            <a:avLst/>
+          </a:prstGeom>
+          <a:noFill/>
+          <a:ln/>
+        </p:spPr>
+        <p:txBody>
+          <a:bodyPr wrap="square" lIns="0" tIns="0" rIns="0" bIns="0" rtlCol="0" anchor="ctr"/>
+          <a:lstStyle/>
+          <a:p>
+            <a:pPr algn="ctr" indent="0" marL="0">
+              <a:buNone/>
+            </a:pPr>
+            <a:r>
+              <a:rPr lang="en-US" sz="1050" b="1" dirty="0">
+                <a:solidFill>
+                  <a:srgbClr val="003A63"/>
+                </a:solidFill>
+                <a:latin typeface="Aptos" pitchFamily="34" charset="0"/>
+                <a:ea typeface="Aptos" pitchFamily="34" charset="-122"/>
+                <a:cs typeface="Aptos" pitchFamily="34" charset="-120"/>
+              </a:rPr>
+              <a:t>Measure and monitor</a:t>
+            </a:r>
+            <a:endParaRPr lang="en-US" sz="1050" dirty="0"/>
+          </a:p>
+        </p:txBody>
+      </p:sp>
+      <p:sp>
+        <p:nvSpPr>
+          <p:cNvPr id="20" name="Shape 18"/>
+          <p:cNvSpPr/>
+          <p:nvPr/>
+        </p:nvSpPr>
+        <p:spPr>
+          <a:xfrm>
+            <a:off x="7635240" y="4498848"/>
+            <a:ext cx="3474720" cy="1143000"/>
+          </a:xfrm>
+          <a:prstGeom prst="roundRect">
+            <a:avLst>
+              <a:gd name="adj" fmla="val 9600"/>
+            </a:avLst>
+          </a:prstGeom>
+          <a:solidFill>
             <a:srgbClr val="EAF6F8"/>
           </a:solidFill>
           <a:ln w="12700">
@@ -14968,14 +16965,14 @@
       </p:sp>
       <p:sp>
         <p:nvSpPr>
-          <p:cNvPr id="16" name="Text 14"/>
-          <p:cNvSpPr/>
-          <p:nvPr/>
-        </p:nvSpPr>
-        <p:spPr>
-          <a:xfrm>
-            <a:off x="8074152" y="3666744"/>
-            <a:ext cx="2825496" cy="256032"/>
+          <p:cNvPr id="21" name="Text 19"/>
+          <p:cNvSpPr/>
+          <p:nvPr/>
+        </p:nvSpPr>
+        <p:spPr>
+          <a:xfrm>
+            <a:off x="7799832" y="4645152"/>
+            <a:ext cx="3145536" cy="256032"/>
           </a:xfrm>
           <a:prstGeom prst="rect">
             <a:avLst/>
@@ -14999,7 +16996,7 @@
                 <a:ea typeface="Aptos" pitchFamily="34" charset="-122"/>
                 <a:cs typeface="Aptos" pitchFamily="34" charset="-120"/>
               </a:rPr>
-              <a:t>Use this for</a:t>
+              <a:t>How to validate</a:t>
             </a:r>
             <a:endParaRPr lang="en-US" sz="1300" dirty="0"/>
           </a:p>
@@ -15007,14 +17004,14 @@
       </p:sp>
       <p:sp>
         <p:nvSpPr>
-          <p:cNvPr id="17" name="Text 15"/>
-          <p:cNvSpPr/>
-          <p:nvPr/>
-        </p:nvSpPr>
-        <p:spPr>
-          <a:xfrm>
-            <a:off x="8074152" y="4023360"/>
-            <a:ext cx="2825496" cy="1097280"/>
+          <p:cNvPr id="22" name="Text 20"/>
+          <p:cNvSpPr/>
+          <p:nvPr/>
+        </p:nvSpPr>
+        <p:spPr>
+          <a:xfrm>
+            <a:off x="7799832" y="5001768"/>
+            <a:ext cx="3145536" cy="502920"/>
           </a:xfrm>
           <a:prstGeom prst="rect">
             <a:avLst/>
@@ -15040,7 +17037,7 @@
                 <a:ea typeface="Aptos" pitchFamily="34" charset="-122"/>
                 <a:cs typeface="Aptos" pitchFamily="34" charset="-120"/>
               </a:rPr>
-              <a:t>Connect the concept to public health decisions, safeguards, documentation, or implementation work.</a:t>
+              <a:t>Connect the concept to data quality, model performance, validation evidence, monitoring measures, and decisions that remain under human control.</a:t>
             </a:r>
             <a:endParaRPr lang="en-US" sz="1550" dirty="0"/>
           </a:p>
@@ -15214,8 +17211,8 @@
         </p:nvSpPr>
         <p:spPr>
           <a:xfrm>
-            <a:off x="9966960" y="6537960"/>
-            <a:ext cx="1645920" cy="201168"/>
+            <a:off x="9646920" y="6537960"/>
+            <a:ext cx="1965960" cy="201168"/>
           </a:xfrm>
           <a:prstGeom prst="rect">
             <a:avLst/>
@@ -15239,7 +17236,7 @@
                 <a:ea typeface="Aptos" pitchFamily="34" charset="-122"/>
                 <a:cs typeface="Aptos" pitchFamily="34" charset="-120"/>
               </a:rPr>
-              <a:t>Â© Paula Soper</a:t>
+              <a:t>Copyright Paula Soper</a:t>
             </a:r>
             <a:endParaRPr lang="en-US" sz="800" dirty="0"/>
           </a:p>
@@ -15286,77 +17283,13 @@
       </p:sp>
       <p:sp>
         <p:nvSpPr>
-          <p:cNvPr id="8" name="Shape 6"/>
+          <p:cNvPr id="8" name="Text 6"/>
           <p:cNvSpPr/>
           <p:nvPr/>
         </p:nvSpPr>
         <p:spPr>
           <a:xfrm>
             <a:off x="640080" y="658368"/>
-            <a:ext cx="420624" cy="420624"/>
-          </a:xfrm>
-          <a:prstGeom prst="ellipse">
-            <a:avLst/>
-          </a:prstGeom>
-          <a:solidFill>
-            <a:srgbClr val="0068B7"/>
-          </a:solidFill>
-          <a:ln w="12700">
-            <a:solidFill>
-              <a:srgbClr val="0068B7"/>
-            </a:solidFill>
-            <a:prstDash val="solid"/>
-          </a:ln>
-        </p:spPr>
-      </p:sp>
-      <p:sp>
-        <p:nvSpPr>
-          <p:cNvPr id="9" name="Text 7"/>
-          <p:cNvSpPr/>
-          <p:nvPr/>
-        </p:nvSpPr>
-        <p:spPr>
-          <a:xfrm>
-            <a:off x="640080" y="731520"/>
-            <a:ext cx="420624" cy="164592"/>
-          </a:xfrm>
-          <a:prstGeom prst="rect">
-            <a:avLst/>
-          </a:prstGeom>
-          <a:noFill/>
-          <a:ln/>
-        </p:spPr>
-        <p:txBody>
-          <a:bodyPr wrap="square" lIns="0" tIns="0" rIns="0" bIns="0" rtlCol="0" anchor="ctr"/>
-          <a:lstStyle/>
-          <a:p>
-            <a:pPr algn="ctr" indent="0" marL="0">
-              <a:buNone/>
-            </a:pPr>
-            <a:r>
-              <a:rPr lang="en-US" sz="1100" b="1" dirty="0">
-                <a:solidFill>
-                  <a:srgbClr val="FFFFFF"/>
-                </a:solidFill>
-                <a:latin typeface="Aptos" pitchFamily="34" charset="0"/>
-                <a:ea typeface="Aptos" pitchFamily="34" charset="-122"/>
-                <a:cs typeface="Aptos" pitchFamily="34" charset="-120"/>
-              </a:rPr>
-              <a:t>3</a:t>
-            </a:r>
-            <a:endParaRPr lang="en-US" sz="1100" dirty="0"/>
-          </a:p>
-        </p:txBody>
-      </p:sp>
-      <p:sp>
-        <p:nvSpPr>
-          <p:cNvPr id="10" name="Text 8"/>
-          <p:cNvSpPr/>
-          <p:nvPr/>
-        </p:nvSpPr>
-        <p:spPr>
-          <a:xfrm>
-            <a:off x="640080" y="621792"/>
             <a:ext cx="10881360" cy="713232"/>
           </a:xfrm>
           <a:prstGeom prst="rect">
@@ -15391,14 +17324,14 @@
       </p:sp>
       <p:sp>
         <p:nvSpPr>
-          <p:cNvPr id="11" name="Text 9"/>
+          <p:cNvPr id="9" name="Text 7"/>
           <p:cNvSpPr/>
           <p:nvPr/>
         </p:nvSpPr>
         <p:spPr>
           <a:xfrm>
             <a:off x="868680" y="1508760"/>
-            <a:ext cx="6537960" cy="4160520"/>
+            <a:ext cx="6309360" cy="4160520"/>
           </a:xfrm>
           <a:prstGeom prst="rect">
             <a:avLst/>
@@ -15457,18 +17390,18 @@
       </p:sp>
       <p:sp>
         <p:nvSpPr>
-          <p:cNvPr id="12" name="Shape 10"/>
-          <p:cNvSpPr/>
-          <p:nvPr/>
-        </p:nvSpPr>
-        <p:spPr>
-          <a:xfrm>
-            <a:off x="7909560" y="1417320"/>
-            <a:ext cx="3154680" cy="1828800"/>
+          <p:cNvPr id="10" name="Shape 8"/>
+          <p:cNvSpPr/>
+          <p:nvPr/>
+        </p:nvSpPr>
+        <p:spPr>
+          <a:xfrm>
+            <a:off x="7635240" y="1325880"/>
+            <a:ext cx="3474720" cy="1325880"/>
           </a:xfrm>
           <a:prstGeom prst="roundRect">
             <a:avLst>
-              <a:gd name="adj" fmla="val 6000"/>
+              <a:gd name="adj" fmla="val 8276"/>
             </a:avLst>
           </a:prstGeom>
           <a:solidFill>
@@ -15484,14 +17417,14 @@
       </p:sp>
       <p:sp>
         <p:nvSpPr>
-          <p:cNvPr id="13" name="Text 11"/>
-          <p:cNvSpPr/>
-          <p:nvPr/>
-        </p:nvSpPr>
-        <p:spPr>
-          <a:xfrm>
-            <a:off x="8074152" y="1563624"/>
-            <a:ext cx="2825496" cy="256032"/>
+          <p:cNvPr id="11" name="Text 9"/>
+          <p:cNvSpPr/>
+          <p:nvPr/>
+        </p:nvSpPr>
+        <p:spPr>
+          <a:xfrm>
+            <a:off x="7799832" y="1472184"/>
+            <a:ext cx="3145536" cy="256032"/>
           </a:xfrm>
           <a:prstGeom prst="rect">
             <a:avLst/>
@@ -15515,7 +17448,7 @@
                 <a:ea typeface="Aptos" pitchFamily="34" charset="-122"/>
                 <a:cs typeface="Aptos" pitchFamily="34" charset="-120"/>
               </a:rPr>
-              <a:t>Key idea</a:t>
+              <a:t>Governance lens</a:t>
             </a:r>
             <a:endParaRPr lang="en-US" sz="1300" dirty="0"/>
           </a:p>
@@ -15523,14 +17456,14 @@
       </p:sp>
       <p:sp>
         <p:nvSpPr>
-          <p:cNvPr id="14" name="Text 12"/>
-          <p:cNvSpPr/>
-          <p:nvPr/>
-        </p:nvSpPr>
-        <p:spPr>
-          <a:xfrm>
-            <a:off x="8074152" y="1920240"/>
-            <a:ext cx="2825496" cy="1188720"/>
+          <p:cNvPr id="12" name="Text 10"/>
+          <p:cNvSpPr/>
+          <p:nvPr/>
+        </p:nvSpPr>
+        <p:spPr>
+          <a:xfrm>
+            <a:off x="7799832" y="1828800"/>
+            <a:ext cx="3145536" cy="685800"/>
           </a:xfrm>
           <a:prstGeom prst="rect">
             <a:avLst/>
@@ -15564,21 +17497,233 @@
       </p:sp>
       <p:sp>
         <p:nvSpPr>
-          <p:cNvPr id="15" name="Shape 13"/>
-          <p:cNvSpPr/>
-          <p:nvPr/>
-        </p:nvSpPr>
-        <p:spPr>
-          <a:xfrm>
-            <a:off x="7909560" y="3520440"/>
-            <a:ext cx="3154680" cy="1737360"/>
+          <p:cNvPr id="13" name="Shape 11"/>
+          <p:cNvSpPr/>
+          <p:nvPr/>
+        </p:nvSpPr>
+        <p:spPr>
+          <a:xfrm>
+            <a:off x="7635240" y="2788920"/>
+            <a:ext cx="3474720" cy="1536192"/>
           </a:xfrm>
           <a:prstGeom prst="roundRect">
             <a:avLst>
-              <a:gd name="adj" fmla="val 6316"/>
+              <a:gd name="adj" fmla="val 7143"/>
             </a:avLst>
           </a:prstGeom>
           <a:solidFill>
+            <a:srgbClr val="FFFFFF">
+              <a:alpha val="88000"/>
+            </a:srgbClr>
+          </a:solidFill>
+          <a:ln w="12700">
+            <a:solidFill>
+              <a:srgbClr val="D6E8F2"/>
+            </a:solidFill>
+            <a:prstDash val="solid"/>
+          </a:ln>
+        </p:spPr>
+      </p:sp>
+      <p:sp>
+        <p:nvSpPr>
+          <p:cNvPr id="14" name="Shape 12"/>
+          <p:cNvSpPr/>
+          <p:nvPr/>
+        </p:nvSpPr>
+        <p:spPr>
+          <a:xfrm>
+            <a:off x="7891272" y="3108960"/>
+            <a:ext cx="566928" cy="566928"/>
+          </a:xfrm>
+          <a:prstGeom prst="ellipse">
+            <a:avLst/>
+          </a:prstGeom>
+          <a:solidFill>
+            <a:srgbClr val="0068B7"/>
+          </a:solidFill>
+          <a:ln w="12700">
+            <a:solidFill>
+              <a:srgbClr val="0068B7"/>
+            </a:solidFill>
+            <a:prstDash val="solid"/>
+          </a:ln>
+        </p:spPr>
+      </p:sp>
+      <p:sp>
+        <p:nvSpPr>
+          <p:cNvPr id="15" name="Shape 13"/>
+          <p:cNvSpPr/>
+          <p:nvPr/>
+        </p:nvSpPr>
+        <p:spPr>
+          <a:xfrm>
+            <a:off x="10287000" y="3108960"/>
+            <a:ext cx="566928" cy="566928"/>
+          </a:xfrm>
+          <a:prstGeom prst="ellipse">
+            <a:avLst/>
+          </a:prstGeom>
+          <a:solidFill>
+            <a:srgbClr val="2F8A28"/>
+          </a:solidFill>
+          <a:ln w="12700">
+            <a:solidFill>
+              <a:srgbClr val="2F8A28"/>
+            </a:solidFill>
+            <a:prstDash val="solid"/>
+          </a:ln>
+        </p:spPr>
+      </p:sp>
+      <p:sp>
+        <p:nvSpPr>
+          <p:cNvPr id="16" name="Shape 14"/>
+          <p:cNvSpPr/>
+          <p:nvPr/>
+        </p:nvSpPr>
+        <p:spPr>
+          <a:xfrm>
+            <a:off x="9089136" y="3456432"/>
+            <a:ext cx="566928" cy="566928"/>
+          </a:xfrm>
+          <a:prstGeom prst="ellipse">
+            <a:avLst/>
+          </a:prstGeom>
+          <a:solidFill>
+            <a:srgbClr val="6A4CA3"/>
+          </a:solidFill>
+          <a:ln w="12700">
+            <a:solidFill>
+              <a:srgbClr val="6A4CA3"/>
+            </a:solidFill>
+            <a:prstDash val="solid"/>
+          </a:ln>
+        </p:spPr>
+      </p:sp>
+      <p:sp>
+        <p:nvSpPr>
+          <p:cNvPr id="17" name="Shape 15"/>
+          <p:cNvSpPr/>
+          <p:nvPr/>
+        </p:nvSpPr>
+        <p:spPr>
+          <a:xfrm>
+            <a:off x="8385048" y="3419856"/>
+            <a:ext cx="1975104" cy="0"/>
+          </a:xfrm>
+          <a:prstGeom prst="line">
+            <a:avLst/>
+          </a:prstGeom>
+          <a:noFill/>
+          <a:ln w="25400">
+            <a:solidFill>
+              <a:srgbClr val="8ABBD8"/>
+            </a:solidFill>
+            <a:prstDash val="solid"/>
+          </a:ln>
+        </p:spPr>
+      </p:sp>
+      <p:sp>
+        <p:nvSpPr>
+          <p:cNvPr id="18" name="Shape 16"/>
+          <p:cNvSpPr/>
+          <p:nvPr/>
+        </p:nvSpPr>
+        <p:spPr>
+          <a:xfrm>
+            <a:off x="8202168" y="3630168"/>
+            <a:ext cx="1170432" cy="118872"/>
+          </a:xfrm>
+          <a:prstGeom prst="line">
+            <a:avLst/>
+          </a:prstGeom>
+          <a:noFill/>
+          <a:ln w="25400">
+            <a:solidFill>
+              <a:srgbClr val="8ABBD8"/>
+            </a:solidFill>
+            <a:prstDash val="solid"/>
+          </a:ln>
+        </p:spPr>
+      </p:sp>
+      <p:sp>
+        <p:nvSpPr>
+          <p:cNvPr id="19" name="Shape 17"/>
+          <p:cNvSpPr/>
+          <p:nvPr/>
+        </p:nvSpPr>
+        <p:spPr>
+          <a:xfrm>
+            <a:off x="10543032" y="3630168"/>
+            <a:ext cx="-1170432" cy="118872"/>
+          </a:xfrm>
+          <a:prstGeom prst="line">
+            <a:avLst/>
+          </a:prstGeom>
+          <a:noFill/>
+          <a:ln w="25400">
+            <a:solidFill>
+              <a:srgbClr val="8ABBD8"/>
+            </a:solidFill>
+            <a:prstDash val="solid"/>
+          </a:ln>
+        </p:spPr>
+      </p:sp>
+      <p:sp>
+        <p:nvSpPr>
+          <p:cNvPr id="20" name="Text 18"/>
+          <p:cNvSpPr/>
+          <p:nvPr/>
+        </p:nvSpPr>
+        <p:spPr>
+          <a:xfrm>
+            <a:off x="7863840" y="4069080"/>
+            <a:ext cx="3017520" cy="164592"/>
+          </a:xfrm>
+          <a:prstGeom prst="rect">
+            <a:avLst/>
+          </a:prstGeom>
+          <a:noFill/>
+          <a:ln/>
+        </p:spPr>
+        <p:txBody>
+          <a:bodyPr wrap="square" lIns="0" tIns="0" rIns="0" bIns="0" rtlCol="0" anchor="ctr"/>
+          <a:lstStyle/>
+          <a:p>
+            <a:pPr algn="ctr" indent="0" marL="0">
+              <a:buNone/>
+            </a:pPr>
+            <a:r>
+              <a:rPr lang="en-US" sz="900" b="1" dirty="0">
+                <a:solidFill>
+                  <a:srgbClr val="003A63"/>
+                </a:solidFill>
+                <a:latin typeface="Aptos" pitchFamily="34" charset="0"/>
+                <a:ea typeface="Aptos" pitchFamily="34" charset="-122"/>
+                <a:cs typeface="Aptos" pitchFamily="34" charset="-120"/>
+              </a:rPr>
+              <a:t>Decision rights</a:t>
+            </a:r>
+            <a:endParaRPr lang="en-US" sz="900" dirty="0"/>
+          </a:p>
+        </p:txBody>
+      </p:sp>
+      <p:sp>
+        <p:nvSpPr>
+          <p:cNvPr id="21" name="Shape 19"/>
+          <p:cNvSpPr/>
+          <p:nvPr/>
+        </p:nvSpPr>
+        <p:spPr>
+          <a:xfrm>
+            <a:off x="7635240" y="4498848"/>
+            <a:ext cx="3474720" cy="1143000"/>
+          </a:xfrm>
+          <a:prstGeom prst="roundRect">
+            <a:avLst>
+              <a:gd name="adj" fmla="val 9600"/>
+            </a:avLst>
+          </a:prstGeom>
+          <a:solidFill>
             <a:srgbClr val="EAF6F8"/>
           </a:solidFill>
           <a:ln w="12700">
@@ -15591,14 +17736,14 @@
       </p:sp>
       <p:sp>
         <p:nvSpPr>
-          <p:cNvPr id="16" name="Text 14"/>
-          <p:cNvSpPr/>
-          <p:nvPr/>
-        </p:nvSpPr>
-        <p:spPr>
-          <a:xfrm>
-            <a:off x="8074152" y="3666744"/>
-            <a:ext cx="2825496" cy="256032"/>
+          <p:cNvPr id="22" name="Text 20"/>
+          <p:cNvSpPr/>
+          <p:nvPr/>
+        </p:nvSpPr>
+        <p:spPr>
+          <a:xfrm>
+            <a:off x="7799832" y="4645152"/>
+            <a:ext cx="3145536" cy="256032"/>
           </a:xfrm>
           <a:prstGeom prst="rect">
             <a:avLst/>
@@ -15622,7 +17767,7 @@
                 <a:ea typeface="Aptos" pitchFamily="34" charset="-122"/>
                 <a:cs typeface="Aptos" pitchFamily="34" charset="-120"/>
               </a:rPr>
-              <a:t>Use this for</a:t>
+              <a:t>What to document</a:t>
             </a:r>
             <a:endParaRPr lang="en-US" sz="1300" dirty="0"/>
           </a:p>
@@ -15630,14 +17775,14 @@
       </p:sp>
       <p:sp>
         <p:nvSpPr>
-          <p:cNvPr id="17" name="Text 15"/>
-          <p:cNvSpPr/>
-          <p:nvPr/>
-        </p:nvSpPr>
-        <p:spPr>
-          <a:xfrm>
-            <a:off x="8074152" y="4023360"/>
-            <a:ext cx="2825496" cy="1097280"/>
+          <p:cNvPr id="23" name="Text 21"/>
+          <p:cNvSpPr/>
+          <p:nvPr/>
+        </p:nvSpPr>
+        <p:spPr>
+          <a:xfrm>
+            <a:off x="7799832" y="5001768"/>
+            <a:ext cx="3145536" cy="502920"/>
           </a:xfrm>
           <a:prstGeom prst="rect">
             <a:avLst/>
@@ -15663,7 +17808,7 @@
                 <a:ea typeface="Aptos" pitchFamily="34" charset="-122"/>
                 <a:cs typeface="Aptos" pitchFamily="34" charset="-120"/>
               </a:rPr>
-              <a:t>Connect the concept to public health decisions, safeguards, documentation, or implementation work.</a:t>
+              <a:t>Translate this concept into clear decision rights, review steps, documentation expectations, and escalation paths before an AI-supported workflow is approved.</a:t>
             </a:r>
             <a:endParaRPr lang="en-US" sz="1550" dirty="0"/>
           </a:p>
@@ -15837,8 +17982,8 @@
         </p:nvSpPr>
         <p:spPr>
           <a:xfrm>
-            <a:off x="9966960" y="6537960"/>
-            <a:ext cx="1645920" cy="201168"/>
+            <a:off x="9646920" y="6537960"/>
+            <a:ext cx="1965960" cy="201168"/>
           </a:xfrm>
           <a:prstGeom prst="rect">
             <a:avLst/>
@@ -15862,7 +18007,7 @@
                 <a:ea typeface="Aptos" pitchFamily="34" charset="-122"/>
                 <a:cs typeface="Aptos" pitchFamily="34" charset="-120"/>
               </a:rPr>
-              <a:t>Â© Paula Soper</a:t>
+              <a:t>Copyright Paula Soper</a:t>
             </a:r>
             <a:endParaRPr lang="en-US" sz="800" dirty="0"/>
           </a:p>
@@ -15909,77 +18054,13 @@
       </p:sp>
       <p:sp>
         <p:nvSpPr>
-          <p:cNvPr id="8" name="Shape 6"/>
+          <p:cNvPr id="8" name="Text 6"/>
           <p:cNvSpPr/>
           <p:nvPr/>
         </p:nvSpPr>
         <p:spPr>
           <a:xfrm>
             <a:off x="640080" y="658368"/>
-            <a:ext cx="420624" cy="420624"/>
-          </a:xfrm>
-          <a:prstGeom prst="ellipse">
-            <a:avLst/>
-          </a:prstGeom>
-          <a:solidFill>
-            <a:srgbClr val="0068B7"/>
-          </a:solidFill>
-          <a:ln w="12700">
-            <a:solidFill>
-              <a:srgbClr val="0068B7"/>
-            </a:solidFill>
-            <a:prstDash val="solid"/>
-          </a:ln>
-        </p:spPr>
-      </p:sp>
-      <p:sp>
-        <p:nvSpPr>
-          <p:cNvPr id="9" name="Text 7"/>
-          <p:cNvSpPr/>
-          <p:nvPr/>
-        </p:nvSpPr>
-        <p:spPr>
-          <a:xfrm>
-            <a:off x="640080" y="731520"/>
-            <a:ext cx="420624" cy="164592"/>
-          </a:xfrm>
-          <a:prstGeom prst="rect">
-            <a:avLst/>
-          </a:prstGeom>
-          <a:noFill/>
-          <a:ln/>
-        </p:spPr>
-        <p:txBody>
-          <a:bodyPr wrap="square" lIns="0" tIns="0" rIns="0" bIns="0" rtlCol="0" anchor="ctr"/>
-          <a:lstStyle/>
-          <a:p>
-            <a:pPr algn="ctr" indent="0" marL="0">
-              <a:buNone/>
-            </a:pPr>
-            <a:r>
-              <a:rPr lang="en-US" sz="1100" b="1" dirty="0">
-                <a:solidFill>
-                  <a:srgbClr val="FFFFFF"/>
-                </a:solidFill>
-                <a:latin typeface="Aptos" pitchFamily="34" charset="0"/>
-                <a:ea typeface="Aptos" pitchFamily="34" charset="-122"/>
-                <a:cs typeface="Aptos" pitchFamily="34" charset="-120"/>
-              </a:rPr>
-              <a:t>4</a:t>
-            </a:r>
-            <a:endParaRPr lang="en-US" sz="1100" dirty="0"/>
-          </a:p>
-        </p:txBody>
-      </p:sp>
-      <p:sp>
-        <p:nvSpPr>
-          <p:cNvPr id="10" name="Text 8"/>
-          <p:cNvSpPr/>
-          <p:nvPr/>
-        </p:nvSpPr>
-        <p:spPr>
-          <a:xfrm>
-            <a:off x="640080" y="621792"/>
             <a:ext cx="10881360" cy="713232"/>
           </a:xfrm>
           <a:prstGeom prst="rect">
@@ -16014,14 +18095,14 @@
       </p:sp>
       <p:sp>
         <p:nvSpPr>
-          <p:cNvPr id="11" name="Text 9"/>
+          <p:cNvPr id="9" name="Text 7"/>
           <p:cNvSpPr/>
           <p:nvPr/>
         </p:nvSpPr>
         <p:spPr>
           <a:xfrm>
             <a:off x="868680" y="1508760"/>
-            <a:ext cx="6537960" cy="4160520"/>
+            <a:ext cx="6309360" cy="4160520"/>
           </a:xfrm>
           <a:prstGeom prst="rect">
             <a:avLst/>
@@ -16080,18 +18161,18 @@
       </p:sp>
       <p:sp>
         <p:nvSpPr>
-          <p:cNvPr id="12" name="Shape 10"/>
-          <p:cNvSpPr/>
-          <p:nvPr/>
-        </p:nvSpPr>
-        <p:spPr>
-          <a:xfrm>
-            <a:off x="7909560" y="1417320"/>
-            <a:ext cx="3154680" cy="1828800"/>
+          <p:cNvPr id="10" name="Shape 8"/>
+          <p:cNvSpPr/>
+          <p:nvPr/>
+        </p:nvSpPr>
+        <p:spPr>
+          <a:xfrm>
+            <a:off x="7635240" y="1325880"/>
+            <a:ext cx="3474720" cy="1325880"/>
           </a:xfrm>
           <a:prstGeom prst="roundRect">
             <a:avLst>
-              <a:gd name="adj" fmla="val 6000"/>
+              <a:gd name="adj" fmla="val 8276"/>
             </a:avLst>
           </a:prstGeom>
           <a:solidFill>
@@ -16107,14 +18188,14 @@
       </p:sp>
       <p:sp>
         <p:nvSpPr>
-          <p:cNvPr id="13" name="Text 11"/>
-          <p:cNvSpPr/>
-          <p:nvPr/>
-        </p:nvSpPr>
-        <p:spPr>
-          <a:xfrm>
-            <a:off x="8074152" y="1563624"/>
-            <a:ext cx="2825496" cy="256032"/>
+          <p:cNvPr id="11" name="Text 9"/>
+          <p:cNvSpPr/>
+          <p:nvPr/>
+        </p:nvSpPr>
+        <p:spPr>
+          <a:xfrm>
+            <a:off x="7799832" y="1472184"/>
+            <a:ext cx="3145536" cy="256032"/>
           </a:xfrm>
           <a:prstGeom prst="rect">
             <a:avLst/>
@@ -16138,7 +18219,7 @@
                 <a:ea typeface="Aptos" pitchFamily="34" charset="-122"/>
                 <a:cs typeface="Aptos" pitchFamily="34" charset="-120"/>
               </a:rPr>
-              <a:t>Key idea</a:t>
+              <a:t>Data decision</a:t>
             </a:r>
             <a:endParaRPr lang="en-US" sz="1300" dirty="0"/>
           </a:p>
@@ -16146,14 +18227,14 @@
       </p:sp>
       <p:sp>
         <p:nvSpPr>
-          <p:cNvPr id="14" name="Text 12"/>
-          <p:cNvSpPr/>
-          <p:nvPr/>
-        </p:nvSpPr>
-        <p:spPr>
-          <a:xfrm>
-            <a:off x="8074152" y="1920240"/>
-            <a:ext cx="2825496" cy="1188720"/>
+          <p:cNvPr id="12" name="Text 10"/>
+          <p:cNvSpPr/>
+          <p:nvPr/>
+        </p:nvSpPr>
+        <p:spPr>
+          <a:xfrm>
+            <a:off x="7799832" y="1828800"/>
+            <a:ext cx="3145536" cy="685800"/>
           </a:xfrm>
           <a:prstGeom prst="rect">
             <a:avLst/>
@@ -16187,21 +18268,212 @@
       </p:sp>
       <p:sp>
         <p:nvSpPr>
-          <p:cNvPr id="15" name="Shape 13"/>
-          <p:cNvSpPr/>
-          <p:nvPr/>
-        </p:nvSpPr>
-        <p:spPr>
-          <a:xfrm>
-            <a:off x="7909560" y="3520440"/>
-            <a:ext cx="3154680" cy="1737360"/>
+          <p:cNvPr id="13" name="Shape 11"/>
+          <p:cNvSpPr/>
+          <p:nvPr/>
+        </p:nvSpPr>
+        <p:spPr>
+          <a:xfrm>
+            <a:off x="7635240" y="2788920"/>
+            <a:ext cx="3474720" cy="1536192"/>
           </a:xfrm>
           <a:prstGeom prst="roundRect">
             <a:avLst>
-              <a:gd name="adj" fmla="val 6316"/>
+              <a:gd name="adj" fmla="val 7143"/>
             </a:avLst>
           </a:prstGeom>
           <a:solidFill>
+            <a:srgbClr val="FFFFFF">
+              <a:alpha val="88000"/>
+            </a:srgbClr>
+          </a:solidFill>
+          <a:ln w="12700">
+            <a:solidFill>
+              <a:srgbClr val="D6E8F2"/>
+            </a:solidFill>
+            <a:prstDash val="solid"/>
+          </a:ln>
+        </p:spPr>
+      </p:sp>
+      <p:sp>
+        <p:nvSpPr>
+          <p:cNvPr id="14" name="Shape 12"/>
+          <p:cNvSpPr/>
+          <p:nvPr/>
+        </p:nvSpPr>
+        <p:spPr>
+          <a:xfrm>
+            <a:off x="8138160" y="3474720"/>
+            <a:ext cx="256032" cy="411480"/>
+          </a:xfrm>
+          <a:prstGeom prst="rect">
+            <a:avLst/>
+          </a:prstGeom>
+          <a:solidFill>
+            <a:srgbClr val="0068B7"/>
+          </a:solidFill>
+          <a:ln w="12700">
+            <a:solidFill>
+              <a:srgbClr val="0068B7"/>
+            </a:solidFill>
+            <a:prstDash val="solid"/>
+          </a:ln>
+        </p:spPr>
+      </p:sp>
+      <p:sp>
+        <p:nvSpPr>
+          <p:cNvPr id="15" name="Shape 13"/>
+          <p:cNvSpPr/>
+          <p:nvPr/>
+        </p:nvSpPr>
+        <p:spPr>
+          <a:xfrm>
+            <a:off x="8577072" y="3172968"/>
+            <a:ext cx="256032" cy="713232"/>
+          </a:xfrm>
+          <a:prstGeom prst="rect">
+            <a:avLst/>
+          </a:prstGeom>
+          <a:solidFill>
+            <a:srgbClr val="2F8A28"/>
+          </a:solidFill>
+          <a:ln w="12700">
+            <a:solidFill>
+              <a:srgbClr val="2F8A28"/>
+            </a:solidFill>
+            <a:prstDash val="solid"/>
+          </a:ln>
+        </p:spPr>
+      </p:sp>
+      <p:sp>
+        <p:nvSpPr>
+          <p:cNvPr id="16" name="Shape 14"/>
+          <p:cNvSpPr/>
+          <p:nvPr/>
+        </p:nvSpPr>
+        <p:spPr>
+          <a:xfrm>
+            <a:off x="9015984" y="2880360"/>
+            <a:ext cx="256032" cy="1005840"/>
+          </a:xfrm>
+          <a:prstGeom prst="rect">
+            <a:avLst/>
+          </a:prstGeom>
+          <a:solidFill>
+            <a:srgbClr val="D69A2D"/>
+          </a:solidFill>
+          <a:ln w="12700">
+            <a:solidFill>
+              <a:srgbClr val="D69A2D"/>
+            </a:solidFill>
+            <a:prstDash val="solid"/>
+          </a:ln>
+        </p:spPr>
+      </p:sp>
+      <p:sp>
+        <p:nvSpPr>
+          <p:cNvPr id="17" name="Shape 15"/>
+          <p:cNvSpPr/>
+          <p:nvPr/>
+        </p:nvSpPr>
+        <p:spPr>
+          <a:xfrm>
+            <a:off x="9454896" y="3319272"/>
+            <a:ext cx="256032" cy="566928"/>
+          </a:xfrm>
+          <a:prstGeom prst="rect">
+            <a:avLst/>
+          </a:prstGeom>
+          <a:solidFill>
+            <a:srgbClr val="6A4CA3"/>
+          </a:solidFill>
+          <a:ln w="12700">
+            <a:solidFill>
+              <a:srgbClr val="6A4CA3"/>
+            </a:solidFill>
+            <a:prstDash val="solid"/>
+          </a:ln>
+        </p:spPr>
+      </p:sp>
+      <p:sp>
+        <p:nvSpPr>
+          <p:cNvPr id="18" name="Shape 16"/>
+          <p:cNvSpPr/>
+          <p:nvPr/>
+        </p:nvSpPr>
+        <p:spPr>
+          <a:xfrm>
+            <a:off x="8019288" y="3886200"/>
+            <a:ext cx="2706624" cy="0"/>
+          </a:xfrm>
+          <a:prstGeom prst="line">
+            <a:avLst/>
+          </a:prstGeom>
+          <a:noFill/>
+          <a:ln w="15240">
+            <a:solidFill>
+              <a:srgbClr val="003A63"/>
+            </a:solidFill>
+            <a:prstDash val="solid"/>
+          </a:ln>
+        </p:spPr>
+      </p:sp>
+      <p:sp>
+        <p:nvSpPr>
+          <p:cNvPr id="19" name="Text 17"/>
+          <p:cNvSpPr/>
+          <p:nvPr/>
+        </p:nvSpPr>
+        <p:spPr>
+          <a:xfrm>
+            <a:off x="7863840" y="3017520"/>
+            <a:ext cx="3017520" cy="201168"/>
+          </a:xfrm>
+          <a:prstGeom prst="rect">
+            <a:avLst/>
+          </a:prstGeom>
+          <a:noFill/>
+          <a:ln/>
+        </p:spPr>
+        <p:txBody>
+          <a:bodyPr wrap="square" lIns="0" tIns="0" rIns="0" bIns="0" rtlCol="0" anchor="ctr"/>
+          <a:lstStyle/>
+          <a:p>
+            <a:pPr algn="ctr" indent="0" marL="0">
+              <a:buNone/>
+            </a:pPr>
+            <a:r>
+              <a:rPr lang="en-US" sz="1050" b="1" dirty="0">
+                <a:solidFill>
+                  <a:srgbClr val="003A63"/>
+                </a:solidFill>
+                <a:latin typeface="Aptos" pitchFamily="34" charset="0"/>
+                <a:ea typeface="Aptos" pitchFamily="34" charset="-122"/>
+                <a:cs typeface="Aptos" pitchFamily="34" charset="-120"/>
+              </a:rPr>
+              <a:t>Measure and monitor</a:t>
+            </a:r>
+            <a:endParaRPr lang="en-US" sz="1050" dirty="0"/>
+          </a:p>
+        </p:txBody>
+      </p:sp>
+      <p:sp>
+        <p:nvSpPr>
+          <p:cNvPr id="20" name="Shape 18"/>
+          <p:cNvSpPr/>
+          <p:nvPr/>
+        </p:nvSpPr>
+        <p:spPr>
+          <a:xfrm>
+            <a:off x="7635240" y="4498848"/>
+            <a:ext cx="3474720" cy="1143000"/>
+          </a:xfrm>
+          <a:prstGeom prst="roundRect">
+            <a:avLst>
+              <a:gd name="adj" fmla="val 9600"/>
+            </a:avLst>
+          </a:prstGeom>
+          <a:solidFill>
             <a:srgbClr val="EAF6F8"/>
           </a:solidFill>
           <a:ln w="12700">
@@ -16214,14 +18486,14 @@
       </p:sp>
       <p:sp>
         <p:nvSpPr>
-          <p:cNvPr id="16" name="Text 14"/>
-          <p:cNvSpPr/>
-          <p:nvPr/>
-        </p:nvSpPr>
-        <p:spPr>
-          <a:xfrm>
-            <a:off x="8074152" y="3666744"/>
-            <a:ext cx="2825496" cy="256032"/>
+          <p:cNvPr id="21" name="Text 19"/>
+          <p:cNvSpPr/>
+          <p:nvPr/>
+        </p:nvSpPr>
+        <p:spPr>
+          <a:xfrm>
+            <a:off x="7799832" y="4645152"/>
+            <a:ext cx="3145536" cy="256032"/>
           </a:xfrm>
           <a:prstGeom prst="rect">
             <a:avLst/>
@@ -16245,7 +18517,7 @@
                 <a:ea typeface="Aptos" pitchFamily="34" charset="-122"/>
                 <a:cs typeface="Aptos" pitchFamily="34" charset="-120"/>
               </a:rPr>
-              <a:t>Use this for</a:t>
+              <a:t>How to validate</a:t>
             </a:r>
             <a:endParaRPr lang="en-US" sz="1300" dirty="0"/>
           </a:p>
@@ -16253,14 +18525,14 @@
       </p:sp>
       <p:sp>
         <p:nvSpPr>
-          <p:cNvPr id="17" name="Text 15"/>
-          <p:cNvSpPr/>
-          <p:nvPr/>
-        </p:nvSpPr>
-        <p:spPr>
-          <a:xfrm>
-            <a:off x="8074152" y="4023360"/>
-            <a:ext cx="2825496" cy="1097280"/>
+          <p:cNvPr id="22" name="Text 20"/>
+          <p:cNvSpPr/>
+          <p:nvPr/>
+        </p:nvSpPr>
+        <p:spPr>
+          <a:xfrm>
+            <a:off x="7799832" y="5001768"/>
+            <a:ext cx="3145536" cy="502920"/>
           </a:xfrm>
           <a:prstGeom prst="rect">
             <a:avLst/>
@@ -16286,7 +18558,7 @@
                 <a:ea typeface="Aptos" pitchFamily="34" charset="-122"/>
                 <a:cs typeface="Aptos" pitchFamily="34" charset="-120"/>
               </a:rPr>
-              <a:t>Connect the concept to public health decisions, safeguards, documentation, or implementation work.</a:t>
+              <a:t>Connect the concept to data quality, model performance, validation evidence, monitoring measures, and decisions that remain under human control.</a:t>
             </a:r>
             <a:endParaRPr lang="en-US" sz="1550" dirty="0"/>
           </a:p>
@@ -16460,8 +18732,8 @@
         </p:nvSpPr>
         <p:spPr>
           <a:xfrm>
-            <a:off x="9966960" y="6537960"/>
-            <a:ext cx="1645920" cy="201168"/>
+            <a:off x="9646920" y="6537960"/>
+            <a:ext cx="1965960" cy="201168"/>
           </a:xfrm>
           <a:prstGeom prst="rect">
             <a:avLst/>
@@ -16485,7 +18757,7 @@
                 <a:ea typeface="Aptos" pitchFamily="34" charset="-122"/>
                 <a:cs typeface="Aptos" pitchFamily="34" charset="-120"/>
               </a:rPr>
-              <a:t>Â© Paula Soper</a:t>
+              <a:t>Copyright Paula Soper</a:t>
             </a:r>
             <a:endParaRPr lang="en-US" sz="800" dirty="0"/>
           </a:p>
@@ -16532,77 +18804,13 @@
       </p:sp>
       <p:sp>
         <p:nvSpPr>
-          <p:cNvPr id="8" name="Shape 6"/>
+          <p:cNvPr id="8" name="Text 6"/>
           <p:cNvSpPr/>
           <p:nvPr/>
         </p:nvSpPr>
         <p:spPr>
           <a:xfrm>
             <a:off x="640080" y="658368"/>
-            <a:ext cx="420624" cy="420624"/>
-          </a:xfrm>
-          <a:prstGeom prst="ellipse">
-            <a:avLst/>
-          </a:prstGeom>
-          <a:solidFill>
-            <a:srgbClr val="0068B7"/>
-          </a:solidFill>
-          <a:ln w="12700">
-            <a:solidFill>
-              <a:srgbClr val="0068B7"/>
-            </a:solidFill>
-            <a:prstDash val="solid"/>
-          </a:ln>
-        </p:spPr>
-      </p:sp>
-      <p:sp>
-        <p:nvSpPr>
-          <p:cNvPr id="9" name="Text 7"/>
-          <p:cNvSpPr/>
-          <p:nvPr/>
-        </p:nvSpPr>
-        <p:spPr>
-          <a:xfrm>
-            <a:off x="640080" y="731520"/>
-            <a:ext cx="420624" cy="164592"/>
-          </a:xfrm>
-          <a:prstGeom prst="rect">
-            <a:avLst/>
-          </a:prstGeom>
-          <a:noFill/>
-          <a:ln/>
-        </p:spPr>
-        <p:txBody>
-          <a:bodyPr wrap="square" lIns="0" tIns="0" rIns="0" bIns="0" rtlCol="0" anchor="ctr"/>
-          <a:lstStyle/>
-          <a:p>
-            <a:pPr algn="ctr" indent="0" marL="0">
-              <a:buNone/>
-            </a:pPr>
-            <a:r>
-              <a:rPr lang="en-US" sz="1100" b="1" dirty="0">
-                <a:solidFill>
-                  <a:srgbClr val="FFFFFF"/>
-                </a:solidFill>
-                <a:latin typeface="Aptos" pitchFamily="34" charset="0"/>
-                <a:ea typeface="Aptos" pitchFamily="34" charset="-122"/>
-                <a:cs typeface="Aptos" pitchFamily="34" charset="-120"/>
-              </a:rPr>
-              <a:t>5</a:t>
-            </a:r>
-            <a:endParaRPr lang="en-US" sz="1100" dirty="0"/>
-          </a:p>
-        </p:txBody>
-      </p:sp>
-      <p:sp>
-        <p:nvSpPr>
-          <p:cNvPr id="10" name="Text 8"/>
-          <p:cNvSpPr/>
-          <p:nvPr/>
-        </p:nvSpPr>
-        <p:spPr>
-          <a:xfrm>
-            <a:off x="640080" y="621792"/>
             <a:ext cx="10881360" cy="713232"/>
           </a:xfrm>
           <a:prstGeom prst="rect">
@@ -16637,14 +18845,14 @@
       </p:sp>
       <p:sp>
         <p:nvSpPr>
-          <p:cNvPr id="11" name="Text 9"/>
+          <p:cNvPr id="9" name="Text 7"/>
           <p:cNvSpPr/>
           <p:nvPr/>
         </p:nvSpPr>
         <p:spPr>
           <a:xfrm>
             <a:off x="868680" y="1508760"/>
-            <a:ext cx="6537960" cy="4160520"/>
+            <a:ext cx="6309360" cy="4160520"/>
           </a:xfrm>
           <a:prstGeom prst="rect">
             <a:avLst/>
@@ -16703,18 +18911,18 @@
       </p:sp>
       <p:sp>
         <p:nvSpPr>
-          <p:cNvPr id="12" name="Shape 10"/>
-          <p:cNvSpPr/>
-          <p:nvPr/>
-        </p:nvSpPr>
-        <p:spPr>
-          <a:xfrm>
-            <a:off x="7909560" y="1417320"/>
-            <a:ext cx="3154680" cy="1828800"/>
+          <p:cNvPr id="10" name="Shape 8"/>
+          <p:cNvSpPr/>
+          <p:nvPr/>
+        </p:nvSpPr>
+        <p:spPr>
+          <a:xfrm>
+            <a:off x="7635240" y="1325880"/>
+            <a:ext cx="3474720" cy="1325880"/>
           </a:xfrm>
           <a:prstGeom prst="roundRect">
             <a:avLst>
-              <a:gd name="adj" fmla="val 6000"/>
+              <a:gd name="adj" fmla="val 8276"/>
             </a:avLst>
           </a:prstGeom>
           <a:solidFill>
@@ -16730,14 +18938,14 @@
       </p:sp>
       <p:sp>
         <p:nvSpPr>
-          <p:cNvPr id="13" name="Text 11"/>
-          <p:cNvSpPr/>
-          <p:nvPr/>
-        </p:nvSpPr>
-        <p:spPr>
-          <a:xfrm>
-            <a:off x="8074152" y="1563624"/>
-            <a:ext cx="2825496" cy="256032"/>
+          <p:cNvPr id="11" name="Text 9"/>
+          <p:cNvSpPr/>
+          <p:nvPr/>
+        </p:nvSpPr>
+        <p:spPr>
+          <a:xfrm>
+            <a:off x="7799832" y="1472184"/>
+            <a:ext cx="3145536" cy="256032"/>
           </a:xfrm>
           <a:prstGeom prst="rect">
             <a:avLst/>
@@ -16761,7 +18969,7 @@
                 <a:ea typeface="Aptos" pitchFamily="34" charset="-122"/>
                 <a:cs typeface="Aptos" pitchFamily="34" charset="-120"/>
               </a:rPr>
-              <a:t>Key idea</a:t>
+              <a:t>Data decision</a:t>
             </a:r>
             <a:endParaRPr lang="en-US" sz="1300" dirty="0"/>
           </a:p>
@@ -16769,14 +18977,14 @@
       </p:sp>
       <p:sp>
         <p:nvSpPr>
-          <p:cNvPr id="14" name="Text 12"/>
-          <p:cNvSpPr/>
-          <p:nvPr/>
-        </p:nvSpPr>
-        <p:spPr>
-          <a:xfrm>
-            <a:off x="8074152" y="1920240"/>
-            <a:ext cx="2825496" cy="1188720"/>
+          <p:cNvPr id="12" name="Text 10"/>
+          <p:cNvSpPr/>
+          <p:nvPr/>
+        </p:nvSpPr>
+        <p:spPr>
+          <a:xfrm>
+            <a:off x="7799832" y="1828800"/>
+            <a:ext cx="3145536" cy="685800"/>
           </a:xfrm>
           <a:prstGeom prst="rect">
             <a:avLst/>
@@ -16810,21 +19018,212 @@
       </p:sp>
       <p:sp>
         <p:nvSpPr>
-          <p:cNvPr id="15" name="Shape 13"/>
-          <p:cNvSpPr/>
-          <p:nvPr/>
-        </p:nvSpPr>
-        <p:spPr>
-          <a:xfrm>
-            <a:off x="7909560" y="3520440"/>
-            <a:ext cx="3154680" cy="1737360"/>
+          <p:cNvPr id="13" name="Shape 11"/>
+          <p:cNvSpPr/>
+          <p:nvPr/>
+        </p:nvSpPr>
+        <p:spPr>
+          <a:xfrm>
+            <a:off x="7635240" y="2788920"/>
+            <a:ext cx="3474720" cy="1536192"/>
           </a:xfrm>
           <a:prstGeom prst="roundRect">
             <a:avLst>
-              <a:gd name="adj" fmla="val 6316"/>
+              <a:gd name="adj" fmla="val 7143"/>
             </a:avLst>
           </a:prstGeom>
           <a:solidFill>
+            <a:srgbClr val="FFFFFF">
+              <a:alpha val="88000"/>
+            </a:srgbClr>
+          </a:solidFill>
+          <a:ln w="12700">
+            <a:solidFill>
+              <a:srgbClr val="D6E8F2"/>
+            </a:solidFill>
+            <a:prstDash val="solid"/>
+          </a:ln>
+        </p:spPr>
+      </p:sp>
+      <p:sp>
+        <p:nvSpPr>
+          <p:cNvPr id="14" name="Shape 12"/>
+          <p:cNvSpPr/>
+          <p:nvPr/>
+        </p:nvSpPr>
+        <p:spPr>
+          <a:xfrm>
+            <a:off x="8138160" y="3474720"/>
+            <a:ext cx="256032" cy="411480"/>
+          </a:xfrm>
+          <a:prstGeom prst="rect">
+            <a:avLst/>
+          </a:prstGeom>
+          <a:solidFill>
+            <a:srgbClr val="0068B7"/>
+          </a:solidFill>
+          <a:ln w="12700">
+            <a:solidFill>
+              <a:srgbClr val="0068B7"/>
+            </a:solidFill>
+            <a:prstDash val="solid"/>
+          </a:ln>
+        </p:spPr>
+      </p:sp>
+      <p:sp>
+        <p:nvSpPr>
+          <p:cNvPr id="15" name="Shape 13"/>
+          <p:cNvSpPr/>
+          <p:nvPr/>
+        </p:nvSpPr>
+        <p:spPr>
+          <a:xfrm>
+            <a:off x="8577072" y="3172968"/>
+            <a:ext cx="256032" cy="713232"/>
+          </a:xfrm>
+          <a:prstGeom prst="rect">
+            <a:avLst/>
+          </a:prstGeom>
+          <a:solidFill>
+            <a:srgbClr val="2F8A28"/>
+          </a:solidFill>
+          <a:ln w="12700">
+            <a:solidFill>
+              <a:srgbClr val="2F8A28"/>
+            </a:solidFill>
+            <a:prstDash val="solid"/>
+          </a:ln>
+        </p:spPr>
+      </p:sp>
+      <p:sp>
+        <p:nvSpPr>
+          <p:cNvPr id="16" name="Shape 14"/>
+          <p:cNvSpPr/>
+          <p:nvPr/>
+        </p:nvSpPr>
+        <p:spPr>
+          <a:xfrm>
+            <a:off x="9015984" y="2880360"/>
+            <a:ext cx="256032" cy="1005840"/>
+          </a:xfrm>
+          <a:prstGeom prst="rect">
+            <a:avLst/>
+          </a:prstGeom>
+          <a:solidFill>
+            <a:srgbClr val="D69A2D"/>
+          </a:solidFill>
+          <a:ln w="12700">
+            <a:solidFill>
+              <a:srgbClr val="D69A2D"/>
+            </a:solidFill>
+            <a:prstDash val="solid"/>
+          </a:ln>
+        </p:spPr>
+      </p:sp>
+      <p:sp>
+        <p:nvSpPr>
+          <p:cNvPr id="17" name="Shape 15"/>
+          <p:cNvSpPr/>
+          <p:nvPr/>
+        </p:nvSpPr>
+        <p:spPr>
+          <a:xfrm>
+            <a:off x="9454896" y="3319272"/>
+            <a:ext cx="256032" cy="566928"/>
+          </a:xfrm>
+          <a:prstGeom prst="rect">
+            <a:avLst/>
+          </a:prstGeom>
+          <a:solidFill>
+            <a:srgbClr val="6A4CA3"/>
+          </a:solidFill>
+          <a:ln w="12700">
+            <a:solidFill>
+              <a:srgbClr val="6A4CA3"/>
+            </a:solidFill>
+            <a:prstDash val="solid"/>
+          </a:ln>
+        </p:spPr>
+      </p:sp>
+      <p:sp>
+        <p:nvSpPr>
+          <p:cNvPr id="18" name="Shape 16"/>
+          <p:cNvSpPr/>
+          <p:nvPr/>
+        </p:nvSpPr>
+        <p:spPr>
+          <a:xfrm>
+            <a:off x="8019288" y="3886200"/>
+            <a:ext cx="2706624" cy="0"/>
+          </a:xfrm>
+          <a:prstGeom prst="line">
+            <a:avLst/>
+          </a:prstGeom>
+          <a:noFill/>
+          <a:ln w="15240">
+            <a:solidFill>
+              <a:srgbClr val="003A63"/>
+            </a:solidFill>
+            <a:prstDash val="solid"/>
+          </a:ln>
+        </p:spPr>
+      </p:sp>
+      <p:sp>
+        <p:nvSpPr>
+          <p:cNvPr id="19" name="Text 17"/>
+          <p:cNvSpPr/>
+          <p:nvPr/>
+        </p:nvSpPr>
+        <p:spPr>
+          <a:xfrm>
+            <a:off x="7863840" y="3017520"/>
+            <a:ext cx="3017520" cy="201168"/>
+          </a:xfrm>
+          <a:prstGeom prst="rect">
+            <a:avLst/>
+          </a:prstGeom>
+          <a:noFill/>
+          <a:ln/>
+        </p:spPr>
+        <p:txBody>
+          <a:bodyPr wrap="square" lIns="0" tIns="0" rIns="0" bIns="0" rtlCol="0" anchor="ctr"/>
+          <a:lstStyle/>
+          <a:p>
+            <a:pPr algn="ctr" indent="0" marL="0">
+              <a:buNone/>
+            </a:pPr>
+            <a:r>
+              <a:rPr lang="en-US" sz="1050" b="1" dirty="0">
+                <a:solidFill>
+                  <a:srgbClr val="003A63"/>
+                </a:solidFill>
+                <a:latin typeface="Aptos" pitchFamily="34" charset="0"/>
+                <a:ea typeface="Aptos" pitchFamily="34" charset="-122"/>
+                <a:cs typeface="Aptos" pitchFamily="34" charset="-120"/>
+              </a:rPr>
+              <a:t>Measure and monitor</a:t>
+            </a:r>
+            <a:endParaRPr lang="en-US" sz="1050" dirty="0"/>
+          </a:p>
+        </p:txBody>
+      </p:sp>
+      <p:sp>
+        <p:nvSpPr>
+          <p:cNvPr id="20" name="Shape 18"/>
+          <p:cNvSpPr/>
+          <p:nvPr/>
+        </p:nvSpPr>
+        <p:spPr>
+          <a:xfrm>
+            <a:off x="7635240" y="4498848"/>
+            <a:ext cx="3474720" cy="1143000"/>
+          </a:xfrm>
+          <a:prstGeom prst="roundRect">
+            <a:avLst>
+              <a:gd name="adj" fmla="val 9600"/>
+            </a:avLst>
+          </a:prstGeom>
+          <a:solidFill>
             <a:srgbClr val="EAF6F8"/>
           </a:solidFill>
           <a:ln w="12700">
@@ -16837,14 +19236,14 @@
       </p:sp>
       <p:sp>
         <p:nvSpPr>
-          <p:cNvPr id="16" name="Text 14"/>
-          <p:cNvSpPr/>
-          <p:nvPr/>
-        </p:nvSpPr>
-        <p:spPr>
-          <a:xfrm>
-            <a:off x="8074152" y="3666744"/>
-            <a:ext cx="2825496" cy="256032"/>
+          <p:cNvPr id="21" name="Text 19"/>
+          <p:cNvSpPr/>
+          <p:nvPr/>
+        </p:nvSpPr>
+        <p:spPr>
+          <a:xfrm>
+            <a:off x="7799832" y="4645152"/>
+            <a:ext cx="3145536" cy="256032"/>
           </a:xfrm>
           <a:prstGeom prst="rect">
             <a:avLst/>
@@ -16868,7 +19267,7 @@
                 <a:ea typeface="Aptos" pitchFamily="34" charset="-122"/>
                 <a:cs typeface="Aptos" pitchFamily="34" charset="-120"/>
               </a:rPr>
-              <a:t>Use this for</a:t>
+              <a:t>How to validate</a:t>
             </a:r>
             <a:endParaRPr lang="en-US" sz="1300" dirty="0"/>
           </a:p>
@@ -16876,14 +19275,14 @@
       </p:sp>
       <p:sp>
         <p:nvSpPr>
-          <p:cNvPr id="17" name="Text 15"/>
-          <p:cNvSpPr/>
-          <p:nvPr/>
-        </p:nvSpPr>
-        <p:spPr>
-          <a:xfrm>
-            <a:off x="8074152" y="4023360"/>
-            <a:ext cx="2825496" cy="1097280"/>
+          <p:cNvPr id="22" name="Text 20"/>
+          <p:cNvSpPr/>
+          <p:nvPr/>
+        </p:nvSpPr>
+        <p:spPr>
+          <a:xfrm>
+            <a:off x="7799832" y="5001768"/>
+            <a:ext cx="3145536" cy="502920"/>
           </a:xfrm>
           <a:prstGeom prst="rect">
             <a:avLst/>
@@ -16909,7 +19308,7 @@
                 <a:ea typeface="Aptos" pitchFamily="34" charset="-122"/>
                 <a:cs typeface="Aptos" pitchFamily="34" charset="-120"/>
               </a:rPr>
-              <a:t>Connect the concept to public health decisions, safeguards, documentation, or implementation work.</a:t>
+              <a:t>Connect the concept to data quality, model performance, validation evidence, monitoring measures, and decisions that remain under human control.</a:t>
             </a:r>
             <a:endParaRPr lang="en-US" sz="1550" dirty="0"/>
           </a:p>

--- a/downloads/presentations/modules/arc-240.pptx
+++ b/downloads/presentations/modules/arc-240.pptx
@@ -3614,13 +3614,11 @@
             </a:avLst>
           </a:prstGeom>
           <a:solidFill>
-            <a:srgbClr val="FFFFFF">
-              <a:alpha val="88000"/>
-            </a:srgbClr>
+            <a:srgbClr val="FFFFFF"/>
           </a:solidFill>
           <a:ln w="12700">
             <a:solidFill>
-              <a:srgbClr val="D6E8F2"/>
+              <a:srgbClr val="B9D7E6"/>
             </a:solidFill>
             <a:prstDash val="solid"/>
           </a:ln>
@@ -3628,169 +3626,112 @@
       </p:sp>
       <p:sp>
         <p:nvSpPr>
-          <p:cNvPr id="14" name="Shape 12"/>
-          <p:cNvSpPr/>
-          <p:nvPr/>
-        </p:nvSpPr>
-        <p:spPr>
-          <a:xfrm>
-            <a:off x="8138160" y="3474720"/>
-            <a:ext cx="256032" cy="411480"/>
-          </a:xfrm>
-          <a:prstGeom prst="rect">
-            <a:avLst/>
-          </a:prstGeom>
-          <a:solidFill>
-            <a:srgbClr val="0068B7"/>
-          </a:solidFill>
-          <a:ln w="12700">
-            <a:solidFill>
-              <a:srgbClr val="0068B7"/>
-            </a:solidFill>
-            <a:prstDash val="solid"/>
-          </a:ln>
-        </p:spPr>
-      </p:sp>
-      <p:sp>
-        <p:nvSpPr>
-          <p:cNvPr id="15" name="Shape 13"/>
-          <p:cNvSpPr/>
-          <p:nvPr/>
-        </p:nvSpPr>
-        <p:spPr>
-          <a:xfrm>
-            <a:off x="8577072" y="3172968"/>
-            <a:ext cx="256032" cy="713232"/>
-          </a:xfrm>
-          <a:prstGeom prst="rect">
-            <a:avLst/>
-          </a:prstGeom>
-          <a:solidFill>
-            <a:srgbClr val="2F8A28"/>
-          </a:solidFill>
-          <a:ln w="12700">
-            <a:solidFill>
-              <a:srgbClr val="2F8A28"/>
-            </a:solidFill>
-            <a:prstDash val="solid"/>
-          </a:ln>
-        </p:spPr>
+          <p:cNvPr id="14" name="Text 12"/>
+          <p:cNvSpPr/>
+          <p:nvPr/>
+        </p:nvSpPr>
+        <p:spPr>
+          <a:xfrm>
+            <a:off x="7799832" y="2935224"/>
+            <a:ext cx="3145536" cy="256032"/>
+          </a:xfrm>
+          <a:prstGeom prst="rect">
+            <a:avLst/>
+          </a:prstGeom>
+          <a:noFill/>
+          <a:ln/>
+        </p:spPr>
+        <p:txBody>
+          <a:bodyPr wrap="square" lIns="0" tIns="0" rIns="0" bIns="0" rtlCol="0" anchor="ctr"/>
+          <a:lstStyle/>
+          <a:p>
+            <a:pPr indent="0" marL="0">
+              <a:buNone/>
+            </a:pPr>
+            <a:r>
+              <a:rPr lang="en-US" sz="1300" b="1" dirty="0">
+                <a:solidFill>
+                  <a:srgbClr val="0068B7"/>
+                </a:solidFill>
+                <a:latin typeface="Aptos" pitchFamily="34" charset="0"/>
+                <a:ea typeface="Aptos" pitchFamily="34" charset="-122"/>
+                <a:cs typeface="Aptos" pitchFamily="34" charset="-120"/>
+              </a:rPr>
+              <a:t>Concept checkpoints</a:t>
+            </a:r>
+            <a:endParaRPr lang="en-US" sz="1300" dirty="0"/>
+          </a:p>
+        </p:txBody>
+      </p:sp>
+      <p:sp>
+        <p:nvSpPr>
+          <p:cNvPr id="15" name="Text 13"/>
+          <p:cNvSpPr/>
+          <p:nvPr/>
+        </p:nvSpPr>
+        <p:spPr>
+          <a:xfrm>
+            <a:off x="7818120" y="3300984"/>
+            <a:ext cx="3090672" cy="877824"/>
+          </a:xfrm>
+          <a:prstGeom prst="rect">
+            <a:avLst/>
+          </a:prstGeom>
+          <a:noFill/>
+          <a:ln/>
+        </p:spPr>
+        <p:txBody>
+          <a:bodyPr wrap="square" lIns="254" tIns="254" rIns="254" bIns="254" rtlCol="0" anchor="t">
+            <a:normAutofit/>
+          </a:bodyPr>
+          <a:lstStyle/>
+          <a:p>
+            <a:r>
+              <a:rPr lang="en-US" sz="1380" dirty="0">
+                <a:solidFill>
+                  <a:srgbClr val="17364A"/>
+                </a:solidFill>
+                <a:latin typeface="Aptos" pitchFamily="34" charset="0"/>
+                <a:ea typeface="Aptos" pitchFamily="34" charset="-122"/>
+                <a:cs typeface="Aptos" pitchFamily="34" charset="-120"/>
+              </a:rPr>
+              <a:t>Unit consistency is essential when interpreting quantitative results, thresholds,.</a:t>
+            </a:r>
+            <a:endParaRPr lang="en-US" sz="1380" dirty="0"/>
+          </a:p>
+          <a:p>
+            <a:r>
+              <a:rPr lang="en-US" sz="1380" dirty="0">
+                <a:solidFill>
+                  <a:srgbClr val="17364A"/>
+                </a:solidFill>
+                <a:latin typeface="Aptos" pitchFamily="34" charset="0"/>
+                <a:ea typeface="Aptos" pitchFamily="34" charset="-122"/>
+                <a:cs typeface="Aptos" pitchFamily="34" charset="-120"/>
+              </a:rPr>
+              <a:t>Reportable condition mapping.</a:t>
+            </a:r>
+            <a:endParaRPr lang="en-US" sz="1380" dirty="0"/>
+          </a:p>
+          <a:p>
+            <a:r>
+              <a:rPr lang="en-US" sz="1380" dirty="0">
+                <a:solidFill>
+                  <a:srgbClr val="17364A"/>
+                </a:solidFill>
+                <a:latin typeface="Aptos" pitchFamily="34" charset="0"/>
+                <a:ea typeface="Aptos" pitchFamily="34" charset="-122"/>
+                <a:cs typeface="Aptos" pitchFamily="34" charset="-120"/>
+              </a:rPr>
+              <a:t>Reportable condition mapping links laboratory tests and results to conditions that may.</a:t>
+            </a:r>
+            <a:endParaRPr lang="en-US" sz="1380" dirty="0"/>
+          </a:p>
+        </p:txBody>
       </p:sp>
       <p:sp>
         <p:nvSpPr>
           <p:cNvPr id="16" name="Shape 14"/>
-          <p:cNvSpPr/>
-          <p:nvPr/>
-        </p:nvSpPr>
-        <p:spPr>
-          <a:xfrm>
-            <a:off x="9015984" y="2880360"/>
-            <a:ext cx="256032" cy="1005840"/>
-          </a:xfrm>
-          <a:prstGeom prst="rect">
-            <a:avLst/>
-          </a:prstGeom>
-          <a:solidFill>
-            <a:srgbClr val="D69A2D"/>
-          </a:solidFill>
-          <a:ln w="12700">
-            <a:solidFill>
-              <a:srgbClr val="D69A2D"/>
-            </a:solidFill>
-            <a:prstDash val="solid"/>
-          </a:ln>
-        </p:spPr>
-      </p:sp>
-      <p:sp>
-        <p:nvSpPr>
-          <p:cNvPr id="17" name="Shape 15"/>
-          <p:cNvSpPr/>
-          <p:nvPr/>
-        </p:nvSpPr>
-        <p:spPr>
-          <a:xfrm>
-            <a:off x="9454896" y="3319272"/>
-            <a:ext cx="256032" cy="566928"/>
-          </a:xfrm>
-          <a:prstGeom prst="rect">
-            <a:avLst/>
-          </a:prstGeom>
-          <a:solidFill>
-            <a:srgbClr val="6A4CA3"/>
-          </a:solidFill>
-          <a:ln w="12700">
-            <a:solidFill>
-              <a:srgbClr val="6A4CA3"/>
-            </a:solidFill>
-            <a:prstDash val="solid"/>
-          </a:ln>
-        </p:spPr>
-      </p:sp>
-      <p:sp>
-        <p:nvSpPr>
-          <p:cNvPr id="18" name="Shape 16"/>
-          <p:cNvSpPr/>
-          <p:nvPr/>
-        </p:nvSpPr>
-        <p:spPr>
-          <a:xfrm>
-            <a:off x="8019288" y="3886200"/>
-            <a:ext cx="2706624" cy="0"/>
-          </a:xfrm>
-          <a:prstGeom prst="line">
-            <a:avLst/>
-          </a:prstGeom>
-          <a:noFill/>
-          <a:ln w="15240">
-            <a:solidFill>
-              <a:srgbClr val="003A63"/>
-            </a:solidFill>
-            <a:prstDash val="solid"/>
-          </a:ln>
-        </p:spPr>
-      </p:sp>
-      <p:sp>
-        <p:nvSpPr>
-          <p:cNvPr id="19" name="Text 17"/>
-          <p:cNvSpPr/>
-          <p:nvPr/>
-        </p:nvSpPr>
-        <p:spPr>
-          <a:xfrm>
-            <a:off x="7863840" y="3017520"/>
-            <a:ext cx="3017520" cy="201168"/>
-          </a:xfrm>
-          <a:prstGeom prst="rect">
-            <a:avLst/>
-          </a:prstGeom>
-          <a:noFill/>
-          <a:ln/>
-        </p:spPr>
-        <p:txBody>
-          <a:bodyPr wrap="square" lIns="0" tIns="0" rIns="0" bIns="0" rtlCol="0" anchor="ctr"/>
-          <a:lstStyle/>
-          <a:p>
-            <a:pPr algn="ctr" indent="0" marL="0">
-              <a:buNone/>
-            </a:pPr>
-            <a:r>
-              <a:rPr lang="en-US" sz="1050" b="1" dirty="0">
-                <a:solidFill>
-                  <a:srgbClr val="003A63"/>
-                </a:solidFill>
-                <a:latin typeface="Aptos" pitchFamily="34" charset="0"/>
-                <a:ea typeface="Aptos" pitchFamily="34" charset="-122"/>
-                <a:cs typeface="Aptos" pitchFamily="34" charset="-120"/>
-              </a:rPr>
-              <a:t>Measure and monitor</a:t>
-            </a:r>
-            <a:endParaRPr lang="en-US" sz="1050" dirty="0"/>
-          </a:p>
-        </p:txBody>
-      </p:sp>
-      <p:sp>
-        <p:nvSpPr>
-          <p:cNvPr id="20" name="Shape 18"/>
           <p:cNvSpPr/>
           <p:nvPr/>
         </p:nvSpPr>
@@ -3817,7 +3758,7 @@
       </p:sp>
       <p:sp>
         <p:nvSpPr>
-          <p:cNvPr id="21" name="Text 19"/>
+          <p:cNvPr id="17" name="Text 15"/>
           <p:cNvSpPr/>
           <p:nvPr/>
         </p:nvSpPr>
@@ -3856,7 +3797,7 @@
       </p:sp>
       <p:sp>
         <p:nvSpPr>
-          <p:cNvPr id="22" name="Text 20"/>
+          <p:cNvPr id="18" name="Text 16"/>
           <p:cNvSpPr/>
           <p:nvPr/>
         </p:nvSpPr>
@@ -4364,13 +4305,11 @@
             </a:avLst>
           </a:prstGeom>
           <a:solidFill>
-            <a:srgbClr val="FFFFFF">
-              <a:alpha val="88000"/>
-            </a:srgbClr>
+            <a:srgbClr val="FFFFFF"/>
           </a:solidFill>
           <a:ln w="12700">
             <a:solidFill>
-              <a:srgbClr val="D6E8F2"/>
+              <a:srgbClr val="B9D7E6"/>
             </a:solidFill>
             <a:prstDash val="solid"/>
           </a:ln>
@@ -4378,169 +4317,112 @@
       </p:sp>
       <p:sp>
         <p:nvSpPr>
-          <p:cNvPr id="14" name="Shape 12"/>
-          <p:cNvSpPr/>
-          <p:nvPr/>
-        </p:nvSpPr>
-        <p:spPr>
-          <a:xfrm>
-            <a:off x="8138160" y="3474720"/>
-            <a:ext cx="256032" cy="411480"/>
-          </a:xfrm>
-          <a:prstGeom prst="rect">
-            <a:avLst/>
-          </a:prstGeom>
-          <a:solidFill>
-            <a:srgbClr val="0068B7"/>
-          </a:solidFill>
-          <a:ln w="12700">
-            <a:solidFill>
-              <a:srgbClr val="0068B7"/>
-            </a:solidFill>
-            <a:prstDash val="solid"/>
-          </a:ln>
-        </p:spPr>
-      </p:sp>
-      <p:sp>
-        <p:nvSpPr>
-          <p:cNvPr id="15" name="Shape 13"/>
-          <p:cNvSpPr/>
-          <p:nvPr/>
-        </p:nvSpPr>
-        <p:spPr>
-          <a:xfrm>
-            <a:off x="8577072" y="3172968"/>
-            <a:ext cx="256032" cy="713232"/>
-          </a:xfrm>
-          <a:prstGeom prst="rect">
-            <a:avLst/>
-          </a:prstGeom>
-          <a:solidFill>
-            <a:srgbClr val="2F8A28"/>
-          </a:solidFill>
-          <a:ln w="12700">
-            <a:solidFill>
-              <a:srgbClr val="2F8A28"/>
-            </a:solidFill>
-            <a:prstDash val="solid"/>
-          </a:ln>
-        </p:spPr>
+          <p:cNvPr id="14" name="Text 12"/>
+          <p:cNvSpPr/>
+          <p:nvPr/>
+        </p:nvSpPr>
+        <p:spPr>
+          <a:xfrm>
+            <a:off x="7799832" y="2935224"/>
+            <a:ext cx="3145536" cy="256032"/>
+          </a:xfrm>
+          <a:prstGeom prst="rect">
+            <a:avLst/>
+          </a:prstGeom>
+          <a:noFill/>
+          <a:ln/>
+        </p:spPr>
+        <p:txBody>
+          <a:bodyPr wrap="square" lIns="0" tIns="0" rIns="0" bIns="0" rtlCol="0" anchor="ctr"/>
+          <a:lstStyle/>
+          <a:p>
+            <a:pPr indent="0" marL="0">
+              <a:buNone/>
+            </a:pPr>
+            <a:r>
+              <a:rPr lang="en-US" sz="1300" b="1" dirty="0">
+                <a:solidFill>
+                  <a:srgbClr val="0068B7"/>
+                </a:solidFill>
+                <a:latin typeface="Aptos" pitchFamily="34" charset="0"/>
+                <a:ea typeface="Aptos" pitchFamily="34" charset="-122"/>
+                <a:cs typeface="Aptos" pitchFamily="34" charset="-120"/>
+              </a:rPr>
+              <a:t>Concept checkpoints</a:t>
+            </a:r>
+            <a:endParaRPr lang="en-US" sz="1300" dirty="0"/>
+          </a:p>
+        </p:txBody>
+      </p:sp>
+      <p:sp>
+        <p:nvSpPr>
+          <p:cNvPr id="15" name="Text 13"/>
+          <p:cNvSpPr/>
+          <p:nvPr/>
+        </p:nvSpPr>
+        <p:spPr>
+          <a:xfrm>
+            <a:off x="7818120" y="3300984"/>
+            <a:ext cx="3090672" cy="877824"/>
+          </a:xfrm>
+          <a:prstGeom prst="rect">
+            <a:avLst/>
+          </a:prstGeom>
+          <a:noFill/>
+          <a:ln/>
+        </p:spPr>
+        <p:txBody>
+          <a:bodyPr wrap="square" lIns="254" tIns="254" rIns="254" bIns="254" rtlCol="0" anchor="t">
+            <a:normAutofit/>
+          </a:bodyPr>
+          <a:lstStyle/>
+          <a:p>
+            <a:r>
+              <a:rPr lang="en-US" sz="1380" dirty="0">
+                <a:solidFill>
+                  <a:srgbClr val="17364A"/>
+                </a:solidFill>
+                <a:latin typeface="Aptos" pitchFamily="34" charset="0"/>
+                <a:ea typeface="Aptos" pitchFamily="34" charset="-122"/>
+                <a:cs typeface="Aptos" pitchFamily="34" charset="-120"/>
+              </a:rPr>
+              <a:t>An AI tool that summarizes incoming lab reports for disease investigators may need to.</a:t>
+            </a:r>
+            <a:endParaRPr lang="en-US" sz="1380" dirty="0"/>
+          </a:p>
+          <a:p>
+            <a:r>
+              <a:rPr lang="en-US" sz="1380" dirty="0">
+                <a:solidFill>
+                  <a:srgbClr val="17364A"/>
+                </a:solidFill>
+                <a:latin typeface="Aptos" pitchFamily="34" charset="0"/>
+                <a:ea typeface="Aptos" pitchFamily="34" charset="-122"/>
+                <a:cs typeface="Aptos" pitchFamily="34" charset="-120"/>
+              </a:rPr>
+              <a:t>If the specimen source is omitted, the epidemiologic meaning of the result may change.</a:t>
+            </a:r>
+            <a:endParaRPr lang="en-US" sz="1380" dirty="0"/>
+          </a:p>
+          <a:p>
+            <a:r>
+              <a:rPr lang="en-US" sz="1380" dirty="0">
+                <a:solidFill>
+                  <a:srgbClr val="17364A"/>
+                </a:solidFill>
+                <a:latin typeface="Aptos" pitchFamily="34" charset="0"/>
+                <a:ea typeface="Aptos" pitchFamily="34" charset="-122"/>
+                <a:cs typeface="Aptos" pitchFamily="34" charset="-120"/>
+              </a:rPr>
+              <a:t>A second example is anomaly detection using laboratory trends.</a:t>
+            </a:r>
+            <a:endParaRPr lang="en-US" sz="1380" dirty="0"/>
+          </a:p>
+        </p:txBody>
       </p:sp>
       <p:sp>
         <p:nvSpPr>
           <p:cNvPr id="16" name="Shape 14"/>
-          <p:cNvSpPr/>
-          <p:nvPr/>
-        </p:nvSpPr>
-        <p:spPr>
-          <a:xfrm>
-            <a:off x="9015984" y="2880360"/>
-            <a:ext cx="256032" cy="1005840"/>
-          </a:xfrm>
-          <a:prstGeom prst="rect">
-            <a:avLst/>
-          </a:prstGeom>
-          <a:solidFill>
-            <a:srgbClr val="D69A2D"/>
-          </a:solidFill>
-          <a:ln w="12700">
-            <a:solidFill>
-              <a:srgbClr val="D69A2D"/>
-            </a:solidFill>
-            <a:prstDash val="solid"/>
-          </a:ln>
-        </p:spPr>
-      </p:sp>
-      <p:sp>
-        <p:nvSpPr>
-          <p:cNvPr id="17" name="Shape 15"/>
-          <p:cNvSpPr/>
-          <p:nvPr/>
-        </p:nvSpPr>
-        <p:spPr>
-          <a:xfrm>
-            <a:off x="9454896" y="3319272"/>
-            <a:ext cx="256032" cy="566928"/>
-          </a:xfrm>
-          <a:prstGeom prst="rect">
-            <a:avLst/>
-          </a:prstGeom>
-          <a:solidFill>
-            <a:srgbClr val="6A4CA3"/>
-          </a:solidFill>
-          <a:ln w="12700">
-            <a:solidFill>
-              <a:srgbClr val="6A4CA3"/>
-            </a:solidFill>
-            <a:prstDash val="solid"/>
-          </a:ln>
-        </p:spPr>
-      </p:sp>
-      <p:sp>
-        <p:nvSpPr>
-          <p:cNvPr id="18" name="Shape 16"/>
-          <p:cNvSpPr/>
-          <p:nvPr/>
-        </p:nvSpPr>
-        <p:spPr>
-          <a:xfrm>
-            <a:off x="8019288" y="3886200"/>
-            <a:ext cx="2706624" cy="0"/>
-          </a:xfrm>
-          <a:prstGeom prst="line">
-            <a:avLst/>
-          </a:prstGeom>
-          <a:noFill/>
-          <a:ln w="15240">
-            <a:solidFill>
-              <a:srgbClr val="003A63"/>
-            </a:solidFill>
-            <a:prstDash val="solid"/>
-          </a:ln>
-        </p:spPr>
-      </p:sp>
-      <p:sp>
-        <p:nvSpPr>
-          <p:cNvPr id="19" name="Text 17"/>
-          <p:cNvSpPr/>
-          <p:nvPr/>
-        </p:nvSpPr>
-        <p:spPr>
-          <a:xfrm>
-            <a:off x="7863840" y="3017520"/>
-            <a:ext cx="3017520" cy="201168"/>
-          </a:xfrm>
-          <a:prstGeom prst="rect">
-            <a:avLst/>
-          </a:prstGeom>
-          <a:noFill/>
-          <a:ln/>
-        </p:spPr>
-        <p:txBody>
-          <a:bodyPr wrap="square" lIns="0" tIns="0" rIns="0" bIns="0" rtlCol="0" anchor="ctr"/>
-          <a:lstStyle/>
-          <a:p>
-            <a:pPr algn="ctr" indent="0" marL="0">
-              <a:buNone/>
-            </a:pPr>
-            <a:r>
-              <a:rPr lang="en-US" sz="1050" b="1" dirty="0">
-                <a:solidFill>
-                  <a:srgbClr val="003A63"/>
-                </a:solidFill>
-                <a:latin typeface="Aptos" pitchFamily="34" charset="0"/>
-                <a:ea typeface="Aptos" pitchFamily="34" charset="-122"/>
-                <a:cs typeface="Aptos" pitchFamily="34" charset="-120"/>
-              </a:rPr>
-              <a:t>Measure and monitor</a:t>
-            </a:r>
-            <a:endParaRPr lang="en-US" sz="1050" dirty="0"/>
-          </a:p>
-        </p:txBody>
-      </p:sp>
-      <p:sp>
-        <p:nvSpPr>
-          <p:cNvPr id="20" name="Shape 18"/>
           <p:cNvSpPr/>
           <p:nvPr/>
         </p:nvSpPr>
@@ -4567,7 +4449,7 @@
       </p:sp>
       <p:sp>
         <p:nvSpPr>
-          <p:cNvPr id="21" name="Text 19"/>
+          <p:cNvPr id="17" name="Text 15"/>
           <p:cNvSpPr/>
           <p:nvPr/>
         </p:nvSpPr>
@@ -4606,7 +4488,7 @@
       </p:sp>
       <p:sp>
         <p:nvSpPr>
-          <p:cNvPr id="22" name="Text 20"/>
+          <p:cNvPr id="18" name="Text 16"/>
           <p:cNvSpPr/>
           <p:nvPr/>
         </p:nvSpPr>
@@ -5114,13 +4996,11 @@
             </a:avLst>
           </a:prstGeom>
           <a:solidFill>
-            <a:srgbClr val="FFFFFF">
-              <a:alpha val="88000"/>
-            </a:srgbClr>
+            <a:srgbClr val="FFFFFF"/>
           </a:solidFill>
           <a:ln w="12700">
             <a:solidFill>
-              <a:srgbClr val="D6E8F2"/>
+              <a:srgbClr val="B9D7E6"/>
             </a:solidFill>
             <a:prstDash val="solid"/>
           </a:ln>
@@ -5128,169 +5008,112 @@
       </p:sp>
       <p:sp>
         <p:nvSpPr>
-          <p:cNvPr id="14" name="Shape 12"/>
-          <p:cNvSpPr/>
-          <p:nvPr/>
-        </p:nvSpPr>
-        <p:spPr>
-          <a:xfrm>
-            <a:off x="8138160" y="3474720"/>
-            <a:ext cx="256032" cy="411480"/>
-          </a:xfrm>
-          <a:prstGeom prst="rect">
-            <a:avLst/>
-          </a:prstGeom>
-          <a:solidFill>
-            <a:srgbClr val="0068B7"/>
-          </a:solidFill>
-          <a:ln w="12700">
-            <a:solidFill>
-              <a:srgbClr val="0068B7"/>
-            </a:solidFill>
-            <a:prstDash val="solid"/>
-          </a:ln>
-        </p:spPr>
-      </p:sp>
-      <p:sp>
-        <p:nvSpPr>
-          <p:cNvPr id="15" name="Shape 13"/>
-          <p:cNvSpPr/>
-          <p:nvPr/>
-        </p:nvSpPr>
-        <p:spPr>
-          <a:xfrm>
-            <a:off x="8577072" y="3172968"/>
-            <a:ext cx="256032" cy="713232"/>
-          </a:xfrm>
-          <a:prstGeom prst="rect">
-            <a:avLst/>
-          </a:prstGeom>
-          <a:solidFill>
-            <a:srgbClr val="2F8A28"/>
-          </a:solidFill>
-          <a:ln w="12700">
-            <a:solidFill>
-              <a:srgbClr val="2F8A28"/>
-            </a:solidFill>
-            <a:prstDash val="solid"/>
-          </a:ln>
-        </p:spPr>
+          <p:cNvPr id="14" name="Text 12"/>
+          <p:cNvSpPr/>
+          <p:nvPr/>
+        </p:nvSpPr>
+        <p:spPr>
+          <a:xfrm>
+            <a:off x="7799832" y="2935224"/>
+            <a:ext cx="3145536" cy="256032"/>
+          </a:xfrm>
+          <a:prstGeom prst="rect">
+            <a:avLst/>
+          </a:prstGeom>
+          <a:noFill/>
+          <a:ln/>
+        </p:spPr>
+        <p:txBody>
+          <a:bodyPr wrap="square" lIns="0" tIns="0" rIns="0" bIns="0" rtlCol="0" anchor="ctr"/>
+          <a:lstStyle/>
+          <a:p>
+            <a:pPr indent="0" marL="0">
+              <a:buNone/>
+            </a:pPr>
+            <a:r>
+              <a:rPr lang="en-US" sz="1300" b="1" dirty="0">
+                <a:solidFill>
+                  <a:srgbClr val="0068B7"/>
+                </a:solidFill>
+                <a:latin typeface="Aptos" pitchFamily="34" charset="0"/>
+                <a:ea typeface="Aptos" pitchFamily="34" charset="-122"/>
+                <a:cs typeface="Aptos" pitchFamily="34" charset="-120"/>
+              </a:rPr>
+              <a:t>Concept checkpoints</a:t>
+            </a:r>
+            <a:endParaRPr lang="en-US" sz="1300" dirty="0"/>
+          </a:p>
+        </p:txBody>
+      </p:sp>
+      <p:sp>
+        <p:nvSpPr>
+          <p:cNvPr id="15" name="Text 13"/>
+          <p:cNvSpPr/>
+          <p:nvPr/>
+        </p:nvSpPr>
+        <p:spPr>
+          <a:xfrm>
+            <a:off x="7818120" y="3300984"/>
+            <a:ext cx="3090672" cy="877824"/>
+          </a:xfrm>
+          <a:prstGeom prst="rect">
+            <a:avLst/>
+          </a:prstGeom>
+          <a:noFill/>
+          <a:ln/>
+        </p:spPr>
+        <p:txBody>
+          <a:bodyPr wrap="square" lIns="254" tIns="254" rIns="254" bIns="254" rtlCol="0" anchor="t">
+            <a:normAutofit/>
+          </a:bodyPr>
+          <a:lstStyle/>
+          <a:p>
+            <a:r>
+              <a:rPr lang="en-US" sz="1380" dirty="0">
+                <a:solidFill>
+                  <a:srgbClr val="17364A"/>
+                </a:solidFill>
+                <a:latin typeface="Aptos" pitchFamily="34" charset="0"/>
+                <a:ea typeface="Aptos" pitchFamily="34" charset="-122"/>
+                <a:cs typeface="Aptos" pitchFamily="34" charset="-120"/>
+              </a:rPr>
+              <a:t>At minimum, many workflows need patient identifiers, specimen collection date, test.</a:t>
+            </a:r>
+            <a:endParaRPr lang="en-US" sz="1380" dirty="0"/>
+          </a:p>
+          <a:p>
+            <a:r>
+              <a:rPr lang="en-US" sz="1380" dirty="0">
+                <a:solidFill>
+                  <a:srgbClr val="17364A"/>
+                </a:solidFill>
+                <a:latin typeface="Aptos" pitchFamily="34" charset="0"/>
+                <a:ea typeface="Aptos" pitchFamily="34" charset="-122"/>
+                <a:cs typeface="Aptos" pitchFamily="34" charset="-120"/>
+              </a:rPr>
+              <a:t>An AI tool used for summarization may need different fields than a tool used for trend.</a:t>
+            </a:r>
+            <a:endParaRPr lang="en-US" sz="1380" dirty="0"/>
+          </a:p>
+          <a:p>
+            <a:r>
+              <a:rPr lang="en-US" sz="1380" dirty="0">
+                <a:solidFill>
+                  <a:srgbClr val="17364A"/>
+                </a:solidFill>
+                <a:latin typeface="Aptos" pitchFamily="34" charset="0"/>
+                <a:ea typeface="Aptos" pitchFamily="34" charset="-122"/>
+                <a:cs typeface="Aptos" pitchFamily="34" charset="-120"/>
+              </a:rPr>
+              <a:t>Terminology mapping should be reviewed as an ongoing process.</a:t>
+            </a:r>
+            <a:endParaRPr lang="en-US" sz="1380" dirty="0"/>
+          </a:p>
+        </p:txBody>
       </p:sp>
       <p:sp>
         <p:nvSpPr>
           <p:cNvPr id="16" name="Shape 14"/>
-          <p:cNvSpPr/>
-          <p:nvPr/>
-        </p:nvSpPr>
-        <p:spPr>
-          <a:xfrm>
-            <a:off x="9015984" y="2880360"/>
-            <a:ext cx="256032" cy="1005840"/>
-          </a:xfrm>
-          <a:prstGeom prst="rect">
-            <a:avLst/>
-          </a:prstGeom>
-          <a:solidFill>
-            <a:srgbClr val="D69A2D"/>
-          </a:solidFill>
-          <a:ln w="12700">
-            <a:solidFill>
-              <a:srgbClr val="D69A2D"/>
-            </a:solidFill>
-            <a:prstDash val="solid"/>
-          </a:ln>
-        </p:spPr>
-      </p:sp>
-      <p:sp>
-        <p:nvSpPr>
-          <p:cNvPr id="17" name="Shape 15"/>
-          <p:cNvSpPr/>
-          <p:nvPr/>
-        </p:nvSpPr>
-        <p:spPr>
-          <a:xfrm>
-            <a:off x="9454896" y="3319272"/>
-            <a:ext cx="256032" cy="566928"/>
-          </a:xfrm>
-          <a:prstGeom prst="rect">
-            <a:avLst/>
-          </a:prstGeom>
-          <a:solidFill>
-            <a:srgbClr val="6A4CA3"/>
-          </a:solidFill>
-          <a:ln w="12700">
-            <a:solidFill>
-              <a:srgbClr val="6A4CA3"/>
-            </a:solidFill>
-            <a:prstDash val="solid"/>
-          </a:ln>
-        </p:spPr>
-      </p:sp>
-      <p:sp>
-        <p:nvSpPr>
-          <p:cNvPr id="18" name="Shape 16"/>
-          <p:cNvSpPr/>
-          <p:nvPr/>
-        </p:nvSpPr>
-        <p:spPr>
-          <a:xfrm>
-            <a:off x="8019288" y="3886200"/>
-            <a:ext cx="2706624" cy="0"/>
-          </a:xfrm>
-          <a:prstGeom prst="line">
-            <a:avLst/>
-          </a:prstGeom>
-          <a:noFill/>
-          <a:ln w="15240">
-            <a:solidFill>
-              <a:srgbClr val="003A63"/>
-            </a:solidFill>
-            <a:prstDash val="solid"/>
-          </a:ln>
-        </p:spPr>
-      </p:sp>
-      <p:sp>
-        <p:nvSpPr>
-          <p:cNvPr id="19" name="Text 17"/>
-          <p:cNvSpPr/>
-          <p:nvPr/>
-        </p:nvSpPr>
-        <p:spPr>
-          <a:xfrm>
-            <a:off x="7863840" y="3017520"/>
-            <a:ext cx="3017520" cy="201168"/>
-          </a:xfrm>
-          <a:prstGeom prst="rect">
-            <a:avLst/>
-          </a:prstGeom>
-          <a:noFill/>
-          <a:ln/>
-        </p:spPr>
-        <p:txBody>
-          <a:bodyPr wrap="square" lIns="0" tIns="0" rIns="0" bIns="0" rtlCol="0" anchor="ctr"/>
-          <a:lstStyle/>
-          <a:p>
-            <a:pPr algn="ctr" indent="0" marL="0">
-              <a:buNone/>
-            </a:pPr>
-            <a:r>
-              <a:rPr lang="en-US" sz="1050" b="1" dirty="0">
-                <a:solidFill>
-                  <a:srgbClr val="003A63"/>
-                </a:solidFill>
-                <a:latin typeface="Aptos" pitchFamily="34" charset="0"/>
-                <a:ea typeface="Aptos" pitchFamily="34" charset="-122"/>
-                <a:cs typeface="Aptos" pitchFamily="34" charset="-120"/>
-              </a:rPr>
-              <a:t>Measure and monitor</a:t>
-            </a:r>
-            <a:endParaRPr lang="en-US" sz="1050" dirty="0"/>
-          </a:p>
-        </p:txBody>
-      </p:sp>
-      <p:sp>
-        <p:nvSpPr>
-          <p:cNvPr id="20" name="Shape 18"/>
           <p:cNvSpPr/>
           <p:nvPr/>
         </p:nvSpPr>
@@ -5317,7 +5140,7 @@
       </p:sp>
       <p:sp>
         <p:nvSpPr>
-          <p:cNvPr id="21" name="Text 19"/>
+          <p:cNvPr id="17" name="Text 15"/>
           <p:cNvSpPr/>
           <p:nvPr/>
         </p:nvSpPr>
@@ -5356,7 +5179,7 @@
       </p:sp>
       <p:sp>
         <p:nvSpPr>
-          <p:cNvPr id="22" name="Text 20"/>
+          <p:cNvPr id="18" name="Text 16"/>
           <p:cNvSpPr/>
           <p:nvPr/>
         </p:nvSpPr>
@@ -5864,13 +5687,11 @@
             </a:avLst>
           </a:prstGeom>
           <a:solidFill>
-            <a:srgbClr val="FFFFFF">
-              <a:alpha val="88000"/>
-            </a:srgbClr>
+            <a:srgbClr val="FFFFFF"/>
           </a:solidFill>
           <a:ln w="12700">
             <a:solidFill>
-              <a:srgbClr val="D6E8F2"/>
+              <a:srgbClr val="B9D7E6"/>
             </a:solidFill>
             <a:prstDash val="solid"/>
           </a:ln>
@@ -5878,26 +5699,42 @@
       </p:sp>
       <p:sp>
         <p:nvSpPr>
-          <p:cNvPr id="14" name="Shape 12"/>
-          <p:cNvSpPr/>
-          <p:nvPr/>
-        </p:nvSpPr>
-        <p:spPr>
-          <a:xfrm>
-            <a:off x="8046720" y="3108960"/>
-            <a:ext cx="2651760" cy="896112"/>
-          </a:xfrm>
-          <a:prstGeom prst="arc">
-            <a:avLst/>
-          </a:prstGeom>
-          <a:noFill/>
-          <a:ln w="25400">
-            <a:solidFill>
-              <a:srgbClr val="0068B7"/>
-            </a:solidFill>
-            <a:prstDash val="solid"/>
-          </a:ln>
-        </p:spPr>
+          <p:cNvPr id="14" name="Text 12"/>
+          <p:cNvSpPr/>
+          <p:nvPr/>
+        </p:nvSpPr>
+        <p:spPr>
+          <a:xfrm>
+            <a:off x="7799832" y="2935224"/>
+            <a:ext cx="3145536" cy="256032"/>
+          </a:xfrm>
+          <a:prstGeom prst="rect">
+            <a:avLst/>
+          </a:prstGeom>
+          <a:noFill/>
+          <a:ln/>
+        </p:spPr>
+        <p:txBody>
+          <a:bodyPr wrap="square" lIns="0" tIns="0" rIns="0" bIns="0" rtlCol="0" anchor="ctr"/>
+          <a:lstStyle/>
+          <a:p>
+            <a:pPr indent="0" marL="0">
+              <a:buNone/>
+            </a:pPr>
+            <a:r>
+              <a:rPr lang="en-US" sz="1300" b="1" dirty="0">
+                <a:solidFill>
+                  <a:srgbClr val="0068B7"/>
+                </a:solidFill>
+                <a:latin typeface="Aptos" pitchFamily="34" charset="0"/>
+                <a:ea typeface="Aptos" pitchFamily="34" charset="-122"/>
+                <a:cs typeface="Aptos" pitchFamily="34" charset="-120"/>
+              </a:rPr>
+              <a:t>Concept checkpoints</a:t>
+            </a:r>
+            <a:endParaRPr lang="en-US" sz="1300" dirty="0"/>
+          </a:p>
+        </p:txBody>
       </p:sp>
       <p:sp>
         <p:nvSpPr>
@@ -5907,102 +5744,67 @@
         </p:nvSpPr>
         <p:spPr>
           <a:xfrm>
-            <a:off x="7909560" y="3099816"/>
-            <a:ext cx="2926080" cy="256032"/>
-          </a:xfrm>
-          <a:prstGeom prst="rect">
-            <a:avLst/>
-          </a:prstGeom>
-          <a:noFill/>
-          <a:ln/>
-        </p:spPr>
-        <p:txBody>
-          <a:bodyPr wrap="square" lIns="0" tIns="0" rIns="0" bIns="0" rtlCol="0" anchor="ctr"/>
-          <a:lstStyle/>
-          <a:p>
-            <a:pPr algn="ctr" indent="0" marL="0">
-              <a:buNone/>
-            </a:pPr>
-            <a:r>
-              <a:rPr lang="en-US" sz="1500" b="1" dirty="0">
-                <a:solidFill>
-                  <a:srgbClr val="003A63"/>
-                </a:solidFill>
-                <a:latin typeface="Aptos" pitchFamily="34" charset="0"/>
-                <a:ea typeface="Aptos" pitchFamily="34" charset="-122"/>
-                <a:cs typeface="Aptos" pitchFamily="34" charset="-120"/>
-              </a:rPr>
-              <a:t>Risk</a:t>
-            </a:r>
-            <a:endParaRPr lang="en-US" sz="1500" dirty="0"/>
+            <a:off x="7818120" y="3300984"/>
+            <a:ext cx="3090672" cy="877824"/>
+          </a:xfrm>
+          <a:prstGeom prst="rect">
+            <a:avLst/>
+          </a:prstGeom>
+          <a:noFill/>
+          <a:ln/>
+        </p:spPr>
+        <p:txBody>
+          <a:bodyPr wrap="square" lIns="254" tIns="254" rIns="254" bIns="254" rtlCol="0" anchor="t">
+            <a:normAutofit/>
+          </a:bodyPr>
+          <a:lstStyle/>
+          <a:p>
+            <a:r>
+              <a:rPr lang="en-US" sz="1380" dirty="0">
+                <a:solidFill>
+                  <a:srgbClr val="17364A"/>
+                </a:solidFill>
+                <a:latin typeface="Aptos" pitchFamily="34" charset="0"/>
+                <a:ea typeface="Aptos" pitchFamily="34" charset="-122"/>
+                <a:cs typeface="Aptos" pitchFamily="34" charset="-120"/>
+              </a:rPr>
+              <a:t>Missing units or specimen details.</a:t>
+            </a:r>
+            <a:endParaRPr lang="en-US" sz="1380" dirty="0"/>
+          </a:p>
+          <a:p>
+            <a:r>
+              <a:rPr lang="en-US" sz="1380" dirty="0">
+                <a:solidFill>
+                  <a:srgbClr val="17364A"/>
+                </a:solidFill>
+                <a:latin typeface="Aptos" pitchFamily="34" charset="0"/>
+                <a:ea typeface="Aptos" pitchFamily="34" charset="-122"/>
+                <a:cs typeface="Aptos" pitchFamily="34" charset="-120"/>
+              </a:rPr>
+              <a:t>Incomplete fields can change interpretation.</a:t>
+            </a:r>
+            <a:endParaRPr lang="en-US" sz="1380" dirty="0"/>
+          </a:p>
+          <a:p>
+            <a:r>
+              <a:rPr lang="en-US" sz="1380" dirty="0">
+                <a:solidFill>
+                  <a:srgbClr val="17364A"/>
+                </a:solidFill>
+                <a:latin typeface="Aptos" pitchFamily="34" charset="0"/>
+                <a:ea typeface="Aptos" pitchFamily="34" charset="-122"/>
+                <a:cs typeface="Aptos" pitchFamily="34" charset="-120"/>
+              </a:rPr>
+              <a:t>Guardrails include required-field checks and uncertainty flags in AI outputs.</a:t>
+            </a:r>
+            <a:endParaRPr lang="en-US" sz="1380" dirty="0"/>
           </a:p>
         </p:txBody>
       </p:sp>
       <p:sp>
         <p:nvSpPr>
           <p:cNvPr id="16" name="Shape 14"/>
-          <p:cNvSpPr/>
-          <p:nvPr/>
-        </p:nvSpPr>
-        <p:spPr>
-          <a:xfrm>
-            <a:off x="8366760" y="3639312"/>
-            <a:ext cx="2011680" cy="0"/>
-          </a:xfrm>
-          <a:prstGeom prst="line">
-            <a:avLst/>
-          </a:prstGeom>
-          <a:noFill/>
-          <a:ln w="63500">
-            <a:solidFill>
-              <a:srgbClr val="2F8A28"/>
-            </a:solidFill>
-            <a:prstDash val="solid"/>
-          </a:ln>
-        </p:spPr>
-      </p:sp>
-      <p:sp>
-        <p:nvSpPr>
-          <p:cNvPr id="17" name="Text 15"/>
-          <p:cNvSpPr/>
-          <p:nvPr/>
-        </p:nvSpPr>
-        <p:spPr>
-          <a:xfrm>
-            <a:off x="7909560" y="3849624"/>
-            <a:ext cx="2926080" cy="164592"/>
-          </a:xfrm>
-          <a:prstGeom prst="rect">
-            <a:avLst/>
-          </a:prstGeom>
-          <a:noFill/>
-          <a:ln/>
-        </p:spPr>
-        <p:txBody>
-          <a:bodyPr wrap="square" lIns="0" tIns="0" rIns="0" bIns="0" rtlCol="0" anchor="ctr"/>
-          <a:lstStyle/>
-          <a:p>
-            <a:pPr algn="ctr" indent="0" marL="0">
-              <a:buNone/>
-            </a:pPr>
-            <a:r>
-              <a:rPr lang="en-US" sz="900" dirty="0">
-                <a:solidFill>
-                  <a:srgbClr val="003A63"/>
-                </a:solidFill>
-                <a:latin typeface="Aptos" pitchFamily="34" charset="0"/>
-                <a:ea typeface="Aptos" pitchFamily="34" charset="-122"/>
-                <a:cs typeface="Aptos" pitchFamily="34" charset="-120"/>
-              </a:rPr>
-              <a:t>Human review</a:t>
-            </a:r>
-            <a:endParaRPr lang="en-US" sz="900" dirty="0"/>
-          </a:p>
-        </p:txBody>
-      </p:sp>
-      <p:sp>
-        <p:nvSpPr>
-          <p:cNvPr id="18" name="Shape 16"/>
           <p:cNvSpPr/>
           <p:nvPr/>
         </p:nvSpPr>
@@ -6029,7 +5831,7 @@
       </p:sp>
       <p:sp>
         <p:nvSpPr>
-          <p:cNvPr id="19" name="Text 17"/>
+          <p:cNvPr id="17" name="Text 15"/>
           <p:cNvSpPr/>
           <p:nvPr/>
         </p:nvSpPr>
@@ -6068,7 +5870,7 @@
       </p:sp>
       <p:sp>
         <p:nvSpPr>
-          <p:cNvPr id="20" name="Text 18"/>
+          <p:cNvPr id="18" name="Text 16"/>
           <p:cNvSpPr/>
           <p:nvPr/>
         </p:nvSpPr>
@@ -6576,13 +6378,11 @@
             </a:avLst>
           </a:prstGeom>
           <a:solidFill>
-            <a:srgbClr val="FFFFFF">
-              <a:alpha val="88000"/>
-            </a:srgbClr>
+            <a:srgbClr val="FFFFFF"/>
           </a:solidFill>
           <a:ln w="12700">
             <a:solidFill>
-              <a:srgbClr val="D6E8F2"/>
+              <a:srgbClr val="B9D7E6"/>
             </a:solidFill>
             <a:prstDash val="solid"/>
           </a:ln>
@@ -6590,26 +6390,42 @@
       </p:sp>
       <p:sp>
         <p:nvSpPr>
-          <p:cNvPr id="14" name="Shape 12"/>
-          <p:cNvSpPr/>
-          <p:nvPr/>
-        </p:nvSpPr>
-        <p:spPr>
-          <a:xfrm>
-            <a:off x="8046720" y="3108960"/>
-            <a:ext cx="2651760" cy="896112"/>
-          </a:xfrm>
-          <a:prstGeom prst="arc">
-            <a:avLst/>
-          </a:prstGeom>
-          <a:noFill/>
-          <a:ln w="25400">
-            <a:solidFill>
-              <a:srgbClr val="0068B7"/>
-            </a:solidFill>
-            <a:prstDash val="solid"/>
-          </a:ln>
-        </p:spPr>
+          <p:cNvPr id="14" name="Text 12"/>
+          <p:cNvSpPr/>
+          <p:nvPr/>
+        </p:nvSpPr>
+        <p:spPr>
+          <a:xfrm>
+            <a:off x="7799832" y="2935224"/>
+            <a:ext cx="3145536" cy="256032"/>
+          </a:xfrm>
+          <a:prstGeom prst="rect">
+            <a:avLst/>
+          </a:prstGeom>
+          <a:noFill/>
+          <a:ln/>
+        </p:spPr>
+        <p:txBody>
+          <a:bodyPr wrap="square" lIns="0" tIns="0" rIns="0" bIns="0" rtlCol="0" anchor="ctr"/>
+          <a:lstStyle/>
+          <a:p>
+            <a:pPr indent="0" marL="0">
+              <a:buNone/>
+            </a:pPr>
+            <a:r>
+              <a:rPr lang="en-US" sz="1300" b="1" dirty="0">
+                <a:solidFill>
+                  <a:srgbClr val="0068B7"/>
+                </a:solidFill>
+                <a:latin typeface="Aptos" pitchFamily="34" charset="0"/>
+                <a:ea typeface="Aptos" pitchFamily="34" charset="-122"/>
+                <a:cs typeface="Aptos" pitchFamily="34" charset="-120"/>
+              </a:rPr>
+              <a:t>Concept checkpoints</a:t>
+            </a:r>
+            <a:endParaRPr lang="en-US" sz="1300" dirty="0"/>
+          </a:p>
+        </p:txBody>
       </p:sp>
       <p:sp>
         <p:nvSpPr>
@@ -6619,102 +6435,67 @@
         </p:nvSpPr>
         <p:spPr>
           <a:xfrm>
-            <a:off x="7909560" y="3099816"/>
-            <a:ext cx="2926080" cy="256032"/>
-          </a:xfrm>
-          <a:prstGeom prst="rect">
-            <a:avLst/>
-          </a:prstGeom>
-          <a:noFill/>
-          <a:ln/>
-        </p:spPr>
-        <p:txBody>
-          <a:bodyPr wrap="square" lIns="0" tIns="0" rIns="0" bIns="0" rtlCol="0" anchor="ctr"/>
-          <a:lstStyle/>
-          <a:p>
-            <a:pPr algn="ctr" indent="0" marL="0">
-              <a:buNone/>
-            </a:pPr>
-            <a:r>
-              <a:rPr lang="en-US" sz="1500" b="1" dirty="0">
-                <a:solidFill>
-                  <a:srgbClr val="003A63"/>
-                </a:solidFill>
-                <a:latin typeface="Aptos" pitchFamily="34" charset="0"/>
-                <a:ea typeface="Aptos" pitchFamily="34" charset="-122"/>
-                <a:cs typeface="Aptos" pitchFamily="34" charset="-120"/>
-              </a:rPr>
-              <a:t>Risk</a:t>
-            </a:r>
-            <a:endParaRPr lang="en-US" sz="1500" dirty="0"/>
+            <a:off x="7818120" y="3300984"/>
+            <a:ext cx="3090672" cy="877824"/>
+          </a:xfrm>
+          <a:prstGeom prst="rect">
+            <a:avLst/>
+          </a:prstGeom>
+          <a:noFill/>
+          <a:ln/>
+        </p:spPr>
+        <p:txBody>
+          <a:bodyPr wrap="square" lIns="254" tIns="254" rIns="254" bIns="254" rtlCol="0" anchor="t">
+            <a:normAutofit/>
+          </a:bodyPr>
+          <a:lstStyle/>
+          <a:p>
+            <a:r>
+              <a:rPr lang="en-US" sz="1380" dirty="0">
+                <a:solidFill>
+                  <a:srgbClr val="17364A"/>
+                </a:solidFill>
+                <a:latin typeface="Aptos" pitchFamily="34" charset="0"/>
+                <a:ea typeface="Aptos" pitchFamily="34" charset="-122"/>
+                <a:cs typeface="Aptos" pitchFamily="34" charset="-120"/>
+              </a:rPr>
+              <a:t>Reporting pattern changes.</a:t>
+            </a:r>
+            <a:endParaRPr lang="en-US" sz="1380" dirty="0"/>
+          </a:p>
+          <a:p>
+            <a:r>
+              <a:rPr lang="en-US" sz="1380" dirty="0">
+                <a:solidFill>
+                  <a:srgbClr val="17364A"/>
+                </a:solidFill>
+                <a:latin typeface="Aptos" pitchFamily="34" charset="0"/>
+                <a:ea typeface="Aptos" pitchFamily="34" charset="-122"/>
+                <a:cs typeface="Aptos" pitchFamily="34" charset="-120"/>
+              </a:rPr>
+              <a:t>Lab reporting changes may look like disease changes.</a:t>
+            </a:r>
+            <a:endParaRPr lang="en-US" sz="1380" dirty="0"/>
+          </a:p>
+          <a:p>
+            <a:r>
+              <a:rPr lang="en-US" sz="1380" dirty="0">
+                <a:solidFill>
+                  <a:srgbClr val="17364A"/>
+                </a:solidFill>
+                <a:latin typeface="Aptos" pitchFamily="34" charset="0"/>
+                <a:ea typeface="Aptos" pitchFamily="34" charset="-122"/>
+                <a:cs typeface="Aptos" pitchFamily="34" charset="-120"/>
+              </a:rPr>
+              <a:t>Guardrails include volume monitoring, partner change logs, and anomaly review.</a:t>
+            </a:r>
+            <a:endParaRPr lang="en-US" sz="1380" dirty="0"/>
           </a:p>
         </p:txBody>
       </p:sp>
       <p:sp>
         <p:nvSpPr>
           <p:cNvPr id="16" name="Shape 14"/>
-          <p:cNvSpPr/>
-          <p:nvPr/>
-        </p:nvSpPr>
-        <p:spPr>
-          <a:xfrm>
-            <a:off x="8366760" y="3639312"/>
-            <a:ext cx="2011680" cy="0"/>
-          </a:xfrm>
-          <a:prstGeom prst="line">
-            <a:avLst/>
-          </a:prstGeom>
-          <a:noFill/>
-          <a:ln w="63500">
-            <a:solidFill>
-              <a:srgbClr val="2F8A28"/>
-            </a:solidFill>
-            <a:prstDash val="solid"/>
-          </a:ln>
-        </p:spPr>
-      </p:sp>
-      <p:sp>
-        <p:nvSpPr>
-          <p:cNvPr id="17" name="Text 15"/>
-          <p:cNvSpPr/>
-          <p:nvPr/>
-        </p:nvSpPr>
-        <p:spPr>
-          <a:xfrm>
-            <a:off x="7909560" y="3849624"/>
-            <a:ext cx="2926080" cy="164592"/>
-          </a:xfrm>
-          <a:prstGeom prst="rect">
-            <a:avLst/>
-          </a:prstGeom>
-          <a:noFill/>
-          <a:ln/>
-        </p:spPr>
-        <p:txBody>
-          <a:bodyPr wrap="square" lIns="0" tIns="0" rIns="0" bIns="0" rtlCol="0" anchor="ctr"/>
-          <a:lstStyle/>
-          <a:p>
-            <a:pPr algn="ctr" indent="0" marL="0">
-              <a:buNone/>
-            </a:pPr>
-            <a:r>
-              <a:rPr lang="en-US" sz="900" dirty="0">
-                <a:solidFill>
-                  <a:srgbClr val="003A63"/>
-                </a:solidFill>
-                <a:latin typeface="Aptos" pitchFamily="34" charset="0"/>
-                <a:ea typeface="Aptos" pitchFamily="34" charset="-122"/>
-                <a:cs typeface="Aptos" pitchFamily="34" charset="-120"/>
-              </a:rPr>
-              <a:t>Human review</a:t>
-            </a:r>
-            <a:endParaRPr lang="en-US" sz="900" dirty="0"/>
-          </a:p>
-        </p:txBody>
-      </p:sp>
-      <p:sp>
-        <p:nvSpPr>
-          <p:cNvPr id="18" name="Shape 16"/>
           <p:cNvSpPr/>
           <p:nvPr/>
         </p:nvSpPr>
@@ -6741,7 +6522,7 @@
       </p:sp>
       <p:sp>
         <p:nvSpPr>
-          <p:cNvPr id="19" name="Text 17"/>
+          <p:cNvPr id="17" name="Text 15"/>
           <p:cNvSpPr/>
           <p:nvPr/>
         </p:nvSpPr>
@@ -6780,7 +6561,7 @@
       </p:sp>
       <p:sp>
         <p:nvSpPr>
-          <p:cNvPr id="20" name="Text 18"/>
+          <p:cNvPr id="18" name="Text 16"/>
           <p:cNvSpPr/>
           <p:nvPr/>
         </p:nvSpPr>
@@ -7288,13 +7069,11 @@
             </a:avLst>
           </a:prstGeom>
           <a:solidFill>
-            <a:srgbClr val="FFFFFF">
-              <a:alpha val="88000"/>
-            </a:srgbClr>
+            <a:srgbClr val="FFFFFF"/>
           </a:solidFill>
           <a:ln w="12700">
             <a:solidFill>
-              <a:srgbClr val="D6E8F2"/>
+              <a:srgbClr val="B9D7E6"/>
             </a:solidFill>
             <a:prstDash val="solid"/>
           </a:ln>
@@ -7302,169 +7081,112 @@
       </p:sp>
       <p:sp>
         <p:nvSpPr>
-          <p:cNvPr id="14" name="Shape 12"/>
-          <p:cNvSpPr/>
-          <p:nvPr/>
-        </p:nvSpPr>
-        <p:spPr>
-          <a:xfrm>
-            <a:off x="8138160" y="3474720"/>
-            <a:ext cx="256032" cy="411480"/>
-          </a:xfrm>
-          <a:prstGeom prst="rect">
-            <a:avLst/>
-          </a:prstGeom>
-          <a:solidFill>
-            <a:srgbClr val="0068B7"/>
-          </a:solidFill>
-          <a:ln w="12700">
-            <a:solidFill>
-              <a:srgbClr val="0068B7"/>
-            </a:solidFill>
-            <a:prstDash val="solid"/>
-          </a:ln>
-        </p:spPr>
-      </p:sp>
-      <p:sp>
-        <p:nvSpPr>
-          <p:cNvPr id="15" name="Shape 13"/>
-          <p:cNvSpPr/>
-          <p:nvPr/>
-        </p:nvSpPr>
-        <p:spPr>
-          <a:xfrm>
-            <a:off x="8577072" y="3172968"/>
-            <a:ext cx="256032" cy="713232"/>
-          </a:xfrm>
-          <a:prstGeom prst="rect">
-            <a:avLst/>
-          </a:prstGeom>
-          <a:solidFill>
-            <a:srgbClr val="2F8A28"/>
-          </a:solidFill>
-          <a:ln w="12700">
-            <a:solidFill>
-              <a:srgbClr val="2F8A28"/>
-            </a:solidFill>
-            <a:prstDash val="solid"/>
-          </a:ln>
-        </p:spPr>
+          <p:cNvPr id="14" name="Text 12"/>
+          <p:cNvSpPr/>
+          <p:nvPr/>
+        </p:nvSpPr>
+        <p:spPr>
+          <a:xfrm>
+            <a:off x="7799832" y="2935224"/>
+            <a:ext cx="3145536" cy="256032"/>
+          </a:xfrm>
+          <a:prstGeom prst="rect">
+            <a:avLst/>
+          </a:prstGeom>
+          <a:noFill/>
+          <a:ln/>
+        </p:spPr>
+        <p:txBody>
+          <a:bodyPr wrap="square" lIns="0" tIns="0" rIns="0" bIns="0" rtlCol="0" anchor="ctr"/>
+          <a:lstStyle/>
+          <a:p>
+            <a:pPr indent="0" marL="0">
+              <a:buNone/>
+            </a:pPr>
+            <a:r>
+              <a:rPr lang="en-US" sz="1300" b="1" dirty="0">
+                <a:solidFill>
+                  <a:srgbClr val="0068B7"/>
+                </a:solidFill>
+                <a:latin typeface="Aptos" pitchFamily="34" charset="0"/>
+                <a:ea typeface="Aptos" pitchFamily="34" charset="-122"/>
+                <a:cs typeface="Aptos" pitchFamily="34" charset="-120"/>
+              </a:rPr>
+              <a:t>Concept checkpoints</a:t>
+            </a:r>
+            <a:endParaRPr lang="en-US" sz="1300" dirty="0"/>
+          </a:p>
+        </p:txBody>
+      </p:sp>
+      <p:sp>
+        <p:nvSpPr>
+          <p:cNvPr id="15" name="Text 13"/>
+          <p:cNvSpPr/>
+          <p:nvPr/>
+        </p:nvSpPr>
+        <p:spPr>
+          <a:xfrm>
+            <a:off x="7818120" y="3300984"/>
+            <a:ext cx="3090672" cy="877824"/>
+          </a:xfrm>
+          <a:prstGeom prst="rect">
+            <a:avLst/>
+          </a:prstGeom>
+          <a:noFill/>
+          <a:ln/>
+        </p:spPr>
+        <p:txBody>
+          <a:bodyPr wrap="square" lIns="254" tIns="254" rIns="254" bIns="254" rtlCol="0" anchor="t">
+            <a:normAutofit/>
+          </a:bodyPr>
+          <a:lstStyle/>
+          <a:p>
+            <a:r>
+              <a:rPr lang="en-US" sz="1380" dirty="0">
+                <a:solidFill>
+                  <a:srgbClr val="17364A"/>
+                </a:solidFill>
+                <a:latin typeface="Aptos" pitchFamily="34" charset="0"/>
+                <a:ea typeface="Aptos" pitchFamily="34" charset="-122"/>
+                <a:cs typeface="Aptos" pitchFamily="34" charset="-120"/>
+              </a:rPr>
+              <a:t>Generative AI may draft lab summaries, but it should preserve source values and avoid.</a:t>
+            </a:r>
+            <a:endParaRPr lang="en-US" sz="1380" dirty="0"/>
+          </a:p>
+          <a:p>
+            <a:r>
+              <a:rPr lang="en-US" sz="1380" dirty="0">
+                <a:solidFill>
+                  <a:srgbClr val="17364A"/>
+                </a:solidFill>
+                <a:latin typeface="Aptos" pitchFamily="34" charset="0"/>
+                <a:ea typeface="Aptos" pitchFamily="34" charset="-122"/>
+                <a:cs typeface="Aptos" pitchFamily="34" charset="-120"/>
+              </a:rPr>
+              <a:t>Predictive analytics may use lab trends, but model monitoring must distinguish reporting.</a:t>
+            </a:r>
+            <a:endParaRPr lang="en-US" sz="1380" dirty="0"/>
+          </a:p>
+          <a:p>
+            <a:r>
+              <a:rPr lang="en-US" sz="1380" dirty="0">
+                <a:solidFill>
+                  <a:srgbClr val="17364A"/>
+                </a:solidFill>
+                <a:latin typeface="Aptos" pitchFamily="34" charset="0"/>
+                <a:ea typeface="Aptos" pitchFamily="34" charset="-122"/>
+                <a:cs typeface="Aptos" pitchFamily="34" charset="-120"/>
+              </a:rPr>
+              <a:t>Agentic workflows that trigger tasks from lab results require clear thresholds and human.</a:t>
+            </a:r>
+            <a:endParaRPr lang="en-US" sz="1380" dirty="0"/>
+          </a:p>
+        </p:txBody>
       </p:sp>
       <p:sp>
         <p:nvSpPr>
           <p:cNvPr id="16" name="Shape 14"/>
-          <p:cNvSpPr/>
-          <p:nvPr/>
-        </p:nvSpPr>
-        <p:spPr>
-          <a:xfrm>
-            <a:off x="9015984" y="2880360"/>
-            <a:ext cx="256032" cy="1005840"/>
-          </a:xfrm>
-          <a:prstGeom prst="rect">
-            <a:avLst/>
-          </a:prstGeom>
-          <a:solidFill>
-            <a:srgbClr val="D69A2D"/>
-          </a:solidFill>
-          <a:ln w="12700">
-            <a:solidFill>
-              <a:srgbClr val="D69A2D"/>
-            </a:solidFill>
-            <a:prstDash val="solid"/>
-          </a:ln>
-        </p:spPr>
-      </p:sp>
-      <p:sp>
-        <p:nvSpPr>
-          <p:cNvPr id="17" name="Shape 15"/>
-          <p:cNvSpPr/>
-          <p:nvPr/>
-        </p:nvSpPr>
-        <p:spPr>
-          <a:xfrm>
-            <a:off x="9454896" y="3319272"/>
-            <a:ext cx="256032" cy="566928"/>
-          </a:xfrm>
-          <a:prstGeom prst="rect">
-            <a:avLst/>
-          </a:prstGeom>
-          <a:solidFill>
-            <a:srgbClr val="6A4CA3"/>
-          </a:solidFill>
-          <a:ln w="12700">
-            <a:solidFill>
-              <a:srgbClr val="6A4CA3"/>
-            </a:solidFill>
-            <a:prstDash val="solid"/>
-          </a:ln>
-        </p:spPr>
-      </p:sp>
-      <p:sp>
-        <p:nvSpPr>
-          <p:cNvPr id="18" name="Shape 16"/>
-          <p:cNvSpPr/>
-          <p:nvPr/>
-        </p:nvSpPr>
-        <p:spPr>
-          <a:xfrm>
-            <a:off x="8019288" y="3886200"/>
-            <a:ext cx="2706624" cy="0"/>
-          </a:xfrm>
-          <a:prstGeom prst="line">
-            <a:avLst/>
-          </a:prstGeom>
-          <a:noFill/>
-          <a:ln w="15240">
-            <a:solidFill>
-              <a:srgbClr val="003A63"/>
-            </a:solidFill>
-            <a:prstDash val="solid"/>
-          </a:ln>
-        </p:spPr>
-      </p:sp>
-      <p:sp>
-        <p:nvSpPr>
-          <p:cNvPr id="19" name="Text 17"/>
-          <p:cNvSpPr/>
-          <p:nvPr/>
-        </p:nvSpPr>
-        <p:spPr>
-          <a:xfrm>
-            <a:off x="7863840" y="3017520"/>
-            <a:ext cx="3017520" cy="201168"/>
-          </a:xfrm>
-          <a:prstGeom prst="rect">
-            <a:avLst/>
-          </a:prstGeom>
-          <a:noFill/>
-          <a:ln/>
-        </p:spPr>
-        <p:txBody>
-          <a:bodyPr wrap="square" lIns="0" tIns="0" rIns="0" bIns="0" rtlCol="0" anchor="ctr"/>
-          <a:lstStyle/>
-          <a:p>
-            <a:pPr algn="ctr" indent="0" marL="0">
-              <a:buNone/>
-            </a:pPr>
-            <a:r>
-              <a:rPr lang="en-US" sz="1050" b="1" dirty="0">
-                <a:solidFill>
-                  <a:srgbClr val="003A63"/>
-                </a:solidFill>
-                <a:latin typeface="Aptos" pitchFamily="34" charset="0"/>
-                <a:ea typeface="Aptos" pitchFamily="34" charset="-122"/>
-                <a:cs typeface="Aptos" pitchFamily="34" charset="-120"/>
-              </a:rPr>
-              <a:t>Measure and monitor</a:t>
-            </a:r>
-            <a:endParaRPr lang="en-US" sz="1050" dirty="0"/>
-          </a:p>
-        </p:txBody>
-      </p:sp>
-      <p:sp>
-        <p:nvSpPr>
-          <p:cNvPr id="20" name="Shape 18"/>
           <p:cNvSpPr/>
           <p:nvPr/>
         </p:nvSpPr>
@@ -7491,7 +7213,7 @@
       </p:sp>
       <p:sp>
         <p:nvSpPr>
-          <p:cNvPr id="21" name="Text 19"/>
+          <p:cNvPr id="17" name="Text 15"/>
           <p:cNvSpPr/>
           <p:nvPr/>
         </p:nvSpPr>
@@ -7530,7 +7252,7 @@
       </p:sp>
       <p:sp>
         <p:nvSpPr>
-          <p:cNvPr id="22" name="Text 20"/>
+          <p:cNvPr id="18" name="Text 16"/>
           <p:cNvSpPr/>
           <p:nvPr/>
         </p:nvSpPr>
@@ -8038,13 +7760,11 @@
             </a:avLst>
           </a:prstGeom>
           <a:solidFill>
-            <a:srgbClr val="FFFFFF">
-              <a:alpha val="88000"/>
-            </a:srgbClr>
+            <a:srgbClr val="FFFFFF"/>
           </a:solidFill>
           <a:ln w="12700">
             <a:solidFill>
-              <a:srgbClr val="D6E8F2"/>
+              <a:srgbClr val="B9D7E6"/>
             </a:solidFill>
             <a:prstDash val="solid"/>
           </a:ln>
@@ -8052,169 +7772,112 @@
       </p:sp>
       <p:sp>
         <p:nvSpPr>
-          <p:cNvPr id="14" name="Shape 12"/>
-          <p:cNvSpPr/>
-          <p:nvPr/>
-        </p:nvSpPr>
-        <p:spPr>
-          <a:xfrm>
-            <a:off x="8138160" y="3474720"/>
-            <a:ext cx="256032" cy="411480"/>
-          </a:xfrm>
-          <a:prstGeom prst="rect">
-            <a:avLst/>
-          </a:prstGeom>
-          <a:solidFill>
-            <a:srgbClr val="0068B7"/>
-          </a:solidFill>
-          <a:ln w="12700">
-            <a:solidFill>
-              <a:srgbClr val="0068B7"/>
-            </a:solidFill>
-            <a:prstDash val="solid"/>
-          </a:ln>
-        </p:spPr>
-      </p:sp>
-      <p:sp>
-        <p:nvSpPr>
-          <p:cNvPr id="15" name="Shape 13"/>
-          <p:cNvSpPr/>
-          <p:nvPr/>
-        </p:nvSpPr>
-        <p:spPr>
-          <a:xfrm>
-            <a:off x="8577072" y="3172968"/>
-            <a:ext cx="256032" cy="713232"/>
-          </a:xfrm>
-          <a:prstGeom prst="rect">
-            <a:avLst/>
-          </a:prstGeom>
-          <a:solidFill>
-            <a:srgbClr val="2F8A28"/>
-          </a:solidFill>
-          <a:ln w="12700">
-            <a:solidFill>
-              <a:srgbClr val="2F8A28"/>
-            </a:solidFill>
-            <a:prstDash val="solid"/>
-          </a:ln>
-        </p:spPr>
+          <p:cNvPr id="14" name="Text 12"/>
+          <p:cNvSpPr/>
+          <p:nvPr/>
+        </p:nvSpPr>
+        <p:spPr>
+          <a:xfrm>
+            <a:off x="7799832" y="2935224"/>
+            <a:ext cx="3145536" cy="256032"/>
+          </a:xfrm>
+          <a:prstGeom prst="rect">
+            <a:avLst/>
+          </a:prstGeom>
+          <a:noFill/>
+          <a:ln/>
+        </p:spPr>
+        <p:txBody>
+          <a:bodyPr wrap="square" lIns="0" tIns="0" rIns="0" bIns="0" rtlCol="0" anchor="ctr"/>
+          <a:lstStyle/>
+          <a:p>
+            <a:pPr indent="0" marL="0">
+              <a:buNone/>
+            </a:pPr>
+            <a:r>
+              <a:rPr lang="en-US" sz="1300" b="1" dirty="0">
+                <a:solidFill>
+                  <a:srgbClr val="0068B7"/>
+                </a:solidFill>
+                <a:latin typeface="Aptos" pitchFamily="34" charset="0"/>
+                <a:ea typeface="Aptos" pitchFamily="34" charset="-122"/>
+                <a:cs typeface="Aptos" pitchFamily="34" charset="-120"/>
+              </a:rPr>
+              <a:t>Concept checkpoints</a:t>
+            </a:r>
+            <a:endParaRPr lang="en-US" sz="1300" dirty="0"/>
+          </a:p>
+        </p:txBody>
+      </p:sp>
+      <p:sp>
+        <p:nvSpPr>
+          <p:cNvPr id="15" name="Text 13"/>
+          <p:cNvSpPr/>
+          <p:nvPr/>
+        </p:nvSpPr>
+        <p:spPr>
+          <a:xfrm>
+            <a:off x="7818120" y="3300984"/>
+            <a:ext cx="3090672" cy="877824"/>
+          </a:xfrm>
+          <a:prstGeom prst="rect">
+            <a:avLst/>
+          </a:prstGeom>
+          <a:noFill/>
+          <a:ln/>
+        </p:spPr>
+        <p:txBody>
+          <a:bodyPr wrap="square" lIns="254" tIns="254" rIns="254" bIns="254" rtlCol="0" anchor="t">
+            <a:normAutofit/>
+          </a:bodyPr>
+          <a:lstStyle/>
+          <a:p>
+            <a:r>
+              <a:rPr lang="en-US" sz="1380" dirty="0">
+                <a:solidFill>
+                  <a:srgbClr val="17364A"/>
+                </a:solidFill>
+                <a:latin typeface="Aptos" pitchFamily="34" charset="0"/>
+                <a:ea typeface="Aptos" pitchFamily="34" charset="-122"/>
+                <a:cs typeface="Aptos" pitchFamily="34" charset="-120"/>
+              </a:rPr>
+              <a:t>Which laboratory data quality issues most often affect your surveillance workflows?</a:t>
+            </a:r>
+            <a:endParaRPr lang="en-US" sz="1380" dirty="0"/>
+          </a:p>
+          <a:p>
+            <a:r>
+              <a:rPr lang="en-US" sz="1380" dirty="0">
+                <a:solidFill>
+                  <a:srgbClr val="17364A"/>
+                </a:solidFill>
+                <a:latin typeface="Aptos" pitchFamily="34" charset="0"/>
+                <a:ea typeface="Aptos" pitchFamily="34" charset="-122"/>
+                <a:cs typeface="Aptos" pitchFamily="34" charset="-120"/>
+              </a:rPr>
+              <a:t>Which local codes require mapping before data can be used reliably?</a:t>
+            </a:r>
+            <a:endParaRPr lang="en-US" sz="1380" dirty="0"/>
+          </a:p>
+          <a:p>
+            <a:r>
+              <a:rPr lang="en-US" sz="1380" dirty="0">
+                <a:solidFill>
+                  <a:srgbClr val="17364A"/>
+                </a:solidFill>
+                <a:latin typeface="Aptos" pitchFamily="34" charset="0"/>
+                <a:ea typeface="Aptos" pitchFamily="34" charset="-122"/>
+                <a:cs typeface="Aptos" pitchFamily="34" charset="-120"/>
+              </a:rPr>
+              <a:t>Are test-result pairs consistently represented?</a:t>
+            </a:r>
+            <a:endParaRPr lang="en-US" sz="1380" dirty="0"/>
+          </a:p>
+        </p:txBody>
       </p:sp>
       <p:sp>
         <p:nvSpPr>
           <p:cNvPr id="16" name="Shape 14"/>
-          <p:cNvSpPr/>
-          <p:nvPr/>
-        </p:nvSpPr>
-        <p:spPr>
-          <a:xfrm>
-            <a:off x="9015984" y="2880360"/>
-            <a:ext cx="256032" cy="1005840"/>
-          </a:xfrm>
-          <a:prstGeom prst="rect">
-            <a:avLst/>
-          </a:prstGeom>
-          <a:solidFill>
-            <a:srgbClr val="D69A2D"/>
-          </a:solidFill>
-          <a:ln w="12700">
-            <a:solidFill>
-              <a:srgbClr val="D69A2D"/>
-            </a:solidFill>
-            <a:prstDash val="solid"/>
-          </a:ln>
-        </p:spPr>
-      </p:sp>
-      <p:sp>
-        <p:nvSpPr>
-          <p:cNvPr id="17" name="Shape 15"/>
-          <p:cNvSpPr/>
-          <p:nvPr/>
-        </p:nvSpPr>
-        <p:spPr>
-          <a:xfrm>
-            <a:off x="9454896" y="3319272"/>
-            <a:ext cx="256032" cy="566928"/>
-          </a:xfrm>
-          <a:prstGeom prst="rect">
-            <a:avLst/>
-          </a:prstGeom>
-          <a:solidFill>
-            <a:srgbClr val="6A4CA3"/>
-          </a:solidFill>
-          <a:ln w="12700">
-            <a:solidFill>
-              <a:srgbClr val="6A4CA3"/>
-            </a:solidFill>
-            <a:prstDash val="solid"/>
-          </a:ln>
-        </p:spPr>
-      </p:sp>
-      <p:sp>
-        <p:nvSpPr>
-          <p:cNvPr id="18" name="Shape 16"/>
-          <p:cNvSpPr/>
-          <p:nvPr/>
-        </p:nvSpPr>
-        <p:spPr>
-          <a:xfrm>
-            <a:off x="8019288" y="3886200"/>
-            <a:ext cx="2706624" cy="0"/>
-          </a:xfrm>
-          <a:prstGeom prst="line">
-            <a:avLst/>
-          </a:prstGeom>
-          <a:noFill/>
-          <a:ln w="15240">
-            <a:solidFill>
-              <a:srgbClr val="003A63"/>
-            </a:solidFill>
-            <a:prstDash val="solid"/>
-          </a:ln>
-        </p:spPr>
-      </p:sp>
-      <p:sp>
-        <p:nvSpPr>
-          <p:cNvPr id="19" name="Text 17"/>
-          <p:cNvSpPr/>
-          <p:nvPr/>
-        </p:nvSpPr>
-        <p:spPr>
-          <a:xfrm>
-            <a:off x="7863840" y="3017520"/>
-            <a:ext cx="3017520" cy="201168"/>
-          </a:xfrm>
-          <a:prstGeom prst="rect">
-            <a:avLst/>
-          </a:prstGeom>
-          <a:noFill/>
-          <a:ln/>
-        </p:spPr>
-        <p:txBody>
-          <a:bodyPr wrap="square" lIns="0" tIns="0" rIns="0" bIns="0" rtlCol="0" anchor="ctr"/>
-          <a:lstStyle/>
-          <a:p>
-            <a:pPr algn="ctr" indent="0" marL="0">
-              <a:buNone/>
-            </a:pPr>
-            <a:r>
-              <a:rPr lang="en-US" sz="1050" b="1" dirty="0">
-                <a:solidFill>
-                  <a:srgbClr val="003A63"/>
-                </a:solidFill>
-                <a:latin typeface="Aptos" pitchFamily="34" charset="0"/>
-                <a:ea typeface="Aptos" pitchFamily="34" charset="-122"/>
-                <a:cs typeface="Aptos" pitchFamily="34" charset="-120"/>
-              </a:rPr>
-              <a:t>Measure and monitor</a:t>
-            </a:r>
-            <a:endParaRPr lang="en-US" sz="1050" dirty="0"/>
-          </a:p>
-        </p:txBody>
-      </p:sp>
-      <p:sp>
-        <p:nvSpPr>
-          <p:cNvPr id="20" name="Shape 18"/>
           <p:cNvSpPr/>
           <p:nvPr/>
         </p:nvSpPr>
@@ -8241,7 +7904,7 @@
       </p:sp>
       <p:sp>
         <p:nvSpPr>
-          <p:cNvPr id="21" name="Text 19"/>
+          <p:cNvPr id="17" name="Text 15"/>
           <p:cNvSpPr/>
           <p:nvPr/>
         </p:nvSpPr>
@@ -8280,7 +7943,7 @@
       </p:sp>
       <p:sp>
         <p:nvSpPr>
-          <p:cNvPr id="22" name="Text 20"/>
+          <p:cNvPr id="18" name="Text 16"/>
           <p:cNvSpPr/>
           <p:nvPr/>
         </p:nvSpPr>
@@ -8774,13 +8437,11 @@
             </a:avLst>
           </a:prstGeom>
           <a:solidFill>
-            <a:srgbClr val="FFFFFF">
-              <a:alpha val="88000"/>
-            </a:srgbClr>
+            <a:srgbClr val="FFFFFF"/>
           </a:solidFill>
           <a:ln w="12700">
             <a:solidFill>
-              <a:srgbClr val="D6E8F2"/>
+              <a:srgbClr val="B9D7E6"/>
             </a:solidFill>
             <a:prstDash val="solid"/>
           </a:ln>
@@ -8788,169 +8449,98 @@
       </p:sp>
       <p:sp>
         <p:nvSpPr>
-          <p:cNvPr id="14" name="Shape 12"/>
-          <p:cNvSpPr/>
-          <p:nvPr/>
-        </p:nvSpPr>
-        <p:spPr>
-          <a:xfrm>
-            <a:off x="8138160" y="3474720"/>
-            <a:ext cx="256032" cy="411480"/>
-          </a:xfrm>
-          <a:prstGeom prst="rect">
-            <a:avLst/>
-          </a:prstGeom>
-          <a:solidFill>
-            <a:srgbClr val="0068B7"/>
-          </a:solidFill>
-          <a:ln w="12700">
-            <a:solidFill>
-              <a:srgbClr val="0068B7"/>
-            </a:solidFill>
-            <a:prstDash val="solid"/>
-          </a:ln>
-        </p:spPr>
-      </p:sp>
-      <p:sp>
-        <p:nvSpPr>
-          <p:cNvPr id="15" name="Shape 13"/>
-          <p:cNvSpPr/>
-          <p:nvPr/>
-        </p:nvSpPr>
-        <p:spPr>
-          <a:xfrm>
-            <a:off x="8577072" y="3172968"/>
-            <a:ext cx="256032" cy="713232"/>
-          </a:xfrm>
-          <a:prstGeom prst="rect">
-            <a:avLst/>
-          </a:prstGeom>
-          <a:solidFill>
-            <a:srgbClr val="2F8A28"/>
-          </a:solidFill>
-          <a:ln w="12700">
-            <a:solidFill>
-              <a:srgbClr val="2F8A28"/>
-            </a:solidFill>
-            <a:prstDash val="solid"/>
-          </a:ln>
-        </p:spPr>
+          <p:cNvPr id="14" name="Text 12"/>
+          <p:cNvSpPr/>
+          <p:nvPr/>
+        </p:nvSpPr>
+        <p:spPr>
+          <a:xfrm>
+            <a:off x="7799832" y="2935224"/>
+            <a:ext cx="3145536" cy="256032"/>
+          </a:xfrm>
+          <a:prstGeom prst="rect">
+            <a:avLst/>
+          </a:prstGeom>
+          <a:noFill/>
+          <a:ln/>
+        </p:spPr>
+        <p:txBody>
+          <a:bodyPr wrap="square" lIns="0" tIns="0" rIns="0" bIns="0" rtlCol="0" anchor="ctr"/>
+          <a:lstStyle/>
+          <a:p>
+            <a:pPr indent="0" marL="0">
+              <a:buNone/>
+            </a:pPr>
+            <a:r>
+              <a:rPr lang="en-US" sz="1300" b="1" dirty="0">
+                <a:solidFill>
+                  <a:srgbClr val="0068B7"/>
+                </a:solidFill>
+                <a:latin typeface="Aptos" pitchFamily="34" charset="0"/>
+                <a:ea typeface="Aptos" pitchFamily="34" charset="-122"/>
+                <a:cs typeface="Aptos" pitchFamily="34" charset="-120"/>
+              </a:rPr>
+              <a:t>Concept checkpoints</a:t>
+            </a:r>
+            <a:endParaRPr lang="en-US" sz="1300" dirty="0"/>
+          </a:p>
+        </p:txBody>
+      </p:sp>
+      <p:sp>
+        <p:nvSpPr>
+          <p:cNvPr id="15" name="Text 13"/>
+          <p:cNvSpPr/>
+          <p:nvPr/>
+        </p:nvSpPr>
+        <p:spPr>
+          <a:xfrm>
+            <a:off x="7818120" y="3300984"/>
+            <a:ext cx="3090672" cy="877824"/>
+          </a:xfrm>
+          <a:prstGeom prst="rect">
+            <a:avLst/>
+          </a:prstGeom>
+          <a:noFill/>
+          <a:ln/>
+        </p:spPr>
+        <p:txBody>
+          <a:bodyPr wrap="square" lIns="254" tIns="254" rIns="254" bIns="254" rtlCol="0" anchor="t">
+            <a:normAutofit/>
+          </a:bodyPr>
+          <a:lstStyle/>
+          <a:p>
+            <a:r>
+              <a:rPr lang="en-US" sz="1380" dirty="0">
+                <a:solidFill>
+                  <a:srgbClr val="17364A"/>
+                </a:solidFill>
+                <a:latin typeface="Aptos" pitchFamily="34" charset="0"/>
+                <a:ea typeface="Aptos" pitchFamily="34" charset="-122"/>
+                <a:cs typeface="Aptos" pitchFamily="34" charset="-120"/>
+              </a:rPr>
+              <a:t>Which missing fields would make AI summarization unsafe?</a:t>
+            </a:r>
+            <a:endParaRPr lang="en-US" sz="1380" dirty="0"/>
+          </a:p>
+          <a:p>
+            <a:r>
+              <a:rPr lang="en-US" sz="1380" dirty="0">
+                <a:solidFill>
+                  <a:srgbClr val="17364A"/>
+                </a:solidFill>
+                <a:latin typeface="Aptos" pitchFamily="34" charset="0"/>
+                <a:ea typeface="Aptos" pitchFamily="34" charset="-122"/>
+                <a:cs typeface="Aptos" pitchFamily="34" charset="-120"/>
+              </a:rPr>
+              <a:t>How would staff detect a reporting change that affects AI outputs?</a:t>
+            </a:r>
+            <a:endParaRPr lang="en-US" sz="1380" dirty="0"/>
+          </a:p>
+        </p:txBody>
       </p:sp>
       <p:sp>
         <p:nvSpPr>
           <p:cNvPr id="16" name="Shape 14"/>
-          <p:cNvSpPr/>
-          <p:nvPr/>
-        </p:nvSpPr>
-        <p:spPr>
-          <a:xfrm>
-            <a:off x="9015984" y="2880360"/>
-            <a:ext cx="256032" cy="1005840"/>
-          </a:xfrm>
-          <a:prstGeom prst="rect">
-            <a:avLst/>
-          </a:prstGeom>
-          <a:solidFill>
-            <a:srgbClr val="D69A2D"/>
-          </a:solidFill>
-          <a:ln w="12700">
-            <a:solidFill>
-              <a:srgbClr val="D69A2D"/>
-            </a:solidFill>
-            <a:prstDash val="solid"/>
-          </a:ln>
-        </p:spPr>
-      </p:sp>
-      <p:sp>
-        <p:nvSpPr>
-          <p:cNvPr id="17" name="Shape 15"/>
-          <p:cNvSpPr/>
-          <p:nvPr/>
-        </p:nvSpPr>
-        <p:spPr>
-          <a:xfrm>
-            <a:off x="9454896" y="3319272"/>
-            <a:ext cx="256032" cy="566928"/>
-          </a:xfrm>
-          <a:prstGeom prst="rect">
-            <a:avLst/>
-          </a:prstGeom>
-          <a:solidFill>
-            <a:srgbClr val="6A4CA3"/>
-          </a:solidFill>
-          <a:ln w="12700">
-            <a:solidFill>
-              <a:srgbClr val="6A4CA3"/>
-            </a:solidFill>
-            <a:prstDash val="solid"/>
-          </a:ln>
-        </p:spPr>
-      </p:sp>
-      <p:sp>
-        <p:nvSpPr>
-          <p:cNvPr id="18" name="Shape 16"/>
-          <p:cNvSpPr/>
-          <p:nvPr/>
-        </p:nvSpPr>
-        <p:spPr>
-          <a:xfrm>
-            <a:off x="8019288" y="3886200"/>
-            <a:ext cx="2706624" cy="0"/>
-          </a:xfrm>
-          <a:prstGeom prst="line">
-            <a:avLst/>
-          </a:prstGeom>
-          <a:noFill/>
-          <a:ln w="15240">
-            <a:solidFill>
-              <a:srgbClr val="003A63"/>
-            </a:solidFill>
-            <a:prstDash val="solid"/>
-          </a:ln>
-        </p:spPr>
-      </p:sp>
-      <p:sp>
-        <p:nvSpPr>
-          <p:cNvPr id="19" name="Text 17"/>
-          <p:cNvSpPr/>
-          <p:nvPr/>
-        </p:nvSpPr>
-        <p:spPr>
-          <a:xfrm>
-            <a:off x="7863840" y="3017520"/>
-            <a:ext cx="3017520" cy="201168"/>
-          </a:xfrm>
-          <a:prstGeom prst="rect">
-            <a:avLst/>
-          </a:prstGeom>
-          <a:noFill/>
-          <a:ln/>
-        </p:spPr>
-        <p:txBody>
-          <a:bodyPr wrap="square" lIns="0" tIns="0" rIns="0" bIns="0" rtlCol="0" anchor="ctr"/>
-          <a:lstStyle/>
-          <a:p>
-            <a:pPr algn="ctr" indent="0" marL="0">
-              <a:buNone/>
-            </a:pPr>
-            <a:r>
-              <a:rPr lang="en-US" sz="1050" b="1" dirty="0">
-                <a:solidFill>
-                  <a:srgbClr val="003A63"/>
-                </a:solidFill>
-                <a:latin typeface="Aptos" pitchFamily="34" charset="0"/>
-                <a:ea typeface="Aptos" pitchFamily="34" charset="-122"/>
-                <a:cs typeface="Aptos" pitchFamily="34" charset="-120"/>
-              </a:rPr>
-              <a:t>Measure and monitor</a:t>
-            </a:r>
-            <a:endParaRPr lang="en-US" sz="1050" dirty="0"/>
-          </a:p>
-        </p:txBody>
-      </p:sp>
-      <p:sp>
-        <p:nvSpPr>
-          <p:cNvPr id="20" name="Shape 18"/>
           <p:cNvSpPr/>
           <p:nvPr/>
         </p:nvSpPr>
@@ -8977,7 +8567,7 @@
       </p:sp>
       <p:sp>
         <p:nvSpPr>
-          <p:cNvPr id="21" name="Text 19"/>
+          <p:cNvPr id="17" name="Text 15"/>
           <p:cNvSpPr/>
           <p:nvPr/>
         </p:nvSpPr>
@@ -9016,7 +8606,7 @@
       </p:sp>
       <p:sp>
         <p:nvSpPr>
-          <p:cNvPr id="22" name="Text 20"/>
+          <p:cNvPr id="18" name="Text 16"/>
           <p:cNvSpPr/>
           <p:nvPr/>
         </p:nvSpPr>
@@ -9510,13 +9100,11 @@
             </a:avLst>
           </a:prstGeom>
           <a:solidFill>
-            <a:srgbClr val="FFFFFF">
-              <a:alpha val="88000"/>
-            </a:srgbClr>
+            <a:srgbClr val="FFFFFF"/>
           </a:solidFill>
           <a:ln w="12700">
             <a:solidFill>
-              <a:srgbClr val="D6E8F2"/>
+              <a:srgbClr val="B9D7E6"/>
             </a:solidFill>
             <a:prstDash val="solid"/>
           </a:ln>
@@ -9524,169 +9112,98 @@
       </p:sp>
       <p:sp>
         <p:nvSpPr>
-          <p:cNvPr id="14" name="Shape 12"/>
-          <p:cNvSpPr/>
-          <p:nvPr/>
-        </p:nvSpPr>
-        <p:spPr>
-          <a:xfrm>
-            <a:off x="8138160" y="3474720"/>
-            <a:ext cx="256032" cy="411480"/>
-          </a:xfrm>
-          <a:prstGeom prst="rect">
-            <a:avLst/>
-          </a:prstGeom>
-          <a:solidFill>
-            <a:srgbClr val="0068B7"/>
-          </a:solidFill>
-          <a:ln w="12700">
-            <a:solidFill>
-              <a:srgbClr val="0068B7"/>
-            </a:solidFill>
-            <a:prstDash val="solid"/>
-          </a:ln>
-        </p:spPr>
-      </p:sp>
-      <p:sp>
-        <p:nvSpPr>
-          <p:cNvPr id="15" name="Shape 13"/>
-          <p:cNvSpPr/>
-          <p:nvPr/>
-        </p:nvSpPr>
-        <p:spPr>
-          <a:xfrm>
-            <a:off x="8577072" y="3172968"/>
-            <a:ext cx="256032" cy="713232"/>
-          </a:xfrm>
-          <a:prstGeom prst="rect">
-            <a:avLst/>
-          </a:prstGeom>
-          <a:solidFill>
-            <a:srgbClr val="2F8A28"/>
-          </a:solidFill>
-          <a:ln w="12700">
-            <a:solidFill>
-              <a:srgbClr val="2F8A28"/>
-            </a:solidFill>
-            <a:prstDash val="solid"/>
-          </a:ln>
-        </p:spPr>
+          <p:cNvPr id="14" name="Text 12"/>
+          <p:cNvSpPr/>
+          <p:nvPr/>
+        </p:nvSpPr>
+        <p:spPr>
+          <a:xfrm>
+            <a:off x="7799832" y="2935224"/>
+            <a:ext cx="3145536" cy="256032"/>
+          </a:xfrm>
+          <a:prstGeom prst="rect">
+            <a:avLst/>
+          </a:prstGeom>
+          <a:noFill/>
+          <a:ln/>
+        </p:spPr>
+        <p:txBody>
+          <a:bodyPr wrap="square" lIns="0" tIns="0" rIns="0" bIns="0" rtlCol="0" anchor="ctr"/>
+          <a:lstStyle/>
+          <a:p>
+            <a:pPr indent="0" marL="0">
+              <a:buNone/>
+            </a:pPr>
+            <a:r>
+              <a:rPr lang="en-US" sz="1300" b="1" dirty="0">
+                <a:solidFill>
+                  <a:srgbClr val="0068B7"/>
+                </a:solidFill>
+                <a:latin typeface="Aptos" pitchFamily="34" charset="0"/>
+                <a:ea typeface="Aptos" pitchFamily="34" charset="-122"/>
+                <a:cs typeface="Aptos" pitchFamily="34" charset="-120"/>
+              </a:rPr>
+              <a:t>Concept checkpoints</a:t>
+            </a:r>
+            <a:endParaRPr lang="en-US" sz="1300" dirty="0"/>
+          </a:p>
+        </p:txBody>
+      </p:sp>
+      <p:sp>
+        <p:nvSpPr>
+          <p:cNvPr id="15" name="Text 13"/>
+          <p:cNvSpPr/>
+          <p:nvPr/>
+        </p:nvSpPr>
+        <p:spPr>
+          <a:xfrm>
+            <a:off x="7818120" y="3300984"/>
+            <a:ext cx="3090672" cy="877824"/>
+          </a:xfrm>
+          <a:prstGeom prst="rect">
+            <a:avLst/>
+          </a:prstGeom>
+          <a:noFill/>
+          <a:ln/>
+        </p:spPr>
+        <p:txBody>
+          <a:bodyPr wrap="square" lIns="254" tIns="254" rIns="254" bIns="254" rtlCol="0" anchor="t">
+            <a:normAutofit/>
+          </a:bodyPr>
+          <a:lstStyle/>
+          <a:p>
+            <a:r>
+              <a:rPr lang="en-US" sz="1380" dirty="0">
+                <a:solidFill>
+                  <a:srgbClr val="17364A"/>
+                </a:solidFill>
+                <a:latin typeface="Aptos" pitchFamily="34" charset="0"/>
+                <a:ea typeface="Aptos" pitchFamily="34" charset="-122"/>
+                <a:cs typeface="Aptos" pitchFamily="34" charset="-120"/>
+              </a:rPr>
+              <a:t>Create a lab data quality checklist for one AI-supported surveillance use case.</a:t>
+            </a:r>
+            <a:endParaRPr lang="en-US" sz="1380" dirty="0"/>
+          </a:p>
+          <a:p>
+            <a:r>
+              <a:rPr lang="en-US" sz="1380" dirty="0">
+                <a:solidFill>
+                  <a:srgbClr val="17364A"/>
+                </a:solidFill>
+                <a:latin typeface="Aptos" pitchFamily="34" charset="0"/>
+                <a:ea typeface="Aptos" pitchFamily="34" charset="-122"/>
+                <a:cs typeface="Aptos" pitchFamily="34" charset="-120"/>
+              </a:rPr>
+              <a:t>Include required lab fields, terminology standards, mapping requirements, missingness.</a:t>
+            </a:r>
+            <a:endParaRPr lang="en-US" sz="1380" dirty="0"/>
+          </a:p>
+        </p:txBody>
       </p:sp>
       <p:sp>
         <p:nvSpPr>
           <p:cNvPr id="16" name="Shape 14"/>
-          <p:cNvSpPr/>
-          <p:nvPr/>
-        </p:nvSpPr>
-        <p:spPr>
-          <a:xfrm>
-            <a:off x="9015984" y="2880360"/>
-            <a:ext cx="256032" cy="1005840"/>
-          </a:xfrm>
-          <a:prstGeom prst="rect">
-            <a:avLst/>
-          </a:prstGeom>
-          <a:solidFill>
-            <a:srgbClr val="D69A2D"/>
-          </a:solidFill>
-          <a:ln w="12700">
-            <a:solidFill>
-              <a:srgbClr val="D69A2D"/>
-            </a:solidFill>
-            <a:prstDash val="solid"/>
-          </a:ln>
-        </p:spPr>
-      </p:sp>
-      <p:sp>
-        <p:nvSpPr>
-          <p:cNvPr id="17" name="Shape 15"/>
-          <p:cNvSpPr/>
-          <p:nvPr/>
-        </p:nvSpPr>
-        <p:spPr>
-          <a:xfrm>
-            <a:off x="9454896" y="3319272"/>
-            <a:ext cx="256032" cy="566928"/>
-          </a:xfrm>
-          <a:prstGeom prst="rect">
-            <a:avLst/>
-          </a:prstGeom>
-          <a:solidFill>
-            <a:srgbClr val="6A4CA3"/>
-          </a:solidFill>
-          <a:ln w="12700">
-            <a:solidFill>
-              <a:srgbClr val="6A4CA3"/>
-            </a:solidFill>
-            <a:prstDash val="solid"/>
-          </a:ln>
-        </p:spPr>
-      </p:sp>
-      <p:sp>
-        <p:nvSpPr>
-          <p:cNvPr id="18" name="Shape 16"/>
-          <p:cNvSpPr/>
-          <p:nvPr/>
-        </p:nvSpPr>
-        <p:spPr>
-          <a:xfrm>
-            <a:off x="8019288" y="3886200"/>
-            <a:ext cx="2706624" cy="0"/>
-          </a:xfrm>
-          <a:prstGeom prst="line">
-            <a:avLst/>
-          </a:prstGeom>
-          <a:noFill/>
-          <a:ln w="15240">
-            <a:solidFill>
-              <a:srgbClr val="003A63"/>
-            </a:solidFill>
-            <a:prstDash val="solid"/>
-          </a:ln>
-        </p:spPr>
-      </p:sp>
-      <p:sp>
-        <p:nvSpPr>
-          <p:cNvPr id="19" name="Text 17"/>
-          <p:cNvSpPr/>
-          <p:nvPr/>
-        </p:nvSpPr>
-        <p:spPr>
-          <a:xfrm>
-            <a:off x="7863840" y="3017520"/>
-            <a:ext cx="3017520" cy="201168"/>
-          </a:xfrm>
-          <a:prstGeom prst="rect">
-            <a:avLst/>
-          </a:prstGeom>
-          <a:noFill/>
-          <a:ln/>
-        </p:spPr>
-        <p:txBody>
-          <a:bodyPr wrap="square" lIns="0" tIns="0" rIns="0" bIns="0" rtlCol="0" anchor="ctr"/>
-          <a:lstStyle/>
-          <a:p>
-            <a:pPr algn="ctr" indent="0" marL="0">
-              <a:buNone/>
-            </a:pPr>
-            <a:r>
-              <a:rPr lang="en-US" sz="1050" b="1" dirty="0">
-                <a:solidFill>
-                  <a:srgbClr val="003A63"/>
-                </a:solidFill>
-                <a:latin typeface="Aptos" pitchFamily="34" charset="0"/>
-                <a:ea typeface="Aptos" pitchFamily="34" charset="-122"/>
-                <a:cs typeface="Aptos" pitchFamily="34" charset="-120"/>
-              </a:rPr>
-              <a:t>Measure and monitor</a:t>
-            </a:r>
-            <a:endParaRPr lang="en-US" sz="1050" dirty="0"/>
-          </a:p>
-        </p:txBody>
-      </p:sp>
-      <p:sp>
-        <p:nvSpPr>
-          <p:cNvPr id="20" name="Shape 18"/>
           <p:cNvSpPr/>
           <p:nvPr/>
         </p:nvSpPr>
@@ -9713,7 +9230,7 @@
       </p:sp>
       <p:sp>
         <p:nvSpPr>
-          <p:cNvPr id="21" name="Text 19"/>
+          <p:cNvPr id="17" name="Text 15"/>
           <p:cNvSpPr/>
           <p:nvPr/>
         </p:nvSpPr>
@@ -9752,7 +9269,7 @@
       </p:sp>
       <p:sp>
         <p:nvSpPr>
-          <p:cNvPr id="22" name="Text 20"/>
+          <p:cNvPr id="18" name="Text 16"/>
           <p:cNvSpPr/>
           <p:nvPr/>
         </p:nvSpPr>
@@ -10260,13 +9777,11 @@
             </a:avLst>
           </a:prstGeom>
           <a:solidFill>
-            <a:srgbClr val="FFFFFF">
-              <a:alpha val="88000"/>
-            </a:srgbClr>
+            <a:srgbClr val="FFFFFF"/>
           </a:solidFill>
           <a:ln w="12700">
             <a:solidFill>
-              <a:srgbClr val="D6E8F2"/>
+              <a:srgbClr val="B9D7E6"/>
             </a:solidFill>
             <a:prstDash val="solid"/>
           </a:ln>
@@ -10274,169 +9789,112 @@
       </p:sp>
       <p:sp>
         <p:nvSpPr>
-          <p:cNvPr id="14" name="Shape 12"/>
-          <p:cNvSpPr/>
-          <p:nvPr/>
-        </p:nvSpPr>
-        <p:spPr>
-          <a:xfrm>
-            <a:off x="8138160" y="3474720"/>
-            <a:ext cx="256032" cy="411480"/>
-          </a:xfrm>
-          <a:prstGeom prst="rect">
-            <a:avLst/>
-          </a:prstGeom>
-          <a:solidFill>
-            <a:srgbClr val="0068B7"/>
-          </a:solidFill>
-          <a:ln w="12700">
-            <a:solidFill>
-              <a:srgbClr val="0068B7"/>
-            </a:solidFill>
-            <a:prstDash val="solid"/>
-          </a:ln>
-        </p:spPr>
-      </p:sp>
-      <p:sp>
-        <p:nvSpPr>
-          <p:cNvPr id="15" name="Shape 13"/>
-          <p:cNvSpPr/>
-          <p:nvPr/>
-        </p:nvSpPr>
-        <p:spPr>
-          <a:xfrm>
-            <a:off x="8577072" y="3172968"/>
-            <a:ext cx="256032" cy="713232"/>
-          </a:xfrm>
-          <a:prstGeom prst="rect">
-            <a:avLst/>
-          </a:prstGeom>
-          <a:solidFill>
-            <a:srgbClr val="2F8A28"/>
-          </a:solidFill>
-          <a:ln w="12700">
-            <a:solidFill>
-              <a:srgbClr val="2F8A28"/>
-            </a:solidFill>
-            <a:prstDash val="solid"/>
-          </a:ln>
-        </p:spPr>
+          <p:cNvPr id="14" name="Text 12"/>
+          <p:cNvSpPr/>
+          <p:nvPr/>
+        </p:nvSpPr>
+        <p:spPr>
+          <a:xfrm>
+            <a:off x="7799832" y="2935224"/>
+            <a:ext cx="3145536" cy="256032"/>
+          </a:xfrm>
+          <a:prstGeom prst="rect">
+            <a:avLst/>
+          </a:prstGeom>
+          <a:noFill/>
+          <a:ln/>
+        </p:spPr>
+        <p:txBody>
+          <a:bodyPr wrap="square" lIns="0" tIns="0" rIns="0" bIns="0" rtlCol="0" anchor="ctr"/>
+          <a:lstStyle/>
+          <a:p>
+            <a:pPr indent="0" marL="0">
+              <a:buNone/>
+            </a:pPr>
+            <a:r>
+              <a:rPr lang="en-US" sz="1300" b="1" dirty="0">
+                <a:solidFill>
+                  <a:srgbClr val="0068B7"/>
+                </a:solidFill>
+                <a:latin typeface="Aptos" pitchFamily="34" charset="0"/>
+                <a:ea typeface="Aptos" pitchFamily="34" charset="-122"/>
+                <a:cs typeface="Aptos" pitchFamily="34" charset="-120"/>
+              </a:rPr>
+              <a:t>Concept checkpoints</a:t>
+            </a:r>
+            <a:endParaRPr lang="en-US" sz="1300" dirty="0"/>
+          </a:p>
+        </p:txBody>
+      </p:sp>
+      <p:sp>
+        <p:nvSpPr>
+          <p:cNvPr id="15" name="Text 13"/>
+          <p:cNvSpPr/>
+          <p:nvPr/>
+        </p:nvSpPr>
+        <p:spPr>
+          <a:xfrm>
+            <a:off x="7818120" y="3300984"/>
+            <a:ext cx="3090672" cy="877824"/>
+          </a:xfrm>
+          <a:prstGeom prst="rect">
+            <a:avLst/>
+          </a:prstGeom>
+          <a:noFill/>
+          <a:ln/>
+        </p:spPr>
+        <p:txBody>
+          <a:bodyPr wrap="square" lIns="254" tIns="254" rIns="254" bIns="254" rtlCol="0" anchor="t">
+            <a:normAutofit/>
+          </a:bodyPr>
+          <a:lstStyle/>
+          <a:p>
+            <a:r>
+              <a:rPr lang="en-US" sz="1380" dirty="0">
+                <a:solidFill>
+                  <a:srgbClr val="17364A"/>
+                </a:solidFill>
+                <a:latin typeface="Aptos" pitchFamily="34" charset="0"/>
+                <a:ea typeface="Aptos" pitchFamily="34" charset="-122"/>
+                <a:cs typeface="Aptos" pitchFamily="34" charset="-120"/>
+              </a:rPr>
+              <a:t>Lab data quality checklist</a:t>
+            </a:r>
+            <a:endParaRPr lang="en-US" sz="1380" dirty="0"/>
+          </a:p>
+          <a:p>
+            <a:r>
+              <a:rPr lang="en-US" sz="1380" dirty="0">
+                <a:solidFill>
+                  <a:srgbClr val="17364A"/>
+                </a:solidFill>
+                <a:latin typeface="Aptos" pitchFamily="34" charset="0"/>
+                <a:ea typeface="Aptos" pitchFamily="34" charset="-122"/>
+                <a:cs typeface="Aptos" pitchFamily="34" charset="-120"/>
+              </a:rPr>
+              <a:t>Terminology mapping questions</a:t>
+            </a:r>
+            <a:endParaRPr lang="en-US" sz="1380" dirty="0"/>
+          </a:p>
+          <a:p>
+            <a:r>
+              <a:rPr lang="en-US" sz="1380" dirty="0">
+                <a:solidFill>
+                  <a:srgbClr val="17364A"/>
+                </a:solidFill>
+                <a:latin typeface="Aptos" pitchFamily="34" charset="0"/>
+                <a:ea typeface="Aptos" pitchFamily="34" charset="-122"/>
+                <a:cs typeface="Aptos" pitchFamily="34" charset="-120"/>
+              </a:rPr>
+              <a:t>Required-field list</a:t>
+            </a:r>
+            <a:endParaRPr lang="en-US" sz="1380" dirty="0"/>
+          </a:p>
+        </p:txBody>
       </p:sp>
       <p:sp>
         <p:nvSpPr>
           <p:cNvPr id="16" name="Shape 14"/>
-          <p:cNvSpPr/>
-          <p:nvPr/>
-        </p:nvSpPr>
-        <p:spPr>
-          <a:xfrm>
-            <a:off x="9015984" y="2880360"/>
-            <a:ext cx="256032" cy="1005840"/>
-          </a:xfrm>
-          <a:prstGeom prst="rect">
-            <a:avLst/>
-          </a:prstGeom>
-          <a:solidFill>
-            <a:srgbClr val="D69A2D"/>
-          </a:solidFill>
-          <a:ln w="12700">
-            <a:solidFill>
-              <a:srgbClr val="D69A2D"/>
-            </a:solidFill>
-            <a:prstDash val="solid"/>
-          </a:ln>
-        </p:spPr>
-      </p:sp>
-      <p:sp>
-        <p:nvSpPr>
-          <p:cNvPr id="17" name="Shape 15"/>
-          <p:cNvSpPr/>
-          <p:nvPr/>
-        </p:nvSpPr>
-        <p:spPr>
-          <a:xfrm>
-            <a:off x="9454896" y="3319272"/>
-            <a:ext cx="256032" cy="566928"/>
-          </a:xfrm>
-          <a:prstGeom prst="rect">
-            <a:avLst/>
-          </a:prstGeom>
-          <a:solidFill>
-            <a:srgbClr val="6A4CA3"/>
-          </a:solidFill>
-          <a:ln w="12700">
-            <a:solidFill>
-              <a:srgbClr val="6A4CA3"/>
-            </a:solidFill>
-            <a:prstDash val="solid"/>
-          </a:ln>
-        </p:spPr>
-      </p:sp>
-      <p:sp>
-        <p:nvSpPr>
-          <p:cNvPr id="18" name="Shape 16"/>
-          <p:cNvSpPr/>
-          <p:nvPr/>
-        </p:nvSpPr>
-        <p:spPr>
-          <a:xfrm>
-            <a:off x="8019288" y="3886200"/>
-            <a:ext cx="2706624" cy="0"/>
-          </a:xfrm>
-          <a:prstGeom prst="line">
-            <a:avLst/>
-          </a:prstGeom>
-          <a:noFill/>
-          <a:ln w="15240">
-            <a:solidFill>
-              <a:srgbClr val="003A63"/>
-            </a:solidFill>
-            <a:prstDash val="solid"/>
-          </a:ln>
-        </p:spPr>
-      </p:sp>
-      <p:sp>
-        <p:nvSpPr>
-          <p:cNvPr id="19" name="Text 17"/>
-          <p:cNvSpPr/>
-          <p:nvPr/>
-        </p:nvSpPr>
-        <p:spPr>
-          <a:xfrm>
-            <a:off x="7863840" y="3017520"/>
-            <a:ext cx="3017520" cy="201168"/>
-          </a:xfrm>
-          <a:prstGeom prst="rect">
-            <a:avLst/>
-          </a:prstGeom>
-          <a:noFill/>
-          <a:ln/>
-        </p:spPr>
-        <p:txBody>
-          <a:bodyPr wrap="square" lIns="0" tIns="0" rIns="0" bIns="0" rtlCol="0" anchor="ctr"/>
-          <a:lstStyle/>
-          <a:p>
-            <a:pPr algn="ctr" indent="0" marL="0">
-              <a:buNone/>
-            </a:pPr>
-            <a:r>
-              <a:rPr lang="en-US" sz="1050" b="1" dirty="0">
-                <a:solidFill>
-                  <a:srgbClr val="003A63"/>
-                </a:solidFill>
-                <a:latin typeface="Aptos" pitchFamily="34" charset="0"/>
-                <a:ea typeface="Aptos" pitchFamily="34" charset="-122"/>
-                <a:cs typeface="Aptos" pitchFamily="34" charset="-120"/>
-              </a:rPr>
-              <a:t>Measure and monitor</a:t>
-            </a:r>
-            <a:endParaRPr lang="en-US" sz="1050" dirty="0"/>
-          </a:p>
-        </p:txBody>
-      </p:sp>
-      <p:sp>
-        <p:nvSpPr>
-          <p:cNvPr id="20" name="Shape 18"/>
           <p:cNvSpPr/>
           <p:nvPr/>
         </p:nvSpPr>
@@ -10463,7 +9921,7 @@
       </p:sp>
       <p:sp>
         <p:nvSpPr>
-          <p:cNvPr id="21" name="Text 19"/>
+          <p:cNvPr id="17" name="Text 15"/>
           <p:cNvSpPr/>
           <p:nvPr/>
         </p:nvSpPr>
@@ -10502,7 +9960,7 @@
       </p:sp>
       <p:sp>
         <p:nvSpPr>
-          <p:cNvPr id="22" name="Text 20"/>
+          <p:cNvPr id="18" name="Text 16"/>
           <p:cNvSpPr/>
           <p:nvPr/>
         </p:nvSpPr>
@@ -11035,20 +10493,20 @@
         </p:nvSpPr>
         <p:spPr>
           <a:xfrm>
-            <a:off x="7635240" y="3730752"/>
-            <a:ext cx="1033272" cy="749808"/>
+            <a:off x="7909560" y="3675888"/>
+            <a:ext cx="3154680" cy="1691640"/>
           </a:xfrm>
           <a:prstGeom prst="roundRect">
             <a:avLst>
-              <a:gd name="adj" fmla="val 14634"/>
+              <a:gd name="adj" fmla="val 6486"/>
             </a:avLst>
           </a:prstGeom>
           <a:solidFill>
-            <a:srgbClr val="0068B7"/>
+            <a:srgbClr val="FFFFFF"/>
           </a:solidFill>
           <a:ln w="12700">
             <a:solidFill>
-              <a:srgbClr val="0068B7"/>
+              <a:srgbClr val="B9D7E6"/>
             </a:solidFill>
             <a:prstDash val="solid"/>
           </a:ln>
@@ -11062,172 +10520,100 @@
         </p:nvSpPr>
         <p:spPr>
           <a:xfrm>
-            <a:off x="7708392" y="3922776"/>
-            <a:ext cx="886968" cy="310896"/>
-          </a:xfrm>
-          <a:prstGeom prst="rect">
-            <a:avLst/>
-          </a:prstGeom>
-          <a:noFill/>
-          <a:ln/>
-        </p:spPr>
-        <p:txBody>
-          <a:bodyPr wrap="square" lIns="0" tIns="0" rIns="0" bIns="0" rtlCol="0" anchor="ctr">
+            <a:off x="8074152" y="3822192"/>
+            <a:ext cx="2825496" cy="256032"/>
+          </a:xfrm>
+          <a:prstGeom prst="rect">
+            <a:avLst/>
+          </a:prstGeom>
+          <a:noFill/>
+          <a:ln/>
+        </p:spPr>
+        <p:txBody>
+          <a:bodyPr wrap="square" lIns="0" tIns="0" rIns="0" bIns="0" rtlCol="0" anchor="ctr"/>
+          <a:lstStyle/>
+          <a:p>
+            <a:pPr indent="0" marL="0">
+              <a:buNone/>
+            </a:pPr>
+            <a:r>
+              <a:rPr lang="en-US" sz="1300" b="1" dirty="0">
+                <a:solidFill>
+                  <a:srgbClr val="0068B7"/>
+                </a:solidFill>
+                <a:latin typeface="Aptos" pitchFamily="34" charset="0"/>
+                <a:ea typeface="Aptos" pitchFamily="34" charset="-122"/>
+                <a:cs typeface="Aptos" pitchFamily="34" charset="-120"/>
+              </a:rPr>
+              <a:t>Learning sequence</a:t>
+            </a:r>
+            <a:endParaRPr lang="en-US" sz="1300" dirty="0"/>
+          </a:p>
+        </p:txBody>
+      </p:sp>
+      <p:sp>
+        <p:nvSpPr>
+          <p:cNvPr id="15" name="Text 13"/>
+          <p:cNvSpPr/>
+          <p:nvPr/>
+        </p:nvSpPr>
+        <p:spPr>
+          <a:xfrm>
+            <a:off x="8092440" y="4187952"/>
+            <a:ext cx="2770632" cy="1033272"/>
+          </a:xfrm>
+          <a:prstGeom prst="rect">
+            <a:avLst/>
+          </a:prstGeom>
+          <a:noFill/>
+          <a:ln/>
+        </p:spPr>
+        <p:txBody>
+          <a:bodyPr wrap="square" lIns="254" tIns="254" rIns="254" bIns="254" rtlCol="0" anchor="t">
             <a:normAutofit/>
           </a:bodyPr>
           <a:lstStyle/>
           <a:p>
-            <a:pPr algn="ctr" indent="0" marL="0">
-              <a:buNone/>
-            </a:pPr>
-            <a:r>
-              <a:rPr lang="en-US" sz="1500" b="1" dirty="0">
-                <a:solidFill>
-                  <a:srgbClr val="FFFFFF"/>
-                </a:solidFill>
-                <a:latin typeface="Aptos" pitchFamily="34" charset="0"/>
-                <a:ea typeface="Aptos" pitchFamily="34" charset="-122"/>
-                <a:cs typeface="Aptos" pitchFamily="34" charset="-120"/>
-              </a:rPr>
-              <a:t>Learn</a:t>
-            </a:r>
-            <a:endParaRPr lang="en-US" sz="1500" dirty="0"/>
-          </a:p>
-        </p:txBody>
-      </p:sp>
-      <p:sp>
-        <p:nvSpPr>
-          <p:cNvPr id="15" name="Shape 13"/>
-          <p:cNvSpPr/>
-          <p:nvPr/>
-        </p:nvSpPr>
-        <p:spPr>
-          <a:xfrm>
-            <a:off x="8924544" y="3730752"/>
-            <a:ext cx="1033272" cy="749808"/>
-          </a:xfrm>
-          <a:prstGeom prst="roundRect">
-            <a:avLst>
-              <a:gd name="adj" fmla="val 14634"/>
-            </a:avLst>
-          </a:prstGeom>
-          <a:solidFill>
-            <a:srgbClr val="2F8A28"/>
-          </a:solidFill>
-          <a:ln w="12700">
-            <a:solidFill>
-              <a:srgbClr val="2F8A28"/>
-            </a:solidFill>
-            <a:prstDash val="solid"/>
-          </a:ln>
-        </p:spPr>
-      </p:sp>
-      <p:sp>
-        <p:nvSpPr>
-          <p:cNvPr id="16" name="Text 14"/>
-          <p:cNvSpPr/>
-          <p:nvPr/>
-        </p:nvSpPr>
-        <p:spPr>
-          <a:xfrm>
-            <a:off x="8997696" y="3922776"/>
-            <a:ext cx="886968" cy="310896"/>
-          </a:xfrm>
-          <a:prstGeom prst="rect">
-            <a:avLst/>
-          </a:prstGeom>
-          <a:noFill/>
-          <a:ln/>
-        </p:spPr>
-        <p:txBody>
-          <a:bodyPr wrap="square" lIns="0" tIns="0" rIns="0" bIns="0" rtlCol="0" anchor="ctr">
-            <a:normAutofit/>
-          </a:bodyPr>
-          <a:lstStyle/>
-          <a:p>
-            <a:pPr algn="ctr" indent="0" marL="0">
-              <a:buNone/>
-            </a:pPr>
-            <a:r>
-              <a:rPr lang="en-US" sz="1500" b="1" dirty="0">
-                <a:solidFill>
-                  <a:srgbClr val="FFFFFF"/>
-                </a:solidFill>
-                <a:latin typeface="Aptos" pitchFamily="34" charset="0"/>
-                <a:ea typeface="Aptos" pitchFamily="34" charset="-122"/>
-                <a:cs typeface="Aptos" pitchFamily="34" charset="-120"/>
-              </a:rPr>
-              <a:t>Apply</a:t>
-            </a:r>
-            <a:endParaRPr lang="en-US" sz="1500" dirty="0"/>
-          </a:p>
-        </p:txBody>
-      </p:sp>
-      <p:sp>
-        <p:nvSpPr>
-          <p:cNvPr id="17" name="Shape 15"/>
-          <p:cNvSpPr/>
-          <p:nvPr/>
-        </p:nvSpPr>
-        <p:spPr>
-          <a:xfrm>
-            <a:off x="10213848" y="3730752"/>
-            <a:ext cx="1033272" cy="749808"/>
-          </a:xfrm>
-          <a:prstGeom prst="roundRect">
-            <a:avLst>
-              <a:gd name="adj" fmla="val 14634"/>
-            </a:avLst>
-          </a:prstGeom>
-          <a:solidFill>
-            <a:srgbClr val="6A4CA3"/>
-          </a:solidFill>
-          <a:ln w="12700">
-            <a:solidFill>
-              <a:srgbClr val="6A4CA3"/>
-            </a:solidFill>
-            <a:prstDash val="solid"/>
-          </a:ln>
-        </p:spPr>
-      </p:sp>
-      <p:sp>
-        <p:nvSpPr>
-          <p:cNvPr id="18" name="Text 16"/>
-          <p:cNvSpPr/>
-          <p:nvPr/>
-        </p:nvSpPr>
-        <p:spPr>
-          <a:xfrm>
-            <a:off x="10287000" y="3922776"/>
-            <a:ext cx="886968" cy="310896"/>
-          </a:xfrm>
-          <a:prstGeom prst="rect">
-            <a:avLst/>
-          </a:prstGeom>
-          <a:noFill/>
-          <a:ln/>
-        </p:spPr>
-        <p:txBody>
-          <a:bodyPr wrap="square" lIns="0" tIns="0" rIns="0" bIns="0" rtlCol="0" anchor="ctr">
-            <a:normAutofit/>
-          </a:bodyPr>
-          <a:lstStyle/>
-          <a:p>
-            <a:pPr algn="ctr" indent="0" marL="0">
-              <a:buNone/>
-            </a:pPr>
-            <a:r>
-              <a:rPr lang="en-US" sz="1500" b="1" dirty="0">
-                <a:solidFill>
-                  <a:srgbClr val="FFFFFF"/>
-                </a:solidFill>
-                <a:latin typeface="Aptos" pitchFamily="34" charset="0"/>
-                <a:ea typeface="Aptos" pitchFamily="34" charset="-122"/>
-                <a:cs typeface="Aptos" pitchFamily="34" charset="-120"/>
-              </a:rPr>
-              <a:t>Document</a:t>
-            </a:r>
-            <a:endParaRPr lang="en-US" sz="1500" dirty="0"/>
+            <a:r>
+              <a:rPr lang="en-US" sz="1380" dirty="0">
+                <a:solidFill>
+                  <a:srgbClr val="17364A"/>
+                </a:solidFill>
+                <a:latin typeface="Aptos" pitchFamily="34" charset="0"/>
+                <a:ea typeface="Aptos" pitchFamily="34" charset="-122"/>
+                <a:cs typeface="Aptos" pitchFamily="34" charset="-120"/>
+              </a:rPr>
+              <a:t>Read the module for shared vocabulary and context.</a:t>
+            </a:r>
+            <a:endParaRPr lang="en-US" sz="1380" dirty="0"/>
+          </a:p>
+          <a:p>
+            <a:r>
+              <a:rPr lang="en-US" sz="1380" dirty="0">
+                <a:solidFill>
+                  <a:srgbClr val="17364A"/>
+                </a:solidFill>
+                <a:latin typeface="Aptos" pitchFamily="34" charset="0"/>
+                <a:ea typeface="Aptos" pitchFamily="34" charset="-122"/>
+                <a:cs typeface="Aptos" pitchFamily="34" charset="-120"/>
+              </a:rPr>
+              <a:t>Complete the practical exercise to apply the concept.</a:t>
+            </a:r>
+            <a:endParaRPr lang="en-US" sz="1380" dirty="0"/>
+          </a:p>
+          <a:p>
+            <a:r>
+              <a:rPr lang="en-US" sz="1380" dirty="0">
+                <a:solidFill>
+                  <a:srgbClr val="17364A"/>
+                </a:solidFill>
+                <a:latin typeface="Aptos" pitchFamily="34" charset="0"/>
+                <a:ea typeface="Aptos" pitchFamily="34" charset="-122"/>
+                <a:cs typeface="Aptos" pitchFamily="34" charset="-120"/>
+              </a:rPr>
+              <a:t>Use the notes and references for deeper review.</a:t>
+            </a:r>
+            <a:endParaRPr lang="en-US" sz="1380" dirty="0"/>
           </a:p>
         </p:txBody>
       </p:sp>
@@ -11672,13 +11058,11 @@
             </a:avLst>
           </a:prstGeom>
           <a:solidFill>
-            <a:srgbClr val="FFFFFF">
-              <a:alpha val="88000"/>
-            </a:srgbClr>
+            <a:srgbClr val="FFFFFF"/>
           </a:solidFill>
           <a:ln w="12700">
             <a:solidFill>
-              <a:srgbClr val="D6E8F2"/>
+              <a:srgbClr val="B9D7E6"/>
             </a:solidFill>
             <a:prstDash val="solid"/>
           </a:ln>
@@ -11686,169 +11070,84 @@
       </p:sp>
       <p:sp>
         <p:nvSpPr>
-          <p:cNvPr id="14" name="Shape 12"/>
-          <p:cNvSpPr/>
-          <p:nvPr/>
-        </p:nvSpPr>
-        <p:spPr>
-          <a:xfrm>
-            <a:off x="8138160" y="3474720"/>
-            <a:ext cx="256032" cy="411480"/>
-          </a:xfrm>
-          <a:prstGeom prst="rect">
-            <a:avLst/>
-          </a:prstGeom>
-          <a:solidFill>
-            <a:srgbClr val="0068B7"/>
-          </a:solidFill>
-          <a:ln w="12700">
-            <a:solidFill>
-              <a:srgbClr val="0068B7"/>
-            </a:solidFill>
-            <a:prstDash val="solid"/>
-          </a:ln>
-        </p:spPr>
-      </p:sp>
-      <p:sp>
-        <p:nvSpPr>
-          <p:cNvPr id="15" name="Shape 13"/>
-          <p:cNvSpPr/>
-          <p:nvPr/>
-        </p:nvSpPr>
-        <p:spPr>
-          <a:xfrm>
-            <a:off x="8577072" y="3172968"/>
-            <a:ext cx="256032" cy="713232"/>
-          </a:xfrm>
-          <a:prstGeom prst="rect">
-            <a:avLst/>
-          </a:prstGeom>
-          <a:solidFill>
-            <a:srgbClr val="2F8A28"/>
-          </a:solidFill>
-          <a:ln w="12700">
-            <a:solidFill>
-              <a:srgbClr val="2F8A28"/>
-            </a:solidFill>
-            <a:prstDash val="solid"/>
-          </a:ln>
-        </p:spPr>
+          <p:cNvPr id="14" name="Text 12"/>
+          <p:cNvSpPr/>
+          <p:nvPr/>
+        </p:nvSpPr>
+        <p:spPr>
+          <a:xfrm>
+            <a:off x="7799832" y="2935224"/>
+            <a:ext cx="3145536" cy="256032"/>
+          </a:xfrm>
+          <a:prstGeom prst="rect">
+            <a:avLst/>
+          </a:prstGeom>
+          <a:noFill/>
+          <a:ln/>
+        </p:spPr>
+        <p:txBody>
+          <a:bodyPr wrap="square" lIns="0" tIns="0" rIns="0" bIns="0" rtlCol="0" anchor="ctr"/>
+          <a:lstStyle/>
+          <a:p>
+            <a:pPr indent="0" marL="0">
+              <a:buNone/>
+            </a:pPr>
+            <a:r>
+              <a:rPr lang="en-US" sz="1300" b="1" dirty="0">
+                <a:solidFill>
+                  <a:srgbClr val="0068B7"/>
+                </a:solidFill>
+                <a:latin typeface="Aptos" pitchFamily="34" charset="0"/>
+                <a:ea typeface="Aptos" pitchFamily="34" charset="-122"/>
+                <a:cs typeface="Aptos" pitchFamily="34" charset="-120"/>
+              </a:rPr>
+              <a:t>Concept checkpoints</a:t>
+            </a:r>
+            <a:endParaRPr lang="en-US" sz="1300" dirty="0"/>
+          </a:p>
+        </p:txBody>
+      </p:sp>
+      <p:sp>
+        <p:nvSpPr>
+          <p:cNvPr id="15" name="Text 13"/>
+          <p:cNvSpPr/>
+          <p:nvPr/>
+        </p:nvSpPr>
+        <p:spPr>
+          <a:xfrm>
+            <a:off x="7818120" y="3300984"/>
+            <a:ext cx="3090672" cy="877824"/>
+          </a:xfrm>
+          <a:prstGeom prst="rect">
+            <a:avLst/>
+          </a:prstGeom>
+          <a:noFill/>
+          <a:ln/>
+        </p:spPr>
+        <p:txBody>
+          <a:bodyPr wrap="square" lIns="254" tIns="254" rIns="254" bIns="254" rtlCol="0" anchor="t">
+            <a:normAutofit/>
+          </a:bodyPr>
+          <a:lstStyle/>
+          <a:p>
+            <a:r>
+              <a:rPr lang="en-US" sz="1380" dirty="0">
+                <a:solidFill>
+                  <a:srgbClr val="17364A"/>
+                </a:solidFill>
+                <a:latin typeface="Aptos" pitchFamily="34" charset="0"/>
+                <a:ea typeface="Aptos" pitchFamily="34" charset="-122"/>
+                <a:cs typeface="Aptos" pitchFamily="34" charset="-120"/>
+              </a:rPr>
+              <a:t>Data quality issue log</a:t>
+            </a:r>
+            <a:endParaRPr lang="en-US" sz="1380" dirty="0"/>
+          </a:p>
+        </p:txBody>
       </p:sp>
       <p:sp>
         <p:nvSpPr>
           <p:cNvPr id="16" name="Shape 14"/>
-          <p:cNvSpPr/>
-          <p:nvPr/>
-        </p:nvSpPr>
-        <p:spPr>
-          <a:xfrm>
-            <a:off x="9015984" y="2880360"/>
-            <a:ext cx="256032" cy="1005840"/>
-          </a:xfrm>
-          <a:prstGeom prst="rect">
-            <a:avLst/>
-          </a:prstGeom>
-          <a:solidFill>
-            <a:srgbClr val="D69A2D"/>
-          </a:solidFill>
-          <a:ln w="12700">
-            <a:solidFill>
-              <a:srgbClr val="D69A2D"/>
-            </a:solidFill>
-            <a:prstDash val="solid"/>
-          </a:ln>
-        </p:spPr>
-      </p:sp>
-      <p:sp>
-        <p:nvSpPr>
-          <p:cNvPr id="17" name="Shape 15"/>
-          <p:cNvSpPr/>
-          <p:nvPr/>
-        </p:nvSpPr>
-        <p:spPr>
-          <a:xfrm>
-            <a:off x="9454896" y="3319272"/>
-            <a:ext cx="256032" cy="566928"/>
-          </a:xfrm>
-          <a:prstGeom prst="rect">
-            <a:avLst/>
-          </a:prstGeom>
-          <a:solidFill>
-            <a:srgbClr val="6A4CA3"/>
-          </a:solidFill>
-          <a:ln w="12700">
-            <a:solidFill>
-              <a:srgbClr val="6A4CA3"/>
-            </a:solidFill>
-            <a:prstDash val="solid"/>
-          </a:ln>
-        </p:spPr>
-      </p:sp>
-      <p:sp>
-        <p:nvSpPr>
-          <p:cNvPr id="18" name="Shape 16"/>
-          <p:cNvSpPr/>
-          <p:nvPr/>
-        </p:nvSpPr>
-        <p:spPr>
-          <a:xfrm>
-            <a:off x="8019288" y="3886200"/>
-            <a:ext cx="2706624" cy="0"/>
-          </a:xfrm>
-          <a:prstGeom prst="line">
-            <a:avLst/>
-          </a:prstGeom>
-          <a:noFill/>
-          <a:ln w="15240">
-            <a:solidFill>
-              <a:srgbClr val="003A63"/>
-            </a:solidFill>
-            <a:prstDash val="solid"/>
-          </a:ln>
-        </p:spPr>
-      </p:sp>
-      <p:sp>
-        <p:nvSpPr>
-          <p:cNvPr id="19" name="Text 17"/>
-          <p:cNvSpPr/>
-          <p:nvPr/>
-        </p:nvSpPr>
-        <p:spPr>
-          <a:xfrm>
-            <a:off x="7863840" y="3017520"/>
-            <a:ext cx="3017520" cy="201168"/>
-          </a:xfrm>
-          <a:prstGeom prst="rect">
-            <a:avLst/>
-          </a:prstGeom>
-          <a:noFill/>
-          <a:ln/>
-        </p:spPr>
-        <p:txBody>
-          <a:bodyPr wrap="square" lIns="0" tIns="0" rIns="0" bIns="0" rtlCol="0" anchor="ctr"/>
-          <a:lstStyle/>
-          <a:p>
-            <a:pPr algn="ctr" indent="0" marL="0">
-              <a:buNone/>
-            </a:pPr>
-            <a:r>
-              <a:rPr lang="en-US" sz="1050" b="1" dirty="0">
-                <a:solidFill>
-                  <a:srgbClr val="003A63"/>
-                </a:solidFill>
-                <a:latin typeface="Aptos" pitchFamily="34" charset="0"/>
-                <a:ea typeface="Aptos" pitchFamily="34" charset="-122"/>
-                <a:cs typeface="Aptos" pitchFamily="34" charset="-120"/>
-              </a:rPr>
-              <a:t>Measure and monitor</a:t>
-            </a:r>
-            <a:endParaRPr lang="en-US" sz="1050" dirty="0"/>
-          </a:p>
-        </p:txBody>
-      </p:sp>
-      <p:sp>
-        <p:nvSpPr>
-          <p:cNvPr id="20" name="Shape 18"/>
           <p:cNvSpPr/>
           <p:nvPr/>
         </p:nvSpPr>
@@ -11875,7 +11174,7 @@
       </p:sp>
       <p:sp>
         <p:nvSpPr>
-          <p:cNvPr id="21" name="Text 19"/>
+          <p:cNvPr id="17" name="Text 15"/>
           <p:cNvSpPr/>
           <p:nvPr/>
         </p:nvSpPr>
@@ -11914,7 +11213,7 @@
       </p:sp>
       <p:sp>
         <p:nvSpPr>
-          <p:cNvPr id="22" name="Text 20"/>
+          <p:cNvPr id="18" name="Text 16"/>
           <p:cNvSpPr/>
           <p:nvPr/>
         </p:nvSpPr>
@@ -12422,13 +11721,11 @@
             </a:avLst>
           </a:prstGeom>
           <a:solidFill>
-            <a:srgbClr val="FFFFFF">
-              <a:alpha val="88000"/>
-            </a:srgbClr>
+            <a:srgbClr val="FFFFFF"/>
           </a:solidFill>
           <a:ln w="12700">
             <a:solidFill>
-              <a:srgbClr val="D6E8F2"/>
+              <a:srgbClr val="B9D7E6"/>
             </a:solidFill>
             <a:prstDash val="solid"/>
           </a:ln>
@@ -12436,169 +11733,112 @@
       </p:sp>
       <p:sp>
         <p:nvSpPr>
-          <p:cNvPr id="14" name="Shape 12"/>
-          <p:cNvSpPr/>
-          <p:nvPr/>
-        </p:nvSpPr>
-        <p:spPr>
-          <a:xfrm>
-            <a:off x="8138160" y="3474720"/>
-            <a:ext cx="256032" cy="411480"/>
-          </a:xfrm>
-          <a:prstGeom prst="rect">
-            <a:avLst/>
-          </a:prstGeom>
-          <a:solidFill>
-            <a:srgbClr val="0068B7"/>
-          </a:solidFill>
-          <a:ln w="12700">
-            <a:solidFill>
-              <a:srgbClr val="0068B7"/>
-            </a:solidFill>
-            <a:prstDash val="solid"/>
-          </a:ln>
-        </p:spPr>
-      </p:sp>
-      <p:sp>
-        <p:nvSpPr>
-          <p:cNvPr id="15" name="Shape 13"/>
-          <p:cNvSpPr/>
-          <p:nvPr/>
-        </p:nvSpPr>
-        <p:spPr>
-          <a:xfrm>
-            <a:off x="8577072" y="3172968"/>
-            <a:ext cx="256032" cy="713232"/>
-          </a:xfrm>
-          <a:prstGeom prst="rect">
-            <a:avLst/>
-          </a:prstGeom>
-          <a:solidFill>
-            <a:srgbClr val="2F8A28"/>
-          </a:solidFill>
-          <a:ln w="12700">
-            <a:solidFill>
-              <a:srgbClr val="2F8A28"/>
-            </a:solidFill>
-            <a:prstDash val="solid"/>
-          </a:ln>
-        </p:spPr>
+          <p:cNvPr id="14" name="Text 12"/>
+          <p:cNvSpPr/>
+          <p:nvPr/>
+        </p:nvSpPr>
+        <p:spPr>
+          <a:xfrm>
+            <a:off x="7799832" y="2935224"/>
+            <a:ext cx="3145536" cy="256032"/>
+          </a:xfrm>
+          <a:prstGeom prst="rect">
+            <a:avLst/>
+          </a:prstGeom>
+          <a:noFill/>
+          <a:ln/>
+        </p:spPr>
+        <p:txBody>
+          <a:bodyPr wrap="square" lIns="0" tIns="0" rIns="0" bIns="0" rtlCol="0" anchor="ctr"/>
+          <a:lstStyle/>
+          <a:p>
+            <a:pPr indent="0" marL="0">
+              <a:buNone/>
+            </a:pPr>
+            <a:r>
+              <a:rPr lang="en-US" sz="1300" b="1" dirty="0">
+                <a:solidFill>
+                  <a:srgbClr val="0068B7"/>
+                </a:solidFill>
+                <a:latin typeface="Aptos" pitchFamily="34" charset="0"/>
+                <a:ea typeface="Aptos" pitchFamily="34" charset="-122"/>
+                <a:cs typeface="Aptos" pitchFamily="34" charset="-120"/>
+              </a:rPr>
+              <a:t>Concept checkpoints</a:t>
+            </a:r>
+            <a:endParaRPr lang="en-US" sz="1300" dirty="0"/>
+          </a:p>
+        </p:txBody>
+      </p:sp>
+      <p:sp>
+        <p:nvSpPr>
+          <p:cNvPr id="15" name="Text 13"/>
+          <p:cNvSpPr/>
+          <p:nvPr/>
+        </p:nvSpPr>
+        <p:spPr>
+          <a:xfrm>
+            <a:off x="7818120" y="3300984"/>
+            <a:ext cx="3090672" cy="877824"/>
+          </a:xfrm>
+          <a:prstGeom prst="rect">
+            <a:avLst/>
+          </a:prstGeom>
+          <a:noFill/>
+          <a:ln/>
+        </p:spPr>
+        <p:txBody>
+          <a:bodyPr wrap="square" lIns="254" tIns="254" rIns="254" bIns="254" rtlCol="0" anchor="t">
+            <a:normAutofit/>
+          </a:bodyPr>
+          <a:lstStyle/>
+          <a:p>
+            <a:r>
+              <a:rPr lang="en-US" sz="1380" dirty="0">
+                <a:solidFill>
+                  <a:srgbClr val="17364A"/>
+                </a:solidFill>
+                <a:latin typeface="Aptos" pitchFamily="34" charset="0"/>
+                <a:ea typeface="Aptos" pitchFamily="34" charset="-122"/>
+                <a:cs typeface="Aptos" pitchFamily="34" charset="-120"/>
+              </a:rPr>
+              <a:t>Lab data quality checklist</a:t>
+            </a:r>
+            <a:endParaRPr lang="en-US" sz="1380" dirty="0"/>
+          </a:p>
+          <a:p>
+            <a:r>
+              <a:rPr lang="en-US" sz="1380" dirty="0">
+                <a:solidFill>
+                  <a:srgbClr val="17364A"/>
+                </a:solidFill>
+                <a:latin typeface="Aptos" pitchFamily="34" charset="0"/>
+                <a:ea typeface="Aptos" pitchFamily="34" charset="-122"/>
+                <a:cs typeface="Aptos" pitchFamily="34" charset="-120"/>
+              </a:rPr>
+              <a:t>Terminology mapping questions</a:t>
+            </a:r>
+            <a:endParaRPr lang="en-US" sz="1380" dirty="0"/>
+          </a:p>
+          <a:p>
+            <a:r>
+              <a:rPr lang="en-US" sz="1380" dirty="0">
+                <a:solidFill>
+                  <a:srgbClr val="17364A"/>
+                </a:solidFill>
+                <a:latin typeface="Aptos" pitchFamily="34" charset="0"/>
+                <a:ea typeface="Aptos" pitchFamily="34" charset="-122"/>
+                <a:cs typeface="Aptos" pitchFamily="34" charset="-120"/>
+              </a:rPr>
+              <a:t>Required-field list</a:t>
+            </a:r>
+            <a:endParaRPr lang="en-US" sz="1380" dirty="0"/>
+          </a:p>
+        </p:txBody>
       </p:sp>
       <p:sp>
         <p:nvSpPr>
           <p:cNvPr id="16" name="Shape 14"/>
-          <p:cNvSpPr/>
-          <p:nvPr/>
-        </p:nvSpPr>
-        <p:spPr>
-          <a:xfrm>
-            <a:off x="9015984" y="2880360"/>
-            <a:ext cx="256032" cy="1005840"/>
-          </a:xfrm>
-          <a:prstGeom prst="rect">
-            <a:avLst/>
-          </a:prstGeom>
-          <a:solidFill>
-            <a:srgbClr val="D69A2D"/>
-          </a:solidFill>
-          <a:ln w="12700">
-            <a:solidFill>
-              <a:srgbClr val="D69A2D"/>
-            </a:solidFill>
-            <a:prstDash val="solid"/>
-          </a:ln>
-        </p:spPr>
-      </p:sp>
-      <p:sp>
-        <p:nvSpPr>
-          <p:cNvPr id="17" name="Shape 15"/>
-          <p:cNvSpPr/>
-          <p:nvPr/>
-        </p:nvSpPr>
-        <p:spPr>
-          <a:xfrm>
-            <a:off x="9454896" y="3319272"/>
-            <a:ext cx="256032" cy="566928"/>
-          </a:xfrm>
-          <a:prstGeom prst="rect">
-            <a:avLst/>
-          </a:prstGeom>
-          <a:solidFill>
-            <a:srgbClr val="6A4CA3"/>
-          </a:solidFill>
-          <a:ln w="12700">
-            <a:solidFill>
-              <a:srgbClr val="6A4CA3"/>
-            </a:solidFill>
-            <a:prstDash val="solid"/>
-          </a:ln>
-        </p:spPr>
-      </p:sp>
-      <p:sp>
-        <p:nvSpPr>
-          <p:cNvPr id="18" name="Shape 16"/>
-          <p:cNvSpPr/>
-          <p:nvPr/>
-        </p:nvSpPr>
-        <p:spPr>
-          <a:xfrm>
-            <a:off x="8019288" y="3886200"/>
-            <a:ext cx="2706624" cy="0"/>
-          </a:xfrm>
-          <a:prstGeom prst="line">
-            <a:avLst/>
-          </a:prstGeom>
-          <a:noFill/>
-          <a:ln w="15240">
-            <a:solidFill>
-              <a:srgbClr val="003A63"/>
-            </a:solidFill>
-            <a:prstDash val="solid"/>
-          </a:ln>
-        </p:spPr>
-      </p:sp>
-      <p:sp>
-        <p:nvSpPr>
-          <p:cNvPr id="19" name="Text 17"/>
-          <p:cNvSpPr/>
-          <p:nvPr/>
-        </p:nvSpPr>
-        <p:spPr>
-          <a:xfrm>
-            <a:off x="7863840" y="3017520"/>
-            <a:ext cx="3017520" cy="201168"/>
-          </a:xfrm>
-          <a:prstGeom prst="rect">
-            <a:avLst/>
-          </a:prstGeom>
-          <a:noFill/>
-          <a:ln/>
-        </p:spPr>
-        <p:txBody>
-          <a:bodyPr wrap="square" lIns="0" tIns="0" rIns="0" bIns="0" rtlCol="0" anchor="ctr"/>
-          <a:lstStyle/>
-          <a:p>
-            <a:pPr algn="ctr" indent="0" marL="0">
-              <a:buNone/>
-            </a:pPr>
-            <a:r>
-              <a:rPr lang="en-US" sz="1050" b="1" dirty="0">
-                <a:solidFill>
-                  <a:srgbClr val="003A63"/>
-                </a:solidFill>
-                <a:latin typeface="Aptos" pitchFamily="34" charset="0"/>
-                <a:ea typeface="Aptos" pitchFamily="34" charset="-122"/>
-                <a:cs typeface="Aptos" pitchFamily="34" charset="-120"/>
-              </a:rPr>
-              <a:t>Measure and monitor</a:t>
-            </a:r>
-            <a:endParaRPr lang="en-US" sz="1050" dirty="0"/>
-          </a:p>
-        </p:txBody>
-      </p:sp>
-      <p:sp>
-        <p:nvSpPr>
-          <p:cNvPr id="20" name="Shape 18"/>
           <p:cNvSpPr/>
           <p:nvPr/>
         </p:nvSpPr>
@@ -12625,7 +11865,7 @@
       </p:sp>
       <p:sp>
         <p:nvSpPr>
-          <p:cNvPr id="21" name="Text 19"/>
+          <p:cNvPr id="17" name="Text 15"/>
           <p:cNvSpPr/>
           <p:nvPr/>
         </p:nvSpPr>
@@ -12664,7 +11904,7 @@
       </p:sp>
       <p:sp>
         <p:nvSpPr>
-          <p:cNvPr id="22" name="Text 20"/>
+          <p:cNvPr id="18" name="Text 16"/>
           <p:cNvSpPr/>
           <p:nvPr/>
         </p:nvSpPr>
@@ -13172,13 +12412,11 @@
             </a:avLst>
           </a:prstGeom>
           <a:solidFill>
-            <a:srgbClr val="FFFFFF">
-              <a:alpha val="88000"/>
-            </a:srgbClr>
+            <a:srgbClr val="FFFFFF"/>
           </a:solidFill>
           <a:ln w="12700">
             <a:solidFill>
-              <a:srgbClr val="D6E8F2"/>
+              <a:srgbClr val="B9D7E6"/>
             </a:solidFill>
             <a:prstDash val="solid"/>
           </a:ln>
@@ -13186,169 +12424,112 @@
       </p:sp>
       <p:sp>
         <p:nvSpPr>
-          <p:cNvPr id="14" name="Shape 12"/>
-          <p:cNvSpPr/>
-          <p:nvPr/>
-        </p:nvSpPr>
-        <p:spPr>
-          <a:xfrm>
-            <a:off x="8138160" y="3474720"/>
-            <a:ext cx="256032" cy="411480"/>
-          </a:xfrm>
-          <a:prstGeom prst="rect">
-            <a:avLst/>
-          </a:prstGeom>
-          <a:solidFill>
-            <a:srgbClr val="0068B7"/>
-          </a:solidFill>
-          <a:ln w="12700">
-            <a:solidFill>
-              <a:srgbClr val="0068B7"/>
-            </a:solidFill>
-            <a:prstDash val="solid"/>
-          </a:ln>
-        </p:spPr>
-      </p:sp>
-      <p:sp>
-        <p:nvSpPr>
-          <p:cNvPr id="15" name="Shape 13"/>
-          <p:cNvSpPr/>
-          <p:nvPr/>
-        </p:nvSpPr>
-        <p:spPr>
-          <a:xfrm>
-            <a:off x="8577072" y="3172968"/>
-            <a:ext cx="256032" cy="713232"/>
-          </a:xfrm>
-          <a:prstGeom prst="rect">
-            <a:avLst/>
-          </a:prstGeom>
-          <a:solidFill>
-            <a:srgbClr val="2F8A28"/>
-          </a:solidFill>
-          <a:ln w="12700">
-            <a:solidFill>
-              <a:srgbClr val="2F8A28"/>
-            </a:solidFill>
-            <a:prstDash val="solid"/>
-          </a:ln>
-        </p:spPr>
+          <p:cNvPr id="14" name="Text 12"/>
+          <p:cNvSpPr/>
+          <p:nvPr/>
+        </p:nvSpPr>
+        <p:spPr>
+          <a:xfrm>
+            <a:off x="7799832" y="2935224"/>
+            <a:ext cx="3145536" cy="256032"/>
+          </a:xfrm>
+          <a:prstGeom prst="rect">
+            <a:avLst/>
+          </a:prstGeom>
+          <a:noFill/>
+          <a:ln/>
+        </p:spPr>
+        <p:txBody>
+          <a:bodyPr wrap="square" lIns="0" tIns="0" rIns="0" bIns="0" rtlCol="0" anchor="ctr"/>
+          <a:lstStyle/>
+          <a:p>
+            <a:pPr indent="0" marL="0">
+              <a:buNone/>
+            </a:pPr>
+            <a:r>
+              <a:rPr lang="en-US" sz="1300" b="1" dirty="0">
+                <a:solidFill>
+                  <a:srgbClr val="0068B7"/>
+                </a:solidFill>
+                <a:latin typeface="Aptos" pitchFamily="34" charset="0"/>
+                <a:ea typeface="Aptos" pitchFamily="34" charset="-122"/>
+                <a:cs typeface="Aptos" pitchFamily="34" charset="-120"/>
+              </a:rPr>
+              <a:t>Concept checkpoints</a:t>
+            </a:r>
+            <a:endParaRPr lang="en-US" sz="1300" dirty="0"/>
+          </a:p>
+        </p:txBody>
+      </p:sp>
+      <p:sp>
+        <p:nvSpPr>
+          <p:cNvPr id="15" name="Text 13"/>
+          <p:cNvSpPr/>
+          <p:nvPr/>
+        </p:nvSpPr>
+        <p:spPr>
+          <a:xfrm>
+            <a:off x="7818120" y="3300984"/>
+            <a:ext cx="3090672" cy="877824"/>
+          </a:xfrm>
+          <a:prstGeom prst="rect">
+            <a:avLst/>
+          </a:prstGeom>
+          <a:noFill/>
+          <a:ln/>
+        </p:spPr>
+        <p:txBody>
+          <a:bodyPr wrap="square" lIns="254" tIns="254" rIns="254" bIns="254" rtlCol="0" anchor="t">
+            <a:normAutofit/>
+          </a:bodyPr>
+          <a:lstStyle/>
+          <a:p>
+            <a:r>
+              <a:rPr lang="en-US" sz="1380" dirty="0">
+                <a:solidFill>
+                  <a:srgbClr val="17364A"/>
+                </a:solidFill>
+                <a:latin typeface="Aptos" pitchFamily="34" charset="0"/>
+                <a:ea typeface="Aptos" pitchFamily="34" charset="-122"/>
+                <a:cs typeface="Aptos" pitchFamily="34" charset="-120"/>
+              </a:rPr>
+              <a:t>1.</a:t>
+            </a:r>
+            <a:endParaRPr lang="en-US" sz="1380" dirty="0"/>
+          </a:p>
+          <a:p>
+            <a:r>
+              <a:rPr lang="en-US" sz="1380" dirty="0">
+                <a:solidFill>
+                  <a:srgbClr val="17364A"/>
+                </a:solidFill>
+                <a:latin typeface="Aptos" pitchFamily="34" charset="0"/>
+                <a:ea typeface="Aptos" pitchFamily="34" charset="-122"/>
+                <a:cs typeface="Aptos" pitchFamily="34" charset="-120"/>
+              </a:rPr>
+              <a:t>Why is terminology mapping important for AI-supported surveillance?</a:t>
+            </a:r>
+            <a:endParaRPr lang="en-US" sz="1380" dirty="0"/>
+          </a:p>
+          <a:p>
+            <a:r>
+              <a:rPr lang="en-US" sz="1380" dirty="0">
+                <a:solidFill>
+                  <a:srgbClr val="17364A"/>
+                </a:solidFill>
+                <a:latin typeface="Aptos" pitchFamily="34" charset="0"/>
+                <a:ea typeface="Aptos" pitchFamily="34" charset="-122"/>
+                <a:cs typeface="Aptos" pitchFamily="34" charset="-120"/>
+              </a:rPr>
+              <a:t>2.</a:t>
+            </a:r>
+            <a:endParaRPr lang="en-US" sz="1380" dirty="0"/>
+          </a:p>
+        </p:txBody>
       </p:sp>
       <p:sp>
         <p:nvSpPr>
           <p:cNvPr id="16" name="Shape 14"/>
-          <p:cNvSpPr/>
-          <p:nvPr/>
-        </p:nvSpPr>
-        <p:spPr>
-          <a:xfrm>
-            <a:off x="9015984" y="2880360"/>
-            <a:ext cx="256032" cy="1005840"/>
-          </a:xfrm>
-          <a:prstGeom prst="rect">
-            <a:avLst/>
-          </a:prstGeom>
-          <a:solidFill>
-            <a:srgbClr val="D69A2D"/>
-          </a:solidFill>
-          <a:ln w="12700">
-            <a:solidFill>
-              <a:srgbClr val="D69A2D"/>
-            </a:solidFill>
-            <a:prstDash val="solid"/>
-          </a:ln>
-        </p:spPr>
-      </p:sp>
-      <p:sp>
-        <p:nvSpPr>
-          <p:cNvPr id="17" name="Shape 15"/>
-          <p:cNvSpPr/>
-          <p:nvPr/>
-        </p:nvSpPr>
-        <p:spPr>
-          <a:xfrm>
-            <a:off x="9454896" y="3319272"/>
-            <a:ext cx="256032" cy="566928"/>
-          </a:xfrm>
-          <a:prstGeom prst="rect">
-            <a:avLst/>
-          </a:prstGeom>
-          <a:solidFill>
-            <a:srgbClr val="6A4CA3"/>
-          </a:solidFill>
-          <a:ln w="12700">
-            <a:solidFill>
-              <a:srgbClr val="6A4CA3"/>
-            </a:solidFill>
-            <a:prstDash val="solid"/>
-          </a:ln>
-        </p:spPr>
-      </p:sp>
-      <p:sp>
-        <p:nvSpPr>
-          <p:cNvPr id="18" name="Shape 16"/>
-          <p:cNvSpPr/>
-          <p:nvPr/>
-        </p:nvSpPr>
-        <p:spPr>
-          <a:xfrm>
-            <a:off x="8019288" y="3886200"/>
-            <a:ext cx="2706624" cy="0"/>
-          </a:xfrm>
-          <a:prstGeom prst="line">
-            <a:avLst/>
-          </a:prstGeom>
-          <a:noFill/>
-          <a:ln w="15240">
-            <a:solidFill>
-              <a:srgbClr val="003A63"/>
-            </a:solidFill>
-            <a:prstDash val="solid"/>
-          </a:ln>
-        </p:spPr>
-      </p:sp>
-      <p:sp>
-        <p:nvSpPr>
-          <p:cNvPr id="19" name="Text 17"/>
-          <p:cNvSpPr/>
-          <p:nvPr/>
-        </p:nvSpPr>
-        <p:spPr>
-          <a:xfrm>
-            <a:off x="7863840" y="3017520"/>
-            <a:ext cx="3017520" cy="201168"/>
-          </a:xfrm>
-          <a:prstGeom prst="rect">
-            <a:avLst/>
-          </a:prstGeom>
-          <a:noFill/>
-          <a:ln/>
-        </p:spPr>
-        <p:txBody>
-          <a:bodyPr wrap="square" lIns="0" tIns="0" rIns="0" bIns="0" rtlCol="0" anchor="ctr"/>
-          <a:lstStyle/>
-          <a:p>
-            <a:pPr algn="ctr" indent="0" marL="0">
-              <a:buNone/>
-            </a:pPr>
-            <a:r>
-              <a:rPr lang="en-US" sz="1050" b="1" dirty="0">
-                <a:solidFill>
-                  <a:srgbClr val="003A63"/>
-                </a:solidFill>
-                <a:latin typeface="Aptos" pitchFamily="34" charset="0"/>
-                <a:ea typeface="Aptos" pitchFamily="34" charset="-122"/>
-                <a:cs typeface="Aptos" pitchFamily="34" charset="-120"/>
-              </a:rPr>
-              <a:t>Measure and monitor</a:t>
-            </a:r>
-            <a:endParaRPr lang="en-US" sz="1050" dirty="0"/>
-          </a:p>
-        </p:txBody>
-      </p:sp>
-      <p:sp>
-        <p:nvSpPr>
-          <p:cNvPr id="20" name="Shape 18"/>
           <p:cNvSpPr/>
           <p:nvPr/>
         </p:nvSpPr>
@@ -13375,7 +12556,7 @@
       </p:sp>
       <p:sp>
         <p:nvSpPr>
-          <p:cNvPr id="21" name="Text 19"/>
+          <p:cNvPr id="17" name="Text 15"/>
           <p:cNvSpPr/>
           <p:nvPr/>
         </p:nvSpPr>
@@ -13414,7 +12595,7 @@
       </p:sp>
       <p:sp>
         <p:nvSpPr>
-          <p:cNvPr id="22" name="Text 20"/>
+          <p:cNvPr id="18" name="Text 16"/>
           <p:cNvSpPr/>
           <p:nvPr/>
         </p:nvSpPr>
@@ -13922,13 +13103,11 @@
             </a:avLst>
           </a:prstGeom>
           <a:solidFill>
-            <a:srgbClr val="FFFFFF">
-              <a:alpha val="88000"/>
-            </a:srgbClr>
+            <a:srgbClr val="FFFFFF"/>
           </a:solidFill>
           <a:ln w="12700">
             <a:solidFill>
-              <a:srgbClr val="D6E8F2"/>
+              <a:srgbClr val="B9D7E6"/>
             </a:solidFill>
             <a:prstDash val="solid"/>
           </a:ln>
@@ -13936,169 +13115,112 @@
       </p:sp>
       <p:sp>
         <p:nvSpPr>
-          <p:cNvPr id="14" name="Shape 12"/>
-          <p:cNvSpPr/>
-          <p:nvPr/>
-        </p:nvSpPr>
-        <p:spPr>
-          <a:xfrm>
-            <a:off x="8138160" y="3474720"/>
-            <a:ext cx="256032" cy="411480"/>
-          </a:xfrm>
-          <a:prstGeom prst="rect">
-            <a:avLst/>
-          </a:prstGeom>
-          <a:solidFill>
-            <a:srgbClr val="0068B7"/>
-          </a:solidFill>
-          <a:ln w="12700">
-            <a:solidFill>
-              <a:srgbClr val="0068B7"/>
-            </a:solidFill>
-            <a:prstDash val="solid"/>
-          </a:ln>
-        </p:spPr>
-      </p:sp>
-      <p:sp>
-        <p:nvSpPr>
-          <p:cNvPr id="15" name="Shape 13"/>
-          <p:cNvSpPr/>
-          <p:nvPr/>
-        </p:nvSpPr>
-        <p:spPr>
-          <a:xfrm>
-            <a:off x="8577072" y="3172968"/>
-            <a:ext cx="256032" cy="713232"/>
-          </a:xfrm>
-          <a:prstGeom prst="rect">
-            <a:avLst/>
-          </a:prstGeom>
-          <a:solidFill>
-            <a:srgbClr val="2F8A28"/>
-          </a:solidFill>
-          <a:ln w="12700">
-            <a:solidFill>
-              <a:srgbClr val="2F8A28"/>
-            </a:solidFill>
-            <a:prstDash val="solid"/>
-          </a:ln>
-        </p:spPr>
+          <p:cNvPr id="14" name="Text 12"/>
+          <p:cNvSpPr/>
+          <p:nvPr/>
+        </p:nvSpPr>
+        <p:spPr>
+          <a:xfrm>
+            <a:off x="7799832" y="2935224"/>
+            <a:ext cx="3145536" cy="256032"/>
+          </a:xfrm>
+          <a:prstGeom prst="rect">
+            <a:avLst/>
+          </a:prstGeom>
+          <a:noFill/>
+          <a:ln/>
+        </p:spPr>
+        <p:txBody>
+          <a:bodyPr wrap="square" lIns="0" tIns="0" rIns="0" bIns="0" rtlCol="0" anchor="ctr"/>
+          <a:lstStyle/>
+          <a:p>
+            <a:pPr indent="0" marL="0">
+              <a:buNone/>
+            </a:pPr>
+            <a:r>
+              <a:rPr lang="en-US" sz="1300" b="1" dirty="0">
+                <a:solidFill>
+                  <a:srgbClr val="0068B7"/>
+                </a:solidFill>
+                <a:latin typeface="Aptos" pitchFamily="34" charset="0"/>
+                <a:ea typeface="Aptos" pitchFamily="34" charset="-122"/>
+                <a:cs typeface="Aptos" pitchFamily="34" charset="-120"/>
+              </a:rPr>
+              <a:t>Concept checkpoints</a:t>
+            </a:r>
+            <a:endParaRPr lang="en-US" sz="1300" dirty="0"/>
+          </a:p>
+        </p:txBody>
+      </p:sp>
+      <p:sp>
+        <p:nvSpPr>
+          <p:cNvPr id="15" name="Text 13"/>
+          <p:cNvSpPr/>
+          <p:nvPr/>
+        </p:nvSpPr>
+        <p:spPr>
+          <a:xfrm>
+            <a:off x="7818120" y="3300984"/>
+            <a:ext cx="3090672" cy="877824"/>
+          </a:xfrm>
+          <a:prstGeom prst="rect">
+            <a:avLst/>
+          </a:prstGeom>
+          <a:noFill/>
+          <a:ln/>
+        </p:spPr>
+        <p:txBody>
+          <a:bodyPr wrap="square" lIns="254" tIns="254" rIns="254" bIns="254" rtlCol="0" anchor="t">
+            <a:normAutofit/>
+          </a:bodyPr>
+          <a:lstStyle/>
+          <a:p>
+            <a:r>
+              <a:rPr lang="en-US" sz="1380" dirty="0">
+                <a:solidFill>
+                  <a:srgbClr val="17364A"/>
+                </a:solidFill>
+                <a:latin typeface="Aptos" pitchFamily="34" charset="0"/>
+                <a:ea typeface="Aptos" pitchFamily="34" charset="-122"/>
+                <a:cs typeface="Aptos" pitchFamily="34" charset="-120"/>
+              </a:rPr>
+              <a:t>CDC PHIN VADS</a:t>
+            </a:r>
+            <a:endParaRPr lang="en-US" sz="1380" dirty="0"/>
+          </a:p>
+          <a:p>
+            <a:r>
+              <a:rPr lang="en-US" sz="1380" dirty="0">
+                <a:solidFill>
+                  <a:srgbClr val="17364A"/>
+                </a:solidFill>
+                <a:latin typeface="Aptos" pitchFamily="34" charset="0"/>
+                <a:ea typeface="Aptos" pitchFamily="34" charset="-122"/>
+                <a:cs typeface="Aptos" pitchFamily="34" charset="-120"/>
+              </a:rPr>
+              <a:t>Reportable Condition Mapping Table resources</a:t>
+            </a:r>
+            <a:endParaRPr lang="en-US" sz="1380" dirty="0"/>
+          </a:p>
+          <a:p>
+            <a:r>
+              <a:rPr lang="en-US" sz="1380" dirty="0">
+                <a:solidFill>
+                  <a:srgbClr val="17364A"/>
+                </a:solidFill>
+                <a:latin typeface="Aptos" pitchFamily="34" charset="0"/>
+                <a:ea typeface="Aptos" pitchFamily="34" charset="-122"/>
+                <a:cs typeface="Aptos" pitchFamily="34" charset="-120"/>
+              </a:rPr>
+              <a:t>APHL laboratory informatics resources</a:t>
+            </a:r>
+            <a:endParaRPr lang="en-US" sz="1380" dirty="0"/>
+          </a:p>
+        </p:txBody>
       </p:sp>
       <p:sp>
         <p:nvSpPr>
           <p:cNvPr id="16" name="Shape 14"/>
-          <p:cNvSpPr/>
-          <p:nvPr/>
-        </p:nvSpPr>
-        <p:spPr>
-          <a:xfrm>
-            <a:off x="9015984" y="2880360"/>
-            <a:ext cx="256032" cy="1005840"/>
-          </a:xfrm>
-          <a:prstGeom prst="rect">
-            <a:avLst/>
-          </a:prstGeom>
-          <a:solidFill>
-            <a:srgbClr val="D69A2D"/>
-          </a:solidFill>
-          <a:ln w="12700">
-            <a:solidFill>
-              <a:srgbClr val="D69A2D"/>
-            </a:solidFill>
-            <a:prstDash val="solid"/>
-          </a:ln>
-        </p:spPr>
-      </p:sp>
-      <p:sp>
-        <p:nvSpPr>
-          <p:cNvPr id="17" name="Shape 15"/>
-          <p:cNvSpPr/>
-          <p:nvPr/>
-        </p:nvSpPr>
-        <p:spPr>
-          <a:xfrm>
-            <a:off x="9454896" y="3319272"/>
-            <a:ext cx="256032" cy="566928"/>
-          </a:xfrm>
-          <a:prstGeom prst="rect">
-            <a:avLst/>
-          </a:prstGeom>
-          <a:solidFill>
-            <a:srgbClr val="6A4CA3"/>
-          </a:solidFill>
-          <a:ln w="12700">
-            <a:solidFill>
-              <a:srgbClr val="6A4CA3"/>
-            </a:solidFill>
-            <a:prstDash val="solid"/>
-          </a:ln>
-        </p:spPr>
-      </p:sp>
-      <p:sp>
-        <p:nvSpPr>
-          <p:cNvPr id="18" name="Shape 16"/>
-          <p:cNvSpPr/>
-          <p:nvPr/>
-        </p:nvSpPr>
-        <p:spPr>
-          <a:xfrm>
-            <a:off x="8019288" y="3886200"/>
-            <a:ext cx="2706624" cy="0"/>
-          </a:xfrm>
-          <a:prstGeom prst="line">
-            <a:avLst/>
-          </a:prstGeom>
-          <a:noFill/>
-          <a:ln w="15240">
-            <a:solidFill>
-              <a:srgbClr val="003A63"/>
-            </a:solidFill>
-            <a:prstDash val="solid"/>
-          </a:ln>
-        </p:spPr>
-      </p:sp>
-      <p:sp>
-        <p:nvSpPr>
-          <p:cNvPr id="19" name="Text 17"/>
-          <p:cNvSpPr/>
-          <p:nvPr/>
-        </p:nvSpPr>
-        <p:spPr>
-          <a:xfrm>
-            <a:off x="7863840" y="3017520"/>
-            <a:ext cx="3017520" cy="201168"/>
-          </a:xfrm>
-          <a:prstGeom prst="rect">
-            <a:avLst/>
-          </a:prstGeom>
-          <a:noFill/>
-          <a:ln/>
-        </p:spPr>
-        <p:txBody>
-          <a:bodyPr wrap="square" lIns="0" tIns="0" rIns="0" bIns="0" rtlCol="0" anchor="ctr"/>
-          <a:lstStyle/>
-          <a:p>
-            <a:pPr algn="ctr" indent="0" marL="0">
-              <a:buNone/>
-            </a:pPr>
-            <a:r>
-              <a:rPr lang="en-US" sz="1050" b="1" dirty="0">
-                <a:solidFill>
-                  <a:srgbClr val="003A63"/>
-                </a:solidFill>
-                <a:latin typeface="Aptos" pitchFamily="34" charset="0"/>
-                <a:ea typeface="Aptos" pitchFamily="34" charset="-122"/>
-                <a:cs typeface="Aptos" pitchFamily="34" charset="-120"/>
-              </a:rPr>
-              <a:t>Measure and monitor</a:t>
-            </a:r>
-            <a:endParaRPr lang="en-US" sz="1050" dirty="0"/>
-          </a:p>
-        </p:txBody>
-      </p:sp>
-      <p:sp>
-        <p:nvSpPr>
-          <p:cNvPr id="20" name="Shape 18"/>
           <p:cNvSpPr/>
           <p:nvPr/>
         </p:nvSpPr>
@@ -14125,7 +13247,7 @@
       </p:sp>
       <p:sp>
         <p:nvSpPr>
-          <p:cNvPr id="21" name="Text 19"/>
+          <p:cNvPr id="17" name="Text 15"/>
           <p:cNvSpPr/>
           <p:nvPr/>
         </p:nvSpPr>
@@ -14164,7 +13286,7 @@
       </p:sp>
       <p:sp>
         <p:nvSpPr>
-          <p:cNvPr id="22" name="Text 20"/>
+          <p:cNvPr id="18" name="Text 16"/>
           <p:cNvSpPr/>
           <p:nvPr/>
         </p:nvSpPr>
@@ -14677,20 +13799,20 @@
         </p:nvSpPr>
         <p:spPr>
           <a:xfrm>
-            <a:off x="7818120" y="3977640"/>
-            <a:ext cx="972312" cy="749808"/>
+            <a:off x="8046720" y="3794760"/>
+            <a:ext cx="3063240" cy="1600200"/>
           </a:xfrm>
           <a:prstGeom prst="roundRect">
             <a:avLst>
-              <a:gd name="adj" fmla="val 14634"/>
+              <a:gd name="adj" fmla="val 6857"/>
             </a:avLst>
           </a:prstGeom>
           <a:solidFill>
-            <a:srgbClr val="0068B7"/>
+            <a:srgbClr val="FFFFFF"/>
           </a:solidFill>
           <a:ln w="12700">
             <a:solidFill>
-              <a:srgbClr val="0068B7"/>
+              <a:srgbClr val="B9D7E6"/>
             </a:solidFill>
             <a:prstDash val="solid"/>
           </a:ln>
@@ -14704,172 +13826,100 @@
         </p:nvSpPr>
         <p:spPr>
           <a:xfrm>
-            <a:off x="7891272" y="4169664"/>
-            <a:ext cx="826008" cy="310896"/>
-          </a:xfrm>
-          <a:prstGeom prst="rect">
-            <a:avLst/>
-          </a:prstGeom>
-          <a:noFill/>
-          <a:ln/>
-        </p:spPr>
-        <p:txBody>
-          <a:bodyPr wrap="square" lIns="0" tIns="0" rIns="0" bIns="0" rtlCol="0" anchor="ctr">
+            <a:off x="8211312" y="3941064"/>
+            <a:ext cx="2734056" cy="256032"/>
+          </a:xfrm>
+          <a:prstGeom prst="rect">
+            <a:avLst/>
+          </a:prstGeom>
+          <a:noFill/>
+          <a:ln/>
+        </p:spPr>
+        <p:txBody>
+          <a:bodyPr wrap="square" lIns="0" tIns="0" rIns="0" bIns="0" rtlCol="0" anchor="ctr"/>
+          <a:lstStyle/>
+          <a:p>
+            <a:pPr indent="0" marL="0">
+              <a:buNone/>
+            </a:pPr>
+            <a:r>
+              <a:rPr lang="en-US" sz="1300" b="1" dirty="0">
+                <a:solidFill>
+                  <a:srgbClr val="0068B7"/>
+                </a:solidFill>
+                <a:latin typeface="Aptos" pitchFamily="34" charset="0"/>
+                <a:ea typeface="Aptos" pitchFamily="34" charset="-122"/>
+                <a:cs typeface="Aptos" pitchFamily="34" charset="-120"/>
+              </a:rPr>
+              <a:t>Use the play links to</a:t>
+            </a:r>
+            <a:endParaRPr lang="en-US" sz="1300" dirty="0"/>
+          </a:p>
+        </p:txBody>
+      </p:sp>
+      <p:sp>
+        <p:nvSpPr>
+          <p:cNvPr id="15" name="Text 13"/>
+          <p:cNvSpPr/>
+          <p:nvPr/>
+        </p:nvSpPr>
+        <p:spPr>
+          <a:xfrm>
+            <a:off x="8229600" y="4306824"/>
+            <a:ext cx="2679192" cy="941832"/>
+          </a:xfrm>
+          <a:prstGeom prst="rect">
+            <a:avLst/>
+          </a:prstGeom>
+          <a:noFill/>
+          <a:ln/>
+        </p:spPr>
+        <p:txBody>
+          <a:bodyPr wrap="square" lIns="254" tIns="254" rIns="254" bIns="254" rtlCol="0" anchor="t">
             <a:normAutofit/>
           </a:bodyPr>
           <a:lstStyle/>
           <a:p>
-            <a:pPr algn="ctr" indent="0" marL="0">
-              <a:buNone/>
-            </a:pPr>
-            <a:r>
-              <a:rPr lang="en-US" sz="1500" b="1" dirty="0">
-                <a:solidFill>
-                  <a:srgbClr val="FFFFFF"/>
-                </a:solidFill>
-                <a:latin typeface="Aptos" pitchFamily="34" charset="0"/>
-                <a:ea typeface="Aptos" pitchFamily="34" charset="-122"/>
-                <a:cs typeface="Aptos" pitchFamily="34" charset="-120"/>
-              </a:rPr>
-              <a:t>Lesson</a:t>
-            </a:r>
-            <a:endParaRPr lang="en-US" sz="1500" dirty="0"/>
-          </a:p>
-        </p:txBody>
-      </p:sp>
-      <p:sp>
-        <p:nvSpPr>
-          <p:cNvPr id="15" name="Shape 13"/>
-          <p:cNvSpPr/>
-          <p:nvPr/>
-        </p:nvSpPr>
-        <p:spPr>
-          <a:xfrm>
-            <a:off x="9046464" y="3977640"/>
-            <a:ext cx="972312" cy="749808"/>
-          </a:xfrm>
-          <a:prstGeom prst="roundRect">
-            <a:avLst>
-              <a:gd name="adj" fmla="val 14634"/>
-            </a:avLst>
-          </a:prstGeom>
-          <a:solidFill>
-            <a:srgbClr val="2F8A28"/>
-          </a:solidFill>
-          <a:ln w="12700">
-            <a:solidFill>
-              <a:srgbClr val="2F8A28"/>
-            </a:solidFill>
-            <a:prstDash val="solid"/>
-          </a:ln>
-        </p:spPr>
-      </p:sp>
-      <p:sp>
-        <p:nvSpPr>
-          <p:cNvPr id="16" name="Text 14"/>
-          <p:cNvSpPr/>
-          <p:nvPr/>
-        </p:nvSpPr>
-        <p:spPr>
-          <a:xfrm>
-            <a:off x="9119616" y="4169664"/>
-            <a:ext cx="826008" cy="310896"/>
-          </a:xfrm>
-          <a:prstGeom prst="rect">
-            <a:avLst/>
-          </a:prstGeom>
-          <a:noFill/>
-          <a:ln/>
-        </p:spPr>
-        <p:txBody>
-          <a:bodyPr wrap="square" lIns="0" tIns="0" rIns="0" bIns="0" rtlCol="0" anchor="ctr">
-            <a:normAutofit/>
-          </a:bodyPr>
-          <a:lstStyle/>
-          <a:p>
-            <a:pPr algn="ctr" indent="0" marL="0">
-              <a:buNone/>
-            </a:pPr>
-            <a:r>
-              <a:rPr lang="en-US" sz="1500" b="1" dirty="0">
-                <a:solidFill>
-                  <a:srgbClr val="FFFFFF"/>
-                </a:solidFill>
-                <a:latin typeface="Aptos" pitchFamily="34" charset="0"/>
-                <a:ea typeface="Aptos" pitchFamily="34" charset="-122"/>
-                <a:cs typeface="Aptos" pitchFamily="34" charset="-120"/>
-              </a:rPr>
-              <a:t>Plays</a:t>
-            </a:r>
-            <a:endParaRPr lang="en-US" sz="1500" dirty="0"/>
-          </a:p>
-        </p:txBody>
-      </p:sp>
-      <p:sp>
-        <p:nvSpPr>
-          <p:cNvPr id="17" name="Shape 15"/>
-          <p:cNvSpPr/>
-          <p:nvPr/>
-        </p:nvSpPr>
-        <p:spPr>
-          <a:xfrm>
-            <a:off x="10274808" y="3977640"/>
-            <a:ext cx="972312" cy="749808"/>
-          </a:xfrm>
-          <a:prstGeom prst="roundRect">
-            <a:avLst>
-              <a:gd name="adj" fmla="val 14634"/>
-            </a:avLst>
-          </a:prstGeom>
-          <a:solidFill>
-            <a:srgbClr val="6A4CA3"/>
-          </a:solidFill>
-          <a:ln w="12700">
-            <a:solidFill>
-              <a:srgbClr val="6A4CA3"/>
-            </a:solidFill>
-            <a:prstDash val="solid"/>
-          </a:ln>
-        </p:spPr>
-      </p:sp>
-      <p:sp>
-        <p:nvSpPr>
-          <p:cNvPr id="18" name="Text 16"/>
-          <p:cNvSpPr/>
-          <p:nvPr/>
-        </p:nvSpPr>
-        <p:spPr>
-          <a:xfrm>
-            <a:off x="10347960" y="4169664"/>
-            <a:ext cx="826008" cy="310896"/>
-          </a:xfrm>
-          <a:prstGeom prst="rect">
-            <a:avLst/>
-          </a:prstGeom>
-          <a:noFill/>
-          <a:ln/>
-        </p:spPr>
-        <p:txBody>
-          <a:bodyPr wrap="square" lIns="0" tIns="0" rIns="0" bIns="0" rtlCol="0" anchor="ctr">
-            <a:normAutofit/>
-          </a:bodyPr>
-          <a:lstStyle/>
-          <a:p>
-            <a:pPr algn="ctr" indent="0" marL="0">
-              <a:buNone/>
-            </a:pPr>
-            <a:r>
-              <a:rPr lang="en-US" sz="1500" b="1" dirty="0">
-                <a:solidFill>
-                  <a:srgbClr val="FFFFFF"/>
-                </a:solidFill>
-                <a:latin typeface="Aptos" pitchFamily="34" charset="0"/>
-                <a:ea typeface="Aptos" pitchFamily="34" charset="-122"/>
-                <a:cs typeface="Aptos" pitchFamily="34" charset="-120"/>
-              </a:rPr>
-              <a:t>Action</a:t>
-            </a:r>
-            <a:endParaRPr lang="en-US" sz="1500" dirty="0"/>
+            <a:r>
+              <a:rPr lang="en-US" sz="1380" dirty="0">
+                <a:solidFill>
+                  <a:srgbClr val="17364A"/>
+                </a:solidFill>
+                <a:latin typeface="Aptos" pitchFamily="34" charset="0"/>
+                <a:ea typeface="Aptos" pitchFamily="34" charset="-122"/>
+                <a:cs typeface="Aptos" pitchFamily="34" charset="-120"/>
+              </a:rPr>
+              <a:t>Locate the decision point in the playbook sequence.</a:t>
+            </a:r>
+            <a:endParaRPr lang="en-US" sz="1380" dirty="0"/>
+          </a:p>
+          <a:p>
+            <a:r>
+              <a:rPr lang="en-US" sz="1380" dirty="0">
+                <a:solidFill>
+                  <a:srgbClr val="17364A"/>
+                </a:solidFill>
+                <a:latin typeface="Aptos" pitchFamily="34" charset="0"/>
+                <a:ea typeface="Aptos" pitchFamily="34" charset="-122"/>
+                <a:cs typeface="Aptos" pitchFamily="34" charset="-120"/>
+              </a:rPr>
+              <a:t>Identify who should participate in the work.</a:t>
+            </a:r>
+            <a:endParaRPr lang="en-US" sz="1380" dirty="0"/>
+          </a:p>
+          <a:p>
+            <a:r>
+              <a:rPr lang="en-US" sz="1380" dirty="0">
+                <a:solidFill>
+                  <a:srgbClr val="17364A"/>
+                </a:solidFill>
+                <a:latin typeface="Aptos" pitchFamily="34" charset="0"/>
+                <a:ea typeface="Aptos" pitchFamily="34" charset="-122"/>
+                <a:cs typeface="Aptos" pitchFamily="34" charset="-120"/>
+              </a:rPr>
+              <a:t>Document the review, approval, or implementation step.</a:t>
+            </a:r>
+            <a:endParaRPr lang="en-US" sz="1380" dirty="0"/>
           </a:p>
         </p:txBody>
       </p:sp>
@@ -15347,20 +14397,20 @@
         </p:nvSpPr>
         <p:spPr>
           <a:xfrm>
-            <a:off x="7818120" y="3977640"/>
-            <a:ext cx="972312" cy="749808"/>
+            <a:off x="8046720" y="3794760"/>
+            <a:ext cx="3063240" cy="1600200"/>
           </a:xfrm>
           <a:prstGeom prst="roundRect">
             <a:avLst>
-              <a:gd name="adj" fmla="val 14634"/>
+              <a:gd name="adj" fmla="val 6857"/>
             </a:avLst>
           </a:prstGeom>
           <a:solidFill>
-            <a:srgbClr val="0068B7"/>
+            <a:srgbClr val="FFFFFF"/>
           </a:solidFill>
           <a:ln w="12700">
             <a:solidFill>
-              <a:srgbClr val="0068B7"/>
+              <a:srgbClr val="B9D7E6"/>
             </a:solidFill>
             <a:prstDash val="solid"/>
           </a:ln>
@@ -15374,172 +14424,100 @@
         </p:nvSpPr>
         <p:spPr>
           <a:xfrm>
-            <a:off x="7891272" y="4169664"/>
-            <a:ext cx="826008" cy="310896"/>
-          </a:xfrm>
-          <a:prstGeom prst="rect">
-            <a:avLst/>
-          </a:prstGeom>
-          <a:noFill/>
-          <a:ln/>
-        </p:spPr>
-        <p:txBody>
-          <a:bodyPr wrap="square" lIns="0" tIns="0" rIns="0" bIns="0" rtlCol="0" anchor="ctr">
+            <a:off x="8211312" y="3941064"/>
+            <a:ext cx="2734056" cy="256032"/>
+          </a:xfrm>
+          <a:prstGeom prst="rect">
+            <a:avLst/>
+          </a:prstGeom>
+          <a:noFill/>
+          <a:ln/>
+        </p:spPr>
+        <p:txBody>
+          <a:bodyPr wrap="square" lIns="0" tIns="0" rIns="0" bIns="0" rtlCol="0" anchor="ctr"/>
+          <a:lstStyle/>
+          <a:p>
+            <a:pPr indent="0" marL="0">
+              <a:buNone/>
+            </a:pPr>
+            <a:r>
+              <a:rPr lang="en-US" sz="1300" b="1" dirty="0">
+                <a:solidFill>
+                  <a:srgbClr val="0068B7"/>
+                </a:solidFill>
+                <a:latin typeface="Aptos" pitchFamily="34" charset="0"/>
+                <a:ea typeface="Aptos" pitchFamily="34" charset="-122"/>
+                <a:cs typeface="Aptos" pitchFamily="34" charset="-120"/>
+              </a:rPr>
+              <a:t>Tool selection cues</a:t>
+            </a:r>
+            <a:endParaRPr lang="en-US" sz="1300" dirty="0"/>
+          </a:p>
+        </p:txBody>
+      </p:sp>
+      <p:sp>
+        <p:nvSpPr>
+          <p:cNvPr id="15" name="Text 13"/>
+          <p:cNvSpPr/>
+          <p:nvPr/>
+        </p:nvSpPr>
+        <p:spPr>
+          <a:xfrm>
+            <a:off x="8229600" y="4306824"/>
+            <a:ext cx="2679192" cy="941832"/>
+          </a:xfrm>
+          <a:prstGeom prst="rect">
+            <a:avLst/>
+          </a:prstGeom>
+          <a:noFill/>
+          <a:ln/>
+        </p:spPr>
+        <p:txBody>
+          <a:bodyPr wrap="square" lIns="254" tIns="254" rIns="254" bIns="254" rtlCol="0" anchor="t">
             <a:normAutofit/>
           </a:bodyPr>
           <a:lstStyle/>
           <a:p>
-            <a:pPr algn="ctr" indent="0" marL="0">
-              <a:buNone/>
-            </a:pPr>
-            <a:r>
-              <a:rPr lang="en-US" sz="1500" b="1" dirty="0">
-                <a:solidFill>
-                  <a:srgbClr val="FFFFFF"/>
-                </a:solidFill>
-                <a:latin typeface="Aptos" pitchFamily="34" charset="0"/>
-                <a:ea typeface="Aptos" pitchFamily="34" charset="-122"/>
-                <a:cs typeface="Aptos" pitchFamily="34" charset="-120"/>
-              </a:rPr>
-              <a:t>Concept</a:t>
-            </a:r>
-            <a:endParaRPr lang="en-US" sz="1500" dirty="0"/>
-          </a:p>
-        </p:txBody>
-      </p:sp>
-      <p:sp>
-        <p:nvSpPr>
-          <p:cNvPr id="15" name="Shape 13"/>
-          <p:cNvSpPr/>
-          <p:nvPr/>
-        </p:nvSpPr>
-        <p:spPr>
-          <a:xfrm>
-            <a:off x="9046464" y="3977640"/>
-            <a:ext cx="972312" cy="749808"/>
-          </a:xfrm>
-          <a:prstGeom prst="roundRect">
-            <a:avLst>
-              <a:gd name="adj" fmla="val 14634"/>
-            </a:avLst>
-          </a:prstGeom>
-          <a:solidFill>
-            <a:srgbClr val="2F8A28"/>
-          </a:solidFill>
-          <a:ln w="12700">
-            <a:solidFill>
-              <a:srgbClr val="2F8A28"/>
-            </a:solidFill>
-            <a:prstDash val="solid"/>
-          </a:ln>
-        </p:spPr>
-      </p:sp>
-      <p:sp>
-        <p:nvSpPr>
-          <p:cNvPr id="16" name="Text 14"/>
-          <p:cNvSpPr/>
-          <p:nvPr/>
-        </p:nvSpPr>
-        <p:spPr>
-          <a:xfrm>
-            <a:off x="9119616" y="4169664"/>
-            <a:ext cx="826008" cy="310896"/>
-          </a:xfrm>
-          <a:prstGeom prst="rect">
-            <a:avLst/>
-          </a:prstGeom>
-          <a:noFill/>
-          <a:ln/>
-        </p:spPr>
-        <p:txBody>
-          <a:bodyPr wrap="square" lIns="0" tIns="0" rIns="0" bIns="0" rtlCol="0" anchor="ctr">
-            <a:normAutofit/>
-          </a:bodyPr>
-          <a:lstStyle/>
-          <a:p>
-            <a:pPr algn="ctr" indent="0" marL="0">
-              <a:buNone/>
-            </a:pPr>
-            <a:r>
-              <a:rPr lang="en-US" sz="1500" b="1" dirty="0">
-                <a:solidFill>
-                  <a:srgbClr val="FFFFFF"/>
-                </a:solidFill>
-                <a:latin typeface="Aptos" pitchFamily="34" charset="0"/>
-                <a:ea typeface="Aptos" pitchFamily="34" charset="-122"/>
-                <a:cs typeface="Aptos" pitchFamily="34" charset="-120"/>
-              </a:rPr>
-              <a:t>Tool</a:t>
-            </a:r>
-            <a:endParaRPr lang="en-US" sz="1500" dirty="0"/>
-          </a:p>
-        </p:txBody>
-      </p:sp>
-      <p:sp>
-        <p:nvSpPr>
-          <p:cNvPr id="17" name="Shape 15"/>
-          <p:cNvSpPr/>
-          <p:nvPr/>
-        </p:nvSpPr>
-        <p:spPr>
-          <a:xfrm>
-            <a:off x="10274808" y="3977640"/>
-            <a:ext cx="972312" cy="749808"/>
-          </a:xfrm>
-          <a:prstGeom prst="roundRect">
-            <a:avLst>
-              <a:gd name="adj" fmla="val 14634"/>
-            </a:avLst>
-          </a:prstGeom>
-          <a:solidFill>
-            <a:srgbClr val="D69A2D"/>
-          </a:solidFill>
-          <a:ln w="12700">
-            <a:solidFill>
-              <a:srgbClr val="D69A2D"/>
-            </a:solidFill>
-            <a:prstDash val="solid"/>
-          </a:ln>
-        </p:spPr>
-      </p:sp>
-      <p:sp>
-        <p:nvSpPr>
-          <p:cNvPr id="18" name="Text 16"/>
-          <p:cNvSpPr/>
-          <p:nvPr/>
-        </p:nvSpPr>
-        <p:spPr>
-          <a:xfrm>
-            <a:off x="10347960" y="4169664"/>
-            <a:ext cx="826008" cy="310896"/>
-          </a:xfrm>
-          <a:prstGeom prst="rect">
-            <a:avLst/>
-          </a:prstGeom>
-          <a:noFill/>
-          <a:ln/>
-        </p:spPr>
-        <p:txBody>
-          <a:bodyPr wrap="square" lIns="0" tIns="0" rIns="0" bIns="0" rtlCol="0" anchor="ctr">
-            <a:normAutofit/>
-          </a:bodyPr>
-          <a:lstStyle/>
-          <a:p>
-            <a:pPr algn="ctr" indent="0" marL="0">
-              <a:buNone/>
-            </a:pPr>
-            <a:r>
-              <a:rPr lang="en-US" sz="1500" b="1" dirty="0">
-                <a:solidFill>
-                  <a:srgbClr val="FFFFFF"/>
-                </a:solidFill>
-                <a:latin typeface="Aptos" pitchFamily="34" charset="0"/>
-                <a:ea typeface="Aptos" pitchFamily="34" charset="-122"/>
-                <a:cs typeface="Aptos" pitchFamily="34" charset="-120"/>
-              </a:rPr>
-              <a:t>Artifact</a:t>
-            </a:r>
-            <a:endParaRPr lang="en-US" sz="1500" dirty="0"/>
+            <a:r>
+              <a:rPr lang="en-US" sz="1380" dirty="0">
+                <a:solidFill>
+                  <a:srgbClr val="17364A"/>
+                </a:solidFill>
+                <a:latin typeface="Aptos" pitchFamily="34" charset="0"/>
+                <a:ea typeface="Aptos" pitchFamily="34" charset="-122"/>
+                <a:cs typeface="Aptos" pitchFamily="34" charset="-120"/>
+              </a:rPr>
+              <a:t>Use a tool when no comparable local process exists.</a:t>
+            </a:r>
+            <a:endParaRPr lang="en-US" sz="1380" dirty="0"/>
+          </a:p>
+          <a:p>
+            <a:r>
+              <a:rPr lang="en-US" sz="1380" dirty="0">
+                <a:solidFill>
+                  <a:srgbClr val="17364A"/>
+                </a:solidFill>
+                <a:latin typeface="Aptos" pitchFamily="34" charset="0"/>
+                <a:ea typeface="Aptos" pitchFamily="34" charset="-122"/>
+                <a:cs typeface="Aptos" pitchFamily="34" charset="-120"/>
+              </a:rPr>
+              <a:t>Adapt existing department templates when they already fit the purpose.</a:t>
+            </a:r>
+            <a:endParaRPr lang="en-US" sz="1380" dirty="0"/>
+          </a:p>
+          <a:p>
+            <a:r>
+              <a:rPr lang="en-US" sz="1380" dirty="0">
+                <a:solidFill>
+                  <a:srgbClr val="17364A"/>
+                </a:solidFill>
+                <a:latin typeface="Aptos" pitchFamily="34" charset="0"/>
+                <a:ea typeface="Aptos" pitchFamily="34" charset="-122"/>
+                <a:cs typeface="Aptos" pitchFamily="34" charset="-120"/>
+              </a:rPr>
+              <a:t>Save the completed artifact as evidence of the decision.</a:t>
+            </a:r>
+            <a:endParaRPr lang="en-US" sz="1380" dirty="0"/>
           </a:p>
         </p:txBody>
       </p:sp>
@@ -16012,13 +14990,11 @@
             </a:avLst>
           </a:prstGeom>
           <a:solidFill>
-            <a:srgbClr val="FFFFFF">
-              <a:alpha val="88000"/>
-            </a:srgbClr>
+            <a:srgbClr val="FFFFFF"/>
           </a:solidFill>
           <a:ln w="12700">
             <a:solidFill>
-              <a:srgbClr val="D6E8F2"/>
+              <a:srgbClr val="B9D7E6"/>
             </a:solidFill>
             <a:prstDash val="solid"/>
           </a:ln>
@@ -16026,169 +15002,98 @@
       </p:sp>
       <p:sp>
         <p:nvSpPr>
-          <p:cNvPr id="14" name="Shape 12"/>
-          <p:cNvSpPr/>
-          <p:nvPr/>
-        </p:nvSpPr>
-        <p:spPr>
-          <a:xfrm>
-            <a:off x="8138160" y="3474720"/>
-            <a:ext cx="256032" cy="411480"/>
-          </a:xfrm>
-          <a:prstGeom prst="rect">
-            <a:avLst/>
-          </a:prstGeom>
-          <a:solidFill>
-            <a:srgbClr val="0068B7"/>
-          </a:solidFill>
-          <a:ln w="12700">
-            <a:solidFill>
-              <a:srgbClr val="0068B7"/>
-            </a:solidFill>
-            <a:prstDash val="solid"/>
-          </a:ln>
-        </p:spPr>
-      </p:sp>
-      <p:sp>
-        <p:nvSpPr>
-          <p:cNvPr id="15" name="Shape 13"/>
-          <p:cNvSpPr/>
-          <p:nvPr/>
-        </p:nvSpPr>
-        <p:spPr>
-          <a:xfrm>
-            <a:off x="8577072" y="3172968"/>
-            <a:ext cx="256032" cy="713232"/>
-          </a:xfrm>
-          <a:prstGeom prst="rect">
-            <a:avLst/>
-          </a:prstGeom>
-          <a:solidFill>
-            <a:srgbClr val="2F8A28"/>
-          </a:solidFill>
-          <a:ln w="12700">
-            <a:solidFill>
-              <a:srgbClr val="2F8A28"/>
-            </a:solidFill>
-            <a:prstDash val="solid"/>
-          </a:ln>
-        </p:spPr>
+          <p:cNvPr id="14" name="Text 12"/>
+          <p:cNvSpPr/>
+          <p:nvPr/>
+        </p:nvSpPr>
+        <p:spPr>
+          <a:xfrm>
+            <a:off x="7799832" y="2935224"/>
+            <a:ext cx="3145536" cy="256032"/>
+          </a:xfrm>
+          <a:prstGeom prst="rect">
+            <a:avLst/>
+          </a:prstGeom>
+          <a:noFill/>
+          <a:ln/>
+        </p:spPr>
+        <p:txBody>
+          <a:bodyPr wrap="square" lIns="0" tIns="0" rIns="0" bIns="0" rtlCol="0" anchor="ctr"/>
+          <a:lstStyle/>
+          <a:p>
+            <a:pPr indent="0" marL="0">
+              <a:buNone/>
+            </a:pPr>
+            <a:r>
+              <a:rPr lang="en-US" sz="1300" b="1" dirty="0">
+                <a:solidFill>
+                  <a:srgbClr val="0068B7"/>
+                </a:solidFill>
+                <a:latin typeface="Aptos" pitchFamily="34" charset="0"/>
+                <a:ea typeface="Aptos" pitchFamily="34" charset="-122"/>
+                <a:cs typeface="Aptos" pitchFamily="34" charset="-120"/>
+              </a:rPr>
+              <a:t>Concept checkpoints</a:t>
+            </a:r>
+            <a:endParaRPr lang="en-US" sz="1300" dirty="0"/>
+          </a:p>
+        </p:txBody>
+      </p:sp>
+      <p:sp>
+        <p:nvSpPr>
+          <p:cNvPr id="15" name="Text 13"/>
+          <p:cNvSpPr/>
+          <p:nvPr/>
+        </p:nvSpPr>
+        <p:spPr>
+          <a:xfrm>
+            <a:off x="7818120" y="3300984"/>
+            <a:ext cx="3090672" cy="877824"/>
+          </a:xfrm>
+          <a:prstGeom prst="rect">
+            <a:avLst/>
+          </a:prstGeom>
+          <a:noFill/>
+          <a:ln/>
+        </p:spPr>
+        <p:txBody>
+          <a:bodyPr wrap="square" lIns="254" tIns="254" rIns="254" bIns="254" rtlCol="0" anchor="t">
+            <a:normAutofit/>
+          </a:bodyPr>
+          <a:lstStyle/>
+          <a:p>
+            <a:r>
+              <a:rPr lang="en-US" sz="1380" dirty="0">
+                <a:solidFill>
+                  <a:srgbClr val="17364A"/>
+                </a:solidFill>
+                <a:latin typeface="Aptos" pitchFamily="34" charset="0"/>
+                <a:ea typeface="Aptos" pitchFamily="34" charset="-122"/>
+                <a:cs typeface="Aptos" pitchFamily="34" charset="-120"/>
+              </a:rPr>
+              <a:t>Assess whether lab data are fit for a specific AI-supported use case.</a:t>
+            </a:r>
+            <a:endParaRPr lang="en-US" sz="1380" dirty="0"/>
+          </a:p>
+          <a:p>
+            <a:r>
+              <a:rPr lang="en-US" sz="1380" dirty="0">
+                <a:solidFill>
+                  <a:srgbClr val="17364A"/>
+                </a:solidFill>
+                <a:latin typeface="Aptos" pitchFamily="34" charset="0"/>
+                <a:ea typeface="Aptos" pitchFamily="34" charset="-122"/>
+                <a:cs typeface="Aptos" pitchFamily="34" charset="-120"/>
+              </a:rPr>
+              <a:t>Produce a lab data quality checklist for an AI-supported surveillance workflow.</a:t>
+            </a:r>
+            <a:endParaRPr lang="en-US" sz="1380" dirty="0"/>
+          </a:p>
+        </p:txBody>
       </p:sp>
       <p:sp>
         <p:nvSpPr>
           <p:cNvPr id="16" name="Shape 14"/>
-          <p:cNvSpPr/>
-          <p:nvPr/>
-        </p:nvSpPr>
-        <p:spPr>
-          <a:xfrm>
-            <a:off x="9015984" y="2880360"/>
-            <a:ext cx="256032" cy="1005840"/>
-          </a:xfrm>
-          <a:prstGeom prst="rect">
-            <a:avLst/>
-          </a:prstGeom>
-          <a:solidFill>
-            <a:srgbClr val="D69A2D"/>
-          </a:solidFill>
-          <a:ln w="12700">
-            <a:solidFill>
-              <a:srgbClr val="D69A2D"/>
-            </a:solidFill>
-            <a:prstDash val="solid"/>
-          </a:ln>
-        </p:spPr>
-      </p:sp>
-      <p:sp>
-        <p:nvSpPr>
-          <p:cNvPr id="17" name="Shape 15"/>
-          <p:cNvSpPr/>
-          <p:nvPr/>
-        </p:nvSpPr>
-        <p:spPr>
-          <a:xfrm>
-            <a:off x="9454896" y="3319272"/>
-            <a:ext cx="256032" cy="566928"/>
-          </a:xfrm>
-          <a:prstGeom prst="rect">
-            <a:avLst/>
-          </a:prstGeom>
-          <a:solidFill>
-            <a:srgbClr val="6A4CA3"/>
-          </a:solidFill>
-          <a:ln w="12700">
-            <a:solidFill>
-              <a:srgbClr val="6A4CA3"/>
-            </a:solidFill>
-            <a:prstDash val="solid"/>
-          </a:ln>
-        </p:spPr>
-      </p:sp>
-      <p:sp>
-        <p:nvSpPr>
-          <p:cNvPr id="18" name="Shape 16"/>
-          <p:cNvSpPr/>
-          <p:nvPr/>
-        </p:nvSpPr>
-        <p:spPr>
-          <a:xfrm>
-            <a:off x="8019288" y="3886200"/>
-            <a:ext cx="2706624" cy="0"/>
-          </a:xfrm>
-          <a:prstGeom prst="line">
-            <a:avLst/>
-          </a:prstGeom>
-          <a:noFill/>
-          <a:ln w="15240">
-            <a:solidFill>
-              <a:srgbClr val="003A63"/>
-            </a:solidFill>
-            <a:prstDash val="solid"/>
-          </a:ln>
-        </p:spPr>
-      </p:sp>
-      <p:sp>
-        <p:nvSpPr>
-          <p:cNvPr id="19" name="Text 17"/>
-          <p:cNvSpPr/>
-          <p:nvPr/>
-        </p:nvSpPr>
-        <p:spPr>
-          <a:xfrm>
-            <a:off x="7863840" y="3017520"/>
-            <a:ext cx="3017520" cy="201168"/>
-          </a:xfrm>
-          <a:prstGeom prst="rect">
-            <a:avLst/>
-          </a:prstGeom>
-          <a:noFill/>
-          <a:ln/>
-        </p:spPr>
-        <p:txBody>
-          <a:bodyPr wrap="square" lIns="0" tIns="0" rIns="0" bIns="0" rtlCol="0" anchor="ctr"/>
-          <a:lstStyle/>
-          <a:p>
-            <a:pPr algn="ctr" indent="0" marL="0">
-              <a:buNone/>
-            </a:pPr>
-            <a:r>
-              <a:rPr lang="en-US" sz="1050" b="1" dirty="0">
-                <a:solidFill>
-                  <a:srgbClr val="003A63"/>
-                </a:solidFill>
-                <a:latin typeface="Aptos" pitchFamily="34" charset="0"/>
-                <a:ea typeface="Aptos" pitchFamily="34" charset="-122"/>
-                <a:cs typeface="Aptos" pitchFamily="34" charset="-120"/>
-              </a:rPr>
-              <a:t>Measure and monitor</a:t>
-            </a:r>
-            <a:endParaRPr lang="en-US" sz="1050" dirty="0"/>
-          </a:p>
-        </p:txBody>
-      </p:sp>
-      <p:sp>
-        <p:nvSpPr>
-          <p:cNvPr id="20" name="Shape 18"/>
           <p:cNvSpPr/>
           <p:nvPr/>
         </p:nvSpPr>
@@ -16215,7 +15120,7 @@
       </p:sp>
       <p:sp>
         <p:nvSpPr>
-          <p:cNvPr id="21" name="Text 19"/>
+          <p:cNvPr id="17" name="Text 15"/>
           <p:cNvSpPr/>
           <p:nvPr/>
         </p:nvSpPr>
@@ -16254,7 +15159,7 @@
       </p:sp>
       <p:sp>
         <p:nvSpPr>
-          <p:cNvPr id="22" name="Text 20"/>
+          <p:cNvPr id="18" name="Text 16"/>
           <p:cNvSpPr/>
           <p:nvPr/>
         </p:nvSpPr>
@@ -16762,13 +15667,11 @@
             </a:avLst>
           </a:prstGeom>
           <a:solidFill>
-            <a:srgbClr val="FFFFFF">
-              <a:alpha val="88000"/>
-            </a:srgbClr>
+            <a:srgbClr val="FFFFFF"/>
           </a:solidFill>
           <a:ln w="12700">
             <a:solidFill>
-              <a:srgbClr val="D6E8F2"/>
+              <a:srgbClr val="B9D7E6"/>
             </a:solidFill>
             <a:prstDash val="solid"/>
           </a:ln>
@@ -16776,169 +15679,112 @@
       </p:sp>
       <p:sp>
         <p:nvSpPr>
-          <p:cNvPr id="14" name="Shape 12"/>
-          <p:cNvSpPr/>
-          <p:nvPr/>
-        </p:nvSpPr>
-        <p:spPr>
-          <a:xfrm>
-            <a:off x="8138160" y="3474720"/>
-            <a:ext cx="256032" cy="411480"/>
-          </a:xfrm>
-          <a:prstGeom prst="rect">
-            <a:avLst/>
-          </a:prstGeom>
-          <a:solidFill>
-            <a:srgbClr val="0068B7"/>
-          </a:solidFill>
-          <a:ln w="12700">
-            <a:solidFill>
-              <a:srgbClr val="0068B7"/>
-            </a:solidFill>
-            <a:prstDash val="solid"/>
-          </a:ln>
-        </p:spPr>
-      </p:sp>
-      <p:sp>
-        <p:nvSpPr>
-          <p:cNvPr id="15" name="Shape 13"/>
-          <p:cNvSpPr/>
-          <p:nvPr/>
-        </p:nvSpPr>
-        <p:spPr>
-          <a:xfrm>
-            <a:off x="8577072" y="3172968"/>
-            <a:ext cx="256032" cy="713232"/>
-          </a:xfrm>
-          <a:prstGeom prst="rect">
-            <a:avLst/>
-          </a:prstGeom>
-          <a:solidFill>
-            <a:srgbClr val="2F8A28"/>
-          </a:solidFill>
-          <a:ln w="12700">
-            <a:solidFill>
-              <a:srgbClr val="2F8A28"/>
-            </a:solidFill>
-            <a:prstDash val="solid"/>
-          </a:ln>
-        </p:spPr>
+          <p:cNvPr id="14" name="Text 12"/>
+          <p:cNvSpPr/>
+          <p:nvPr/>
+        </p:nvSpPr>
+        <p:spPr>
+          <a:xfrm>
+            <a:off x="7799832" y="2935224"/>
+            <a:ext cx="3145536" cy="256032"/>
+          </a:xfrm>
+          <a:prstGeom prst="rect">
+            <a:avLst/>
+          </a:prstGeom>
+          <a:noFill/>
+          <a:ln/>
+        </p:spPr>
+        <p:txBody>
+          <a:bodyPr wrap="square" lIns="0" tIns="0" rIns="0" bIns="0" rtlCol="0" anchor="ctr"/>
+          <a:lstStyle/>
+          <a:p>
+            <a:pPr indent="0" marL="0">
+              <a:buNone/>
+            </a:pPr>
+            <a:r>
+              <a:rPr lang="en-US" sz="1300" b="1" dirty="0">
+                <a:solidFill>
+                  <a:srgbClr val="0068B7"/>
+                </a:solidFill>
+                <a:latin typeface="Aptos" pitchFamily="34" charset="0"/>
+                <a:ea typeface="Aptos" pitchFamily="34" charset="-122"/>
+                <a:cs typeface="Aptos" pitchFamily="34" charset="-120"/>
+              </a:rPr>
+              <a:t>Concept checkpoints</a:t>
+            </a:r>
+            <a:endParaRPr lang="en-US" sz="1300" dirty="0"/>
+          </a:p>
+        </p:txBody>
+      </p:sp>
+      <p:sp>
+        <p:nvSpPr>
+          <p:cNvPr id="15" name="Text 13"/>
+          <p:cNvSpPr/>
+          <p:nvPr/>
+        </p:nvSpPr>
+        <p:spPr>
+          <a:xfrm>
+            <a:off x="7818120" y="3300984"/>
+            <a:ext cx="3090672" cy="877824"/>
+          </a:xfrm>
+          <a:prstGeom prst="rect">
+            <a:avLst/>
+          </a:prstGeom>
+          <a:noFill/>
+          <a:ln/>
+        </p:spPr>
+        <p:txBody>
+          <a:bodyPr wrap="square" lIns="254" tIns="254" rIns="254" bIns="254" rtlCol="0" anchor="t">
+            <a:normAutofit/>
+          </a:bodyPr>
+          <a:lstStyle/>
+          <a:p>
+            <a:r>
+              <a:rPr lang="en-US" sz="1380" dirty="0">
+                <a:solidFill>
+                  <a:srgbClr val="17364A"/>
+                </a:solidFill>
+                <a:latin typeface="Aptos" pitchFamily="34" charset="0"/>
+                <a:ea typeface="Aptos" pitchFamily="34" charset="-122"/>
+                <a:cs typeface="Aptos" pitchFamily="34" charset="-120"/>
+              </a:rPr>
+              <a:t>Electronic laboratory reporting supplies critical evidence for infectious disease.</a:t>
+            </a:r>
+            <a:endParaRPr lang="en-US" sz="1380" dirty="0"/>
+          </a:p>
+          <a:p>
+            <a:r>
+              <a:rPr lang="en-US" sz="1380" dirty="0">
+                <a:solidFill>
+                  <a:srgbClr val="17364A"/>
+                </a:solidFill>
+                <a:latin typeface="Aptos" pitchFamily="34" charset="0"/>
+                <a:ea typeface="Aptos" pitchFamily="34" charset="-122"/>
+                <a:cs typeface="Aptos" pitchFamily="34" charset="-120"/>
+              </a:rPr>
+              <a:t>AI tools that use laboratory data depend on the quality of test codes, result codes,.</a:t>
+            </a:r>
+            <a:endParaRPr lang="en-US" sz="1380" dirty="0"/>
+          </a:p>
+          <a:p>
+            <a:r>
+              <a:rPr lang="en-US" sz="1380" dirty="0">
+                <a:solidFill>
+                  <a:srgbClr val="17364A"/>
+                </a:solidFill>
+                <a:latin typeface="Aptos" pitchFamily="34" charset="0"/>
+                <a:ea typeface="Aptos" pitchFamily="34" charset="-122"/>
+                <a:cs typeface="Aptos" pitchFamily="34" charset="-120"/>
+              </a:rPr>
+              <a:t>This module teaches learners how laboratory data quality and terminology mapping affect.</a:t>
+            </a:r>
+            <a:endParaRPr lang="en-US" sz="1380" dirty="0"/>
+          </a:p>
+        </p:txBody>
       </p:sp>
       <p:sp>
         <p:nvSpPr>
           <p:cNvPr id="16" name="Shape 14"/>
-          <p:cNvSpPr/>
-          <p:nvPr/>
-        </p:nvSpPr>
-        <p:spPr>
-          <a:xfrm>
-            <a:off x="9015984" y="2880360"/>
-            <a:ext cx="256032" cy="1005840"/>
-          </a:xfrm>
-          <a:prstGeom prst="rect">
-            <a:avLst/>
-          </a:prstGeom>
-          <a:solidFill>
-            <a:srgbClr val="D69A2D"/>
-          </a:solidFill>
-          <a:ln w="12700">
-            <a:solidFill>
-              <a:srgbClr val="D69A2D"/>
-            </a:solidFill>
-            <a:prstDash val="solid"/>
-          </a:ln>
-        </p:spPr>
-      </p:sp>
-      <p:sp>
-        <p:nvSpPr>
-          <p:cNvPr id="17" name="Shape 15"/>
-          <p:cNvSpPr/>
-          <p:nvPr/>
-        </p:nvSpPr>
-        <p:spPr>
-          <a:xfrm>
-            <a:off x="9454896" y="3319272"/>
-            <a:ext cx="256032" cy="566928"/>
-          </a:xfrm>
-          <a:prstGeom prst="rect">
-            <a:avLst/>
-          </a:prstGeom>
-          <a:solidFill>
-            <a:srgbClr val="6A4CA3"/>
-          </a:solidFill>
-          <a:ln w="12700">
-            <a:solidFill>
-              <a:srgbClr val="6A4CA3"/>
-            </a:solidFill>
-            <a:prstDash val="solid"/>
-          </a:ln>
-        </p:spPr>
-      </p:sp>
-      <p:sp>
-        <p:nvSpPr>
-          <p:cNvPr id="18" name="Shape 16"/>
-          <p:cNvSpPr/>
-          <p:nvPr/>
-        </p:nvSpPr>
-        <p:spPr>
-          <a:xfrm>
-            <a:off x="8019288" y="3886200"/>
-            <a:ext cx="2706624" cy="0"/>
-          </a:xfrm>
-          <a:prstGeom prst="line">
-            <a:avLst/>
-          </a:prstGeom>
-          <a:noFill/>
-          <a:ln w="15240">
-            <a:solidFill>
-              <a:srgbClr val="003A63"/>
-            </a:solidFill>
-            <a:prstDash val="solid"/>
-          </a:ln>
-        </p:spPr>
-      </p:sp>
-      <p:sp>
-        <p:nvSpPr>
-          <p:cNvPr id="19" name="Text 17"/>
-          <p:cNvSpPr/>
-          <p:nvPr/>
-        </p:nvSpPr>
-        <p:spPr>
-          <a:xfrm>
-            <a:off x="7863840" y="3017520"/>
-            <a:ext cx="3017520" cy="201168"/>
-          </a:xfrm>
-          <a:prstGeom prst="rect">
-            <a:avLst/>
-          </a:prstGeom>
-          <a:noFill/>
-          <a:ln/>
-        </p:spPr>
-        <p:txBody>
-          <a:bodyPr wrap="square" lIns="0" tIns="0" rIns="0" bIns="0" rtlCol="0" anchor="ctr"/>
-          <a:lstStyle/>
-          <a:p>
-            <a:pPr algn="ctr" indent="0" marL="0">
-              <a:buNone/>
-            </a:pPr>
-            <a:r>
-              <a:rPr lang="en-US" sz="1050" b="1" dirty="0">
-                <a:solidFill>
-                  <a:srgbClr val="003A63"/>
-                </a:solidFill>
-                <a:latin typeface="Aptos" pitchFamily="34" charset="0"/>
-                <a:ea typeface="Aptos" pitchFamily="34" charset="-122"/>
-                <a:cs typeface="Aptos" pitchFamily="34" charset="-120"/>
-              </a:rPr>
-              <a:t>Measure and monitor</a:t>
-            </a:r>
-            <a:endParaRPr lang="en-US" sz="1050" dirty="0"/>
-          </a:p>
-        </p:txBody>
-      </p:sp>
-      <p:sp>
-        <p:nvSpPr>
-          <p:cNvPr id="20" name="Shape 18"/>
           <p:cNvSpPr/>
           <p:nvPr/>
         </p:nvSpPr>
@@ -16965,7 +15811,7 @@
       </p:sp>
       <p:sp>
         <p:nvSpPr>
-          <p:cNvPr id="21" name="Text 19"/>
+          <p:cNvPr id="17" name="Text 15"/>
           <p:cNvSpPr/>
           <p:nvPr/>
         </p:nvSpPr>
@@ -17004,7 +15850,7 @@
       </p:sp>
       <p:sp>
         <p:nvSpPr>
-          <p:cNvPr id="22" name="Text 20"/>
+          <p:cNvPr id="18" name="Text 16"/>
           <p:cNvSpPr/>
           <p:nvPr/>
         </p:nvSpPr>
@@ -17512,13 +16358,11 @@
             </a:avLst>
           </a:prstGeom>
           <a:solidFill>
-            <a:srgbClr val="FFFFFF">
-              <a:alpha val="88000"/>
-            </a:srgbClr>
+            <a:srgbClr val="FFFFFF"/>
           </a:solidFill>
           <a:ln w="12700">
             <a:solidFill>
-              <a:srgbClr val="D6E8F2"/>
+              <a:srgbClr val="B9D7E6"/>
             </a:solidFill>
             <a:prstDash val="solid"/>
           </a:ln>
@@ -17526,190 +16370,112 @@
       </p:sp>
       <p:sp>
         <p:nvSpPr>
-          <p:cNvPr id="14" name="Shape 12"/>
-          <p:cNvSpPr/>
-          <p:nvPr/>
-        </p:nvSpPr>
-        <p:spPr>
-          <a:xfrm>
-            <a:off x="7891272" y="3108960"/>
-            <a:ext cx="566928" cy="566928"/>
-          </a:xfrm>
-          <a:prstGeom prst="ellipse">
-            <a:avLst/>
-          </a:prstGeom>
-          <a:solidFill>
-            <a:srgbClr val="0068B7"/>
-          </a:solidFill>
-          <a:ln w="12700">
-            <a:solidFill>
-              <a:srgbClr val="0068B7"/>
-            </a:solidFill>
-            <a:prstDash val="solid"/>
-          </a:ln>
-        </p:spPr>
-      </p:sp>
-      <p:sp>
-        <p:nvSpPr>
-          <p:cNvPr id="15" name="Shape 13"/>
-          <p:cNvSpPr/>
-          <p:nvPr/>
-        </p:nvSpPr>
-        <p:spPr>
-          <a:xfrm>
-            <a:off x="10287000" y="3108960"/>
-            <a:ext cx="566928" cy="566928"/>
-          </a:xfrm>
-          <a:prstGeom prst="ellipse">
-            <a:avLst/>
-          </a:prstGeom>
-          <a:solidFill>
-            <a:srgbClr val="2F8A28"/>
-          </a:solidFill>
-          <a:ln w="12700">
-            <a:solidFill>
-              <a:srgbClr val="2F8A28"/>
-            </a:solidFill>
-            <a:prstDash val="solid"/>
-          </a:ln>
-        </p:spPr>
+          <p:cNvPr id="14" name="Text 12"/>
+          <p:cNvSpPr/>
+          <p:nvPr/>
+        </p:nvSpPr>
+        <p:spPr>
+          <a:xfrm>
+            <a:off x="7799832" y="2935224"/>
+            <a:ext cx="3145536" cy="256032"/>
+          </a:xfrm>
+          <a:prstGeom prst="rect">
+            <a:avLst/>
+          </a:prstGeom>
+          <a:noFill/>
+          <a:ln/>
+        </p:spPr>
+        <p:txBody>
+          <a:bodyPr wrap="square" lIns="0" tIns="0" rIns="0" bIns="0" rtlCol="0" anchor="ctr"/>
+          <a:lstStyle/>
+          <a:p>
+            <a:pPr indent="0" marL="0">
+              <a:buNone/>
+            </a:pPr>
+            <a:r>
+              <a:rPr lang="en-US" sz="1300" b="1" dirty="0">
+                <a:solidFill>
+                  <a:srgbClr val="0068B7"/>
+                </a:solidFill>
+                <a:latin typeface="Aptos" pitchFamily="34" charset="0"/>
+                <a:ea typeface="Aptos" pitchFamily="34" charset="-122"/>
+                <a:cs typeface="Aptos" pitchFamily="34" charset="-120"/>
+              </a:rPr>
+              <a:t>Concept checkpoints</a:t>
+            </a:r>
+            <a:endParaRPr lang="en-US" sz="1300" dirty="0"/>
+          </a:p>
+        </p:txBody>
+      </p:sp>
+      <p:sp>
+        <p:nvSpPr>
+          <p:cNvPr id="15" name="Text 13"/>
+          <p:cNvSpPr/>
+          <p:nvPr/>
+        </p:nvSpPr>
+        <p:spPr>
+          <a:xfrm>
+            <a:off x="7818120" y="3300984"/>
+            <a:ext cx="3090672" cy="877824"/>
+          </a:xfrm>
+          <a:prstGeom prst="rect">
+            <a:avLst/>
+          </a:prstGeom>
+          <a:noFill/>
+          <a:ln/>
+        </p:spPr>
+        <p:txBody>
+          <a:bodyPr wrap="square" lIns="254" tIns="254" rIns="254" bIns="254" rtlCol="0" anchor="t">
+            <a:normAutofit/>
+          </a:bodyPr>
+          <a:lstStyle/>
+          <a:p>
+            <a:r>
+              <a:rPr lang="en-US" sz="1380" dirty="0">
+                <a:solidFill>
+                  <a:srgbClr val="17364A"/>
+                </a:solidFill>
+                <a:latin typeface="Aptos" pitchFamily="34" charset="0"/>
+                <a:ea typeface="Aptos" pitchFamily="34" charset="-122"/>
+                <a:cs typeface="Aptos" pitchFamily="34" charset="-120"/>
+              </a:rPr>
+              <a:t>This national-level module is intended for training and planning purposes.</a:t>
+            </a:r>
+            <a:endParaRPr lang="en-US" sz="1380" dirty="0"/>
+          </a:p>
+          <a:p>
+            <a:r>
+              <a:rPr lang="en-US" sz="1380" dirty="0">
+                <a:solidFill>
+                  <a:srgbClr val="17364A"/>
+                </a:solidFill>
+                <a:latin typeface="Aptos" pitchFamily="34" charset="0"/>
+                <a:ea typeface="Aptos" pitchFamily="34" charset="-122"/>
+                <a:cs typeface="Aptos" pitchFamily="34" charset="-120"/>
+              </a:rPr>
+              <a:t>It does not replace legal, privacy, procurement, civil rights, records, or agency policy.</a:t>
+            </a:r>
+            <a:endParaRPr lang="en-US" sz="1380" dirty="0"/>
+          </a:p>
+          <a:p>
+            <a:r>
+              <a:rPr lang="en-US" sz="1380" dirty="0">
+                <a:solidFill>
+                  <a:srgbClr val="17364A"/>
+                </a:solidFill>
+                <a:latin typeface="Aptos" pitchFamily="34" charset="0"/>
+                <a:ea typeface="Aptos" pitchFamily="34" charset="-122"/>
+                <a:cs typeface="Aptos" pitchFamily="34" charset="-120"/>
+              </a:rPr>
+              <a:t>Learners should confirm applicable requirements in their own jurisdiction and organization.</a:t>
+            </a:r>
+            <a:endParaRPr lang="en-US" sz="1380" dirty="0"/>
+          </a:p>
+        </p:txBody>
       </p:sp>
       <p:sp>
         <p:nvSpPr>
           <p:cNvPr id="16" name="Shape 14"/>
-          <p:cNvSpPr/>
-          <p:nvPr/>
-        </p:nvSpPr>
-        <p:spPr>
-          <a:xfrm>
-            <a:off x="9089136" y="3456432"/>
-            <a:ext cx="566928" cy="566928"/>
-          </a:xfrm>
-          <a:prstGeom prst="ellipse">
-            <a:avLst/>
-          </a:prstGeom>
-          <a:solidFill>
-            <a:srgbClr val="6A4CA3"/>
-          </a:solidFill>
-          <a:ln w="12700">
-            <a:solidFill>
-              <a:srgbClr val="6A4CA3"/>
-            </a:solidFill>
-            <a:prstDash val="solid"/>
-          </a:ln>
-        </p:spPr>
-      </p:sp>
-      <p:sp>
-        <p:nvSpPr>
-          <p:cNvPr id="17" name="Shape 15"/>
-          <p:cNvSpPr/>
-          <p:nvPr/>
-        </p:nvSpPr>
-        <p:spPr>
-          <a:xfrm>
-            <a:off x="8385048" y="3419856"/>
-            <a:ext cx="1975104" cy="0"/>
-          </a:xfrm>
-          <a:prstGeom prst="line">
-            <a:avLst/>
-          </a:prstGeom>
-          <a:noFill/>
-          <a:ln w="25400">
-            <a:solidFill>
-              <a:srgbClr val="8ABBD8"/>
-            </a:solidFill>
-            <a:prstDash val="solid"/>
-          </a:ln>
-        </p:spPr>
-      </p:sp>
-      <p:sp>
-        <p:nvSpPr>
-          <p:cNvPr id="18" name="Shape 16"/>
-          <p:cNvSpPr/>
-          <p:nvPr/>
-        </p:nvSpPr>
-        <p:spPr>
-          <a:xfrm>
-            <a:off x="8202168" y="3630168"/>
-            <a:ext cx="1170432" cy="118872"/>
-          </a:xfrm>
-          <a:prstGeom prst="line">
-            <a:avLst/>
-          </a:prstGeom>
-          <a:noFill/>
-          <a:ln w="25400">
-            <a:solidFill>
-              <a:srgbClr val="8ABBD8"/>
-            </a:solidFill>
-            <a:prstDash val="solid"/>
-          </a:ln>
-        </p:spPr>
-      </p:sp>
-      <p:sp>
-        <p:nvSpPr>
-          <p:cNvPr id="19" name="Shape 17"/>
-          <p:cNvSpPr/>
-          <p:nvPr/>
-        </p:nvSpPr>
-        <p:spPr>
-          <a:xfrm>
-            <a:off x="10543032" y="3630168"/>
-            <a:ext cx="-1170432" cy="118872"/>
-          </a:xfrm>
-          <a:prstGeom prst="line">
-            <a:avLst/>
-          </a:prstGeom>
-          <a:noFill/>
-          <a:ln w="25400">
-            <a:solidFill>
-              <a:srgbClr val="8ABBD8"/>
-            </a:solidFill>
-            <a:prstDash val="solid"/>
-          </a:ln>
-        </p:spPr>
-      </p:sp>
-      <p:sp>
-        <p:nvSpPr>
-          <p:cNvPr id="20" name="Text 18"/>
-          <p:cNvSpPr/>
-          <p:nvPr/>
-        </p:nvSpPr>
-        <p:spPr>
-          <a:xfrm>
-            <a:off x="7863840" y="4069080"/>
-            <a:ext cx="3017520" cy="164592"/>
-          </a:xfrm>
-          <a:prstGeom prst="rect">
-            <a:avLst/>
-          </a:prstGeom>
-          <a:noFill/>
-          <a:ln/>
-        </p:spPr>
-        <p:txBody>
-          <a:bodyPr wrap="square" lIns="0" tIns="0" rIns="0" bIns="0" rtlCol="0" anchor="ctr"/>
-          <a:lstStyle/>
-          <a:p>
-            <a:pPr algn="ctr" indent="0" marL="0">
-              <a:buNone/>
-            </a:pPr>
-            <a:r>
-              <a:rPr lang="en-US" sz="900" b="1" dirty="0">
-                <a:solidFill>
-                  <a:srgbClr val="003A63"/>
-                </a:solidFill>
-                <a:latin typeface="Aptos" pitchFamily="34" charset="0"/>
-                <a:ea typeface="Aptos" pitchFamily="34" charset="-122"/>
-                <a:cs typeface="Aptos" pitchFamily="34" charset="-120"/>
-              </a:rPr>
-              <a:t>Decision rights</a:t>
-            </a:r>
-            <a:endParaRPr lang="en-US" sz="900" dirty="0"/>
-          </a:p>
-        </p:txBody>
-      </p:sp>
-      <p:sp>
-        <p:nvSpPr>
-          <p:cNvPr id="21" name="Shape 19"/>
           <p:cNvSpPr/>
           <p:nvPr/>
         </p:nvSpPr>
@@ -17736,7 +16502,7 @@
       </p:sp>
       <p:sp>
         <p:nvSpPr>
-          <p:cNvPr id="22" name="Text 20"/>
+          <p:cNvPr id="17" name="Text 15"/>
           <p:cNvSpPr/>
           <p:nvPr/>
         </p:nvSpPr>
@@ -17775,7 +16541,7 @@
       </p:sp>
       <p:sp>
         <p:nvSpPr>
-          <p:cNvPr id="23" name="Text 21"/>
+          <p:cNvPr id="18" name="Text 16"/>
           <p:cNvSpPr/>
           <p:nvPr/>
         </p:nvSpPr>
@@ -18283,13 +17049,11 @@
             </a:avLst>
           </a:prstGeom>
           <a:solidFill>
-            <a:srgbClr val="FFFFFF">
-              <a:alpha val="88000"/>
-            </a:srgbClr>
+            <a:srgbClr val="FFFFFF"/>
           </a:solidFill>
           <a:ln w="12700">
             <a:solidFill>
-              <a:srgbClr val="D6E8F2"/>
+              <a:srgbClr val="B9D7E6"/>
             </a:solidFill>
             <a:prstDash val="solid"/>
           </a:ln>
@@ -18297,169 +17061,112 @@
       </p:sp>
       <p:sp>
         <p:nvSpPr>
-          <p:cNvPr id="14" name="Shape 12"/>
-          <p:cNvSpPr/>
-          <p:nvPr/>
-        </p:nvSpPr>
-        <p:spPr>
-          <a:xfrm>
-            <a:off x="8138160" y="3474720"/>
-            <a:ext cx="256032" cy="411480"/>
-          </a:xfrm>
-          <a:prstGeom prst="rect">
-            <a:avLst/>
-          </a:prstGeom>
-          <a:solidFill>
-            <a:srgbClr val="0068B7"/>
-          </a:solidFill>
-          <a:ln w="12700">
-            <a:solidFill>
-              <a:srgbClr val="0068B7"/>
-            </a:solidFill>
-            <a:prstDash val="solid"/>
-          </a:ln>
-        </p:spPr>
-      </p:sp>
-      <p:sp>
-        <p:nvSpPr>
-          <p:cNvPr id="15" name="Shape 13"/>
-          <p:cNvSpPr/>
-          <p:nvPr/>
-        </p:nvSpPr>
-        <p:spPr>
-          <a:xfrm>
-            <a:off x="8577072" y="3172968"/>
-            <a:ext cx="256032" cy="713232"/>
-          </a:xfrm>
-          <a:prstGeom prst="rect">
-            <a:avLst/>
-          </a:prstGeom>
-          <a:solidFill>
-            <a:srgbClr val="2F8A28"/>
-          </a:solidFill>
-          <a:ln w="12700">
-            <a:solidFill>
-              <a:srgbClr val="2F8A28"/>
-            </a:solidFill>
-            <a:prstDash val="solid"/>
-          </a:ln>
-        </p:spPr>
+          <p:cNvPr id="14" name="Text 12"/>
+          <p:cNvSpPr/>
+          <p:nvPr/>
+        </p:nvSpPr>
+        <p:spPr>
+          <a:xfrm>
+            <a:off x="7799832" y="2935224"/>
+            <a:ext cx="3145536" cy="256032"/>
+          </a:xfrm>
+          <a:prstGeom prst="rect">
+            <a:avLst/>
+          </a:prstGeom>
+          <a:noFill/>
+          <a:ln/>
+        </p:spPr>
+        <p:txBody>
+          <a:bodyPr wrap="square" lIns="0" tIns="0" rIns="0" bIns="0" rtlCol="0" anchor="ctr"/>
+          <a:lstStyle/>
+          <a:p>
+            <a:pPr indent="0" marL="0">
+              <a:buNone/>
+            </a:pPr>
+            <a:r>
+              <a:rPr lang="en-US" sz="1300" b="1" dirty="0">
+                <a:solidFill>
+                  <a:srgbClr val="0068B7"/>
+                </a:solidFill>
+                <a:latin typeface="Aptos" pitchFamily="34" charset="0"/>
+                <a:ea typeface="Aptos" pitchFamily="34" charset="-122"/>
+                <a:cs typeface="Aptos" pitchFamily="34" charset="-120"/>
+              </a:rPr>
+              <a:t>Concept checkpoints</a:t>
+            </a:r>
+            <a:endParaRPr lang="en-US" sz="1300" dirty="0"/>
+          </a:p>
+        </p:txBody>
+      </p:sp>
+      <p:sp>
+        <p:nvSpPr>
+          <p:cNvPr id="15" name="Text 13"/>
+          <p:cNvSpPr/>
+          <p:nvPr/>
+        </p:nvSpPr>
+        <p:spPr>
+          <a:xfrm>
+            <a:off x="7818120" y="3300984"/>
+            <a:ext cx="3090672" cy="877824"/>
+          </a:xfrm>
+          <a:prstGeom prst="rect">
+            <a:avLst/>
+          </a:prstGeom>
+          <a:noFill/>
+          <a:ln/>
+        </p:spPr>
+        <p:txBody>
+          <a:bodyPr wrap="square" lIns="254" tIns="254" rIns="254" bIns="254" rtlCol="0" anchor="t">
+            <a:normAutofit/>
+          </a:bodyPr>
+          <a:lstStyle/>
+          <a:p>
+            <a:r>
+              <a:rPr lang="en-US" sz="1380" dirty="0">
+                <a:solidFill>
+                  <a:srgbClr val="17364A"/>
+                </a:solidFill>
+                <a:latin typeface="Aptos" pitchFamily="34" charset="0"/>
+                <a:ea typeface="Aptos" pitchFamily="34" charset="-122"/>
+                <a:cs typeface="Aptos" pitchFamily="34" charset="-120"/>
+              </a:rPr>
+              <a:t>Laboratory data are often treated as objective because they come from tests and.</a:t>
+            </a:r>
+            <a:endParaRPr lang="en-US" sz="1380" dirty="0"/>
+          </a:p>
+          <a:p>
+            <a:r>
+              <a:rPr lang="en-US" sz="1380" dirty="0">
+                <a:solidFill>
+                  <a:srgbClr val="17364A"/>
+                </a:solidFill>
+                <a:latin typeface="Aptos" pitchFamily="34" charset="0"/>
+                <a:ea typeface="Aptos" pitchFamily="34" charset="-122"/>
+                <a:cs typeface="Aptos" pitchFamily="34" charset="-120"/>
+              </a:rPr>
+              <a:t>A laboratory result can be difficult to use if the test code is local, the result is free.</a:t>
+            </a:r>
+            <a:endParaRPr lang="en-US" sz="1380" dirty="0"/>
+          </a:p>
+          <a:p>
+            <a:r>
+              <a:rPr lang="en-US" sz="1380" dirty="0">
+                <a:solidFill>
+                  <a:srgbClr val="17364A"/>
+                </a:solidFill>
+                <a:latin typeface="Aptos" pitchFamily="34" charset="0"/>
+                <a:ea typeface="Aptos" pitchFamily="34" charset="-122"/>
+                <a:cs typeface="Aptos" pitchFamily="34" charset="-120"/>
+              </a:rPr>
+              <a:t>Terminology mapping is central to reliable public health interpretation.</a:t>
+            </a:r>
+            <a:endParaRPr lang="en-US" sz="1380" dirty="0"/>
+          </a:p>
+        </p:txBody>
       </p:sp>
       <p:sp>
         <p:nvSpPr>
           <p:cNvPr id="16" name="Shape 14"/>
-          <p:cNvSpPr/>
-          <p:nvPr/>
-        </p:nvSpPr>
-        <p:spPr>
-          <a:xfrm>
-            <a:off x="9015984" y="2880360"/>
-            <a:ext cx="256032" cy="1005840"/>
-          </a:xfrm>
-          <a:prstGeom prst="rect">
-            <a:avLst/>
-          </a:prstGeom>
-          <a:solidFill>
-            <a:srgbClr val="D69A2D"/>
-          </a:solidFill>
-          <a:ln w="12700">
-            <a:solidFill>
-              <a:srgbClr val="D69A2D"/>
-            </a:solidFill>
-            <a:prstDash val="solid"/>
-          </a:ln>
-        </p:spPr>
-      </p:sp>
-      <p:sp>
-        <p:nvSpPr>
-          <p:cNvPr id="17" name="Shape 15"/>
-          <p:cNvSpPr/>
-          <p:nvPr/>
-        </p:nvSpPr>
-        <p:spPr>
-          <a:xfrm>
-            <a:off x="9454896" y="3319272"/>
-            <a:ext cx="256032" cy="566928"/>
-          </a:xfrm>
-          <a:prstGeom prst="rect">
-            <a:avLst/>
-          </a:prstGeom>
-          <a:solidFill>
-            <a:srgbClr val="6A4CA3"/>
-          </a:solidFill>
-          <a:ln w="12700">
-            <a:solidFill>
-              <a:srgbClr val="6A4CA3"/>
-            </a:solidFill>
-            <a:prstDash val="solid"/>
-          </a:ln>
-        </p:spPr>
-      </p:sp>
-      <p:sp>
-        <p:nvSpPr>
-          <p:cNvPr id="18" name="Shape 16"/>
-          <p:cNvSpPr/>
-          <p:nvPr/>
-        </p:nvSpPr>
-        <p:spPr>
-          <a:xfrm>
-            <a:off x="8019288" y="3886200"/>
-            <a:ext cx="2706624" cy="0"/>
-          </a:xfrm>
-          <a:prstGeom prst="line">
-            <a:avLst/>
-          </a:prstGeom>
-          <a:noFill/>
-          <a:ln w="15240">
-            <a:solidFill>
-              <a:srgbClr val="003A63"/>
-            </a:solidFill>
-            <a:prstDash val="solid"/>
-          </a:ln>
-        </p:spPr>
-      </p:sp>
-      <p:sp>
-        <p:nvSpPr>
-          <p:cNvPr id="19" name="Text 17"/>
-          <p:cNvSpPr/>
-          <p:nvPr/>
-        </p:nvSpPr>
-        <p:spPr>
-          <a:xfrm>
-            <a:off x="7863840" y="3017520"/>
-            <a:ext cx="3017520" cy="201168"/>
-          </a:xfrm>
-          <a:prstGeom prst="rect">
-            <a:avLst/>
-          </a:prstGeom>
-          <a:noFill/>
-          <a:ln/>
-        </p:spPr>
-        <p:txBody>
-          <a:bodyPr wrap="square" lIns="0" tIns="0" rIns="0" bIns="0" rtlCol="0" anchor="ctr"/>
-          <a:lstStyle/>
-          <a:p>
-            <a:pPr algn="ctr" indent="0" marL="0">
-              <a:buNone/>
-            </a:pPr>
-            <a:r>
-              <a:rPr lang="en-US" sz="1050" b="1" dirty="0">
-                <a:solidFill>
-                  <a:srgbClr val="003A63"/>
-                </a:solidFill>
-                <a:latin typeface="Aptos" pitchFamily="34" charset="0"/>
-                <a:ea typeface="Aptos" pitchFamily="34" charset="-122"/>
-                <a:cs typeface="Aptos" pitchFamily="34" charset="-120"/>
-              </a:rPr>
-              <a:t>Measure and monitor</a:t>
-            </a:r>
-            <a:endParaRPr lang="en-US" sz="1050" dirty="0"/>
-          </a:p>
-        </p:txBody>
-      </p:sp>
-      <p:sp>
-        <p:nvSpPr>
-          <p:cNvPr id="20" name="Shape 18"/>
           <p:cNvSpPr/>
           <p:nvPr/>
         </p:nvSpPr>
@@ -18486,7 +17193,7 @@
       </p:sp>
       <p:sp>
         <p:nvSpPr>
-          <p:cNvPr id="21" name="Text 19"/>
+          <p:cNvPr id="17" name="Text 15"/>
           <p:cNvSpPr/>
           <p:nvPr/>
         </p:nvSpPr>
@@ -18525,7 +17232,7 @@
       </p:sp>
       <p:sp>
         <p:nvSpPr>
-          <p:cNvPr id="22" name="Text 20"/>
+          <p:cNvPr id="18" name="Text 16"/>
           <p:cNvSpPr/>
           <p:nvPr/>
         </p:nvSpPr>
@@ -19033,13 +17740,11 @@
             </a:avLst>
           </a:prstGeom>
           <a:solidFill>
-            <a:srgbClr val="FFFFFF">
-              <a:alpha val="88000"/>
-            </a:srgbClr>
+            <a:srgbClr val="FFFFFF"/>
           </a:solidFill>
           <a:ln w="12700">
             <a:solidFill>
-              <a:srgbClr val="D6E8F2"/>
+              <a:srgbClr val="B9D7E6"/>
             </a:solidFill>
             <a:prstDash val="solid"/>
           </a:ln>
@@ -19047,169 +17752,112 @@
       </p:sp>
       <p:sp>
         <p:nvSpPr>
-          <p:cNvPr id="14" name="Shape 12"/>
-          <p:cNvSpPr/>
-          <p:nvPr/>
-        </p:nvSpPr>
-        <p:spPr>
-          <a:xfrm>
-            <a:off x="8138160" y="3474720"/>
-            <a:ext cx="256032" cy="411480"/>
-          </a:xfrm>
-          <a:prstGeom prst="rect">
-            <a:avLst/>
-          </a:prstGeom>
-          <a:solidFill>
-            <a:srgbClr val="0068B7"/>
-          </a:solidFill>
-          <a:ln w="12700">
-            <a:solidFill>
-              <a:srgbClr val="0068B7"/>
-            </a:solidFill>
-            <a:prstDash val="solid"/>
-          </a:ln>
-        </p:spPr>
-      </p:sp>
-      <p:sp>
-        <p:nvSpPr>
-          <p:cNvPr id="15" name="Shape 13"/>
-          <p:cNvSpPr/>
-          <p:nvPr/>
-        </p:nvSpPr>
-        <p:spPr>
-          <a:xfrm>
-            <a:off x="8577072" y="3172968"/>
-            <a:ext cx="256032" cy="713232"/>
-          </a:xfrm>
-          <a:prstGeom prst="rect">
-            <a:avLst/>
-          </a:prstGeom>
-          <a:solidFill>
-            <a:srgbClr val="2F8A28"/>
-          </a:solidFill>
-          <a:ln w="12700">
-            <a:solidFill>
-              <a:srgbClr val="2F8A28"/>
-            </a:solidFill>
-            <a:prstDash val="solid"/>
-          </a:ln>
-        </p:spPr>
+          <p:cNvPr id="14" name="Text 12"/>
+          <p:cNvSpPr/>
+          <p:nvPr/>
+        </p:nvSpPr>
+        <p:spPr>
+          <a:xfrm>
+            <a:off x="7799832" y="2935224"/>
+            <a:ext cx="3145536" cy="256032"/>
+          </a:xfrm>
+          <a:prstGeom prst="rect">
+            <a:avLst/>
+          </a:prstGeom>
+          <a:noFill/>
+          <a:ln/>
+        </p:spPr>
+        <p:txBody>
+          <a:bodyPr wrap="square" lIns="0" tIns="0" rIns="0" bIns="0" rtlCol="0" anchor="ctr"/>
+          <a:lstStyle/>
+          <a:p>
+            <a:pPr indent="0" marL="0">
+              <a:buNone/>
+            </a:pPr>
+            <a:r>
+              <a:rPr lang="en-US" sz="1300" b="1" dirty="0">
+                <a:solidFill>
+                  <a:srgbClr val="0068B7"/>
+                </a:solidFill>
+                <a:latin typeface="Aptos" pitchFamily="34" charset="0"/>
+                <a:ea typeface="Aptos" pitchFamily="34" charset="-122"/>
+                <a:cs typeface="Aptos" pitchFamily="34" charset="-120"/>
+              </a:rPr>
+              <a:t>Concept checkpoints</a:t>
+            </a:r>
+            <a:endParaRPr lang="en-US" sz="1300" dirty="0"/>
+          </a:p>
+        </p:txBody>
+      </p:sp>
+      <p:sp>
+        <p:nvSpPr>
+          <p:cNvPr id="15" name="Text 13"/>
+          <p:cNvSpPr/>
+          <p:nvPr/>
+        </p:nvSpPr>
+        <p:spPr>
+          <a:xfrm>
+            <a:off x="7818120" y="3300984"/>
+            <a:ext cx="3090672" cy="877824"/>
+          </a:xfrm>
+          <a:prstGeom prst="rect">
+            <a:avLst/>
+          </a:prstGeom>
+          <a:noFill/>
+          <a:ln/>
+        </p:spPr>
+        <p:txBody>
+          <a:bodyPr wrap="square" lIns="254" tIns="254" rIns="254" bIns="254" rtlCol="0" anchor="t">
+            <a:normAutofit/>
+          </a:bodyPr>
+          <a:lstStyle/>
+          <a:p>
+            <a:r>
+              <a:rPr lang="en-US" sz="1380" dirty="0">
+                <a:solidFill>
+                  <a:srgbClr val="17364A"/>
+                </a:solidFill>
+                <a:latin typeface="Aptos" pitchFamily="34" charset="0"/>
+                <a:ea typeface="Aptos" pitchFamily="34" charset="-122"/>
+                <a:cs typeface="Aptos" pitchFamily="34" charset="-120"/>
+              </a:rPr>
+              <a:t>Electronic Laboratory Reporting is the electronic transmission of laboratory reports to.</a:t>
+            </a:r>
+            <a:endParaRPr lang="en-US" sz="1380" dirty="0"/>
+          </a:p>
+          <a:p>
+            <a:r>
+              <a:rPr lang="en-US" sz="1380" dirty="0">
+                <a:solidFill>
+                  <a:srgbClr val="17364A"/>
+                </a:solidFill>
+                <a:latin typeface="Aptos" pitchFamily="34" charset="0"/>
+                <a:ea typeface="Aptos" pitchFamily="34" charset="-122"/>
+                <a:cs typeface="Aptos" pitchFamily="34" charset="-120"/>
+              </a:rPr>
+              <a:t>ELR can improve timeliness and completeness, but it requires interface onboarding,.</a:t>
+            </a:r>
+            <a:endParaRPr lang="en-US" sz="1380" dirty="0"/>
+          </a:p>
+          <a:p>
+            <a:r>
+              <a:rPr lang="en-US" sz="1380" dirty="0">
+                <a:solidFill>
+                  <a:srgbClr val="17364A"/>
+                </a:solidFill>
+                <a:latin typeface="Aptos" pitchFamily="34" charset="0"/>
+                <a:ea typeface="Aptos" pitchFamily="34" charset="-122"/>
+                <a:cs typeface="Aptos" pitchFamily="34" charset="-120"/>
+              </a:rPr>
+              <a:t>LOINC.</a:t>
+            </a:r>
+            <a:endParaRPr lang="en-US" sz="1380" dirty="0"/>
+          </a:p>
+        </p:txBody>
       </p:sp>
       <p:sp>
         <p:nvSpPr>
           <p:cNvPr id="16" name="Shape 14"/>
-          <p:cNvSpPr/>
-          <p:nvPr/>
-        </p:nvSpPr>
-        <p:spPr>
-          <a:xfrm>
-            <a:off x="9015984" y="2880360"/>
-            <a:ext cx="256032" cy="1005840"/>
-          </a:xfrm>
-          <a:prstGeom prst="rect">
-            <a:avLst/>
-          </a:prstGeom>
-          <a:solidFill>
-            <a:srgbClr val="D69A2D"/>
-          </a:solidFill>
-          <a:ln w="12700">
-            <a:solidFill>
-              <a:srgbClr val="D69A2D"/>
-            </a:solidFill>
-            <a:prstDash val="solid"/>
-          </a:ln>
-        </p:spPr>
-      </p:sp>
-      <p:sp>
-        <p:nvSpPr>
-          <p:cNvPr id="17" name="Shape 15"/>
-          <p:cNvSpPr/>
-          <p:nvPr/>
-        </p:nvSpPr>
-        <p:spPr>
-          <a:xfrm>
-            <a:off x="9454896" y="3319272"/>
-            <a:ext cx="256032" cy="566928"/>
-          </a:xfrm>
-          <a:prstGeom prst="rect">
-            <a:avLst/>
-          </a:prstGeom>
-          <a:solidFill>
-            <a:srgbClr val="6A4CA3"/>
-          </a:solidFill>
-          <a:ln w="12700">
-            <a:solidFill>
-              <a:srgbClr val="6A4CA3"/>
-            </a:solidFill>
-            <a:prstDash val="solid"/>
-          </a:ln>
-        </p:spPr>
-      </p:sp>
-      <p:sp>
-        <p:nvSpPr>
-          <p:cNvPr id="18" name="Shape 16"/>
-          <p:cNvSpPr/>
-          <p:nvPr/>
-        </p:nvSpPr>
-        <p:spPr>
-          <a:xfrm>
-            <a:off x="8019288" y="3886200"/>
-            <a:ext cx="2706624" cy="0"/>
-          </a:xfrm>
-          <a:prstGeom prst="line">
-            <a:avLst/>
-          </a:prstGeom>
-          <a:noFill/>
-          <a:ln w="15240">
-            <a:solidFill>
-              <a:srgbClr val="003A63"/>
-            </a:solidFill>
-            <a:prstDash val="solid"/>
-          </a:ln>
-        </p:spPr>
-      </p:sp>
-      <p:sp>
-        <p:nvSpPr>
-          <p:cNvPr id="19" name="Text 17"/>
-          <p:cNvSpPr/>
-          <p:nvPr/>
-        </p:nvSpPr>
-        <p:spPr>
-          <a:xfrm>
-            <a:off x="7863840" y="3017520"/>
-            <a:ext cx="3017520" cy="201168"/>
-          </a:xfrm>
-          <a:prstGeom prst="rect">
-            <a:avLst/>
-          </a:prstGeom>
-          <a:noFill/>
-          <a:ln/>
-        </p:spPr>
-        <p:txBody>
-          <a:bodyPr wrap="square" lIns="0" tIns="0" rIns="0" bIns="0" rtlCol="0" anchor="ctr"/>
-          <a:lstStyle/>
-          <a:p>
-            <a:pPr algn="ctr" indent="0" marL="0">
-              <a:buNone/>
-            </a:pPr>
-            <a:r>
-              <a:rPr lang="en-US" sz="1050" b="1" dirty="0">
-                <a:solidFill>
-                  <a:srgbClr val="003A63"/>
-                </a:solidFill>
-                <a:latin typeface="Aptos" pitchFamily="34" charset="0"/>
-                <a:ea typeface="Aptos" pitchFamily="34" charset="-122"/>
-                <a:cs typeface="Aptos" pitchFamily="34" charset="-120"/>
-              </a:rPr>
-              <a:t>Measure and monitor</a:t>
-            </a:r>
-            <a:endParaRPr lang="en-US" sz="1050" dirty="0"/>
-          </a:p>
-        </p:txBody>
-      </p:sp>
-      <p:sp>
-        <p:nvSpPr>
-          <p:cNvPr id="20" name="Shape 18"/>
           <p:cNvSpPr/>
           <p:nvPr/>
         </p:nvSpPr>
@@ -19236,7 +17884,7 @@
       </p:sp>
       <p:sp>
         <p:nvSpPr>
-          <p:cNvPr id="21" name="Text 19"/>
+          <p:cNvPr id="17" name="Text 15"/>
           <p:cNvSpPr/>
           <p:nvPr/>
         </p:nvSpPr>
@@ -19275,7 +17923,7 @@
       </p:sp>
       <p:sp>
         <p:nvSpPr>
-          <p:cNvPr id="22" name="Text 20"/>
+          <p:cNvPr id="18" name="Text 16"/>
           <p:cNvSpPr/>
           <p:nvPr/>
         </p:nvSpPr>

--- a/downloads/presentations/modules/arc-240.pptx
+++ b/downloads/presentations/modules/arc-240.pptx
@@ -3442,49 +3442,58 @@
           <a:ln/>
         </p:spPr>
         <p:txBody>
-          <a:bodyPr wrap="square" lIns="635" tIns="635" rIns="635" bIns="635" rtlCol="0" anchor="t">
+          <a:bodyPr wrap="square" lIns="1016" tIns="1016" rIns="1016" bIns="1016" rtlCol="0" anchor="t">
             <a:normAutofit/>
           </a:bodyPr>
           <a:lstStyle/>
           <a:p>
+            <a:pPr indent="0" marL="0">
+              <a:buNone/>
+            </a:pPr>
             <a:r>
               <a:rPr lang="en-US" sz="2100" dirty="0">
                 <a:solidFill>
-                  <a:srgbClr val="17364A"/>
-                </a:solidFill>
-                <a:latin typeface="Aptos" pitchFamily="34" charset="0"/>
-                <a:ea typeface="Aptos" pitchFamily="34" charset="-122"/>
-                <a:cs typeface="Aptos" pitchFamily="34" charset="-120"/>
-              </a:rPr>
-              <a:t>UCUM.</a:t>
+                  <a:srgbClr val="003A63"/>
+                </a:solidFill>
+                <a:latin typeface="Aptos" pitchFamily="34" charset="0"/>
+                <a:ea typeface="Aptos" pitchFamily="34" charset="-122"/>
+                <a:cs typeface="Aptos" pitchFamily="34" charset="-120"/>
+              </a:rPr>
+              <a:t>• UCUM.</a:t>
             </a:r>
             <a:endParaRPr lang="en-US" sz="2100" dirty="0"/>
           </a:p>
           <a:p>
+            <a:pPr indent="0" marL="0">
+              <a:buNone/>
+            </a:pPr>
             <a:r>
               <a:rPr lang="en-US" sz="2100" dirty="0">
                 <a:solidFill>
-                  <a:srgbClr val="17364A"/>
-                </a:solidFill>
-                <a:latin typeface="Aptos" pitchFamily="34" charset="0"/>
-                <a:ea typeface="Aptos" pitchFamily="34" charset="-122"/>
-                <a:cs typeface="Aptos" pitchFamily="34" charset="-120"/>
-              </a:rPr>
-              <a:t>UCUM is a standard for units of measure.</a:t>
+                  <a:srgbClr val="003A63"/>
+                </a:solidFill>
+                <a:latin typeface="Aptos" pitchFamily="34" charset="0"/>
+                <a:ea typeface="Aptos" pitchFamily="34" charset="-122"/>
+                <a:cs typeface="Aptos" pitchFamily="34" charset="-120"/>
+              </a:rPr>
+              <a:t>• UCUM is a standard for units of measure.</a:t>
             </a:r>
             <a:endParaRPr lang="en-US" sz="2100" dirty="0"/>
           </a:p>
           <a:p>
+            <a:pPr indent="0" marL="0">
+              <a:buNone/>
+            </a:pPr>
             <a:r>
               <a:rPr lang="en-US" sz="2100" dirty="0">
                 <a:solidFill>
-                  <a:srgbClr val="17364A"/>
-                </a:solidFill>
-                <a:latin typeface="Aptos" pitchFamily="34" charset="0"/>
-                <a:ea typeface="Aptos" pitchFamily="34" charset="-122"/>
-                <a:cs typeface="Aptos" pitchFamily="34" charset="-120"/>
-              </a:rPr>
-              <a:t>Unit consistency is essential when interpreting quantitative results, thresholds, reference ranges, or.</a:t>
+                  <a:srgbClr val="003A63"/>
+                </a:solidFill>
+                <a:latin typeface="Aptos" pitchFamily="34" charset="0"/>
+                <a:ea typeface="Aptos" pitchFamily="34" charset="-122"/>
+                <a:cs typeface="Aptos" pitchFamily="34" charset="-120"/>
+              </a:rPr>
+              <a:t>• Unit consistency is essential when interpreting quantitative results, thresholds, reference.</a:t>
             </a:r>
             <a:endParaRPr lang="en-US" sz="2100" dirty="0"/>
           </a:p>
@@ -3564,17 +3573,17 @@
         </p:nvSpPr>
         <p:spPr>
           <a:xfrm>
-            <a:off x="7799832" y="1828800"/>
-            <a:ext cx="3145536" cy="685800"/>
-          </a:xfrm>
-          <a:prstGeom prst="rect">
-            <a:avLst/>
-          </a:prstGeom>
-          <a:noFill/>
-          <a:ln/>
-        </p:spPr>
-        <p:txBody>
-          <a:bodyPr wrap="square" lIns="0" tIns="0" rIns="0" bIns="0" rtlCol="0" anchor="t">
+            <a:off x="7799832" y="1801368"/>
+            <a:ext cx="3145536" cy="758952"/>
+          </a:xfrm>
+          <a:prstGeom prst="rect">
+            <a:avLst/>
+          </a:prstGeom>
+          <a:noFill/>
+          <a:ln/>
+        </p:spPr>
+        <p:txBody>
+          <a:bodyPr wrap="square" lIns="254" tIns="254" rIns="254" bIns="254" rtlCol="0" anchor="t">
             <a:normAutofit/>
           </a:bodyPr>
           <a:lstStyle/>
@@ -3583,7 +3592,7 @@
               <a:buNone/>
             </a:pPr>
             <a:r>
-              <a:rPr lang="en-US" sz="1550" dirty="0">
+              <a:rPr lang="en-US" sz="1320" dirty="0">
                 <a:solidFill>
                   <a:srgbClr val="17364A"/>
                 </a:solidFill>
@@ -3593,7 +3602,7 @@
               </a:rPr>
               <a:t>UCUM.</a:t>
             </a:r>
-            <a:endParaRPr lang="en-US" sz="1550" dirty="0"/>
+            <a:endParaRPr lang="en-US" sz="1320" dirty="0"/>
           </a:p>
         </p:txBody>
       </p:sp>
@@ -3681,13 +3690,16 @@
           <a:ln/>
         </p:spPr>
         <p:txBody>
-          <a:bodyPr wrap="square" lIns="254" tIns="254" rIns="254" bIns="254" rtlCol="0" anchor="t">
+          <a:bodyPr wrap="square" lIns="508" tIns="508" rIns="508" bIns="508" rtlCol="0" anchor="t">
             <a:normAutofit/>
           </a:bodyPr>
           <a:lstStyle/>
           <a:p>
-            <a:r>
-              <a:rPr lang="en-US" sz="1380" dirty="0">
+            <a:pPr indent="0" marL="0">
+              <a:buNone/>
+            </a:pPr>
+            <a:r>
+              <a:rPr lang="en-US" sz="1220" dirty="0">
                 <a:solidFill>
                   <a:srgbClr val="17364A"/>
                 </a:solidFill>
@@ -3695,13 +3707,16 @@
                 <a:ea typeface="Aptos" pitchFamily="34" charset="-122"/>
                 <a:cs typeface="Aptos" pitchFamily="34" charset="-120"/>
               </a:rPr>
-              <a:t>Unit consistency is essential when interpreting quantitative results, thresholds,.</a:t>
-            </a:r>
-            <a:endParaRPr lang="en-US" sz="1380" dirty="0"/>
-          </a:p>
-          <a:p>
-            <a:r>
-              <a:rPr lang="en-US" sz="1380" dirty="0">
+              <a:t>Unit consistency is essential when interpreting quantitative.</a:t>
+            </a:r>
+            <a:endParaRPr lang="en-US" sz="1220" dirty="0"/>
+          </a:p>
+          <a:p>
+            <a:pPr indent="0" marL="0">
+              <a:buNone/>
+            </a:pPr>
+            <a:r>
+              <a:rPr lang="en-US" sz="1220" dirty="0">
                 <a:solidFill>
                   <a:srgbClr val="17364A"/>
                 </a:solidFill>
@@ -3711,11 +3726,14 @@
               </a:rPr>
               <a:t>Reportable condition mapping.</a:t>
             </a:r>
-            <a:endParaRPr lang="en-US" sz="1380" dirty="0"/>
-          </a:p>
-          <a:p>
-            <a:r>
-              <a:rPr lang="en-US" sz="1380" dirty="0">
+            <a:endParaRPr lang="en-US" sz="1220" dirty="0"/>
+          </a:p>
+          <a:p>
+            <a:pPr indent="0" marL="0">
+              <a:buNone/>
+            </a:pPr>
+            <a:r>
+              <a:rPr lang="en-US" sz="1220" dirty="0">
                 <a:solidFill>
                   <a:srgbClr val="17364A"/>
                 </a:solidFill>
@@ -3723,9 +3741,9 @@
                 <a:ea typeface="Aptos" pitchFamily="34" charset="-122"/>
                 <a:cs typeface="Aptos" pitchFamily="34" charset="-120"/>
               </a:rPr>
-              <a:t>Reportable condition mapping links laboratory tests and results to conditions that may.</a:t>
-            </a:r>
-            <a:endParaRPr lang="en-US" sz="1380" dirty="0"/>
+              <a:t>Reportable condition mapping links laboratory tests and results to.</a:t>
+            </a:r>
+            <a:endParaRPr lang="en-US" sz="1220" dirty="0"/>
           </a:p>
         </p:txBody>
       </p:sp>
@@ -3803,17 +3821,17 @@
         </p:nvSpPr>
         <p:spPr>
           <a:xfrm>
-            <a:off x="7799832" y="5001768"/>
-            <a:ext cx="3145536" cy="502920"/>
-          </a:xfrm>
-          <a:prstGeom prst="rect">
-            <a:avLst/>
-          </a:prstGeom>
-          <a:noFill/>
-          <a:ln/>
-        </p:spPr>
-        <p:txBody>
-          <a:bodyPr wrap="square" lIns="0" tIns="0" rIns="0" bIns="0" rtlCol="0" anchor="t">
+            <a:off x="7799832" y="4974336"/>
+            <a:ext cx="3145536" cy="576072"/>
+          </a:xfrm>
+          <a:prstGeom prst="rect">
+            <a:avLst/>
+          </a:prstGeom>
+          <a:noFill/>
+          <a:ln/>
+        </p:spPr>
+        <p:txBody>
+          <a:bodyPr wrap="square" lIns="254" tIns="254" rIns="254" bIns="254" rtlCol="0" anchor="t">
             <a:normAutofit/>
           </a:bodyPr>
           <a:lstStyle/>
@@ -3822,7 +3840,7 @@
               <a:buNone/>
             </a:pPr>
             <a:r>
-              <a:rPr lang="en-US" sz="1550" dirty="0">
+              <a:rPr lang="en-US" sz="1320" dirty="0">
                 <a:solidFill>
                   <a:srgbClr val="17364A"/>
                 </a:solidFill>
@@ -3830,9 +3848,9 @@
                 <a:ea typeface="Aptos" pitchFamily="34" charset="-122"/>
                 <a:cs typeface="Aptos" pitchFamily="34" charset="-120"/>
               </a:rPr>
-              <a:t>Connect the concept to data quality, model performance, validation evidence, monitoring measures, and decisions that remain under human control.</a:t>
-            </a:r>
-            <a:endParaRPr lang="en-US" sz="1550" dirty="0"/>
+              <a:t>Connect the concept to data quality, model performance, validation evidence, monitoring measures, and decisions that.</a:t>
+            </a:r>
+            <a:endParaRPr lang="en-US" sz="1320" dirty="0"/>
           </a:p>
         </p:txBody>
       </p:sp>
@@ -4133,49 +4151,58 @@
           <a:ln/>
         </p:spPr>
         <p:txBody>
-          <a:bodyPr wrap="square" lIns="635" tIns="635" rIns="635" bIns="635" rtlCol="0" anchor="t">
+          <a:bodyPr wrap="square" lIns="1016" tIns="1016" rIns="1016" bIns="1016" rtlCol="0" anchor="t">
             <a:normAutofit/>
           </a:bodyPr>
           <a:lstStyle/>
           <a:p>
+            <a:pPr indent="0" marL="0">
+              <a:buNone/>
+            </a:pPr>
             <a:r>
               <a:rPr lang="en-US" sz="2100" dirty="0">
                 <a:solidFill>
-                  <a:srgbClr val="17364A"/>
-                </a:solidFill>
-                <a:latin typeface="Aptos" pitchFamily="34" charset="0"/>
-                <a:ea typeface="Aptos" pitchFamily="34" charset="-122"/>
-                <a:cs typeface="Aptos" pitchFamily="34" charset="-120"/>
-              </a:rPr>
-              <a:t>An AI tool that summarizes incoming lab reports for disease investigators may need to identify the test.</a:t>
+                  <a:srgbClr val="003A63"/>
+                </a:solidFill>
+                <a:latin typeface="Aptos" pitchFamily="34" charset="0"/>
+                <a:ea typeface="Aptos" pitchFamily="34" charset="-122"/>
+                <a:cs typeface="Aptos" pitchFamily="34" charset="-120"/>
+              </a:rPr>
+              <a:t>• An AI tool that summarizes incoming lab reports for disease investigators may need to identify.</a:t>
             </a:r>
             <a:endParaRPr lang="en-US" sz="2100" dirty="0"/>
           </a:p>
           <a:p>
+            <a:pPr indent="0" marL="0">
+              <a:buNone/>
+            </a:pPr>
             <a:r>
               <a:rPr lang="en-US" sz="2100" dirty="0">
                 <a:solidFill>
-                  <a:srgbClr val="17364A"/>
-                </a:solidFill>
-                <a:latin typeface="Aptos" pitchFamily="34" charset="0"/>
-                <a:ea typeface="Aptos" pitchFamily="34" charset="-122"/>
-                <a:cs typeface="Aptos" pitchFamily="34" charset="-120"/>
-              </a:rPr>
-              <a:t>If a local test code is mapped incorrectly, the summary may imply evidence for the wrong condition.</a:t>
+                  <a:srgbClr val="003A63"/>
+                </a:solidFill>
+                <a:latin typeface="Aptos" pitchFamily="34" charset="0"/>
+                <a:ea typeface="Aptos" pitchFamily="34" charset="-122"/>
+                <a:cs typeface="Aptos" pitchFamily="34" charset="-120"/>
+              </a:rPr>
+              <a:t>• If a local test code is mapped incorrectly, the summary may imply evidence for the wrong.</a:t>
             </a:r>
             <a:endParaRPr lang="en-US" sz="2100" dirty="0"/>
           </a:p>
           <a:p>
+            <a:pPr indent="0" marL="0">
+              <a:buNone/>
+            </a:pPr>
             <a:r>
               <a:rPr lang="en-US" sz="2100" dirty="0">
                 <a:solidFill>
-                  <a:srgbClr val="17364A"/>
-                </a:solidFill>
-                <a:latin typeface="Aptos" pitchFamily="34" charset="0"/>
-                <a:ea typeface="Aptos" pitchFamily="34" charset="-122"/>
-                <a:cs typeface="Aptos" pitchFamily="34" charset="-120"/>
-              </a:rPr>
-              <a:t>If units are missing, a quantitative result may be uninterpretable.</a:t>
+                  <a:srgbClr val="003A63"/>
+                </a:solidFill>
+                <a:latin typeface="Aptos" pitchFamily="34" charset="0"/>
+                <a:ea typeface="Aptos" pitchFamily="34" charset="-122"/>
+                <a:cs typeface="Aptos" pitchFamily="34" charset="-120"/>
+              </a:rPr>
+              <a:t>• If units are missing, a quantitative result may be uninterpretable.</a:t>
             </a:r>
             <a:endParaRPr lang="en-US" sz="2100" dirty="0"/>
           </a:p>
@@ -4255,17 +4282,17 @@
         </p:nvSpPr>
         <p:spPr>
           <a:xfrm>
-            <a:off x="7799832" y="1828800"/>
-            <a:ext cx="3145536" cy="685800"/>
-          </a:xfrm>
-          <a:prstGeom prst="rect">
-            <a:avLst/>
-          </a:prstGeom>
-          <a:noFill/>
-          <a:ln/>
-        </p:spPr>
-        <p:txBody>
-          <a:bodyPr wrap="square" lIns="0" tIns="0" rIns="0" bIns="0" rtlCol="0" anchor="t">
+            <a:off x="7799832" y="1801368"/>
+            <a:ext cx="3145536" cy="758952"/>
+          </a:xfrm>
+          <a:prstGeom prst="rect">
+            <a:avLst/>
+          </a:prstGeom>
+          <a:noFill/>
+          <a:ln/>
+        </p:spPr>
+        <p:txBody>
+          <a:bodyPr wrap="square" lIns="254" tIns="254" rIns="254" bIns="254" rtlCol="0" anchor="t">
             <a:normAutofit/>
           </a:bodyPr>
           <a:lstStyle/>
@@ -4274,7 +4301,7 @@
               <a:buNone/>
             </a:pPr>
             <a:r>
-              <a:rPr lang="en-US" sz="1550" dirty="0">
+              <a:rPr lang="en-US" sz="1320" dirty="0">
                 <a:solidFill>
                   <a:srgbClr val="17364A"/>
                 </a:solidFill>
@@ -4284,7 +4311,7 @@
               </a:rPr>
               <a:t>An AI tool that summarizes incoming lab reports for disease investigators may need to identify the test.</a:t>
             </a:r>
-            <a:endParaRPr lang="en-US" sz="1550" dirty="0"/>
+            <a:endParaRPr lang="en-US" sz="1320" dirty="0"/>
           </a:p>
         </p:txBody>
       </p:sp>
@@ -4372,13 +4399,16 @@
           <a:ln/>
         </p:spPr>
         <p:txBody>
-          <a:bodyPr wrap="square" lIns="254" tIns="254" rIns="254" bIns="254" rtlCol="0" anchor="t">
+          <a:bodyPr wrap="square" lIns="508" tIns="508" rIns="508" bIns="508" rtlCol="0" anchor="t">
             <a:normAutofit/>
           </a:bodyPr>
           <a:lstStyle/>
           <a:p>
-            <a:r>
-              <a:rPr lang="en-US" sz="1380" dirty="0">
+            <a:pPr indent="0" marL="0">
+              <a:buNone/>
+            </a:pPr>
+            <a:r>
+              <a:rPr lang="en-US" sz="1220" dirty="0">
                 <a:solidFill>
                   <a:srgbClr val="17364A"/>
                 </a:solidFill>
@@ -4386,13 +4416,16 @@
                 <a:ea typeface="Aptos" pitchFamily="34" charset="-122"/>
                 <a:cs typeface="Aptos" pitchFamily="34" charset="-120"/>
               </a:rPr>
-              <a:t>An AI tool that summarizes incoming lab reports for disease investigators may need to.</a:t>
-            </a:r>
-            <a:endParaRPr lang="en-US" sz="1380" dirty="0"/>
-          </a:p>
-          <a:p>
-            <a:r>
-              <a:rPr lang="en-US" sz="1380" dirty="0">
+              <a:t>An AI tool that summarizes incoming lab reports for disease.</a:t>
+            </a:r>
+            <a:endParaRPr lang="en-US" sz="1220" dirty="0"/>
+          </a:p>
+          <a:p>
+            <a:pPr indent="0" marL="0">
+              <a:buNone/>
+            </a:pPr>
+            <a:r>
+              <a:rPr lang="en-US" sz="1220" dirty="0">
                 <a:solidFill>
                   <a:srgbClr val="17364A"/>
                 </a:solidFill>
@@ -4400,13 +4433,16 @@
                 <a:ea typeface="Aptos" pitchFamily="34" charset="-122"/>
                 <a:cs typeface="Aptos" pitchFamily="34" charset="-120"/>
               </a:rPr>
-              <a:t>If the specimen source is omitted, the epidemiologic meaning of the result may change.</a:t>
-            </a:r>
-            <a:endParaRPr lang="en-US" sz="1380" dirty="0"/>
-          </a:p>
-          <a:p>
-            <a:r>
-              <a:rPr lang="en-US" sz="1380" dirty="0">
+              <a:t>If the specimen source is omitted, the epidemiologic meaning of.</a:t>
+            </a:r>
+            <a:endParaRPr lang="en-US" sz="1220" dirty="0"/>
+          </a:p>
+          <a:p>
+            <a:pPr indent="0" marL="0">
+              <a:buNone/>
+            </a:pPr>
+            <a:r>
+              <a:rPr lang="en-US" sz="1220" dirty="0">
                 <a:solidFill>
                   <a:srgbClr val="17364A"/>
                 </a:solidFill>
@@ -4416,7 +4452,7 @@
               </a:rPr>
               <a:t>A second example is anomaly detection using laboratory trends.</a:t>
             </a:r>
-            <a:endParaRPr lang="en-US" sz="1380" dirty="0"/>
+            <a:endParaRPr lang="en-US" sz="1220" dirty="0"/>
           </a:p>
         </p:txBody>
       </p:sp>
@@ -4494,17 +4530,17 @@
         </p:nvSpPr>
         <p:spPr>
           <a:xfrm>
-            <a:off x="7799832" y="5001768"/>
-            <a:ext cx="3145536" cy="502920"/>
-          </a:xfrm>
-          <a:prstGeom prst="rect">
-            <a:avLst/>
-          </a:prstGeom>
-          <a:noFill/>
-          <a:ln/>
-        </p:spPr>
-        <p:txBody>
-          <a:bodyPr wrap="square" lIns="0" tIns="0" rIns="0" bIns="0" rtlCol="0" anchor="t">
+            <a:off x="7799832" y="4974336"/>
+            <a:ext cx="3145536" cy="576072"/>
+          </a:xfrm>
+          <a:prstGeom prst="rect">
+            <a:avLst/>
+          </a:prstGeom>
+          <a:noFill/>
+          <a:ln/>
+        </p:spPr>
+        <p:txBody>
+          <a:bodyPr wrap="square" lIns="254" tIns="254" rIns="254" bIns="254" rtlCol="0" anchor="t">
             <a:normAutofit/>
           </a:bodyPr>
           <a:lstStyle/>
@@ -4513,7 +4549,7 @@
               <a:buNone/>
             </a:pPr>
             <a:r>
-              <a:rPr lang="en-US" sz="1550" dirty="0">
+              <a:rPr lang="en-US" sz="1320" dirty="0">
                 <a:solidFill>
                   <a:srgbClr val="17364A"/>
                 </a:solidFill>
@@ -4521,9 +4557,9 @@
                 <a:ea typeface="Aptos" pitchFamily="34" charset="-122"/>
                 <a:cs typeface="Aptos" pitchFamily="34" charset="-120"/>
               </a:rPr>
-              <a:t>Connect the concept to data quality, model performance, validation evidence, monitoring measures, and decisions that remain under human control.</a:t>
-            </a:r>
-            <a:endParaRPr lang="en-US" sz="1550" dirty="0"/>
+              <a:t>Connect the concept to data quality, model performance, validation evidence, monitoring measures, and decisions that.</a:t>
+            </a:r>
+            <a:endParaRPr lang="en-US" sz="1320" dirty="0"/>
           </a:p>
         </p:txBody>
       </p:sp>
@@ -4824,49 +4860,58 @@
           <a:ln/>
         </p:spPr>
         <p:txBody>
-          <a:bodyPr wrap="square" lIns="635" tIns="635" rIns="635" bIns="635" rtlCol="0" anchor="t">
+          <a:bodyPr wrap="square" lIns="1016" tIns="1016" rIns="1016" bIns="1016" rtlCol="0" anchor="t">
             <a:normAutofit/>
           </a:bodyPr>
           <a:lstStyle/>
           <a:p>
+            <a:pPr indent="0" marL="0">
+              <a:buNone/>
+            </a:pPr>
             <a:r>
               <a:rPr lang="en-US" sz="2100" dirty="0">
                 <a:solidFill>
-                  <a:srgbClr val="17364A"/>
-                </a:solidFill>
-                <a:latin typeface="Aptos" pitchFamily="34" charset="0"/>
-                <a:ea typeface="Aptos" pitchFamily="34" charset="-122"/>
-                <a:cs typeface="Aptos" pitchFamily="34" charset="-120"/>
-              </a:rPr>
-              <a:t>Laboratory data quality begins with required fields.</a:t>
+                  <a:srgbClr val="003A63"/>
+                </a:solidFill>
+                <a:latin typeface="Aptos" pitchFamily="34" charset="0"/>
+                <a:ea typeface="Aptos" pitchFamily="34" charset="-122"/>
+                <a:cs typeface="Aptos" pitchFamily="34" charset="-120"/>
+              </a:rPr>
+              <a:t>• Laboratory data quality begins with required fields.</a:t>
             </a:r>
             <a:endParaRPr lang="en-US" sz="2100" dirty="0"/>
           </a:p>
           <a:p>
+            <a:pPr indent="0" marL="0">
+              <a:buNone/>
+            </a:pPr>
             <a:r>
               <a:rPr lang="en-US" sz="2100" dirty="0">
                 <a:solidFill>
-                  <a:srgbClr val="17364A"/>
-                </a:solidFill>
-                <a:latin typeface="Aptos" pitchFamily="34" charset="0"/>
-                <a:ea typeface="Aptos" pitchFamily="34" charset="-122"/>
-                <a:cs typeface="Aptos" pitchFamily="34" charset="-120"/>
-              </a:rPr>
-              <a:t>At minimum, many workflows need patient identifiers, specimen collection date, test ordered, result,.</a:t>
+                  <a:srgbClr val="003A63"/>
+                </a:solidFill>
+                <a:latin typeface="Aptos" pitchFamily="34" charset="0"/>
+                <a:ea typeface="Aptos" pitchFamily="34" charset="-122"/>
+                <a:cs typeface="Aptos" pitchFamily="34" charset="-120"/>
+              </a:rPr>
+              <a:t>• At minimum, many workflows need patient identifiers, specimen collection date, test ordered,.</a:t>
             </a:r>
             <a:endParaRPr lang="en-US" sz="2100" dirty="0"/>
           </a:p>
           <a:p>
+            <a:pPr indent="0" marL="0">
+              <a:buNone/>
+            </a:pPr>
             <a:r>
               <a:rPr lang="en-US" sz="2100" dirty="0">
                 <a:solidFill>
-                  <a:srgbClr val="17364A"/>
-                </a:solidFill>
-                <a:latin typeface="Aptos" pitchFamily="34" charset="0"/>
-                <a:ea typeface="Aptos" pitchFamily="34" charset="-122"/>
-                <a:cs typeface="Aptos" pitchFamily="34" charset="-120"/>
-              </a:rPr>
-              <a:t>The exact requirements depend on the use case.</a:t>
+                  <a:srgbClr val="003A63"/>
+                </a:solidFill>
+                <a:latin typeface="Aptos" pitchFamily="34" charset="0"/>
+                <a:ea typeface="Aptos" pitchFamily="34" charset="-122"/>
+                <a:cs typeface="Aptos" pitchFamily="34" charset="-120"/>
+              </a:rPr>
+              <a:t>• The exact requirements depend on the use case.</a:t>
             </a:r>
             <a:endParaRPr lang="en-US" sz="2100" dirty="0"/>
           </a:p>
@@ -4946,17 +4991,17 @@
         </p:nvSpPr>
         <p:spPr>
           <a:xfrm>
-            <a:off x="7799832" y="1828800"/>
-            <a:ext cx="3145536" cy="685800"/>
-          </a:xfrm>
-          <a:prstGeom prst="rect">
-            <a:avLst/>
-          </a:prstGeom>
-          <a:noFill/>
-          <a:ln/>
-        </p:spPr>
-        <p:txBody>
-          <a:bodyPr wrap="square" lIns="0" tIns="0" rIns="0" bIns="0" rtlCol="0" anchor="t">
+            <a:off x="7799832" y="1801368"/>
+            <a:ext cx="3145536" cy="758952"/>
+          </a:xfrm>
+          <a:prstGeom prst="rect">
+            <a:avLst/>
+          </a:prstGeom>
+          <a:noFill/>
+          <a:ln/>
+        </p:spPr>
+        <p:txBody>
+          <a:bodyPr wrap="square" lIns="254" tIns="254" rIns="254" bIns="254" rtlCol="0" anchor="t">
             <a:normAutofit/>
           </a:bodyPr>
           <a:lstStyle/>
@@ -4965,7 +5010,7 @@
               <a:buNone/>
             </a:pPr>
             <a:r>
-              <a:rPr lang="en-US" sz="1550" dirty="0">
+              <a:rPr lang="en-US" sz="1320" dirty="0">
                 <a:solidFill>
                   <a:srgbClr val="17364A"/>
                 </a:solidFill>
@@ -4975,7 +5020,7 @@
               </a:rPr>
               <a:t>Laboratory data quality begins with required fields.</a:t>
             </a:r>
-            <a:endParaRPr lang="en-US" sz="1550" dirty="0"/>
+            <a:endParaRPr lang="en-US" sz="1320" dirty="0"/>
           </a:p>
         </p:txBody>
       </p:sp>
@@ -5063,13 +5108,16 @@
           <a:ln/>
         </p:spPr>
         <p:txBody>
-          <a:bodyPr wrap="square" lIns="254" tIns="254" rIns="254" bIns="254" rtlCol="0" anchor="t">
+          <a:bodyPr wrap="square" lIns="508" tIns="508" rIns="508" bIns="508" rtlCol="0" anchor="t">
             <a:normAutofit/>
           </a:bodyPr>
           <a:lstStyle/>
           <a:p>
-            <a:r>
-              <a:rPr lang="en-US" sz="1380" dirty="0">
+            <a:pPr indent="0" marL="0">
+              <a:buNone/>
+            </a:pPr>
+            <a:r>
+              <a:rPr lang="en-US" sz="1220" dirty="0">
                 <a:solidFill>
                   <a:srgbClr val="17364A"/>
                 </a:solidFill>
@@ -5077,13 +5125,16 @@
                 <a:ea typeface="Aptos" pitchFamily="34" charset="-122"/>
                 <a:cs typeface="Aptos" pitchFamily="34" charset="-120"/>
               </a:rPr>
-              <a:t>At minimum, many workflows need patient identifiers, specimen collection date, test.</a:t>
-            </a:r>
-            <a:endParaRPr lang="en-US" sz="1380" dirty="0"/>
-          </a:p>
-          <a:p>
-            <a:r>
-              <a:rPr lang="en-US" sz="1380" dirty="0">
+              <a:t>At minimum, many workflows need patient identifiers, specimen.</a:t>
+            </a:r>
+            <a:endParaRPr lang="en-US" sz="1220" dirty="0"/>
+          </a:p>
+          <a:p>
+            <a:pPr indent="0" marL="0">
+              <a:buNone/>
+            </a:pPr>
+            <a:r>
+              <a:rPr lang="en-US" sz="1220" dirty="0">
                 <a:solidFill>
                   <a:srgbClr val="17364A"/>
                 </a:solidFill>
@@ -5091,13 +5142,16 @@
                 <a:ea typeface="Aptos" pitchFamily="34" charset="-122"/>
                 <a:cs typeface="Aptos" pitchFamily="34" charset="-120"/>
               </a:rPr>
-              <a:t>An AI tool used for summarization may need different fields than a tool used for trend.</a:t>
-            </a:r>
-            <a:endParaRPr lang="en-US" sz="1380" dirty="0"/>
-          </a:p>
-          <a:p>
-            <a:r>
-              <a:rPr lang="en-US" sz="1380" dirty="0">
+              <a:t>An AI tool used for summarization may need different fields than a.</a:t>
+            </a:r>
+            <a:endParaRPr lang="en-US" sz="1220" dirty="0"/>
+          </a:p>
+          <a:p>
+            <a:pPr indent="0" marL="0">
+              <a:buNone/>
+            </a:pPr>
+            <a:r>
+              <a:rPr lang="en-US" sz="1220" dirty="0">
                 <a:solidFill>
                   <a:srgbClr val="17364A"/>
                 </a:solidFill>
@@ -5107,7 +5161,7 @@
               </a:rPr>
               <a:t>Terminology mapping should be reviewed as an ongoing process.</a:t>
             </a:r>
-            <a:endParaRPr lang="en-US" sz="1380" dirty="0"/>
+            <a:endParaRPr lang="en-US" sz="1220" dirty="0"/>
           </a:p>
         </p:txBody>
       </p:sp>
@@ -5185,17 +5239,17 @@
         </p:nvSpPr>
         <p:spPr>
           <a:xfrm>
-            <a:off x="7799832" y="5001768"/>
-            <a:ext cx="3145536" cy="502920"/>
-          </a:xfrm>
-          <a:prstGeom prst="rect">
-            <a:avLst/>
-          </a:prstGeom>
-          <a:noFill/>
-          <a:ln/>
-        </p:spPr>
-        <p:txBody>
-          <a:bodyPr wrap="square" lIns="0" tIns="0" rIns="0" bIns="0" rtlCol="0" anchor="t">
+            <a:off x="7799832" y="4974336"/>
+            <a:ext cx="3145536" cy="576072"/>
+          </a:xfrm>
+          <a:prstGeom prst="rect">
+            <a:avLst/>
+          </a:prstGeom>
+          <a:noFill/>
+          <a:ln/>
+        </p:spPr>
+        <p:txBody>
+          <a:bodyPr wrap="square" lIns="254" tIns="254" rIns="254" bIns="254" rtlCol="0" anchor="t">
             <a:normAutofit/>
           </a:bodyPr>
           <a:lstStyle/>
@@ -5204,7 +5258,7 @@
               <a:buNone/>
             </a:pPr>
             <a:r>
-              <a:rPr lang="en-US" sz="1550" dirty="0">
+              <a:rPr lang="en-US" sz="1320" dirty="0">
                 <a:solidFill>
                   <a:srgbClr val="17364A"/>
                 </a:solidFill>
@@ -5212,9 +5266,9 @@
                 <a:ea typeface="Aptos" pitchFamily="34" charset="-122"/>
                 <a:cs typeface="Aptos" pitchFamily="34" charset="-120"/>
               </a:rPr>
-              <a:t>Connect the concept to data quality, model performance, validation evidence, monitoring measures, and decisions that remain under human control.</a:t>
-            </a:r>
-            <a:endParaRPr lang="en-US" sz="1550" dirty="0"/>
+              <a:t>Connect the concept to data quality, model performance, validation evidence, monitoring measures, and decisions that.</a:t>
+            </a:r>
+            <a:endParaRPr lang="en-US" sz="1320" dirty="0"/>
           </a:p>
         </p:txBody>
       </p:sp>
@@ -5515,49 +5569,58 @@
           <a:ln/>
         </p:spPr>
         <p:txBody>
-          <a:bodyPr wrap="square" lIns="635" tIns="635" rIns="635" bIns="635" rtlCol="0" anchor="t">
+          <a:bodyPr wrap="square" lIns="1016" tIns="1016" rIns="1016" bIns="1016" rtlCol="0" anchor="t">
             <a:normAutofit/>
           </a:bodyPr>
           <a:lstStyle/>
           <a:p>
+            <a:pPr indent="0" marL="0">
+              <a:buNone/>
+            </a:pPr>
             <a:r>
               <a:rPr lang="en-US" sz="2100" dirty="0">
                 <a:solidFill>
-                  <a:srgbClr val="17364A"/>
-                </a:solidFill>
-                <a:latin typeface="Aptos" pitchFamily="34" charset="0"/>
-                <a:ea typeface="Aptos" pitchFamily="34" charset="-122"/>
-                <a:cs typeface="Aptos" pitchFamily="34" charset="-120"/>
-              </a:rPr>
-              <a:t>Misleading standardization.</a:t>
+                  <a:srgbClr val="003A63"/>
+                </a:solidFill>
+                <a:latin typeface="Aptos" pitchFamily="34" charset="0"/>
+                <a:ea typeface="Aptos" pitchFamily="34" charset="-122"/>
+                <a:cs typeface="Aptos" pitchFamily="34" charset="-120"/>
+              </a:rPr>
+              <a:t>• Misleading standardization.</a:t>
             </a:r>
             <a:endParaRPr lang="en-US" sz="2100" dirty="0"/>
           </a:p>
           <a:p>
+            <a:pPr indent="0" marL="0">
+              <a:buNone/>
+            </a:pPr>
             <a:r>
               <a:rPr lang="en-US" sz="2100" dirty="0">
                 <a:solidFill>
-                  <a:srgbClr val="17364A"/>
-                </a:solidFill>
-                <a:latin typeface="Aptos" pitchFamily="34" charset="0"/>
-                <a:ea typeface="Aptos" pitchFamily="34" charset="-122"/>
-                <a:cs typeface="Aptos" pitchFamily="34" charset="-120"/>
-              </a:rPr>
-              <a:t>A standard code may be present but mapped incorrectly.</a:t>
+                  <a:srgbClr val="003A63"/>
+                </a:solidFill>
+                <a:latin typeface="Aptos" pitchFamily="34" charset="0"/>
+                <a:ea typeface="Aptos" pitchFamily="34" charset="-122"/>
+                <a:cs typeface="Aptos" pitchFamily="34" charset="-120"/>
+              </a:rPr>
+              <a:t>• A standard code may be present but mapped incorrectly.</a:t>
             </a:r>
             <a:endParaRPr lang="en-US" sz="2100" dirty="0"/>
           </a:p>
           <a:p>
+            <a:pPr indent="0" marL="0">
+              <a:buNone/>
+            </a:pPr>
             <a:r>
               <a:rPr lang="en-US" sz="2100" dirty="0">
                 <a:solidFill>
-                  <a:srgbClr val="17364A"/>
-                </a:solidFill>
-                <a:latin typeface="Aptos" pitchFamily="34" charset="0"/>
-                <a:ea typeface="Aptos" pitchFamily="34" charset="-122"/>
-                <a:cs typeface="Aptos" pitchFamily="34" charset="-120"/>
-              </a:rPr>
-              <a:t>Guardrails include mapping review, test cases, and terminology stewardship.</a:t>
+                  <a:srgbClr val="003A63"/>
+                </a:solidFill>
+                <a:latin typeface="Aptos" pitchFamily="34" charset="0"/>
+                <a:ea typeface="Aptos" pitchFamily="34" charset="-122"/>
+                <a:cs typeface="Aptos" pitchFamily="34" charset="-120"/>
+              </a:rPr>
+              <a:t>• Guardrails include mapping review, test cases, and terminology stewardship.</a:t>
             </a:r>
             <a:endParaRPr lang="en-US" sz="2100" dirty="0"/>
           </a:p>
@@ -5637,17 +5700,17 @@
         </p:nvSpPr>
         <p:spPr>
           <a:xfrm>
-            <a:off x="7799832" y="1828800"/>
-            <a:ext cx="3145536" cy="685800"/>
-          </a:xfrm>
-          <a:prstGeom prst="rect">
-            <a:avLst/>
-          </a:prstGeom>
-          <a:noFill/>
-          <a:ln/>
-        </p:spPr>
-        <p:txBody>
-          <a:bodyPr wrap="square" lIns="0" tIns="0" rIns="0" bIns="0" rtlCol="0" anchor="t">
+            <a:off x="7799832" y="1801368"/>
+            <a:ext cx="3145536" cy="758952"/>
+          </a:xfrm>
+          <a:prstGeom prst="rect">
+            <a:avLst/>
+          </a:prstGeom>
+          <a:noFill/>
+          <a:ln/>
+        </p:spPr>
+        <p:txBody>
+          <a:bodyPr wrap="square" lIns="254" tIns="254" rIns="254" bIns="254" rtlCol="0" anchor="t">
             <a:normAutofit/>
           </a:bodyPr>
           <a:lstStyle/>
@@ -5656,7 +5719,7 @@
               <a:buNone/>
             </a:pPr>
             <a:r>
-              <a:rPr lang="en-US" sz="1550" dirty="0">
+              <a:rPr lang="en-US" sz="1320" dirty="0">
                 <a:solidFill>
                   <a:srgbClr val="17364A"/>
                 </a:solidFill>
@@ -5666,7 +5729,7 @@
               </a:rPr>
               <a:t>Misleading standardization.</a:t>
             </a:r>
-            <a:endParaRPr lang="en-US" sz="1550" dirty="0"/>
+            <a:endParaRPr lang="en-US" sz="1320" dirty="0"/>
           </a:p>
         </p:txBody>
       </p:sp>
@@ -5754,13 +5817,16 @@
           <a:ln/>
         </p:spPr>
         <p:txBody>
-          <a:bodyPr wrap="square" lIns="254" tIns="254" rIns="254" bIns="254" rtlCol="0" anchor="t">
+          <a:bodyPr wrap="square" lIns="508" tIns="508" rIns="508" bIns="508" rtlCol="0" anchor="t">
             <a:normAutofit/>
           </a:bodyPr>
           <a:lstStyle/>
           <a:p>
-            <a:r>
-              <a:rPr lang="en-US" sz="1380" dirty="0">
+            <a:pPr indent="0" marL="0">
+              <a:buNone/>
+            </a:pPr>
+            <a:r>
+              <a:rPr lang="en-US" sz="1220" dirty="0">
                 <a:solidFill>
                   <a:srgbClr val="17364A"/>
                 </a:solidFill>
@@ -5770,11 +5836,14 @@
               </a:rPr>
               <a:t>Missing units or specimen details.</a:t>
             </a:r>
-            <a:endParaRPr lang="en-US" sz="1380" dirty="0"/>
-          </a:p>
-          <a:p>
-            <a:r>
-              <a:rPr lang="en-US" sz="1380" dirty="0">
+            <a:endParaRPr lang="en-US" sz="1220" dirty="0"/>
+          </a:p>
+          <a:p>
+            <a:pPr indent="0" marL="0">
+              <a:buNone/>
+            </a:pPr>
+            <a:r>
+              <a:rPr lang="en-US" sz="1220" dirty="0">
                 <a:solidFill>
                   <a:srgbClr val="17364A"/>
                 </a:solidFill>
@@ -5784,11 +5853,14 @@
               </a:rPr>
               <a:t>Incomplete fields can change interpretation.</a:t>
             </a:r>
-            <a:endParaRPr lang="en-US" sz="1380" dirty="0"/>
-          </a:p>
-          <a:p>
-            <a:r>
-              <a:rPr lang="en-US" sz="1380" dirty="0">
+            <a:endParaRPr lang="en-US" sz="1220" dirty="0"/>
+          </a:p>
+          <a:p>
+            <a:pPr indent="0" marL="0">
+              <a:buNone/>
+            </a:pPr>
+            <a:r>
+              <a:rPr lang="en-US" sz="1220" dirty="0">
                 <a:solidFill>
                   <a:srgbClr val="17364A"/>
                 </a:solidFill>
@@ -5796,9 +5868,9 @@
                 <a:ea typeface="Aptos" pitchFamily="34" charset="-122"/>
                 <a:cs typeface="Aptos" pitchFamily="34" charset="-120"/>
               </a:rPr>
-              <a:t>Guardrails include required-field checks and uncertainty flags in AI outputs.</a:t>
-            </a:r>
-            <a:endParaRPr lang="en-US" sz="1380" dirty="0"/>
+              <a:t>Guardrails include required-field checks and uncertainty flags in.</a:t>
+            </a:r>
+            <a:endParaRPr lang="en-US" sz="1220" dirty="0"/>
           </a:p>
         </p:txBody>
       </p:sp>
@@ -5876,17 +5948,17 @@
         </p:nvSpPr>
         <p:spPr>
           <a:xfrm>
-            <a:off x="7799832" y="5001768"/>
-            <a:ext cx="3145536" cy="502920"/>
-          </a:xfrm>
-          <a:prstGeom prst="rect">
-            <a:avLst/>
-          </a:prstGeom>
-          <a:noFill/>
-          <a:ln/>
-        </p:spPr>
-        <p:txBody>
-          <a:bodyPr wrap="square" lIns="0" tIns="0" rIns="0" bIns="0" rtlCol="0" anchor="t">
+            <a:off x="7799832" y="4974336"/>
+            <a:ext cx="3145536" cy="576072"/>
+          </a:xfrm>
+          <a:prstGeom prst="rect">
+            <a:avLst/>
+          </a:prstGeom>
+          <a:noFill/>
+          <a:ln/>
+        </p:spPr>
+        <p:txBody>
+          <a:bodyPr wrap="square" lIns="254" tIns="254" rIns="254" bIns="254" rtlCol="0" anchor="t">
             <a:normAutofit/>
           </a:bodyPr>
           <a:lstStyle/>
@@ -5895,7 +5967,7 @@
               <a:buNone/>
             </a:pPr>
             <a:r>
-              <a:rPr lang="en-US" sz="1550" dirty="0">
+              <a:rPr lang="en-US" sz="1320" dirty="0">
                 <a:solidFill>
                   <a:srgbClr val="17364A"/>
                 </a:solidFill>
@@ -5903,9 +5975,9 @@
                 <a:ea typeface="Aptos" pitchFamily="34" charset="-122"/>
                 <a:cs typeface="Aptos" pitchFamily="34" charset="-120"/>
               </a:rPr>
-              <a:t>Identify what could go wrong, who could be affected, what safeguards are needed, and what evidence should be reviewed before use expands.</a:t>
-            </a:r>
-            <a:endParaRPr lang="en-US" sz="1550" dirty="0"/>
+              <a:t>Identify what could go wrong, who could be affected, what safeguards are needed, and what evidence should be reviewed.</a:t>
+            </a:r>
+            <a:endParaRPr lang="en-US" sz="1320" dirty="0"/>
           </a:p>
         </p:txBody>
       </p:sp>
@@ -6206,49 +6278,58 @@
           <a:ln/>
         </p:spPr>
         <p:txBody>
-          <a:bodyPr wrap="square" lIns="635" tIns="635" rIns="635" bIns="635" rtlCol="0" anchor="t">
+          <a:bodyPr wrap="square" lIns="1016" tIns="1016" rIns="1016" bIns="1016" rtlCol="0" anchor="t">
             <a:normAutofit/>
           </a:bodyPr>
           <a:lstStyle/>
           <a:p>
+            <a:pPr indent="0" marL="0">
+              <a:buNone/>
+            </a:pPr>
             <a:r>
               <a:rPr lang="en-US" sz="2100" dirty="0">
                 <a:solidFill>
-                  <a:srgbClr val="17364A"/>
-                </a:solidFill>
-                <a:latin typeface="Aptos" pitchFamily="34" charset="0"/>
-                <a:ea typeface="Aptos" pitchFamily="34" charset="-122"/>
-                <a:cs typeface="Aptos" pitchFamily="34" charset="-120"/>
-              </a:rPr>
-              <a:t>Reporting pattern changes.</a:t>
+                  <a:srgbClr val="003A63"/>
+                </a:solidFill>
+                <a:latin typeface="Aptos" pitchFamily="34" charset="0"/>
+                <a:ea typeface="Aptos" pitchFamily="34" charset="-122"/>
+                <a:cs typeface="Aptos" pitchFamily="34" charset="-120"/>
+              </a:rPr>
+              <a:t>• Reporting pattern changes.</a:t>
             </a:r>
             <a:endParaRPr lang="en-US" sz="2100" dirty="0"/>
           </a:p>
           <a:p>
+            <a:pPr indent="0" marL="0">
+              <a:buNone/>
+            </a:pPr>
             <a:r>
               <a:rPr lang="en-US" sz="2100" dirty="0">
                 <a:solidFill>
-                  <a:srgbClr val="17364A"/>
-                </a:solidFill>
-                <a:latin typeface="Aptos" pitchFamily="34" charset="0"/>
-                <a:ea typeface="Aptos" pitchFamily="34" charset="-122"/>
-                <a:cs typeface="Aptos" pitchFamily="34" charset="-120"/>
-              </a:rPr>
-              <a:t>Lab reporting changes may look like disease changes.</a:t>
+                  <a:srgbClr val="003A63"/>
+                </a:solidFill>
+                <a:latin typeface="Aptos" pitchFamily="34" charset="0"/>
+                <a:ea typeface="Aptos" pitchFamily="34" charset="-122"/>
+                <a:cs typeface="Aptos" pitchFamily="34" charset="-120"/>
+              </a:rPr>
+              <a:t>• Lab reporting changes may look like disease changes.</a:t>
             </a:r>
             <a:endParaRPr lang="en-US" sz="2100" dirty="0"/>
           </a:p>
           <a:p>
+            <a:pPr indent="0" marL="0">
+              <a:buNone/>
+            </a:pPr>
             <a:r>
               <a:rPr lang="en-US" sz="2100" dirty="0">
                 <a:solidFill>
-                  <a:srgbClr val="17364A"/>
-                </a:solidFill>
-                <a:latin typeface="Aptos" pitchFamily="34" charset="0"/>
-                <a:ea typeface="Aptos" pitchFamily="34" charset="-122"/>
-                <a:cs typeface="Aptos" pitchFamily="34" charset="-120"/>
-              </a:rPr>
-              <a:t>Guardrails include volume monitoring, partner change logs, and anomaly review.</a:t>
+                  <a:srgbClr val="003A63"/>
+                </a:solidFill>
+                <a:latin typeface="Aptos" pitchFamily="34" charset="0"/>
+                <a:ea typeface="Aptos" pitchFamily="34" charset="-122"/>
+                <a:cs typeface="Aptos" pitchFamily="34" charset="-120"/>
+              </a:rPr>
+              <a:t>• Guardrails include volume monitoring, partner change logs, and anomaly review.</a:t>
             </a:r>
             <a:endParaRPr lang="en-US" sz="2100" dirty="0"/>
           </a:p>
@@ -6328,17 +6409,17 @@
         </p:nvSpPr>
         <p:spPr>
           <a:xfrm>
-            <a:off x="7799832" y="1828800"/>
-            <a:ext cx="3145536" cy="685800"/>
-          </a:xfrm>
-          <a:prstGeom prst="rect">
-            <a:avLst/>
-          </a:prstGeom>
-          <a:noFill/>
-          <a:ln/>
-        </p:spPr>
-        <p:txBody>
-          <a:bodyPr wrap="square" lIns="0" tIns="0" rIns="0" bIns="0" rtlCol="0" anchor="t">
+            <a:off x="7799832" y="1801368"/>
+            <a:ext cx="3145536" cy="758952"/>
+          </a:xfrm>
+          <a:prstGeom prst="rect">
+            <a:avLst/>
+          </a:prstGeom>
+          <a:noFill/>
+          <a:ln/>
+        </p:spPr>
+        <p:txBody>
+          <a:bodyPr wrap="square" lIns="254" tIns="254" rIns="254" bIns="254" rtlCol="0" anchor="t">
             <a:normAutofit/>
           </a:bodyPr>
           <a:lstStyle/>
@@ -6347,7 +6428,7 @@
               <a:buNone/>
             </a:pPr>
             <a:r>
-              <a:rPr lang="en-US" sz="1550" dirty="0">
+              <a:rPr lang="en-US" sz="1320" dirty="0">
                 <a:solidFill>
                   <a:srgbClr val="17364A"/>
                 </a:solidFill>
@@ -6357,7 +6438,7 @@
               </a:rPr>
               <a:t>Reporting pattern changes.</a:t>
             </a:r>
-            <a:endParaRPr lang="en-US" sz="1550" dirty="0"/>
+            <a:endParaRPr lang="en-US" sz="1320" dirty="0"/>
           </a:p>
         </p:txBody>
       </p:sp>
@@ -6445,13 +6526,16 @@
           <a:ln/>
         </p:spPr>
         <p:txBody>
-          <a:bodyPr wrap="square" lIns="254" tIns="254" rIns="254" bIns="254" rtlCol="0" anchor="t">
+          <a:bodyPr wrap="square" lIns="508" tIns="508" rIns="508" bIns="508" rtlCol="0" anchor="t">
             <a:normAutofit/>
           </a:bodyPr>
           <a:lstStyle/>
           <a:p>
-            <a:r>
-              <a:rPr lang="en-US" sz="1380" dirty="0">
+            <a:pPr indent="0" marL="0">
+              <a:buNone/>
+            </a:pPr>
+            <a:r>
+              <a:rPr lang="en-US" sz="1220" dirty="0">
                 <a:solidFill>
                   <a:srgbClr val="17364A"/>
                 </a:solidFill>
@@ -6461,11 +6545,14 @@
               </a:rPr>
               <a:t>Reporting pattern changes.</a:t>
             </a:r>
-            <a:endParaRPr lang="en-US" sz="1380" dirty="0"/>
-          </a:p>
-          <a:p>
-            <a:r>
-              <a:rPr lang="en-US" sz="1380" dirty="0">
+            <a:endParaRPr lang="en-US" sz="1220" dirty="0"/>
+          </a:p>
+          <a:p>
+            <a:pPr indent="0" marL="0">
+              <a:buNone/>
+            </a:pPr>
+            <a:r>
+              <a:rPr lang="en-US" sz="1220" dirty="0">
                 <a:solidFill>
                   <a:srgbClr val="17364A"/>
                 </a:solidFill>
@@ -6475,11 +6562,14 @@
               </a:rPr>
               <a:t>Lab reporting changes may look like disease changes.</a:t>
             </a:r>
-            <a:endParaRPr lang="en-US" sz="1380" dirty="0"/>
-          </a:p>
-          <a:p>
-            <a:r>
-              <a:rPr lang="en-US" sz="1380" dirty="0">
+            <a:endParaRPr lang="en-US" sz="1220" dirty="0"/>
+          </a:p>
+          <a:p>
+            <a:pPr indent="0" marL="0">
+              <a:buNone/>
+            </a:pPr>
+            <a:r>
+              <a:rPr lang="en-US" sz="1220" dirty="0">
                 <a:solidFill>
                   <a:srgbClr val="17364A"/>
                 </a:solidFill>
@@ -6487,9 +6577,9 @@
                 <a:ea typeface="Aptos" pitchFamily="34" charset="-122"/>
                 <a:cs typeface="Aptos" pitchFamily="34" charset="-120"/>
               </a:rPr>
-              <a:t>Guardrails include volume monitoring, partner change logs, and anomaly review.</a:t>
-            </a:r>
-            <a:endParaRPr lang="en-US" sz="1380" dirty="0"/>
+              <a:t>Guardrails include volume monitoring, partner change logs, and.</a:t>
+            </a:r>
+            <a:endParaRPr lang="en-US" sz="1220" dirty="0"/>
           </a:p>
         </p:txBody>
       </p:sp>
@@ -6567,17 +6657,17 @@
         </p:nvSpPr>
         <p:spPr>
           <a:xfrm>
-            <a:off x="7799832" y="5001768"/>
-            <a:ext cx="3145536" cy="502920"/>
-          </a:xfrm>
-          <a:prstGeom prst="rect">
-            <a:avLst/>
-          </a:prstGeom>
-          <a:noFill/>
-          <a:ln/>
-        </p:spPr>
-        <p:txBody>
-          <a:bodyPr wrap="square" lIns="0" tIns="0" rIns="0" bIns="0" rtlCol="0" anchor="t">
+            <a:off x="7799832" y="4974336"/>
+            <a:ext cx="3145536" cy="576072"/>
+          </a:xfrm>
+          <a:prstGeom prst="rect">
+            <a:avLst/>
+          </a:prstGeom>
+          <a:noFill/>
+          <a:ln/>
+        </p:spPr>
+        <p:txBody>
+          <a:bodyPr wrap="square" lIns="254" tIns="254" rIns="254" bIns="254" rtlCol="0" anchor="t">
             <a:normAutofit/>
           </a:bodyPr>
           <a:lstStyle/>
@@ -6586,7 +6676,7 @@
               <a:buNone/>
             </a:pPr>
             <a:r>
-              <a:rPr lang="en-US" sz="1550" dirty="0">
+              <a:rPr lang="en-US" sz="1320" dirty="0">
                 <a:solidFill>
                   <a:srgbClr val="17364A"/>
                 </a:solidFill>
@@ -6594,9 +6684,9 @@
                 <a:ea typeface="Aptos" pitchFamily="34" charset="-122"/>
                 <a:cs typeface="Aptos" pitchFamily="34" charset="-120"/>
               </a:rPr>
-              <a:t>Identify what could go wrong, who could be affected, what safeguards are needed, and what evidence should be reviewed before use expands.</a:t>
-            </a:r>
-            <a:endParaRPr lang="en-US" sz="1550" dirty="0"/>
+              <a:t>Identify what could go wrong, who could be affected, what safeguards are needed, and what evidence should be reviewed.</a:t>
+            </a:r>
+            <a:endParaRPr lang="en-US" sz="1320" dirty="0"/>
           </a:p>
         </p:txBody>
       </p:sp>
@@ -6897,49 +6987,58 @@
           <a:ln/>
         </p:spPr>
         <p:txBody>
-          <a:bodyPr wrap="square" lIns="635" tIns="635" rIns="635" bIns="635" rtlCol="0" anchor="t">
+          <a:bodyPr wrap="square" lIns="1016" tIns="1016" rIns="1016" bIns="1016" rtlCol="0" anchor="t">
             <a:normAutofit/>
           </a:bodyPr>
           <a:lstStyle/>
           <a:p>
+            <a:pPr indent="0" marL="0">
+              <a:buNone/>
+            </a:pPr>
             <a:r>
               <a:rPr lang="en-US" sz="2100" dirty="0">
                 <a:solidFill>
-                  <a:srgbClr val="17364A"/>
-                </a:solidFill>
-                <a:latin typeface="Aptos" pitchFamily="34" charset="0"/>
-                <a:ea typeface="Aptos" pitchFamily="34" charset="-122"/>
-                <a:cs typeface="Aptos" pitchFamily="34" charset="-120"/>
-              </a:rPr>
-              <a:t>Generative AI may draft lab summaries, but it should preserve source values and avoid interpreting.</a:t>
+                  <a:srgbClr val="003A63"/>
+                </a:solidFill>
+                <a:latin typeface="Aptos" pitchFamily="34" charset="0"/>
+                <a:ea typeface="Aptos" pitchFamily="34" charset="-122"/>
+                <a:cs typeface="Aptos" pitchFamily="34" charset="-120"/>
+              </a:rPr>
+              <a:t>• Generative AI may draft lab summaries, but it should preserve source values and avoid.</a:t>
             </a:r>
             <a:endParaRPr lang="en-US" sz="2100" dirty="0"/>
           </a:p>
           <a:p>
+            <a:pPr indent="0" marL="0">
+              <a:buNone/>
+            </a:pPr>
             <a:r>
               <a:rPr lang="en-US" sz="2100" dirty="0">
                 <a:solidFill>
-                  <a:srgbClr val="17364A"/>
-                </a:solidFill>
-                <a:latin typeface="Aptos" pitchFamily="34" charset="0"/>
-                <a:ea typeface="Aptos" pitchFamily="34" charset="-122"/>
-                <a:cs typeface="Aptos" pitchFamily="34" charset="-120"/>
-              </a:rPr>
-              <a:t>Predictive analytics may use lab trends, but model monitoring must distinguish reporting artifacts from.</a:t>
+                  <a:srgbClr val="003A63"/>
+                </a:solidFill>
+                <a:latin typeface="Aptos" pitchFamily="34" charset="0"/>
+                <a:ea typeface="Aptos" pitchFamily="34" charset="-122"/>
+                <a:cs typeface="Aptos" pitchFamily="34" charset="-120"/>
+              </a:rPr>
+              <a:t>• Predictive analytics may use lab trends, but model monitoring must distinguish reporting.</a:t>
             </a:r>
             <a:endParaRPr lang="en-US" sz="2100" dirty="0"/>
           </a:p>
           <a:p>
+            <a:pPr indent="0" marL="0">
+              <a:buNone/>
+            </a:pPr>
             <a:r>
               <a:rPr lang="en-US" sz="2100" dirty="0">
                 <a:solidFill>
-                  <a:srgbClr val="17364A"/>
-                </a:solidFill>
-                <a:latin typeface="Aptos" pitchFamily="34" charset="0"/>
-                <a:ea typeface="Aptos" pitchFamily="34" charset="-122"/>
-                <a:cs typeface="Aptos" pitchFamily="34" charset="-120"/>
-              </a:rPr>
-              <a:t>NLP may interpret free-text results, but extraction accuracy must be validated.</a:t>
+                  <a:srgbClr val="003A63"/>
+                </a:solidFill>
+                <a:latin typeface="Aptos" pitchFamily="34" charset="0"/>
+                <a:ea typeface="Aptos" pitchFamily="34" charset="-122"/>
+                <a:cs typeface="Aptos" pitchFamily="34" charset="-120"/>
+              </a:rPr>
+              <a:t>• NLP may interpret free-text results, but extraction accuracy must be validated.</a:t>
             </a:r>
             <a:endParaRPr lang="en-US" sz="2100" dirty="0"/>
           </a:p>
@@ -7019,17 +7118,17 @@
         </p:nvSpPr>
         <p:spPr>
           <a:xfrm>
-            <a:off x="7799832" y="1828800"/>
-            <a:ext cx="3145536" cy="685800"/>
-          </a:xfrm>
-          <a:prstGeom prst="rect">
-            <a:avLst/>
-          </a:prstGeom>
-          <a:noFill/>
-          <a:ln/>
-        </p:spPr>
-        <p:txBody>
-          <a:bodyPr wrap="square" lIns="0" tIns="0" rIns="0" bIns="0" rtlCol="0" anchor="t">
+            <a:off x="7799832" y="1801368"/>
+            <a:ext cx="3145536" cy="758952"/>
+          </a:xfrm>
+          <a:prstGeom prst="rect">
+            <a:avLst/>
+          </a:prstGeom>
+          <a:noFill/>
+          <a:ln/>
+        </p:spPr>
+        <p:txBody>
+          <a:bodyPr wrap="square" lIns="254" tIns="254" rIns="254" bIns="254" rtlCol="0" anchor="t">
             <a:normAutofit/>
           </a:bodyPr>
           <a:lstStyle/>
@@ -7038,7 +7137,7 @@
               <a:buNone/>
             </a:pPr>
             <a:r>
-              <a:rPr lang="en-US" sz="1550" dirty="0">
+              <a:rPr lang="en-US" sz="1320" dirty="0">
                 <a:solidFill>
                   <a:srgbClr val="17364A"/>
                 </a:solidFill>
@@ -7048,7 +7147,7 @@
               </a:rPr>
               <a:t>Generative AI may draft lab summaries, but it should preserve source values and avoid interpreting.</a:t>
             </a:r>
-            <a:endParaRPr lang="en-US" sz="1550" dirty="0"/>
+            <a:endParaRPr lang="en-US" sz="1320" dirty="0"/>
           </a:p>
         </p:txBody>
       </p:sp>
@@ -7136,13 +7235,16 @@
           <a:ln/>
         </p:spPr>
         <p:txBody>
-          <a:bodyPr wrap="square" lIns="254" tIns="254" rIns="254" bIns="254" rtlCol="0" anchor="t">
+          <a:bodyPr wrap="square" lIns="508" tIns="508" rIns="508" bIns="508" rtlCol="0" anchor="t">
             <a:normAutofit/>
           </a:bodyPr>
           <a:lstStyle/>
           <a:p>
-            <a:r>
-              <a:rPr lang="en-US" sz="1380" dirty="0">
+            <a:pPr indent="0" marL="0">
+              <a:buNone/>
+            </a:pPr>
+            <a:r>
+              <a:rPr lang="en-US" sz="1220" dirty="0">
                 <a:solidFill>
                   <a:srgbClr val="17364A"/>
                 </a:solidFill>
@@ -7150,13 +7252,16 @@
                 <a:ea typeface="Aptos" pitchFamily="34" charset="-122"/>
                 <a:cs typeface="Aptos" pitchFamily="34" charset="-120"/>
               </a:rPr>
-              <a:t>Generative AI may draft lab summaries, but it should preserve source values and avoid.</a:t>
-            </a:r>
-            <a:endParaRPr lang="en-US" sz="1380" dirty="0"/>
-          </a:p>
-          <a:p>
-            <a:r>
-              <a:rPr lang="en-US" sz="1380" dirty="0">
+              <a:t>Generative AI may draft lab summaries, but it should preserve.</a:t>
+            </a:r>
+            <a:endParaRPr lang="en-US" sz="1220" dirty="0"/>
+          </a:p>
+          <a:p>
+            <a:pPr indent="0" marL="0">
+              <a:buNone/>
+            </a:pPr>
+            <a:r>
+              <a:rPr lang="en-US" sz="1220" dirty="0">
                 <a:solidFill>
                   <a:srgbClr val="17364A"/>
                 </a:solidFill>
@@ -7164,13 +7269,16 @@
                 <a:ea typeface="Aptos" pitchFamily="34" charset="-122"/>
                 <a:cs typeface="Aptos" pitchFamily="34" charset="-120"/>
               </a:rPr>
-              <a:t>Predictive analytics may use lab trends, but model monitoring must distinguish reporting.</a:t>
-            </a:r>
-            <a:endParaRPr lang="en-US" sz="1380" dirty="0"/>
-          </a:p>
-          <a:p>
-            <a:r>
-              <a:rPr lang="en-US" sz="1380" dirty="0">
+              <a:t>Predictive analytics may use lab trends, but model monitoring must.</a:t>
+            </a:r>
+            <a:endParaRPr lang="en-US" sz="1220" dirty="0"/>
+          </a:p>
+          <a:p>
+            <a:pPr indent="0" marL="0">
+              <a:buNone/>
+            </a:pPr>
+            <a:r>
+              <a:rPr lang="en-US" sz="1220" dirty="0">
                 <a:solidFill>
                   <a:srgbClr val="17364A"/>
                 </a:solidFill>
@@ -7178,9 +7286,9 @@
                 <a:ea typeface="Aptos" pitchFamily="34" charset="-122"/>
                 <a:cs typeface="Aptos" pitchFamily="34" charset="-120"/>
               </a:rPr>
-              <a:t>Agentic workflows that trigger tasks from lab results require clear thresholds and human.</a:t>
-            </a:r>
-            <a:endParaRPr lang="en-US" sz="1380" dirty="0"/>
+              <a:t>Agentic workflows that trigger tasks from lab results require.</a:t>
+            </a:r>
+            <a:endParaRPr lang="en-US" sz="1220" dirty="0"/>
           </a:p>
         </p:txBody>
       </p:sp>
@@ -7258,17 +7366,17 @@
         </p:nvSpPr>
         <p:spPr>
           <a:xfrm>
-            <a:off x="7799832" y="5001768"/>
-            <a:ext cx="3145536" cy="502920"/>
-          </a:xfrm>
-          <a:prstGeom prst="rect">
-            <a:avLst/>
-          </a:prstGeom>
-          <a:noFill/>
-          <a:ln/>
-        </p:spPr>
-        <p:txBody>
-          <a:bodyPr wrap="square" lIns="0" tIns="0" rIns="0" bIns="0" rtlCol="0" anchor="t">
+            <a:off x="7799832" y="4974336"/>
+            <a:ext cx="3145536" cy="576072"/>
+          </a:xfrm>
+          <a:prstGeom prst="rect">
+            <a:avLst/>
+          </a:prstGeom>
+          <a:noFill/>
+          <a:ln/>
+        </p:spPr>
+        <p:txBody>
+          <a:bodyPr wrap="square" lIns="254" tIns="254" rIns="254" bIns="254" rtlCol="0" anchor="t">
             <a:normAutofit/>
           </a:bodyPr>
           <a:lstStyle/>
@@ -7277,7 +7385,7 @@
               <a:buNone/>
             </a:pPr>
             <a:r>
-              <a:rPr lang="en-US" sz="1550" dirty="0">
+              <a:rPr lang="en-US" sz="1320" dirty="0">
                 <a:solidFill>
                   <a:srgbClr val="17364A"/>
                 </a:solidFill>
@@ -7285,9 +7393,9 @@
                 <a:ea typeface="Aptos" pitchFamily="34" charset="-122"/>
                 <a:cs typeface="Aptos" pitchFamily="34" charset="-120"/>
               </a:rPr>
-              <a:t>Connect the concept to data quality, model performance, validation evidence, monitoring measures, and decisions that remain under human control.</a:t>
-            </a:r>
-            <a:endParaRPr lang="en-US" sz="1550" dirty="0"/>
+              <a:t>Connect the concept to data quality, model performance, validation evidence, monitoring measures, and decisions that.</a:t>
+            </a:r>
+            <a:endParaRPr lang="en-US" sz="1320" dirty="0"/>
           </a:p>
         </p:txBody>
       </p:sp>
@@ -7588,49 +7696,58 @@
           <a:ln/>
         </p:spPr>
         <p:txBody>
-          <a:bodyPr wrap="square" lIns="635" tIns="635" rIns="635" bIns="635" rtlCol="0" anchor="t">
+          <a:bodyPr wrap="square" lIns="1016" tIns="1016" rIns="1016" bIns="1016" rtlCol="0" anchor="t">
             <a:normAutofit/>
           </a:bodyPr>
           <a:lstStyle/>
           <a:p>
+            <a:pPr indent="0" marL="0">
+              <a:buNone/>
+            </a:pPr>
             <a:r>
               <a:rPr lang="en-US" sz="2100" dirty="0">
                 <a:solidFill>
-                  <a:srgbClr val="17364A"/>
-                </a:solidFill>
-                <a:latin typeface="Aptos" pitchFamily="34" charset="0"/>
-                <a:ea typeface="Aptos" pitchFamily="34" charset="-122"/>
-                <a:cs typeface="Aptos" pitchFamily="34" charset="-120"/>
-              </a:rPr>
-              <a:t>Which laboratory data quality issues most often affect your surveillance workflows?</a:t>
+                  <a:srgbClr val="003A63"/>
+                </a:solidFill>
+                <a:latin typeface="Aptos" pitchFamily="34" charset="0"/>
+                <a:ea typeface="Aptos" pitchFamily="34" charset="-122"/>
+                <a:cs typeface="Aptos" pitchFamily="34" charset="-120"/>
+              </a:rPr>
+              <a:t>• Which laboratory data quality issues most often affect your surveillance workflows?</a:t>
             </a:r>
             <a:endParaRPr lang="en-US" sz="2100" dirty="0"/>
           </a:p>
           <a:p>
+            <a:pPr indent="0" marL="0">
+              <a:buNone/>
+            </a:pPr>
             <a:r>
               <a:rPr lang="en-US" sz="2100" dirty="0">
                 <a:solidFill>
-                  <a:srgbClr val="17364A"/>
-                </a:solidFill>
-                <a:latin typeface="Aptos" pitchFamily="34" charset="0"/>
-                <a:ea typeface="Aptos" pitchFamily="34" charset="-122"/>
-                <a:cs typeface="Aptos" pitchFamily="34" charset="-120"/>
-              </a:rPr>
-              <a:t>Which local codes require mapping before data can be used reliably?</a:t>
+                  <a:srgbClr val="003A63"/>
+                </a:solidFill>
+                <a:latin typeface="Aptos" pitchFamily="34" charset="0"/>
+                <a:ea typeface="Aptos" pitchFamily="34" charset="-122"/>
+                <a:cs typeface="Aptos" pitchFamily="34" charset="-120"/>
+              </a:rPr>
+              <a:t>• Which local codes require mapping before data can be used reliably?</a:t>
             </a:r>
             <a:endParaRPr lang="en-US" sz="2100" dirty="0"/>
           </a:p>
           <a:p>
+            <a:pPr indent="0" marL="0">
+              <a:buNone/>
+            </a:pPr>
             <a:r>
               <a:rPr lang="en-US" sz="2100" dirty="0">
                 <a:solidFill>
-                  <a:srgbClr val="17364A"/>
-                </a:solidFill>
-                <a:latin typeface="Aptos" pitchFamily="34" charset="0"/>
-                <a:ea typeface="Aptos" pitchFamily="34" charset="-122"/>
-                <a:cs typeface="Aptos" pitchFamily="34" charset="-120"/>
-              </a:rPr>
-              <a:t>Are test-result pairs consistently represented?</a:t>
+                  <a:srgbClr val="003A63"/>
+                </a:solidFill>
+                <a:latin typeface="Aptos" pitchFamily="34" charset="0"/>
+                <a:ea typeface="Aptos" pitchFamily="34" charset="-122"/>
+                <a:cs typeface="Aptos" pitchFamily="34" charset="-120"/>
+              </a:rPr>
+              <a:t>• Are test-result pairs consistently represented?</a:t>
             </a:r>
             <a:endParaRPr lang="en-US" sz="2100" dirty="0"/>
           </a:p>
@@ -7710,17 +7827,17 @@
         </p:nvSpPr>
         <p:spPr>
           <a:xfrm>
-            <a:off x="7799832" y="1828800"/>
-            <a:ext cx="3145536" cy="685800"/>
-          </a:xfrm>
-          <a:prstGeom prst="rect">
-            <a:avLst/>
-          </a:prstGeom>
-          <a:noFill/>
-          <a:ln/>
-        </p:spPr>
-        <p:txBody>
-          <a:bodyPr wrap="square" lIns="0" tIns="0" rIns="0" bIns="0" rtlCol="0" anchor="t">
+            <a:off x="7799832" y="1801368"/>
+            <a:ext cx="3145536" cy="758952"/>
+          </a:xfrm>
+          <a:prstGeom prst="rect">
+            <a:avLst/>
+          </a:prstGeom>
+          <a:noFill/>
+          <a:ln/>
+        </p:spPr>
+        <p:txBody>
+          <a:bodyPr wrap="square" lIns="254" tIns="254" rIns="254" bIns="254" rtlCol="0" anchor="t">
             <a:normAutofit/>
           </a:bodyPr>
           <a:lstStyle/>
@@ -7729,7 +7846,7 @@
               <a:buNone/>
             </a:pPr>
             <a:r>
-              <a:rPr lang="en-US" sz="1550" dirty="0">
+              <a:rPr lang="en-US" sz="1320" dirty="0">
                 <a:solidFill>
                   <a:srgbClr val="17364A"/>
                 </a:solidFill>
@@ -7739,7 +7856,7 @@
               </a:rPr>
               <a:t>Which laboratory data quality issues most often affect your surveillance workflows?</a:t>
             </a:r>
-            <a:endParaRPr lang="en-US" sz="1550" dirty="0"/>
+            <a:endParaRPr lang="en-US" sz="1320" dirty="0"/>
           </a:p>
         </p:txBody>
       </p:sp>
@@ -7827,13 +7944,16 @@
           <a:ln/>
         </p:spPr>
         <p:txBody>
-          <a:bodyPr wrap="square" lIns="254" tIns="254" rIns="254" bIns="254" rtlCol="0" anchor="t">
+          <a:bodyPr wrap="square" lIns="508" tIns="508" rIns="508" bIns="508" rtlCol="0" anchor="t">
             <a:normAutofit/>
           </a:bodyPr>
           <a:lstStyle/>
           <a:p>
-            <a:r>
-              <a:rPr lang="en-US" sz="1380" dirty="0">
+            <a:pPr indent="0" marL="0">
+              <a:buNone/>
+            </a:pPr>
+            <a:r>
+              <a:rPr lang="en-US" sz="1220" dirty="0">
                 <a:solidFill>
                   <a:srgbClr val="17364A"/>
                 </a:solidFill>
@@ -7841,13 +7961,16 @@
                 <a:ea typeface="Aptos" pitchFamily="34" charset="-122"/>
                 <a:cs typeface="Aptos" pitchFamily="34" charset="-120"/>
               </a:rPr>
-              <a:t>Which laboratory data quality issues most often affect your surveillance workflows?</a:t>
-            </a:r>
-            <a:endParaRPr lang="en-US" sz="1380" dirty="0"/>
-          </a:p>
-          <a:p>
-            <a:r>
-              <a:rPr lang="en-US" sz="1380" dirty="0">
+              <a:t>Which laboratory data quality issues most often affect your.</a:t>
+            </a:r>
+            <a:endParaRPr lang="en-US" sz="1220" dirty="0"/>
+          </a:p>
+          <a:p>
+            <a:pPr indent="0" marL="0">
+              <a:buNone/>
+            </a:pPr>
+            <a:r>
+              <a:rPr lang="en-US" sz="1220" dirty="0">
                 <a:solidFill>
                   <a:srgbClr val="17364A"/>
                 </a:solidFill>
@@ -7857,11 +7980,14 @@
               </a:rPr>
               <a:t>Which local codes require mapping before data can be used reliably?</a:t>
             </a:r>
-            <a:endParaRPr lang="en-US" sz="1380" dirty="0"/>
-          </a:p>
-          <a:p>
-            <a:r>
-              <a:rPr lang="en-US" sz="1380" dirty="0">
+            <a:endParaRPr lang="en-US" sz="1220" dirty="0"/>
+          </a:p>
+          <a:p>
+            <a:pPr indent="0" marL="0">
+              <a:buNone/>
+            </a:pPr>
+            <a:r>
+              <a:rPr lang="en-US" sz="1220" dirty="0">
                 <a:solidFill>
                   <a:srgbClr val="17364A"/>
                 </a:solidFill>
@@ -7871,7 +7997,7 @@
               </a:rPr>
               <a:t>Are test-result pairs consistently represented?</a:t>
             </a:r>
-            <a:endParaRPr lang="en-US" sz="1380" dirty="0"/>
+            <a:endParaRPr lang="en-US" sz="1220" dirty="0"/>
           </a:p>
         </p:txBody>
       </p:sp>
@@ -7949,17 +8075,17 @@
         </p:nvSpPr>
         <p:spPr>
           <a:xfrm>
-            <a:off x="7799832" y="5001768"/>
-            <a:ext cx="3145536" cy="502920"/>
-          </a:xfrm>
-          <a:prstGeom prst="rect">
-            <a:avLst/>
-          </a:prstGeom>
-          <a:noFill/>
-          <a:ln/>
-        </p:spPr>
-        <p:txBody>
-          <a:bodyPr wrap="square" lIns="0" tIns="0" rIns="0" bIns="0" rtlCol="0" anchor="t">
+            <a:off x="7799832" y="4974336"/>
+            <a:ext cx="3145536" cy="576072"/>
+          </a:xfrm>
+          <a:prstGeom prst="rect">
+            <a:avLst/>
+          </a:prstGeom>
+          <a:noFill/>
+          <a:ln/>
+        </p:spPr>
+        <p:txBody>
+          <a:bodyPr wrap="square" lIns="254" tIns="254" rIns="254" bIns="254" rtlCol="0" anchor="t">
             <a:normAutofit/>
           </a:bodyPr>
           <a:lstStyle/>
@@ -7968,7 +8094,7 @@
               <a:buNone/>
             </a:pPr>
             <a:r>
-              <a:rPr lang="en-US" sz="1550" dirty="0">
+              <a:rPr lang="en-US" sz="1320" dirty="0">
                 <a:solidFill>
                   <a:srgbClr val="17364A"/>
                 </a:solidFill>
@@ -7976,9 +8102,9 @@
                 <a:ea typeface="Aptos" pitchFamily="34" charset="-122"/>
                 <a:cs typeface="Aptos" pitchFamily="34" charset="-120"/>
               </a:rPr>
-              <a:t>Connect the concept to data quality, model performance, validation evidence, monitoring measures, and decisions that remain under human control.</a:t>
-            </a:r>
-            <a:endParaRPr lang="en-US" sz="1550" dirty="0"/>
+              <a:t>Connect the concept to data quality, model performance, validation evidence, monitoring measures, and decisions that.</a:t>
+            </a:r>
+            <a:endParaRPr lang="en-US" sz="1320" dirty="0"/>
           </a:p>
         </p:txBody>
       </p:sp>
@@ -8279,35 +8405,41 @@
           <a:ln/>
         </p:spPr>
         <p:txBody>
-          <a:bodyPr wrap="square" lIns="635" tIns="635" rIns="635" bIns="635" rtlCol="0" anchor="t">
+          <a:bodyPr wrap="square" lIns="1016" tIns="1016" rIns="1016" bIns="1016" rtlCol="0" anchor="t">
             <a:normAutofit/>
           </a:bodyPr>
           <a:lstStyle/>
           <a:p>
+            <a:pPr indent="0" marL="0">
+              <a:buNone/>
+            </a:pPr>
             <a:r>
               <a:rPr lang="en-US" sz="2100" dirty="0">
                 <a:solidFill>
-                  <a:srgbClr val="17364A"/>
-                </a:solidFill>
-                <a:latin typeface="Aptos" pitchFamily="34" charset="0"/>
-                <a:ea typeface="Aptos" pitchFamily="34" charset="-122"/>
-                <a:cs typeface="Aptos" pitchFamily="34" charset="-120"/>
-              </a:rPr>
-              <a:t>Which missing fields would make AI summarization unsafe?</a:t>
+                  <a:srgbClr val="003A63"/>
+                </a:solidFill>
+                <a:latin typeface="Aptos" pitchFamily="34" charset="0"/>
+                <a:ea typeface="Aptos" pitchFamily="34" charset="-122"/>
+                <a:cs typeface="Aptos" pitchFamily="34" charset="-120"/>
+              </a:rPr>
+              <a:t>• Which missing fields would make AI summarization unsafe?</a:t>
             </a:r>
             <a:endParaRPr lang="en-US" sz="2100" dirty="0"/>
           </a:p>
           <a:p>
+            <a:pPr indent="0" marL="0">
+              <a:buNone/>
+            </a:pPr>
             <a:r>
               <a:rPr lang="en-US" sz="2100" dirty="0">
                 <a:solidFill>
-                  <a:srgbClr val="17364A"/>
-                </a:solidFill>
-                <a:latin typeface="Aptos" pitchFamily="34" charset="0"/>
-                <a:ea typeface="Aptos" pitchFamily="34" charset="-122"/>
-                <a:cs typeface="Aptos" pitchFamily="34" charset="-120"/>
-              </a:rPr>
-              <a:t>How would staff detect a reporting change that affects AI outputs?</a:t>
+                  <a:srgbClr val="003A63"/>
+                </a:solidFill>
+                <a:latin typeface="Aptos" pitchFamily="34" charset="0"/>
+                <a:ea typeface="Aptos" pitchFamily="34" charset="-122"/>
+                <a:cs typeface="Aptos" pitchFamily="34" charset="-120"/>
+              </a:rPr>
+              <a:t>• How would staff detect a reporting change that affects AI outputs?</a:t>
             </a:r>
             <a:endParaRPr lang="en-US" sz="2100" dirty="0"/>
           </a:p>
@@ -8387,17 +8519,17 @@
         </p:nvSpPr>
         <p:spPr>
           <a:xfrm>
-            <a:off x="7799832" y="1828800"/>
-            <a:ext cx="3145536" cy="685800"/>
-          </a:xfrm>
-          <a:prstGeom prst="rect">
-            <a:avLst/>
-          </a:prstGeom>
-          <a:noFill/>
-          <a:ln/>
-        </p:spPr>
-        <p:txBody>
-          <a:bodyPr wrap="square" lIns="0" tIns="0" rIns="0" bIns="0" rtlCol="0" anchor="t">
+            <a:off x="7799832" y="1801368"/>
+            <a:ext cx="3145536" cy="758952"/>
+          </a:xfrm>
+          <a:prstGeom prst="rect">
+            <a:avLst/>
+          </a:prstGeom>
+          <a:noFill/>
+          <a:ln/>
+        </p:spPr>
+        <p:txBody>
+          <a:bodyPr wrap="square" lIns="254" tIns="254" rIns="254" bIns="254" rtlCol="0" anchor="t">
             <a:normAutofit/>
           </a:bodyPr>
           <a:lstStyle/>
@@ -8406,7 +8538,7 @@
               <a:buNone/>
             </a:pPr>
             <a:r>
-              <a:rPr lang="en-US" sz="1550" dirty="0">
+              <a:rPr lang="en-US" sz="1320" dirty="0">
                 <a:solidFill>
                   <a:srgbClr val="17364A"/>
                 </a:solidFill>
@@ -8416,7 +8548,7 @@
               </a:rPr>
               <a:t>Which missing fields would make AI summarization unsafe?</a:t>
             </a:r>
-            <a:endParaRPr lang="en-US" sz="1550" dirty="0"/>
+            <a:endParaRPr lang="en-US" sz="1320" dirty="0"/>
           </a:p>
         </p:txBody>
       </p:sp>
@@ -8504,13 +8636,16 @@
           <a:ln/>
         </p:spPr>
         <p:txBody>
-          <a:bodyPr wrap="square" lIns="254" tIns="254" rIns="254" bIns="254" rtlCol="0" anchor="t">
+          <a:bodyPr wrap="square" lIns="508" tIns="508" rIns="508" bIns="508" rtlCol="0" anchor="t">
             <a:normAutofit/>
           </a:bodyPr>
           <a:lstStyle/>
           <a:p>
-            <a:r>
-              <a:rPr lang="en-US" sz="1380" dirty="0">
+            <a:pPr indent="0" marL="0">
+              <a:buNone/>
+            </a:pPr>
+            <a:r>
+              <a:rPr lang="en-US" sz="1220" dirty="0">
                 <a:solidFill>
                   <a:srgbClr val="17364A"/>
                 </a:solidFill>
@@ -8520,11 +8655,14 @@
               </a:rPr>
               <a:t>Which missing fields would make AI summarization unsafe?</a:t>
             </a:r>
-            <a:endParaRPr lang="en-US" sz="1380" dirty="0"/>
-          </a:p>
-          <a:p>
-            <a:r>
-              <a:rPr lang="en-US" sz="1380" dirty="0">
+            <a:endParaRPr lang="en-US" sz="1220" dirty="0"/>
+          </a:p>
+          <a:p>
+            <a:pPr indent="0" marL="0">
+              <a:buNone/>
+            </a:pPr>
+            <a:r>
+              <a:rPr lang="en-US" sz="1220" dirty="0">
                 <a:solidFill>
                   <a:srgbClr val="17364A"/>
                 </a:solidFill>
@@ -8534,7 +8672,7 @@
               </a:rPr>
               <a:t>How would staff detect a reporting change that affects AI outputs?</a:t>
             </a:r>
-            <a:endParaRPr lang="en-US" sz="1380" dirty="0"/>
+            <a:endParaRPr lang="en-US" sz="1220" dirty="0"/>
           </a:p>
         </p:txBody>
       </p:sp>
@@ -8612,17 +8750,17 @@
         </p:nvSpPr>
         <p:spPr>
           <a:xfrm>
-            <a:off x="7799832" y="5001768"/>
-            <a:ext cx="3145536" cy="502920"/>
-          </a:xfrm>
-          <a:prstGeom prst="rect">
-            <a:avLst/>
-          </a:prstGeom>
-          <a:noFill/>
-          <a:ln/>
-        </p:spPr>
-        <p:txBody>
-          <a:bodyPr wrap="square" lIns="0" tIns="0" rIns="0" bIns="0" rtlCol="0" anchor="t">
+            <a:off x="7799832" y="4974336"/>
+            <a:ext cx="3145536" cy="576072"/>
+          </a:xfrm>
+          <a:prstGeom prst="rect">
+            <a:avLst/>
+          </a:prstGeom>
+          <a:noFill/>
+          <a:ln/>
+        </p:spPr>
+        <p:txBody>
+          <a:bodyPr wrap="square" lIns="254" tIns="254" rIns="254" bIns="254" rtlCol="0" anchor="t">
             <a:normAutofit/>
           </a:bodyPr>
           <a:lstStyle/>
@@ -8631,7 +8769,7 @@
               <a:buNone/>
             </a:pPr>
             <a:r>
-              <a:rPr lang="en-US" sz="1550" dirty="0">
+              <a:rPr lang="en-US" sz="1320" dirty="0">
                 <a:solidFill>
                   <a:srgbClr val="17364A"/>
                 </a:solidFill>
@@ -8639,9 +8777,9 @@
                 <a:ea typeface="Aptos" pitchFamily="34" charset="-122"/>
                 <a:cs typeface="Aptos" pitchFamily="34" charset="-120"/>
               </a:rPr>
-              <a:t>Connect the concept to data quality, model performance, validation evidence, monitoring measures, and decisions that remain under human control.</a:t>
-            </a:r>
-            <a:endParaRPr lang="en-US" sz="1550" dirty="0"/>
+              <a:t>Connect the concept to data quality, model performance, validation evidence, monitoring measures, and decisions that.</a:t>
+            </a:r>
+            <a:endParaRPr lang="en-US" sz="1320" dirty="0"/>
           </a:p>
         </p:txBody>
       </p:sp>
@@ -8942,35 +9080,41 @@
           <a:ln/>
         </p:spPr>
         <p:txBody>
-          <a:bodyPr wrap="square" lIns="635" tIns="635" rIns="635" bIns="635" rtlCol="0" anchor="t">
+          <a:bodyPr wrap="square" lIns="1016" tIns="1016" rIns="1016" bIns="1016" rtlCol="0" anchor="t">
             <a:normAutofit/>
           </a:bodyPr>
           <a:lstStyle/>
           <a:p>
+            <a:pPr indent="0" marL="0">
+              <a:buNone/>
+            </a:pPr>
             <a:r>
               <a:rPr lang="en-US" sz="2100" dirty="0">
                 <a:solidFill>
-                  <a:srgbClr val="17364A"/>
-                </a:solidFill>
-                <a:latin typeface="Aptos" pitchFamily="34" charset="0"/>
-                <a:ea typeface="Aptos" pitchFamily="34" charset="-122"/>
-                <a:cs typeface="Aptos" pitchFamily="34" charset="-120"/>
-              </a:rPr>
-              <a:t>Create a lab data quality checklist for one AI-supported surveillance use case.</a:t>
+                  <a:srgbClr val="003A63"/>
+                </a:solidFill>
+                <a:latin typeface="Aptos" pitchFamily="34" charset="0"/>
+                <a:ea typeface="Aptos" pitchFamily="34" charset="-122"/>
+                <a:cs typeface="Aptos" pitchFamily="34" charset="-120"/>
+              </a:rPr>
+              <a:t>• Create a lab data quality checklist for one AI-supported surveillance use case.</a:t>
             </a:r>
             <a:endParaRPr lang="en-US" sz="2100" dirty="0"/>
           </a:p>
           <a:p>
+            <a:pPr indent="0" marL="0">
+              <a:buNone/>
+            </a:pPr>
             <a:r>
               <a:rPr lang="en-US" sz="2100" dirty="0">
                 <a:solidFill>
-                  <a:srgbClr val="17364A"/>
-                </a:solidFill>
-                <a:latin typeface="Aptos" pitchFamily="34" charset="0"/>
-                <a:ea typeface="Aptos" pitchFamily="34" charset="-122"/>
-                <a:cs typeface="Aptos" pitchFamily="34" charset="-120"/>
-              </a:rPr>
-              <a:t>Include required lab fields, terminology standards, mapping requirements, missingness checks, unit.</a:t>
+                  <a:srgbClr val="003A63"/>
+                </a:solidFill>
+                <a:latin typeface="Aptos" pitchFamily="34" charset="0"/>
+                <a:ea typeface="Aptos" pitchFamily="34" charset="-122"/>
+                <a:cs typeface="Aptos" pitchFamily="34" charset="-120"/>
+              </a:rPr>
+              <a:t>• Include required lab fields, terminology standards, mapping requirements, missingness checks,.</a:t>
             </a:r>
             <a:endParaRPr lang="en-US" sz="2100" dirty="0"/>
           </a:p>
@@ -9050,17 +9194,17 @@
         </p:nvSpPr>
         <p:spPr>
           <a:xfrm>
-            <a:off x="7799832" y="1828800"/>
-            <a:ext cx="3145536" cy="685800"/>
-          </a:xfrm>
-          <a:prstGeom prst="rect">
-            <a:avLst/>
-          </a:prstGeom>
-          <a:noFill/>
-          <a:ln/>
-        </p:spPr>
-        <p:txBody>
-          <a:bodyPr wrap="square" lIns="0" tIns="0" rIns="0" bIns="0" rtlCol="0" anchor="t">
+            <a:off x="7799832" y="1801368"/>
+            <a:ext cx="3145536" cy="758952"/>
+          </a:xfrm>
+          <a:prstGeom prst="rect">
+            <a:avLst/>
+          </a:prstGeom>
+          <a:noFill/>
+          <a:ln/>
+        </p:spPr>
+        <p:txBody>
+          <a:bodyPr wrap="square" lIns="254" tIns="254" rIns="254" bIns="254" rtlCol="0" anchor="t">
             <a:normAutofit/>
           </a:bodyPr>
           <a:lstStyle/>
@@ -9069,7 +9213,7 @@
               <a:buNone/>
             </a:pPr>
             <a:r>
-              <a:rPr lang="en-US" sz="1550" dirty="0">
+              <a:rPr lang="en-US" sz="1320" dirty="0">
                 <a:solidFill>
                   <a:srgbClr val="17364A"/>
                 </a:solidFill>
@@ -9079,7 +9223,7 @@
               </a:rPr>
               <a:t>Create a lab data quality checklist for one AI-supported surveillance use case.</a:t>
             </a:r>
-            <a:endParaRPr lang="en-US" sz="1550" dirty="0"/>
+            <a:endParaRPr lang="en-US" sz="1320" dirty="0"/>
           </a:p>
         </p:txBody>
       </p:sp>
@@ -9167,13 +9311,16 @@
           <a:ln/>
         </p:spPr>
         <p:txBody>
-          <a:bodyPr wrap="square" lIns="254" tIns="254" rIns="254" bIns="254" rtlCol="0" anchor="t">
+          <a:bodyPr wrap="square" lIns="508" tIns="508" rIns="508" bIns="508" rtlCol="0" anchor="t">
             <a:normAutofit/>
           </a:bodyPr>
           <a:lstStyle/>
           <a:p>
-            <a:r>
-              <a:rPr lang="en-US" sz="1380" dirty="0">
+            <a:pPr indent="0" marL="0">
+              <a:buNone/>
+            </a:pPr>
+            <a:r>
+              <a:rPr lang="en-US" sz="1220" dirty="0">
                 <a:solidFill>
                   <a:srgbClr val="17364A"/>
                 </a:solidFill>
@@ -9181,13 +9328,16 @@
                 <a:ea typeface="Aptos" pitchFamily="34" charset="-122"/>
                 <a:cs typeface="Aptos" pitchFamily="34" charset="-120"/>
               </a:rPr>
-              <a:t>Create a lab data quality checklist for one AI-supported surveillance use case.</a:t>
-            </a:r>
-            <a:endParaRPr lang="en-US" sz="1380" dirty="0"/>
-          </a:p>
-          <a:p>
-            <a:r>
-              <a:rPr lang="en-US" sz="1380" dirty="0">
+              <a:t>Create a lab data quality checklist for one AI-supported.</a:t>
+            </a:r>
+            <a:endParaRPr lang="en-US" sz="1220" dirty="0"/>
+          </a:p>
+          <a:p>
+            <a:pPr indent="0" marL="0">
+              <a:buNone/>
+            </a:pPr>
+            <a:r>
+              <a:rPr lang="en-US" sz="1220" dirty="0">
                 <a:solidFill>
                   <a:srgbClr val="17364A"/>
                 </a:solidFill>
@@ -9195,9 +9345,9 @@
                 <a:ea typeface="Aptos" pitchFamily="34" charset="-122"/>
                 <a:cs typeface="Aptos" pitchFamily="34" charset="-120"/>
               </a:rPr>
-              <a:t>Include required lab fields, terminology standards, mapping requirements, missingness.</a:t>
-            </a:r>
-            <a:endParaRPr lang="en-US" sz="1380" dirty="0"/>
+              <a:t>Include required lab fields, terminology standards, mapping.</a:t>
+            </a:r>
+            <a:endParaRPr lang="en-US" sz="1220" dirty="0"/>
           </a:p>
         </p:txBody>
       </p:sp>
@@ -9275,17 +9425,17 @@
         </p:nvSpPr>
         <p:spPr>
           <a:xfrm>
-            <a:off x="7799832" y="5001768"/>
-            <a:ext cx="3145536" cy="502920"/>
-          </a:xfrm>
-          <a:prstGeom prst="rect">
-            <a:avLst/>
-          </a:prstGeom>
-          <a:noFill/>
-          <a:ln/>
-        </p:spPr>
-        <p:txBody>
-          <a:bodyPr wrap="square" lIns="0" tIns="0" rIns="0" bIns="0" rtlCol="0" anchor="t">
+            <a:off x="7799832" y="4974336"/>
+            <a:ext cx="3145536" cy="576072"/>
+          </a:xfrm>
+          <a:prstGeom prst="rect">
+            <a:avLst/>
+          </a:prstGeom>
+          <a:noFill/>
+          <a:ln/>
+        </p:spPr>
+        <p:txBody>
+          <a:bodyPr wrap="square" lIns="254" tIns="254" rIns="254" bIns="254" rtlCol="0" anchor="t">
             <a:normAutofit/>
           </a:bodyPr>
           <a:lstStyle/>
@@ -9294,7 +9444,7 @@
               <a:buNone/>
             </a:pPr>
             <a:r>
-              <a:rPr lang="en-US" sz="1550" dirty="0">
+              <a:rPr lang="en-US" sz="1320" dirty="0">
                 <a:solidFill>
                   <a:srgbClr val="17364A"/>
                 </a:solidFill>
@@ -9302,9 +9452,9 @@
                 <a:ea typeface="Aptos" pitchFamily="34" charset="-122"/>
                 <a:cs typeface="Aptos" pitchFamily="34" charset="-120"/>
               </a:rPr>
-              <a:t>Use the assignment to test whether you can explain the concept, apply it to a realistic public health situation, and identify what would need review before the work moves forward.</a:t>
-            </a:r>
-            <a:endParaRPr lang="en-US" sz="1550" dirty="0"/>
+              <a:t>Use the assignment to test whether you can explain the concept, apply it to a realistic public health situation, and.</a:t>
+            </a:r>
+            <a:endParaRPr lang="en-US" sz="1320" dirty="0"/>
           </a:p>
         </p:txBody>
       </p:sp>
@@ -9605,49 +9755,58 @@
           <a:ln/>
         </p:spPr>
         <p:txBody>
-          <a:bodyPr wrap="square" lIns="635" tIns="635" rIns="635" bIns="635" rtlCol="0" anchor="t">
+          <a:bodyPr wrap="square" lIns="1016" tIns="1016" rIns="1016" bIns="1016" rtlCol="0" anchor="t">
             <a:normAutofit/>
           </a:bodyPr>
           <a:lstStyle/>
           <a:p>
+            <a:pPr indent="0" marL="0">
+              <a:buNone/>
+            </a:pPr>
             <a:r>
               <a:rPr lang="en-US" sz="2100" dirty="0">
                 <a:solidFill>
-                  <a:srgbClr val="17364A"/>
-                </a:solidFill>
-                <a:latin typeface="Aptos" pitchFamily="34" charset="0"/>
-                <a:ea typeface="Aptos" pitchFamily="34" charset="-122"/>
-                <a:cs typeface="Aptos" pitchFamily="34" charset="-120"/>
-              </a:rPr>
-              <a:t>Lab data quality checklist</a:t>
+                  <a:srgbClr val="003A63"/>
+                </a:solidFill>
+                <a:latin typeface="Aptos" pitchFamily="34" charset="0"/>
+                <a:ea typeface="Aptos" pitchFamily="34" charset="-122"/>
+                <a:cs typeface="Aptos" pitchFamily="34" charset="-120"/>
+              </a:rPr>
+              <a:t>• Lab data quality checklist</a:t>
             </a:r>
             <a:endParaRPr lang="en-US" sz="2100" dirty="0"/>
           </a:p>
           <a:p>
+            <a:pPr indent="0" marL="0">
+              <a:buNone/>
+            </a:pPr>
             <a:r>
               <a:rPr lang="en-US" sz="2100" dirty="0">
                 <a:solidFill>
-                  <a:srgbClr val="17364A"/>
-                </a:solidFill>
-                <a:latin typeface="Aptos" pitchFamily="34" charset="0"/>
-                <a:ea typeface="Aptos" pitchFamily="34" charset="-122"/>
-                <a:cs typeface="Aptos" pitchFamily="34" charset="-120"/>
-              </a:rPr>
-              <a:t>Terminology mapping questions</a:t>
+                  <a:srgbClr val="003A63"/>
+                </a:solidFill>
+                <a:latin typeface="Aptos" pitchFamily="34" charset="0"/>
+                <a:ea typeface="Aptos" pitchFamily="34" charset="-122"/>
+                <a:cs typeface="Aptos" pitchFamily="34" charset="-120"/>
+              </a:rPr>
+              <a:t>• Terminology mapping questions</a:t>
             </a:r>
             <a:endParaRPr lang="en-US" sz="2100" dirty="0"/>
           </a:p>
           <a:p>
+            <a:pPr indent="0" marL="0">
+              <a:buNone/>
+            </a:pPr>
             <a:r>
               <a:rPr lang="en-US" sz="2100" dirty="0">
                 <a:solidFill>
-                  <a:srgbClr val="17364A"/>
-                </a:solidFill>
-                <a:latin typeface="Aptos" pitchFamily="34" charset="0"/>
-                <a:ea typeface="Aptos" pitchFamily="34" charset="-122"/>
-                <a:cs typeface="Aptos" pitchFamily="34" charset="-120"/>
-              </a:rPr>
-              <a:t>Required-field list</a:t>
+                  <a:srgbClr val="003A63"/>
+                </a:solidFill>
+                <a:latin typeface="Aptos" pitchFamily="34" charset="0"/>
+                <a:ea typeface="Aptos" pitchFamily="34" charset="-122"/>
+                <a:cs typeface="Aptos" pitchFamily="34" charset="-120"/>
+              </a:rPr>
+              <a:t>• Required-field list</a:t>
             </a:r>
             <a:endParaRPr lang="en-US" sz="2100" dirty="0"/>
           </a:p>
@@ -9727,17 +9886,17 @@
         </p:nvSpPr>
         <p:spPr>
           <a:xfrm>
-            <a:off x="7799832" y="1828800"/>
-            <a:ext cx="3145536" cy="685800"/>
-          </a:xfrm>
-          <a:prstGeom prst="rect">
-            <a:avLst/>
-          </a:prstGeom>
-          <a:noFill/>
-          <a:ln/>
-        </p:spPr>
-        <p:txBody>
-          <a:bodyPr wrap="square" lIns="0" tIns="0" rIns="0" bIns="0" rtlCol="0" anchor="t">
+            <a:off x="7799832" y="1801368"/>
+            <a:ext cx="3145536" cy="758952"/>
+          </a:xfrm>
+          <a:prstGeom prst="rect">
+            <a:avLst/>
+          </a:prstGeom>
+          <a:noFill/>
+          <a:ln/>
+        </p:spPr>
+        <p:txBody>
+          <a:bodyPr wrap="square" lIns="254" tIns="254" rIns="254" bIns="254" rtlCol="0" anchor="t">
             <a:normAutofit/>
           </a:bodyPr>
           <a:lstStyle/>
@@ -9746,7 +9905,7 @@
               <a:buNone/>
             </a:pPr>
             <a:r>
-              <a:rPr lang="en-US" sz="1550" dirty="0">
+              <a:rPr lang="en-US" sz="1320" dirty="0">
                 <a:solidFill>
                   <a:srgbClr val="17364A"/>
                 </a:solidFill>
@@ -9756,7 +9915,7 @@
               </a:rPr>
               <a:t>Lab data quality checklist</a:t>
             </a:r>
-            <a:endParaRPr lang="en-US" sz="1550" dirty="0"/>
+            <a:endParaRPr lang="en-US" sz="1320" dirty="0"/>
           </a:p>
         </p:txBody>
       </p:sp>
@@ -9844,13 +10003,16 @@
           <a:ln/>
         </p:spPr>
         <p:txBody>
-          <a:bodyPr wrap="square" lIns="254" tIns="254" rIns="254" bIns="254" rtlCol="0" anchor="t">
+          <a:bodyPr wrap="square" lIns="508" tIns="508" rIns="508" bIns="508" rtlCol="0" anchor="t">
             <a:normAutofit/>
           </a:bodyPr>
           <a:lstStyle/>
           <a:p>
-            <a:r>
-              <a:rPr lang="en-US" sz="1380" dirty="0">
+            <a:pPr indent="0" marL="0">
+              <a:buNone/>
+            </a:pPr>
+            <a:r>
+              <a:rPr lang="en-US" sz="1220" dirty="0">
                 <a:solidFill>
                   <a:srgbClr val="17364A"/>
                 </a:solidFill>
@@ -9860,11 +10022,14 @@
               </a:rPr>
               <a:t>Lab data quality checklist</a:t>
             </a:r>
-            <a:endParaRPr lang="en-US" sz="1380" dirty="0"/>
-          </a:p>
-          <a:p>
-            <a:r>
-              <a:rPr lang="en-US" sz="1380" dirty="0">
+            <a:endParaRPr lang="en-US" sz="1220" dirty="0"/>
+          </a:p>
+          <a:p>
+            <a:pPr indent="0" marL="0">
+              <a:buNone/>
+            </a:pPr>
+            <a:r>
+              <a:rPr lang="en-US" sz="1220" dirty="0">
                 <a:solidFill>
                   <a:srgbClr val="17364A"/>
                 </a:solidFill>
@@ -9874,11 +10039,14 @@
               </a:rPr>
               <a:t>Terminology mapping questions</a:t>
             </a:r>
-            <a:endParaRPr lang="en-US" sz="1380" dirty="0"/>
-          </a:p>
-          <a:p>
-            <a:r>
-              <a:rPr lang="en-US" sz="1380" dirty="0">
+            <a:endParaRPr lang="en-US" sz="1220" dirty="0"/>
+          </a:p>
+          <a:p>
+            <a:pPr indent="0" marL="0">
+              <a:buNone/>
+            </a:pPr>
+            <a:r>
+              <a:rPr lang="en-US" sz="1220" dirty="0">
                 <a:solidFill>
                   <a:srgbClr val="17364A"/>
                 </a:solidFill>
@@ -9888,7 +10056,7 @@
               </a:rPr>
               <a:t>Required-field list</a:t>
             </a:r>
-            <a:endParaRPr lang="en-US" sz="1380" dirty="0"/>
+            <a:endParaRPr lang="en-US" sz="1220" dirty="0"/>
           </a:p>
         </p:txBody>
       </p:sp>
@@ -9966,17 +10134,17 @@
         </p:nvSpPr>
         <p:spPr>
           <a:xfrm>
-            <a:off x="7799832" y="5001768"/>
-            <a:ext cx="3145536" cy="502920"/>
-          </a:xfrm>
-          <a:prstGeom prst="rect">
-            <a:avLst/>
-          </a:prstGeom>
-          <a:noFill/>
-          <a:ln/>
-        </p:spPr>
-        <p:txBody>
-          <a:bodyPr wrap="square" lIns="0" tIns="0" rIns="0" bIns="0" rtlCol="0" anchor="t">
+            <a:off x="7799832" y="4974336"/>
+            <a:ext cx="3145536" cy="576072"/>
+          </a:xfrm>
+          <a:prstGeom prst="rect">
+            <a:avLst/>
+          </a:prstGeom>
+          <a:noFill/>
+          <a:ln/>
+        </p:spPr>
+        <p:txBody>
+          <a:bodyPr wrap="square" lIns="254" tIns="254" rIns="254" bIns="254" rtlCol="0" anchor="t">
             <a:normAutofit/>
           </a:bodyPr>
           <a:lstStyle/>
@@ -9985,7 +10153,7 @@
               <a:buNone/>
             </a:pPr>
             <a:r>
-              <a:rPr lang="en-US" sz="1550" dirty="0">
+              <a:rPr lang="en-US" sz="1320" dirty="0">
                 <a:solidFill>
                   <a:srgbClr val="17364A"/>
                 </a:solidFill>
@@ -9993,9 +10161,9 @@
                 <a:ea typeface="Aptos" pitchFamily="34" charset="-122"/>
                 <a:cs typeface="Aptos" pitchFamily="34" charset="-120"/>
               </a:rPr>
-              <a:t>Connect the concept to data quality, model performance, validation evidence, monitoring measures, and decisions that remain under human control.</a:t>
-            </a:r>
-            <a:endParaRPr lang="en-US" sz="1550" dirty="0"/>
+              <a:t>Connect the concept to data quality, model performance, validation evidence, monitoring measures, and decisions that.</a:t>
+            </a:r>
+            <a:endParaRPr lang="en-US" sz="1320" dirty="0"/>
           </a:p>
         </p:txBody>
       </p:sp>
@@ -10296,49 +10464,58 @@
           <a:ln/>
         </p:spPr>
         <p:txBody>
-          <a:bodyPr wrap="square" lIns="635" tIns="635" rIns="635" bIns="635" rtlCol="0" anchor="t">
+          <a:bodyPr wrap="square" lIns="1016" tIns="1016" rIns="1016" bIns="1016" rtlCol="0" anchor="t">
             <a:normAutofit/>
           </a:bodyPr>
           <a:lstStyle/>
           <a:p>
+            <a:pPr indent="0" marL="0">
+              <a:buNone/>
+            </a:pPr>
             <a:r>
               <a:rPr lang="en-US" sz="2100" dirty="0">
                 <a:solidFill>
-                  <a:srgbClr val="17364A"/>
-                </a:solidFill>
-                <a:latin typeface="Aptos" pitchFamily="34" charset="0"/>
-                <a:ea typeface="Aptos" pitchFamily="34" charset="-122"/>
-                <a:cs typeface="Aptos" pitchFamily="34" charset="-120"/>
-              </a:rPr>
-              <a:t>Electronic laboratory reporting supplies critical evidence for infectious disease surveillance, outbreak.</a:t>
+                  <a:srgbClr val="003A63"/>
+                </a:solidFill>
+                <a:latin typeface="Aptos" pitchFamily="34" charset="0"/>
+                <a:ea typeface="Aptos" pitchFamily="34" charset="-122"/>
+                <a:cs typeface="Aptos" pitchFamily="34" charset="-120"/>
+              </a:rPr>
+              <a:t>• Electronic laboratory reporting supplies critical evidence for infectious disease.</a:t>
             </a:r>
             <a:endParaRPr lang="en-US" sz="2100" dirty="0"/>
           </a:p>
           <a:p>
+            <a:pPr indent="0" marL="0">
+              <a:buNone/>
+            </a:pPr>
             <a:r>
               <a:rPr lang="en-US" sz="2100" dirty="0">
                 <a:solidFill>
-                  <a:srgbClr val="17364A"/>
-                </a:solidFill>
-                <a:latin typeface="Aptos" pitchFamily="34" charset="0"/>
-                <a:ea typeface="Aptos" pitchFamily="34" charset="-122"/>
-                <a:cs typeface="Aptos" pitchFamily="34" charset="-120"/>
-              </a:rPr>
-              <a:t>AI tools that use laboratory data depend on the quality of test codes, result codes, units, specimen information,.</a:t>
+                  <a:srgbClr val="003A63"/>
+                </a:solidFill>
+                <a:latin typeface="Aptos" pitchFamily="34" charset="0"/>
+                <a:ea typeface="Aptos" pitchFamily="34" charset="-122"/>
+                <a:cs typeface="Aptos" pitchFamily="34" charset="-120"/>
+              </a:rPr>
+              <a:t>• AI tools that use laboratory data depend on the quality of test codes, result codes, units,.</a:t>
             </a:r>
             <a:endParaRPr lang="en-US" sz="2100" dirty="0"/>
           </a:p>
           <a:p>
+            <a:pPr indent="0" marL="0">
+              <a:buNone/>
+            </a:pPr>
             <a:r>
               <a:rPr lang="en-US" sz="2100" dirty="0">
                 <a:solidFill>
-                  <a:srgbClr val="17364A"/>
-                </a:solidFill>
-                <a:latin typeface="Aptos" pitchFamily="34" charset="0"/>
-                <a:ea typeface="Aptos" pitchFamily="34" charset="-122"/>
-                <a:cs typeface="Aptos" pitchFamily="34" charset="-120"/>
-              </a:rPr>
-              <a:t>This module teaches learners how laboratory data quality and terminology mapping affect AI-supported public.</a:t>
+                  <a:srgbClr val="003A63"/>
+                </a:solidFill>
+                <a:latin typeface="Aptos" pitchFamily="34" charset="0"/>
+                <a:ea typeface="Aptos" pitchFamily="34" charset="-122"/>
+                <a:cs typeface="Aptos" pitchFamily="34" charset="-120"/>
+              </a:rPr>
+              <a:t>• This module teaches learners how laboratory data quality and terminology mapping affect.</a:t>
             </a:r>
             <a:endParaRPr lang="en-US" sz="2100" dirty="0"/>
           </a:p>
@@ -10418,17 +10595,17 @@
         </p:nvSpPr>
         <p:spPr>
           <a:xfrm>
-            <a:off x="8074152" y="1920240"/>
-            <a:ext cx="2825496" cy="1280160"/>
-          </a:xfrm>
-          <a:prstGeom prst="rect">
-            <a:avLst/>
-          </a:prstGeom>
-          <a:noFill/>
-          <a:ln/>
-        </p:spPr>
-        <p:txBody>
-          <a:bodyPr wrap="square" lIns="0" tIns="0" rIns="0" bIns="0" rtlCol="0" anchor="t">
+            <a:off x="8074152" y="1892808"/>
+            <a:ext cx="2825496" cy="1353312"/>
+          </a:xfrm>
+          <a:prstGeom prst="rect">
+            <a:avLst/>
+          </a:prstGeom>
+          <a:noFill/>
+          <a:ln/>
+        </p:spPr>
+        <p:txBody>
+          <a:bodyPr wrap="square" lIns="254" tIns="254" rIns="254" bIns="254" rtlCol="0" anchor="t">
             <a:normAutofit/>
           </a:bodyPr>
           <a:lstStyle/>
@@ -10437,7 +10614,7 @@
               <a:buNone/>
             </a:pPr>
             <a:r>
-              <a:rPr lang="en-US" sz="1550" dirty="0">
+              <a:rPr lang="en-US" sz="1320" dirty="0">
                 <a:solidFill>
                   <a:srgbClr val="17364A"/>
                 </a:solidFill>
@@ -10445,43 +10622,9 @@
                 <a:ea typeface="Aptos" pitchFamily="34" charset="-122"/>
                 <a:cs typeface="Aptos" pitchFamily="34" charset="-120"/>
               </a:rPr>
-              <a:t>Level: applied/foundational</a:t>
-            </a:r>
-            <a:endParaRPr lang="en-US" sz="1550" dirty="0"/>
-          </a:p>
-          <a:p>
-            <a:pPr indent="0" marL="0">
-              <a:buNone/>
-            </a:pPr>
-            <a:r>
-              <a:rPr lang="en-US" sz="1550" dirty="0">
-                <a:solidFill>
-                  <a:srgbClr val="17364A"/>
-                </a:solidFill>
-                <a:latin typeface="Aptos" pitchFamily="34" charset="0"/>
-                <a:ea typeface="Aptos" pitchFamily="34" charset="-122"/>
-                <a:cs typeface="Aptos" pitchFamily="34" charset="-120"/>
-              </a:rPr>
-              <a:t>Primary track: Technical Architecture Track</a:t>
-            </a:r>
-            <a:endParaRPr lang="en-US" sz="1550" dirty="0"/>
-          </a:p>
-          <a:p>
-            <a:pPr indent="0" marL="0">
-              <a:buNone/>
-            </a:pPr>
-            <a:r>
-              <a:rPr lang="en-US" sz="1550" dirty="0">
-                <a:solidFill>
-                  <a:srgbClr val="17364A"/>
-                </a:solidFill>
-                <a:latin typeface="Aptos" pitchFamily="34" charset="0"/>
-                <a:ea typeface="Aptos" pitchFamily="34" charset="-122"/>
-                <a:cs typeface="Aptos" pitchFamily="34" charset="-120"/>
-              </a:rPr>
-              <a:t>Appears in tracks: technical-architecture</a:t>
-            </a:r>
-            <a:endParaRPr lang="en-US" sz="1550" dirty="0"/>
+              <a:t>Level: applied/foundational Primary track: Technical Architecture Track Appears in tracks: technical-architecture</a:t>
+            </a:r>
+            <a:endParaRPr lang="en-US" sz="1320" dirty="0"/>
           </a:p>
         </p:txBody>
       </p:sp>
@@ -10569,13 +10712,16 @@
           <a:ln/>
         </p:spPr>
         <p:txBody>
-          <a:bodyPr wrap="square" lIns="254" tIns="254" rIns="254" bIns="254" rtlCol="0" anchor="t">
+          <a:bodyPr wrap="square" lIns="508" tIns="508" rIns="508" bIns="508" rtlCol="0" anchor="t">
             <a:normAutofit/>
           </a:bodyPr>
           <a:lstStyle/>
           <a:p>
-            <a:r>
-              <a:rPr lang="en-US" sz="1380" dirty="0">
+            <a:pPr indent="0" marL="0">
+              <a:buNone/>
+            </a:pPr>
+            <a:r>
+              <a:rPr lang="en-US" sz="1220" dirty="0">
                 <a:solidFill>
                   <a:srgbClr val="17364A"/>
                 </a:solidFill>
@@ -10585,11 +10731,14 @@
               </a:rPr>
               <a:t>Read the module for shared vocabulary and context.</a:t>
             </a:r>
-            <a:endParaRPr lang="en-US" sz="1380" dirty="0"/>
-          </a:p>
-          <a:p>
-            <a:r>
-              <a:rPr lang="en-US" sz="1380" dirty="0">
+            <a:endParaRPr lang="en-US" sz="1220" dirty="0"/>
+          </a:p>
+          <a:p>
+            <a:pPr indent="0" marL="0">
+              <a:buNone/>
+            </a:pPr>
+            <a:r>
+              <a:rPr lang="en-US" sz="1220" dirty="0">
                 <a:solidFill>
                   <a:srgbClr val="17364A"/>
                 </a:solidFill>
@@ -10599,11 +10748,14 @@
               </a:rPr>
               <a:t>Complete the practical exercise to apply the concept.</a:t>
             </a:r>
-            <a:endParaRPr lang="en-US" sz="1380" dirty="0"/>
-          </a:p>
-          <a:p>
-            <a:r>
-              <a:rPr lang="en-US" sz="1380" dirty="0">
+            <a:endParaRPr lang="en-US" sz="1220" dirty="0"/>
+          </a:p>
+          <a:p>
+            <a:pPr indent="0" marL="0">
+              <a:buNone/>
+            </a:pPr>
+            <a:r>
+              <a:rPr lang="en-US" sz="1220" dirty="0">
                 <a:solidFill>
                   <a:srgbClr val="17364A"/>
                 </a:solidFill>
@@ -10613,7 +10765,7 @@
               </a:rPr>
               <a:t>Use the notes and references for deeper review.</a:t>
             </a:r>
-            <a:endParaRPr lang="en-US" sz="1380" dirty="0"/>
+            <a:endParaRPr lang="en-US" sz="1220" dirty="0"/>
           </a:p>
         </p:txBody>
       </p:sp>
@@ -10914,21 +11066,24 @@
           <a:ln/>
         </p:spPr>
         <p:txBody>
-          <a:bodyPr wrap="square" lIns="635" tIns="635" rIns="635" bIns="635" rtlCol="0" anchor="t">
+          <a:bodyPr wrap="square" lIns="1016" tIns="1016" rIns="1016" bIns="1016" rtlCol="0" anchor="t">
             <a:normAutofit/>
           </a:bodyPr>
           <a:lstStyle/>
           <a:p>
+            <a:pPr indent="0" marL="0">
+              <a:buNone/>
+            </a:pPr>
             <a:r>
               <a:rPr lang="en-US" sz="2100" dirty="0">
                 <a:solidFill>
-                  <a:srgbClr val="17364A"/>
-                </a:solidFill>
-                <a:latin typeface="Aptos" pitchFamily="34" charset="0"/>
-                <a:ea typeface="Aptos" pitchFamily="34" charset="-122"/>
-                <a:cs typeface="Aptos" pitchFamily="34" charset="-120"/>
-              </a:rPr>
-              <a:t>Data quality issue log</a:t>
+                  <a:srgbClr val="003A63"/>
+                </a:solidFill>
+                <a:latin typeface="Aptos" pitchFamily="34" charset="0"/>
+                <a:ea typeface="Aptos" pitchFamily="34" charset="-122"/>
+                <a:cs typeface="Aptos" pitchFamily="34" charset="-120"/>
+              </a:rPr>
+              <a:t>• Data quality issue log</a:t>
             </a:r>
             <a:endParaRPr lang="en-US" sz="2100" dirty="0"/>
           </a:p>
@@ -11008,17 +11163,17 @@
         </p:nvSpPr>
         <p:spPr>
           <a:xfrm>
-            <a:off x="7799832" y="1828800"/>
-            <a:ext cx="3145536" cy="685800"/>
-          </a:xfrm>
-          <a:prstGeom prst="rect">
-            <a:avLst/>
-          </a:prstGeom>
-          <a:noFill/>
-          <a:ln/>
-        </p:spPr>
-        <p:txBody>
-          <a:bodyPr wrap="square" lIns="0" tIns="0" rIns="0" bIns="0" rtlCol="0" anchor="t">
+            <a:off x="7799832" y="1801368"/>
+            <a:ext cx="3145536" cy="758952"/>
+          </a:xfrm>
+          <a:prstGeom prst="rect">
+            <a:avLst/>
+          </a:prstGeom>
+          <a:noFill/>
+          <a:ln/>
+        </p:spPr>
+        <p:txBody>
+          <a:bodyPr wrap="square" lIns="254" tIns="254" rIns="254" bIns="254" rtlCol="0" anchor="t">
             <a:normAutofit/>
           </a:bodyPr>
           <a:lstStyle/>
@@ -11027,7 +11182,7 @@
               <a:buNone/>
             </a:pPr>
             <a:r>
-              <a:rPr lang="en-US" sz="1550" dirty="0">
+              <a:rPr lang="en-US" sz="1320" dirty="0">
                 <a:solidFill>
                   <a:srgbClr val="17364A"/>
                 </a:solidFill>
@@ -11037,7 +11192,7 @@
               </a:rPr>
               <a:t>Data quality issue log</a:t>
             </a:r>
-            <a:endParaRPr lang="en-US" sz="1550" dirty="0"/>
+            <a:endParaRPr lang="en-US" sz="1320" dirty="0"/>
           </a:p>
         </p:txBody>
       </p:sp>
@@ -11125,13 +11280,16 @@
           <a:ln/>
         </p:spPr>
         <p:txBody>
-          <a:bodyPr wrap="square" lIns="254" tIns="254" rIns="254" bIns="254" rtlCol="0" anchor="t">
+          <a:bodyPr wrap="square" lIns="508" tIns="508" rIns="508" bIns="508" rtlCol="0" anchor="t">
             <a:normAutofit/>
           </a:bodyPr>
           <a:lstStyle/>
           <a:p>
-            <a:r>
-              <a:rPr lang="en-US" sz="1380" dirty="0">
+            <a:pPr indent="0" marL="0">
+              <a:buNone/>
+            </a:pPr>
+            <a:r>
+              <a:rPr lang="en-US" sz="1220" dirty="0">
                 <a:solidFill>
                   <a:srgbClr val="17364A"/>
                 </a:solidFill>
@@ -11141,7 +11299,7 @@
               </a:rPr>
               <a:t>Data quality issue log</a:t>
             </a:r>
-            <a:endParaRPr lang="en-US" sz="1380" dirty="0"/>
+            <a:endParaRPr lang="en-US" sz="1220" dirty="0"/>
           </a:p>
         </p:txBody>
       </p:sp>
@@ -11219,17 +11377,17 @@
         </p:nvSpPr>
         <p:spPr>
           <a:xfrm>
-            <a:off x="7799832" y="5001768"/>
-            <a:ext cx="3145536" cy="502920"/>
-          </a:xfrm>
-          <a:prstGeom prst="rect">
-            <a:avLst/>
-          </a:prstGeom>
-          <a:noFill/>
-          <a:ln/>
-        </p:spPr>
-        <p:txBody>
-          <a:bodyPr wrap="square" lIns="0" tIns="0" rIns="0" bIns="0" rtlCol="0" anchor="t">
+            <a:off x="7799832" y="4974336"/>
+            <a:ext cx="3145536" cy="576072"/>
+          </a:xfrm>
+          <a:prstGeom prst="rect">
+            <a:avLst/>
+          </a:prstGeom>
+          <a:noFill/>
+          <a:ln/>
+        </p:spPr>
+        <p:txBody>
+          <a:bodyPr wrap="square" lIns="254" tIns="254" rIns="254" bIns="254" rtlCol="0" anchor="t">
             <a:normAutofit/>
           </a:bodyPr>
           <a:lstStyle/>
@@ -11238,7 +11396,7 @@
               <a:buNone/>
             </a:pPr>
             <a:r>
-              <a:rPr lang="en-US" sz="1550" dirty="0">
+              <a:rPr lang="en-US" sz="1320" dirty="0">
                 <a:solidFill>
                   <a:srgbClr val="17364A"/>
                 </a:solidFill>
@@ -11246,9 +11404,9 @@
                 <a:ea typeface="Aptos" pitchFamily="34" charset="-122"/>
                 <a:cs typeface="Aptos" pitchFamily="34" charset="-120"/>
               </a:rPr>
-              <a:t>Connect the concept to data quality, model performance, validation evidence, monitoring measures, and decisions that remain under human control.</a:t>
-            </a:r>
-            <a:endParaRPr lang="en-US" sz="1550" dirty="0"/>
+              <a:t>Connect the concept to data quality, model performance, validation evidence, monitoring measures, and decisions that.</a:t>
+            </a:r>
+            <a:endParaRPr lang="en-US" sz="1320" dirty="0"/>
           </a:p>
         </p:txBody>
       </p:sp>
@@ -11549,49 +11707,58 @@
           <a:ln/>
         </p:spPr>
         <p:txBody>
-          <a:bodyPr wrap="square" lIns="635" tIns="635" rIns="635" bIns="635" rtlCol="0" anchor="t">
+          <a:bodyPr wrap="square" lIns="1016" tIns="1016" rIns="1016" bIns="1016" rtlCol="0" anchor="t">
             <a:normAutofit/>
           </a:bodyPr>
           <a:lstStyle/>
           <a:p>
+            <a:pPr indent="0" marL="0">
+              <a:buNone/>
+            </a:pPr>
             <a:r>
               <a:rPr lang="en-US" sz="2100" dirty="0">
                 <a:solidFill>
-                  <a:srgbClr val="17364A"/>
-                </a:solidFill>
-                <a:latin typeface="Aptos" pitchFamily="34" charset="0"/>
-                <a:ea typeface="Aptos" pitchFamily="34" charset="-122"/>
-                <a:cs typeface="Aptos" pitchFamily="34" charset="-120"/>
-              </a:rPr>
-              <a:t>Lab data quality checklist</a:t>
+                  <a:srgbClr val="003A63"/>
+                </a:solidFill>
+                <a:latin typeface="Aptos" pitchFamily="34" charset="0"/>
+                <a:ea typeface="Aptos" pitchFamily="34" charset="-122"/>
+                <a:cs typeface="Aptos" pitchFamily="34" charset="-120"/>
+              </a:rPr>
+              <a:t>• Lab data quality checklist</a:t>
             </a:r>
             <a:endParaRPr lang="en-US" sz="2100" dirty="0"/>
           </a:p>
           <a:p>
+            <a:pPr indent="0" marL="0">
+              <a:buNone/>
+            </a:pPr>
             <a:r>
               <a:rPr lang="en-US" sz="2100" dirty="0">
                 <a:solidFill>
-                  <a:srgbClr val="17364A"/>
-                </a:solidFill>
-                <a:latin typeface="Aptos" pitchFamily="34" charset="0"/>
-                <a:ea typeface="Aptos" pitchFamily="34" charset="-122"/>
-                <a:cs typeface="Aptos" pitchFamily="34" charset="-120"/>
-              </a:rPr>
-              <a:t>Terminology mapping questions</a:t>
+                  <a:srgbClr val="003A63"/>
+                </a:solidFill>
+                <a:latin typeface="Aptos" pitchFamily="34" charset="0"/>
+                <a:ea typeface="Aptos" pitchFamily="34" charset="-122"/>
+                <a:cs typeface="Aptos" pitchFamily="34" charset="-120"/>
+              </a:rPr>
+              <a:t>• Terminology mapping questions</a:t>
             </a:r>
             <a:endParaRPr lang="en-US" sz="2100" dirty="0"/>
           </a:p>
           <a:p>
+            <a:pPr indent="0" marL="0">
+              <a:buNone/>
+            </a:pPr>
             <a:r>
               <a:rPr lang="en-US" sz="2100" dirty="0">
                 <a:solidFill>
-                  <a:srgbClr val="17364A"/>
-                </a:solidFill>
-                <a:latin typeface="Aptos" pitchFamily="34" charset="0"/>
-                <a:ea typeface="Aptos" pitchFamily="34" charset="-122"/>
-                <a:cs typeface="Aptos" pitchFamily="34" charset="-120"/>
-              </a:rPr>
-              <a:t>Required-field list</a:t>
+                  <a:srgbClr val="003A63"/>
+                </a:solidFill>
+                <a:latin typeface="Aptos" pitchFamily="34" charset="0"/>
+                <a:ea typeface="Aptos" pitchFamily="34" charset="-122"/>
+                <a:cs typeface="Aptos" pitchFamily="34" charset="-120"/>
+              </a:rPr>
+              <a:t>• Required-field list</a:t>
             </a:r>
             <a:endParaRPr lang="en-US" sz="2100" dirty="0"/>
           </a:p>
@@ -11671,17 +11838,17 @@
         </p:nvSpPr>
         <p:spPr>
           <a:xfrm>
-            <a:off x="7799832" y="1828800"/>
-            <a:ext cx="3145536" cy="685800"/>
-          </a:xfrm>
-          <a:prstGeom prst="rect">
-            <a:avLst/>
-          </a:prstGeom>
-          <a:noFill/>
-          <a:ln/>
-        </p:spPr>
-        <p:txBody>
-          <a:bodyPr wrap="square" lIns="0" tIns="0" rIns="0" bIns="0" rtlCol="0" anchor="t">
+            <a:off x="7799832" y="1801368"/>
+            <a:ext cx="3145536" cy="758952"/>
+          </a:xfrm>
+          <a:prstGeom prst="rect">
+            <a:avLst/>
+          </a:prstGeom>
+          <a:noFill/>
+          <a:ln/>
+        </p:spPr>
+        <p:txBody>
+          <a:bodyPr wrap="square" lIns="254" tIns="254" rIns="254" bIns="254" rtlCol="0" anchor="t">
             <a:normAutofit/>
           </a:bodyPr>
           <a:lstStyle/>
@@ -11690,7 +11857,7 @@
               <a:buNone/>
             </a:pPr>
             <a:r>
-              <a:rPr lang="en-US" sz="1550" dirty="0">
+              <a:rPr lang="en-US" sz="1320" dirty="0">
                 <a:solidFill>
                   <a:srgbClr val="17364A"/>
                 </a:solidFill>
@@ -11700,7 +11867,7 @@
               </a:rPr>
               <a:t>Lab data quality checklist</a:t>
             </a:r>
-            <a:endParaRPr lang="en-US" sz="1550" dirty="0"/>
+            <a:endParaRPr lang="en-US" sz="1320" dirty="0"/>
           </a:p>
         </p:txBody>
       </p:sp>
@@ -11788,13 +11955,16 @@
           <a:ln/>
         </p:spPr>
         <p:txBody>
-          <a:bodyPr wrap="square" lIns="254" tIns="254" rIns="254" bIns="254" rtlCol="0" anchor="t">
+          <a:bodyPr wrap="square" lIns="508" tIns="508" rIns="508" bIns="508" rtlCol="0" anchor="t">
             <a:normAutofit/>
           </a:bodyPr>
           <a:lstStyle/>
           <a:p>
-            <a:r>
-              <a:rPr lang="en-US" sz="1380" dirty="0">
+            <a:pPr indent="0" marL="0">
+              <a:buNone/>
+            </a:pPr>
+            <a:r>
+              <a:rPr lang="en-US" sz="1220" dirty="0">
                 <a:solidFill>
                   <a:srgbClr val="17364A"/>
                 </a:solidFill>
@@ -11804,11 +11974,14 @@
               </a:rPr>
               <a:t>Lab data quality checklist</a:t>
             </a:r>
-            <a:endParaRPr lang="en-US" sz="1380" dirty="0"/>
-          </a:p>
-          <a:p>
-            <a:r>
-              <a:rPr lang="en-US" sz="1380" dirty="0">
+            <a:endParaRPr lang="en-US" sz="1220" dirty="0"/>
+          </a:p>
+          <a:p>
+            <a:pPr indent="0" marL="0">
+              <a:buNone/>
+            </a:pPr>
+            <a:r>
+              <a:rPr lang="en-US" sz="1220" dirty="0">
                 <a:solidFill>
                   <a:srgbClr val="17364A"/>
                 </a:solidFill>
@@ -11818,11 +11991,14 @@
               </a:rPr>
               <a:t>Terminology mapping questions</a:t>
             </a:r>
-            <a:endParaRPr lang="en-US" sz="1380" dirty="0"/>
-          </a:p>
-          <a:p>
-            <a:r>
-              <a:rPr lang="en-US" sz="1380" dirty="0">
+            <a:endParaRPr lang="en-US" sz="1220" dirty="0"/>
+          </a:p>
+          <a:p>
+            <a:pPr indent="0" marL="0">
+              <a:buNone/>
+            </a:pPr>
+            <a:r>
+              <a:rPr lang="en-US" sz="1220" dirty="0">
                 <a:solidFill>
                   <a:srgbClr val="17364A"/>
                 </a:solidFill>
@@ -11832,7 +12008,7 @@
               </a:rPr>
               <a:t>Required-field list</a:t>
             </a:r>
-            <a:endParaRPr lang="en-US" sz="1380" dirty="0"/>
+            <a:endParaRPr lang="en-US" sz="1220" dirty="0"/>
           </a:p>
         </p:txBody>
       </p:sp>
@@ -11910,17 +12086,17 @@
         </p:nvSpPr>
         <p:spPr>
           <a:xfrm>
-            <a:off x="7799832" y="5001768"/>
-            <a:ext cx="3145536" cy="502920"/>
-          </a:xfrm>
-          <a:prstGeom prst="rect">
-            <a:avLst/>
-          </a:prstGeom>
-          <a:noFill/>
-          <a:ln/>
-        </p:spPr>
-        <p:txBody>
-          <a:bodyPr wrap="square" lIns="0" tIns="0" rIns="0" bIns="0" rtlCol="0" anchor="t">
+            <a:off x="7799832" y="4974336"/>
+            <a:ext cx="3145536" cy="576072"/>
+          </a:xfrm>
+          <a:prstGeom prst="rect">
+            <a:avLst/>
+          </a:prstGeom>
+          <a:noFill/>
+          <a:ln/>
+        </p:spPr>
+        <p:txBody>
+          <a:bodyPr wrap="square" lIns="254" tIns="254" rIns="254" bIns="254" rtlCol="0" anchor="t">
             <a:normAutofit/>
           </a:bodyPr>
           <a:lstStyle/>
@@ -11929,7 +12105,7 @@
               <a:buNone/>
             </a:pPr>
             <a:r>
-              <a:rPr lang="en-US" sz="1550" dirty="0">
+              <a:rPr lang="en-US" sz="1320" dirty="0">
                 <a:solidFill>
                   <a:srgbClr val="17364A"/>
                 </a:solidFill>
@@ -11937,9 +12113,9 @@
                 <a:ea typeface="Aptos" pitchFamily="34" charset="-122"/>
                 <a:cs typeface="Aptos" pitchFamily="34" charset="-120"/>
               </a:rPr>
-              <a:t>Use the assignment to test whether you can explain the concept, apply it to a realistic public health situation, and identify what would need review before the work moves forward.</a:t>
-            </a:r>
-            <a:endParaRPr lang="en-US" sz="1550" dirty="0"/>
+              <a:t>Use the assignment to test whether you can explain the concept, apply it to a realistic public health situation, and.</a:t>
+            </a:r>
+            <a:endParaRPr lang="en-US" sz="1320" dirty="0"/>
           </a:p>
         </p:txBody>
       </p:sp>
@@ -12240,49 +12416,58 @@
           <a:ln/>
         </p:spPr>
         <p:txBody>
-          <a:bodyPr wrap="square" lIns="635" tIns="635" rIns="635" bIns="635" rtlCol="0" anchor="t">
+          <a:bodyPr wrap="square" lIns="1016" tIns="1016" rIns="1016" bIns="1016" rtlCol="0" anchor="t">
             <a:normAutofit/>
           </a:bodyPr>
           <a:lstStyle/>
           <a:p>
+            <a:pPr indent="0" marL="0">
+              <a:buNone/>
+            </a:pPr>
             <a:r>
               <a:rPr lang="en-US" sz="2100" dirty="0">
                 <a:solidFill>
-                  <a:srgbClr val="17364A"/>
-                </a:solidFill>
-                <a:latin typeface="Aptos" pitchFamily="34" charset="0"/>
-                <a:ea typeface="Aptos" pitchFamily="34" charset="-122"/>
-                <a:cs typeface="Aptos" pitchFamily="34" charset="-120"/>
-              </a:rPr>
-              <a:t>1. Why is terminology mapping important for AI-supported surveillance?</a:t>
+                  <a:srgbClr val="003A63"/>
+                </a:solidFill>
+                <a:latin typeface="Aptos" pitchFamily="34" charset="0"/>
+                <a:ea typeface="Aptos" pitchFamily="34" charset="-122"/>
+                <a:cs typeface="Aptos" pitchFamily="34" charset="-120"/>
+              </a:rPr>
+              <a:t>• 1. Why is terminology mapping important for AI-supported surveillance?</a:t>
             </a:r>
             <a:endParaRPr lang="en-US" sz="2100" dirty="0"/>
           </a:p>
           <a:p>
+            <a:pPr indent="0" marL="0">
+              <a:buNone/>
+            </a:pPr>
             <a:r>
               <a:rPr lang="en-US" sz="2100" dirty="0">
                 <a:solidFill>
-                  <a:srgbClr val="17364A"/>
-                </a:solidFill>
-                <a:latin typeface="Aptos" pitchFamily="34" charset="0"/>
-                <a:ea typeface="Aptos" pitchFamily="34" charset="-122"/>
-                <a:cs typeface="Aptos" pitchFamily="34" charset="-120"/>
-              </a:rPr>
-              <a:t>2. What is LOINC commonly used for?</a:t>
+                  <a:srgbClr val="003A63"/>
+                </a:solidFill>
+                <a:latin typeface="Aptos" pitchFamily="34" charset="0"/>
+                <a:ea typeface="Aptos" pitchFamily="34" charset="-122"/>
+                <a:cs typeface="Aptos" pitchFamily="34" charset="-120"/>
+              </a:rPr>
+              <a:t>• 2. What is LOINC commonly used for?</a:t>
             </a:r>
             <a:endParaRPr lang="en-US" sz="2100" dirty="0"/>
           </a:p>
           <a:p>
+            <a:pPr indent="0" marL="0">
+              <a:buNone/>
+            </a:pPr>
             <a:r>
               <a:rPr lang="en-US" sz="2100" dirty="0">
                 <a:solidFill>
-                  <a:srgbClr val="17364A"/>
-                </a:solidFill>
-                <a:latin typeface="Aptos" pitchFamily="34" charset="0"/>
-                <a:ea typeface="Aptos" pitchFamily="34" charset="-122"/>
-                <a:cs typeface="Aptos" pitchFamily="34" charset="-120"/>
-              </a:rPr>
-              <a:t>3. Which issue can make a quantitative lab result difficult to interpret?</a:t>
+                  <a:srgbClr val="003A63"/>
+                </a:solidFill>
+                <a:latin typeface="Aptos" pitchFamily="34" charset="0"/>
+                <a:ea typeface="Aptos" pitchFamily="34" charset="-122"/>
+                <a:cs typeface="Aptos" pitchFamily="34" charset="-120"/>
+              </a:rPr>
+              <a:t>• 3. Which issue can make a quantitative lab result difficult to interpret?</a:t>
             </a:r>
             <a:endParaRPr lang="en-US" sz="2100" dirty="0"/>
           </a:p>
@@ -12362,17 +12547,17 @@
         </p:nvSpPr>
         <p:spPr>
           <a:xfrm>
-            <a:off x="7799832" y="1828800"/>
-            <a:ext cx="3145536" cy="685800"/>
-          </a:xfrm>
-          <a:prstGeom prst="rect">
-            <a:avLst/>
-          </a:prstGeom>
-          <a:noFill/>
-          <a:ln/>
-        </p:spPr>
-        <p:txBody>
-          <a:bodyPr wrap="square" lIns="0" tIns="0" rIns="0" bIns="0" rtlCol="0" anchor="t">
+            <a:off x="7799832" y="1801368"/>
+            <a:ext cx="3145536" cy="758952"/>
+          </a:xfrm>
+          <a:prstGeom prst="rect">
+            <a:avLst/>
+          </a:prstGeom>
+          <a:noFill/>
+          <a:ln/>
+        </p:spPr>
+        <p:txBody>
+          <a:bodyPr wrap="square" lIns="254" tIns="254" rIns="254" bIns="254" rtlCol="0" anchor="t">
             <a:normAutofit/>
           </a:bodyPr>
           <a:lstStyle/>
@@ -12381,7 +12566,7 @@
               <a:buNone/>
             </a:pPr>
             <a:r>
-              <a:rPr lang="en-US" sz="1550" dirty="0">
+              <a:rPr lang="en-US" sz="1320" dirty="0">
                 <a:solidFill>
                   <a:srgbClr val="17364A"/>
                 </a:solidFill>
@@ -12391,7 +12576,7 @@
               </a:rPr>
               <a:t>1. Why is terminology mapping important for AI-supported surveillance?</a:t>
             </a:r>
-            <a:endParaRPr lang="en-US" sz="1550" dirty="0"/>
+            <a:endParaRPr lang="en-US" sz="1320" dirty="0"/>
           </a:p>
         </p:txBody>
       </p:sp>
@@ -12479,13 +12664,16 @@
           <a:ln/>
         </p:spPr>
         <p:txBody>
-          <a:bodyPr wrap="square" lIns="254" tIns="254" rIns="254" bIns="254" rtlCol="0" anchor="t">
+          <a:bodyPr wrap="square" lIns="508" tIns="508" rIns="508" bIns="508" rtlCol="0" anchor="t">
             <a:normAutofit/>
           </a:bodyPr>
           <a:lstStyle/>
           <a:p>
-            <a:r>
-              <a:rPr lang="en-US" sz="1380" dirty="0">
+            <a:pPr indent="0" marL="0">
+              <a:buNone/>
+            </a:pPr>
+            <a:r>
+              <a:rPr lang="en-US" sz="1220" dirty="0">
                 <a:solidFill>
                   <a:srgbClr val="17364A"/>
                 </a:solidFill>
@@ -12495,11 +12683,14 @@
               </a:rPr>
               <a:t>1.</a:t>
             </a:r>
-            <a:endParaRPr lang="en-US" sz="1380" dirty="0"/>
-          </a:p>
-          <a:p>
-            <a:r>
-              <a:rPr lang="en-US" sz="1380" dirty="0">
+            <a:endParaRPr lang="en-US" sz="1220" dirty="0"/>
+          </a:p>
+          <a:p>
+            <a:pPr indent="0" marL="0">
+              <a:buNone/>
+            </a:pPr>
+            <a:r>
+              <a:rPr lang="en-US" sz="1220" dirty="0">
                 <a:solidFill>
                   <a:srgbClr val="17364A"/>
                 </a:solidFill>
@@ -12509,11 +12700,14 @@
               </a:rPr>
               <a:t>Why is terminology mapping important for AI-supported surveillance?</a:t>
             </a:r>
-            <a:endParaRPr lang="en-US" sz="1380" dirty="0"/>
-          </a:p>
-          <a:p>
-            <a:r>
-              <a:rPr lang="en-US" sz="1380" dirty="0">
+            <a:endParaRPr lang="en-US" sz="1220" dirty="0"/>
+          </a:p>
+          <a:p>
+            <a:pPr indent="0" marL="0">
+              <a:buNone/>
+            </a:pPr>
+            <a:r>
+              <a:rPr lang="en-US" sz="1220" dirty="0">
                 <a:solidFill>
                   <a:srgbClr val="17364A"/>
                 </a:solidFill>
@@ -12523,7 +12717,7 @@
               </a:rPr>
               <a:t>2.</a:t>
             </a:r>
-            <a:endParaRPr lang="en-US" sz="1380" dirty="0"/>
+            <a:endParaRPr lang="en-US" sz="1220" dirty="0"/>
           </a:p>
         </p:txBody>
       </p:sp>
@@ -12601,17 +12795,17 @@
         </p:nvSpPr>
         <p:spPr>
           <a:xfrm>
-            <a:off x="7799832" y="5001768"/>
-            <a:ext cx="3145536" cy="502920"/>
-          </a:xfrm>
-          <a:prstGeom prst="rect">
-            <a:avLst/>
-          </a:prstGeom>
-          <a:noFill/>
-          <a:ln/>
-        </p:spPr>
-        <p:txBody>
-          <a:bodyPr wrap="square" lIns="0" tIns="0" rIns="0" bIns="0" rtlCol="0" anchor="t">
+            <a:off x="7799832" y="4974336"/>
+            <a:ext cx="3145536" cy="576072"/>
+          </a:xfrm>
+          <a:prstGeom prst="rect">
+            <a:avLst/>
+          </a:prstGeom>
+          <a:noFill/>
+          <a:ln/>
+        </p:spPr>
+        <p:txBody>
+          <a:bodyPr wrap="square" lIns="254" tIns="254" rIns="254" bIns="254" rtlCol="0" anchor="t">
             <a:normAutofit/>
           </a:bodyPr>
           <a:lstStyle/>
@@ -12620,7 +12814,7 @@
               <a:buNone/>
             </a:pPr>
             <a:r>
-              <a:rPr lang="en-US" sz="1550" dirty="0">
+              <a:rPr lang="en-US" sz="1320" dirty="0">
                 <a:solidFill>
                   <a:srgbClr val="17364A"/>
                 </a:solidFill>
@@ -12628,9 +12822,9 @@
                 <a:ea typeface="Aptos" pitchFamily="34" charset="-122"/>
                 <a:cs typeface="Aptos" pitchFamily="34" charset="-120"/>
               </a:rPr>
-              <a:t>Use the assignment to test whether you can explain the concept, apply it to a realistic public health situation, and identify what would need review before the work moves forward.</a:t>
-            </a:r>
-            <a:endParaRPr lang="en-US" sz="1550" dirty="0"/>
+              <a:t>Use the assignment to test whether you can explain the concept, apply it to a realistic public health situation, and.</a:t>
+            </a:r>
+            <a:endParaRPr lang="en-US" sz="1320" dirty="0"/>
           </a:p>
         </p:txBody>
       </p:sp>
@@ -12931,49 +13125,58 @@
           <a:ln/>
         </p:spPr>
         <p:txBody>
-          <a:bodyPr wrap="square" lIns="635" tIns="635" rIns="635" bIns="635" rtlCol="0" anchor="t">
+          <a:bodyPr wrap="square" lIns="1016" tIns="1016" rIns="1016" bIns="1016" rtlCol="0" anchor="t">
             <a:normAutofit/>
           </a:bodyPr>
           <a:lstStyle/>
           <a:p>
+            <a:pPr indent="0" marL="0">
+              <a:buNone/>
+            </a:pPr>
             <a:r>
               <a:rPr lang="en-US" sz="2100" dirty="0">
                 <a:solidFill>
-                  <a:srgbClr val="17364A"/>
-                </a:solidFill>
-                <a:latin typeface="Aptos" pitchFamily="34" charset="0"/>
-                <a:ea typeface="Aptos" pitchFamily="34" charset="-122"/>
-                <a:cs typeface="Aptos" pitchFamily="34" charset="-120"/>
-              </a:rPr>
-              <a:t>CDC PHIN VADS</a:t>
+                  <a:srgbClr val="003A63"/>
+                </a:solidFill>
+                <a:latin typeface="Aptos" pitchFamily="34" charset="0"/>
+                <a:ea typeface="Aptos" pitchFamily="34" charset="-122"/>
+                <a:cs typeface="Aptos" pitchFamily="34" charset="-120"/>
+              </a:rPr>
+              <a:t>• CDC PHIN VADS</a:t>
             </a:r>
             <a:endParaRPr lang="en-US" sz="2100" dirty="0"/>
           </a:p>
           <a:p>
+            <a:pPr indent="0" marL="0">
+              <a:buNone/>
+            </a:pPr>
             <a:r>
               <a:rPr lang="en-US" sz="2100" dirty="0">
                 <a:solidFill>
-                  <a:srgbClr val="17364A"/>
-                </a:solidFill>
-                <a:latin typeface="Aptos" pitchFamily="34" charset="0"/>
-                <a:ea typeface="Aptos" pitchFamily="34" charset="-122"/>
-                <a:cs typeface="Aptos" pitchFamily="34" charset="-120"/>
-              </a:rPr>
-              <a:t>Reportable Condition Mapping Table resources</a:t>
+                  <a:srgbClr val="003A63"/>
+                </a:solidFill>
+                <a:latin typeface="Aptos" pitchFamily="34" charset="0"/>
+                <a:ea typeface="Aptos" pitchFamily="34" charset="-122"/>
+                <a:cs typeface="Aptos" pitchFamily="34" charset="-120"/>
+              </a:rPr>
+              <a:t>• Reportable Condition Mapping Table resources</a:t>
             </a:r>
             <a:endParaRPr lang="en-US" sz="2100" dirty="0"/>
           </a:p>
           <a:p>
+            <a:pPr indent="0" marL="0">
+              <a:buNone/>
+            </a:pPr>
             <a:r>
               <a:rPr lang="en-US" sz="2100" dirty="0">
                 <a:solidFill>
-                  <a:srgbClr val="17364A"/>
-                </a:solidFill>
-                <a:latin typeface="Aptos" pitchFamily="34" charset="0"/>
-                <a:ea typeface="Aptos" pitchFamily="34" charset="-122"/>
-                <a:cs typeface="Aptos" pitchFamily="34" charset="-120"/>
-              </a:rPr>
-              <a:t>APHL laboratory informatics resources</a:t>
+                  <a:srgbClr val="003A63"/>
+                </a:solidFill>
+                <a:latin typeface="Aptos" pitchFamily="34" charset="0"/>
+                <a:ea typeface="Aptos" pitchFamily="34" charset="-122"/>
+                <a:cs typeface="Aptos" pitchFamily="34" charset="-120"/>
+              </a:rPr>
+              <a:t>• APHL laboratory informatics resources</a:t>
             </a:r>
             <a:endParaRPr lang="en-US" sz="2100" dirty="0"/>
           </a:p>
@@ -13053,17 +13256,17 @@
         </p:nvSpPr>
         <p:spPr>
           <a:xfrm>
-            <a:off x="7799832" y="1828800"/>
-            <a:ext cx="3145536" cy="685800"/>
-          </a:xfrm>
-          <a:prstGeom prst="rect">
-            <a:avLst/>
-          </a:prstGeom>
-          <a:noFill/>
-          <a:ln/>
-        </p:spPr>
-        <p:txBody>
-          <a:bodyPr wrap="square" lIns="0" tIns="0" rIns="0" bIns="0" rtlCol="0" anchor="t">
+            <a:off x="7799832" y="1801368"/>
+            <a:ext cx="3145536" cy="758952"/>
+          </a:xfrm>
+          <a:prstGeom prst="rect">
+            <a:avLst/>
+          </a:prstGeom>
+          <a:noFill/>
+          <a:ln/>
+        </p:spPr>
+        <p:txBody>
+          <a:bodyPr wrap="square" lIns="254" tIns="254" rIns="254" bIns="254" rtlCol="0" anchor="t">
             <a:normAutofit/>
           </a:bodyPr>
           <a:lstStyle/>
@@ -13072,7 +13275,7 @@
               <a:buNone/>
             </a:pPr>
             <a:r>
-              <a:rPr lang="en-US" sz="1550" dirty="0">
+              <a:rPr lang="en-US" sz="1320" dirty="0">
                 <a:solidFill>
                   <a:srgbClr val="17364A"/>
                 </a:solidFill>
@@ -13082,7 +13285,7 @@
               </a:rPr>
               <a:t>CDC PHIN VADS</a:t>
             </a:r>
-            <a:endParaRPr lang="en-US" sz="1550" dirty="0"/>
+            <a:endParaRPr lang="en-US" sz="1320" dirty="0"/>
           </a:p>
         </p:txBody>
       </p:sp>
@@ -13170,13 +13373,16 @@
           <a:ln/>
         </p:spPr>
         <p:txBody>
-          <a:bodyPr wrap="square" lIns="254" tIns="254" rIns="254" bIns="254" rtlCol="0" anchor="t">
+          <a:bodyPr wrap="square" lIns="508" tIns="508" rIns="508" bIns="508" rtlCol="0" anchor="t">
             <a:normAutofit/>
           </a:bodyPr>
           <a:lstStyle/>
           <a:p>
-            <a:r>
-              <a:rPr lang="en-US" sz="1380" dirty="0">
+            <a:pPr indent="0" marL="0">
+              <a:buNone/>
+            </a:pPr>
+            <a:r>
+              <a:rPr lang="en-US" sz="1220" dirty="0">
                 <a:solidFill>
                   <a:srgbClr val="17364A"/>
                 </a:solidFill>
@@ -13186,11 +13392,14 @@
               </a:rPr>
               <a:t>CDC PHIN VADS</a:t>
             </a:r>
-            <a:endParaRPr lang="en-US" sz="1380" dirty="0"/>
-          </a:p>
-          <a:p>
-            <a:r>
-              <a:rPr lang="en-US" sz="1380" dirty="0">
+            <a:endParaRPr lang="en-US" sz="1220" dirty="0"/>
+          </a:p>
+          <a:p>
+            <a:pPr indent="0" marL="0">
+              <a:buNone/>
+            </a:pPr>
+            <a:r>
+              <a:rPr lang="en-US" sz="1220" dirty="0">
                 <a:solidFill>
                   <a:srgbClr val="17364A"/>
                 </a:solidFill>
@@ -13200,11 +13409,14 @@
               </a:rPr>
               <a:t>Reportable Condition Mapping Table resources</a:t>
             </a:r>
-            <a:endParaRPr lang="en-US" sz="1380" dirty="0"/>
-          </a:p>
-          <a:p>
-            <a:r>
-              <a:rPr lang="en-US" sz="1380" dirty="0">
+            <a:endParaRPr lang="en-US" sz="1220" dirty="0"/>
+          </a:p>
+          <a:p>
+            <a:pPr indent="0" marL="0">
+              <a:buNone/>
+            </a:pPr>
+            <a:r>
+              <a:rPr lang="en-US" sz="1220" dirty="0">
                 <a:solidFill>
                   <a:srgbClr val="17364A"/>
                 </a:solidFill>
@@ -13214,7 +13426,7 @@
               </a:rPr>
               <a:t>APHL laboratory informatics resources</a:t>
             </a:r>
-            <a:endParaRPr lang="en-US" sz="1380" dirty="0"/>
+            <a:endParaRPr lang="en-US" sz="1220" dirty="0"/>
           </a:p>
         </p:txBody>
       </p:sp>
@@ -13292,17 +13504,17 @@
         </p:nvSpPr>
         <p:spPr>
           <a:xfrm>
-            <a:off x="7799832" y="5001768"/>
-            <a:ext cx="3145536" cy="502920"/>
-          </a:xfrm>
-          <a:prstGeom prst="rect">
-            <a:avLst/>
-          </a:prstGeom>
-          <a:noFill/>
-          <a:ln/>
-        </p:spPr>
-        <p:txBody>
-          <a:bodyPr wrap="square" lIns="0" tIns="0" rIns="0" bIns="0" rtlCol="0" anchor="t">
+            <a:off x="7799832" y="4974336"/>
+            <a:ext cx="3145536" cy="576072"/>
+          </a:xfrm>
+          <a:prstGeom prst="rect">
+            <a:avLst/>
+          </a:prstGeom>
+          <a:noFill/>
+          <a:ln/>
+        </p:spPr>
+        <p:txBody>
+          <a:bodyPr wrap="square" lIns="254" tIns="254" rIns="254" bIns="254" rtlCol="0" anchor="t">
             <a:normAutofit/>
           </a:bodyPr>
           <a:lstStyle/>
@@ -13311,7 +13523,7 @@
               <a:buNone/>
             </a:pPr>
             <a:r>
-              <a:rPr lang="en-US" sz="1550" dirty="0">
+              <a:rPr lang="en-US" sz="1320" dirty="0">
                 <a:solidFill>
                   <a:srgbClr val="17364A"/>
                 </a:solidFill>
@@ -13319,9 +13531,9 @@
                 <a:ea typeface="Aptos" pitchFamily="34" charset="-122"/>
                 <a:cs typeface="Aptos" pitchFamily="34" charset="-120"/>
               </a:rPr>
-              <a:t>Connect the concept to data quality, model performance, validation evidence, monitoring measures, and decisions that remain under human control.</a:t>
-            </a:r>
-            <a:endParaRPr lang="en-US" sz="1550" dirty="0"/>
+              <a:t>Connect the concept to data quality, model performance, validation evidence, monitoring measures, and decisions that.</a:t>
+            </a:r>
+            <a:endParaRPr lang="en-US" sz="1320" dirty="0"/>
           </a:p>
         </p:txBody>
       </p:sp>
@@ -13622,63 +13834,75 @@
           <a:ln/>
         </p:spPr>
         <p:txBody>
-          <a:bodyPr wrap="square" lIns="635" tIns="635" rIns="635" bIns="635" rtlCol="0" anchor="t">
+          <a:bodyPr wrap="square" lIns="1016" tIns="1016" rIns="1016" bIns="1016" rtlCol="0" anchor="t">
             <a:normAutofit/>
           </a:bodyPr>
           <a:lstStyle/>
           <a:p>
+            <a:pPr indent="0" marL="0">
+              <a:buNone/>
+            </a:pPr>
             <a:r>
               <a:rPr lang="en-US" sz="1900" dirty="0">
                 <a:solidFill>
-                  <a:srgbClr val="17364A"/>
-                </a:solidFill>
-                <a:latin typeface="Aptos" pitchFamily="34" charset="0"/>
-                <a:ea typeface="Aptos" pitchFamily="34" charset="-122"/>
-                <a:cs typeface="Aptos" pitchFamily="34" charset="-120"/>
-              </a:rPr>
-              <a:t>Play 11: Build and Deploy AI Solutions - This lesson informs Play 11 by helping learners connect the lesson.</a:t>
+                  <a:srgbClr val="003A63"/>
+                </a:solidFill>
+                <a:latin typeface="Aptos" pitchFamily="34" charset="0"/>
+                <a:ea typeface="Aptos" pitchFamily="34" charset="-122"/>
+                <a:cs typeface="Aptos" pitchFamily="34" charset="-120"/>
+              </a:rPr>
+              <a:t>• Play 11: Build and Deploy AI Solutions - This lesson informs Play 11 by helping learners.</a:t>
             </a:r>
             <a:endParaRPr lang="en-US" sz="1900" dirty="0"/>
           </a:p>
           <a:p>
+            <a:pPr indent="0" marL="0">
+              <a:buNone/>
+            </a:pPr>
             <a:r>
               <a:rPr lang="en-US" sz="1900" dirty="0">
                 <a:solidFill>
-                  <a:srgbClr val="17364A"/>
-                </a:solidFill>
-                <a:latin typeface="Aptos" pitchFamily="34" charset="0"/>
-                <a:ea typeface="Aptos" pitchFamily="34" charset="-122"/>
-                <a:cs typeface="Aptos" pitchFamily="34" charset="-120"/>
-              </a:rPr>
-              <a:t>Play 7: Prioritize Use Cases - This lesson informs Play 7 by helping learners connect the lesson topic to.</a:t>
+                  <a:srgbClr val="003A63"/>
+                </a:solidFill>
+                <a:latin typeface="Aptos" pitchFamily="34" charset="0"/>
+                <a:ea typeface="Aptos" pitchFamily="34" charset="-122"/>
+                <a:cs typeface="Aptos" pitchFamily="34" charset="-120"/>
+              </a:rPr>
+              <a:t>• Play 7: Prioritize Use Cases - This lesson informs Play 7 by helping learners connect the.</a:t>
             </a:r>
             <a:endParaRPr lang="en-US" sz="1900" dirty="0"/>
           </a:p>
           <a:p>
+            <a:pPr indent="0" marL="0">
+              <a:buNone/>
+            </a:pPr>
             <a:r>
               <a:rPr lang="en-US" sz="1900" dirty="0">
                 <a:solidFill>
-                  <a:srgbClr val="17364A"/>
-                </a:solidFill>
-                <a:latin typeface="Aptos" pitchFamily="34" charset="0"/>
-                <a:ea typeface="Aptos" pitchFamily="34" charset="-122"/>
-                <a:cs typeface="Aptos" pitchFamily="34" charset="-120"/>
-              </a:rPr>
-              <a:t>Play 2: Readiness Assessment - This lesson informs Play 2 by helping learners connect the lesson topic to.</a:t>
+                  <a:srgbClr val="003A63"/>
+                </a:solidFill>
+                <a:latin typeface="Aptos" pitchFamily="34" charset="0"/>
+                <a:ea typeface="Aptos" pitchFamily="34" charset="-122"/>
+                <a:cs typeface="Aptos" pitchFamily="34" charset="-120"/>
+              </a:rPr>
+              <a:t>• Play 2: Readiness Assessment - This lesson informs Play 2 by helping learners connect the.</a:t>
             </a:r>
             <a:endParaRPr lang="en-US" sz="1900" dirty="0"/>
           </a:p>
           <a:p>
+            <a:pPr indent="0" marL="0">
+              <a:buNone/>
+            </a:pPr>
             <a:r>
               <a:rPr lang="en-US" sz="1900" dirty="0">
                 <a:solidFill>
-                  <a:srgbClr val="17364A"/>
-                </a:solidFill>
-                <a:latin typeface="Aptos" pitchFamily="34" charset="0"/>
-                <a:ea typeface="Aptos" pitchFamily="34" charset="-122"/>
-                <a:cs typeface="Aptos" pitchFamily="34" charset="-120"/>
-              </a:rPr>
-              <a:t>Play 1: Vision &amp; Guardrails - This lesson informs Play 1 by helping learners connect the lesson topic to.</a:t>
+                  <a:srgbClr val="003A63"/>
+                </a:solidFill>
+                <a:latin typeface="Aptos" pitchFamily="34" charset="0"/>
+                <a:ea typeface="Aptos" pitchFamily="34" charset="-122"/>
+                <a:cs typeface="Aptos" pitchFamily="34" charset="-120"/>
+              </a:rPr>
+              <a:t>• Play 1: Vision &amp; Guardrails - This lesson informs Play 1 by helping learners connect the.</a:t>
             </a:r>
             <a:endParaRPr lang="en-US" sz="1900" dirty="0"/>
           </a:p>
@@ -13758,17 +13982,17 @@
         </p:nvSpPr>
         <p:spPr>
           <a:xfrm>
-            <a:off x="8211312" y="1920240"/>
-            <a:ext cx="2734056" cy="1463040"/>
-          </a:xfrm>
-          <a:prstGeom prst="rect">
-            <a:avLst/>
-          </a:prstGeom>
-          <a:noFill/>
-          <a:ln/>
-        </p:spPr>
-        <p:txBody>
-          <a:bodyPr wrap="square" lIns="0" tIns="0" rIns="0" bIns="0" rtlCol="0" anchor="t">
+            <a:off x="8211312" y="1892808"/>
+            <a:ext cx="2734056" cy="1536192"/>
+          </a:xfrm>
+          <a:prstGeom prst="rect">
+            <a:avLst/>
+          </a:prstGeom>
+          <a:noFill/>
+          <a:ln/>
+        </p:spPr>
+        <p:txBody>
+          <a:bodyPr wrap="square" lIns="254" tIns="254" rIns="254" bIns="254" rtlCol="0" anchor="t">
             <a:normAutofit/>
           </a:bodyPr>
           <a:lstStyle/>
@@ -13777,7 +14001,7 @@
               <a:buNone/>
             </a:pPr>
             <a:r>
-              <a:rPr lang="en-US" sz="1550" dirty="0">
+              <a:rPr lang="en-US" sz="1320" dirty="0">
                 <a:solidFill>
                   <a:srgbClr val="17364A"/>
                 </a:solidFill>
@@ -13785,9 +14009,9 @@
                 <a:ea typeface="Aptos" pitchFamily="34" charset="-122"/>
                 <a:cs typeface="Aptos" pitchFamily="34" charset="-120"/>
               </a:rPr>
-              <a:t>Use the related plays to identify decisions, participants, timing, approvals, and documentation needed for responsible implementation.</a:t>
-            </a:r>
-            <a:endParaRPr lang="en-US" sz="1550" dirty="0"/>
+              <a:t>Use the related plays to identify decisions, participants, timing, approvals, and documentation needed for responsible.</a:t>
+            </a:r>
+            <a:endParaRPr lang="en-US" sz="1320" dirty="0"/>
           </a:p>
         </p:txBody>
       </p:sp>
@@ -13875,13 +14099,16 @@
           <a:ln/>
         </p:spPr>
         <p:txBody>
-          <a:bodyPr wrap="square" lIns="254" tIns="254" rIns="254" bIns="254" rtlCol="0" anchor="t">
+          <a:bodyPr wrap="square" lIns="508" tIns="508" rIns="508" bIns="508" rtlCol="0" anchor="t">
             <a:normAutofit/>
           </a:bodyPr>
           <a:lstStyle/>
           <a:p>
-            <a:r>
-              <a:rPr lang="en-US" sz="1380" dirty="0">
+            <a:pPr indent="0" marL="0">
+              <a:buNone/>
+            </a:pPr>
+            <a:r>
+              <a:rPr lang="en-US" sz="1220" dirty="0">
                 <a:solidFill>
                   <a:srgbClr val="17364A"/>
                 </a:solidFill>
@@ -13891,11 +14118,14 @@
               </a:rPr>
               <a:t>Locate the decision point in the playbook sequence.</a:t>
             </a:r>
-            <a:endParaRPr lang="en-US" sz="1380" dirty="0"/>
-          </a:p>
-          <a:p>
-            <a:r>
-              <a:rPr lang="en-US" sz="1380" dirty="0">
+            <a:endParaRPr lang="en-US" sz="1220" dirty="0"/>
+          </a:p>
+          <a:p>
+            <a:pPr indent="0" marL="0">
+              <a:buNone/>
+            </a:pPr>
+            <a:r>
+              <a:rPr lang="en-US" sz="1220" dirty="0">
                 <a:solidFill>
                   <a:srgbClr val="17364A"/>
                 </a:solidFill>
@@ -13905,11 +14135,14 @@
               </a:rPr>
               <a:t>Identify who should participate in the work.</a:t>
             </a:r>
-            <a:endParaRPr lang="en-US" sz="1380" dirty="0"/>
-          </a:p>
-          <a:p>
-            <a:r>
-              <a:rPr lang="en-US" sz="1380" dirty="0">
+            <a:endParaRPr lang="en-US" sz="1220" dirty="0"/>
+          </a:p>
+          <a:p>
+            <a:pPr indent="0" marL="0">
+              <a:buNone/>
+            </a:pPr>
+            <a:r>
+              <a:rPr lang="en-US" sz="1220" dirty="0">
                 <a:solidFill>
                   <a:srgbClr val="17364A"/>
                 </a:solidFill>
@@ -13919,7 +14152,7 @@
               </a:rPr>
               <a:t>Document the review, approval, or implementation step.</a:t>
             </a:r>
-            <a:endParaRPr lang="en-US" sz="1380" dirty="0"/>
+            <a:endParaRPr lang="en-US" sz="1220" dirty="0"/>
           </a:p>
         </p:txBody>
       </p:sp>
@@ -14220,63 +14453,75 @@
           <a:ln/>
         </p:spPr>
         <p:txBody>
-          <a:bodyPr wrap="square" lIns="635" tIns="635" rIns="635" bIns="635" rtlCol="0" anchor="t">
+          <a:bodyPr wrap="square" lIns="1016" tIns="1016" rIns="1016" bIns="1016" rtlCol="0" anchor="t">
             <a:normAutofit/>
           </a:bodyPr>
           <a:lstStyle/>
           <a:p>
+            <a:pPr indent="0" marL="0">
+              <a:buNone/>
+            </a:pPr>
             <a:r>
               <a:rPr lang="en-US" sz="1850" dirty="0">
                 <a:solidFill>
-                  <a:srgbClr val="17364A"/>
-                </a:solidFill>
-                <a:latin typeface="Aptos" pitchFamily="34" charset="0"/>
-                <a:ea typeface="Aptos" pitchFamily="34" charset="-122"/>
-                <a:cs typeface="Aptos" pitchFamily="34" charset="-120"/>
-              </a:rPr>
-              <a:t>Tool 4: AI Policy Landscape Scan (Worksheet) - Use AI Policy Landscape Scan to translate this lesson into a.</a:t>
+                  <a:srgbClr val="003A63"/>
+                </a:solidFill>
+                <a:latin typeface="Aptos" pitchFamily="34" charset="0"/>
+                <a:ea typeface="Aptos" pitchFamily="34" charset="-122"/>
+                <a:cs typeface="Aptos" pitchFamily="34" charset="-120"/>
+              </a:rPr>
+              <a:t>• Tool 4: AI Policy Landscape Scan (Worksheet) - Use AI Policy Landscape Scan to translate this.</a:t>
             </a:r>
             <a:endParaRPr lang="en-US" sz="1850" dirty="0"/>
           </a:p>
           <a:p>
+            <a:pPr indent="0" marL="0">
+              <a:buNone/>
+            </a:pPr>
             <a:r>
               <a:rPr lang="en-US" sz="1850" dirty="0">
                 <a:solidFill>
-                  <a:srgbClr val="17364A"/>
-                </a:solidFill>
-                <a:latin typeface="Aptos" pitchFamily="34" charset="0"/>
-                <a:ea typeface="Aptos" pitchFamily="34" charset="-122"/>
-                <a:cs typeface="Aptos" pitchFamily="34" charset="-120"/>
-              </a:rPr>
-              <a:t>Tool 5: AI Environmental and Resource Impact Review (Checklist) - Use AI Environmental and Resource Impact.</a:t>
+                  <a:srgbClr val="003A63"/>
+                </a:solidFill>
+                <a:latin typeface="Aptos" pitchFamily="34" charset="0"/>
+                <a:ea typeface="Aptos" pitchFamily="34" charset="-122"/>
+                <a:cs typeface="Aptos" pitchFamily="34" charset="-120"/>
+              </a:rPr>
+              <a:t>• Tool 5: AI Environmental and Resource Impact Review (Checklist) - Use AI Environmental and.</a:t>
             </a:r>
             <a:endParaRPr lang="en-US" sz="1850" dirty="0"/>
           </a:p>
           <a:p>
+            <a:pPr indent="0" marL="0">
+              <a:buNone/>
+            </a:pPr>
             <a:r>
               <a:rPr lang="en-US" sz="1850" dirty="0">
                 <a:solidFill>
-                  <a:srgbClr val="17364A"/>
-                </a:solidFill>
-                <a:latin typeface="Aptos" pitchFamily="34" charset="0"/>
-                <a:ea typeface="Aptos" pitchFamily="34" charset="-122"/>
-                <a:cs typeface="Aptos" pitchFamily="34" charset="-120"/>
-              </a:rPr>
-              <a:t>Tool 6: Human-Centered AI Decision Rule Checklist (Checklist) - Use Human-Centered AI Decision Rule.</a:t>
+                  <a:srgbClr val="003A63"/>
+                </a:solidFill>
+                <a:latin typeface="Aptos" pitchFamily="34" charset="0"/>
+                <a:ea typeface="Aptos" pitchFamily="34" charset="-122"/>
+                <a:cs typeface="Aptos" pitchFamily="34" charset="-120"/>
+              </a:rPr>
+              <a:t>• Tool 6: Human-Centered AI Decision Rule Checklist (Checklist) - Use Human-Centered AI Decision.</a:t>
             </a:r>
             <a:endParaRPr lang="en-US" sz="1850" dirty="0"/>
           </a:p>
           <a:p>
+            <a:pPr indent="0" marL="0">
+              <a:buNone/>
+            </a:pPr>
             <a:r>
               <a:rPr lang="en-US" sz="1850" dirty="0">
                 <a:solidFill>
-                  <a:srgbClr val="17364A"/>
-                </a:solidFill>
-                <a:latin typeface="Aptos" pitchFamily="34" charset="0"/>
-                <a:ea typeface="Aptos" pitchFamily="34" charset="-122"/>
-                <a:cs typeface="Aptos" pitchFamily="34" charset="-120"/>
-              </a:rPr>
-              <a:t>Tool 8: AI Project Charter (Planning) - Use AI Project Charter to translate this lesson into a documented.</a:t>
+                  <a:srgbClr val="003A63"/>
+                </a:solidFill>
+                <a:latin typeface="Aptos" pitchFamily="34" charset="0"/>
+                <a:ea typeface="Aptos" pitchFamily="34" charset="-122"/>
+                <a:cs typeface="Aptos" pitchFamily="34" charset="-120"/>
+              </a:rPr>
+              <a:t>• Tool 8: AI Project Charter (Planning) - Use AI Project Charter to translate this lesson into a.</a:t>
             </a:r>
             <a:endParaRPr lang="en-US" sz="1850" dirty="0"/>
           </a:p>
@@ -14356,17 +14601,17 @@
         </p:nvSpPr>
         <p:spPr>
           <a:xfrm>
-            <a:off x="8211312" y="1920240"/>
-            <a:ext cx="2734056" cy="1463040"/>
-          </a:xfrm>
-          <a:prstGeom prst="rect">
-            <a:avLst/>
-          </a:prstGeom>
-          <a:noFill/>
-          <a:ln/>
-        </p:spPr>
-        <p:txBody>
-          <a:bodyPr wrap="square" lIns="0" tIns="0" rIns="0" bIns="0" rtlCol="0" anchor="t">
+            <a:off x="8211312" y="1892808"/>
+            <a:ext cx="2734056" cy="1536192"/>
+          </a:xfrm>
+          <a:prstGeom prst="rect">
+            <a:avLst/>
+          </a:prstGeom>
+          <a:noFill/>
+          <a:ln/>
+        </p:spPr>
+        <p:txBody>
+          <a:bodyPr wrap="square" lIns="254" tIns="254" rIns="254" bIns="254" rtlCol="0" anchor="t">
             <a:normAutofit/>
           </a:bodyPr>
           <a:lstStyle/>
@@ -14375,7 +14620,7 @@
               <a:buNone/>
             </a:pPr>
             <a:r>
-              <a:rPr lang="en-US" sz="1550" dirty="0">
+              <a:rPr lang="en-US" sz="1320" dirty="0">
                 <a:solidFill>
                   <a:srgbClr val="17364A"/>
                 </a:solidFill>
@@ -14383,9 +14628,9 @@
                 <a:ea typeface="Aptos" pitchFamily="34" charset="-122"/>
                 <a:cs typeface="Aptos" pitchFamily="34" charset="-120"/>
               </a:rPr>
-              <a:t>Use linked tools when your department needs a structured worksheet, template, checklist, review process, or documentation artifact.</a:t>
-            </a:r>
-            <a:endParaRPr lang="en-US" sz="1550" dirty="0"/>
+              <a:t>Use linked tools when your department needs a structured worksheet, template, checklist, review process, or.</a:t>
+            </a:r>
+            <a:endParaRPr lang="en-US" sz="1320" dirty="0"/>
           </a:p>
         </p:txBody>
       </p:sp>
@@ -14473,13 +14718,16 @@
           <a:ln/>
         </p:spPr>
         <p:txBody>
-          <a:bodyPr wrap="square" lIns="254" tIns="254" rIns="254" bIns="254" rtlCol="0" anchor="t">
+          <a:bodyPr wrap="square" lIns="508" tIns="508" rIns="508" bIns="508" rtlCol="0" anchor="t">
             <a:normAutofit/>
           </a:bodyPr>
           <a:lstStyle/>
           <a:p>
-            <a:r>
-              <a:rPr lang="en-US" sz="1380" dirty="0">
+            <a:pPr indent="0" marL="0">
+              <a:buNone/>
+            </a:pPr>
+            <a:r>
+              <a:rPr lang="en-US" sz="1220" dirty="0">
                 <a:solidFill>
                   <a:srgbClr val="17364A"/>
                 </a:solidFill>
@@ -14489,11 +14737,14 @@
               </a:rPr>
               <a:t>Use a tool when no comparable local process exists.</a:t>
             </a:r>
-            <a:endParaRPr lang="en-US" sz="1380" dirty="0"/>
-          </a:p>
-          <a:p>
-            <a:r>
-              <a:rPr lang="en-US" sz="1380" dirty="0">
+            <a:endParaRPr lang="en-US" sz="1220" dirty="0"/>
+          </a:p>
+          <a:p>
+            <a:pPr indent="0" marL="0">
+              <a:buNone/>
+            </a:pPr>
+            <a:r>
+              <a:rPr lang="en-US" sz="1220" dirty="0">
                 <a:solidFill>
                   <a:srgbClr val="17364A"/>
                 </a:solidFill>
@@ -14501,13 +14752,16 @@
                 <a:ea typeface="Aptos" pitchFamily="34" charset="-122"/>
                 <a:cs typeface="Aptos" pitchFamily="34" charset="-120"/>
               </a:rPr>
-              <a:t>Adapt existing department templates when they already fit the purpose.</a:t>
-            </a:r>
-            <a:endParaRPr lang="en-US" sz="1380" dirty="0"/>
-          </a:p>
-          <a:p>
-            <a:r>
-              <a:rPr lang="en-US" sz="1380" dirty="0">
+              <a:t>Adapt existing department templates when they already fit the.</a:t>
+            </a:r>
+            <a:endParaRPr lang="en-US" sz="1220" dirty="0"/>
+          </a:p>
+          <a:p>
+            <a:pPr indent="0" marL="0">
+              <a:buNone/>
+            </a:pPr>
+            <a:r>
+              <a:rPr lang="en-US" sz="1220" dirty="0">
                 <a:solidFill>
                   <a:srgbClr val="17364A"/>
                 </a:solidFill>
@@ -14517,7 +14771,7 @@
               </a:rPr>
               <a:t>Save the completed artifact as evidence of the decision.</a:t>
             </a:r>
-            <a:endParaRPr lang="en-US" sz="1380" dirty="0"/>
+            <a:endParaRPr lang="en-US" sz="1220" dirty="0"/>
           </a:p>
         </p:txBody>
       </p:sp>
@@ -14818,49 +15072,58 @@
           <a:ln/>
         </p:spPr>
         <p:txBody>
-          <a:bodyPr wrap="square" lIns="635" tIns="635" rIns="635" bIns="635" rtlCol="0" anchor="t">
+          <a:bodyPr wrap="square" lIns="1016" tIns="1016" rIns="1016" bIns="1016" rtlCol="0" anchor="t">
             <a:normAutofit/>
           </a:bodyPr>
           <a:lstStyle/>
           <a:p>
+            <a:pPr indent="0" marL="0">
+              <a:buNone/>
+            </a:pPr>
             <a:r>
               <a:rPr lang="en-US" sz="2100" dirty="0">
                 <a:solidFill>
-                  <a:srgbClr val="17364A"/>
-                </a:solidFill>
-                <a:latin typeface="Aptos" pitchFamily="34" charset="0"/>
-                <a:ea typeface="Aptos" pitchFamily="34" charset="-122"/>
-                <a:cs typeface="Aptos" pitchFamily="34" charset="-120"/>
-              </a:rPr>
-              <a:t>Describe how ELR supports public health surveillance and response.</a:t>
+                  <a:srgbClr val="003A63"/>
+                </a:solidFill>
+                <a:latin typeface="Aptos" pitchFamily="34" charset="0"/>
+                <a:ea typeface="Aptos" pitchFamily="34" charset="-122"/>
+                <a:cs typeface="Aptos" pitchFamily="34" charset="-120"/>
+              </a:rPr>
+              <a:t>• Describe how ELR supports public health surveillance and response.</a:t>
             </a:r>
             <a:endParaRPr lang="en-US" sz="2100" dirty="0"/>
           </a:p>
           <a:p>
+            <a:pPr indent="0" marL="0">
+              <a:buNone/>
+            </a:pPr>
             <a:r>
               <a:rPr lang="en-US" sz="2100" dirty="0">
                 <a:solidFill>
-                  <a:srgbClr val="17364A"/>
-                </a:solidFill>
-                <a:latin typeface="Aptos" pitchFamily="34" charset="0"/>
-                <a:ea typeface="Aptos" pitchFamily="34" charset="-122"/>
-                <a:cs typeface="Aptos" pitchFamily="34" charset="-120"/>
-              </a:rPr>
-              <a:t>Explain why LOINC, SNOMED CT, UCUM, local codes, and reportable condition mappings matter for AI.</a:t>
+                  <a:srgbClr val="003A63"/>
+                </a:solidFill>
+                <a:latin typeface="Aptos" pitchFamily="34" charset="0"/>
+                <a:ea typeface="Aptos" pitchFamily="34" charset="-122"/>
+                <a:cs typeface="Aptos" pitchFamily="34" charset="-120"/>
+              </a:rPr>
+              <a:t>• Explain why LOINC, SNOMED CT, UCUM, local codes, and reportable condition mappings matter for.</a:t>
             </a:r>
             <a:endParaRPr lang="en-US" sz="2100" dirty="0"/>
           </a:p>
           <a:p>
+            <a:pPr indent="0" marL="0">
+              <a:buNone/>
+            </a:pPr>
             <a:r>
               <a:rPr lang="en-US" sz="2100" dirty="0">
                 <a:solidFill>
-                  <a:srgbClr val="17364A"/>
-                </a:solidFill>
-                <a:latin typeface="Aptos" pitchFamily="34" charset="0"/>
-                <a:ea typeface="Aptos" pitchFamily="34" charset="-122"/>
-                <a:cs typeface="Aptos" pitchFamily="34" charset="-120"/>
-              </a:rPr>
-              <a:t>Identify common laboratory data quality problems that can affect AI outputs.</a:t>
+                  <a:srgbClr val="003A63"/>
+                </a:solidFill>
+                <a:latin typeface="Aptos" pitchFamily="34" charset="0"/>
+                <a:ea typeface="Aptos" pitchFamily="34" charset="-122"/>
+                <a:cs typeface="Aptos" pitchFamily="34" charset="-120"/>
+              </a:rPr>
+              <a:t>• Identify common laboratory data quality problems that can affect AI outputs.</a:t>
             </a:r>
             <a:endParaRPr lang="en-US" sz="2100" dirty="0"/>
           </a:p>
@@ -14940,17 +15203,17 @@
         </p:nvSpPr>
         <p:spPr>
           <a:xfrm>
-            <a:off x="7799832" y="1828800"/>
-            <a:ext cx="3145536" cy="685800"/>
-          </a:xfrm>
-          <a:prstGeom prst="rect">
-            <a:avLst/>
-          </a:prstGeom>
-          <a:noFill/>
-          <a:ln/>
-        </p:spPr>
-        <p:txBody>
-          <a:bodyPr wrap="square" lIns="0" tIns="0" rIns="0" bIns="0" rtlCol="0" anchor="t">
+            <a:off x="7799832" y="1801368"/>
+            <a:ext cx="3145536" cy="758952"/>
+          </a:xfrm>
+          <a:prstGeom prst="rect">
+            <a:avLst/>
+          </a:prstGeom>
+          <a:noFill/>
+          <a:ln/>
+        </p:spPr>
+        <p:txBody>
+          <a:bodyPr wrap="square" lIns="254" tIns="254" rIns="254" bIns="254" rtlCol="0" anchor="t">
             <a:normAutofit/>
           </a:bodyPr>
           <a:lstStyle/>
@@ -14959,7 +15222,7 @@
               <a:buNone/>
             </a:pPr>
             <a:r>
-              <a:rPr lang="en-US" sz="1550" dirty="0">
+              <a:rPr lang="en-US" sz="1320" dirty="0">
                 <a:solidFill>
                   <a:srgbClr val="17364A"/>
                 </a:solidFill>
@@ -14969,7 +15232,7 @@
               </a:rPr>
               <a:t>Describe how ELR supports public health surveillance and response.</a:t>
             </a:r>
-            <a:endParaRPr lang="en-US" sz="1550" dirty="0"/>
+            <a:endParaRPr lang="en-US" sz="1320" dirty="0"/>
           </a:p>
         </p:txBody>
       </p:sp>
@@ -15057,13 +15320,16 @@
           <a:ln/>
         </p:spPr>
         <p:txBody>
-          <a:bodyPr wrap="square" lIns="254" tIns="254" rIns="254" bIns="254" rtlCol="0" anchor="t">
+          <a:bodyPr wrap="square" lIns="508" tIns="508" rIns="508" bIns="508" rtlCol="0" anchor="t">
             <a:normAutofit/>
           </a:bodyPr>
           <a:lstStyle/>
           <a:p>
-            <a:r>
-              <a:rPr lang="en-US" sz="1380" dirty="0">
+            <a:pPr indent="0" marL="0">
+              <a:buNone/>
+            </a:pPr>
+            <a:r>
+              <a:rPr lang="en-US" sz="1220" dirty="0">
                 <a:solidFill>
                   <a:srgbClr val="17364A"/>
                 </a:solidFill>
@@ -15071,13 +15337,16 @@
                 <a:ea typeface="Aptos" pitchFamily="34" charset="-122"/>
                 <a:cs typeface="Aptos" pitchFamily="34" charset="-120"/>
               </a:rPr>
-              <a:t>Assess whether lab data are fit for a specific AI-supported use case.</a:t>
-            </a:r>
-            <a:endParaRPr lang="en-US" sz="1380" dirty="0"/>
-          </a:p>
-          <a:p>
-            <a:r>
-              <a:rPr lang="en-US" sz="1380" dirty="0">
+              <a:t>Assess whether lab data are fit for a specific AI-supported use.</a:t>
+            </a:r>
+            <a:endParaRPr lang="en-US" sz="1220" dirty="0"/>
+          </a:p>
+          <a:p>
+            <a:pPr indent="0" marL="0">
+              <a:buNone/>
+            </a:pPr>
+            <a:r>
+              <a:rPr lang="en-US" sz="1220" dirty="0">
                 <a:solidFill>
                   <a:srgbClr val="17364A"/>
                 </a:solidFill>
@@ -15085,9 +15354,9 @@
                 <a:ea typeface="Aptos" pitchFamily="34" charset="-122"/>
                 <a:cs typeface="Aptos" pitchFamily="34" charset="-120"/>
               </a:rPr>
-              <a:t>Produce a lab data quality checklist for an AI-supported surveillance workflow.</a:t>
-            </a:r>
-            <a:endParaRPr lang="en-US" sz="1380" dirty="0"/>
+              <a:t>Produce a lab data quality checklist for an AI-supported.</a:t>
+            </a:r>
+            <a:endParaRPr lang="en-US" sz="1220" dirty="0"/>
           </a:p>
         </p:txBody>
       </p:sp>
@@ -15165,17 +15434,17 @@
         </p:nvSpPr>
         <p:spPr>
           <a:xfrm>
-            <a:off x="7799832" y="5001768"/>
-            <a:ext cx="3145536" cy="502920"/>
-          </a:xfrm>
-          <a:prstGeom prst="rect">
-            <a:avLst/>
-          </a:prstGeom>
-          <a:noFill/>
-          <a:ln/>
-        </p:spPr>
-        <p:txBody>
-          <a:bodyPr wrap="square" lIns="0" tIns="0" rIns="0" bIns="0" rtlCol="0" anchor="t">
+            <a:off x="7799832" y="4974336"/>
+            <a:ext cx="3145536" cy="576072"/>
+          </a:xfrm>
+          <a:prstGeom prst="rect">
+            <a:avLst/>
+          </a:prstGeom>
+          <a:noFill/>
+          <a:ln/>
+        </p:spPr>
+        <p:txBody>
+          <a:bodyPr wrap="square" lIns="254" tIns="254" rIns="254" bIns="254" rtlCol="0" anchor="t">
             <a:normAutofit/>
           </a:bodyPr>
           <a:lstStyle/>
@@ -15184,7 +15453,7 @@
               <a:buNone/>
             </a:pPr>
             <a:r>
-              <a:rPr lang="en-US" sz="1550" dirty="0">
+              <a:rPr lang="en-US" sz="1320" dirty="0">
                 <a:solidFill>
                   <a:srgbClr val="17364A"/>
                 </a:solidFill>
@@ -15192,9 +15461,9 @@
                 <a:ea typeface="Aptos" pitchFamily="34" charset="-122"/>
                 <a:cs typeface="Aptos" pitchFamily="34" charset="-120"/>
               </a:rPr>
-              <a:t>Use the assignment to test whether you can explain the concept, apply it to a realistic public health situation, and identify what would need review before the work moves forward.</a:t>
-            </a:r>
-            <a:endParaRPr lang="en-US" sz="1550" dirty="0"/>
+              <a:t>Use the assignment to test whether you can explain the concept, apply it to a realistic public health situation, and.</a:t>
+            </a:r>
+            <a:endParaRPr lang="en-US" sz="1320" dirty="0"/>
           </a:p>
         </p:txBody>
       </p:sp>
@@ -15495,49 +15764,58 @@
           <a:ln/>
         </p:spPr>
         <p:txBody>
-          <a:bodyPr wrap="square" lIns="635" tIns="635" rIns="635" bIns="635" rtlCol="0" anchor="t">
+          <a:bodyPr wrap="square" lIns="1016" tIns="1016" rIns="1016" bIns="1016" rtlCol="0" anchor="t">
             <a:normAutofit/>
           </a:bodyPr>
           <a:lstStyle/>
           <a:p>
+            <a:pPr indent="0" marL="0">
+              <a:buNone/>
+            </a:pPr>
             <a:r>
               <a:rPr lang="en-US" sz="2100" dirty="0">
                 <a:solidFill>
-                  <a:srgbClr val="17364A"/>
-                </a:solidFill>
-                <a:latin typeface="Aptos" pitchFamily="34" charset="0"/>
-                <a:ea typeface="Aptos" pitchFamily="34" charset="-122"/>
-                <a:cs typeface="Aptos" pitchFamily="34" charset="-120"/>
-              </a:rPr>
-              <a:t>Electronic laboratory reporting supplies critical evidence for infectious disease surveillance,.</a:t>
+                  <a:srgbClr val="003A63"/>
+                </a:solidFill>
+                <a:latin typeface="Aptos" pitchFamily="34" charset="0"/>
+                <a:ea typeface="Aptos" pitchFamily="34" charset="-122"/>
+                <a:cs typeface="Aptos" pitchFamily="34" charset="-120"/>
+              </a:rPr>
+              <a:t>• Electronic laboratory reporting supplies critical evidence for infectious disease surveillance,.</a:t>
             </a:r>
             <a:endParaRPr lang="en-US" sz="2100" dirty="0"/>
           </a:p>
           <a:p>
+            <a:pPr indent="0" marL="0">
+              <a:buNone/>
+            </a:pPr>
             <a:r>
               <a:rPr lang="en-US" sz="2100" dirty="0">
                 <a:solidFill>
-                  <a:srgbClr val="17364A"/>
-                </a:solidFill>
-                <a:latin typeface="Aptos" pitchFamily="34" charset="0"/>
-                <a:ea typeface="Aptos" pitchFamily="34" charset="-122"/>
-                <a:cs typeface="Aptos" pitchFamily="34" charset="-120"/>
-              </a:rPr>
-              <a:t>AI tools that use laboratory data depend on the quality of test codes, result codes, units, specimen.</a:t>
+                  <a:srgbClr val="003A63"/>
+                </a:solidFill>
+                <a:latin typeface="Aptos" pitchFamily="34" charset="0"/>
+                <a:ea typeface="Aptos" pitchFamily="34" charset="-122"/>
+                <a:cs typeface="Aptos" pitchFamily="34" charset="-120"/>
+              </a:rPr>
+              <a:t>• AI tools that use laboratory data depend on the quality of test codes, result codes, units,.</a:t>
             </a:r>
             <a:endParaRPr lang="en-US" sz="2100" dirty="0"/>
           </a:p>
           <a:p>
+            <a:pPr indent="0" marL="0">
+              <a:buNone/>
+            </a:pPr>
             <a:r>
               <a:rPr lang="en-US" sz="2100" dirty="0">
                 <a:solidFill>
-                  <a:srgbClr val="17364A"/>
-                </a:solidFill>
-                <a:latin typeface="Aptos" pitchFamily="34" charset="0"/>
-                <a:ea typeface="Aptos" pitchFamily="34" charset="-122"/>
-                <a:cs typeface="Aptos" pitchFamily="34" charset="-120"/>
-              </a:rPr>
-              <a:t>This module teaches learners how laboratory data quality and terminology mapping affect AI-supported.</a:t>
+                  <a:srgbClr val="003A63"/>
+                </a:solidFill>
+                <a:latin typeface="Aptos" pitchFamily="34" charset="0"/>
+                <a:ea typeface="Aptos" pitchFamily="34" charset="-122"/>
+                <a:cs typeface="Aptos" pitchFamily="34" charset="-120"/>
+              </a:rPr>
+              <a:t>• This module teaches learners how laboratory data quality and terminology mapping affect.</a:t>
             </a:r>
             <a:endParaRPr lang="en-US" sz="2100" dirty="0"/>
           </a:p>
@@ -15617,17 +15895,17 @@
         </p:nvSpPr>
         <p:spPr>
           <a:xfrm>
-            <a:off x="7799832" y="1828800"/>
-            <a:ext cx="3145536" cy="685800"/>
-          </a:xfrm>
-          <a:prstGeom prst="rect">
-            <a:avLst/>
-          </a:prstGeom>
-          <a:noFill/>
-          <a:ln/>
-        </p:spPr>
-        <p:txBody>
-          <a:bodyPr wrap="square" lIns="0" tIns="0" rIns="0" bIns="0" rtlCol="0" anchor="t">
+            <a:off x="7799832" y="1801368"/>
+            <a:ext cx="3145536" cy="758952"/>
+          </a:xfrm>
+          <a:prstGeom prst="rect">
+            <a:avLst/>
+          </a:prstGeom>
+          <a:noFill/>
+          <a:ln/>
+        </p:spPr>
+        <p:txBody>
+          <a:bodyPr wrap="square" lIns="254" tIns="254" rIns="254" bIns="254" rtlCol="0" anchor="t">
             <a:normAutofit/>
           </a:bodyPr>
           <a:lstStyle/>
@@ -15636,7 +15914,7 @@
               <a:buNone/>
             </a:pPr>
             <a:r>
-              <a:rPr lang="en-US" sz="1550" dirty="0">
+              <a:rPr lang="en-US" sz="1320" dirty="0">
                 <a:solidFill>
                   <a:srgbClr val="17364A"/>
                 </a:solidFill>
@@ -15646,7 +15924,7 @@
               </a:rPr>
               <a:t>Electronic laboratory reporting supplies critical evidence for infectious disease surveillance,.</a:t>
             </a:r>
-            <a:endParaRPr lang="en-US" sz="1550" dirty="0"/>
+            <a:endParaRPr lang="en-US" sz="1320" dirty="0"/>
           </a:p>
         </p:txBody>
       </p:sp>
@@ -15734,13 +16012,16 @@
           <a:ln/>
         </p:spPr>
         <p:txBody>
-          <a:bodyPr wrap="square" lIns="254" tIns="254" rIns="254" bIns="254" rtlCol="0" anchor="t">
+          <a:bodyPr wrap="square" lIns="508" tIns="508" rIns="508" bIns="508" rtlCol="0" anchor="t">
             <a:normAutofit/>
           </a:bodyPr>
           <a:lstStyle/>
           <a:p>
-            <a:r>
-              <a:rPr lang="en-US" sz="1380" dirty="0">
+            <a:pPr indent="0" marL="0">
+              <a:buNone/>
+            </a:pPr>
+            <a:r>
+              <a:rPr lang="en-US" sz="1220" dirty="0">
                 <a:solidFill>
                   <a:srgbClr val="17364A"/>
                 </a:solidFill>
@@ -15748,13 +16029,16 @@
                 <a:ea typeface="Aptos" pitchFamily="34" charset="-122"/>
                 <a:cs typeface="Aptos" pitchFamily="34" charset="-120"/>
               </a:rPr>
-              <a:t>Electronic laboratory reporting supplies critical evidence for infectious disease.</a:t>
-            </a:r>
-            <a:endParaRPr lang="en-US" sz="1380" dirty="0"/>
-          </a:p>
-          <a:p>
-            <a:r>
-              <a:rPr lang="en-US" sz="1380" dirty="0">
+              <a:t>Electronic laboratory reporting supplies critical evidence for.</a:t>
+            </a:r>
+            <a:endParaRPr lang="en-US" sz="1220" dirty="0"/>
+          </a:p>
+          <a:p>
+            <a:pPr indent="0" marL="0">
+              <a:buNone/>
+            </a:pPr>
+            <a:r>
+              <a:rPr lang="en-US" sz="1220" dirty="0">
                 <a:solidFill>
                   <a:srgbClr val="17364A"/>
                 </a:solidFill>
@@ -15762,13 +16046,16 @@
                 <a:ea typeface="Aptos" pitchFamily="34" charset="-122"/>
                 <a:cs typeface="Aptos" pitchFamily="34" charset="-120"/>
               </a:rPr>
-              <a:t>AI tools that use laboratory data depend on the quality of test codes, result codes,.</a:t>
-            </a:r>
-            <a:endParaRPr lang="en-US" sz="1380" dirty="0"/>
-          </a:p>
-          <a:p>
-            <a:r>
-              <a:rPr lang="en-US" sz="1380" dirty="0">
+              <a:t>AI tools that use laboratory data depend on the quality of test.</a:t>
+            </a:r>
+            <a:endParaRPr lang="en-US" sz="1220" dirty="0"/>
+          </a:p>
+          <a:p>
+            <a:pPr indent="0" marL="0">
+              <a:buNone/>
+            </a:pPr>
+            <a:r>
+              <a:rPr lang="en-US" sz="1220" dirty="0">
                 <a:solidFill>
                   <a:srgbClr val="17364A"/>
                 </a:solidFill>
@@ -15776,9 +16063,9 @@
                 <a:ea typeface="Aptos" pitchFamily="34" charset="-122"/>
                 <a:cs typeface="Aptos" pitchFamily="34" charset="-120"/>
               </a:rPr>
-              <a:t>This module teaches learners how laboratory data quality and terminology mapping affect.</a:t>
-            </a:r>
-            <a:endParaRPr lang="en-US" sz="1380" dirty="0"/>
+              <a:t>This module teaches learners how laboratory data quality and.</a:t>
+            </a:r>
+            <a:endParaRPr lang="en-US" sz="1220" dirty="0"/>
           </a:p>
         </p:txBody>
       </p:sp>
@@ -15856,17 +16143,17 @@
         </p:nvSpPr>
         <p:spPr>
           <a:xfrm>
-            <a:off x="7799832" y="5001768"/>
-            <a:ext cx="3145536" cy="502920"/>
-          </a:xfrm>
-          <a:prstGeom prst="rect">
-            <a:avLst/>
-          </a:prstGeom>
-          <a:noFill/>
-          <a:ln/>
-        </p:spPr>
-        <p:txBody>
-          <a:bodyPr wrap="square" lIns="0" tIns="0" rIns="0" bIns="0" rtlCol="0" anchor="t">
+            <a:off x="7799832" y="4974336"/>
+            <a:ext cx="3145536" cy="576072"/>
+          </a:xfrm>
+          <a:prstGeom prst="rect">
+            <a:avLst/>
+          </a:prstGeom>
+          <a:noFill/>
+          <a:ln/>
+        </p:spPr>
+        <p:txBody>
+          <a:bodyPr wrap="square" lIns="254" tIns="254" rIns="254" bIns="254" rtlCol="0" anchor="t">
             <a:normAutofit/>
           </a:bodyPr>
           <a:lstStyle/>
@@ -15875,7 +16162,7 @@
               <a:buNone/>
             </a:pPr>
             <a:r>
-              <a:rPr lang="en-US" sz="1550" dirty="0">
+              <a:rPr lang="en-US" sz="1320" dirty="0">
                 <a:solidFill>
                   <a:srgbClr val="17364A"/>
                 </a:solidFill>
@@ -15883,9 +16170,9 @@
                 <a:ea typeface="Aptos" pitchFamily="34" charset="-122"/>
                 <a:cs typeface="Aptos" pitchFamily="34" charset="-120"/>
               </a:rPr>
-              <a:t>Connect the concept to data quality, model performance, validation evidence, monitoring measures, and decisions that remain under human control.</a:t>
-            </a:r>
-            <a:endParaRPr lang="en-US" sz="1550" dirty="0"/>
+              <a:t>Connect the concept to data quality, model performance, validation evidence, monitoring measures, and decisions that.</a:t>
+            </a:r>
+            <a:endParaRPr lang="en-US" sz="1320" dirty="0"/>
           </a:p>
         </p:txBody>
       </p:sp>
@@ -16186,49 +16473,58 @@
           <a:ln/>
         </p:spPr>
         <p:txBody>
-          <a:bodyPr wrap="square" lIns="635" tIns="635" rIns="635" bIns="635" rtlCol="0" anchor="t">
+          <a:bodyPr wrap="square" lIns="1016" tIns="1016" rIns="1016" bIns="1016" rtlCol="0" anchor="t">
             <a:normAutofit/>
           </a:bodyPr>
           <a:lstStyle/>
           <a:p>
+            <a:pPr indent="0" marL="0">
+              <a:buNone/>
+            </a:pPr>
             <a:r>
               <a:rPr lang="en-US" sz="2100" dirty="0">
                 <a:solidFill>
-                  <a:srgbClr val="17364A"/>
-                </a:solidFill>
-                <a:latin typeface="Aptos" pitchFamily="34" charset="0"/>
-                <a:ea typeface="Aptos" pitchFamily="34" charset="-122"/>
-                <a:cs typeface="Aptos" pitchFamily="34" charset="-120"/>
-              </a:rPr>
-              <a:t>This national-level module is intended for training and planning purposes.</a:t>
+                  <a:srgbClr val="003A63"/>
+                </a:solidFill>
+                <a:latin typeface="Aptos" pitchFamily="34" charset="0"/>
+                <a:ea typeface="Aptos" pitchFamily="34" charset="-122"/>
+                <a:cs typeface="Aptos" pitchFamily="34" charset="-120"/>
+              </a:rPr>
+              <a:t>• This national-level module is intended for training and planning purposes.</a:t>
             </a:r>
             <a:endParaRPr lang="en-US" sz="2100" dirty="0"/>
           </a:p>
           <a:p>
+            <a:pPr indent="0" marL="0">
+              <a:buNone/>
+            </a:pPr>
             <a:r>
               <a:rPr lang="en-US" sz="2100" dirty="0">
                 <a:solidFill>
-                  <a:srgbClr val="17364A"/>
-                </a:solidFill>
-                <a:latin typeface="Aptos" pitchFamily="34" charset="0"/>
-                <a:ea typeface="Aptos" pitchFamily="34" charset="-122"/>
-                <a:cs typeface="Aptos" pitchFamily="34" charset="-120"/>
-              </a:rPr>
-              <a:t>It does not replace legal, privacy, procurement, civil rights, records, or agency policy review.</a:t>
+                  <a:srgbClr val="003A63"/>
+                </a:solidFill>
+                <a:latin typeface="Aptos" pitchFamily="34" charset="0"/>
+                <a:ea typeface="Aptos" pitchFamily="34" charset="-122"/>
+                <a:cs typeface="Aptos" pitchFamily="34" charset="-120"/>
+              </a:rPr>
+              <a:t>• It does not replace legal, privacy, procurement, civil rights, records, or agency policy review.</a:t>
             </a:r>
             <a:endParaRPr lang="en-US" sz="2100" dirty="0"/>
           </a:p>
           <a:p>
+            <a:pPr indent="0" marL="0">
+              <a:buNone/>
+            </a:pPr>
             <a:r>
               <a:rPr lang="en-US" sz="2100" dirty="0">
                 <a:solidFill>
-                  <a:srgbClr val="17364A"/>
-                </a:solidFill>
-                <a:latin typeface="Aptos" pitchFamily="34" charset="0"/>
-                <a:ea typeface="Aptos" pitchFamily="34" charset="-122"/>
-                <a:cs typeface="Aptos" pitchFamily="34" charset="-120"/>
-              </a:rPr>
-              <a:t>Learners should confirm applicable requirements in their own jurisdiction and organization before.</a:t>
+                  <a:srgbClr val="003A63"/>
+                </a:solidFill>
+                <a:latin typeface="Aptos" pitchFamily="34" charset="0"/>
+                <a:ea typeface="Aptos" pitchFamily="34" charset="-122"/>
+                <a:cs typeface="Aptos" pitchFamily="34" charset="-120"/>
+              </a:rPr>
+              <a:t>• Learners should confirm applicable requirements in their own jurisdiction and organization.</a:t>
             </a:r>
             <a:endParaRPr lang="en-US" sz="2100" dirty="0"/>
           </a:p>
@@ -16308,17 +16604,17 @@
         </p:nvSpPr>
         <p:spPr>
           <a:xfrm>
-            <a:off x="7799832" y="1828800"/>
-            <a:ext cx="3145536" cy="685800"/>
-          </a:xfrm>
-          <a:prstGeom prst="rect">
-            <a:avLst/>
-          </a:prstGeom>
-          <a:noFill/>
-          <a:ln/>
-        </p:spPr>
-        <p:txBody>
-          <a:bodyPr wrap="square" lIns="0" tIns="0" rIns="0" bIns="0" rtlCol="0" anchor="t">
+            <a:off x="7799832" y="1801368"/>
+            <a:ext cx="3145536" cy="758952"/>
+          </a:xfrm>
+          <a:prstGeom prst="rect">
+            <a:avLst/>
+          </a:prstGeom>
+          <a:noFill/>
+          <a:ln/>
+        </p:spPr>
+        <p:txBody>
+          <a:bodyPr wrap="square" lIns="254" tIns="254" rIns="254" bIns="254" rtlCol="0" anchor="t">
             <a:normAutofit/>
           </a:bodyPr>
           <a:lstStyle/>
@@ -16327,7 +16623,7 @@
               <a:buNone/>
             </a:pPr>
             <a:r>
-              <a:rPr lang="en-US" sz="1550" dirty="0">
+              <a:rPr lang="en-US" sz="1320" dirty="0">
                 <a:solidFill>
                   <a:srgbClr val="17364A"/>
                 </a:solidFill>
@@ -16337,7 +16633,7 @@
               </a:rPr>
               <a:t>This national-level module is intended for training and planning purposes.</a:t>
             </a:r>
-            <a:endParaRPr lang="en-US" sz="1550" dirty="0"/>
+            <a:endParaRPr lang="en-US" sz="1320" dirty="0"/>
           </a:p>
         </p:txBody>
       </p:sp>
@@ -16425,13 +16721,16 @@
           <a:ln/>
         </p:spPr>
         <p:txBody>
-          <a:bodyPr wrap="square" lIns="254" tIns="254" rIns="254" bIns="254" rtlCol="0" anchor="t">
+          <a:bodyPr wrap="square" lIns="508" tIns="508" rIns="508" bIns="508" rtlCol="0" anchor="t">
             <a:normAutofit/>
           </a:bodyPr>
           <a:lstStyle/>
           <a:p>
-            <a:r>
-              <a:rPr lang="en-US" sz="1380" dirty="0">
+            <a:pPr indent="0" marL="0">
+              <a:buNone/>
+            </a:pPr>
+            <a:r>
+              <a:rPr lang="en-US" sz="1220" dirty="0">
                 <a:solidFill>
                   <a:srgbClr val="17364A"/>
                 </a:solidFill>
@@ -16439,13 +16738,16 @@
                 <a:ea typeface="Aptos" pitchFamily="34" charset="-122"/>
                 <a:cs typeface="Aptos" pitchFamily="34" charset="-120"/>
               </a:rPr>
-              <a:t>This national-level module is intended for training and planning purposes.</a:t>
-            </a:r>
-            <a:endParaRPr lang="en-US" sz="1380" dirty="0"/>
-          </a:p>
-          <a:p>
-            <a:r>
-              <a:rPr lang="en-US" sz="1380" dirty="0">
+              <a:t>This national-level module is intended for training and planning.</a:t>
+            </a:r>
+            <a:endParaRPr lang="en-US" sz="1220" dirty="0"/>
+          </a:p>
+          <a:p>
+            <a:pPr indent="0" marL="0">
+              <a:buNone/>
+            </a:pPr>
+            <a:r>
+              <a:rPr lang="en-US" sz="1220" dirty="0">
                 <a:solidFill>
                   <a:srgbClr val="17364A"/>
                 </a:solidFill>
@@ -16453,13 +16755,16 @@
                 <a:ea typeface="Aptos" pitchFamily="34" charset="-122"/>
                 <a:cs typeface="Aptos" pitchFamily="34" charset="-120"/>
               </a:rPr>
-              <a:t>It does not replace legal, privacy, procurement, civil rights, records, or agency policy.</a:t>
-            </a:r>
-            <a:endParaRPr lang="en-US" sz="1380" dirty="0"/>
-          </a:p>
-          <a:p>
-            <a:r>
-              <a:rPr lang="en-US" sz="1380" dirty="0">
+              <a:t>It does not replace legal, privacy, procurement, civil rights,.</a:t>
+            </a:r>
+            <a:endParaRPr lang="en-US" sz="1220" dirty="0"/>
+          </a:p>
+          <a:p>
+            <a:pPr indent="0" marL="0">
+              <a:buNone/>
+            </a:pPr>
+            <a:r>
+              <a:rPr lang="en-US" sz="1220" dirty="0">
                 <a:solidFill>
                   <a:srgbClr val="17364A"/>
                 </a:solidFill>
@@ -16467,9 +16772,9 @@
                 <a:ea typeface="Aptos" pitchFamily="34" charset="-122"/>
                 <a:cs typeface="Aptos" pitchFamily="34" charset="-120"/>
               </a:rPr>
-              <a:t>Learners should confirm applicable requirements in their own jurisdiction and organization.</a:t>
-            </a:r>
-            <a:endParaRPr lang="en-US" sz="1380" dirty="0"/>
+              <a:t>Learners should confirm applicable requirements in their own.</a:t>
+            </a:r>
+            <a:endParaRPr lang="en-US" sz="1220" dirty="0"/>
           </a:p>
         </p:txBody>
       </p:sp>
@@ -16547,17 +16852,17 @@
         </p:nvSpPr>
         <p:spPr>
           <a:xfrm>
-            <a:off x="7799832" y="5001768"/>
-            <a:ext cx="3145536" cy="502920"/>
-          </a:xfrm>
-          <a:prstGeom prst="rect">
-            <a:avLst/>
-          </a:prstGeom>
-          <a:noFill/>
-          <a:ln/>
-        </p:spPr>
-        <p:txBody>
-          <a:bodyPr wrap="square" lIns="0" tIns="0" rIns="0" bIns="0" rtlCol="0" anchor="t">
+            <a:off x="7799832" y="4974336"/>
+            <a:ext cx="3145536" cy="576072"/>
+          </a:xfrm>
+          <a:prstGeom prst="rect">
+            <a:avLst/>
+          </a:prstGeom>
+          <a:noFill/>
+          <a:ln/>
+        </p:spPr>
+        <p:txBody>
+          <a:bodyPr wrap="square" lIns="254" tIns="254" rIns="254" bIns="254" rtlCol="0" anchor="t">
             <a:normAutofit/>
           </a:bodyPr>
           <a:lstStyle/>
@@ -16566,7 +16871,7 @@
               <a:buNone/>
             </a:pPr>
             <a:r>
-              <a:rPr lang="en-US" sz="1550" dirty="0">
+              <a:rPr lang="en-US" sz="1320" dirty="0">
                 <a:solidFill>
                   <a:srgbClr val="17364A"/>
                 </a:solidFill>
@@ -16574,9 +16879,9 @@
                 <a:ea typeface="Aptos" pitchFamily="34" charset="-122"/>
                 <a:cs typeface="Aptos" pitchFamily="34" charset="-120"/>
               </a:rPr>
-              <a:t>Translate this concept into clear decision rights, review steps, documentation expectations, and escalation paths before an AI-supported workflow is approved.</a:t>
-            </a:r>
-            <a:endParaRPr lang="en-US" sz="1550" dirty="0"/>
+              <a:t>Translate this concept into clear decision rights, review steps, documentation expectations, and escalation paths before.</a:t>
+            </a:r>
+            <a:endParaRPr lang="en-US" sz="1320" dirty="0"/>
           </a:p>
         </p:txBody>
       </p:sp>
@@ -16877,49 +17182,58 @@
           <a:ln/>
         </p:spPr>
         <p:txBody>
-          <a:bodyPr wrap="square" lIns="635" tIns="635" rIns="635" bIns="635" rtlCol="0" anchor="t">
+          <a:bodyPr wrap="square" lIns="1016" tIns="1016" rIns="1016" bIns="1016" rtlCol="0" anchor="t">
             <a:normAutofit/>
           </a:bodyPr>
           <a:lstStyle/>
           <a:p>
+            <a:pPr indent="0" marL="0">
+              <a:buNone/>
+            </a:pPr>
             <a:r>
               <a:rPr lang="en-US" sz="2100" dirty="0">
                 <a:solidFill>
-                  <a:srgbClr val="17364A"/>
-                </a:solidFill>
-                <a:latin typeface="Aptos" pitchFamily="34" charset="0"/>
-                <a:ea typeface="Aptos" pitchFamily="34" charset="-122"/>
-                <a:cs typeface="Aptos" pitchFamily="34" charset="-120"/>
-              </a:rPr>
-              <a:t>Laboratory data are often treated as objective because they come from tests and instruments, but the.</a:t>
+                  <a:srgbClr val="003A63"/>
+                </a:solidFill>
+                <a:latin typeface="Aptos" pitchFamily="34" charset="0"/>
+                <a:ea typeface="Aptos" pitchFamily="34" charset="-122"/>
+                <a:cs typeface="Aptos" pitchFamily="34" charset="-120"/>
+              </a:rPr>
+              <a:t>• Laboratory data are often treated as objective because they come from tests and instruments,.</a:t>
             </a:r>
             <a:endParaRPr lang="en-US" sz="2100" dirty="0"/>
           </a:p>
           <a:p>
+            <a:pPr indent="0" marL="0">
+              <a:buNone/>
+            </a:pPr>
             <a:r>
               <a:rPr lang="en-US" sz="2100" dirty="0">
                 <a:solidFill>
-                  <a:srgbClr val="17364A"/>
-                </a:solidFill>
-                <a:latin typeface="Aptos" pitchFamily="34" charset="0"/>
-                <a:ea typeface="Aptos" pitchFamily="34" charset="-122"/>
-                <a:cs typeface="Aptos" pitchFamily="34" charset="-120"/>
-              </a:rPr>
-              <a:t>A laboratory result can be difficult to use if the test code is local, the result is free text, the.</a:t>
+                  <a:srgbClr val="003A63"/>
+                </a:solidFill>
+                <a:latin typeface="Aptos" pitchFamily="34" charset="0"/>
+                <a:ea typeface="Aptos" pitchFamily="34" charset="-122"/>
+                <a:cs typeface="Aptos" pitchFamily="34" charset="-120"/>
+              </a:rPr>
+              <a:t>• A laboratory result can be difficult to use if the test code is local, the result is free.</a:t>
             </a:r>
             <a:endParaRPr lang="en-US" sz="2100" dirty="0"/>
           </a:p>
           <a:p>
+            <a:pPr indent="0" marL="0">
+              <a:buNone/>
+            </a:pPr>
             <a:r>
               <a:rPr lang="en-US" sz="2100" dirty="0">
                 <a:solidFill>
-                  <a:srgbClr val="17364A"/>
-                </a:solidFill>
-                <a:latin typeface="Aptos" pitchFamily="34" charset="0"/>
-                <a:ea typeface="Aptos" pitchFamily="34" charset="-122"/>
-                <a:cs typeface="Aptos" pitchFamily="34" charset="-120"/>
-              </a:rPr>
-              <a:t>AI tools can magnify these problems by turning unclear data into confident summaries or classifications.</a:t>
+                  <a:srgbClr val="003A63"/>
+                </a:solidFill>
+                <a:latin typeface="Aptos" pitchFamily="34" charset="0"/>
+                <a:ea typeface="Aptos" pitchFamily="34" charset="-122"/>
+                <a:cs typeface="Aptos" pitchFamily="34" charset="-120"/>
+              </a:rPr>
+              <a:t>• AI tools can magnify these problems by turning unclear data into confident summaries or.</a:t>
             </a:r>
             <a:endParaRPr lang="en-US" sz="2100" dirty="0"/>
           </a:p>
@@ -16999,17 +17313,17 @@
         </p:nvSpPr>
         <p:spPr>
           <a:xfrm>
-            <a:off x="7799832" y="1828800"/>
-            <a:ext cx="3145536" cy="685800"/>
-          </a:xfrm>
-          <a:prstGeom prst="rect">
-            <a:avLst/>
-          </a:prstGeom>
-          <a:noFill/>
-          <a:ln/>
-        </p:spPr>
-        <p:txBody>
-          <a:bodyPr wrap="square" lIns="0" tIns="0" rIns="0" bIns="0" rtlCol="0" anchor="t">
+            <a:off x="7799832" y="1801368"/>
+            <a:ext cx="3145536" cy="758952"/>
+          </a:xfrm>
+          <a:prstGeom prst="rect">
+            <a:avLst/>
+          </a:prstGeom>
+          <a:noFill/>
+          <a:ln/>
+        </p:spPr>
+        <p:txBody>
+          <a:bodyPr wrap="square" lIns="254" tIns="254" rIns="254" bIns="254" rtlCol="0" anchor="t">
             <a:normAutofit/>
           </a:bodyPr>
           <a:lstStyle/>
@@ -17018,7 +17332,7 @@
               <a:buNone/>
             </a:pPr>
             <a:r>
-              <a:rPr lang="en-US" sz="1550" dirty="0">
+              <a:rPr lang="en-US" sz="1320" dirty="0">
                 <a:solidFill>
                   <a:srgbClr val="17364A"/>
                 </a:solidFill>
@@ -17028,7 +17342,7 @@
               </a:rPr>
               <a:t>Laboratory data are often treated as objective because they come from tests and instruments, but the.</a:t>
             </a:r>
-            <a:endParaRPr lang="en-US" sz="1550" dirty="0"/>
+            <a:endParaRPr lang="en-US" sz="1320" dirty="0"/>
           </a:p>
         </p:txBody>
       </p:sp>
@@ -17116,13 +17430,16 @@
           <a:ln/>
         </p:spPr>
         <p:txBody>
-          <a:bodyPr wrap="square" lIns="254" tIns="254" rIns="254" bIns="254" rtlCol="0" anchor="t">
+          <a:bodyPr wrap="square" lIns="508" tIns="508" rIns="508" bIns="508" rtlCol="0" anchor="t">
             <a:normAutofit/>
           </a:bodyPr>
           <a:lstStyle/>
           <a:p>
-            <a:r>
-              <a:rPr lang="en-US" sz="1380" dirty="0">
+            <a:pPr indent="0" marL="0">
+              <a:buNone/>
+            </a:pPr>
+            <a:r>
+              <a:rPr lang="en-US" sz="1220" dirty="0">
                 <a:solidFill>
                   <a:srgbClr val="17364A"/>
                 </a:solidFill>
@@ -17130,13 +17447,16 @@
                 <a:ea typeface="Aptos" pitchFamily="34" charset="-122"/>
                 <a:cs typeface="Aptos" pitchFamily="34" charset="-120"/>
               </a:rPr>
-              <a:t>Laboratory data are often treated as objective because they come from tests and.</a:t>
-            </a:r>
-            <a:endParaRPr lang="en-US" sz="1380" dirty="0"/>
-          </a:p>
-          <a:p>
-            <a:r>
-              <a:rPr lang="en-US" sz="1380" dirty="0">
+              <a:t>Laboratory data are often treated as objective because they come.</a:t>
+            </a:r>
+            <a:endParaRPr lang="en-US" sz="1220" dirty="0"/>
+          </a:p>
+          <a:p>
+            <a:pPr indent="0" marL="0">
+              <a:buNone/>
+            </a:pPr>
+            <a:r>
+              <a:rPr lang="en-US" sz="1220" dirty="0">
                 <a:solidFill>
                   <a:srgbClr val="17364A"/>
                 </a:solidFill>
@@ -17144,13 +17464,16 @@
                 <a:ea typeface="Aptos" pitchFamily="34" charset="-122"/>
                 <a:cs typeface="Aptos" pitchFamily="34" charset="-120"/>
               </a:rPr>
-              <a:t>A laboratory result can be difficult to use if the test code is local, the result is free.</a:t>
-            </a:r>
-            <a:endParaRPr lang="en-US" sz="1380" dirty="0"/>
-          </a:p>
-          <a:p>
-            <a:r>
-              <a:rPr lang="en-US" sz="1380" dirty="0">
+              <a:t>A laboratory result can be difficult to use if the test code is.</a:t>
+            </a:r>
+            <a:endParaRPr lang="en-US" sz="1220" dirty="0"/>
+          </a:p>
+          <a:p>
+            <a:pPr indent="0" marL="0">
+              <a:buNone/>
+            </a:pPr>
+            <a:r>
+              <a:rPr lang="en-US" sz="1220" dirty="0">
                 <a:solidFill>
                   <a:srgbClr val="17364A"/>
                 </a:solidFill>
@@ -17158,9 +17481,9 @@
                 <a:ea typeface="Aptos" pitchFamily="34" charset="-122"/>
                 <a:cs typeface="Aptos" pitchFamily="34" charset="-120"/>
               </a:rPr>
-              <a:t>Terminology mapping is central to reliable public health interpretation.</a:t>
-            </a:r>
-            <a:endParaRPr lang="en-US" sz="1380" dirty="0"/>
+              <a:t>Terminology mapping is central to reliable public health.</a:t>
+            </a:r>
+            <a:endParaRPr lang="en-US" sz="1220" dirty="0"/>
           </a:p>
         </p:txBody>
       </p:sp>
@@ -17238,17 +17561,17 @@
         </p:nvSpPr>
         <p:spPr>
           <a:xfrm>
-            <a:off x="7799832" y="5001768"/>
-            <a:ext cx="3145536" cy="502920"/>
-          </a:xfrm>
-          <a:prstGeom prst="rect">
-            <a:avLst/>
-          </a:prstGeom>
-          <a:noFill/>
-          <a:ln/>
-        </p:spPr>
-        <p:txBody>
-          <a:bodyPr wrap="square" lIns="0" tIns="0" rIns="0" bIns="0" rtlCol="0" anchor="t">
+            <a:off x="7799832" y="4974336"/>
+            <a:ext cx="3145536" cy="576072"/>
+          </a:xfrm>
+          <a:prstGeom prst="rect">
+            <a:avLst/>
+          </a:prstGeom>
+          <a:noFill/>
+          <a:ln/>
+        </p:spPr>
+        <p:txBody>
+          <a:bodyPr wrap="square" lIns="254" tIns="254" rIns="254" bIns="254" rtlCol="0" anchor="t">
             <a:normAutofit/>
           </a:bodyPr>
           <a:lstStyle/>
@@ -17257,7 +17580,7 @@
               <a:buNone/>
             </a:pPr>
             <a:r>
-              <a:rPr lang="en-US" sz="1550" dirty="0">
+              <a:rPr lang="en-US" sz="1320" dirty="0">
                 <a:solidFill>
                   <a:srgbClr val="17364A"/>
                 </a:solidFill>
@@ -17265,9 +17588,9 @@
                 <a:ea typeface="Aptos" pitchFamily="34" charset="-122"/>
                 <a:cs typeface="Aptos" pitchFamily="34" charset="-120"/>
               </a:rPr>
-              <a:t>Connect the concept to data quality, model performance, validation evidence, monitoring measures, and decisions that remain under human control.</a:t>
-            </a:r>
-            <a:endParaRPr lang="en-US" sz="1550" dirty="0"/>
+              <a:t>Connect the concept to data quality, model performance, validation evidence, monitoring measures, and decisions that.</a:t>
+            </a:r>
+            <a:endParaRPr lang="en-US" sz="1320" dirty="0"/>
           </a:p>
         </p:txBody>
       </p:sp>
@@ -17568,49 +17891,58 @@
           <a:ln/>
         </p:spPr>
         <p:txBody>
-          <a:bodyPr wrap="square" lIns="635" tIns="635" rIns="635" bIns="635" rtlCol="0" anchor="t">
+          <a:bodyPr wrap="square" lIns="1016" tIns="1016" rIns="1016" bIns="1016" rtlCol="0" anchor="t">
             <a:normAutofit/>
           </a:bodyPr>
           <a:lstStyle/>
           <a:p>
+            <a:pPr indent="0" marL="0">
+              <a:buNone/>
+            </a:pPr>
             <a:r>
               <a:rPr lang="en-US" sz="2100" dirty="0">
                 <a:solidFill>
-                  <a:srgbClr val="17364A"/>
-                </a:solidFill>
-                <a:latin typeface="Aptos" pitchFamily="34" charset="0"/>
-                <a:ea typeface="Aptos" pitchFamily="34" charset="-122"/>
-                <a:cs typeface="Aptos" pitchFamily="34" charset="-120"/>
-              </a:rPr>
-              <a:t>ELR.</a:t>
+                  <a:srgbClr val="003A63"/>
+                </a:solidFill>
+                <a:latin typeface="Aptos" pitchFamily="34" charset="0"/>
+                <a:ea typeface="Aptos" pitchFamily="34" charset="-122"/>
+                <a:cs typeface="Aptos" pitchFamily="34" charset="-120"/>
+              </a:rPr>
+              <a:t>• ELR.</a:t>
             </a:r>
             <a:endParaRPr lang="en-US" sz="2100" dirty="0"/>
           </a:p>
           <a:p>
+            <a:pPr indent="0" marL="0">
+              <a:buNone/>
+            </a:pPr>
             <a:r>
               <a:rPr lang="en-US" sz="2100" dirty="0">
                 <a:solidFill>
-                  <a:srgbClr val="17364A"/>
-                </a:solidFill>
-                <a:latin typeface="Aptos" pitchFamily="34" charset="0"/>
-                <a:ea typeface="Aptos" pitchFamily="34" charset="-122"/>
-                <a:cs typeface="Aptos" pitchFamily="34" charset="-120"/>
-              </a:rPr>
-              <a:t>Electronic Laboratory Reporting is the electronic transmission of laboratory reports to public health.</a:t>
+                  <a:srgbClr val="003A63"/>
+                </a:solidFill>
+                <a:latin typeface="Aptos" pitchFamily="34" charset="0"/>
+                <a:ea typeface="Aptos" pitchFamily="34" charset="-122"/>
+                <a:cs typeface="Aptos" pitchFamily="34" charset="-120"/>
+              </a:rPr>
+              <a:t>• Electronic Laboratory Reporting is the electronic transmission of laboratory reports to public.</a:t>
             </a:r>
             <a:endParaRPr lang="en-US" sz="2100" dirty="0"/>
           </a:p>
           <a:p>
+            <a:pPr indent="0" marL="0">
+              <a:buNone/>
+            </a:pPr>
             <a:r>
               <a:rPr lang="en-US" sz="2100" dirty="0">
                 <a:solidFill>
-                  <a:srgbClr val="17364A"/>
-                </a:solidFill>
-                <a:latin typeface="Aptos" pitchFamily="34" charset="0"/>
-                <a:ea typeface="Aptos" pitchFamily="34" charset="-122"/>
-                <a:cs typeface="Aptos" pitchFamily="34" charset="-120"/>
-              </a:rPr>
-              <a:t>ELR can improve timeliness and completeness, but it requires interface onboarding, validation,.</a:t>
+                  <a:srgbClr val="003A63"/>
+                </a:solidFill>
+                <a:latin typeface="Aptos" pitchFamily="34" charset="0"/>
+                <a:ea typeface="Aptos" pitchFamily="34" charset="-122"/>
+                <a:cs typeface="Aptos" pitchFamily="34" charset="-120"/>
+              </a:rPr>
+              <a:t>• ELR can improve timeliness and completeness, but it requires interface onboarding, validation,.</a:t>
             </a:r>
             <a:endParaRPr lang="en-US" sz="2100" dirty="0"/>
           </a:p>
@@ -17690,17 +18022,17 @@
         </p:nvSpPr>
         <p:spPr>
           <a:xfrm>
-            <a:off x="7799832" y="1828800"/>
-            <a:ext cx="3145536" cy="685800"/>
-          </a:xfrm>
-          <a:prstGeom prst="rect">
-            <a:avLst/>
-          </a:prstGeom>
-          <a:noFill/>
-          <a:ln/>
-        </p:spPr>
-        <p:txBody>
-          <a:bodyPr wrap="square" lIns="0" tIns="0" rIns="0" bIns="0" rtlCol="0" anchor="t">
+            <a:off x="7799832" y="1801368"/>
+            <a:ext cx="3145536" cy="758952"/>
+          </a:xfrm>
+          <a:prstGeom prst="rect">
+            <a:avLst/>
+          </a:prstGeom>
+          <a:noFill/>
+          <a:ln/>
+        </p:spPr>
+        <p:txBody>
+          <a:bodyPr wrap="square" lIns="254" tIns="254" rIns="254" bIns="254" rtlCol="0" anchor="t">
             <a:normAutofit/>
           </a:bodyPr>
           <a:lstStyle/>
@@ -17709,7 +18041,7 @@
               <a:buNone/>
             </a:pPr>
             <a:r>
-              <a:rPr lang="en-US" sz="1550" dirty="0">
+              <a:rPr lang="en-US" sz="1320" dirty="0">
                 <a:solidFill>
                   <a:srgbClr val="17364A"/>
                 </a:solidFill>
@@ -17719,7 +18051,7 @@
               </a:rPr>
               <a:t>ELR.</a:t>
             </a:r>
-            <a:endParaRPr lang="en-US" sz="1550" dirty="0"/>
+            <a:endParaRPr lang="en-US" sz="1320" dirty="0"/>
           </a:p>
         </p:txBody>
       </p:sp>
@@ -17807,13 +18139,16 @@
           <a:ln/>
         </p:spPr>
         <p:txBody>
-          <a:bodyPr wrap="square" lIns="254" tIns="254" rIns="254" bIns="254" rtlCol="0" anchor="t">
+          <a:bodyPr wrap="square" lIns="508" tIns="508" rIns="508" bIns="508" rtlCol="0" anchor="t">
             <a:normAutofit/>
           </a:bodyPr>
           <a:lstStyle/>
           <a:p>
-            <a:r>
-              <a:rPr lang="en-US" sz="1380" dirty="0">
+            <a:pPr indent="0" marL="0">
+              <a:buNone/>
+            </a:pPr>
+            <a:r>
+              <a:rPr lang="en-US" sz="1220" dirty="0">
                 <a:solidFill>
                   <a:srgbClr val="17364A"/>
                 </a:solidFill>
@@ -17821,13 +18156,16 @@
                 <a:ea typeface="Aptos" pitchFamily="34" charset="-122"/>
                 <a:cs typeface="Aptos" pitchFamily="34" charset="-120"/>
               </a:rPr>
-              <a:t>Electronic Laboratory Reporting is the electronic transmission of laboratory reports to.</a:t>
-            </a:r>
-            <a:endParaRPr lang="en-US" sz="1380" dirty="0"/>
-          </a:p>
-          <a:p>
-            <a:r>
-              <a:rPr lang="en-US" sz="1380" dirty="0">
+              <a:t>Electronic Laboratory Reporting is the electronic transmission of.</a:t>
+            </a:r>
+            <a:endParaRPr lang="en-US" sz="1220" dirty="0"/>
+          </a:p>
+          <a:p>
+            <a:pPr indent="0" marL="0">
+              <a:buNone/>
+            </a:pPr>
+            <a:r>
+              <a:rPr lang="en-US" sz="1220" dirty="0">
                 <a:solidFill>
                   <a:srgbClr val="17364A"/>
                 </a:solidFill>
@@ -17835,13 +18173,16 @@
                 <a:ea typeface="Aptos" pitchFamily="34" charset="-122"/>
                 <a:cs typeface="Aptos" pitchFamily="34" charset="-120"/>
               </a:rPr>
-              <a:t>ELR can improve timeliness and completeness, but it requires interface onboarding,.</a:t>
-            </a:r>
-            <a:endParaRPr lang="en-US" sz="1380" dirty="0"/>
-          </a:p>
-          <a:p>
-            <a:r>
-              <a:rPr lang="en-US" sz="1380" dirty="0">
+              <a:t>ELR can improve timeliness and completeness, but it requires.</a:t>
+            </a:r>
+            <a:endParaRPr lang="en-US" sz="1220" dirty="0"/>
+          </a:p>
+          <a:p>
+            <a:pPr indent="0" marL="0">
+              <a:buNone/>
+            </a:pPr>
+            <a:r>
+              <a:rPr lang="en-US" sz="1220" dirty="0">
                 <a:solidFill>
                   <a:srgbClr val="17364A"/>
                 </a:solidFill>
@@ -17851,7 +18192,7 @@
               </a:rPr>
               <a:t>LOINC.</a:t>
             </a:r>
-            <a:endParaRPr lang="en-US" sz="1380" dirty="0"/>
+            <a:endParaRPr lang="en-US" sz="1220" dirty="0"/>
           </a:p>
         </p:txBody>
       </p:sp>
@@ -17929,17 +18270,17 @@
         </p:nvSpPr>
         <p:spPr>
           <a:xfrm>
-            <a:off x="7799832" y="5001768"/>
-            <a:ext cx="3145536" cy="502920"/>
-          </a:xfrm>
-          <a:prstGeom prst="rect">
-            <a:avLst/>
-          </a:prstGeom>
-          <a:noFill/>
-          <a:ln/>
-        </p:spPr>
-        <p:txBody>
-          <a:bodyPr wrap="square" lIns="0" tIns="0" rIns="0" bIns="0" rtlCol="0" anchor="t">
+            <a:off x="7799832" y="4974336"/>
+            <a:ext cx="3145536" cy="576072"/>
+          </a:xfrm>
+          <a:prstGeom prst="rect">
+            <a:avLst/>
+          </a:prstGeom>
+          <a:noFill/>
+          <a:ln/>
+        </p:spPr>
+        <p:txBody>
+          <a:bodyPr wrap="square" lIns="254" tIns="254" rIns="254" bIns="254" rtlCol="0" anchor="t">
             <a:normAutofit/>
           </a:bodyPr>
           <a:lstStyle/>
@@ -17948,7 +18289,7 @@
               <a:buNone/>
             </a:pPr>
             <a:r>
-              <a:rPr lang="en-US" sz="1550" dirty="0">
+              <a:rPr lang="en-US" sz="1320" dirty="0">
                 <a:solidFill>
                   <a:srgbClr val="17364A"/>
                 </a:solidFill>
@@ -17956,9 +18297,9 @@
                 <a:ea typeface="Aptos" pitchFamily="34" charset="-122"/>
                 <a:cs typeface="Aptos" pitchFamily="34" charset="-120"/>
               </a:rPr>
-              <a:t>Connect the concept to data quality, model performance, validation evidence, monitoring measures, and decisions that remain under human control.</a:t>
-            </a:r>
-            <a:endParaRPr lang="en-US" sz="1550" dirty="0"/>
+              <a:t>Connect the concept to data quality, model performance, validation evidence, monitoring measures, and decisions that.</a:t>
+            </a:r>
+            <a:endParaRPr lang="en-US" sz="1320" dirty="0"/>
           </a:p>
         </p:txBody>
       </p:sp>

--- a/downloads/presentations/modules/arc-240.pptx
+++ b/downloads/presentations/modules/arc-240.pptx
@@ -3508,11 +3508,11 @@
         <p:spPr>
           <a:xfrm>
             <a:off x="7635240" y="1325880"/>
-            <a:ext cx="3474720" cy="1325880"/>
+            <a:ext cx="3474720" cy="1207008"/>
           </a:xfrm>
           <a:prstGeom prst="roundRect">
             <a:avLst>
-              <a:gd name="adj" fmla="val 8276"/>
+              <a:gd name="adj" fmla="val 9091"/>
             </a:avLst>
           </a:prstGeom>
           <a:solidFill>
@@ -3574,7 +3574,7 @@
         <p:spPr>
           <a:xfrm>
             <a:off x="7799832" y="1801368"/>
-            <a:ext cx="3145536" cy="758952"/>
+            <a:ext cx="3145536" cy="640080"/>
           </a:xfrm>
           <a:prstGeom prst="rect">
             <a:avLst/>
@@ -3614,12 +3614,12 @@
         </p:nvSpPr>
         <p:spPr>
           <a:xfrm>
-            <a:off x="7635240" y="2788920"/>
-            <a:ext cx="3474720" cy="1536192"/>
+            <a:off x="7635240" y="2670048"/>
+            <a:ext cx="3474720" cy="1377086"/>
           </a:xfrm>
           <a:prstGeom prst="roundRect">
             <a:avLst>
-              <a:gd name="adj" fmla="val 7143"/>
+              <a:gd name="adj" fmla="val 7968"/>
             </a:avLst>
           </a:prstGeom>
           <a:solidFill>
@@ -3641,7 +3641,7 @@
         </p:nvSpPr>
         <p:spPr>
           <a:xfrm>
-            <a:off x="7799832" y="2935224"/>
+            <a:off x="7799832" y="2816352"/>
             <a:ext cx="3145536" cy="256032"/>
           </a:xfrm>
           <a:prstGeom prst="rect">
@@ -3680,8 +3680,8 @@
         </p:nvSpPr>
         <p:spPr>
           <a:xfrm>
-            <a:off x="7818120" y="3300984"/>
-            <a:ext cx="3090672" cy="877824"/>
+            <a:off x="7818120" y="3182112"/>
+            <a:ext cx="3090672" cy="718718"/>
           </a:xfrm>
           <a:prstGeom prst="rect">
             <a:avLst/>
@@ -3755,12 +3755,12 @@
         </p:nvSpPr>
         <p:spPr>
           <a:xfrm>
-            <a:off x="7635240" y="4498848"/>
-            <a:ext cx="3474720" cy="1143000"/>
+            <a:off x="7635240" y="4184294"/>
+            <a:ext cx="3474720" cy="1466698"/>
           </a:xfrm>
           <a:prstGeom prst="roundRect">
             <a:avLst>
-              <a:gd name="adj" fmla="val 9600"/>
+              <a:gd name="adj" fmla="val 7481"/>
             </a:avLst>
           </a:prstGeom>
           <a:solidFill>
@@ -3782,7 +3782,7 @@
         </p:nvSpPr>
         <p:spPr>
           <a:xfrm>
-            <a:off x="7799832" y="4645152"/>
+            <a:off x="7799832" y="4330598"/>
             <a:ext cx="3145536" cy="256032"/>
           </a:xfrm>
           <a:prstGeom prst="rect">
@@ -3821,8 +3821,8 @@
         </p:nvSpPr>
         <p:spPr>
           <a:xfrm>
-            <a:off x="7799832" y="4974336"/>
-            <a:ext cx="3145536" cy="576072"/>
+            <a:off x="7799832" y="4659782"/>
+            <a:ext cx="3145536" cy="899770"/>
           </a:xfrm>
           <a:prstGeom prst="rect">
             <a:avLst/>
@@ -3848,7 +3848,7 @@
                 <a:ea typeface="Aptos" pitchFamily="34" charset="-122"/>
                 <a:cs typeface="Aptos" pitchFamily="34" charset="-120"/>
               </a:rPr>
-              <a:t>Connect the concept to data quality, model performance, validation evidence, monitoring measures, and decisions that.</a:t>
+              <a:t>Connect the concept to data quality, model performance, validation evidence, monitoring measures, and decisions that remain under human control.</a:t>
             </a:r>
             <a:endParaRPr lang="en-US" sz="1320" dirty="0"/>
           </a:p>
@@ -4217,11 +4217,11 @@
         <p:spPr>
           <a:xfrm>
             <a:off x="7635240" y="1325880"/>
-            <a:ext cx="3474720" cy="1325880"/>
+            <a:ext cx="3474720" cy="1255471"/>
           </a:xfrm>
           <a:prstGeom prst="roundRect">
             <a:avLst>
-              <a:gd name="adj" fmla="val 8276"/>
+              <a:gd name="adj" fmla="val 8740"/>
             </a:avLst>
           </a:prstGeom>
           <a:solidFill>
@@ -4283,7 +4283,7 @@
         <p:spPr>
           <a:xfrm>
             <a:off x="7799832" y="1801368"/>
-            <a:ext cx="3145536" cy="758952"/>
+            <a:ext cx="3145536" cy="688543"/>
           </a:xfrm>
           <a:prstGeom prst="rect">
             <a:avLst/>
@@ -4323,12 +4323,12 @@
         </p:nvSpPr>
         <p:spPr>
           <a:xfrm>
-            <a:off x="7635240" y="2788920"/>
-            <a:ext cx="3474720" cy="1536192"/>
+            <a:off x="7635240" y="2718511"/>
+            <a:ext cx="3474720" cy="1328623"/>
           </a:xfrm>
           <a:prstGeom prst="roundRect">
             <a:avLst>
-              <a:gd name="adj" fmla="val 7143"/>
+              <a:gd name="adj" fmla="val 8259"/>
             </a:avLst>
           </a:prstGeom>
           <a:solidFill>
@@ -4350,7 +4350,7 @@
         </p:nvSpPr>
         <p:spPr>
           <a:xfrm>
-            <a:off x="7799832" y="2935224"/>
+            <a:off x="7799832" y="2864815"/>
             <a:ext cx="3145536" cy="256032"/>
           </a:xfrm>
           <a:prstGeom prst="rect">
@@ -4389,8 +4389,8 @@
         </p:nvSpPr>
         <p:spPr>
           <a:xfrm>
-            <a:off x="7818120" y="3300984"/>
-            <a:ext cx="3090672" cy="877824"/>
+            <a:off x="7818120" y="3230575"/>
+            <a:ext cx="3090672" cy="670255"/>
           </a:xfrm>
           <a:prstGeom prst="rect">
             <a:avLst/>
@@ -4464,12 +4464,12 @@
         </p:nvSpPr>
         <p:spPr>
           <a:xfrm>
-            <a:off x="7635240" y="4498848"/>
-            <a:ext cx="3474720" cy="1143000"/>
+            <a:off x="7635240" y="4184294"/>
+            <a:ext cx="3474720" cy="1466698"/>
           </a:xfrm>
           <a:prstGeom prst="roundRect">
             <a:avLst>
-              <a:gd name="adj" fmla="val 9600"/>
+              <a:gd name="adj" fmla="val 7481"/>
             </a:avLst>
           </a:prstGeom>
           <a:solidFill>
@@ -4491,7 +4491,7 @@
         </p:nvSpPr>
         <p:spPr>
           <a:xfrm>
-            <a:off x="7799832" y="4645152"/>
+            <a:off x="7799832" y="4330598"/>
             <a:ext cx="3145536" cy="256032"/>
           </a:xfrm>
           <a:prstGeom prst="rect">
@@ -4530,8 +4530,8 @@
         </p:nvSpPr>
         <p:spPr>
           <a:xfrm>
-            <a:off x="7799832" y="4974336"/>
-            <a:ext cx="3145536" cy="576072"/>
+            <a:off x="7799832" y="4659782"/>
+            <a:ext cx="3145536" cy="899770"/>
           </a:xfrm>
           <a:prstGeom prst="rect">
             <a:avLst/>
@@ -4557,7 +4557,7 @@
                 <a:ea typeface="Aptos" pitchFamily="34" charset="-122"/>
                 <a:cs typeface="Aptos" pitchFamily="34" charset="-120"/>
               </a:rPr>
-              <a:t>Connect the concept to data quality, model performance, validation evidence, monitoring measures, and decisions that.</a:t>
+              <a:t>Connect the concept to data quality, model performance, validation evidence, monitoring measures, and decisions that remain under human control.</a:t>
             </a:r>
             <a:endParaRPr lang="en-US" sz="1320" dirty="0"/>
           </a:p>
@@ -4926,11 +4926,11 @@
         <p:spPr>
           <a:xfrm>
             <a:off x="7635240" y="1325880"/>
-            <a:ext cx="3474720" cy="1325880"/>
+            <a:ext cx="3474720" cy="1207008"/>
           </a:xfrm>
           <a:prstGeom prst="roundRect">
             <a:avLst>
-              <a:gd name="adj" fmla="val 8276"/>
+              <a:gd name="adj" fmla="val 9091"/>
             </a:avLst>
           </a:prstGeom>
           <a:solidFill>
@@ -4992,7 +4992,7 @@
         <p:spPr>
           <a:xfrm>
             <a:off x="7799832" y="1801368"/>
-            <a:ext cx="3145536" cy="758952"/>
+            <a:ext cx="3145536" cy="640080"/>
           </a:xfrm>
           <a:prstGeom prst="rect">
             <a:avLst/>
@@ -5032,12 +5032,12 @@
         </p:nvSpPr>
         <p:spPr>
           <a:xfrm>
-            <a:off x="7635240" y="2788920"/>
-            <a:ext cx="3474720" cy="1536192"/>
+            <a:off x="7635240" y="2670048"/>
+            <a:ext cx="3474720" cy="1377086"/>
           </a:xfrm>
           <a:prstGeom prst="roundRect">
             <a:avLst>
-              <a:gd name="adj" fmla="val 7143"/>
+              <a:gd name="adj" fmla="val 7968"/>
             </a:avLst>
           </a:prstGeom>
           <a:solidFill>
@@ -5059,7 +5059,7 @@
         </p:nvSpPr>
         <p:spPr>
           <a:xfrm>
-            <a:off x="7799832" y="2935224"/>
+            <a:off x="7799832" y="2816352"/>
             <a:ext cx="3145536" cy="256032"/>
           </a:xfrm>
           <a:prstGeom prst="rect">
@@ -5098,8 +5098,8 @@
         </p:nvSpPr>
         <p:spPr>
           <a:xfrm>
-            <a:off x="7818120" y="3300984"/>
-            <a:ext cx="3090672" cy="877824"/>
+            <a:off x="7818120" y="3182112"/>
+            <a:ext cx="3090672" cy="718718"/>
           </a:xfrm>
           <a:prstGeom prst="rect">
             <a:avLst/>
@@ -5173,12 +5173,12 @@
         </p:nvSpPr>
         <p:spPr>
           <a:xfrm>
-            <a:off x="7635240" y="4498848"/>
-            <a:ext cx="3474720" cy="1143000"/>
+            <a:off x="7635240" y="4184294"/>
+            <a:ext cx="3474720" cy="1466698"/>
           </a:xfrm>
           <a:prstGeom prst="roundRect">
             <a:avLst>
-              <a:gd name="adj" fmla="val 9600"/>
+              <a:gd name="adj" fmla="val 7481"/>
             </a:avLst>
           </a:prstGeom>
           <a:solidFill>
@@ -5200,7 +5200,7 @@
         </p:nvSpPr>
         <p:spPr>
           <a:xfrm>
-            <a:off x="7799832" y="4645152"/>
+            <a:off x="7799832" y="4330598"/>
             <a:ext cx="3145536" cy="256032"/>
           </a:xfrm>
           <a:prstGeom prst="rect">
@@ -5239,8 +5239,8 @@
         </p:nvSpPr>
         <p:spPr>
           <a:xfrm>
-            <a:off x="7799832" y="4974336"/>
-            <a:ext cx="3145536" cy="576072"/>
+            <a:off x="7799832" y="4659782"/>
+            <a:ext cx="3145536" cy="899770"/>
           </a:xfrm>
           <a:prstGeom prst="rect">
             <a:avLst/>
@@ -5266,7 +5266,7 @@
                 <a:ea typeface="Aptos" pitchFamily="34" charset="-122"/>
                 <a:cs typeface="Aptos" pitchFamily="34" charset="-120"/>
               </a:rPr>
-              <a:t>Connect the concept to data quality, model performance, validation evidence, monitoring measures, and decisions that.</a:t>
+              <a:t>Connect the concept to data quality, model performance, validation evidence, monitoring measures, and decisions that remain under human control.</a:t>
             </a:r>
             <a:endParaRPr lang="en-US" sz="1320" dirty="0"/>
           </a:p>
@@ -5635,11 +5635,11 @@
         <p:spPr>
           <a:xfrm>
             <a:off x="7635240" y="1325880"/>
-            <a:ext cx="3474720" cy="1325880"/>
+            <a:ext cx="3474720" cy="1207008"/>
           </a:xfrm>
           <a:prstGeom prst="roundRect">
             <a:avLst>
-              <a:gd name="adj" fmla="val 8276"/>
+              <a:gd name="adj" fmla="val 9091"/>
             </a:avLst>
           </a:prstGeom>
           <a:solidFill>
@@ -5701,7 +5701,7 @@
         <p:spPr>
           <a:xfrm>
             <a:off x="7799832" y="1801368"/>
-            <a:ext cx="3145536" cy="758952"/>
+            <a:ext cx="3145536" cy="640080"/>
           </a:xfrm>
           <a:prstGeom prst="rect">
             <a:avLst/>
@@ -5741,7 +5741,7 @@
         </p:nvSpPr>
         <p:spPr>
           <a:xfrm>
-            <a:off x="7635240" y="2788920"/>
+            <a:off x="7635240" y="2670048"/>
             <a:ext cx="3474720" cy="1536192"/>
           </a:xfrm>
           <a:prstGeom prst="roundRect">
@@ -5768,7 +5768,7 @@
         </p:nvSpPr>
         <p:spPr>
           <a:xfrm>
-            <a:off x="7799832" y="2935224"/>
+            <a:off x="7799832" y="2816352"/>
             <a:ext cx="3145536" cy="256032"/>
           </a:xfrm>
           <a:prstGeom prst="rect">
@@ -5807,7 +5807,7 @@
         </p:nvSpPr>
         <p:spPr>
           <a:xfrm>
-            <a:off x="7818120" y="3300984"/>
+            <a:off x="7818120" y="3182112"/>
             <a:ext cx="3090672" cy="877824"/>
           </a:xfrm>
           <a:prstGeom prst="rect">
@@ -5882,12 +5882,12 @@
         </p:nvSpPr>
         <p:spPr>
           <a:xfrm>
-            <a:off x="7635240" y="4498848"/>
-            <a:ext cx="3474720" cy="1143000"/>
+            <a:off x="7635240" y="4343400"/>
+            <a:ext cx="3474720" cy="1255471"/>
           </a:xfrm>
           <a:prstGeom prst="roundRect">
             <a:avLst>
-              <a:gd name="adj" fmla="val 9600"/>
+              <a:gd name="adj" fmla="val 8740"/>
             </a:avLst>
           </a:prstGeom>
           <a:solidFill>
@@ -5909,7 +5909,7 @@
         </p:nvSpPr>
         <p:spPr>
           <a:xfrm>
-            <a:off x="7799832" y="4645152"/>
+            <a:off x="7799832" y="4489704"/>
             <a:ext cx="3145536" cy="256032"/>
           </a:xfrm>
           <a:prstGeom prst="rect">
@@ -5948,8 +5948,8 @@
         </p:nvSpPr>
         <p:spPr>
           <a:xfrm>
-            <a:off x="7799832" y="4974336"/>
-            <a:ext cx="3145536" cy="576072"/>
+            <a:off x="7799832" y="4818888"/>
+            <a:ext cx="3145536" cy="688543"/>
           </a:xfrm>
           <a:prstGeom prst="rect">
             <a:avLst/>
@@ -5975,7 +5975,7 @@
                 <a:ea typeface="Aptos" pitchFamily="34" charset="-122"/>
                 <a:cs typeface="Aptos" pitchFamily="34" charset="-120"/>
               </a:rPr>
-              <a:t>Identify what could go wrong, who could be affected, what safeguards are needed, and what evidence should be reviewed.</a:t>
+              <a:t>Identify what could go wrong, who could be affected, what safeguards are needed, and what evidence should be reviewed before use.</a:t>
             </a:r>
             <a:endParaRPr lang="en-US" sz="1320" dirty="0"/>
           </a:p>
@@ -6344,11 +6344,11 @@
         <p:spPr>
           <a:xfrm>
             <a:off x="7635240" y="1325880"/>
-            <a:ext cx="3474720" cy="1325880"/>
+            <a:ext cx="3474720" cy="1207008"/>
           </a:xfrm>
           <a:prstGeom prst="roundRect">
             <a:avLst>
-              <a:gd name="adj" fmla="val 8276"/>
+              <a:gd name="adj" fmla="val 9091"/>
             </a:avLst>
           </a:prstGeom>
           <a:solidFill>
@@ -6410,7 +6410,7 @@
         <p:spPr>
           <a:xfrm>
             <a:off x="7799832" y="1801368"/>
-            <a:ext cx="3145536" cy="758952"/>
+            <a:ext cx="3145536" cy="640080"/>
           </a:xfrm>
           <a:prstGeom prst="rect">
             <a:avLst/>
@@ -6450,7 +6450,7 @@
         </p:nvSpPr>
         <p:spPr>
           <a:xfrm>
-            <a:off x="7635240" y="2788920"/>
+            <a:off x="7635240" y="2670048"/>
             <a:ext cx="3474720" cy="1536192"/>
           </a:xfrm>
           <a:prstGeom prst="roundRect">
@@ -6477,7 +6477,7 @@
         </p:nvSpPr>
         <p:spPr>
           <a:xfrm>
-            <a:off x="7799832" y="2935224"/>
+            <a:off x="7799832" y="2816352"/>
             <a:ext cx="3145536" cy="256032"/>
           </a:xfrm>
           <a:prstGeom prst="rect">
@@ -6516,7 +6516,7 @@
         </p:nvSpPr>
         <p:spPr>
           <a:xfrm>
-            <a:off x="7818120" y="3300984"/>
+            <a:off x="7818120" y="3182112"/>
             <a:ext cx="3090672" cy="877824"/>
           </a:xfrm>
           <a:prstGeom prst="rect">
@@ -6591,12 +6591,12 @@
         </p:nvSpPr>
         <p:spPr>
           <a:xfrm>
-            <a:off x="7635240" y="4498848"/>
-            <a:ext cx="3474720" cy="1143000"/>
+            <a:off x="7635240" y="4343400"/>
+            <a:ext cx="3474720" cy="1255471"/>
           </a:xfrm>
           <a:prstGeom prst="roundRect">
             <a:avLst>
-              <a:gd name="adj" fmla="val 9600"/>
+              <a:gd name="adj" fmla="val 8740"/>
             </a:avLst>
           </a:prstGeom>
           <a:solidFill>
@@ -6618,7 +6618,7 @@
         </p:nvSpPr>
         <p:spPr>
           <a:xfrm>
-            <a:off x="7799832" y="4645152"/>
+            <a:off x="7799832" y="4489704"/>
             <a:ext cx="3145536" cy="256032"/>
           </a:xfrm>
           <a:prstGeom prst="rect">
@@ -6657,8 +6657,8 @@
         </p:nvSpPr>
         <p:spPr>
           <a:xfrm>
-            <a:off x="7799832" y="4974336"/>
-            <a:ext cx="3145536" cy="576072"/>
+            <a:off x="7799832" y="4818888"/>
+            <a:ext cx="3145536" cy="688543"/>
           </a:xfrm>
           <a:prstGeom prst="rect">
             <a:avLst/>
@@ -6684,7 +6684,7 @@
                 <a:ea typeface="Aptos" pitchFamily="34" charset="-122"/>
                 <a:cs typeface="Aptos" pitchFamily="34" charset="-120"/>
               </a:rPr>
-              <a:t>Identify what could go wrong, who could be affected, what safeguards are needed, and what evidence should be reviewed.</a:t>
+              <a:t>Identify what could go wrong, who could be affected, what safeguards are needed, and what evidence should be reviewed before use.</a:t>
             </a:r>
             <a:endParaRPr lang="en-US" sz="1320" dirty="0"/>
           </a:p>
@@ -7053,11 +7053,11 @@
         <p:spPr>
           <a:xfrm>
             <a:off x="7635240" y="1325880"/>
-            <a:ext cx="3474720" cy="1325880"/>
+            <a:ext cx="3474720" cy="1255471"/>
           </a:xfrm>
           <a:prstGeom prst="roundRect">
             <a:avLst>
-              <a:gd name="adj" fmla="val 8276"/>
+              <a:gd name="adj" fmla="val 8740"/>
             </a:avLst>
           </a:prstGeom>
           <a:solidFill>
@@ -7119,7 +7119,7 @@
         <p:spPr>
           <a:xfrm>
             <a:off x="7799832" y="1801368"/>
-            <a:ext cx="3145536" cy="758952"/>
+            <a:ext cx="3145536" cy="688543"/>
           </a:xfrm>
           <a:prstGeom prst="rect">
             <a:avLst/>
@@ -7159,12 +7159,12 @@
         </p:nvSpPr>
         <p:spPr>
           <a:xfrm>
-            <a:off x="7635240" y="2788920"/>
-            <a:ext cx="3474720" cy="1536192"/>
+            <a:off x="7635240" y="2718511"/>
+            <a:ext cx="3474720" cy="1328623"/>
           </a:xfrm>
           <a:prstGeom prst="roundRect">
             <a:avLst>
-              <a:gd name="adj" fmla="val 7143"/>
+              <a:gd name="adj" fmla="val 8259"/>
             </a:avLst>
           </a:prstGeom>
           <a:solidFill>
@@ -7186,7 +7186,7 @@
         </p:nvSpPr>
         <p:spPr>
           <a:xfrm>
-            <a:off x="7799832" y="2935224"/>
+            <a:off x="7799832" y="2864815"/>
             <a:ext cx="3145536" cy="256032"/>
           </a:xfrm>
           <a:prstGeom prst="rect">
@@ -7225,8 +7225,8 @@
         </p:nvSpPr>
         <p:spPr>
           <a:xfrm>
-            <a:off x="7818120" y="3300984"/>
-            <a:ext cx="3090672" cy="877824"/>
+            <a:off x="7818120" y="3230575"/>
+            <a:ext cx="3090672" cy="670255"/>
           </a:xfrm>
           <a:prstGeom prst="rect">
             <a:avLst/>
@@ -7300,12 +7300,12 @@
         </p:nvSpPr>
         <p:spPr>
           <a:xfrm>
-            <a:off x="7635240" y="4498848"/>
-            <a:ext cx="3474720" cy="1143000"/>
+            <a:off x="7635240" y="4184294"/>
+            <a:ext cx="3474720" cy="1466698"/>
           </a:xfrm>
           <a:prstGeom prst="roundRect">
             <a:avLst>
-              <a:gd name="adj" fmla="val 9600"/>
+              <a:gd name="adj" fmla="val 7481"/>
             </a:avLst>
           </a:prstGeom>
           <a:solidFill>
@@ -7327,7 +7327,7 @@
         </p:nvSpPr>
         <p:spPr>
           <a:xfrm>
-            <a:off x="7799832" y="4645152"/>
+            <a:off x="7799832" y="4330598"/>
             <a:ext cx="3145536" cy="256032"/>
           </a:xfrm>
           <a:prstGeom prst="rect">
@@ -7366,8 +7366,8 @@
         </p:nvSpPr>
         <p:spPr>
           <a:xfrm>
-            <a:off x="7799832" y="4974336"/>
-            <a:ext cx="3145536" cy="576072"/>
+            <a:off x="7799832" y="4659782"/>
+            <a:ext cx="3145536" cy="899770"/>
           </a:xfrm>
           <a:prstGeom prst="rect">
             <a:avLst/>
@@ -7393,7 +7393,7 @@
                 <a:ea typeface="Aptos" pitchFamily="34" charset="-122"/>
                 <a:cs typeface="Aptos" pitchFamily="34" charset="-120"/>
               </a:rPr>
-              <a:t>Connect the concept to data quality, model performance, validation evidence, monitoring measures, and decisions that.</a:t>
+              <a:t>Connect the concept to data quality, model performance, validation evidence, monitoring measures, and decisions that remain under human control.</a:t>
             </a:r>
             <a:endParaRPr lang="en-US" sz="1320" dirty="0"/>
           </a:p>
@@ -7762,11 +7762,11 @@
         <p:spPr>
           <a:xfrm>
             <a:off x="7635240" y="1325880"/>
-            <a:ext cx="3474720" cy="1325880"/>
+            <a:ext cx="3474720" cy="1207008"/>
           </a:xfrm>
           <a:prstGeom prst="roundRect">
             <a:avLst>
-              <a:gd name="adj" fmla="val 8276"/>
+              <a:gd name="adj" fmla="val 9091"/>
             </a:avLst>
           </a:prstGeom>
           <a:solidFill>
@@ -7828,7 +7828,7 @@
         <p:spPr>
           <a:xfrm>
             <a:off x="7799832" y="1801368"/>
-            <a:ext cx="3145536" cy="758952"/>
+            <a:ext cx="3145536" cy="640080"/>
           </a:xfrm>
           <a:prstGeom prst="rect">
             <a:avLst/>
@@ -7868,12 +7868,12 @@
         </p:nvSpPr>
         <p:spPr>
           <a:xfrm>
-            <a:off x="7635240" y="2788920"/>
-            <a:ext cx="3474720" cy="1536192"/>
+            <a:off x="7635240" y="2670048"/>
+            <a:ext cx="3474720" cy="1377086"/>
           </a:xfrm>
           <a:prstGeom prst="roundRect">
             <a:avLst>
-              <a:gd name="adj" fmla="val 7143"/>
+              <a:gd name="adj" fmla="val 7968"/>
             </a:avLst>
           </a:prstGeom>
           <a:solidFill>
@@ -7895,7 +7895,7 @@
         </p:nvSpPr>
         <p:spPr>
           <a:xfrm>
-            <a:off x="7799832" y="2935224"/>
+            <a:off x="7799832" y="2816352"/>
             <a:ext cx="3145536" cy="256032"/>
           </a:xfrm>
           <a:prstGeom prst="rect">
@@ -7934,8 +7934,8 @@
         </p:nvSpPr>
         <p:spPr>
           <a:xfrm>
-            <a:off x="7818120" y="3300984"/>
-            <a:ext cx="3090672" cy="877824"/>
+            <a:off x="7818120" y="3182112"/>
+            <a:ext cx="3090672" cy="718718"/>
           </a:xfrm>
           <a:prstGeom prst="rect">
             <a:avLst/>
@@ -8009,12 +8009,12 @@
         </p:nvSpPr>
         <p:spPr>
           <a:xfrm>
-            <a:off x="7635240" y="4498848"/>
-            <a:ext cx="3474720" cy="1143000"/>
+            <a:off x="7635240" y="4184294"/>
+            <a:ext cx="3474720" cy="1466698"/>
           </a:xfrm>
           <a:prstGeom prst="roundRect">
             <a:avLst>
-              <a:gd name="adj" fmla="val 9600"/>
+              <a:gd name="adj" fmla="val 7481"/>
             </a:avLst>
           </a:prstGeom>
           <a:solidFill>
@@ -8036,7 +8036,7 @@
         </p:nvSpPr>
         <p:spPr>
           <a:xfrm>
-            <a:off x="7799832" y="4645152"/>
+            <a:off x="7799832" y="4330598"/>
             <a:ext cx="3145536" cy="256032"/>
           </a:xfrm>
           <a:prstGeom prst="rect">
@@ -8075,8 +8075,8 @@
         </p:nvSpPr>
         <p:spPr>
           <a:xfrm>
-            <a:off x="7799832" y="4974336"/>
-            <a:ext cx="3145536" cy="576072"/>
+            <a:off x="7799832" y="4659782"/>
+            <a:ext cx="3145536" cy="899770"/>
           </a:xfrm>
           <a:prstGeom prst="rect">
             <a:avLst/>
@@ -8102,7 +8102,7 @@
                 <a:ea typeface="Aptos" pitchFamily="34" charset="-122"/>
                 <a:cs typeface="Aptos" pitchFamily="34" charset="-120"/>
               </a:rPr>
-              <a:t>Connect the concept to data quality, model performance, validation evidence, monitoring measures, and decisions that.</a:t>
+              <a:t>Connect the concept to data quality, model performance, validation evidence, monitoring measures, and decisions that remain under human control.</a:t>
             </a:r>
             <a:endParaRPr lang="en-US" sz="1320" dirty="0"/>
           </a:p>
@@ -8454,11 +8454,11 @@
         <p:spPr>
           <a:xfrm>
             <a:off x="7635240" y="1325880"/>
-            <a:ext cx="3474720" cy="1325880"/>
+            <a:ext cx="3474720" cy="1207008"/>
           </a:xfrm>
           <a:prstGeom prst="roundRect">
             <a:avLst>
-              <a:gd name="adj" fmla="val 8276"/>
+              <a:gd name="adj" fmla="val 9091"/>
             </a:avLst>
           </a:prstGeom>
           <a:solidFill>
@@ -8520,7 +8520,7 @@
         <p:spPr>
           <a:xfrm>
             <a:off x="7799832" y="1801368"/>
-            <a:ext cx="3145536" cy="758952"/>
+            <a:ext cx="3145536" cy="640080"/>
           </a:xfrm>
           <a:prstGeom prst="rect">
             <a:avLst/>
@@ -8560,12 +8560,12 @@
         </p:nvSpPr>
         <p:spPr>
           <a:xfrm>
-            <a:off x="7635240" y="2788920"/>
-            <a:ext cx="3474720" cy="1536192"/>
+            <a:off x="7635240" y="2670048"/>
+            <a:ext cx="3474720" cy="1377086"/>
           </a:xfrm>
           <a:prstGeom prst="roundRect">
             <a:avLst>
-              <a:gd name="adj" fmla="val 7143"/>
+              <a:gd name="adj" fmla="val 7968"/>
             </a:avLst>
           </a:prstGeom>
           <a:solidFill>
@@ -8587,7 +8587,7 @@
         </p:nvSpPr>
         <p:spPr>
           <a:xfrm>
-            <a:off x="7799832" y="2935224"/>
+            <a:off x="7799832" y="2816352"/>
             <a:ext cx="3145536" cy="256032"/>
           </a:xfrm>
           <a:prstGeom prst="rect">
@@ -8626,8 +8626,8 @@
         </p:nvSpPr>
         <p:spPr>
           <a:xfrm>
-            <a:off x="7818120" y="3300984"/>
-            <a:ext cx="3090672" cy="877824"/>
+            <a:off x="7818120" y="3182112"/>
+            <a:ext cx="3090672" cy="718718"/>
           </a:xfrm>
           <a:prstGeom prst="rect">
             <a:avLst/>
@@ -8684,12 +8684,12 @@
         </p:nvSpPr>
         <p:spPr>
           <a:xfrm>
-            <a:off x="7635240" y="4498848"/>
-            <a:ext cx="3474720" cy="1143000"/>
+            <a:off x="7635240" y="4184294"/>
+            <a:ext cx="3474720" cy="1466698"/>
           </a:xfrm>
           <a:prstGeom prst="roundRect">
             <a:avLst>
-              <a:gd name="adj" fmla="val 9600"/>
+              <a:gd name="adj" fmla="val 7481"/>
             </a:avLst>
           </a:prstGeom>
           <a:solidFill>
@@ -8711,7 +8711,7 @@
         </p:nvSpPr>
         <p:spPr>
           <a:xfrm>
-            <a:off x="7799832" y="4645152"/>
+            <a:off x="7799832" y="4330598"/>
             <a:ext cx="3145536" cy="256032"/>
           </a:xfrm>
           <a:prstGeom prst="rect">
@@ -8750,8 +8750,8 @@
         </p:nvSpPr>
         <p:spPr>
           <a:xfrm>
-            <a:off x="7799832" y="4974336"/>
-            <a:ext cx="3145536" cy="576072"/>
+            <a:off x="7799832" y="4659782"/>
+            <a:ext cx="3145536" cy="899770"/>
           </a:xfrm>
           <a:prstGeom prst="rect">
             <a:avLst/>
@@ -8777,7 +8777,7 @@
                 <a:ea typeface="Aptos" pitchFamily="34" charset="-122"/>
                 <a:cs typeface="Aptos" pitchFamily="34" charset="-120"/>
               </a:rPr>
-              <a:t>Connect the concept to data quality, model performance, validation evidence, monitoring measures, and decisions that.</a:t>
+              <a:t>Connect the concept to data quality, model performance, validation evidence, monitoring measures, and decisions that remain under human control.</a:t>
             </a:r>
             <a:endParaRPr lang="en-US" sz="1320" dirty="0"/>
           </a:p>
@@ -9129,11 +9129,11 @@
         <p:spPr>
           <a:xfrm>
             <a:off x="7635240" y="1325880"/>
-            <a:ext cx="3474720" cy="1325880"/>
+            <a:ext cx="3474720" cy="1207008"/>
           </a:xfrm>
           <a:prstGeom prst="roundRect">
             <a:avLst>
-              <a:gd name="adj" fmla="val 8276"/>
+              <a:gd name="adj" fmla="val 9091"/>
             </a:avLst>
           </a:prstGeom>
           <a:solidFill>
@@ -9195,7 +9195,7 @@
         <p:spPr>
           <a:xfrm>
             <a:off x="7799832" y="1801368"/>
-            <a:ext cx="3145536" cy="758952"/>
+            <a:ext cx="3145536" cy="640080"/>
           </a:xfrm>
           <a:prstGeom prst="rect">
             <a:avLst/>
@@ -9235,12 +9235,12 @@
         </p:nvSpPr>
         <p:spPr>
           <a:xfrm>
-            <a:off x="7635240" y="2788920"/>
-            <a:ext cx="3474720" cy="1536192"/>
+            <a:off x="7635240" y="2670048"/>
+            <a:ext cx="3474720" cy="1377086"/>
           </a:xfrm>
           <a:prstGeom prst="roundRect">
             <a:avLst>
-              <a:gd name="adj" fmla="val 7143"/>
+              <a:gd name="adj" fmla="val 7968"/>
             </a:avLst>
           </a:prstGeom>
           <a:solidFill>
@@ -9262,7 +9262,7 @@
         </p:nvSpPr>
         <p:spPr>
           <a:xfrm>
-            <a:off x="7799832" y="2935224"/>
+            <a:off x="7799832" y="2816352"/>
             <a:ext cx="3145536" cy="256032"/>
           </a:xfrm>
           <a:prstGeom prst="rect">
@@ -9301,8 +9301,8 @@
         </p:nvSpPr>
         <p:spPr>
           <a:xfrm>
-            <a:off x="7818120" y="3300984"/>
-            <a:ext cx="3090672" cy="877824"/>
+            <a:off x="7818120" y="3182112"/>
+            <a:ext cx="3090672" cy="718718"/>
           </a:xfrm>
           <a:prstGeom prst="rect">
             <a:avLst/>
@@ -9359,12 +9359,12 @@
         </p:nvSpPr>
         <p:spPr>
           <a:xfrm>
-            <a:off x="7635240" y="4498848"/>
-            <a:ext cx="3474720" cy="1143000"/>
+            <a:off x="7635240" y="4184294"/>
+            <a:ext cx="3474720" cy="1466698"/>
           </a:xfrm>
           <a:prstGeom prst="roundRect">
             <a:avLst>
-              <a:gd name="adj" fmla="val 9600"/>
+              <a:gd name="adj" fmla="val 7481"/>
             </a:avLst>
           </a:prstGeom>
           <a:solidFill>
@@ -9386,7 +9386,7 @@
         </p:nvSpPr>
         <p:spPr>
           <a:xfrm>
-            <a:off x="7799832" y="4645152"/>
+            <a:off x="7799832" y="4330598"/>
             <a:ext cx="3145536" cy="256032"/>
           </a:xfrm>
           <a:prstGeom prst="rect">
@@ -9425,8 +9425,8 @@
         </p:nvSpPr>
         <p:spPr>
           <a:xfrm>
-            <a:off x="7799832" y="4974336"/>
-            <a:ext cx="3145536" cy="576072"/>
+            <a:off x="7799832" y="4659782"/>
+            <a:ext cx="3145536" cy="899770"/>
           </a:xfrm>
           <a:prstGeom prst="rect">
             <a:avLst/>
@@ -9452,7 +9452,7 @@
                 <a:ea typeface="Aptos" pitchFamily="34" charset="-122"/>
                 <a:cs typeface="Aptos" pitchFamily="34" charset="-120"/>
               </a:rPr>
-              <a:t>Use the assignment to test whether you can explain the concept, apply it to a realistic public health situation, and.</a:t>
+              <a:t>Use the assignment to test whether you can explain the concept, apply it to a realistic public health situation, and identify what would need review before the work moves forward.</a:t>
             </a:r>
             <a:endParaRPr lang="en-US" sz="1320" dirty="0"/>
           </a:p>
@@ -9821,11 +9821,11 @@
         <p:spPr>
           <a:xfrm>
             <a:off x="7635240" y="1325880"/>
-            <a:ext cx="3474720" cy="1325880"/>
+            <a:ext cx="3474720" cy="1207008"/>
           </a:xfrm>
           <a:prstGeom prst="roundRect">
             <a:avLst>
-              <a:gd name="adj" fmla="val 8276"/>
+              <a:gd name="adj" fmla="val 9091"/>
             </a:avLst>
           </a:prstGeom>
           <a:solidFill>
@@ -9887,7 +9887,7 @@
         <p:spPr>
           <a:xfrm>
             <a:off x="7799832" y="1801368"/>
-            <a:ext cx="3145536" cy="758952"/>
+            <a:ext cx="3145536" cy="640080"/>
           </a:xfrm>
           <a:prstGeom prst="rect">
             <a:avLst/>
@@ -9927,12 +9927,12 @@
         </p:nvSpPr>
         <p:spPr>
           <a:xfrm>
-            <a:off x="7635240" y="2788920"/>
-            <a:ext cx="3474720" cy="1536192"/>
+            <a:off x="7635240" y="2670048"/>
+            <a:ext cx="3474720" cy="1377086"/>
           </a:xfrm>
           <a:prstGeom prst="roundRect">
             <a:avLst>
-              <a:gd name="adj" fmla="val 7143"/>
+              <a:gd name="adj" fmla="val 7968"/>
             </a:avLst>
           </a:prstGeom>
           <a:solidFill>
@@ -9954,7 +9954,7 @@
         </p:nvSpPr>
         <p:spPr>
           <a:xfrm>
-            <a:off x="7799832" y="2935224"/>
+            <a:off x="7799832" y="2816352"/>
             <a:ext cx="3145536" cy="256032"/>
           </a:xfrm>
           <a:prstGeom prst="rect">
@@ -9993,8 +9993,8 @@
         </p:nvSpPr>
         <p:spPr>
           <a:xfrm>
-            <a:off x="7818120" y="3300984"/>
-            <a:ext cx="3090672" cy="877824"/>
+            <a:off x="7818120" y="3182112"/>
+            <a:ext cx="3090672" cy="718718"/>
           </a:xfrm>
           <a:prstGeom prst="rect">
             <a:avLst/>
@@ -10068,12 +10068,12 @@
         </p:nvSpPr>
         <p:spPr>
           <a:xfrm>
-            <a:off x="7635240" y="4498848"/>
-            <a:ext cx="3474720" cy="1143000"/>
+            <a:off x="7635240" y="4184294"/>
+            <a:ext cx="3474720" cy="1466698"/>
           </a:xfrm>
           <a:prstGeom prst="roundRect">
             <a:avLst>
-              <a:gd name="adj" fmla="val 9600"/>
+              <a:gd name="adj" fmla="val 7481"/>
             </a:avLst>
           </a:prstGeom>
           <a:solidFill>
@@ -10095,7 +10095,7 @@
         </p:nvSpPr>
         <p:spPr>
           <a:xfrm>
-            <a:off x="7799832" y="4645152"/>
+            <a:off x="7799832" y="4330598"/>
             <a:ext cx="3145536" cy="256032"/>
           </a:xfrm>
           <a:prstGeom prst="rect">
@@ -10134,8 +10134,8 @@
         </p:nvSpPr>
         <p:spPr>
           <a:xfrm>
-            <a:off x="7799832" y="4974336"/>
-            <a:ext cx="3145536" cy="576072"/>
+            <a:off x="7799832" y="4659782"/>
+            <a:ext cx="3145536" cy="899770"/>
           </a:xfrm>
           <a:prstGeom prst="rect">
             <a:avLst/>
@@ -10161,7 +10161,7 @@
                 <a:ea typeface="Aptos" pitchFamily="34" charset="-122"/>
                 <a:cs typeface="Aptos" pitchFamily="34" charset="-120"/>
               </a:rPr>
-              <a:t>Connect the concept to data quality, model performance, validation evidence, monitoring measures, and decisions that.</a:t>
+              <a:t>Connect the concept to data quality, model performance, validation evidence, monitoring measures, and decisions that remain under human control.</a:t>
             </a:r>
             <a:endParaRPr lang="en-US" sz="1320" dirty="0"/>
           </a:p>
@@ -11098,11 +11098,11 @@
         <p:spPr>
           <a:xfrm>
             <a:off x="7635240" y="1325880"/>
-            <a:ext cx="3474720" cy="1325880"/>
+            <a:ext cx="3474720" cy="1207008"/>
           </a:xfrm>
           <a:prstGeom prst="roundRect">
             <a:avLst>
-              <a:gd name="adj" fmla="val 8276"/>
+              <a:gd name="adj" fmla="val 9091"/>
             </a:avLst>
           </a:prstGeom>
           <a:solidFill>
@@ -11164,7 +11164,7 @@
         <p:spPr>
           <a:xfrm>
             <a:off x="7799832" y="1801368"/>
-            <a:ext cx="3145536" cy="758952"/>
+            <a:ext cx="3145536" cy="640080"/>
           </a:xfrm>
           <a:prstGeom prst="rect">
             <a:avLst/>
@@ -11204,12 +11204,12 @@
         </p:nvSpPr>
         <p:spPr>
           <a:xfrm>
-            <a:off x="7635240" y="2788920"/>
-            <a:ext cx="3474720" cy="1536192"/>
+            <a:off x="7635240" y="2670048"/>
+            <a:ext cx="3474720" cy="1377086"/>
           </a:xfrm>
           <a:prstGeom prst="roundRect">
             <a:avLst>
-              <a:gd name="adj" fmla="val 7143"/>
+              <a:gd name="adj" fmla="val 7968"/>
             </a:avLst>
           </a:prstGeom>
           <a:solidFill>
@@ -11231,7 +11231,7 @@
         </p:nvSpPr>
         <p:spPr>
           <a:xfrm>
-            <a:off x="7799832" y="2935224"/>
+            <a:off x="7799832" y="2816352"/>
             <a:ext cx="3145536" cy="256032"/>
           </a:xfrm>
           <a:prstGeom prst="rect">
@@ -11270,8 +11270,8 @@
         </p:nvSpPr>
         <p:spPr>
           <a:xfrm>
-            <a:off x="7818120" y="3300984"/>
-            <a:ext cx="3090672" cy="877824"/>
+            <a:off x="7818120" y="3182112"/>
+            <a:ext cx="3090672" cy="718718"/>
           </a:xfrm>
           <a:prstGeom prst="rect">
             <a:avLst/>
@@ -11311,12 +11311,12 @@
         </p:nvSpPr>
         <p:spPr>
           <a:xfrm>
-            <a:off x="7635240" y="4498848"/>
-            <a:ext cx="3474720" cy="1143000"/>
+            <a:off x="7635240" y="4184294"/>
+            <a:ext cx="3474720" cy="1466698"/>
           </a:xfrm>
           <a:prstGeom prst="roundRect">
             <a:avLst>
-              <a:gd name="adj" fmla="val 9600"/>
+              <a:gd name="adj" fmla="val 7481"/>
             </a:avLst>
           </a:prstGeom>
           <a:solidFill>
@@ -11338,7 +11338,7 @@
         </p:nvSpPr>
         <p:spPr>
           <a:xfrm>
-            <a:off x="7799832" y="4645152"/>
+            <a:off x="7799832" y="4330598"/>
             <a:ext cx="3145536" cy="256032"/>
           </a:xfrm>
           <a:prstGeom prst="rect">
@@ -11377,8 +11377,8 @@
         </p:nvSpPr>
         <p:spPr>
           <a:xfrm>
-            <a:off x="7799832" y="4974336"/>
-            <a:ext cx="3145536" cy="576072"/>
+            <a:off x="7799832" y="4659782"/>
+            <a:ext cx="3145536" cy="899770"/>
           </a:xfrm>
           <a:prstGeom prst="rect">
             <a:avLst/>
@@ -11404,7 +11404,7 @@
                 <a:ea typeface="Aptos" pitchFamily="34" charset="-122"/>
                 <a:cs typeface="Aptos" pitchFamily="34" charset="-120"/>
               </a:rPr>
-              <a:t>Connect the concept to data quality, model performance, validation evidence, monitoring measures, and decisions that.</a:t>
+              <a:t>Connect the concept to data quality, model performance, validation evidence, monitoring measures, and decisions that remain under human control.</a:t>
             </a:r>
             <a:endParaRPr lang="en-US" sz="1320" dirty="0"/>
           </a:p>
@@ -11773,11 +11773,11 @@
         <p:spPr>
           <a:xfrm>
             <a:off x="7635240" y="1325880"/>
-            <a:ext cx="3474720" cy="1325880"/>
+            <a:ext cx="3474720" cy="1207008"/>
           </a:xfrm>
           <a:prstGeom prst="roundRect">
             <a:avLst>
-              <a:gd name="adj" fmla="val 8276"/>
+              <a:gd name="adj" fmla="val 9091"/>
             </a:avLst>
           </a:prstGeom>
           <a:solidFill>
@@ -11839,7 +11839,7 @@
         <p:spPr>
           <a:xfrm>
             <a:off x="7799832" y="1801368"/>
-            <a:ext cx="3145536" cy="758952"/>
+            <a:ext cx="3145536" cy="640080"/>
           </a:xfrm>
           <a:prstGeom prst="rect">
             <a:avLst/>
@@ -11879,12 +11879,12 @@
         </p:nvSpPr>
         <p:spPr>
           <a:xfrm>
-            <a:off x="7635240" y="2788920"/>
-            <a:ext cx="3474720" cy="1536192"/>
+            <a:off x="7635240" y="2670048"/>
+            <a:ext cx="3474720" cy="1377086"/>
           </a:xfrm>
           <a:prstGeom prst="roundRect">
             <a:avLst>
-              <a:gd name="adj" fmla="val 7143"/>
+              <a:gd name="adj" fmla="val 7968"/>
             </a:avLst>
           </a:prstGeom>
           <a:solidFill>
@@ -11906,7 +11906,7 @@
         </p:nvSpPr>
         <p:spPr>
           <a:xfrm>
-            <a:off x="7799832" y="2935224"/>
+            <a:off x="7799832" y="2816352"/>
             <a:ext cx="3145536" cy="256032"/>
           </a:xfrm>
           <a:prstGeom prst="rect">
@@ -11945,8 +11945,8 @@
         </p:nvSpPr>
         <p:spPr>
           <a:xfrm>
-            <a:off x="7818120" y="3300984"/>
-            <a:ext cx="3090672" cy="877824"/>
+            <a:off x="7818120" y="3182112"/>
+            <a:ext cx="3090672" cy="718718"/>
           </a:xfrm>
           <a:prstGeom prst="rect">
             <a:avLst/>
@@ -12020,12 +12020,12 @@
         </p:nvSpPr>
         <p:spPr>
           <a:xfrm>
-            <a:off x="7635240" y="4498848"/>
-            <a:ext cx="3474720" cy="1143000"/>
+            <a:off x="7635240" y="4184294"/>
+            <a:ext cx="3474720" cy="1466698"/>
           </a:xfrm>
           <a:prstGeom prst="roundRect">
             <a:avLst>
-              <a:gd name="adj" fmla="val 9600"/>
+              <a:gd name="adj" fmla="val 7481"/>
             </a:avLst>
           </a:prstGeom>
           <a:solidFill>
@@ -12047,7 +12047,7 @@
         </p:nvSpPr>
         <p:spPr>
           <a:xfrm>
-            <a:off x="7799832" y="4645152"/>
+            <a:off x="7799832" y="4330598"/>
             <a:ext cx="3145536" cy="256032"/>
           </a:xfrm>
           <a:prstGeom prst="rect">
@@ -12086,8 +12086,8 @@
         </p:nvSpPr>
         <p:spPr>
           <a:xfrm>
-            <a:off x="7799832" y="4974336"/>
-            <a:ext cx="3145536" cy="576072"/>
+            <a:off x="7799832" y="4659782"/>
+            <a:ext cx="3145536" cy="899770"/>
           </a:xfrm>
           <a:prstGeom prst="rect">
             <a:avLst/>
@@ -12113,7 +12113,7 @@
                 <a:ea typeface="Aptos" pitchFamily="34" charset="-122"/>
                 <a:cs typeface="Aptos" pitchFamily="34" charset="-120"/>
               </a:rPr>
-              <a:t>Use the assignment to test whether you can explain the concept, apply it to a realistic public health situation, and.</a:t>
+              <a:t>Use the assignment to test whether you can explain the concept, apply it to a realistic public health situation, and identify what would need review before the work moves forward.</a:t>
             </a:r>
             <a:endParaRPr lang="en-US" sz="1320" dirty="0"/>
           </a:p>
@@ -12482,11 +12482,11 @@
         <p:spPr>
           <a:xfrm>
             <a:off x="7635240" y="1325880"/>
-            <a:ext cx="3474720" cy="1325880"/>
+            <a:ext cx="3474720" cy="1207008"/>
           </a:xfrm>
           <a:prstGeom prst="roundRect">
             <a:avLst>
-              <a:gd name="adj" fmla="val 8276"/>
+              <a:gd name="adj" fmla="val 9091"/>
             </a:avLst>
           </a:prstGeom>
           <a:solidFill>
@@ -12548,7 +12548,7 @@
         <p:spPr>
           <a:xfrm>
             <a:off x="7799832" y="1801368"/>
-            <a:ext cx="3145536" cy="758952"/>
+            <a:ext cx="3145536" cy="640080"/>
           </a:xfrm>
           <a:prstGeom prst="rect">
             <a:avLst/>
@@ -12588,12 +12588,12 @@
         </p:nvSpPr>
         <p:spPr>
           <a:xfrm>
-            <a:off x="7635240" y="2788920"/>
-            <a:ext cx="3474720" cy="1536192"/>
+            <a:off x="7635240" y="2670048"/>
+            <a:ext cx="3474720" cy="1377086"/>
           </a:xfrm>
           <a:prstGeom prst="roundRect">
             <a:avLst>
-              <a:gd name="adj" fmla="val 7143"/>
+              <a:gd name="adj" fmla="val 7968"/>
             </a:avLst>
           </a:prstGeom>
           <a:solidFill>
@@ -12615,7 +12615,7 @@
         </p:nvSpPr>
         <p:spPr>
           <a:xfrm>
-            <a:off x="7799832" y="2935224"/>
+            <a:off x="7799832" y="2816352"/>
             <a:ext cx="3145536" cy="256032"/>
           </a:xfrm>
           <a:prstGeom prst="rect">
@@ -12654,8 +12654,8 @@
         </p:nvSpPr>
         <p:spPr>
           <a:xfrm>
-            <a:off x="7818120" y="3300984"/>
-            <a:ext cx="3090672" cy="877824"/>
+            <a:off x="7818120" y="3182112"/>
+            <a:ext cx="3090672" cy="718718"/>
           </a:xfrm>
           <a:prstGeom prst="rect">
             <a:avLst/>
@@ -12729,12 +12729,12 @@
         </p:nvSpPr>
         <p:spPr>
           <a:xfrm>
-            <a:off x="7635240" y="4498848"/>
-            <a:ext cx="3474720" cy="1143000"/>
+            <a:off x="7635240" y="4184294"/>
+            <a:ext cx="3474720" cy="1466698"/>
           </a:xfrm>
           <a:prstGeom prst="roundRect">
             <a:avLst>
-              <a:gd name="adj" fmla="val 9600"/>
+              <a:gd name="adj" fmla="val 7481"/>
             </a:avLst>
           </a:prstGeom>
           <a:solidFill>
@@ -12756,7 +12756,7 @@
         </p:nvSpPr>
         <p:spPr>
           <a:xfrm>
-            <a:off x="7799832" y="4645152"/>
+            <a:off x="7799832" y="4330598"/>
             <a:ext cx="3145536" cy="256032"/>
           </a:xfrm>
           <a:prstGeom prst="rect">
@@ -12795,8 +12795,8 @@
         </p:nvSpPr>
         <p:spPr>
           <a:xfrm>
-            <a:off x="7799832" y="4974336"/>
-            <a:ext cx="3145536" cy="576072"/>
+            <a:off x="7799832" y="4659782"/>
+            <a:ext cx="3145536" cy="899770"/>
           </a:xfrm>
           <a:prstGeom prst="rect">
             <a:avLst/>
@@ -12822,7 +12822,7 @@
                 <a:ea typeface="Aptos" pitchFamily="34" charset="-122"/>
                 <a:cs typeface="Aptos" pitchFamily="34" charset="-120"/>
               </a:rPr>
-              <a:t>Use the assignment to test whether you can explain the concept, apply it to a realistic public health situation, and.</a:t>
+              <a:t>Use the assignment to test whether you can explain the concept, apply it to a realistic public health situation, and identify what would need review before the work moves forward.</a:t>
             </a:r>
             <a:endParaRPr lang="en-US" sz="1320" dirty="0"/>
           </a:p>
@@ -13191,11 +13191,11 @@
         <p:spPr>
           <a:xfrm>
             <a:off x="7635240" y="1325880"/>
-            <a:ext cx="3474720" cy="1325880"/>
+            <a:ext cx="3474720" cy="1207008"/>
           </a:xfrm>
           <a:prstGeom prst="roundRect">
             <a:avLst>
-              <a:gd name="adj" fmla="val 8276"/>
+              <a:gd name="adj" fmla="val 9091"/>
             </a:avLst>
           </a:prstGeom>
           <a:solidFill>
@@ -13257,7 +13257,7 @@
         <p:spPr>
           <a:xfrm>
             <a:off x="7799832" y="1801368"/>
-            <a:ext cx="3145536" cy="758952"/>
+            <a:ext cx="3145536" cy="640080"/>
           </a:xfrm>
           <a:prstGeom prst="rect">
             <a:avLst/>
@@ -13297,12 +13297,12 @@
         </p:nvSpPr>
         <p:spPr>
           <a:xfrm>
-            <a:off x="7635240" y="2788920"/>
-            <a:ext cx="3474720" cy="1536192"/>
+            <a:off x="7635240" y="2670048"/>
+            <a:ext cx="3474720" cy="1377086"/>
           </a:xfrm>
           <a:prstGeom prst="roundRect">
             <a:avLst>
-              <a:gd name="adj" fmla="val 7143"/>
+              <a:gd name="adj" fmla="val 7968"/>
             </a:avLst>
           </a:prstGeom>
           <a:solidFill>
@@ -13324,7 +13324,7 @@
         </p:nvSpPr>
         <p:spPr>
           <a:xfrm>
-            <a:off x="7799832" y="2935224"/>
+            <a:off x="7799832" y="2816352"/>
             <a:ext cx="3145536" cy="256032"/>
           </a:xfrm>
           <a:prstGeom prst="rect">
@@ -13363,8 +13363,8 @@
         </p:nvSpPr>
         <p:spPr>
           <a:xfrm>
-            <a:off x="7818120" y="3300984"/>
-            <a:ext cx="3090672" cy="877824"/>
+            <a:off x="7818120" y="3182112"/>
+            <a:ext cx="3090672" cy="718718"/>
           </a:xfrm>
           <a:prstGeom prst="rect">
             <a:avLst/>
@@ -13438,12 +13438,12 @@
         </p:nvSpPr>
         <p:spPr>
           <a:xfrm>
-            <a:off x="7635240" y="4498848"/>
-            <a:ext cx="3474720" cy="1143000"/>
+            <a:off x="7635240" y="4184294"/>
+            <a:ext cx="3474720" cy="1466698"/>
           </a:xfrm>
           <a:prstGeom prst="roundRect">
             <a:avLst>
-              <a:gd name="adj" fmla="val 9600"/>
+              <a:gd name="adj" fmla="val 7481"/>
             </a:avLst>
           </a:prstGeom>
           <a:solidFill>
@@ -13465,7 +13465,7 @@
         </p:nvSpPr>
         <p:spPr>
           <a:xfrm>
-            <a:off x="7799832" y="4645152"/>
+            <a:off x="7799832" y="4330598"/>
             <a:ext cx="3145536" cy="256032"/>
           </a:xfrm>
           <a:prstGeom prst="rect">
@@ -13504,8 +13504,8 @@
         </p:nvSpPr>
         <p:spPr>
           <a:xfrm>
-            <a:off x="7799832" y="4974336"/>
-            <a:ext cx="3145536" cy="576072"/>
+            <a:off x="7799832" y="4659782"/>
+            <a:ext cx="3145536" cy="899770"/>
           </a:xfrm>
           <a:prstGeom prst="rect">
             <a:avLst/>
@@ -13531,7 +13531,7 @@
                 <a:ea typeface="Aptos" pitchFamily="34" charset="-122"/>
                 <a:cs typeface="Aptos" pitchFamily="34" charset="-120"/>
               </a:rPr>
-              <a:t>Connect the concept to data quality, model performance, validation evidence, monitoring measures, and decisions that.</a:t>
+              <a:t>Connect the concept to data quality, model performance, validation evidence, monitoring measures, and decisions that remain under human control.</a:t>
             </a:r>
             <a:endParaRPr lang="en-US" sz="1320" dirty="0"/>
           </a:p>
@@ -14009,7 +14009,7 @@
                 <a:ea typeface="Aptos" pitchFamily="34" charset="-122"/>
                 <a:cs typeface="Aptos" pitchFamily="34" charset="-120"/>
               </a:rPr>
-              <a:t>Use the related plays to identify decisions, participants, timing, approvals, and documentation needed for responsible.</a:t>
+              <a:t>Use the related plays to identify decisions, participants, timing, approvals, and documentation needed for responsible implementation.</a:t>
             </a:r>
             <a:endParaRPr lang="en-US" sz="1320" dirty="0"/>
           </a:p>
@@ -14628,7 +14628,7 @@
                 <a:ea typeface="Aptos" pitchFamily="34" charset="-122"/>
                 <a:cs typeface="Aptos" pitchFamily="34" charset="-120"/>
               </a:rPr>
-              <a:t>Use linked tools when your department needs a structured worksheet, template, checklist, review process, or.</a:t>
+              <a:t>Use linked tools when your department needs a structured worksheet, template, checklist, review process, or documentation artifact.</a:t>
             </a:r>
             <a:endParaRPr lang="en-US" sz="1320" dirty="0"/>
           </a:p>
@@ -15138,11 +15138,11 @@
         <p:spPr>
           <a:xfrm>
             <a:off x="7635240" y="1325880"/>
-            <a:ext cx="3474720" cy="1325880"/>
+            <a:ext cx="3474720" cy="1207008"/>
           </a:xfrm>
           <a:prstGeom prst="roundRect">
             <a:avLst>
-              <a:gd name="adj" fmla="val 8276"/>
+              <a:gd name="adj" fmla="val 9091"/>
             </a:avLst>
           </a:prstGeom>
           <a:solidFill>
@@ -15204,7 +15204,7 @@
         <p:spPr>
           <a:xfrm>
             <a:off x="7799832" y="1801368"/>
-            <a:ext cx="3145536" cy="758952"/>
+            <a:ext cx="3145536" cy="640080"/>
           </a:xfrm>
           <a:prstGeom prst="rect">
             <a:avLst/>
@@ -15244,12 +15244,12 @@
         </p:nvSpPr>
         <p:spPr>
           <a:xfrm>
-            <a:off x="7635240" y="2788920"/>
-            <a:ext cx="3474720" cy="1536192"/>
+            <a:off x="7635240" y="2670048"/>
+            <a:ext cx="3474720" cy="1377086"/>
           </a:xfrm>
           <a:prstGeom prst="roundRect">
             <a:avLst>
-              <a:gd name="adj" fmla="val 7143"/>
+              <a:gd name="adj" fmla="val 7968"/>
             </a:avLst>
           </a:prstGeom>
           <a:solidFill>
@@ -15271,7 +15271,7 @@
         </p:nvSpPr>
         <p:spPr>
           <a:xfrm>
-            <a:off x="7799832" y="2935224"/>
+            <a:off x="7799832" y="2816352"/>
             <a:ext cx="3145536" cy="256032"/>
           </a:xfrm>
           <a:prstGeom prst="rect">
@@ -15310,8 +15310,8 @@
         </p:nvSpPr>
         <p:spPr>
           <a:xfrm>
-            <a:off x="7818120" y="3300984"/>
-            <a:ext cx="3090672" cy="877824"/>
+            <a:off x="7818120" y="3182112"/>
+            <a:ext cx="3090672" cy="718718"/>
           </a:xfrm>
           <a:prstGeom prst="rect">
             <a:avLst/>
@@ -15368,12 +15368,12 @@
         </p:nvSpPr>
         <p:spPr>
           <a:xfrm>
-            <a:off x="7635240" y="4498848"/>
-            <a:ext cx="3474720" cy="1143000"/>
+            <a:off x="7635240" y="4184294"/>
+            <a:ext cx="3474720" cy="1466698"/>
           </a:xfrm>
           <a:prstGeom prst="roundRect">
             <a:avLst>
-              <a:gd name="adj" fmla="val 9600"/>
+              <a:gd name="adj" fmla="val 7481"/>
             </a:avLst>
           </a:prstGeom>
           <a:solidFill>
@@ -15395,7 +15395,7 @@
         </p:nvSpPr>
         <p:spPr>
           <a:xfrm>
-            <a:off x="7799832" y="4645152"/>
+            <a:off x="7799832" y="4330598"/>
             <a:ext cx="3145536" cy="256032"/>
           </a:xfrm>
           <a:prstGeom prst="rect">
@@ -15434,8 +15434,8 @@
         </p:nvSpPr>
         <p:spPr>
           <a:xfrm>
-            <a:off x="7799832" y="4974336"/>
-            <a:ext cx="3145536" cy="576072"/>
+            <a:off x="7799832" y="4659782"/>
+            <a:ext cx="3145536" cy="899770"/>
           </a:xfrm>
           <a:prstGeom prst="rect">
             <a:avLst/>
@@ -15461,7 +15461,7 @@
                 <a:ea typeface="Aptos" pitchFamily="34" charset="-122"/>
                 <a:cs typeface="Aptos" pitchFamily="34" charset="-120"/>
               </a:rPr>
-              <a:t>Use the assignment to test whether you can explain the concept, apply it to a realistic public health situation, and.</a:t>
+              <a:t>Use the assignment to test whether you can explain the concept, apply it to a realistic public health situation, and identify what would need review before the work moves forward.</a:t>
             </a:r>
             <a:endParaRPr lang="en-US" sz="1320" dirty="0"/>
           </a:p>
@@ -15830,11 +15830,11 @@
         <p:spPr>
           <a:xfrm>
             <a:off x="7635240" y="1325880"/>
-            <a:ext cx="3474720" cy="1325880"/>
+            <a:ext cx="3474720" cy="1255471"/>
           </a:xfrm>
           <a:prstGeom prst="roundRect">
             <a:avLst>
-              <a:gd name="adj" fmla="val 8276"/>
+              <a:gd name="adj" fmla="val 8740"/>
             </a:avLst>
           </a:prstGeom>
           <a:solidFill>
@@ -15896,7 +15896,7 @@
         <p:spPr>
           <a:xfrm>
             <a:off x="7799832" y="1801368"/>
-            <a:ext cx="3145536" cy="758952"/>
+            <a:ext cx="3145536" cy="688543"/>
           </a:xfrm>
           <a:prstGeom prst="rect">
             <a:avLst/>
@@ -15936,12 +15936,12 @@
         </p:nvSpPr>
         <p:spPr>
           <a:xfrm>
-            <a:off x="7635240" y="2788920"/>
-            <a:ext cx="3474720" cy="1536192"/>
+            <a:off x="7635240" y="2718511"/>
+            <a:ext cx="3474720" cy="1328623"/>
           </a:xfrm>
           <a:prstGeom prst="roundRect">
             <a:avLst>
-              <a:gd name="adj" fmla="val 7143"/>
+              <a:gd name="adj" fmla="val 8259"/>
             </a:avLst>
           </a:prstGeom>
           <a:solidFill>
@@ -15963,8 +15963,8 @@
         </p:nvSpPr>
         <p:spPr>
           <a:xfrm>
-            <a:off x="7799832" y="2935224"/>
-            <a:ext cx="3145536" cy="256032"/>
+            <a:off x="7799832" y="2846527"/>
+            <a:ext cx="3145536" cy="237744"/>
           </a:xfrm>
           <a:prstGeom prst="rect">
             <a:avLst/>
@@ -15980,7 +15980,7 @@
               <a:buNone/>
             </a:pPr>
             <a:r>
-              <a:rPr lang="en-US" sz="1300" b="1" dirty="0">
+              <a:rPr lang="en-US" sz="1250" b="1" dirty="0">
                 <a:solidFill>
                   <a:srgbClr val="0068B7"/>
                 </a:solidFill>
@@ -15988,101 +15988,317 @@
                 <a:ea typeface="Aptos" pitchFamily="34" charset="-122"/>
                 <a:cs typeface="Aptos" pitchFamily="34" charset="-120"/>
               </a:rPr>
-              <a:t>Concept checkpoints</a:t>
-            </a:r>
-            <a:endParaRPr lang="en-US" sz="1300" dirty="0"/>
-          </a:p>
-        </p:txBody>
-      </p:sp>
-      <p:sp>
-        <p:nvSpPr>
-          <p:cNvPr id="15" name="Text 13"/>
-          <p:cNvSpPr/>
-          <p:nvPr/>
-        </p:nvSpPr>
-        <p:spPr>
-          <a:xfrm>
-            <a:off x="7818120" y="3300984"/>
-            <a:ext cx="3090672" cy="877824"/>
-          </a:xfrm>
-          <a:prstGeom prst="rect">
-            <a:avLst/>
-          </a:prstGeom>
-          <a:noFill/>
-          <a:ln/>
-        </p:spPr>
-        <p:txBody>
-          <a:bodyPr wrap="square" lIns="508" tIns="508" rIns="508" bIns="508" rtlCol="0" anchor="t">
+              <a:t>Data-to-decision flow</a:t>
+            </a:r>
+            <a:endParaRPr lang="en-US" sz="1250" dirty="0"/>
+          </a:p>
+        </p:txBody>
+      </p:sp>
+      <p:sp>
+        <p:nvSpPr>
+          <p:cNvPr id="15" name="Shape 13"/>
+          <p:cNvSpPr/>
+          <p:nvPr/>
+        </p:nvSpPr>
+        <p:spPr>
+          <a:xfrm>
+            <a:off x="8763000" y="3399739"/>
+            <a:ext cx="164592" cy="0"/>
+          </a:xfrm>
+          <a:prstGeom prst="line">
+            <a:avLst/>
+          </a:prstGeom>
+          <a:noFill/>
+          <a:ln w="15240">
+            <a:solidFill>
+              <a:srgbClr val="8ABBD8"/>
+            </a:solidFill>
+            <a:prstDash val="solid"/>
+          </a:ln>
+        </p:spPr>
+      </p:sp>
+      <p:sp>
+        <p:nvSpPr>
+          <p:cNvPr id="16" name="Shape 14"/>
+          <p:cNvSpPr/>
+          <p:nvPr/>
+        </p:nvSpPr>
+        <p:spPr>
+          <a:xfrm>
+            <a:off x="7872984" y="3248863"/>
+            <a:ext cx="890016" cy="301752"/>
+          </a:xfrm>
+          <a:prstGeom prst="roundRect">
+            <a:avLst>
+              <a:gd name="adj" fmla="val 24242"/>
+            </a:avLst>
+          </a:prstGeom>
+          <a:solidFill>
+            <a:srgbClr val="0068B7"/>
+          </a:solidFill>
+          <a:ln w="12700">
+            <a:solidFill>
+              <a:srgbClr val="0068B7"/>
+            </a:solidFill>
+            <a:prstDash val="solid"/>
+          </a:ln>
+        </p:spPr>
+      </p:sp>
+      <p:sp>
+        <p:nvSpPr>
+          <p:cNvPr id="17" name="Text 15"/>
+          <p:cNvSpPr/>
+          <p:nvPr/>
+        </p:nvSpPr>
+        <p:spPr>
+          <a:xfrm>
+            <a:off x="7909560" y="3322015"/>
+            <a:ext cx="816864" cy="146304"/>
+          </a:xfrm>
+          <a:prstGeom prst="rect">
+            <a:avLst/>
+          </a:prstGeom>
+          <a:noFill/>
+          <a:ln/>
+        </p:spPr>
+        <p:txBody>
+          <a:bodyPr wrap="square" lIns="0" tIns="0" rIns="0" bIns="0" rtlCol="0" anchor="ctr">
             <a:normAutofit/>
           </a:bodyPr>
           <a:lstStyle/>
           <a:p>
-            <a:pPr indent="0" marL="0">
-              <a:buNone/>
-            </a:pPr>
-            <a:r>
-              <a:rPr lang="en-US" sz="1220" dirty="0">
-                <a:solidFill>
-                  <a:srgbClr val="17364A"/>
-                </a:solidFill>
-                <a:latin typeface="Aptos" pitchFamily="34" charset="0"/>
-                <a:ea typeface="Aptos" pitchFamily="34" charset="-122"/>
-                <a:cs typeface="Aptos" pitchFamily="34" charset="-120"/>
-              </a:rPr>
-              <a:t>Electronic laboratory reporting supplies critical evidence for.</a:t>
-            </a:r>
-            <a:endParaRPr lang="en-US" sz="1220" dirty="0"/>
-          </a:p>
-          <a:p>
-            <a:pPr indent="0" marL="0">
-              <a:buNone/>
-            </a:pPr>
-            <a:r>
-              <a:rPr lang="en-US" sz="1220" dirty="0">
-                <a:solidFill>
-                  <a:srgbClr val="17364A"/>
-                </a:solidFill>
-                <a:latin typeface="Aptos" pitchFamily="34" charset="0"/>
-                <a:ea typeface="Aptos" pitchFamily="34" charset="-122"/>
-                <a:cs typeface="Aptos" pitchFamily="34" charset="-120"/>
-              </a:rPr>
-              <a:t>AI tools that use laboratory data depend on the quality of test.</a:t>
-            </a:r>
-            <a:endParaRPr lang="en-US" sz="1220" dirty="0"/>
-          </a:p>
-          <a:p>
-            <a:pPr indent="0" marL="0">
-              <a:buNone/>
-            </a:pPr>
-            <a:r>
-              <a:rPr lang="en-US" sz="1220" dirty="0">
-                <a:solidFill>
-                  <a:srgbClr val="17364A"/>
-                </a:solidFill>
-                <a:latin typeface="Aptos" pitchFamily="34" charset="0"/>
-                <a:ea typeface="Aptos" pitchFamily="34" charset="-122"/>
-                <a:cs typeface="Aptos" pitchFamily="34" charset="-120"/>
-              </a:rPr>
-              <a:t>This module teaches learners how laboratory data quality and.</a:t>
-            </a:r>
-            <a:endParaRPr lang="en-US" sz="1220" dirty="0"/>
-          </a:p>
-        </p:txBody>
-      </p:sp>
-      <p:sp>
-        <p:nvSpPr>
-          <p:cNvPr id="16" name="Shape 14"/>
-          <p:cNvSpPr/>
-          <p:nvPr/>
-        </p:nvSpPr>
-        <p:spPr>
-          <a:xfrm>
-            <a:off x="7635240" y="4498848"/>
-            <a:ext cx="3474720" cy="1143000"/>
+            <a:pPr algn="ctr" indent="0" marL="0">
+              <a:buNone/>
+            </a:pPr>
+            <a:r>
+              <a:rPr lang="en-US" sz="880" b="1" dirty="0">
+                <a:solidFill>
+                  <a:srgbClr val="FFFFFF"/>
+                </a:solidFill>
+                <a:latin typeface="Aptos" pitchFamily="34" charset="0"/>
+                <a:ea typeface="Aptos" pitchFamily="34" charset="-122"/>
+                <a:cs typeface="Aptos" pitchFamily="34" charset="-120"/>
+              </a:rPr>
+              <a:t>Data</a:t>
+            </a:r>
+            <a:endParaRPr lang="en-US" sz="880" dirty="0"/>
+          </a:p>
+        </p:txBody>
+      </p:sp>
+      <p:sp>
+        <p:nvSpPr>
+          <p:cNvPr id="18" name="Shape 16"/>
+          <p:cNvSpPr/>
+          <p:nvPr/>
+        </p:nvSpPr>
+        <p:spPr>
+          <a:xfrm>
+            <a:off x="9817608" y="3399739"/>
+            <a:ext cx="164592" cy="0"/>
+          </a:xfrm>
+          <a:prstGeom prst="line">
+            <a:avLst/>
+          </a:prstGeom>
+          <a:noFill/>
+          <a:ln w="15240">
+            <a:solidFill>
+              <a:srgbClr val="8ABBD8"/>
+            </a:solidFill>
+            <a:prstDash val="solid"/>
+          </a:ln>
+        </p:spPr>
+      </p:sp>
+      <p:sp>
+        <p:nvSpPr>
+          <p:cNvPr id="19" name="Shape 17"/>
+          <p:cNvSpPr/>
+          <p:nvPr/>
+        </p:nvSpPr>
+        <p:spPr>
+          <a:xfrm>
+            <a:off x="8927592" y="3248863"/>
+            <a:ext cx="890016" cy="301752"/>
           </a:xfrm>
           <a:prstGeom prst="roundRect">
             <a:avLst>
-              <a:gd name="adj" fmla="val 9600"/>
+              <a:gd name="adj" fmla="val 24242"/>
+            </a:avLst>
+          </a:prstGeom>
+          <a:solidFill>
+            <a:srgbClr val="2F8A28"/>
+          </a:solidFill>
+          <a:ln w="12700">
+            <a:solidFill>
+              <a:srgbClr val="2F8A28"/>
+            </a:solidFill>
+            <a:prstDash val="solid"/>
+          </a:ln>
+        </p:spPr>
+      </p:sp>
+      <p:sp>
+        <p:nvSpPr>
+          <p:cNvPr id="20" name="Text 18"/>
+          <p:cNvSpPr/>
+          <p:nvPr/>
+        </p:nvSpPr>
+        <p:spPr>
+          <a:xfrm>
+            <a:off x="8964168" y="3322015"/>
+            <a:ext cx="816864" cy="146304"/>
+          </a:xfrm>
+          <a:prstGeom prst="rect">
+            <a:avLst/>
+          </a:prstGeom>
+          <a:noFill/>
+          <a:ln/>
+        </p:spPr>
+        <p:txBody>
+          <a:bodyPr wrap="square" lIns="0" tIns="0" rIns="0" bIns="0" rtlCol="0" anchor="ctr">
+            <a:normAutofit/>
+          </a:bodyPr>
+          <a:lstStyle/>
+          <a:p>
+            <a:pPr algn="ctr" indent="0" marL="0">
+              <a:buNone/>
+            </a:pPr>
+            <a:r>
+              <a:rPr lang="en-US" sz="880" b="1" dirty="0">
+                <a:solidFill>
+                  <a:srgbClr val="FFFFFF"/>
+                </a:solidFill>
+                <a:latin typeface="Aptos" pitchFamily="34" charset="0"/>
+                <a:ea typeface="Aptos" pitchFamily="34" charset="-122"/>
+                <a:cs typeface="Aptos" pitchFamily="34" charset="-120"/>
+              </a:rPr>
+              <a:t>Analysis</a:t>
+            </a:r>
+            <a:endParaRPr lang="en-US" sz="880" dirty="0"/>
+          </a:p>
+        </p:txBody>
+      </p:sp>
+      <p:sp>
+        <p:nvSpPr>
+          <p:cNvPr id="21" name="Shape 19"/>
+          <p:cNvSpPr/>
+          <p:nvPr/>
+        </p:nvSpPr>
+        <p:spPr>
+          <a:xfrm>
+            <a:off x="9982200" y="3248863"/>
+            <a:ext cx="890016" cy="301752"/>
+          </a:xfrm>
+          <a:prstGeom prst="roundRect">
+            <a:avLst>
+              <a:gd name="adj" fmla="val 24242"/>
+            </a:avLst>
+          </a:prstGeom>
+          <a:solidFill>
+            <a:srgbClr val="6A4CA3"/>
+          </a:solidFill>
+          <a:ln w="12700">
+            <a:solidFill>
+              <a:srgbClr val="6A4CA3"/>
+            </a:solidFill>
+            <a:prstDash val="solid"/>
+          </a:ln>
+        </p:spPr>
+      </p:sp>
+      <p:sp>
+        <p:nvSpPr>
+          <p:cNvPr id="22" name="Text 20"/>
+          <p:cNvSpPr/>
+          <p:nvPr/>
+        </p:nvSpPr>
+        <p:spPr>
+          <a:xfrm>
+            <a:off x="10018776" y="3322015"/>
+            <a:ext cx="816864" cy="146304"/>
+          </a:xfrm>
+          <a:prstGeom prst="rect">
+            <a:avLst/>
+          </a:prstGeom>
+          <a:noFill/>
+          <a:ln/>
+        </p:spPr>
+        <p:txBody>
+          <a:bodyPr wrap="square" lIns="0" tIns="0" rIns="0" bIns="0" rtlCol="0" anchor="ctr">
+            <a:normAutofit/>
+          </a:bodyPr>
+          <a:lstStyle/>
+          <a:p>
+            <a:pPr algn="ctr" indent="0" marL="0">
+              <a:buNone/>
+            </a:pPr>
+            <a:r>
+              <a:rPr lang="en-US" sz="880" b="1" dirty="0">
+                <a:solidFill>
+                  <a:srgbClr val="FFFFFF"/>
+                </a:solidFill>
+                <a:latin typeface="Aptos" pitchFamily="34" charset="0"/>
+                <a:ea typeface="Aptos" pitchFamily="34" charset="-122"/>
+                <a:cs typeface="Aptos" pitchFamily="34" charset="-120"/>
+              </a:rPr>
+              <a:t>Review</a:t>
+            </a:r>
+            <a:endParaRPr lang="en-US" sz="880" dirty="0"/>
+          </a:p>
+        </p:txBody>
+      </p:sp>
+      <p:sp>
+        <p:nvSpPr>
+          <p:cNvPr id="23" name="Text 21"/>
+          <p:cNvSpPr/>
+          <p:nvPr/>
+        </p:nvSpPr>
+        <p:spPr>
+          <a:xfrm>
+            <a:off x="7854696" y="3742639"/>
+            <a:ext cx="3035808" cy="158191"/>
+          </a:xfrm>
+          <a:prstGeom prst="rect">
+            <a:avLst/>
+          </a:prstGeom>
+          <a:noFill/>
+          <a:ln/>
+        </p:spPr>
+        <p:txBody>
+          <a:bodyPr wrap="square" lIns="254" tIns="254" rIns="254" bIns="254" rtlCol="0" anchor="t">
+            <a:normAutofit/>
+          </a:bodyPr>
+          <a:lstStyle/>
+          <a:p>
+            <a:pPr indent="0" marL="0">
+              <a:buNone/>
+            </a:pPr>
+            <a:r>
+              <a:rPr lang="en-US" sz="1120" dirty="0">
+                <a:solidFill>
+                  <a:srgbClr val="17364A"/>
+                </a:solidFill>
+                <a:latin typeface="Aptos" pitchFamily="34" charset="0"/>
+                <a:ea typeface="Aptos" pitchFamily="34" charset="-122"/>
+                <a:cs typeface="Aptos" pitchFamily="34" charset="-120"/>
+              </a:rPr>
+              <a:t>The important handoff is not from data to AI; it is from analysis to accountable human review.</a:t>
+            </a:r>
+            <a:endParaRPr lang="en-US" sz="1120" dirty="0"/>
+          </a:p>
+        </p:txBody>
+      </p:sp>
+      <p:sp>
+        <p:nvSpPr>
+          <p:cNvPr id="24" name="Shape 22"/>
+          <p:cNvSpPr/>
+          <p:nvPr/>
+        </p:nvSpPr>
+        <p:spPr>
+          <a:xfrm>
+            <a:off x="7635240" y="4184294"/>
+            <a:ext cx="3474720" cy="1466698"/>
+          </a:xfrm>
+          <a:prstGeom prst="roundRect">
+            <a:avLst>
+              <a:gd name="adj" fmla="val 7481"/>
             </a:avLst>
           </a:prstGeom>
           <a:solidFill>
@@ -16098,13 +16314,13 @@
       </p:sp>
       <p:sp>
         <p:nvSpPr>
-          <p:cNvPr id="17" name="Text 15"/>
-          <p:cNvSpPr/>
-          <p:nvPr/>
-        </p:nvSpPr>
-        <p:spPr>
-          <a:xfrm>
-            <a:off x="7799832" y="4645152"/>
+          <p:cNvPr id="25" name="Text 23"/>
+          <p:cNvSpPr/>
+          <p:nvPr/>
+        </p:nvSpPr>
+        <p:spPr>
+          <a:xfrm>
+            <a:off x="7799832" y="4330598"/>
             <a:ext cx="3145536" cy="256032"/>
           </a:xfrm>
           <a:prstGeom prst="rect">
@@ -16137,14 +16353,14 @@
       </p:sp>
       <p:sp>
         <p:nvSpPr>
-          <p:cNvPr id="18" name="Text 16"/>
-          <p:cNvSpPr/>
-          <p:nvPr/>
-        </p:nvSpPr>
-        <p:spPr>
-          <a:xfrm>
-            <a:off x="7799832" y="4974336"/>
-            <a:ext cx="3145536" cy="576072"/>
+          <p:cNvPr id="26" name="Text 24"/>
+          <p:cNvSpPr/>
+          <p:nvPr/>
+        </p:nvSpPr>
+        <p:spPr>
+          <a:xfrm>
+            <a:off x="7799832" y="4659782"/>
+            <a:ext cx="3145536" cy="899770"/>
           </a:xfrm>
           <a:prstGeom prst="rect">
             <a:avLst/>
@@ -16170,7 +16386,7 @@
                 <a:ea typeface="Aptos" pitchFamily="34" charset="-122"/>
                 <a:cs typeface="Aptos" pitchFamily="34" charset="-120"/>
               </a:rPr>
-              <a:t>Connect the concept to data quality, model performance, validation evidence, monitoring measures, and decisions that.</a:t>
+              <a:t>Connect the concept to data quality, model performance, validation evidence, monitoring measures, and decisions that remain under human control.</a:t>
             </a:r>
             <a:endParaRPr lang="en-US" sz="1320" dirty="0"/>
           </a:p>
@@ -16539,11 +16755,11 @@
         <p:spPr>
           <a:xfrm>
             <a:off x="7635240" y="1325880"/>
-            <a:ext cx="3474720" cy="1325880"/>
+            <a:ext cx="3474720" cy="1207008"/>
           </a:xfrm>
           <a:prstGeom prst="roundRect">
             <a:avLst>
-              <a:gd name="adj" fmla="val 8276"/>
+              <a:gd name="adj" fmla="val 9091"/>
             </a:avLst>
           </a:prstGeom>
           <a:solidFill>
@@ -16605,7 +16821,7 @@
         <p:spPr>
           <a:xfrm>
             <a:off x="7799832" y="1801368"/>
-            <a:ext cx="3145536" cy="758952"/>
+            <a:ext cx="3145536" cy="640080"/>
           </a:xfrm>
           <a:prstGeom prst="rect">
             <a:avLst/>
@@ -16645,12 +16861,12 @@
         </p:nvSpPr>
         <p:spPr>
           <a:xfrm>
-            <a:off x="7635240" y="2788920"/>
-            <a:ext cx="3474720" cy="1536192"/>
+            <a:off x="7635240" y="2670048"/>
+            <a:ext cx="3474720" cy="1377086"/>
           </a:xfrm>
           <a:prstGeom prst="roundRect">
             <a:avLst>
-              <a:gd name="adj" fmla="val 7143"/>
+              <a:gd name="adj" fmla="val 7968"/>
             </a:avLst>
           </a:prstGeom>
           <a:solidFill>
@@ -16672,8 +16888,8 @@
         </p:nvSpPr>
         <p:spPr>
           <a:xfrm>
-            <a:off x="7799832" y="2935224"/>
-            <a:ext cx="3145536" cy="256032"/>
+            <a:off x="7799832" y="2798064"/>
+            <a:ext cx="3145536" cy="237744"/>
           </a:xfrm>
           <a:prstGeom prst="rect">
             <a:avLst/>
@@ -16689,7 +16905,7 @@
               <a:buNone/>
             </a:pPr>
             <a:r>
-              <a:rPr lang="en-US" sz="1300" b="1" dirty="0">
+              <a:rPr lang="en-US" sz="1250" b="1" dirty="0">
                 <a:solidFill>
                   <a:srgbClr val="0068B7"/>
                 </a:solidFill>
@@ -16697,101 +16913,317 @@
                 <a:ea typeface="Aptos" pitchFamily="34" charset="-122"/>
                 <a:cs typeface="Aptos" pitchFamily="34" charset="-120"/>
               </a:rPr>
-              <a:t>Concept checkpoints</a:t>
-            </a:r>
-            <a:endParaRPr lang="en-US" sz="1300" dirty="0"/>
-          </a:p>
-        </p:txBody>
-      </p:sp>
-      <p:sp>
-        <p:nvSpPr>
-          <p:cNvPr id="15" name="Text 13"/>
-          <p:cNvSpPr/>
-          <p:nvPr/>
-        </p:nvSpPr>
-        <p:spPr>
-          <a:xfrm>
-            <a:off x="7818120" y="3300984"/>
-            <a:ext cx="3090672" cy="877824"/>
-          </a:xfrm>
-          <a:prstGeom prst="rect">
-            <a:avLst/>
-          </a:prstGeom>
-          <a:noFill/>
-          <a:ln/>
-        </p:spPr>
-        <p:txBody>
-          <a:bodyPr wrap="square" lIns="508" tIns="508" rIns="508" bIns="508" rtlCol="0" anchor="t">
+              <a:t>Governance pathway</a:t>
+            </a:r>
+            <a:endParaRPr lang="en-US" sz="1250" dirty="0"/>
+          </a:p>
+        </p:txBody>
+      </p:sp>
+      <p:sp>
+        <p:nvSpPr>
+          <p:cNvPr id="15" name="Shape 13"/>
+          <p:cNvSpPr/>
+          <p:nvPr/>
+        </p:nvSpPr>
+        <p:spPr>
+          <a:xfrm>
+            <a:off x="8763000" y="3351276"/>
+            <a:ext cx="164592" cy="0"/>
+          </a:xfrm>
+          <a:prstGeom prst="line">
+            <a:avLst/>
+          </a:prstGeom>
+          <a:noFill/>
+          <a:ln w="15240">
+            <a:solidFill>
+              <a:srgbClr val="8ABBD8"/>
+            </a:solidFill>
+            <a:prstDash val="solid"/>
+          </a:ln>
+        </p:spPr>
+      </p:sp>
+      <p:sp>
+        <p:nvSpPr>
+          <p:cNvPr id="16" name="Shape 14"/>
+          <p:cNvSpPr/>
+          <p:nvPr/>
+        </p:nvSpPr>
+        <p:spPr>
+          <a:xfrm>
+            <a:off x="7872984" y="3200400"/>
+            <a:ext cx="890016" cy="301752"/>
+          </a:xfrm>
+          <a:prstGeom prst="roundRect">
+            <a:avLst>
+              <a:gd name="adj" fmla="val 24242"/>
+            </a:avLst>
+          </a:prstGeom>
+          <a:solidFill>
+            <a:srgbClr val="0068B7"/>
+          </a:solidFill>
+          <a:ln w="12700">
+            <a:solidFill>
+              <a:srgbClr val="0068B7"/>
+            </a:solidFill>
+            <a:prstDash val="solid"/>
+          </a:ln>
+        </p:spPr>
+      </p:sp>
+      <p:sp>
+        <p:nvSpPr>
+          <p:cNvPr id="17" name="Text 15"/>
+          <p:cNvSpPr/>
+          <p:nvPr/>
+        </p:nvSpPr>
+        <p:spPr>
+          <a:xfrm>
+            <a:off x="7909560" y="3273552"/>
+            <a:ext cx="816864" cy="146304"/>
+          </a:xfrm>
+          <a:prstGeom prst="rect">
+            <a:avLst/>
+          </a:prstGeom>
+          <a:noFill/>
+          <a:ln/>
+        </p:spPr>
+        <p:txBody>
+          <a:bodyPr wrap="square" lIns="0" tIns="0" rIns="0" bIns="0" rtlCol="0" anchor="ctr">
             <a:normAutofit/>
           </a:bodyPr>
           <a:lstStyle/>
           <a:p>
-            <a:pPr indent="0" marL="0">
-              <a:buNone/>
-            </a:pPr>
-            <a:r>
-              <a:rPr lang="en-US" sz="1220" dirty="0">
-                <a:solidFill>
-                  <a:srgbClr val="17364A"/>
-                </a:solidFill>
-                <a:latin typeface="Aptos" pitchFamily="34" charset="0"/>
-                <a:ea typeface="Aptos" pitchFamily="34" charset="-122"/>
-                <a:cs typeface="Aptos" pitchFamily="34" charset="-120"/>
-              </a:rPr>
-              <a:t>This national-level module is intended for training and planning.</a:t>
-            </a:r>
-            <a:endParaRPr lang="en-US" sz="1220" dirty="0"/>
-          </a:p>
-          <a:p>
-            <a:pPr indent="0" marL="0">
-              <a:buNone/>
-            </a:pPr>
-            <a:r>
-              <a:rPr lang="en-US" sz="1220" dirty="0">
-                <a:solidFill>
-                  <a:srgbClr val="17364A"/>
-                </a:solidFill>
-                <a:latin typeface="Aptos" pitchFamily="34" charset="0"/>
-                <a:ea typeface="Aptos" pitchFamily="34" charset="-122"/>
-                <a:cs typeface="Aptos" pitchFamily="34" charset="-120"/>
-              </a:rPr>
-              <a:t>It does not replace legal, privacy, procurement, civil rights,.</a:t>
-            </a:r>
-            <a:endParaRPr lang="en-US" sz="1220" dirty="0"/>
-          </a:p>
-          <a:p>
-            <a:pPr indent="0" marL="0">
-              <a:buNone/>
-            </a:pPr>
-            <a:r>
-              <a:rPr lang="en-US" sz="1220" dirty="0">
-                <a:solidFill>
-                  <a:srgbClr val="17364A"/>
-                </a:solidFill>
-                <a:latin typeface="Aptos" pitchFamily="34" charset="0"/>
-                <a:ea typeface="Aptos" pitchFamily="34" charset="-122"/>
-                <a:cs typeface="Aptos" pitchFamily="34" charset="-120"/>
-              </a:rPr>
-              <a:t>Learners should confirm applicable requirements in their own.</a:t>
-            </a:r>
-            <a:endParaRPr lang="en-US" sz="1220" dirty="0"/>
-          </a:p>
-        </p:txBody>
-      </p:sp>
-      <p:sp>
-        <p:nvSpPr>
-          <p:cNvPr id="16" name="Shape 14"/>
-          <p:cNvSpPr/>
-          <p:nvPr/>
-        </p:nvSpPr>
-        <p:spPr>
-          <a:xfrm>
-            <a:off x="7635240" y="4498848"/>
-            <a:ext cx="3474720" cy="1143000"/>
+            <a:pPr algn="ctr" indent="0" marL="0">
+              <a:buNone/>
+            </a:pPr>
+            <a:r>
+              <a:rPr lang="en-US" sz="880" b="1" dirty="0">
+                <a:solidFill>
+                  <a:srgbClr val="FFFFFF"/>
+                </a:solidFill>
+                <a:latin typeface="Aptos" pitchFamily="34" charset="0"/>
+                <a:ea typeface="Aptos" pitchFamily="34" charset="-122"/>
+                <a:cs typeface="Aptos" pitchFamily="34" charset="-120"/>
+              </a:rPr>
+              <a:t>Submit</a:t>
+            </a:r>
+            <a:endParaRPr lang="en-US" sz="880" dirty="0"/>
+          </a:p>
+        </p:txBody>
+      </p:sp>
+      <p:sp>
+        <p:nvSpPr>
+          <p:cNvPr id="18" name="Shape 16"/>
+          <p:cNvSpPr/>
+          <p:nvPr/>
+        </p:nvSpPr>
+        <p:spPr>
+          <a:xfrm>
+            <a:off x="9817608" y="3351276"/>
+            <a:ext cx="164592" cy="0"/>
+          </a:xfrm>
+          <a:prstGeom prst="line">
+            <a:avLst/>
+          </a:prstGeom>
+          <a:noFill/>
+          <a:ln w="15240">
+            <a:solidFill>
+              <a:srgbClr val="8ABBD8"/>
+            </a:solidFill>
+            <a:prstDash val="solid"/>
+          </a:ln>
+        </p:spPr>
+      </p:sp>
+      <p:sp>
+        <p:nvSpPr>
+          <p:cNvPr id="19" name="Shape 17"/>
+          <p:cNvSpPr/>
+          <p:nvPr/>
+        </p:nvSpPr>
+        <p:spPr>
+          <a:xfrm>
+            <a:off x="8927592" y="3200400"/>
+            <a:ext cx="890016" cy="301752"/>
           </a:xfrm>
           <a:prstGeom prst="roundRect">
             <a:avLst>
-              <a:gd name="adj" fmla="val 9600"/>
+              <a:gd name="adj" fmla="val 24242"/>
+            </a:avLst>
+          </a:prstGeom>
+          <a:solidFill>
+            <a:srgbClr val="2F8A28"/>
+          </a:solidFill>
+          <a:ln w="12700">
+            <a:solidFill>
+              <a:srgbClr val="2F8A28"/>
+            </a:solidFill>
+            <a:prstDash val="solid"/>
+          </a:ln>
+        </p:spPr>
+      </p:sp>
+      <p:sp>
+        <p:nvSpPr>
+          <p:cNvPr id="20" name="Text 18"/>
+          <p:cNvSpPr/>
+          <p:nvPr/>
+        </p:nvSpPr>
+        <p:spPr>
+          <a:xfrm>
+            <a:off x="8964168" y="3273552"/>
+            <a:ext cx="816864" cy="146304"/>
+          </a:xfrm>
+          <a:prstGeom prst="rect">
+            <a:avLst/>
+          </a:prstGeom>
+          <a:noFill/>
+          <a:ln/>
+        </p:spPr>
+        <p:txBody>
+          <a:bodyPr wrap="square" lIns="0" tIns="0" rIns="0" bIns="0" rtlCol="0" anchor="ctr">
+            <a:normAutofit/>
+          </a:bodyPr>
+          <a:lstStyle/>
+          <a:p>
+            <a:pPr algn="ctr" indent="0" marL="0">
+              <a:buNone/>
+            </a:pPr>
+            <a:r>
+              <a:rPr lang="en-US" sz="880" b="1" dirty="0">
+                <a:solidFill>
+                  <a:srgbClr val="FFFFFF"/>
+                </a:solidFill>
+                <a:latin typeface="Aptos" pitchFamily="34" charset="0"/>
+                <a:ea typeface="Aptos" pitchFamily="34" charset="-122"/>
+                <a:cs typeface="Aptos" pitchFamily="34" charset="-120"/>
+              </a:rPr>
+              <a:t>Review</a:t>
+            </a:r>
+            <a:endParaRPr lang="en-US" sz="880" dirty="0"/>
+          </a:p>
+        </p:txBody>
+      </p:sp>
+      <p:sp>
+        <p:nvSpPr>
+          <p:cNvPr id="21" name="Shape 19"/>
+          <p:cNvSpPr/>
+          <p:nvPr/>
+        </p:nvSpPr>
+        <p:spPr>
+          <a:xfrm>
+            <a:off x="9982200" y="3200400"/>
+            <a:ext cx="890016" cy="301752"/>
+          </a:xfrm>
+          <a:prstGeom prst="roundRect">
+            <a:avLst>
+              <a:gd name="adj" fmla="val 24242"/>
+            </a:avLst>
+          </a:prstGeom>
+          <a:solidFill>
+            <a:srgbClr val="6A4CA3"/>
+          </a:solidFill>
+          <a:ln w="12700">
+            <a:solidFill>
+              <a:srgbClr val="6A4CA3"/>
+            </a:solidFill>
+            <a:prstDash val="solid"/>
+          </a:ln>
+        </p:spPr>
+      </p:sp>
+      <p:sp>
+        <p:nvSpPr>
+          <p:cNvPr id="22" name="Text 20"/>
+          <p:cNvSpPr/>
+          <p:nvPr/>
+        </p:nvSpPr>
+        <p:spPr>
+          <a:xfrm>
+            <a:off x="10018776" y="3273552"/>
+            <a:ext cx="816864" cy="146304"/>
+          </a:xfrm>
+          <a:prstGeom prst="rect">
+            <a:avLst/>
+          </a:prstGeom>
+          <a:noFill/>
+          <a:ln/>
+        </p:spPr>
+        <p:txBody>
+          <a:bodyPr wrap="square" lIns="0" tIns="0" rIns="0" bIns="0" rtlCol="0" anchor="ctr">
+            <a:normAutofit/>
+          </a:bodyPr>
+          <a:lstStyle/>
+          <a:p>
+            <a:pPr algn="ctr" indent="0" marL="0">
+              <a:buNone/>
+            </a:pPr>
+            <a:r>
+              <a:rPr lang="en-US" sz="880" b="1" dirty="0">
+                <a:solidFill>
+                  <a:srgbClr val="FFFFFF"/>
+                </a:solidFill>
+                <a:latin typeface="Aptos" pitchFamily="34" charset="0"/>
+                <a:ea typeface="Aptos" pitchFamily="34" charset="-122"/>
+                <a:cs typeface="Aptos" pitchFamily="34" charset="-120"/>
+              </a:rPr>
+              <a:t>Oversee</a:t>
+            </a:r>
+            <a:endParaRPr lang="en-US" sz="880" dirty="0"/>
+          </a:p>
+        </p:txBody>
+      </p:sp>
+      <p:sp>
+        <p:nvSpPr>
+          <p:cNvPr id="23" name="Text 21"/>
+          <p:cNvSpPr/>
+          <p:nvPr/>
+        </p:nvSpPr>
+        <p:spPr>
+          <a:xfrm>
+            <a:off x="7854696" y="3694176"/>
+            <a:ext cx="3035808" cy="206654"/>
+          </a:xfrm>
+          <a:prstGeom prst="rect">
+            <a:avLst/>
+          </a:prstGeom>
+          <a:noFill/>
+          <a:ln/>
+        </p:spPr>
+        <p:txBody>
+          <a:bodyPr wrap="square" lIns="254" tIns="254" rIns="254" bIns="254" rtlCol="0" anchor="t">
+            <a:normAutofit/>
+          </a:bodyPr>
+          <a:lstStyle/>
+          <a:p>
+            <a:pPr indent="0" marL="0">
+              <a:buNone/>
+            </a:pPr>
+            <a:r>
+              <a:rPr lang="en-US" sz="1120" dirty="0">
+                <a:solidFill>
+                  <a:srgbClr val="17364A"/>
+                </a:solidFill>
+                <a:latin typeface="Aptos" pitchFamily="34" charset="0"/>
+                <a:ea typeface="Aptos" pitchFamily="34" charset="-122"/>
+                <a:cs typeface="Aptos" pitchFamily="34" charset="-120"/>
+              </a:rPr>
+              <a:t>A proposed AI use should move through documented review before it becomes an operational workflow.</a:t>
+            </a:r>
+            <a:endParaRPr lang="en-US" sz="1120" dirty="0"/>
+          </a:p>
+        </p:txBody>
+      </p:sp>
+      <p:sp>
+        <p:nvSpPr>
+          <p:cNvPr id="24" name="Shape 22"/>
+          <p:cNvSpPr/>
+          <p:nvPr/>
+        </p:nvSpPr>
+        <p:spPr>
+          <a:xfrm>
+            <a:off x="7635240" y="4184294"/>
+            <a:ext cx="3474720" cy="1466698"/>
+          </a:xfrm>
+          <a:prstGeom prst="roundRect">
+            <a:avLst>
+              <a:gd name="adj" fmla="val 7481"/>
             </a:avLst>
           </a:prstGeom>
           <a:solidFill>
@@ -16807,13 +17239,13 @@
       </p:sp>
       <p:sp>
         <p:nvSpPr>
-          <p:cNvPr id="17" name="Text 15"/>
-          <p:cNvSpPr/>
-          <p:nvPr/>
-        </p:nvSpPr>
-        <p:spPr>
-          <a:xfrm>
-            <a:off x="7799832" y="4645152"/>
+          <p:cNvPr id="25" name="Text 23"/>
+          <p:cNvSpPr/>
+          <p:nvPr/>
+        </p:nvSpPr>
+        <p:spPr>
+          <a:xfrm>
+            <a:off x="7799832" y="4330598"/>
             <a:ext cx="3145536" cy="256032"/>
           </a:xfrm>
           <a:prstGeom prst="rect">
@@ -16846,14 +17278,14 @@
       </p:sp>
       <p:sp>
         <p:nvSpPr>
-          <p:cNvPr id="18" name="Text 16"/>
-          <p:cNvSpPr/>
-          <p:nvPr/>
-        </p:nvSpPr>
-        <p:spPr>
-          <a:xfrm>
-            <a:off x="7799832" y="4974336"/>
-            <a:ext cx="3145536" cy="576072"/>
+          <p:cNvPr id="26" name="Text 24"/>
+          <p:cNvSpPr/>
+          <p:nvPr/>
+        </p:nvSpPr>
+        <p:spPr>
+          <a:xfrm>
+            <a:off x="7799832" y="4659782"/>
+            <a:ext cx="3145536" cy="899770"/>
           </a:xfrm>
           <a:prstGeom prst="rect">
             <a:avLst/>
@@ -16879,7 +17311,7 @@
                 <a:ea typeface="Aptos" pitchFamily="34" charset="-122"/>
                 <a:cs typeface="Aptos" pitchFamily="34" charset="-120"/>
               </a:rPr>
-              <a:t>Translate this concept into clear decision rights, review steps, documentation expectations, and escalation paths before.</a:t>
+              <a:t>Translate this concept into clear decision rights, review steps, documentation expectations, and escalation paths before an AI-supported workflow is approved.</a:t>
             </a:r>
             <a:endParaRPr lang="en-US" sz="1320" dirty="0"/>
           </a:p>
@@ -17248,11 +17680,11 @@
         <p:spPr>
           <a:xfrm>
             <a:off x="7635240" y="1325880"/>
-            <a:ext cx="3474720" cy="1325880"/>
+            <a:ext cx="3474720" cy="1255471"/>
           </a:xfrm>
           <a:prstGeom prst="roundRect">
             <a:avLst>
-              <a:gd name="adj" fmla="val 8276"/>
+              <a:gd name="adj" fmla="val 8740"/>
             </a:avLst>
           </a:prstGeom>
           <a:solidFill>
@@ -17314,7 +17746,7 @@
         <p:spPr>
           <a:xfrm>
             <a:off x="7799832" y="1801368"/>
-            <a:ext cx="3145536" cy="758952"/>
+            <a:ext cx="3145536" cy="688543"/>
           </a:xfrm>
           <a:prstGeom prst="rect">
             <a:avLst/>
@@ -17354,12 +17786,12 @@
         </p:nvSpPr>
         <p:spPr>
           <a:xfrm>
-            <a:off x="7635240" y="2788920"/>
-            <a:ext cx="3474720" cy="1536192"/>
+            <a:off x="7635240" y="2718511"/>
+            <a:ext cx="3474720" cy="1328623"/>
           </a:xfrm>
           <a:prstGeom prst="roundRect">
             <a:avLst>
-              <a:gd name="adj" fmla="val 7143"/>
+              <a:gd name="adj" fmla="val 8259"/>
             </a:avLst>
           </a:prstGeom>
           <a:solidFill>
@@ -17381,8 +17813,8 @@
         </p:nvSpPr>
         <p:spPr>
           <a:xfrm>
-            <a:off x="7799832" y="2935224"/>
-            <a:ext cx="3145536" cy="256032"/>
+            <a:off x="7799832" y="2846527"/>
+            <a:ext cx="3145536" cy="237744"/>
           </a:xfrm>
           <a:prstGeom prst="rect">
             <a:avLst/>
@@ -17398,7 +17830,7 @@
               <a:buNone/>
             </a:pPr>
             <a:r>
-              <a:rPr lang="en-US" sz="1300" b="1" dirty="0">
+              <a:rPr lang="en-US" sz="1250" b="1" dirty="0">
                 <a:solidFill>
                   <a:srgbClr val="0068B7"/>
                 </a:solidFill>
@@ -17406,101 +17838,317 @@
                 <a:ea typeface="Aptos" pitchFamily="34" charset="-122"/>
                 <a:cs typeface="Aptos" pitchFamily="34" charset="-120"/>
               </a:rPr>
-              <a:t>Concept checkpoints</a:t>
-            </a:r>
-            <a:endParaRPr lang="en-US" sz="1300" dirty="0"/>
-          </a:p>
-        </p:txBody>
-      </p:sp>
-      <p:sp>
-        <p:nvSpPr>
-          <p:cNvPr id="15" name="Text 13"/>
-          <p:cNvSpPr/>
-          <p:nvPr/>
-        </p:nvSpPr>
-        <p:spPr>
-          <a:xfrm>
-            <a:off x="7818120" y="3300984"/>
-            <a:ext cx="3090672" cy="877824"/>
-          </a:xfrm>
-          <a:prstGeom prst="rect">
-            <a:avLst/>
-          </a:prstGeom>
-          <a:noFill/>
-          <a:ln/>
-        </p:spPr>
-        <p:txBody>
-          <a:bodyPr wrap="square" lIns="508" tIns="508" rIns="508" bIns="508" rtlCol="0" anchor="t">
+              <a:t>Data-to-decision flow</a:t>
+            </a:r>
+            <a:endParaRPr lang="en-US" sz="1250" dirty="0"/>
+          </a:p>
+        </p:txBody>
+      </p:sp>
+      <p:sp>
+        <p:nvSpPr>
+          <p:cNvPr id="15" name="Shape 13"/>
+          <p:cNvSpPr/>
+          <p:nvPr/>
+        </p:nvSpPr>
+        <p:spPr>
+          <a:xfrm>
+            <a:off x="8763000" y="3399739"/>
+            <a:ext cx="164592" cy="0"/>
+          </a:xfrm>
+          <a:prstGeom prst="line">
+            <a:avLst/>
+          </a:prstGeom>
+          <a:noFill/>
+          <a:ln w="15240">
+            <a:solidFill>
+              <a:srgbClr val="8ABBD8"/>
+            </a:solidFill>
+            <a:prstDash val="solid"/>
+          </a:ln>
+        </p:spPr>
+      </p:sp>
+      <p:sp>
+        <p:nvSpPr>
+          <p:cNvPr id="16" name="Shape 14"/>
+          <p:cNvSpPr/>
+          <p:nvPr/>
+        </p:nvSpPr>
+        <p:spPr>
+          <a:xfrm>
+            <a:off x="7872984" y="3248863"/>
+            <a:ext cx="890016" cy="301752"/>
+          </a:xfrm>
+          <a:prstGeom prst="roundRect">
+            <a:avLst>
+              <a:gd name="adj" fmla="val 24242"/>
+            </a:avLst>
+          </a:prstGeom>
+          <a:solidFill>
+            <a:srgbClr val="0068B7"/>
+          </a:solidFill>
+          <a:ln w="12700">
+            <a:solidFill>
+              <a:srgbClr val="0068B7"/>
+            </a:solidFill>
+            <a:prstDash val="solid"/>
+          </a:ln>
+        </p:spPr>
+      </p:sp>
+      <p:sp>
+        <p:nvSpPr>
+          <p:cNvPr id="17" name="Text 15"/>
+          <p:cNvSpPr/>
+          <p:nvPr/>
+        </p:nvSpPr>
+        <p:spPr>
+          <a:xfrm>
+            <a:off x="7909560" y="3322015"/>
+            <a:ext cx="816864" cy="146304"/>
+          </a:xfrm>
+          <a:prstGeom prst="rect">
+            <a:avLst/>
+          </a:prstGeom>
+          <a:noFill/>
+          <a:ln/>
+        </p:spPr>
+        <p:txBody>
+          <a:bodyPr wrap="square" lIns="0" tIns="0" rIns="0" bIns="0" rtlCol="0" anchor="ctr">
             <a:normAutofit/>
           </a:bodyPr>
           <a:lstStyle/>
           <a:p>
-            <a:pPr indent="0" marL="0">
-              <a:buNone/>
-            </a:pPr>
-            <a:r>
-              <a:rPr lang="en-US" sz="1220" dirty="0">
-                <a:solidFill>
-                  <a:srgbClr val="17364A"/>
-                </a:solidFill>
-                <a:latin typeface="Aptos" pitchFamily="34" charset="0"/>
-                <a:ea typeface="Aptos" pitchFamily="34" charset="-122"/>
-                <a:cs typeface="Aptos" pitchFamily="34" charset="-120"/>
-              </a:rPr>
-              <a:t>Laboratory data are often treated as objective because they come.</a:t>
-            </a:r>
-            <a:endParaRPr lang="en-US" sz="1220" dirty="0"/>
-          </a:p>
-          <a:p>
-            <a:pPr indent="0" marL="0">
-              <a:buNone/>
-            </a:pPr>
-            <a:r>
-              <a:rPr lang="en-US" sz="1220" dirty="0">
-                <a:solidFill>
-                  <a:srgbClr val="17364A"/>
-                </a:solidFill>
-                <a:latin typeface="Aptos" pitchFamily="34" charset="0"/>
-                <a:ea typeface="Aptos" pitchFamily="34" charset="-122"/>
-                <a:cs typeface="Aptos" pitchFamily="34" charset="-120"/>
-              </a:rPr>
-              <a:t>A laboratory result can be difficult to use if the test code is.</a:t>
-            </a:r>
-            <a:endParaRPr lang="en-US" sz="1220" dirty="0"/>
-          </a:p>
-          <a:p>
-            <a:pPr indent="0" marL="0">
-              <a:buNone/>
-            </a:pPr>
-            <a:r>
-              <a:rPr lang="en-US" sz="1220" dirty="0">
-                <a:solidFill>
-                  <a:srgbClr val="17364A"/>
-                </a:solidFill>
-                <a:latin typeface="Aptos" pitchFamily="34" charset="0"/>
-                <a:ea typeface="Aptos" pitchFamily="34" charset="-122"/>
-                <a:cs typeface="Aptos" pitchFamily="34" charset="-120"/>
-              </a:rPr>
-              <a:t>Terminology mapping is central to reliable public health.</a:t>
-            </a:r>
-            <a:endParaRPr lang="en-US" sz="1220" dirty="0"/>
-          </a:p>
-        </p:txBody>
-      </p:sp>
-      <p:sp>
-        <p:nvSpPr>
-          <p:cNvPr id="16" name="Shape 14"/>
-          <p:cNvSpPr/>
-          <p:nvPr/>
-        </p:nvSpPr>
-        <p:spPr>
-          <a:xfrm>
-            <a:off x="7635240" y="4498848"/>
-            <a:ext cx="3474720" cy="1143000"/>
+            <a:pPr algn="ctr" indent="0" marL="0">
+              <a:buNone/>
+            </a:pPr>
+            <a:r>
+              <a:rPr lang="en-US" sz="880" b="1" dirty="0">
+                <a:solidFill>
+                  <a:srgbClr val="FFFFFF"/>
+                </a:solidFill>
+                <a:latin typeface="Aptos" pitchFamily="34" charset="0"/>
+                <a:ea typeface="Aptos" pitchFamily="34" charset="-122"/>
+                <a:cs typeface="Aptos" pitchFamily="34" charset="-120"/>
+              </a:rPr>
+              <a:t>Data</a:t>
+            </a:r>
+            <a:endParaRPr lang="en-US" sz="880" dirty="0"/>
+          </a:p>
+        </p:txBody>
+      </p:sp>
+      <p:sp>
+        <p:nvSpPr>
+          <p:cNvPr id="18" name="Shape 16"/>
+          <p:cNvSpPr/>
+          <p:nvPr/>
+        </p:nvSpPr>
+        <p:spPr>
+          <a:xfrm>
+            <a:off x="9817608" y="3399739"/>
+            <a:ext cx="164592" cy="0"/>
+          </a:xfrm>
+          <a:prstGeom prst="line">
+            <a:avLst/>
+          </a:prstGeom>
+          <a:noFill/>
+          <a:ln w="15240">
+            <a:solidFill>
+              <a:srgbClr val="8ABBD8"/>
+            </a:solidFill>
+            <a:prstDash val="solid"/>
+          </a:ln>
+        </p:spPr>
+      </p:sp>
+      <p:sp>
+        <p:nvSpPr>
+          <p:cNvPr id="19" name="Shape 17"/>
+          <p:cNvSpPr/>
+          <p:nvPr/>
+        </p:nvSpPr>
+        <p:spPr>
+          <a:xfrm>
+            <a:off x="8927592" y="3248863"/>
+            <a:ext cx="890016" cy="301752"/>
           </a:xfrm>
           <a:prstGeom prst="roundRect">
             <a:avLst>
-              <a:gd name="adj" fmla="val 9600"/>
+              <a:gd name="adj" fmla="val 24242"/>
+            </a:avLst>
+          </a:prstGeom>
+          <a:solidFill>
+            <a:srgbClr val="2F8A28"/>
+          </a:solidFill>
+          <a:ln w="12700">
+            <a:solidFill>
+              <a:srgbClr val="2F8A28"/>
+            </a:solidFill>
+            <a:prstDash val="solid"/>
+          </a:ln>
+        </p:spPr>
+      </p:sp>
+      <p:sp>
+        <p:nvSpPr>
+          <p:cNvPr id="20" name="Text 18"/>
+          <p:cNvSpPr/>
+          <p:nvPr/>
+        </p:nvSpPr>
+        <p:spPr>
+          <a:xfrm>
+            <a:off x="8964168" y="3322015"/>
+            <a:ext cx="816864" cy="146304"/>
+          </a:xfrm>
+          <a:prstGeom prst="rect">
+            <a:avLst/>
+          </a:prstGeom>
+          <a:noFill/>
+          <a:ln/>
+        </p:spPr>
+        <p:txBody>
+          <a:bodyPr wrap="square" lIns="0" tIns="0" rIns="0" bIns="0" rtlCol="0" anchor="ctr">
+            <a:normAutofit/>
+          </a:bodyPr>
+          <a:lstStyle/>
+          <a:p>
+            <a:pPr algn="ctr" indent="0" marL="0">
+              <a:buNone/>
+            </a:pPr>
+            <a:r>
+              <a:rPr lang="en-US" sz="880" b="1" dirty="0">
+                <a:solidFill>
+                  <a:srgbClr val="FFFFFF"/>
+                </a:solidFill>
+                <a:latin typeface="Aptos" pitchFamily="34" charset="0"/>
+                <a:ea typeface="Aptos" pitchFamily="34" charset="-122"/>
+                <a:cs typeface="Aptos" pitchFamily="34" charset="-120"/>
+              </a:rPr>
+              <a:t>Analysis</a:t>
+            </a:r>
+            <a:endParaRPr lang="en-US" sz="880" dirty="0"/>
+          </a:p>
+        </p:txBody>
+      </p:sp>
+      <p:sp>
+        <p:nvSpPr>
+          <p:cNvPr id="21" name="Shape 19"/>
+          <p:cNvSpPr/>
+          <p:nvPr/>
+        </p:nvSpPr>
+        <p:spPr>
+          <a:xfrm>
+            <a:off x="9982200" y="3248863"/>
+            <a:ext cx="890016" cy="301752"/>
+          </a:xfrm>
+          <a:prstGeom prst="roundRect">
+            <a:avLst>
+              <a:gd name="adj" fmla="val 24242"/>
+            </a:avLst>
+          </a:prstGeom>
+          <a:solidFill>
+            <a:srgbClr val="6A4CA3"/>
+          </a:solidFill>
+          <a:ln w="12700">
+            <a:solidFill>
+              <a:srgbClr val="6A4CA3"/>
+            </a:solidFill>
+            <a:prstDash val="solid"/>
+          </a:ln>
+        </p:spPr>
+      </p:sp>
+      <p:sp>
+        <p:nvSpPr>
+          <p:cNvPr id="22" name="Text 20"/>
+          <p:cNvSpPr/>
+          <p:nvPr/>
+        </p:nvSpPr>
+        <p:spPr>
+          <a:xfrm>
+            <a:off x="10018776" y="3322015"/>
+            <a:ext cx="816864" cy="146304"/>
+          </a:xfrm>
+          <a:prstGeom prst="rect">
+            <a:avLst/>
+          </a:prstGeom>
+          <a:noFill/>
+          <a:ln/>
+        </p:spPr>
+        <p:txBody>
+          <a:bodyPr wrap="square" lIns="0" tIns="0" rIns="0" bIns="0" rtlCol="0" anchor="ctr">
+            <a:normAutofit/>
+          </a:bodyPr>
+          <a:lstStyle/>
+          <a:p>
+            <a:pPr algn="ctr" indent="0" marL="0">
+              <a:buNone/>
+            </a:pPr>
+            <a:r>
+              <a:rPr lang="en-US" sz="880" b="1" dirty="0">
+                <a:solidFill>
+                  <a:srgbClr val="FFFFFF"/>
+                </a:solidFill>
+                <a:latin typeface="Aptos" pitchFamily="34" charset="0"/>
+                <a:ea typeface="Aptos" pitchFamily="34" charset="-122"/>
+                <a:cs typeface="Aptos" pitchFamily="34" charset="-120"/>
+              </a:rPr>
+              <a:t>Review</a:t>
+            </a:r>
+            <a:endParaRPr lang="en-US" sz="880" dirty="0"/>
+          </a:p>
+        </p:txBody>
+      </p:sp>
+      <p:sp>
+        <p:nvSpPr>
+          <p:cNvPr id="23" name="Text 21"/>
+          <p:cNvSpPr/>
+          <p:nvPr/>
+        </p:nvSpPr>
+        <p:spPr>
+          <a:xfrm>
+            <a:off x="7854696" y="3742639"/>
+            <a:ext cx="3035808" cy="158191"/>
+          </a:xfrm>
+          <a:prstGeom prst="rect">
+            <a:avLst/>
+          </a:prstGeom>
+          <a:noFill/>
+          <a:ln/>
+        </p:spPr>
+        <p:txBody>
+          <a:bodyPr wrap="square" lIns="254" tIns="254" rIns="254" bIns="254" rtlCol="0" anchor="t">
+            <a:normAutofit/>
+          </a:bodyPr>
+          <a:lstStyle/>
+          <a:p>
+            <a:pPr indent="0" marL="0">
+              <a:buNone/>
+            </a:pPr>
+            <a:r>
+              <a:rPr lang="en-US" sz="1120" dirty="0">
+                <a:solidFill>
+                  <a:srgbClr val="17364A"/>
+                </a:solidFill>
+                <a:latin typeface="Aptos" pitchFamily="34" charset="0"/>
+                <a:ea typeface="Aptos" pitchFamily="34" charset="-122"/>
+                <a:cs typeface="Aptos" pitchFamily="34" charset="-120"/>
+              </a:rPr>
+              <a:t>The important handoff is not from data to AI; it is from analysis to accountable human review.</a:t>
+            </a:r>
+            <a:endParaRPr lang="en-US" sz="1120" dirty="0"/>
+          </a:p>
+        </p:txBody>
+      </p:sp>
+      <p:sp>
+        <p:nvSpPr>
+          <p:cNvPr id="24" name="Shape 22"/>
+          <p:cNvSpPr/>
+          <p:nvPr/>
+        </p:nvSpPr>
+        <p:spPr>
+          <a:xfrm>
+            <a:off x="7635240" y="4184294"/>
+            <a:ext cx="3474720" cy="1466698"/>
+          </a:xfrm>
+          <a:prstGeom prst="roundRect">
+            <a:avLst>
+              <a:gd name="adj" fmla="val 7481"/>
             </a:avLst>
           </a:prstGeom>
           <a:solidFill>
@@ -17516,13 +18164,13 @@
       </p:sp>
       <p:sp>
         <p:nvSpPr>
-          <p:cNvPr id="17" name="Text 15"/>
-          <p:cNvSpPr/>
-          <p:nvPr/>
-        </p:nvSpPr>
-        <p:spPr>
-          <a:xfrm>
-            <a:off x="7799832" y="4645152"/>
+          <p:cNvPr id="25" name="Text 23"/>
+          <p:cNvSpPr/>
+          <p:nvPr/>
+        </p:nvSpPr>
+        <p:spPr>
+          <a:xfrm>
+            <a:off x="7799832" y="4330598"/>
             <a:ext cx="3145536" cy="256032"/>
           </a:xfrm>
           <a:prstGeom prst="rect">
@@ -17555,14 +18203,14 @@
       </p:sp>
       <p:sp>
         <p:nvSpPr>
-          <p:cNvPr id="18" name="Text 16"/>
-          <p:cNvSpPr/>
-          <p:nvPr/>
-        </p:nvSpPr>
-        <p:spPr>
-          <a:xfrm>
-            <a:off x="7799832" y="4974336"/>
-            <a:ext cx="3145536" cy="576072"/>
+          <p:cNvPr id="26" name="Text 24"/>
+          <p:cNvSpPr/>
+          <p:nvPr/>
+        </p:nvSpPr>
+        <p:spPr>
+          <a:xfrm>
+            <a:off x="7799832" y="4659782"/>
+            <a:ext cx="3145536" cy="899770"/>
           </a:xfrm>
           <a:prstGeom prst="rect">
             <a:avLst/>
@@ -17588,7 +18236,7 @@
                 <a:ea typeface="Aptos" pitchFamily="34" charset="-122"/>
                 <a:cs typeface="Aptos" pitchFamily="34" charset="-120"/>
               </a:rPr>
-              <a:t>Connect the concept to data quality, model performance, validation evidence, monitoring measures, and decisions that.</a:t>
+              <a:t>Connect the concept to data quality, model performance, validation evidence, monitoring measures, and decisions that remain under human control.</a:t>
             </a:r>
             <a:endParaRPr lang="en-US" sz="1320" dirty="0"/>
           </a:p>
@@ -17957,11 +18605,11 @@
         <p:spPr>
           <a:xfrm>
             <a:off x="7635240" y="1325880"/>
-            <a:ext cx="3474720" cy="1325880"/>
+            <a:ext cx="3474720" cy="1207008"/>
           </a:xfrm>
           <a:prstGeom prst="roundRect">
             <a:avLst>
-              <a:gd name="adj" fmla="val 8276"/>
+              <a:gd name="adj" fmla="val 9091"/>
             </a:avLst>
           </a:prstGeom>
           <a:solidFill>
@@ -18023,7 +18671,7 @@
         <p:spPr>
           <a:xfrm>
             <a:off x="7799832" y="1801368"/>
-            <a:ext cx="3145536" cy="758952"/>
+            <a:ext cx="3145536" cy="640080"/>
           </a:xfrm>
           <a:prstGeom prst="rect">
             <a:avLst/>
@@ -18063,12 +18711,12 @@
         </p:nvSpPr>
         <p:spPr>
           <a:xfrm>
-            <a:off x="7635240" y="2788920"/>
-            <a:ext cx="3474720" cy="1536192"/>
+            <a:off x="7635240" y="2670048"/>
+            <a:ext cx="3474720" cy="1377086"/>
           </a:xfrm>
           <a:prstGeom prst="roundRect">
             <a:avLst>
-              <a:gd name="adj" fmla="val 7143"/>
+              <a:gd name="adj" fmla="val 7968"/>
             </a:avLst>
           </a:prstGeom>
           <a:solidFill>
@@ -18090,7 +18738,7 @@
         </p:nvSpPr>
         <p:spPr>
           <a:xfrm>
-            <a:off x="7799832" y="2935224"/>
+            <a:off x="7799832" y="2816352"/>
             <a:ext cx="3145536" cy="256032"/>
           </a:xfrm>
           <a:prstGeom prst="rect">
@@ -18129,8 +18777,8 @@
         </p:nvSpPr>
         <p:spPr>
           <a:xfrm>
-            <a:off x="7818120" y="3300984"/>
-            <a:ext cx="3090672" cy="877824"/>
+            <a:off x="7818120" y="3182112"/>
+            <a:ext cx="3090672" cy="718718"/>
           </a:xfrm>
           <a:prstGeom prst="rect">
             <a:avLst/>
@@ -18204,12 +18852,12 @@
         </p:nvSpPr>
         <p:spPr>
           <a:xfrm>
-            <a:off x="7635240" y="4498848"/>
-            <a:ext cx="3474720" cy="1143000"/>
+            <a:off x="7635240" y="4184294"/>
+            <a:ext cx="3474720" cy="1466698"/>
           </a:xfrm>
           <a:prstGeom prst="roundRect">
             <a:avLst>
-              <a:gd name="adj" fmla="val 9600"/>
+              <a:gd name="adj" fmla="val 7481"/>
             </a:avLst>
           </a:prstGeom>
           <a:solidFill>
@@ -18231,7 +18879,7 @@
         </p:nvSpPr>
         <p:spPr>
           <a:xfrm>
-            <a:off x="7799832" y="4645152"/>
+            <a:off x="7799832" y="4330598"/>
             <a:ext cx="3145536" cy="256032"/>
           </a:xfrm>
           <a:prstGeom prst="rect">
@@ -18270,8 +18918,8 @@
         </p:nvSpPr>
         <p:spPr>
           <a:xfrm>
-            <a:off x="7799832" y="4974336"/>
-            <a:ext cx="3145536" cy="576072"/>
+            <a:off x="7799832" y="4659782"/>
+            <a:ext cx="3145536" cy="899770"/>
           </a:xfrm>
           <a:prstGeom prst="rect">
             <a:avLst/>
@@ -18297,7 +18945,7 @@
                 <a:ea typeface="Aptos" pitchFamily="34" charset="-122"/>
                 <a:cs typeface="Aptos" pitchFamily="34" charset="-120"/>
               </a:rPr>
-              <a:t>Connect the concept to data quality, model performance, validation evidence, monitoring measures, and decisions that.</a:t>
+              <a:t>Connect the concept to data quality, model performance, validation evidence, monitoring measures, and decisions that remain under human control.</a:t>
             </a:r>
             <a:endParaRPr lang="en-US" sz="1320" dirty="0"/>
           </a:p>

--- a/downloads/presentations/modules/arc-240.pptx
+++ b/downloads/presentations/modules/arc-240.pptx
@@ -3432,8 +3432,8 @@
         </p:nvSpPr>
         <p:spPr>
           <a:xfrm>
-            <a:off x="868680" y="1508760"/>
-            <a:ext cx="6309360" cy="4160520"/>
+            <a:off x="822960" y="1463040"/>
+            <a:ext cx="6565392" cy="4343400"/>
           </a:xfrm>
           <a:prstGeom prst="rect">
             <a:avLst/>
@@ -3451,7 +3451,7 @@
               <a:buNone/>
             </a:pPr>
             <a:r>
-              <a:rPr lang="en-US" sz="2100" dirty="0">
+              <a:rPr lang="en-US" sz="1920" dirty="0">
                 <a:solidFill>
                   <a:srgbClr val="003A63"/>
                 </a:solidFill>
@@ -3461,14 +3461,14 @@
               </a:rPr>
               <a:t>• UCUM.</a:t>
             </a:r>
-            <a:endParaRPr lang="en-US" sz="2100" dirty="0"/>
-          </a:p>
-          <a:p>
-            <a:pPr indent="0" marL="0">
-              <a:buNone/>
-            </a:pPr>
-            <a:r>
-              <a:rPr lang="en-US" sz="2100" dirty="0">
+            <a:endParaRPr lang="en-US" sz="1920" dirty="0"/>
+          </a:p>
+          <a:p>
+            <a:pPr indent="0" marL="0">
+              <a:buNone/>
+            </a:pPr>
+            <a:r>
+              <a:rPr lang="en-US" sz="1920" dirty="0">
                 <a:solidFill>
                   <a:srgbClr val="003A63"/>
                 </a:solidFill>
@@ -3478,14 +3478,14 @@
               </a:rPr>
               <a:t>• UCUM is a standard for units of measure.</a:t>
             </a:r>
-            <a:endParaRPr lang="en-US" sz="2100" dirty="0"/>
-          </a:p>
-          <a:p>
-            <a:pPr indent="0" marL="0">
-              <a:buNone/>
-            </a:pPr>
-            <a:r>
-              <a:rPr lang="en-US" sz="2100" dirty="0">
+            <a:endParaRPr lang="en-US" sz="1920" dirty="0"/>
+          </a:p>
+          <a:p>
+            <a:pPr indent="0" marL="0">
+              <a:buNone/>
+            </a:pPr>
+            <a:r>
+              <a:rPr lang="en-US" sz="1920" dirty="0">
                 <a:solidFill>
                   <a:srgbClr val="003A63"/>
                 </a:solidFill>
@@ -3493,9 +3493,9 @@
                 <a:ea typeface="Aptos" pitchFamily="34" charset="-122"/>
                 <a:cs typeface="Aptos" pitchFamily="34" charset="-120"/>
               </a:rPr>
-              <a:t>• Unit consistency is essential when interpreting quantitative results, thresholds, reference.</a:t>
-            </a:r>
-            <a:endParaRPr lang="en-US" sz="2100" dirty="0"/>
+              <a:t>• Unit consistency is essential when interpreting quantitative results,.</a:t>
+            </a:r>
+            <a:endParaRPr lang="en-US" sz="1920" dirty="0"/>
           </a:p>
         </p:txBody>
       </p:sp>
@@ -3507,12 +3507,12 @@
         </p:nvSpPr>
         <p:spPr>
           <a:xfrm>
-            <a:off x="7635240" y="1325880"/>
-            <a:ext cx="3474720" cy="1207008"/>
+            <a:off x="7543800" y="1325880"/>
+            <a:ext cx="3611880" cy="1261872"/>
           </a:xfrm>
           <a:prstGeom prst="roundRect">
             <a:avLst>
-              <a:gd name="adj" fmla="val 9091"/>
+              <a:gd name="adj" fmla="val 8696"/>
             </a:avLst>
           </a:prstGeom>
           <a:solidFill>
@@ -3534,8 +3534,8 @@
         </p:nvSpPr>
         <p:spPr>
           <a:xfrm>
-            <a:off x="7799832" y="1472184"/>
-            <a:ext cx="3145536" cy="256032"/>
+            <a:off x="7708392" y="1453896"/>
+            <a:ext cx="3282696" cy="228600"/>
           </a:xfrm>
           <a:prstGeom prst="rect">
             <a:avLst/>
@@ -3551,7 +3551,7 @@
               <a:buNone/>
             </a:pPr>
             <a:r>
-              <a:rPr lang="en-US" sz="1300" b="1" dirty="0">
+              <a:rPr lang="en-US" sz="1220" b="1" dirty="0">
                 <a:solidFill>
                   <a:srgbClr val="0068B7"/>
                 </a:solidFill>
@@ -3561,7 +3561,7 @@
               </a:rPr>
               <a:t>Data decision</a:t>
             </a:r>
-            <a:endParaRPr lang="en-US" sz="1300" dirty="0"/>
+            <a:endParaRPr lang="en-US" sz="1220" dirty="0"/>
           </a:p>
         </p:txBody>
       </p:sp>
@@ -3573,8 +3573,8 @@
         </p:nvSpPr>
         <p:spPr>
           <a:xfrm>
-            <a:off x="7799832" y="1801368"/>
-            <a:ext cx="3145536" cy="640080"/>
+            <a:off x="7708392" y="1764792"/>
+            <a:ext cx="3282696" cy="749808"/>
           </a:xfrm>
           <a:prstGeom prst="rect">
             <a:avLst/>
@@ -3592,7 +3592,7 @@
               <a:buNone/>
             </a:pPr>
             <a:r>
-              <a:rPr lang="en-US" sz="1320" dirty="0">
+              <a:rPr lang="en-US" sz="1220" dirty="0">
                 <a:solidFill>
                   <a:srgbClr val="17364A"/>
                 </a:solidFill>
@@ -3602,7 +3602,7 @@
               </a:rPr>
               <a:t>UCUM.</a:t>
             </a:r>
-            <a:endParaRPr lang="en-US" sz="1320" dirty="0"/>
+            <a:endParaRPr lang="en-US" sz="1220" dirty="0"/>
           </a:p>
         </p:txBody>
       </p:sp>
@@ -3614,12 +3614,12 @@
         </p:nvSpPr>
         <p:spPr>
           <a:xfrm>
-            <a:off x="7635240" y="2670048"/>
-            <a:ext cx="3474720" cy="1377086"/>
+            <a:off x="7543800" y="2724912"/>
+            <a:ext cx="3611880" cy="1527048"/>
           </a:xfrm>
           <a:prstGeom prst="roundRect">
             <a:avLst>
-              <a:gd name="adj" fmla="val 7968"/>
+              <a:gd name="adj" fmla="val 7186"/>
             </a:avLst>
           </a:prstGeom>
           <a:solidFill>
@@ -3641,8 +3641,8 @@
         </p:nvSpPr>
         <p:spPr>
           <a:xfrm>
-            <a:off x="7799832" y="2816352"/>
-            <a:ext cx="3145536" cy="256032"/>
+            <a:off x="7708392" y="2852928"/>
+            <a:ext cx="3282696" cy="228600"/>
           </a:xfrm>
           <a:prstGeom prst="rect">
             <a:avLst/>
@@ -3658,7 +3658,7 @@
               <a:buNone/>
             </a:pPr>
             <a:r>
-              <a:rPr lang="en-US" sz="1300" b="1" dirty="0">
+              <a:rPr lang="en-US" sz="1220" b="1" dirty="0">
                 <a:solidFill>
                   <a:srgbClr val="0068B7"/>
                 </a:solidFill>
@@ -3668,7 +3668,7 @@
               </a:rPr>
               <a:t>Concept checkpoints</a:t>
             </a:r>
-            <a:endParaRPr lang="en-US" sz="1300" dirty="0"/>
+            <a:endParaRPr lang="en-US" sz="1220" dirty="0"/>
           </a:p>
         </p:txBody>
       </p:sp>
@@ -3680,8 +3680,8 @@
         </p:nvSpPr>
         <p:spPr>
           <a:xfrm>
-            <a:off x="7818120" y="3182112"/>
-            <a:ext cx="3090672" cy="718718"/>
+            <a:off x="7726680" y="3182112"/>
+            <a:ext cx="3227832" cy="960120"/>
           </a:xfrm>
           <a:prstGeom prst="rect">
             <a:avLst/>
@@ -3699,7 +3699,7 @@
               <a:buNone/>
             </a:pPr>
             <a:r>
-              <a:rPr lang="en-US" sz="1220" dirty="0">
+              <a:rPr lang="en-US" sz="1140" dirty="0">
                 <a:solidFill>
                   <a:srgbClr val="17364A"/>
                 </a:solidFill>
@@ -3707,16 +3707,16 @@
                 <a:ea typeface="Aptos" pitchFamily="34" charset="-122"/>
                 <a:cs typeface="Aptos" pitchFamily="34" charset="-120"/>
               </a:rPr>
-              <a:t>Unit consistency is essential when interpreting quantitative.</a:t>
-            </a:r>
-            <a:endParaRPr lang="en-US" sz="1220" dirty="0"/>
-          </a:p>
-          <a:p>
-            <a:pPr indent="0" marL="0">
-              <a:buNone/>
-            </a:pPr>
-            <a:r>
-              <a:rPr lang="en-US" sz="1220" dirty="0">
+              <a:t>Unit consistency is essential when interpreting.</a:t>
+            </a:r>
+            <a:endParaRPr lang="en-US" sz="1140" dirty="0"/>
+          </a:p>
+          <a:p>
+            <a:pPr indent="0" marL="0">
+              <a:buNone/>
+            </a:pPr>
+            <a:r>
+              <a:rPr lang="en-US" sz="1140" dirty="0">
                 <a:solidFill>
                   <a:srgbClr val="17364A"/>
                 </a:solidFill>
@@ -3726,14 +3726,14 @@
               </a:rPr>
               <a:t>Reportable condition mapping.</a:t>
             </a:r>
-            <a:endParaRPr lang="en-US" sz="1220" dirty="0"/>
-          </a:p>
-          <a:p>
-            <a:pPr indent="0" marL="0">
-              <a:buNone/>
-            </a:pPr>
-            <a:r>
-              <a:rPr lang="en-US" sz="1220" dirty="0">
+            <a:endParaRPr lang="en-US" sz="1140" dirty="0"/>
+          </a:p>
+          <a:p>
+            <a:pPr indent="0" marL="0">
+              <a:buNone/>
+            </a:pPr>
+            <a:r>
+              <a:rPr lang="en-US" sz="1140" dirty="0">
                 <a:solidFill>
                   <a:srgbClr val="17364A"/>
                 </a:solidFill>
@@ -3741,9 +3741,9 @@
                 <a:ea typeface="Aptos" pitchFamily="34" charset="-122"/>
                 <a:cs typeface="Aptos" pitchFamily="34" charset="-120"/>
               </a:rPr>
-              <a:t>Reportable condition mapping links laboratory tests and results to.</a:t>
-            </a:r>
-            <a:endParaRPr lang="en-US" sz="1220" dirty="0"/>
+              <a:t>Reportable condition mapping links laboratory.</a:t>
+            </a:r>
+            <a:endParaRPr lang="en-US" sz="1140" dirty="0"/>
           </a:p>
         </p:txBody>
       </p:sp>
@@ -3755,12 +3755,12 @@
         </p:nvSpPr>
         <p:spPr>
           <a:xfrm>
-            <a:off x="7635240" y="4184294"/>
-            <a:ext cx="3474720" cy="1466698"/>
+            <a:off x="7543800" y="4389120"/>
+            <a:ext cx="3611880" cy="1261872"/>
           </a:xfrm>
           <a:prstGeom prst="roundRect">
             <a:avLst>
-              <a:gd name="adj" fmla="val 7481"/>
+              <a:gd name="adj" fmla="val 8696"/>
             </a:avLst>
           </a:prstGeom>
           <a:solidFill>
@@ -3782,8 +3782,8 @@
         </p:nvSpPr>
         <p:spPr>
           <a:xfrm>
-            <a:off x="7799832" y="4330598"/>
-            <a:ext cx="3145536" cy="256032"/>
+            <a:off x="7708392" y="4517136"/>
+            <a:ext cx="3282696" cy="228600"/>
           </a:xfrm>
           <a:prstGeom prst="rect">
             <a:avLst/>
@@ -3799,7 +3799,7 @@
               <a:buNone/>
             </a:pPr>
             <a:r>
-              <a:rPr lang="en-US" sz="1300" b="1" dirty="0">
+              <a:rPr lang="en-US" sz="1220" b="1" dirty="0">
                 <a:solidFill>
                   <a:srgbClr val="0068B7"/>
                 </a:solidFill>
@@ -3809,7 +3809,7 @@
               </a:rPr>
               <a:t>How to validate</a:t>
             </a:r>
-            <a:endParaRPr lang="en-US" sz="1300" dirty="0"/>
+            <a:endParaRPr lang="en-US" sz="1220" dirty="0"/>
           </a:p>
         </p:txBody>
       </p:sp>
@@ -3821,8 +3821,8 @@
         </p:nvSpPr>
         <p:spPr>
           <a:xfrm>
-            <a:off x="7799832" y="4659782"/>
-            <a:ext cx="3145536" cy="899770"/>
+            <a:off x="7708392" y="4828032"/>
+            <a:ext cx="3282696" cy="749808"/>
           </a:xfrm>
           <a:prstGeom prst="rect">
             <a:avLst/>
@@ -3840,7 +3840,7 @@
               <a:buNone/>
             </a:pPr>
             <a:r>
-              <a:rPr lang="en-US" sz="1320" dirty="0">
+              <a:rPr lang="en-US" sz="1220" dirty="0">
                 <a:solidFill>
                   <a:srgbClr val="17364A"/>
                 </a:solidFill>
@@ -3848,9 +3848,9 @@
                 <a:ea typeface="Aptos" pitchFamily="34" charset="-122"/>
                 <a:cs typeface="Aptos" pitchFamily="34" charset="-120"/>
               </a:rPr>
-              <a:t>Connect the concept to data quality, model performance, validation evidence, monitoring measures, and decisions that remain under human control.</a:t>
-            </a:r>
-            <a:endParaRPr lang="en-US" sz="1320" dirty="0"/>
+              <a:t>Connect the concept to data quality, model performance, validation evidence,.</a:t>
+            </a:r>
+            <a:endParaRPr lang="en-US" sz="1220" dirty="0"/>
           </a:p>
         </p:txBody>
       </p:sp>
@@ -4141,8 +4141,8 @@
         </p:nvSpPr>
         <p:spPr>
           <a:xfrm>
-            <a:off x="868680" y="1508760"/>
-            <a:ext cx="6309360" cy="4160520"/>
+            <a:off x="822960" y="1463040"/>
+            <a:ext cx="6565392" cy="4343400"/>
           </a:xfrm>
           <a:prstGeom prst="rect">
             <a:avLst/>
@@ -4160,7 +4160,7 @@
               <a:buNone/>
             </a:pPr>
             <a:r>
-              <a:rPr lang="en-US" sz="2100" dirty="0">
+              <a:rPr lang="en-US" sz="1920" dirty="0">
                 <a:solidFill>
                   <a:srgbClr val="003A63"/>
                 </a:solidFill>
@@ -4168,16 +4168,16 @@
                 <a:ea typeface="Aptos" pitchFamily="34" charset="-122"/>
                 <a:cs typeface="Aptos" pitchFamily="34" charset="-120"/>
               </a:rPr>
-              <a:t>• An AI tool that summarizes incoming lab reports for disease investigators may need to identify.</a:t>
-            </a:r>
-            <a:endParaRPr lang="en-US" sz="2100" dirty="0"/>
-          </a:p>
-          <a:p>
-            <a:pPr indent="0" marL="0">
-              <a:buNone/>
-            </a:pPr>
-            <a:r>
-              <a:rPr lang="en-US" sz="2100" dirty="0">
+              <a:t>• An AI tool that summarizes incoming lab reports for disease investigators.</a:t>
+            </a:r>
+            <a:endParaRPr lang="en-US" sz="1920" dirty="0"/>
+          </a:p>
+          <a:p>
+            <a:pPr indent="0" marL="0">
+              <a:buNone/>
+            </a:pPr>
+            <a:r>
+              <a:rPr lang="en-US" sz="1920" dirty="0">
                 <a:solidFill>
                   <a:srgbClr val="003A63"/>
                 </a:solidFill>
@@ -4185,16 +4185,16 @@
                 <a:ea typeface="Aptos" pitchFamily="34" charset="-122"/>
                 <a:cs typeface="Aptos" pitchFamily="34" charset="-120"/>
               </a:rPr>
-              <a:t>• If a local test code is mapped incorrectly, the summary may imply evidence for the wrong.</a:t>
-            </a:r>
-            <a:endParaRPr lang="en-US" sz="2100" dirty="0"/>
-          </a:p>
-          <a:p>
-            <a:pPr indent="0" marL="0">
-              <a:buNone/>
-            </a:pPr>
-            <a:r>
-              <a:rPr lang="en-US" sz="2100" dirty="0">
+              <a:t>• If a local test code is mapped incorrectly, the summary may imply evidence.</a:t>
+            </a:r>
+            <a:endParaRPr lang="en-US" sz="1920" dirty="0"/>
+          </a:p>
+          <a:p>
+            <a:pPr indent="0" marL="0">
+              <a:buNone/>
+            </a:pPr>
+            <a:r>
+              <a:rPr lang="en-US" sz="1920" dirty="0">
                 <a:solidFill>
                   <a:srgbClr val="003A63"/>
                 </a:solidFill>
@@ -4204,7 +4204,7 @@
               </a:rPr>
               <a:t>• If units are missing, a quantitative result may be uninterpretable.</a:t>
             </a:r>
-            <a:endParaRPr lang="en-US" sz="2100" dirty="0"/>
+            <a:endParaRPr lang="en-US" sz="1920" dirty="0"/>
           </a:p>
         </p:txBody>
       </p:sp>
@@ -4216,12 +4216,12 @@
         </p:nvSpPr>
         <p:spPr>
           <a:xfrm>
-            <a:off x="7635240" y="1325880"/>
-            <a:ext cx="3474720" cy="1255471"/>
+            <a:off x="7543800" y="1325880"/>
+            <a:ext cx="3611880" cy="1261872"/>
           </a:xfrm>
           <a:prstGeom prst="roundRect">
             <a:avLst>
-              <a:gd name="adj" fmla="val 8740"/>
+              <a:gd name="adj" fmla="val 8696"/>
             </a:avLst>
           </a:prstGeom>
           <a:solidFill>
@@ -4243,8 +4243,8 @@
         </p:nvSpPr>
         <p:spPr>
           <a:xfrm>
-            <a:off x="7799832" y="1472184"/>
-            <a:ext cx="3145536" cy="256032"/>
+            <a:off x="7708392" y="1453896"/>
+            <a:ext cx="3282696" cy="228600"/>
           </a:xfrm>
           <a:prstGeom prst="rect">
             <a:avLst/>
@@ -4260,7 +4260,7 @@
               <a:buNone/>
             </a:pPr>
             <a:r>
-              <a:rPr lang="en-US" sz="1300" b="1" dirty="0">
+              <a:rPr lang="en-US" sz="1220" b="1" dirty="0">
                 <a:solidFill>
                   <a:srgbClr val="0068B7"/>
                 </a:solidFill>
@@ -4270,7 +4270,7 @@
               </a:rPr>
               <a:t>Data decision</a:t>
             </a:r>
-            <a:endParaRPr lang="en-US" sz="1300" dirty="0"/>
+            <a:endParaRPr lang="en-US" sz="1220" dirty="0"/>
           </a:p>
         </p:txBody>
       </p:sp>
@@ -4282,8 +4282,8 @@
         </p:nvSpPr>
         <p:spPr>
           <a:xfrm>
-            <a:off x="7799832" y="1801368"/>
-            <a:ext cx="3145536" cy="688543"/>
+            <a:off x="7708392" y="1764792"/>
+            <a:ext cx="3282696" cy="749808"/>
           </a:xfrm>
           <a:prstGeom prst="rect">
             <a:avLst/>
@@ -4301,7 +4301,7 @@
               <a:buNone/>
             </a:pPr>
             <a:r>
-              <a:rPr lang="en-US" sz="1320" dirty="0">
+              <a:rPr lang="en-US" sz="1220" dirty="0">
                 <a:solidFill>
                   <a:srgbClr val="17364A"/>
                 </a:solidFill>
@@ -4309,9 +4309,9 @@
                 <a:ea typeface="Aptos" pitchFamily="34" charset="-122"/>
                 <a:cs typeface="Aptos" pitchFamily="34" charset="-120"/>
               </a:rPr>
-              <a:t>An AI tool that summarizes incoming lab reports for disease investigators may need to identify the test.</a:t>
-            </a:r>
-            <a:endParaRPr lang="en-US" sz="1320" dirty="0"/>
+              <a:t>An AI tool that summarizes incoming lab reports for disease investigators may.</a:t>
+            </a:r>
+            <a:endParaRPr lang="en-US" sz="1220" dirty="0"/>
           </a:p>
         </p:txBody>
       </p:sp>
@@ -4323,12 +4323,12 @@
         </p:nvSpPr>
         <p:spPr>
           <a:xfrm>
-            <a:off x="7635240" y="2718511"/>
-            <a:ext cx="3474720" cy="1328623"/>
+            <a:off x="7543800" y="2724912"/>
+            <a:ext cx="3611880" cy="1527048"/>
           </a:xfrm>
           <a:prstGeom prst="roundRect">
             <a:avLst>
-              <a:gd name="adj" fmla="val 8259"/>
+              <a:gd name="adj" fmla="val 7186"/>
             </a:avLst>
           </a:prstGeom>
           <a:solidFill>
@@ -4350,8 +4350,8 @@
         </p:nvSpPr>
         <p:spPr>
           <a:xfrm>
-            <a:off x="7799832" y="2864815"/>
-            <a:ext cx="3145536" cy="256032"/>
+            <a:off x="7708392" y="2852928"/>
+            <a:ext cx="3282696" cy="228600"/>
           </a:xfrm>
           <a:prstGeom prst="rect">
             <a:avLst/>
@@ -4367,7 +4367,7 @@
               <a:buNone/>
             </a:pPr>
             <a:r>
-              <a:rPr lang="en-US" sz="1300" b="1" dirty="0">
+              <a:rPr lang="en-US" sz="1220" b="1" dirty="0">
                 <a:solidFill>
                   <a:srgbClr val="0068B7"/>
                 </a:solidFill>
@@ -4377,7 +4377,7 @@
               </a:rPr>
               <a:t>Concept checkpoints</a:t>
             </a:r>
-            <a:endParaRPr lang="en-US" sz="1300" dirty="0"/>
+            <a:endParaRPr lang="en-US" sz="1220" dirty="0"/>
           </a:p>
         </p:txBody>
       </p:sp>
@@ -4389,8 +4389,8 @@
         </p:nvSpPr>
         <p:spPr>
           <a:xfrm>
-            <a:off x="7818120" y="3230575"/>
-            <a:ext cx="3090672" cy="670255"/>
+            <a:off x="7726680" y="3182112"/>
+            <a:ext cx="3227832" cy="960120"/>
           </a:xfrm>
           <a:prstGeom prst="rect">
             <a:avLst/>
@@ -4408,7 +4408,7 @@
               <a:buNone/>
             </a:pPr>
             <a:r>
-              <a:rPr lang="en-US" sz="1220" dirty="0">
+              <a:rPr lang="en-US" sz="1140" dirty="0">
                 <a:solidFill>
                   <a:srgbClr val="17364A"/>
                 </a:solidFill>
@@ -4416,16 +4416,16 @@
                 <a:ea typeface="Aptos" pitchFamily="34" charset="-122"/>
                 <a:cs typeface="Aptos" pitchFamily="34" charset="-120"/>
               </a:rPr>
-              <a:t>An AI tool that summarizes incoming lab reports for disease.</a:t>
-            </a:r>
-            <a:endParaRPr lang="en-US" sz="1220" dirty="0"/>
-          </a:p>
-          <a:p>
-            <a:pPr indent="0" marL="0">
-              <a:buNone/>
-            </a:pPr>
-            <a:r>
-              <a:rPr lang="en-US" sz="1220" dirty="0">
+              <a:t>An AI tool that summarizes incoming lab reports.</a:t>
+            </a:r>
+            <a:endParaRPr lang="en-US" sz="1140" dirty="0"/>
+          </a:p>
+          <a:p>
+            <a:pPr indent="0" marL="0">
+              <a:buNone/>
+            </a:pPr>
+            <a:r>
+              <a:rPr lang="en-US" sz="1140" dirty="0">
                 <a:solidFill>
                   <a:srgbClr val="17364A"/>
                 </a:solidFill>
@@ -4433,16 +4433,16 @@
                 <a:ea typeface="Aptos" pitchFamily="34" charset="-122"/>
                 <a:cs typeface="Aptos" pitchFamily="34" charset="-120"/>
               </a:rPr>
-              <a:t>If the specimen source is omitted, the epidemiologic meaning of.</a:t>
-            </a:r>
-            <a:endParaRPr lang="en-US" sz="1220" dirty="0"/>
-          </a:p>
-          <a:p>
-            <a:pPr indent="0" marL="0">
-              <a:buNone/>
-            </a:pPr>
-            <a:r>
-              <a:rPr lang="en-US" sz="1220" dirty="0">
+              <a:t>If the specimen source is omitted, the.</a:t>
+            </a:r>
+            <a:endParaRPr lang="en-US" sz="1140" dirty="0"/>
+          </a:p>
+          <a:p>
+            <a:pPr indent="0" marL="0">
+              <a:buNone/>
+            </a:pPr>
+            <a:r>
+              <a:rPr lang="en-US" sz="1140" dirty="0">
                 <a:solidFill>
                   <a:srgbClr val="17364A"/>
                 </a:solidFill>
@@ -4450,9 +4450,9 @@
                 <a:ea typeface="Aptos" pitchFamily="34" charset="-122"/>
                 <a:cs typeface="Aptos" pitchFamily="34" charset="-120"/>
               </a:rPr>
-              <a:t>A second example is anomaly detection using laboratory trends.</a:t>
-            </a:r>
-            <a:endParaRPr lang="en-US" sz="1220" dirty="0"/>
+              <a:t>A second example is anomaly detection using.</a:t>
+            </a:r>
+            <a:endParaRPr lang="en-US" sz="1140" dirty="0"/>
           </a:p>
         </p:txBody>
       </p:sp>
@@ -4464,12 +4464,12 @@
         </p:nvSpPr>
         <p:spPr>
           <a:xfrm>
-            <a:off x="7635240" y="4184294"/>
-            <a:ext cx="3474720" cy="1466698"/>
+            <a:off x="7543800" y="4389120"/>
+            <a:ext cx="3611880" cy="1261872"/>
           </a:xfrm>
           <a:prstGeom prst="roundRect">
             <a:avLst>
-              <a:gd name="adj" fmla="val 7481"/>
+              <a:gd name="adj" fmla="val 8696"/>
             </a:avLst>
           </a:prstGeom>
           <a:solidFill>
@@ -4491,8 +4491,8 @@
         </p:nvSpPr>
         <p:spPr>
           <a:xfrm>
-            <a:off x="7799832" y="4330598"/>
-            <a:ext cx="3145536" cy="256032"/>
+            <a:off x="7708392" y="4517136"/>
+            <a:ext cx="3282696" cy="228600"/>
           </a:xfrm>
           <a:prstGeom prst="rect">
             <a:avLst/>
@@ -4508,7 +4508,7 @@
               <a:buNone/>
             </a:pPr>
             <a:r>
-              <a:rPr lang="en-US" sz="1300" b="1" dirty="0">
+              <a:rPr lang="en-US" sz="1220" b="1" dirty="0">
                 <a:solidFill>
                   <a:srgbClr val="0068B7"/>
                 </a:solidFill>
@@ -4518,7 +4518,7 @@
               </a:rPr>
               <a:t>How to validate</a:t>
             </a:r>
-            <a:endParaRPr lang="en-US" sz="1300" dirty="0"/>
+            <a:endParaRPr lang="en-US" sz="1220" dirty="0"/>
           </a:p>
         </p:txBody>
       </p:sp>
@@ -4530,8 +4530,8 @@
         </p:nvSpPr>
         <p:spPr>
           <a:xfrm>
-            <a:off x="7799832" y="4659782"/>
-            <a:ext cx="3145536" cy="899770"/>
+            <a:off x="7708392" y="4828032"/>
+            <a:ext cx="3282696" cy="749808"/>
           </a:xfrm>
           <a:prstGeom prst="rect">
             <a:avLst/>
@@ -4549,7 +4549,7 @@
               <a:buNone/>
             </a:pPr>
             <a:r>
-              <a:rPr lang="en-US" sz="1320" dirty="0">
+              <a:rPr lang="en-US" sz="1220" dirty="0">
                 <a:solidFill>
                   <a:srgbClr val="17364A"/>
                 </a:solidFill>
@@ -4557,9 +4557,9 @@
                 <a:ea typeface="Aptos" pitchFamily="34" charset="-122"/>
                 <a:cs typeface="Aptos" pitchFamily="34" charset="-120"/>
               </a:rPr>
-              <a:t>Connect the concept to data quality, model performance, validation evidence, monitoring measures, and decisions that remain under human control.</a:t>
-            </a:r>
-            <a:endParaRPr lang="en-US" sz="1320" dirty="0"/>
+              <a:t>Connect the concept to data quality, model performance, validation evidence,.</a:t>
+            </a:r>
+            <a:endParaRPr lang="en-US" sz="1220" dirty="0"/>
           </a:p>
         </p:txBody>
       </p:sp>
@@ -4850,8 +4850,8 @@
         </p:nvSpPr>
         <p:spPr>
           <a:xfrm>
-            <a:off x="868680" y="1508760"/>
-            <a:ext cx="6309360" cy="4160520"/>
+            <a:off x="822960" y="1463040"/>
+            <a:ext cx="6565392" cy="4343400"/>
           </a:xfrm>
           <a:prstGeom prst="rect">
             <a:avLst/>
@@ -4869,7 +4869,7 @@
               <a:buNone/>
             </a:pPr>
             <a:r>
-              <a:rPr lang="en-US" sz="2100" dirty="0">
+              <a:rPr lang="en-US" sz="1920" dirty="0">
                 <a:solidFill>
                   <a:srgbClr val="003A63"/>
                 </a:solidFill>
@@ -4879,14 +4879,14 @@
               </a:rPr>
               <a:t>• Laboratory data quality begins with required fields.</a:t>
             </a:r>
-            <a:endParaRPr lang="en-US" sz="2100" dirty="0"/>
-          </a:p>
-          <a:p>
-            <a:pPr indent="0" marL="0">
-              <a:buNone/>
-            </a:pPr>
-            <a:r>
-              <a:rPr lang="en-US" sz="2100" dirty="0">
+            <a:endParaRPr lang="en-US" sz="1920" dirty="0"/>
+          </a:p>
+          <a:p>
+            <a:pPr indent="0" marL="0">
+              <a:buNone/>
+            </a:pPr>
+            <a:r>
+              <a:rPr lang="en-US" sz="1920" dirty="0">
                 <a:solidFill>
                   <a:srgbClr val="003A63"/>
                 </a:solidFill>
@@ -4894,16 +4894,16 @@
                 <a:ea typeface="Aptos" pitchFamily="34" charset="-122"/>
                 <a:cs typeface="Aptos" pitchFamily="34" charset="-120"/>
               </a:rPr>
-              <a:t>• At minimum, many workflows need patient identifiers, specimen collection date, test ordered,.</a:t>
-            </a:r>
-            <a:endParaRPr lang="en-US" sz="2100" dirty="0"/>
-          </a:p>
-          <a:p>
-            <a:pPr indent="0" marL="0">
-              <a:buNone/>
-            </a:pPr>
-            <a:r>
-              <a:rPr lang="en-US" sz="2100" dirty="0">
+              <a:t>• At minimum, many workflows need patient identifiers, specimen collection.</a:t>
+            </a:r>
+            <a:endParaRPr lang="en-US" sz="1920" dirty="0"/>
+          </a:p>
+          <a:p>
+            <a:pPr indent="0" marL="0">
+              <a:buNone/>
+            </a:pPr>
+            <a:r>
+              <a:rPr lang="en-US" sz="1920" dirty="0">
                 <a:solidFill>
                   <a:srgbClr val="003A63"/>
                 </a:solidFill>
@@ -4913,7 +4913,7 @@
               </a:rPr>
               <a:t>• The exact requirements depend on the use case.</a:t>
             </a:r>
-            <a:endParaRPr lang="en-US" sz="2100" dirty="0"/>
+            <a:endParaRPr lang="en-US" sz="1920" dirty="0"/>
           </a:p>
         </p:txBody>
       </p:sp>
@@ -4925,12 +4925,12 @@
         </p:nvSpPr>
         <p:spPr>
           <a:xfrm>
-            <a:off x="7635240" y="1325880"/>
-            <a:ext cx="3474720" cy="1207008"/>
+            <a:off x="7543800" y="1325880"/>
+            <a:ext cx="3611880" cy="1261872"/>
           </a:xfrm>
           <a:prstGeom prst="roundRect">
             <a:avLst>
-              <a:gd name="adj" fmla="val 9091"/>
+              <a:gd name="adj" fmla="val 8696"/>
             </a:avLst>
           </a:prstGeom>
           <a:solidFill>
@@ -4952,8 +4952,8 @@
         </p:nvSpPr>
         <p:spPr>
           <a:xfrm>
-            <a:off x="7799832" y="1472184"/>
-            <a:ext cx="3145536" cy="256032"/>
+            <a:off x="7708392" y="1453896"/>
+            <a:ext cx="3282696" cy="228600"/>
           </a:xfrm>
           <a:prstGeom prst="rect">
             <a:avLst/>
@@ -4969,7 +4969,7 @@
               <a:buNone/>
             </a:pPr>
             <a:r>
-              <a:rPr lang="en-US" sz="1300" b="1" dirty="0">
+              <a:rPr lang="en-US" sz="1220" b="1" dirty="0">
                 <a:solidFill>
                   <a:srgbClr val="0068B7"/>
                 </a:solidFill>
@@ -4979,7 +4979,7 @@
               </a:rPr>
               <a:t>Data decision</a:t>
             </a:r>
-            <a:endParaRPr lang="en-US" sz="1300" dirty="0"/>
+            <a:endParaRPr lang="en-US" sz="1220" dirty="0"/>
           </a:p>
         </p:txBody>
       </p:sp>
@@ -4991,8 +4991,8 @@
         </p:nvSpPr>
         <p:spPr>
           <a:xfrm>
-            <a:off x="7799832" y="1801368"/>
-            <a:ext cx="3145536" cy="640080"/>
+            <a:off x="7708392" y="1764792"/>
+            <a:ext cx="3282696" cy="749808"/>
           </a:xfrm>
           <a:prstGeom prst="rect">
             <a:avLst/>
@@ -5010,7 +5010,7 @@
               <a:buNone/>
             </a:pPr>
             <a:r>
-              <a:rPr lang="en-US" sz="1320" dirty="0">
+              <a:rPr lang="en-US" sz="1220" dirty="0">
                 <a:solidFill>
                   <a:srgbClr val="17364A"/>
                 </a:solidFill>
@@ -5020,7 +5020,7 @@
               </a:rPr>
               <a:t>Laboratory data quality begins with required fields.</a:t>
             </a:r>
-            <a:endParaRPr lang="en-US" sz="1320" dirty="0"/>
+            <a:endParaRPr lang="en-US" sz="1220" dirty="0"/>
           </a:p>
         </p:txBody>
       </p:sp>
@@ -5032,12 +5032,12 @@
         </p:nvSpPr>
         <p:spPr>
           <a:xfrm>
-            <a:off x="7635240" y="2670048"/>
-            <a:ext cx="3474720" cy="1377086"/>
+            <a:off x="7543800" y="2724912"/>
+            <a:ext cx="3611880" cy="1527048"/>
           </a:xfrm>
           <a:prstGeom prst="roundRect">
             <a:avLst>
-              <a:gd name="adj" fmla="val 7968"/>
+              <a:gd name="adj" fmla="val 7186"/>
             </a:avLst>
           </a:prstGeom>
           <a:solidFill>
@@ -5059,8 +5059,8 @@
         </p:nvSpPr>
         <p:spPr>
           <a:xfrm>
-            <a:off x="7799832" y="2816352"/>
-            <a:ext cx="3145536" cy="256032"/>
+            <a:off x="7708392" y="2852928"/>
+            <a:ext cx="3282696" cy="228600"/>
           </a:xfrm>
           <a:prstGeom prst="rect">
             <a:avLst/>
@@ -5076,7 +5076,7 @@
               <a:buNone/>
             </a:pPr>
             <a:r>
-              <a:rPr lang="en-US" sz="1300" b="1" dirty="0">
+              <a:rPr lang="en-US" sz="1220" b="1" dirty="0">
                 <a:solidFill>
                   <a:srgbClr val="0068B7"/>
                 </a:solidFill>
@@ -5086,7 +5086,7 @@
               </a:rPr>
               <a:t>Concept checkpoints</a:t>
             </a:r>
-            <a:endParaRPr lang="en-US" sz="1300" dirty="0"/>
+            <a:endParaRPr lang="en-US" sz="1220" dirty="0"/>
           </a:p>
         </p:txBody>
       </p:sp>
@@ -5098,8 +5098,8 @@
         </p:nvSpPr>
         <p:spPr>
           <a:xfrm>
-            <a:off x="7818120" y="3182112"/>
-            <a:ext cx="3090672" cy="718718"/>
+            <a:off x="7726680" y="3182112"/>
+            <a:ext cx="3227832" cy="960120"/>
           </a:xfrm>
           <a:prstGeom prst="rect">
             <a:avLst/>
@@ -5117,7 +5117,7 @@
               <a:buNone/>
             </a:pPr>
             <a:r>
-              <a:rPr lang="en-US" sz="1220" dirty="0">
+              <a:rPr lang="en-US" sz="1140" dirty="0">
                 <a:solidFill>
                   <a:srgbClr val="17364A"/>
                 </a:solidFill>
@@ -5125,16 +5125,16 @@
                 <a:ea typeface="Aptos" pitchFamily="34" charset="-122"/>
                 <a:cs typeface="Aptos" pitchFamily="34" charset="-120"/>
               </a:rPr>
-              <a:t>At minimum, many workflows need patient identifiers, specimen.</a:t>
-            </a:r>
-            <a:endParaRPr lang="en-US" sz="1220" dirty="0"/>
-          </a:p>
-          <a:p>
-            <a:pPr indent="0" marL="0">
-              <a:buNone/>
-            </a:pPr>
-            <a:r>
-              <a:rPr lang="en-US" sz="1220" dirty="0">
+              <a:t>At minimum, many workflows need patient.</a:t>
+            </a:r>
+            <a:endParaRPr lang="en-US" sz="1140" dirty="0"/>
+          </a:p>
+          <a:p>
+            <a:pPr indent="0" marL="0">
+              <a:buNone/>
+            </a:pPr>
+            <a:r>
+              <a:rPr lang="en-US" sz="1140" dirty="0">
                 <a:solidFill>
                   <a:srgbClr val="17364A"/>
                 </a:solidFill>
@@ -5142,16 +5142,16 @@
                 <a:ea typeface="Aptos" pitchFamily="34" charset="-122"/>
                 <a:cs typeface="Aptos" pitchFamily="34" charset="-120"/>
               </a:rPr>
-              <a:t>An AI tool used for summarization may need different fields than a.</a:t>
-            </a:r>
-            <a:endParaRPr lang="en-US" sz="1220" dirty="0"/>
-          </a:p>
-          <a:p>
-            <a:pPr indent="0" marL="0">
-              <a:buNone/>
-            </a:pPr>
-            <a:r>
-              <a:rPr lang="en-US" sz="1220" dirty="0">
+              <a:t>An AI tool used for summarization may need.</a:t>
+            </a:r>
+            <a:endParaRPr lang="en-US" sz="1140" dirty="0"/>
+          </a:p>
+          <a:p>
+            <a:pPr indent="0" marL="0">
+              <a:buNone/>
+            </a:pPr>
+            <a:r>
+              <a:rPr lang="en-US" sz="1140" dirty="0">
                 <a:solidFill>
                   <a:srgbClr val="17364A"/>
                 </a:solidFill>
@@ -5159,9 +5159,9 @@
                 <a:ea typeface="Aptos" pitchFamily="34" charset="-122"/>
                 <a:cs typeface="Aptos" pitchFamily="34" charset="-120"/>
               </a:rPr>
-              <a:t>Terminology mapping should be reviewed as an ongoing process.</a:t>
-            </a:r>
-            <a:endParaRPr lang="en-US" sz="1220" dirty="0"/>
+              <a:t>Terminology mapping should be reviewed as an.</a:t>
+            </a:r>
+            <a:endParaRPr lang="en-US" sz="1140" dirty="0"/>
           </a:p>
         </p:txBody>
       </p:sp>
@@ -5173,12 +5173,12 @@
         </p:nvSpPr>
         <p:spPr>
           <a:xfrm>
-            <a:off x="7635240" y="4184294"/>
-            <a:ext cx="3474720" cy="1466698"/>
+            <a:off x="7543800" y="4389120"/>
+            <a:ext cx="3611880" cy="1261872"/>
           </a:xfrm>
           <a:prstGeom prst="roundRect">
             <a:avLst>
-              <a:gd name="adj" fmla="val 7481"/>
+              <a:gd name="adj" fmla="val 8696"/>
             </a:avLst>
           </a:prstGeom>
           <a:solidFill>
@@ -5200,8 +5200,8 @@
         </p:nvSpPr>
         <p:spPr>
           <a:xfrm>
-            <a:off x="7799832" y="4330598"/>
-            <a:ext cx="3145536" cy="256032"/>
+            <a:off x="7708392" y="4517136"/>
+            <a:ext cx="3282696" cy="228600"/>
           </a:xfrm>
           <a:prstGeom prst="rect">
             <a:avLst/>
@@ -5217,7 +5217,7 @@
               <a:buNone/>
             </a:pPr>
             <a:r>
-              <a:rPr lang="en-US" sz="1300" b="1" dirty="0">
+              <a:rPr lang="en-US" sz="1220" b="1" dirty="0">
                 <a:solidFill>
                   <a:srgbClr val="0068B7"/>
                 </a:solidFill>
@@ -5227,7 +5227,7 @@
               </a:rPr>
               <a:t>How to validate</a:t>
             </a:r>
-            <a:endParaRPr lang="en-US" sz="1300" dirty="0"/>
+            <a:endParaRPr lang="en-US" sz="1220" dirty="0"/>
           </a:p>
         </p:txBody>
       </p:sp>
@@ -5239,8 +5239,8 @@
         </p:nvSpPr>
         <p:spPr>
           <a:xfrm>
-            <a:off x="7799832" y="4659782"/>
-            <a:ext cx="3145536" cy="899770"/>
+            <a:off x="7708392" y="4828032"/>
+            <a:ext cx="3282696" cy="749808"/>
           </a:xfrm>
           <a:prstGeom prst="rect">
             <a:avLst/>
@@ -5258,7 +5258,7 @@
               <a:buNone/>
             </a:pPr>
             <a:r>
-              <a:rPr lang="en-US" sz="1320" dirty="0">
+              <a:rPr lang="en-US" sz="1220" dirty="0">
                 <a:solidFill>
                   <a:srgbClr val="17364A"/>
                 </a:solidFill>
@@ -5266,9 +5266,9 @@
                 <a:ea typeface="Aptos" pitchFamily="34" charset="-122"/>
                 <a:cs typeface="Aptos" pitchFamily="34" charset="-120"/>
               </a:rPr>
-              <a:t>Connect the concept to data quality, model performance, validation evidence, monitoring measures, and decisions that remain under human control.</a:t>
-            </a:r>
-            <a:endParaRPr lang="en-US" sz="1320" dirty="0"/>
+              <a:t>Connect the concept to data quality, model performance, validation evidence,.</a:t>
+            </a:r>
+            <a:endParaRPr lang="en-US" sz="1220" dirty="0"/>
           </a:p>
         </p:txBody>
       </p:sp>
@@ -5559,8 +5559,8 @@
         </p:nvSpPr>
         <p:spPr>
           <a:xfrm>
-            <a:off x="868680" y="1508760"/>
-            <a:ext cx="6309360" cy="4160520"/>
+            <a:off x="822960" y="1463040"/>
+            <a:ext cx="6565392" cy="4343400"/>
           </a:xfrm>
           <a:prstGeom prst="rect">
             <a:avLst/>
@@ -5578,7 +5578,7 @@
               <a:buNone/>
             </a:pPr>
             <a:r>
-              <a:rPr lang="en-US" sz="2100" dirty="0">
+              <a:rPr lang="en-US" sz="1920" dirty="0">
                 <a:solidFill>
                   <a:srgbClr val="003A63"/>
                 </a:solidFill>
@@ -5588,14 +5588,14 @@
               </a:rPr>
               <a:t>• Misleading standardization.</a:t>
             </a:r>
-            <a:endParaRPr lang="en-US" sz="2100" dirty="0"/>
-          </a:p>
-          <a:p>
-            <a:pPr indent="0" marL="0">
-              <a:buNone/>
-            </a:pPr>
-            <a:r>
-              <a:rPr lang="en-US" sz="2100" dirty="0">
+            <a:endParaRPr lang="en-US" sz="1920" dirty="0"/>
+          </a:p>
+          <a:p>
+            <a:pPr indent="0" marL="0">
+              <a:buNone/>
+            </a:pPr>
+            <a:r>
+              <a:rPr lang="en-US" sz="1920" dirty="0">
                 <a:solidFill>
                   <a:srgbClr val="003A63"/>
                 </a:solidFill>
@@ -5605,14 +5605,14 @@
               </a:rPr>
               <a:t>• A standard code may be present but mapped incorrectly.</a:t>
             </a:r>
-            <a:endParaRPr lang="en-US" sz="2100" dirty="0"/>
-          </a:p>
-          <a:p>
-            <a:pPr indent="0" marL="0">
-              <a:buNone/>
-            </a:pPr>
-            <a:r>
-              <a:rPr lang="en-US" sz="2100" dirty="0">
+            <a:endParaRPr lang="en-US" sz="1920" dirty="0"/>
+          </a:p>
+          <a:p>
+            <a:pPr indent="0" marL="0">
+              <a:buNone/>
+            </a:pPr>
+            <a:r>
+              <a:rPr lang="en-US" sz="1920" dirty="0">
                 <a:solidFill>
                   <a:srgbClr val="003A63"/>
                 </a:solidFill>
@@ -5622,7 +5622,7 @@
               </a:rPr>
               <a:t>• Guardrails include mapping review, test cases, and terminology stewardship.</a:t>
             </a:r>
-            <a:endParaRPr lang="en-US" sz="2100" dirty="0"/>
+            <a:endParaRPr lang="en-US" sz="1920" dirty="0"/>
           </a:p>
         </p:txBody>
       </p:sp>
@@ -5634,12 +5634,12 @@
         </p:nvSpPr>
         <p:spPr>
           <a:xfrm>
-            <a:off x="7635240" y="1325880"/>
-            <a:ext cx="3474720" cy="1207008"/>
+            <a:off x="7543800" y="1325880"/>
+            <a:ext cx="3611880" cy="1261872"/>
           </a:xfrm>
           <a:prstGeom prst="roundRect">
             <a:avLst>
-              <a:gd name="adj" fmla="val 9091"/>
+              <a:gd name="adj" fmla="val 8696"/>
             </a:avLst>
           </a:prstGeom>
           <a:solidFill>
@@ -5661,8 +5661,8 @@
         </p:nvSpPr>
         <p:spPr>
           <a:xfrm>
-            <a:off x="7799832" y="1472184"/>
-            <a:ext cx="3145536" cy="256032"/>
+            <a:off x="7708392" y="1453896"/>
+            <a:ext cx="3282696" cy="228600"/>
           </a:xfrm>
           <a:prstGeom prst="rect">
             <a:avLst/>
@@ -5678,7 +5678,7 @@
               <a:buNone/>
             </a:pPr>
             <a:r>
-              <a:rPr lang="en-US" sz="1300" b="1" dirty="0">
+              <a:rPr lang="en-US" sz="1220" b="1" dirty="0">
                 <a:solidFill>
                   <a:srgbClr val="0068B7"/>
                 </a:solidFill>
@@ -5688,7 +5688,7 @@
               </a:rPr>
               <a:t>Risk check</a:t>
             </a:r>
-            <a:endParaRPr lang="en-US" sz="1300" dirty="0"/>
+            <a:endParaRPr lang="en-US" sz="1220" dirty="0"/>
           </a:p>
         </p:txBody>
       </p:sp>
@@ -5700,8 +5700,8 @@
         </p:nvSpPr>
         <p:spPr>
           <a:xfrm>
-            <a:off x="7799832" y="1801368"/>
-            <a:ext cx="3145536" cy="640080"/>
+            <a:off x="7708392" y="1764792"/>
+            <a:ext cx="3282696" cy="749808"/>
           </a:xfrm>
           <a:prstGeom prst="rect">
             <a:avLst/>
@@ -5719,7 +5719,7 @@
               <a:buNone/>
             </a:pPr>
             <a:r>
-              <a:rPr lang="en-US" sz="1320" dirty="0">
+              <a:rPr lang="en-US" sz="1220" dirty="0">
                 <a:solidFill>
                   <a:srgbClr val="17364A"/>
                 </a:solidFill>
@@ -5729,7 +5729,7 @@
               </a:rPr>
               <a:t>Misleading standardization.</a:t>
             </a:r>
-            <a:endParaRPr lang="en-US" sz="1320" dirty="0"/>
+            <a:endParaRPr lang="en-US" sz="1220" dirty="0"/>
           </a:p>
         </p:txBody>
       </p:sp>
@@ -5741,12 +5741,12 @@
         </p:nvSpPr>
         <p:spPr>
           <a:xfrm>
-            <a:off x="7635240" y="2670048"/>
-            <a:ext cx="3474720" cy="1536192"/>
+            <a:off x="7543800" y="2724912"/>
+            <a:ext cx="3611880" cy="1527048"/>
           </a:xfrm>
           <a:prstGeom prst="roundRect">
             <a:avLst>
-              <a:gd name="adj" fmla="val 7143"/>
+              <a:gd name="adj" fmla="val 7186"/>
             </a:avLst>
           </a:prstGeom>
           <a:solidFill>
@@ -5768,8 +5768,8 @@
         </p:nvSpPr>
         <p:spPr>
           <a:xfrm>
-            <a:off x="7799832" y="2816352"/>
-            <a:ext cx="3145536" cy="256032"/>
+            <a:off x="7708392" y="2852928"/>
+            <a:ext cx="3282696" cy="228600"/>
           </a:xfrm>
           <a:prstGeom prst="rect">
             <a:avLst/>
@@ -5785,7 +5785,7 @@
               <a:buNone/>
             </a:pPr>
             <a:r>
-              <a:rPr lang="en-US" sz="1300" b="1" dirty="0">
+              <a:rPr lang="en-US" sz="1220" b="1" dirty="0">
                 <a:solidFill>
                   <a:srgbClr val="0068B7"/>
                 </a:solidFill>
@@ -5795,7 +5795,7 @@
               </a:rPr>
               <a:t>Concept checkpoints</a:t>
             </a:r>
-            <a:endParaRPr lang="en-US" sz="1300" dirty="0"/>
+            <a:endParaRPr lang="en-US" sz="1220" dirty="0"/>
           </a:p>
         </p:txBody>
       </p:sp>
@@ -5807,8 +5807,8 @@
         </p:nvSpPr>
         <p:spPr>
           <a:xfrm>
-            <a:off x="7818120" y="3182112"/>
-            <a:ext cx="3090672" cy="877824"/>
+            <a:off x="7726680" y="3182112"/>
+            <a:ext cx="3227832" cy="960120"/>
           </a:xfrm>
           <a:prstGeom prst="rect">
             <a:avLst/>
@@ -5826,7 +5826,7 @@
               <a:buNone/>
             </a:pPr>
             <a:r>
-              <a:rPr lang="en-US" sz="1220" dirty="0">
+              <a:rPr lang="en-US" sz="1140" dirty="0">
                 <a:solidFill>
                   <a:srgbClr val="17364A"/>
                 </a:solidFill>
@@ -5836,14 +5836,14 @@
               </a:rPr>
               <a:t>Missing units or specimen details.</a:t>
             </a:r>
-            <a:endParaRPr lang="en-US" sz="1220" dirty="0"/>
-          </a:p>
-          <a:p>
-            <a:pPr indent="0" marL="0">
-              <a:buNone/>
-            </a:pPr>
-            <a:r>
-              <a:rPr lang="en-US" sz="1220" dirty="0">
+            <a:endParaRPr lang="en-US" sz="1140" dirty="0"/>
+          </a:p>
+          <a:p>
+            <a:pPr indent="0" marL="0">
+              <a:buNone/>
+            </a:pPr>
+            <a:r>
+              <a:rPr lang="en-US" sz="1140" dirty="0">
                 <a:solidFill>
                   <a:srgbClr val="17364A"/>
                 </a:solidFill>
@@ -5853,14 +5853,14 @@
               </a:rPr>
               <a:t>Incomplete fields can change interpretation.</a:t>
             </a:r>
-            <a:endParaRPr lang="en-US" sz="1220" dirty="0"/>
-          </a:p>
-          <a:p>
-            <a:pPr indent="0" marL="0">
-              <a:buNone/>
-            </a:pPr>
-            <a:r>
-              <a:rPr lang="en-US" sz="1220" dirty="0">
+            <a:endParaRPr lang="en-US" sz="1140" dirty="0"/>
+          </a:p>
+          <a:p>
+            <a:pPr indent="0" marL="0">
+              <a:buNone/>
+            </a:pPr>
+            <a:r>
+              <a:rPr lang="en-US" sz="1140" dirty="0">
                 <a:solidFill>
                   <a:srgbClr val="17364A"/>
                 </a:solidFill>
@@ -5868,9 +5868,9 @@
                 <a:ea typeface="Aptos" pitchFamily="34" charset="-122"/>
                 <a:cs typeface="Aptos" pitchFamily="34" charset="-120"/>
               </a:rPr>
-              <a:t>Guardrails include required-field checks and uncertainty flags in.</a:t>
-            </a:r>
-            <a:endParaRPr lang="en-US" sz="1220" dirty="0"/>
+              <a:t>Guardrails include required-field checks and.</a:t>
+            </a:r>
+            <a:endParaRPr lang="en-US" sz="1140" dirty="0"/>
           </a:p>
         </p:txBody>
       </p:sp>
@@ -5882,12 +5882,12 @@
         </p:nvSpPr>
         <p:spPr>
           <a:xfrm>
-            <a:off x="7635240" y="4343400"/>
-            <a:ext cx="3474720" cy="1255471"/>
+            <a:off x="7543800" y="4389120"/>
+            <a:ext cx="3611880" cy="1261872"/>
           </a:xfrm>
           <a:prstGeom prst="roundRect">
             <a:avLst>
-              <a:gd name="adj" fmla="val 8740"/>
+              <a:gd name="adj" fmla="val 8696"/>
             </a:avLst>
           </a:prstGeom>
           <a:solidFill>
@@ -5909,8 +5909,8 @@
         </p:nvSpPr>
         <p:spPr>
           <a:xfrm>
-            <a:off x="7799832" y="4489704"/>
-            <a:ext cx="3145536" cy="256032"/>
+            <a:off x="7708392" y="4517136"/>
+            <a:ext cx="3282696" cy="228600"/>
           </a:xfrm>
           <a:prstGeom prst="rect">
             <a:avLst/>
@@ -5926,7 +5926,7 @@
               <a:buNone/>
             </a:pPr>
             <a:r>
-              <a:rPr lang="en-US" sz="1300" b="1" dirty="0">
+              <a:rPr lang="en-US" sz="1220" b="1" dirty="0">
                 <a:solidFill>
                   <a:srgbClr val="0068B7"/>
                 </a:solidFill>
@@ -5936,7 +5936,7 @@
               </a:rPr>
               <a:t>Safeguard to plan</a:t>
             </a:r>
-            <a:endParaRPr lang="en-US" sz="1300" dirty="0"/>
+            <a:endParaRPr lang="en-US" sz="1220" dirty="0"/>
           </a:p>
         </p:txBody>
       </p:sp>
@@ -5948,8 +5948,8 @@
         </p:nvSpPr>
         <p:spPr>
           <a:xfrm>
-            <a:off x="7799832" y="4818888"/>
-            <a:ext cx="3145536" cy="688543"/>
+            <a:off x="7708392" y="4828032"/>
+            <a:ext cx="3282696" cy="749808"/>
           </a:xfrm>
           <a:prstGeom prst="rect">
             <a:avLst/>
@@ -5967,7 +5967,7 @@
               <a:buNone/>
             </a:pPr>
             <a:r>
-              <a:rPr lang="en-US" sz="1320" dirty="0">
+              <a:rPr lang="en-US" sz="1220" dirty="0">
                 <a:solidFill>
                   <a:srgbClr val="17364A"/>
                 </a:solidFill>
@@ -5975,9 +5975,9 @@
                 <a:ea typeface="Aptos" pitchFamily="34" charset="-122"/>
                 <a:cs typeface="Aptos" pitchFamily="34" charset="-120"/>
               </a:rPr>
-              <a:t>Identify what could go wrong, who could be affected, what safeguards are needed, and what evidence should be reviewed before use.</a:t>
-            </a:r>
-            <a:endParaRPr lang="en-US" sz="1320" dirty="0"/>
+              <a:t>Identify what could go wrong, who could be affected, what safeguards are needed,.</a:t>
+            </a:r>
+            <a:endParaRPr lang="en-US" sz="1220" dirty="0"/>
           </a:p>
         </p:txBody>
       </p:sp>
@@ -6268,8 +6268,8 @@
         </p:nvSpPr>
         <p:spPr>
           <a:xfrm>
-            <a:off x="868680" y="1508760"/>
-            <a:ext cx="6309360" cy="4160520"/>
+            <a:off x="822960" y="1463040"/>
+            <a:ext cx="6565392" cy="4343400"/>
           </a:xfrm>
           <a:prstGeom prst="rect">
             <a:avLst/>
@@ -6287,7 +6287,7 @@
               <a:buNone/>
             </a:pPr>
             <a:r>
-              <a:rPr lang="en-US" sz="2100" dirty="0">
+              <a:rPr lang="en-US" sz="1920" dirty="0">
                 <a:solidFill>
                   <a:srgbClr val="003A63"/>
                 </a:solidFill>
@@ -6297,14 +6297,14 @@
               </a:rPr>
               <a:t>• Reporting pattern changes.</a:t>
             </a:r>
-            <a:endParaRPr lang="en-US" sz="2100" dirty="0"/>
-          </a:p>
-          <a:p>
-            <a:pPr indent="0" marL="0">
-              <a:buNone/>
-            </a:pPr>
-            <a:r>
-              <a:rPr lang="en-US" sz="2100" dirty="0">
+            <a:endParaRPr lang="en-US" sz="1920" dirty="0"/>
+          </a:p>
+          <a:p>
+            <a:pPr indent="0" marL="0">
+              <a:buNone/>
+            </a:pPr>
+            <a:r>
+              <a:rPr lang="en-US" sz="1920" dirty="0">
                 <a:solidFill>
                   <a:srgbClr val="003A63"/>
                 </a:solidFill>
@@ -6314,14 +6314,14 @@
               </a:rPr>
               <a:t>• Lab reporting changes may look like disease changes.</a:t>
             </a:r>
-            <a:endParaRPr lang="en-US" sz="2100" dirty="0"/>
-          </a:p>
-          <a:p>
-            <a:pPr indent="0" marL="0">
-              <a:buNone/>
-            </a:pPr>
-            <a:r>
-              <a:rPr lang="en-US" sz="2100" dirty="0">
+            <a:endParaRPr lang="en-US" sz="1920" dirty="0"/>
+          </a:p>
+          <a:p>
+            <a:pPr indent="0" marL="0">
+              <a:buNone/>
+            </a:pPr>
+            <a:r>
+              <a:rPr lang="en-US" sz="1920" dirty="0">
                 <a:solidFill>
                   <a:srgbClr val="003A63"/>
                 </a:solidFill>
@@ -6331,7 +6331,7 @@
               </a:rPr>
               <a:t>• Guardrails include volume monitoring, partner change logs, and anomaly review.</a:t>
             </a:r>
-            <a:endParaRPr lang="en-US" sz="2100" dirty="0"/>
+            <a:endParaRPr lang="en-US" sz="1920" dirty="0"/>
           </a:p>
         </p:txBody>
       </p:sp>
@@ -6343,12 +6343,12 @@
         </p:nvSpPr>
         <p:spPr>
           <a:xfrm>
-            <a:off x="7635240" y="1325880"/>
-            <a:ext cx="3474720" cy="1207008"/>
+            <a:off x="7543800" y="1325880"/>
+            <a:ext cx="3611880" cy="1261872"/>
           </a:xfrm>
           <a:prstGeom prst="roundRect">
             <a:avLst>
-              <a:gd name="adj" fmla="val 9091"/>
+              <a:gd name="adj" fmla="val 8696"/>
             </a:avLst>
           </a:prstGeom>
           <a:solidFill>
@@ -6370,8 +6370,8 @@
         </p:nvSpPr>
         <p:spPr>
           <a:xfrm>
-            <a:off x="7799832" y="1472184"/>
-            <a:ext cx="3145536" cy="256032"/>
+            <a:off x="7708392" y="1453896"/>
+            <a:ext cx="3282696" cy="228600"/>
           </a:xfrm>
           <a:prstGeom prst="rect">
             <a:avLst/>
@@ -6387,7 +6387,7 @@
               <a:buNone/>
             </a:pPr>
             <a:r>
-              <a:rPr lang="en-US" sz="1300" b="1" dirty="0">
+              <a:rPr lang="en-US" sz="1220" b="1" dirty="0">
                 <a:solidFill>
                   <a:srgbClr val="0068B7"/>
                 </a:solidFill>
@@ -6397,7 +6397,7 @@
               </a:rPr>
               <a:t>Risk check</a:t>
             </a:r>
-            <a:endParaRPr lang="en-US" sz="1300" dirty="0"/>
+            <a:endParaRPr lang="en-US" sz="1220" dirty="0"/>
           </a:p>
         </p:txBody>
       </p:sp>
@@ -6409,8 +6409,8 @@
         </p:nvSpPr>
         <p:spPr>
           <a:xfrm>
-            <a:off x="7799832" y="1801368"/>
-            <a:ext cx="3145536" cy="640080"/>
+            <a:off x="7708392" y="1764792"/>
+            <a:ext cx="3282696" cy="749808"/>
           </a:xfrm>
           <a:prstGeom prst="rect">
             <a:avLst/>
@@ -6428,7 +6428,7 @@
               <a:buNone/>
             </a:pPr>
             <a:r>
-              <a:rPr lang="en-US" sz="1320" dirty="0">
+              <a:rPr lang="en-US" sz="1220" dirty="0">
                 <a:solidFill>
                   <a:srgbClr val="17364A"/>
                 </a:solidFill>
@@ -6438,7 +6438,7 @@
               </a:rPr>
               <a:t>Reporting pattern changes.</a:t>
             </a:r>
-            <a:endParaRPr lang="en-US" sz="1320" dirty="0"/>
+            <a:endParaRPr lang="en-US" sz="1220" dirty="0"/>
           </a:p>
         </p:txBody>
       </p:sp>
@@ -6450,12 +6450,12 @@
         </p:nvSpPr>
         <p:spPr>
           <a:xfrm>
-            <a:off x="7635240" y="2670048"/>
-            <a:ext cx="3474720" cy="1536192"/>
+            <a:off x="7543800" y="2724912"/>
+            <a:ext cx="3611880" cy="1527048"/>
           </a:xfrm>
           <a:prstGeom prst="roundRect">
             <a:avLst>
-              <a:gd name="adj" fmla="val 7143"/>
+              <a:gd name="adj" fmla="val 7186"/>
             </a:avLst>
           </a:prstGeom>
           <a:solidFill>
@@ -6477,8 +6477,8 @@
         </p:nvSpPr>
         <p:spPr>
           <a:xfrm>
-            <a:off x="7799832" y="2816352"/>
-            <a:ext cx="3145536" cy="256032"/>
+            <a:off x="7708392" y="2852928"/>
+            <a:ext cx="3282696" cy="228600"/>
           </a:xfrm>
           <a:prstGeom prst="rect">
             <a:avLst/>
@@ -6494,7 +6494,7 @@
               <a:buNone/>
             </a:pPr>
             <a:r>
-              <a:rPr lang="en-US" sz="1300" b="1" dirty="0">
+              <a:rPr lang="en-US" sz="1220" b="1" dirty="0">
                 <a:solidFill>
                   <a:srgbClr val="0068B7"/>
                 </a:solidFill>
@@ -6504,7 +6504,7 @@
               </a:rPr>
               <a:t>Concept checkpoints</a:t>
             </a:r>
-            <a:endParaRPr lang="en-US" sz="1300" dirty="0"/>
+            <a:endParaRPr lang="en-US" sz="1220" dirty="0"/>
           </a:p>
         </p:txBody>
       </p:sp>
@@ -6516,8 +6516,8 @@
         </p:nvSpPr>
         <p:spPr>
           <a:xfrm>
-            <a:off x="7818120" y="3182112"/>
-            <a:ext cx="3090672" cy="877824"/>
+            <a:off x="7726680" y="3182112"/>
+            <a:ext cx="3227832" cy="960120"/>
           </a:xfrm>
           <a:prstGeom prst="rect">
             <a:avLst/>
@@ -6535,7 +6535,7 @@
               <a:buNone/>
             </a:pPr>
             <a:r>
-              <a:rPr lang="en-US" sz="1220" dirty="0">
+              <a:rPr lang="en-US" sz="1140" dirty="0">
                 <a:solidFill>
                   <a:srgbClr val="17364A"/>
                 </a:solidFill>
@@ -6545,14 +6545,14 @@
               </a:rPr>
               <a:t>Reporting pattern changes.</a:t>
             </a:r>
-            <a:endParaRPr lang="en-US" sz="1220" dirty="0"/>
-          </a:p>
-          <a:p>
-            <a:pPr indent="0" marL="0">
-              <a:buNone/>
-            </a:pPr>
-            <a:r>
-              <a:rPr lang="en-US" sz="1220" dirty="0">
+            <a:endParaRPr lang="en-US" sz="1140" dirty="0"/>
+          </a:p>
+          <a:p>
+            <a:pPr indent="0" marL="0">
+              <a:buNone/>
+            </a:pPr>
+            <a:r>
+              <a:rPr lang="en-US" sz="1140" dirty="0">
                 <a:solidFill>
                   <a:srgbClr val="17364A"/>
                 </a:solidFill>
@@ -6562,14 +6562,14 @@
               </a:rPr>
               <a:t>Lab reporting changes may look like disease changes.</a:t>
             </a:r>
-            <a:endParaRPr lang="en-US" sz="1220" dirty="0"/>
-          </a:p>
-          <a:p>
-            <a:pPr indent="0" marL="0">
-              <a:buNone/>
-            </a:pPr>
-            <a:r>
-              <a:rPr lang="en-US" sz="1220" dirty="0">
+            <a:endParaRPr lang="en-US" sz="1140" dirty="0"/>
+          </a:p>
+          <a:p>
+            <a:pPr indent="0" marL="0">
+              <a:buNone/>
+            </a:pPr>
+            <a:r>
+              <a:rPr lang="en-US" sz="1140" dirty="0">
                 <a:solidFill>
                   <a:srgbClr val="17364A"/>
                 </a:solidFill>
@@ -6577,9 +6577,9 @@
                 <a:ea typeface="Aptos" pitchFamily="34" charset="-122"/>
                 <a:cs typeface="Aptos" pitchFamily="34" charset="-120"/>
               </a:rPr>
-              <a:t>Guardrails include volume monitoring, partner change logs, and.</a:t>
-            </a:r>
-            <a:endParaRPr lang="en-US" sz="1220" dirty="0"/>
+              <a:t>Guardrails include volume monitoring, partner.</a:t>
+            </a:r>
+            <a:endParaRPr lang="en-US" sz="1140" dirty="0"/>
           </a:p>
         </p:txBody>
       </p:sp>
@@ -6591,12 +6591,12 @@
         </p:nvSpPr>
         <p:spPr>
           <a:xfrm>
-            <a:off x="7635240" y="4343400"/>
-            <a:ext cx="3474720" cy="1255471"/>
+            <a:off x="7543800" y="4389120"/>
+            <a:ext cx="3611880" cy="1261872"/>
           </a:xfrm>
           <a:prstGeom prst="roundRect">
             <a:avLst>
-              <a:gd name="adj" fmla="val 8740"/>
+              <a:gd name="adj" fmla="val 8696"/>
             </a:avLst>
           </a:prstGeom>
           <a:solidFill>
@@ -6618,8 +6618,8 @@
         </p:nvSpPr>
         <p:spPr>
           <a:xfrm>
-            <a:off x="7799832" y="4489704"/>
-            <a:ext cx="3145536" cy="256032"/>
+            <a:off x="7708392" y="4517136"/>
+            <a:ext cx="3282696" cy="228600"/>
           </a:xfrm>
           <a:prstGeom prst="rect">
             <a:avLst/>
@@ -6635,7 +6635,7 @@
               <a:buNone/>
             </a:pPr>
             <a:r>
-              <a:rPr lang="en-US" sz="1300" b="1" dirty="0">
+              <a:rPr lang="en-US" sz="1220" b="1" dirty="0">
                 <a:solidFill>
                   <a:srgbClr val="0068B7"/>
                 </a:solidFill>
@@ -6645,7 +6645,7 @@
               </a:rPr>
               <a:t>Safeguard to plan</a:t>
             </a:r>
-            <a:endParaRPr lang="en-US" sz="1300" dirty="0"/>
+            <a:endParaRPr lang="en-US" sz="1220" dirty="0"/>
           </a:p>
         </p:txBody>
       </p:sp>
@@ -6657,8 +6657,8 @@
         </p:nvSpPr>
         <p:spPr>
           <a:xfrm>
-            <a:off x="7799832" y="4818888"/>
-            <a:ext cx="3145536" cy="688543"/>
+            <a:off x="7708392" y="4828032"/>
+            <a:ext cx="3282696" cy="749808"/>
           </a:xfrm>
           <a:prstGeom prst="rect">
             <a:avLst/>
@@ -6676,7 +6676,7 @@
               <a:buNone/>
             </a:pPr>
             <a:r>
-              <a:rPr lang="en-US" sz="1320" dirty="0">
+              <a:rPr lang="en-US" sz="1220" dirty="0">
                 <a:solidFill>
                   <a:srgbClr val="17364A"/>
                 </a:solidFill>
@@ -6684,9 +6684,9 @@
                 <a:ea typeface="Aptos" pitchFamily="34" charset="-122"/>
                 <a:cs typeface="Aptos" pitchFamily="34" charset="-120"/>
               </a:rPr>
-              <a:t>Identify what could go wrong, who could be affected, what safeguards are needed, and what evidence should be reviewed before use.</a:t>
-            </a:r>
-            <a:endParaRPr lang="en-US" sz="1320" dirty="0"/>
+              <a:t>Identify what could go wrong, who could be affected, what safeguards are needed,.</a:t>
+            </a:r>
+            <a:endParaRPr lang="en-US" sz="1220" dirty="0"/>
           </a:p>
         </p:txBody>
       </p:sp>
@@ -6977,8 +6977,8 @@
         </p:nvSpPr>
         <p:spPr>
           <a:xfrm>
-            <a:off x="868680" y="1508760"/>
-            <a:ext cx="6309360" cy="4160520"/>
+            <a:off x="822960" y="1463040"/>
+            <a:ext cx="6565392" cy="4343400"/>
           </a:xfrm>
           <a:prstGeom prst="rect">
             <a:avLst/>
@@ -6996,7 +6996,7 @@
               <a:buNone/>
             </a:pPr>
             <a:r>
-              <a:rPr lang="en-US" sz="2100" dirty="0">
+              <a:rPr lang="en-US" sz="1920" dirty="0">
                 <a:solidFill>
                   <a:srgbClr val="003A63"/>
                 </a:solidFill>
@@ -7004,16 +7004,16 @@
                 <a:ea typeface="Aptos" pitchFamily="34" charset="-122"/>
                 <a:cs typeface="Aptos" pitchFamily="34" charset="-120"/>
               </a:rPr>
-              <a:t>• Generative AI may draft lab summaries, but it should preserve source values and avoid.</a:t>
-            </a:r>
-            <a:endParaRPr lang="en-US" sz="2100" dirty="0"/>
-          </a:p>
-          <a:p>
-            <a:pPr indent="0" marL="0">
-              <a:buNone/>
-            </a:pPr>
-            <a:r>
-              <a:rPr lang="en-US" sz="2100" dirty="0">
+              <a:t>• Generative AI may draft lab summaries, but it should preserve source values.</a:t>
+            </a:r>
+            <a:endParaRPr lang="en-US" sz="1920" dirty="0"/>
+          </a:p>
+          <a:p>
+            <a:pPr indent="0" marL="0">
+              <a:buNone/>
+            </a:pPr>
+            <a:r>
+              <a:rPr lang="en-US" sz="1920" dirty="0">
                 <a:solidFill>
                   <a:srgbClr val="003A63"/>
                 </a:solidFill>
@@ -7021,16 +7021,16 @@
                 <a:ea typeface="Aptos" pitchFamily="34" charset="-122"/>
                 <a:cs typeface="Aptos" pitchFamily="34" charset="-120"/>
               </a:rPr>
-              <a:t>• Predictive analytics may use lab trends, but model monitoring must distinguish reporting.</a:t>
-            </a:r>
-            <a:endParaRPr lang="en-US" sz="2100" dirty="0"/>
-          </a:p>
-          <a:p>
-            <a:pPr indent="0" marL="0">
-              <a:buNone/>
-            </a:pPr>
-            <a:r>
-              <a:rPr lang="en-US" sz="2100" dirty="0">
+              <a:t>• Predictive analytics may use lab trends, but model monitoring must.</a:t>
+            </a:r>
+            <a:endParaRPr lang="en-US" sz="1920" dirty="0"/>
+          </a:p>
+          <a:p>
+            <a:pPr indent="0" marL="0">
+              <a:buNone/>
+            </a:pPr>
+            <a:r>
+              <a:rPr lang="en-US" sz="1920" dirty="0">
                 <a:solidFill>
                   <a:srgbClr val="003A63"/>
                 </a:solidFill>
@@ -7038,9 +7038,9 @@
                 <a:ea typeface="Aptos" pitchFamily="34" charset="-122"/>
                 <a:cs typeface="Aptos" pitchFamily="34" charset="-120"/>
               </a:rPr>
-              <a:t>• NLP may interpret free-text results, but extraction accuracy must be validated.</a:t>
-            </a:r>
-            <a:endParaRPr lang="en-US" sz="2100" dirty="0"/>
+              <a:t>• NLP may interpret free-text results, but extraction accuracy must be.</a:t>
+            </a:r>
+            <a:endParaRPr lang="en-US" sz="1920" dirty="0"/>
           </a:p>
         </p:txBody>
       </p:sp>
@@ -7052,12 +7052,12 @@
         </p:nvSpPr>
         <p:spPr>
           <a:xfrm>
-            <a:off x="7635240" y="1325880"/>
-            <a:ext cx="3474720" cy="1255471"/>
+            <a:off x="7543800" y="1325880"/>
+            <a:ext cx="3611880" cy="1261872"/>
           </a:xfrm>
           <a:prstGeom prst="roundRect">
             <a:avLst>
-              <a:gd name="adj" fmla="val 8740"/>
+              <a:gd name="adj" fmla="val 8696"/>
             </a:avLst>
           </a:prstGeom>
           <a:solidFill>
@@ -7079,8 +7079,8 @@
         </p:nvSpPr>
         <p:spPr>
           <a:xfrm>
-            <a:off x="7799832" y="1472184"/>
-            <a:ext cx="3145536" cy="256032"/>
+            <a:off x="7708392" y="1453896"/>
+            <a:ext cx="3282696" cy="228600"/>
           </a:xfrm>
           <a:prstGeom prst="rect">
             <a:avLst/>
@@ -7096,7 +7096,7 @@
               <a:buNone/>
             </a:pPr>
             <a:r>
-              <a:rPr lang="en-US" sz="1300" b="1" dirty="0">
+              <a:rPr lang="en-US" sz="1220" b="1" dirty="0">
                 <a:solidFill>
                   <a:srgbClr val="0068B7"/>
                 </a:solidFill>
@@ -7106,7 +7106,7 @@
               </a:rPr>
               <a:t>Data decision</a:t>
             </a:r>
-            <a:endParaRPr lang="en-US" sz="1300" dirty="0"/>
+            <a:endParaRPr lang="en-US" sz="1220" dirty="0"/>
           </a:p>
         </p:txBody>
       </p:sp>
@@ -7118,8 +7118,8 @@
         </p:nvSpPr>
         <p:spPr>
           <a:xfrm>
-            <a:off x="7799832" y="1801368"/>
-            <a:ext cx="3145536" cy="688543"/>
+            <a:off x="7708392" y="1764792"/>
+            <a:ext cx="3282696" cy="749808"/>
           </a:xfrm>
           <a:prstGeom prst="rect">
             <a:avLst/>
@@ -7137,7 +7137,7 @@
               <a:buNone/>
             </a:pPr>
             <a:r>
-              <a:rPr lang="en-US" sz="1320" dirty="0">
+              <a:rPr lang="en-US" sz="1220" dirty="0">
                 <a:solidFill>
                   <a:srgbClr val="17364A"/>
                 </a:solidFill>
@@ -7145,9 +7145,9 @@
                 <a:ea typeface="Aptos" pitchFamily="34" charset="-122"/>
                 <a:cs typeface="Aptos" pitchFamily="34" charset="-120"/>
               </a:rPr>
-              <a:t>Generative AI may draft lab summaries, but it should preserve source values and avoid interpreting.</a:t>
-            </a:r>
-            <a:endParaRPr lang="en-US" sz="1320" dirty="0"/>
+              <a:t>Generative AI may draft lab summaries, but it should preserve source values and.</a:t>
+            </a:r>
+            <a:endParaRPr lang="en-US" sz="1220" dirty="0"/>
           </a:p>
         </p:txBody>
       </p:sp>
@@ -7159,12 +7159,12 @@
         </p:nvSpPr>
         <p:spPr>
           <a:xfrm>
-            <a:off x="7635240" y="2718511"/>
-            <a:ext cx="3474720" cy="1328623"/>
+            <a:off x="7543800" y="2724912"/>
+            <a:ext cx="3611880" cy="1527048"/>
           </a:xfrm>
           <a:prstGeom prst="roundRect">
             <a:avLst>
-              <a:gd name="adj" fmla="val 8259"/>
+              <a:gd name="adj" fmla="val 7186"/>
             </a:avLst>
           </a:prstGeom>
           <a:solidFill>
@@ -7186,8 +7186,8 @@
         </p:nvSpPr>
         <p:spPr>
           <a:xfrm>
-            <a:off x="7799832" y="2864815"/>
-            <a:ext cx="3145536" cy="256032"/>
+            <a:off x="7708392" y="2852928"/>
+            <a:ext cx="3282696" cy="228600"/>
           </a:xfrm>
           <a:prstGeom prst="rect">
             <a:avLst/>
@@ -7203,7 +7203,7 @@
               <a:buNone/>
             </a:pPr>
             <a:r>
-              <a:rPr lang="en-US" sz="1300" b="1" dirty="0">
+              <a:rPr lang="en-US" sz="1220" b="1" dirty="0">
                 <a:solidFill>
                   <a:srgbClr val="0068B7"/>
                 </a:solidFill>
@@ -7213,7 +7213,7 @@
               </a:rPr>
               <a:t>Concept checkpoints</a:t>
             </a:r>
-            <a:endParaRPr lang="en-US" sz="1300" dirty="0"/>
+            <a:endParaRPr lang="en-US" sz="1220" dirty="0"/>
           </a:p>
         </p:txBody>
       </p:sp>
@@ -7225,8 +7225,8 @@
         </p:nvSpPr>
         <p:spPr>
           <a:xfrm>
-            <a:off x="7818120" y="3230575"/>
-            <a:ext cx="3090672" cy="670255"/>
+            <a:off x="7726680" y="3182112"/>
+            <a:ext cx="3227832" cy="960120"/>
           </a:xfrm>
           <a:prstGeom prst="rect">
             <a:avLst/>
@@ -7244,7 +7244,7 @@
               <a:buNone/>
             </a:pPr>
             <a:r>
-              <a:rPr lang="en-US" sz="1220" dirty="0">
+              <a:rPr lang="en-US" sz="1140" dirty="0">
                 <a:solidFill>
                   <a:srgbClr val="17364A"/>
                 </a:solidFill>
@@ -7252,16 +7252,16 @@
                 <a:ea typeface="Aptos" pitchFamily="34" charset="-122"/>
                 <a:cs typeface="Aptos" pitchFamily="34" charset="-120"/>
               </a:rPr>
-              <a:t>Generative AI may draft lab summaries, but it should preserve.</a:t>
-            </a:r>
-            <a:endParaRPr lang="en-US" sz="1220" dirty="0"/>
-          </a:p>
-          <a:p>
-            <a:pPr indent="0" marL="0">
-              <a:buNone/>
-            </a:pPr>
-            <a:r>
-              <a:rPr lang="en-US" sz="1220" dirty="0">
+              <a:t>Generative AI may draft lab summaries, but it.</a:t>
+            </a:r>
+            <a:endParaRPr lang="en-US" sz="1140" dirty="0"/>
+          </a:p>
+          <a:p>
+            <a:pPr indent="0" marL="0">
+              <a:buNone/>
+            </a:pPr>
+            <a:r>
+              <a:rPr lang="en-US" sz="1140" dirty="0">
                 <a:solidFill>
                   <a:srgbClr val="17364A"/>
                 </a:solidFill>
@@ -7269,16 +7269,16 @@
                 <a:ea typeface="Aptos" pitchFamily="34" charset="-122"/>
                 <a:cs typeface="Aptos" pitchFamily="34" charset="-120"/>
               </a:rPr>
-              <a:t>Predictive analytics may use lab trends, but model monitoring must.</a:t>
-            </a:r>
-            <a:endParaRPr lang="en-US" sz="1220" dirty="0"/>
-          </a:p>
-          <a:p>
-            <a:pPr indent="0" marL="0">
-              <a:buNone/>
-            </a:pPr>
-            <a:r>
-              <a:rPr lang="en-US" sz="1220" dirty="0">
+              <a:t>Predictive analytics may use lab trends, but model.</a:t>
+            </a:r>
+            <a:endParaRPr lang="en-US" sz="1140" dirty="0"/>
+          </a:p>
+          <a:p>
+            <a:pPr indent="0" marL="0">
+              <a:buNone/>
+            </a:pPr>
+            <a:r>
+              <a:rPr lang="en-US" sz="1140" dirty="0">
                 <a:solidFill>
                   <a:srgbClr val="17364A"/>
                 </a:solidFill>
@@ -7286,9 +7286,9 @@
                 <a:ea typeface="Aptos" pitchFamily="34" charset="-122"/>
                 <a:cs typeface="Aptos" pitchFamily="34" charset="-120"/>
               </a:rPr>
-              <a:t>Agentic workflows that trigger tasks from lab results require.</a:t>
-            </a:r>
-            <a:endParaRPr lang="en-US" sz="1220" dirty="0"/>
+              <a:t>Agentic workflows that trigger tasks from lab.</a:t>
+            </a:r>
+            <a:endParaRPr lang="en-US" sz="1140" dirty="0"/>
           </a:p>
         </p:txBody>
       </p:sp>
@@ -7300,12 +7300,12 @@
         </p:nvSpPr>
         <p:spPr>
           <a:xfrm>
-            <a:off x="7635240" y="4184294"/>
-            <a:ext cx="3474720" cy="1466698"/>
+            <a:off x="7543800" y="4389120"/>
+            <a:ext cx="3611880" cy="1261872"/>
           </a:xfrm>
           <a:prstGeom prst="roundRect">
             <a:avLst>
-              <a:gd name="adj" fmla="val 7481"/>
+              <a:gd name="adj" fmla="val 8696"/>
             </a:avLst>
           </a:prstGeom>
           <a:solidFill>
@@ -7327,8 +7327,8 @@
         </p:nvSpPr>
         <p:spPr>
           <a:xfrm>
-            <a:off x="7799832" y="4330598"/>
-            <a:ext cx="3145536" cy="256032"/>
+            <a:off x="7708392" y="4517136"/>
+            <a:ext cx="3282696" cy="228600"/>
           </a:xfrm>
           <a:prstGeom prst="rect">
             <a:avLst/>
@@ -7344,7 +7344,7 @@
               <a:buNone/>
             </a:pPr>
             <a:r>
-              <a:rPr lang="en-US" sz="1300" b="1" dirty="0">
+              <a:rPr lang="en-US" sz="1220" b="1" dirty="0">
                 <a:solidFill>
                   <a:srgbClr val="0068B7"/>
                 </a:solidFill>
@@ -7354,7 +7354,7 @@
               </a:rPr>
               <a:t>How to validate</a:t>
             </a:r>
-            <a:endParaRPr lang="en-US" sz="1300" dirty="0"/>
+            <a:endParaRPr lang="en-US" sz="1220" dirty="0"/>
           </a:p>
         </p:txBody>
       </p:sp>
@@ -7366,8 +7366,8 @@
         </p:nvSpPr>
         <p:spPr>
           <a:xfrm>
-            <a:off x="7799832" y="4659782"/>
-            <a:ext cx="3145536" cy="899770"/>
+            <a:off x="7708392" y="4828032"/>
+            <a:ext cx="3282696" cy="749808"/>
           </a:xfrm>
           <a:prstGeom prst="rect">
             <a:avLst/>
@@ -7385,7 +7385,7 @@
               <a:buNone/>
             </a:pPr>
             <a:r>
-              <a:rPr lang="en-US" sz="1320" dirty="0">
+              <a:rPr lang="en-US" sz="1220" dirty="0">
                 <a:solidFill>
                   <a:srgbClr val="17364A"/>
                 </a:solidFill>
@@ -7393,9 +7393,9 @@
                 <a:ea typeface="Aptos" pitchFamily="34" charset="-122"/>
                 <a:cs typeface="Aptos" pitchFamily="34" charset="-120"/>
               </a:rPr>
-              <a:t>Connect the concept to data quality, model performance, validation evidence, monitoring measures, and decisions that remain under human control.</a:t>
-            </a:r>
-            <a:endParaRPr lang="en-US" sz="1320" dirty="0"/>
+              <a:t>Connect the concept to data quality, model performance, validation evidence,.</a:t>
+            </a:r>
+            <a:endParaRPr lang="en-US" sz="1220" dirty="0"/>
           </a:p>
         </p:txBody>
       </p:sp>
@@ -7686,8 +7686,8 @@
         </p:nvSpPr>
         <p:spPr>
           <a:xfrm>
-            <a:off x="868680" y="1508760"/>
-            <a:ext cx="6309360" cy="4160520"/>
+            <a:off x="822960" y="1463040"/>
+            <a:ext cx="6565392" cy="4343400"/>
           </a:xfrm>
           <a:prstGeom prst="rect">
             <a:avLst/>
@@ -7705,7 +7705,7 @@
               <a:buNone/>
             </a:pPr>
             <a:r>
-              <a:rPr lang="en-US" sz="2100" dirty="0">
+              <a:rPr lang="en-US" sz="1920" dirty="0">
                 <a:solidFill>
                   <a:srgbClr val="003A63"/>
                 </a:solidFill>
@@ -7713,16 +7713,16 @@
                 <a:ea typeface="Aptos" pitchFamily="34" charset="-122"/>
                 <a:cs typeface="Aptos" pitchFamily="34" charset="-120"/>
               </a:rPr>
-              <a:t>• Which laboratory data quality issues most often affect your surveillance workflows?</a:t>
-            </a:r>
-            <a:endParaRPr lang="en-US" sz="2100" dirty="0"/>
-          </a:p>
-          <a:p>
-            <a:pPr indent="0" marL="0">
-              <a:buNone/>
-            </a:pPr>
-            <a:r>
-              <a:rPr lang="en-US" sz="2100" dirty="0">
+              <a:t>• Which laboratory data quality issues most often affect your surveillance.</a:t>
+            </a:r>
+            <a:endParaRPr lang="en-US" sz="1920" dirty="0"/>
+          </a:p>
+          <a:p>
+            <a:pPr indent="0" marL="0">
+              <a:buNone/>
+            </a:pPr>
+            <a:r>
+              <a:rPr lang="en-US" sz="1920" dirty="0">
                 <a:solidFill>
                   <a:srgbClr val="003A63"/>
                 </a:solidFill>
@@ -7732,14 +7732,14 @@
               </a:rPr>
               <a:t>• Which local codes require mapping before data can be used reliably?</a:t>
             </a:r>
-            <a:endParaRPr lang="en-US" sz="2100" dirty="0"/>
-          </a:p>
-          <a:p>
-            <a:pPr indent="0" marL="0">
-              <a:buNone/>
-            </a:pPr>
-            <a:r>
-              <a:rPr lang="en-US" sz="2100" dirty="0">
+            <a:endParaRPr lang="en-US" sz="1920" dirty="0"/>
+          </a:p>
+          <a:p>
+            <a:pPr indent="0" marL="0">
+              <a:buNone/>
+            </a:pPr>
+            <a:r>
+              <a:rPr lang="en-US" sz="1920" dirty="0">
                 <a:solidFill>
                   <a:srgbClr val="003A63"/>
                 </a:solidFill>
@@ -7749,7 +7749,7 @@
               </a:rPr>
               <a:t>• Are test-result pairs consistently represented?</a:t>
             </a:r>
-            <a:endParaRPr lang="en-US" sz="2100" dirty="0"/>
+            <a:endParaRPr lang="en-US" sz="1920" dirty="0"/>
           </a:p>
         </p:txBody>
       </p:sp>
@@ -7761,12 +7761,12 @@
         </p:nvSpPr>
         <p:spPr>
           <a:xfrm>
-            <a:off x="7635240" y="1325880"/>
-            <a:ext cx="3474720" cy="1207008"/>
+            <a:off x="7543800" y="1325880"/>
+            <a:ext cx="3611880" cy="1261872"/>
           </a:xfrm>
           <a:prstGeom prst="roundRect">
             <a:avLst>
-              <a:gd name="adj" fmla="val 9091"/>
+              <a:gd name="adj" fmla="val 8696"/>
             </a:avLst>
           </a:prstGeom>
           <a:solidFill>
@@ -7788,8 +7788,8 @@
         </p:nvSpPr>
         <p:spPr>
           <a:xfrm>
-            <a:off x="7799832" y="1472184"/>
-            <a:ext cx="3145536" cy="256032"/>
+            <a:off x="7708392" y="1453896"/>
+            <a:ext cx="3282696" cy="228600"/>
           </a:xfrm>
           <a:prstGeom prst="rect">
             <a:avLst/>
@@ -7805,7 +7805,7 @@
               <a:buNone/>
             </a:pPr>
             <a:r>
-              <a:rPr lang="en-US" sz="1300" b="1" dirty="0">
+              <a:rPr lang="en-US" sz="1220" b="1" dirty="0">
                 <a:solidFill>
                   <a:srgbClr val="0068B7"/>
                 </a:solidFill>
@@ -7815,7 +7815,7 @@
               </a:rPr>
               <a:t>Data decision</a:t>
             </a:r>
-            <a:endParaRPr lang="en-US" sz="1300" dirty="0"/>
+            <a:endParaRPr lang="en-US" sz="1220" dirty="0"/>
           </a:p>
         </p:txBody>
       </p:sp>
@@ -7827,8 +7827,8 @@
         </p:nvSpPr>
         <p:spPr>
           <a:xfrm>
-            <a:off x="7799832" y="1801368"/>
-            <a:ext cx="3145536" cy="640080"/>
+            <a:off x="7708392" y="1764792"/>
+            <a:ext cx="3282696" cy="749808"/>
           </a:xfrm>
           <a:prstGeom prst="rect">
             <a:avLst/>
@@ -7846,7 +7846,7 @@
               <a:buNone/>
             </a:pPr>
             <a:r>
-              <a:rPr lang="en-US" sz="1320" dirty="0">
+              <a:rPr lang="en-US" sz="1220" dirty="0">
                 <a:solidFill>
                   <a:srgbClr val="17364A"/>
                 </a:solidFill>
@@ -7854,9 +7854,9 @@
                 <a:ea typeface="Aptos" pitchFamily="34" charset="-122"/>
                 <a:cs typeface="Aptos" pitchFamily="34" charset="-120"/>
               </a:rPr>
-              <a:t>Which laboratory data quality issues most often affect your surveillance workflows?</a:t>
-            </a:r>
-            <a:endParaRPr lang="en-US" sz="1320" dirty="0"/>
+              <a:t>Which laboratory data quality issues most often affect your surveillance.</a:t>
+            </a:r>
+            <a:endParaRPr lang="en-US" sz="1220" dirty="0"/>
           </a:p>
         </p:txBody>
       </p:sp>
@@ -7868,12 +7868,12 @@
         </p:nvSpPr>
         <p:spPr>
           <a:xfrm>
-            <a:off x="7635240" y="2670048"/>
-            <a:ext cx="3474720" cy="1377086"/>
+            <a:off x="7543800" y="2724912"/>
+            <a:ext cx="3611880" cy="1527048"/>
           </a:xfrm>
           <a:prstGeom prst="roundRect">
             <a:avLst>
-              <a:gd name="adj" fmla="val 7968"/>
+              <a:gd name="adj" fmla="val 7186"/>
             </a:avLst>
           </a:prstGeom>
           <a:solidFill>
@@ -7895,8 +7895,8 @@
         </p:nvSpPr>
         <p:spPr>
           <a:xfrm>
-            <a:off x="7799832" y="2816352"/>
-            <a:ext cx="3145536" cy="256032"/>
+            <a:off x="7708392" y="2852928"/>
+            <a:ext cx="3282696" cy="228600"/>
           </a:xfrm>
           <a:prstGeom prst="rect">
             <a:avLst/>
@@ -7912,7 +7912,7 @@
               <a:buNone/>
             </a:pPr>
             <a:r>
-              <a:rPr lang="en-US" sz="1300" b="1" dirty="0">
+              <a:rPr lang="en-US" sz="1220" b="1" dirty="0">
                 <a:solidFill>
                   <a:srgbClr val="0068B7"/>
                 </a:solidFill>
@@ -7922,7 +7922,7 @@
               </a:rPr>
               <a:t>Concept checkpoints</a:t>
             </a:r>
-            <a:endParaRPr lang="en-US" sz="1300" dirty="0"/>
+            <a:endParaRPr lang="en-US" sz="1220" dirty="0"/>
           </a:p>
         </p:txBody>
       </p:sp>
@@ -7934,8 +7934,8 @@
         </p:nvSpPr>
         <p:spPr>
           <a:xfrm>
-            <a:off x="7818120" y="3182112"/>
-            <a:ext cx="3090672" cy="718718"/>
+            <a:off x="7726680" y="3182112"/>
+            <a:ext cx="3227832" cy="960120"/>
           </a:xfrm>
           <a:prstGeom prst="rect">
             <a:avLst/>
@@ -7953,7 +7953,7 @@
               <a:buNone/>
             </a:pPr>
             <a:r>
-              <a:rPr lang="en-US" sz="1220" dirty="0">
+              <a:rPr lang="en-US" sz="1140" dirty="0">
                 <a:solidFill>
                   <a:srgbClr val="17364A"/>
                 </a:solidFill>
@@ -7961,16 +7961,16 @@
                 <a:ea typeface="Aptos" pitchFamily="34" charset="-122"/>
                 <a:cs typeface="Aptos" pitchFamily="34" charset="-120"/>
               </a:rPr>
-              <a:t>Which laboratory data quality issues most often affect your.</a:t>
-            </a:r>
-            <a:endParaRPr lang="en-US" sz="1220" dirty="0"/>
-          </a:p>
-          <a:p>
-            <a:pPr indent="0" marL="0">
-              <a:buNone/>
-            </a:pPr>
-            <a:r>
-              <a:rPr lang="en-US" sz="1220" dirty="0">
+              <a:t>Which laboratory data quality issues most often.</a:t>
+            </a:r>
+            <a:endParaRPr lang="en-US" sz="1140" dirty="0"/>
+          </a:p>
+          <a:p>
+            <a:pPr indent="0" marL="0">
+              <a:buNone/>
+            </a:pPr>
+            <a:r>
+              <a:rPr lang="en-US" sz="1140" dirty="0">
                 <a:solidFill>
                   <a:srgbClr val="17364A"/>
                 </a:solidFill>
@@ -7978,16 +7978,16 @@
                 <a:ea typeface="Aptos" pitchFamily="34" charset="-122"/>
                 <a:cs typeface="Aptos" pitchFamily="34" charset="-120"/>
               </a:rPr>
-              <a:t>Which local codes require mapping before data can be used reliably?</a:t>
-            </a:r>
-            <a:endParaRPr lang="en-US" sz="1220" dirty="0"/>
-          </a:p>
-          <a:p>
-            <a:pPr indent="0" marL="0">
-              <a:buNone/>
-            </a:pPr>
-            <a:r>
-              <a:rPr lang="en-US" sz="1220" dirty="0">
+              <a:t>Which local codes require mapping before data can.</a:t>
+            </a:r>
+            <a:endParaRPr lang="en-US" sz="1140" dirty="0"/>
+          </a:p>
+          <a:p>
+            <a:pPr indent="0" marL="0">
+              <a:buNone/>
+            </a:pPr>
+            <a:r>
+              <a:rPr lang="en-US" sz="1140" dirty="0">
                 <a:solidFill>
                   <a:srgbClr val="17364A"/>
                 </a:solidFill>
@@ -7997,7 +7997,7 @@
               </a:rPr>
               <a:t>Are test-result pairs consistently represented?</a:t>
             </a:r>
-            <a:endParaRPr lang="en-US" sz="1220" dirty="0"/>
+            <a:endParaRPr lang="en-US" sz="1140" dirty="0"/>
           </a:p>
         </p:txBody>
       </p:sp>
@@ -8009,12 +8009,12 @@
         </p:nvSpPr>
         <p:spPr>
           <a:xfrm>
-            <a:off x="7635240" y="4184294"/>
-            <a:ext cx="3474720" cy="1466698"/>
+            <a:off x="7543800" y="4389120"/>
+            <a:ext cx="3611880" cy="1261872"/>
           </a:xfrm>
           <a:prstGeom prst="roundRect">
             <a:avLst>
-              <a:gd name="adj" fmla="val 7481"/>
+              <a:gd name="adj" fmla="val 8696"/>
             </a:avLst>
           </a:prstGeom>
           <a:solidFill>
@@ -8036,8 +8036,8 @@
         </p:nvSpPr>
         <p:spPr>
           <a:xfrm>
-            <a:off x="7799832" y="4330598"/>
-            <a:ext cx="3145536" cy="256032"/>
+            <a:off x="7708392" y="4517136"/>
+            <a:ext cx="3282696" cy="228600"/>
           </a:xfrm>
           <a:prstGeom prst="rect">
             <a:avLst/>
@@ -8053,7 +8053,7 @@
               <a:buNone/>
             </a:pPr>
             <a:r>
-              <a:rPr lang="en-US" sz="1300" b="1" dirty="0">
+              <a:rPr lang="en-US" sz="1220" b="1" dirty="0">
                 <a:solidFill>
                   <a:srgbClr val="0068B7"/>
                 </a:solidFill>
@@ -8063,7 +8063,7 @@
               </a:rPr>
               <a:t>How to validate</a:t>
             </a:r>
-            <a:endParaRPr lang="en-US" sz="1300" dirty="0"/>
+            <a:endParaRPr lang="en-US" sz="1220" dirty="0"/>
           </a:p>
         </p:txBody>
       </p:sp>
@@ -8075,8 +8075,8 @@
         </p:nvSpPr>
         <p:spPr>
           <a:xfrm>
-            <a:off x="7799832" y="4659782"/>
-            <a:ext cx="3145536" cy="899770"/>
+            <a:off x="7708392" y="4828032"/>
+            <a:ext cx="3282696" cy="749808"/>
           </a:xfrm>
           <a:prstGeom prst="rect">
             <a:avLst/>
@@ -8094,7 +8094,7 @@
               <a:buNone/>
             </a:pPr>
             <a:r>
-              <a:rPr lang="en-US" sz="1320" dirty="0">
+              <a:rPr lang="en-US" sz="1220" dirty="0">
                 <a:solidFill>
                   <a:srgbClr val="17364A"/>
                 </a:solidFill>
@@ -8102,9 +8102,9 @@
                 <a:ea typeface="Aptos" pitchFamily="34" charset="-122"/>
                 <a:cs typeface="Aptos" pitchFamily="34" charset="-120"/>
               </a:rPr>
-              <a:t>Connect the concept to data quality, model performance, validation evidence, monitoring measures, and decisions that remain under human control.</a:t>
-            </a:r>
-            <a:endParaRPr lang="en-US" sz="1320" dirty="0"/>
+              <a:t>Connect the concept to data quality, model performance, validation evidence,.</a:t>
+            </a:r>
+            <a:endParaRPr lang="en-US" sz="1220" dirty="0"/>
           </a:p>
         </p:txBody>
       </p:sp>
@@ -8395,8 +8395,8 @@
         </p:nvSpPr>
         <p:spPr>
           <a:xfrm>
-            <a:off x="868680" y="1508760"/>
-            <a:ext cx="6309360" cy="4160520"/>
+            <a:off x="822960" y="1463040"/>
+            <a:ext cx="6565392" cy="4343400"/>
           </a:xfrm>
           <a:prstGeom prst="rect">
             <a:avLst/>
@@ -8414,7 +8414,7 @@
               <a:buNone/>
             </a:pPr>
             <a:r>
-              <a:rPr lang="en-US" sz="2100" dirty="0">
+              <a:rPr lang="en-US" sz="1920" dirty="0">
                 <a:solidFill>
                   <a:srgbClr val="003A63"/>
                 </a:solidFill>
@@ -8424,14 +8424,14 @@
               </a:rPr>
               <a:t>• Which missing fields would make AI summarization unsafe?</a:t>
             </a:r>
-            <a:endParaRPr lang="en-US" sz="2100" dirty="0"/>
-          </a:p>
-          <a:p>
-            <a:pPr indent="0" marL="0">
-              <a:buNone/>
-            </a:pPr>
-            <a:r>
-              <a:rPr lang="en-US" sz="2100" dirty="0">
+            <a:endParaRPr lang="en-US" sz="1920" dirty="0"/>
+          </a:p>
+          <a:p>
+            <a:pPr indent="0" marL="0">
+              <a:buNone/>
+            </a:pPr>
+            <a:r>
+              <a:rPr lang="en-US" sz="1920" dirty="0">
                 <a:solidFill>
                   <a:srgbClr val="003A63"/>
                 </a:solidFill>
@@ -8441,7 +8441,7 @@
               </a:rPr>
               <a:t>• How would staff detect a reporting change that affects AI outputs?</a:t>
             </a:r>
-            <a:endParaRPr lang="en-US" sz="2100" dirty="0"/>
+            <a:endParaRPr lang="en-US" sz="1920" dirty="0"/>
           </a:p>
         </p:txBody>
       </p:sp>
@@ -8453,12 +8453,12 @@
         </p:nvSpPr>
         <p:spPr>
           <a:xfrm>
-            <a:off x="7635240" y="1325880"/>
-            <a:ext cx="3474720" cy="1207008"/>
+            <a:off x="7543800" y="1325880"/>
+            <a:ext cx="3611880" cy="1261872"/>
           </a:xfrm>
           <a:prstGeom prst="roundRect">
             <a:avLst>
-              <a:gd name="adj" fmla="val 9091"/>
+              <a:gd name="adj" fmla="val 8696"/>
             </a:avLst>
           </a:prstGeom>
           <a:solidFill>
@@ -8480,8 +8480,8 @@
         </p:nvSpPr>
         <p:spPr>
           <a:xfrm>
-            <a:off x="7799832" y="1472184"/>
-            <a:ext cx="3145536" cy="256032"/>
+            <a:off x="7708392" y="1453896"/>
+            <a:ext cx="3282696" cy="228600"/>
           </a:xfrm>
           <a:prstGeom prst="rect">
             <a:avLst/>
@@ -8497,7 +8497,7 @@
               <a:buNone/>
             </a:pPr>
             <a:r>
-              <a:rPr lang="en-US" sz="1300" b="1" dirty="0">
+              <a:rPr lang="en-US" sz="1220" b="1" dirty="0">
                 <a:solidFill>
                   <a:srgbClr val="0068B7"/>
                 </a:solidFill>
@@ -8507,7 +8507,7 @@
               </a:rPr>
               <a:t>Data decision</a:t>
             </a:r>
-            <a:endParaRPr lang="en-US" sz="1300" dirty="0"/>
+            <a:endParaRPr lang="en-US" sz="1220" dirty="0"/>
           </a:p>
         </p:txBody>
       </p:sp>
@@ -8519,8 +8519,8 @@
         </p:nvSpPr>
         <p:spPr>
           <a:xfrm>
-            <a:off x="7799832" y="1801368"/>
-            <a:ext cx="3145536" cy="640080"/>
+            <a:off x="7708392" y="1764792"/>
+            <a:ext cx="3282696" cy="749808"/>
           </a:xfrm>
           <a:prstGeom prst="rect">
             <a:avLst/>
@@ -8538,7 +8538,7 @@
               <a:buNone/>
             </a:pPr>
             <a:r>
-              <a:rPr lang="en-US" sz="1320" dirty="0">
+              <a:rPr lang="en-US" sz="1220" dirty="0">
                 <a:solidFill>
                   <a:srgbClr val="17364A"/>
                 </a:solidFill>
@@ -8548,7 +8548,7 @@
               </a:rPr>
               <a:t>Which missing fields would make AI summarization unsafe?</a:t>
             </a:r>
-            <a:endParaRPr lang="en-US" sz="1320" dirty="0"/>
+            <a:endParaRPr lang="en-US" sz="1220" dirty="0"/>
           </a:p>
         </p:txBody>
       </p:sp>
@@ -8560,12 +8560,12 @@
         </p:nvSpPr>
         <p:spPr>
           <a:xfrm>
-            <a:off x="7635240" y="2670048"/>
-            <a:ext cx="3474720" cy="1377086"/>
+            <a:off x="7543800" y="2724912"/>
+            <a:ext cx="3611880" cy="1527048"/>
           </a:xfrm>
           <a:prstGeom prst="roundRect">
             <a:avLst>
-              <a:gd name="adj" fmla="val 7968"/>
+              <a:gd name="adj" fmla="val 7186"/>
             </a:avLst>
           </a:prstGeom>
           <a:solidFill>
@@ -8587,8 +8587,8 @@
         </p:nvSpPr>
         <p:spPr>
           <a:xfrm>
-            <a:off x="7799832" y="2816352"/>
-            <a:ext cx="3145536" cy="256032"/>
+            <a:off x="7708392" y="2852928"/>
+            <a:ext cx="3282696" cy="228600"/>
           </a:xfrm>
           <a:prstGeom prst="rect">
             <a:avLst/>
@@ -8604,7 +8604,7 @@
               <a:buNone/>
             </a:pPr>
             <a:r>
-              <a:rPr lang="en-US" sz="1300" b="1" dirty="0">
+              <a:rPr lang="en-US" sz="1220" b="1" dirty="0">
                 <a:solidFill>
                   <a:srgbClr val="0068B7"/>
                 </a:solidFill>
@@ -8614,7 +8614,7 @@
               </a:rPr>
               <a:t>Concept checkpoints</a:t>
             </a:r>
-            <a:endParaRPr lang="en-US" sz="1300" dirty="0"/>
+            <a:endParaRPr lang="en-US" sz="1220" dirty="0"/>
           </a:p>
         </p:txBody>
       </p:sp>
@@ -8626,8 +8626,8 @@
         </p:nvSpPr>
         <p:spPr>
           <a:xfrm>
-            <a:off x="7818120" y="3182112"/>
-            <a:ext cx="3090672" cy="718718"/>
+            <a:off x="7726680" y="3182112"/>
+            <a:ext cx="3227832" cy="960120"/>
           </a:xfrm>
           <a:prstGeom prst="rect">
             <a:avLst/>
@@ -8645,7 +8645,7 @@
               <a:buNone/>
             </a:pPr>
             <a:r>
-              <a:rPr lang="en-US" sz="1220" dirty="0">
+              <a:rPr lang="en-US" sz="1140" dirty="0">
                 <a:solidFill>
                   <a:srgbClr val="17364A"/>
                 </a:solidFill>
@@ -8653,16 +8653,16 @@
                 <a:ea typeface="Aptos" pitchFamily="34" charset="-122"/>
                 <a:cs typeface="Aptos" pitchFamily="34" charset="-120"/>
               </a:rPr>
-              <a:t>Which missing fields would make AI summarization unsafe?</a:t>
-            </a:r>
-            <a:endParaRPr lang="en-US" sz="1220" dirty="0"/>
-          </a:p>
-          <a:p>
-            <a:pPr indent="0" marL="0">
-              <a:buNone/>
-            </a:pPr>
-            <a:r>
-              <a:rPr lang="en-US" sz="1220" dirty="0">
+              <a:t>Which missing fields would make AI summarization.</a:t>
+            </a:r>
+            <a:endParaRPr lang="en-US" sz="1140" dirty="0"/>
+          </a:p>
+          <a:p>
+            <a:pPr indent="0" marL="0">
+              <a:buNone/>
+            </a:pPr>
+            <a:r>
+              <a:rPr lang="en-US" sz="1140" dirty="0">
                 <a:solidFill>
                   <a:srgbClr val="17364A"/>
                 </a:solidFill>
@@ -8670,9 +8670,9 @@
                 <a:ea typeface="Aptos" pitchFamily="34" charset="-122"/>
                 <a:cs typeface="Aptos" pitchFamily="34" charset="-120"/>
               </a:rPr>
-              <a:t>How would staff detect a reporting change that affects AI outputs?</a:t>
-            </a:r>
-            <a:endParaRPr lang="en-US" sz="1220" dirty="0"/>
+              <a:t>How would staff detect a reporting change that.</a:t>
+            </a:r>
+            <a:endParaRPr lang="en-US" sz="1140" dirty="0"/>
           </a:p>
         </p:txBody>
       </p:sp>
@@ -8684,12 +8684,12 @@
         </p:nvSpPr>
         <p:spPr>
           <a:xfrm>
-            <a:off x="7635240" y="4184294"/>
-            <a:ext cx="3474720" cy="1466698"/>
+            <a:off x="7543800" y="4389120"/>
+            <a:ext cx="3611880" cy="1261872"/>
           </a:xfrm>
           <a:prstGeom prst="roundRect">
             <a:avLst>
-              <a:gd name="adj" fmla="val 7481"/>
+              <a:gd name="adj" fmla="val 8696"/>
             </a:avLst>
           </a:prstGeom>
           <a:solidFill>
@@ -8711,8 +8711,8 @@
         </p:nvSpPr>
         <p:spPr>
           <a:xfrm>
-            <a:off x="7799832" y="4330598"/>
-            <a:ext cx="3145536" cy="256032"/>
+            <a:off x="7708392" y="4517136"/>
+            <a:ext cx="3282696" cy="228600"/>
           </a:xfrm>
           <a:prstGeom prst="rect">
             <a:avLst/>
@@ -8728,7 +8728,7 @@
               <a:buNone/>
             </a:pPr>
             <a:r>
-              <a:rPr lang="en-US" sz="1300" b="1" dirty="0">
+              <a:rPr lang="en-US" sz="1220" b="1" dirty="0">
                 <a:solidFill>
                   <a:srgbClr val="0068B7"/>
                 </a:solidFill>
@@ -8738,7 +8738,7 @@
               </a:rPr>
               <a:t>How to validate</a:t>
             </a:r>
-            <a:endParaRPr lang="en-US" sz="1300" dirty="0"/>
+            <a:endParaRPr lang="en-US" sz="1220" dirty="0"/>
           </a:p>
         </p:txBody>
       </p:sp>
@@ -8750,8 +8750,8 @@
         </p:nvSpPr>
         <p:spPr>
           <a:xfrm>
-            <a:off x="7799832" y="4659782"/>
-            <a:ext cx="3145536" cy="899770"/>
+            <a:off x="7708392" y="4828032"/>
+            <a:ext cx="3282696" cy="749808"/>
           </a:xfrm>
           <a:prstGeom prst="rect">
             <a:avLst/>
@@ -8769,7 +8769,7 @@
               <a:buNone/>
             </a:pPr>
             <a:r>
-              <a:rPr lang="en-US" sz="1320" dirty="0">
+              <a:rPr lang="en-US" sz="1220" dirty="0">
                 <a:solidFill>
                   <a:srgbClr val="17364A"/>
                 </a:solidFill>
@@ -8777,9 +8777,9 @@
                 <a:ea typeface="Aptos" pitchFamily="34" charset="-122"/>
                 <a:cs typeface="Aptos" pitchFamily="34" charset="-120"/>
               </a:rPr>
-              <a:t>Connect the concept to data quality, model performance, validation evidence, monitoring measures, and decisions that remain under human control.</a:t>
-            </a:r>
-            <a:endParaRPr lang="en-US" sz="1320" dirty="0"/>
+              <a:t>Connect the concept to data quality, model performance, validation evidence,.</a:t>
+            </a:r>
+            <a:endParaRPr lang="en-US" sz="1220" dirty="0"/>
           </a:p>
         </p:txBody>
       </p:sp>
@@ -9070,8 +9070,8 @@
         </p:nvSpPr>
         <p:spPr>
           <a:xfrm>
-            <a:off x="868680" y="1508760"/>
-            <a:ext cx="6309360" cy="4160520"/>
+            <a:off x="822960" y="1463040"/>
+            <a:ext cx="6565392" cy="4343400"/>
           </a:xfrm>
           <a:prstGeom prst="rect">
             <a:avLst/>
@@ -9089,7 +9089,7 @@
               <a:buNone/>
             </a:pPr>
             <a:r>
-              <a:rPr lang="en-US" sz="2100" dirty="0">
+              <a:rPr lang="en-US" sz="1920" dirty="0">
                 <a:solidFill>
                   <a:srgbClr val="003A63"/>
                 </a:solidFill>
@@ -9097,16 +9097,16 @@
                 <a:ea typeface="Aptos" pitchFamily="34" charset="-122"/>
                 <a:cs typeface="Aptos" pitchFamily="34" charset="-120"/>
               </a:rPr>
-              <a:t>• Create a lab data quality checklist for one AI-supported surveillance use case.</a:t>
-            </a:r>
-            <a:endParaRPr lang="en-US" sz="2100" dirty="0"/>
-          </a:p>
-          <a:p>
-            <a:pPr indent="0" marL="0">
-              <a:buNone/>
-            </a:pPr>
-            <a:r>
-              <a:rPr lang="en-US" sz="2100" dirty="0">
+              <a:t>• Create a lab data quality checklist for one AI-supported surveillance use.</a:t>
+            </a:r>
+            <a:endParaRPr lang="en-US" sz="1920" dirty="0"/>
+          </a:p>
+          <a:p>
+            <a:pPr indent="0" marL="0">
+              <a:buNone/>
+            </a:pPr>
+            <a:r>
+              <a:rPr lang="en-US" sz="1920" dirty="0">
                 <a:solidFill>
                   <a:srgbClr val="003A63"/>
                 </a:solidFill>
@@ -9114,9 +9114,9 @@
                 <a:ea typeface="Aptos" pitchFamily="34" charset="-122"/>
                 <a:cs typeface="Aptos" pitchFamily="34" charset="-120"/>
               </a:rPr>
-              <a:t>• Include required lab fields, terminology standards, mapping requirements, missingness checks,.</a:t>
-            </a:r>
-            <a:endParaRPr lang="en-US" sz="2100" dirty="0"/>
+              <a:t>• Include required lab fields, terminology standards, mapping requirements,.</a:t>
+            </a:r>
+            <a:endParaRPr lang="en-US" sz="1920" dirty="0"/>
           </a:p>
         </p:txBody>
       </p:sp>
@@ -9128,12 +9128,12 @@
         </p:nvSpPr>
         <p:spPr>
           <a:xfrm>
-            <a:off x="7635240" y="1325880"/>
-            <a:ext cx="3474720" cy="1207008"/>
+            <a:off x="7543800" y="1325880"/>
+            <a:ext cx="3611880" cy="1261872"/>
           </a:xfrm>
           <a:prstGeom prst="roundRect">
             <a:avLst>
-              <a:gd name="adj" fmla="val 9091"/>
+              <a:gd name="adj" fmla="val 8696"/>
             </a:avLst>
           </a:prstGeom>
           <a:solidFill>
@@ -9155,8 +9155,8 @@
         </p:nvSpPr>
         <p:spPr>
           <a:xfrm>
-            <a:off x="7799832" y="1472184"/>
-            <a:ext cx="3145536" cy="256032"/>
+            <a:off x="7708392" y="1453896"/>
+            <a:ext cx="3282696" cy="228600"/>
           </a:xfrm>
           <a:prstGeom prst="rect">
             <a:avLst/>
@@ -9172,7 +9172,7 @@
               <a:buNone/>
             </a:pPr>
             <a:r>
-              <a:rPr lang="en-US" sz="1300" b="1" dirty="0">
+              <a:rPr lang="en-US" sz="1220" b="1" dirty="0">
                 <a:solidFill>
                   <a:srgbClr val="0068B7"/>
                 </a:solidFill>
@@ -9182,7 +9182,7 @@
               </a:rPr>
               <a:t>Data decision</a:t>
             </a:r>
-            <a:endParaRPr lang="en-US" sz="1300" dirty="0"/>
+            <a:endParaRPr lang="en-US" sz="1220" dirty="0"/>
           </a:p>
         </p:txBody>
       </p:sp>
@@ -9194,8 +9194,8 @@
         </p:nvSpPr>
         <p:spPr>
           <a:xfrm>
-            <a:off x="7799832" y="1801368"/>
-            <a:ext cx="3145536" cy="640080"/>
+            <a:off x="7708392" y="1764792"/>
+            <a:ext cx="3282696" cy="749808"/>
           </a:xfrm>
           <a:prstGeom prst="rect">
             <a:avLst/>
@@ -9213,7 +9213,7 @@
               <a:buNone/>
             </a:pPr>
             <a:r>
-              <a:rPr lang="en-US" sz="1320" dirty="0">
+              <a:rPr lang="en-US" sz="1220" dirty="0">
                 <a:solidFill>
                   <a:srgbClr val="17364A"/>
                 </a:solidFill>
@@ -9223,7 +9223,7 @@
               </a:rPr>
               <a:t>Create a lab data quality checklist for one AI-supported surveillance use case.</a:t>
             </a:r>
-            <a:endParaRPr lang="en-US" sz="1320" dirty="0"/>
+            <a:endParaRPr lang="en-US" sz="1220" dirty="0"/>
           </a:p>
         </p:txBody>
       </p:sp>
@@ -9235,12 +9235,12 @@
         </p:nvSpPr>
         <p:spPr>
           <a:xfrm>
-            <a:off x="7635240" y="2670048"/>
-            <a:ext cx="3474720" cy="1377086"/>
+            <a:off x="7543800" y="2724912"/>
+            <a:ext cx="3611880" cy="1527048"/>
           </a:xfrm>
           <a:prstGeom prst="roundRect">
             <a:avLst>
-              <a:gd name="adj" fmla="val 7968"/>
+              <a:gd name="adj" fmla="val 7186"/>
             </a:avLst>
           </a:prstGeom>
           <a:solidFill>
@@ -9262,8 +9262,8 @@
         </p:nvSpPr>
         <p:spPr>
           <a:xfrm>
-            <a:off x="7799832" y="2816352"/>
-            <a:ext cx="3145536" cy="256032"/>
+            <a:off x="7708392" y="2852928"/>
+            <a:ext cx="3282696" cy="228600"/>
           </a:xfrm>
           <a:prstGeom prst="rect">
             <a:avLst/>
@@ -9279,7 +9279,7 @@
               <a:buNone/>
             </a:pPr>
             <a:r>
-              <a:rPr lang="en-US" sz="1300" b="1" dirty="0">
+              <a:rPr lang="en-US" sz="1220" b="1" dirty="0">
                 <a:solidFill>
                   <a:srgbClr val="0068B7"/>
                 </a:solidFill>
@@ -9289,7 +9289,7 @@
               </a:rPr>
               <a:t>Concept checkpoints</a:t>
             </a:r>
-            <a:endParaRPr lang="en-US" sz="1300" dirty="0"/>
+            <a:endParaRPr lang="en-US" sz="1220" dirty="0"/>
           </a:p>
         </p:txBody>
       </p:sp>
@@ -9301,8 +9301,8 @@
         </p:nvSpPr>
         <p:spPr>
           <a:xfrm>
-            <a:off x="7818120" y="3182112"/>
-            <a:ext cx="3090672" cy="718718"/>
+            <a:off x="7726680" y="3182112"/>
+            <a:ext cx="3227832" cy="960120"/>
           </a:xfrm>
           <a:prstGeom prst="rect">
             <a:avLst/>
@@ -9320,7 +9320,7 @@
               <a:buNone/>
             </a:pPr>
             <a:r>
-              <a:rPr lang="en-US" sz="1220" dirty="0">
+              <a:rPr lang="en-US" sz="1140" dirty="0">
                 <a:solidFill>
                   <a:srgbClr val="17364A"/>
                 </a:solidFill>
@@ -9328,16 +9328,16 @@
                 <a:ea typeface="Aptos" pitchFamily="34" charset="-122"/>
                 <a:cs typeface="Aptos" pitchFamily="34" charset="-120"/>
               </a:rPr>
-              <a:t>Create a lab data quality checklist for one AI-supported.</a:t>
-            </a:r>
-            <a:endParaRPr lang="en-US" sz="1220" dirty="0"/>
-          </a:p>
-          <a:p>
-            <a:pPr indent="0" marL="0">
-              <a:buNone/>
-            </a:pPr>
-            <a:r>
-              <a:rPr lang="en-US" sz="1220" dirty="0">
+              <a:t>Create a lab data quality checklist for one.</a:t>
+            </a:r>
+            <a:endParaRPr lang="en-US" sz="1140" dirty="0"/>
+          </a:p>
+          <a:p>
+            <a:pPr indent="0" marL="0">
+              <a:buNone/>
+            </a:pPr>
+            <a:r>
+              <a:rPr lang="en-US" sz="1140" dirty="0">
                 <a:solidFill>
                   <a:srgbClr val="17364A"/>
                 </a:solidFill>
@@ -9345,9 +9345,9 @@
                 <a:ea typeface="Aptos" pitchFamily="34" charset="-122"/>
                 <a:cs typeface="Aptos" pitchFamily="34" charset="-120"/>
               </a:rPr>
-              <a:t>Include required lab fields, terminology standards, mapping.</a:t>
-            </a:r>
-            <a:endParaRPr lang="en-US" sz="1220" dirty="0"/>
+              <a:t>Include required lab fields, terminology.</a:t>
+            </a:r>
+            <a:endParaRPr lang="en-US" sz="1140" dirty="0"/>
           </a:p>
         </p:txBody>
       </p:sp>
@@ -9359,12 +9359,12 @@
         </p:nvSpPr>
         <p:spPr>
           <a:xfrm>
-            <a:off x="7635240" y="4184294"/>
-            <a:ext cx="3474720" cy="1466698"/>
+            <a:off x="7543800" y="4389120"/>
+            <a:ext cx="3611880" cy="1261872"/>
           </a:xfrm>
           <a:prstGeom prst="roundRect">
             <a:avLst>
-              <a:gd name="adj" fmla="val 7481"/>
+              <a:gd name="adj" fmla="val 8696"/>
             </a:avLst>
           </a:prstGeom>
           <a:solidFill>
@@ -9386,8 +9386,8 @@
         </p:nvSpPr>
         <p:spPr>
           <a:xfrm>
-            <a:off x="7799832" y="4330598"/>
-            <a:ext cx="3145536" cy="256032"/>
+            <a:off x="7708392" y="4517136"/>
+            <a:ext cx="3282696" cy="228600"/>
           </a:xfrm>
           <a:prstGeom prst="rect">
             <a:avLst/>
@@ -9403,7 +9403,7 @@
               <a:buNone/>
             </a:pPr>
             <a:r>
-              <a:rPr lang="en-US" sz="1300" b="1" dirty="0">
+              <a:rPr lang="en-US" sz="1220" b="1" dirty="0">
                 <a:solidFill>
                   <a:srgbClr val="0068B7"/>
                 </a:solidFill>
@@ -9413,7 +9413,7 @@
               </a:rPr>
               <a:t>How to validate</a:t>
             </a:r>
-            <a:endParaRPr lang="en-US" sz="1300" dirty="0"/>
+            <a:endParaRPr lang="en-US" sz="1220" dirty="0"/>
           </a:p>
         </p:txBody>
       </p:sp>
@@ -9425,8 +9425,8 @@
         </p:nvSpPr>
         <p:spPr>
           <a:xfrm>
-            <a:off x="7799832" y="4659782"/>
-            <a:ext cx="3145536" cy="899770"/>
+            <a:off x="7708392" y="4828032"/>
+            <a:ext cx="3282696" cy="749808"/>
           </a:xfrm>
           <a:prstGeom prst="rect">
             <a:avLst/>
@@ -9444,7 +9444,7 @@
               <a:buNone/>
             </a:pPr>
             <a:r>
-              <a:rPr lang="en-US" sz="1320" dirty="0">
+              <a:rPr lang="en-US" sz="1220" dirty="0">
                 <a:solidFill>
                   <a:srgbClr val="17364A"/>
                 </a:solidFill>
@@ -9452,9 +9452,9 @@
                 <a:ea typeface="Aptos" pitchFamily="34" charset="-122"/>
                 <a:cs typeface="Aptos" pitchFamily="34" charset="-120"/>
               </a:rPr>
-              <a:t>Use the assignment to test whether you can explain the concept, apply it to a realistic public health situation, and identify what would need review before the work moves forward.</a:t>
-            </a:r>
-            <a:endParaRPr lang="en-US" sz="1320" dirty="0"/>
+              <a:t>Use the assignment to test whether you can explain the concept, apply it to a.</a:t>
+            </a:r>
+            <a:endParaRPr lang="en-US" sz="1220" dirty="0"/>
           </a:p>
         </p:txBody>
       </p:sp>
@@ -9745,8 +9745,8 @@
         </p:nvSpPr>
         <p:spPr>
           <a:xfrm>
-            <a:off x="868680" y="1508760"/>
-            <a:ext cx="6309360" cy="4160520"/>
+            <a:off x="822960" y="1463040"/>
+            <a:ext cx="6565392" cy="4343400"/>
           </a:xfrm>
           <a:prstGeom prst="rect">
             <a:avLst/>
@@ -9764,7 +9764,7 @@
               <a:buNone/>
             </a:pPr>
             <a:r>
-              <a:rPr lang="en-US" sz="2100" dirty="0">
+              <a:rPr lang="en-US" sz="1920" dirty="0">
                 <a:solidFill>
                   <a:srgbClr val="003A63"/>
                 </a:solidFill>
@@ -9774,14 +9774,14 @@
               </a:rPr>
               <a:t>• Lab data quality checklist</a:t>
             </a:r>
-            <a:endParaRPr lang="en-US" sz="2100" dirty="0"/>
-          </a:p>
-          <a:p>
-            <a:pPr indent="0" marL="0">
-              <a:buNone/>
-            </a:pPr>
-            <a:r>
-              <a:rPr lang="en-US" sz="2100" dirty="0">
+            <a:endParaRPr lang="en-US" sz="1920" dirty="0"/>
+          </a:p>
+          <a:p>
+            <a:pPr indent="0" marL="0">
+              <a:buNone/>
+            </a:pPr>
+            <a:r>
+              <a:rPr lang="en-US" sz="1920" dirty="0">
                 <a:solidFill>
                   <a:srgbClr val="003A63"/>
                 </a:solidFill>
@@ -9791,14 +9791,14 @@
               </a:rPr>
               <a:t>• Terminology mapping questions</a:t>
             </a:r>
-            <a:endParaRPr lang="en-US" sz="2100" dirty="0"/>
-          </a:p>
-          <a:p>
-            <a:pPr indent="0" marL="0">
-              <a:buNone/>
-            </a:pPr>
-            <a:r>
-              <a:rPr lang="en-US" sz="2100" dirty="0">
+            <a:endParaRPr lang="en-US" sz="1920" dirty="0"/>
+          </a:p>
+          <a:p>
+            <a:pPr indent="0" marL="0">
+              <a:buNone/>
+            </a:pPr>
+            <a:r>
+              <a:rPr lang="en-US" sz="1920" dirty="0">
                 <a:solidFill>
                   <a:srgbClr val="003A63"/>
                 </a:solidFill>
@@ -9808,7 +9808,7 @@
               </a:rPr>
               <a:t>• Required-field list</a:t>
             </a:r>
-            <a:endParaRPr lang="en-US" sz="2100" dirty="0"/>
+            <a:endParaRPr lang="en-US" sz="1920" dirty="0"/>
           </a:p>
         </p:txBody>
       </p:sp>
@@ -9820,12 +9820,12 @@
         </p:nvSpPr>
         <p:spPr>
           <a:xfrm>
-            <a:off x="7635240" y="1325880"/>
-            <a:ext cx="3474720" cy="1207008"/>
+            <a:off x="7543800" y="1325880"/>
+            <a:ext cx="3611880" cy="1261872"/>
           </a:xfrm>
           <a:prstGeom prst="roundRect">
             <a:avLst>
-              <a:gd name="adj" fmla="val 9091"/>
+              <a:gd name="adj" fmla="val 8696"/>
             </a:avLst>
           </a:prstGeom>
           <a:solidFill>
@@ -9847,8 +9847,8 @@
         </p:nvSpPr>
         <p:spPr>
           <a:xfrm>
-            <a:off x="7799832" y="1472184"/>
-            <a:ext cx="3145536" cy="256032"/>
+            <a:off x="7708392" y="1453896"/>
+            <a:ext cx="3282696" cy="228600"/>
           </a:xfrm>
           <a:prstGeom prst="rect">
             <a:avLst/>
@@ -9864,7 +9864,7 @@
               <a:buNone/>
             </a:pPr>
             <a:r>
-              <a:rPr lang="en-US" sz="1300" b="1" dirty="0">
+              <a:rPr lang="en-US" sz="1220" b="1" dirty="0">
                 <a:solidFill>
                   <a:srgbClr val="0068B7"/>
                 </a:solidFill>
@@ -9874,7 +9874,7 @@
               </a:rPr>
               <a:t>Data decision</a:t>
             </a:r>
-            <a:endParaRPr lang="en-US" sz="1300" dirty="0"/>
+            <a:endParaRPr lang="en-US" sz="1220" dirty="0"/>
           </a:p>
         </p:txBody>
       </p:sp>
@@ -9886,8 +9886,8 @@
         </p:nvSpPr>
         <p:spPr>
           <a:xfrm>
-            <a:off x="7799832" y="1801368"/>
-            <a:ext cx="3145536" cy="640080"/>
+            <a:off x="7708392" y="1764792"/>
+            <a:ext cx="3282696" cy="749808"/>
           </a:xfrm>
           <a:prstGeom prst="rect">
             <a:avLst/>
@@ -9905,7 +9905,7 @@
               <a:buNone/>
             </a:pPr>
             <a:r>
-              <a:rPr lang="en-US" sz="1320" dirty="0">
+              <a:rPr lang="en-US" sz="1220" dirty="0">
                 <a:solidFill>
                   <a:srgbClr val="17364A"/>
                 </a:solidFill>
@@ -9915,7 +9915,7 @@
               </a:rPr>
               <a:t>Lab data quality checklist</a:t>
             </a:r>
-            <a:endParaRPr lang="en-US" sz="1320" dirty="0"/>
+            <a:endParaRPr lang="en-US" sz="1220" dirty="0"/>
           </a:p>
         </p:txBody>
       </p:sp>
@@ -9927,12 +9927,12 @@
         </p:nvSpPr>
         <p:spPr>
           <a:xfrm>
-            <a:off x="7635240" y="2670048"/>
-            <a:ext cx="3474720" cy="1377086"/>
+            <a:off x="7543800" y="2724912"/>
+            <a:ext cx="3611880" cy="1527048"/>
           </a:xfrm>
           <a:prstGeom prst="roundRect">
             <a:avLst>
-              <a:gd name="adj" fmla="val 7968"/>
+              <a:gd name="adj" fmla="val 7186"/>
             </a:avLst>
           </a:prstGeom>
           <a:solidFill>
@@ -9954,8 +9954,8 @@
         </p:nvSpPr>
         <p:spPr>
           <a:xfrm>
-            <a:off x="7799832" y="2816352"/>
-            <a:ext cx="3145536" cy="256032"/>
+            <a:off x="7708392" y="2852928"/>
+            <a:ext cx="3282696" cy="228600"/>
           </a:xfrm>
           <a:prstGeom prst="rect">
             <a:avLst/>
@@ -9971,7 +9971,7 @@
               <a:buNone/>
             </a:pPr>
             <a:r>
-              <a:rPr lang="en-US" sz="1300" b="1" dirty="0">
+              <a:rPr lang="en-US" sz="1220" b="1" dirty="0">
                 <a:solidFill>
                   <a:srgbClr val="0068B7"/>
                 </a:solidFill>
@@ -9981,7 +9981,7 @@
               </a:rPr>
               <a:t>Concept checkpoints</a:t>
             </a:r>
-            <a:endParaRPr lang="en-US" sz="1300" dirty="0"/>
+            <a:endParaRPr lang="en-US" sz="1220" dirty="0"/>
           </a:p>
         </p:txBody>
       </p:sp>
@@ -9993,8 +9993,8 @@
         </p:nvSpPr>
         <p:spPr>
           <a:xfrm>
-            <a:off x="7818120" y="3182112"/>
-            <a:ext cx="3090672" cy="718718"/>
+            <a:off x="7726680" y="3182112"/>
+            <a:ext cx="3227832" cy="960120"/>
           </a:xfrm>
           <a:prstGeom prst="rect">
             <a:avLst/>
@@ -10012,7 +10012,7 @@
               <a:buNone/>
             </a:pPr>
             <a:r>
-              <a:rPr lang="en-US" sz="1220" dirty="0">
+              <a:rPr lang="en-US" sz="1140" dirty="0">
                 <a:solidFill>
                   <a:srgbClr val="17364A"/>
                 </a:solidFill>
@@ -10022,14 +10022,14 @@
               </a:rPr>
               <a:t>Lab data quality checklist</a:t>
             </a:r>
-            <a:endParaRPr lang="en-US" sz="1220" dirty="0"/>
-          </a:p>
-          <a:p>
-            <a:pPr indent="0" marL="0">
-              <a:buNone/>
-            </a:pPr>
-            <a:r>
-              <a:rPr lang="en-US" sz="1220" dirty="0">
+            <a:endParaRPr lang="en-US" sz="1140" dirty="0"/>
+          </a:p>
+          <a:p>
+            <a:pPr indent="0" marL="0">
+              <a:buNone/>
+            </a:pPr>
+            <a:r>
+              <a:rPr lang="en-US" sz="1140" dirty="0">
                 <a:solidFill>
                   <a:srgbClr val="17364A"/>
                 </a:solidFill>
@@ -10039,14 +10039,14 @@
               </a:rPr>
               <a:t>Terminology mapping questions</a:t>
             </a:r>
-            <a:endParaRPr lang="en-US" sz="1220" dirty="0"/>
-          </a:p>
-          <a:p>
-            <a:pPr indent="0" marL="0">
-              <a:buNone/>
-            </a:pPr>
-            <a:r>
-              <a:rPr lang="en-US" sz="1220" dirty="0">
+            <a:endParaRPr lang="en-US" sz="1140" dirty="0"/>
+          </a:p>
+          <a:p>
+            <a:pPr indent="0" marL="0">
+              <a:buNone/>
+            </a:pPr>
+            <a:r>
+              <a:rPr lang="en-US" sz="1140" dirty="0">
                 <a:solidFill>
                   <a:srgbClr val="17364A"/>
                 </a:solidFill>
@@ -10056,7 +10056,7 @@
               </a:rPr>
               <a:t>Required-field list</a:t>
             </a:r>
-            <a:endParaRPr lang="en-US" sz="1220" dirty="0"/>
+            <a:endParaRPr lang="en-US" sz="1140" dirty="0"/>
           </a:p>
         </p:txBody>
       </p:sp>
@@ -10068,12 +10068,12 @@
         </p:nvSpPr>
         <p:spPr>
           <a:xfrm>
-            <a:off x="7635240" y="4184294"/>
-            <a:ext cx="3474720" cy="1466698"/>
+            <a:off x="7543800" y="4389120"/>
+            <a:ext cx="3611880" cy="1261872"/>
           </a:xfrm>
           <a:prstGeom prst="roundRect">
             <a:avLst>
-              <a:gd name="adj" fmla="val 7481"/>
+              <a:gd name="adj" fmla="val 8696"/>
             </a:avLst>
           </a:prstGeom>
           <a:solidFill>
@@ -10095,8 +10095,8 @@
         </p:nvSpPr>
         <p:spPr>
           <a:xfrm>
-            <a:off x="7799832" y="4330598"/>
-            <a:ext cx="3145536" cy="256032"/>
+            <a:off x="7708392" y="4517136"/>
+            <a:ext cx="3282696" cy="228600"/>
           </a:xfrm>
           <a:prstGeom prst="rect">
             <a:avLst/>
@@ -10112,7 +10112,7 @@
               <a:buNone/>
             </a:pPr>
             <a:r>
-              <a:rPr lang="en-US" sz="1300" b="1" dirty="0">
+              <a:rPr lang="en-US" sz="1220" b="1" dirty="0">
                 <a:solidFill>
                   <a:srgbClr val="0068B7"/>
                 </a:solidFill>
@@ -10122,7 +10122,7 @@
               </a:rPr>
               <a:t>How to validate</a:t>
             </a:r>
-            <a:endParaRPr lang="en-US" sz="1300" dirty="0"/>
+            <a:endParaRPr lang="en-US" sz="1220" dirty="0"/>
           </a:p>
         </p:txBody>
       </p:sp>
@@ -10134,8 +10134,8 @@
         </p:nvSpPr>
         <p:spPr>
           <a:xfrm>
-            <a:off x="7799832" y="4659782"/>
-            <a:ext cx="3145536" cy="899770"/>
+            <a:off x="7708392" y="4828032"/>
+            <a:ext cx="3282696" cy="749808"/>
           </a:xfrm>
           <a:prstGeom prst="rect">
             <a:avLst/>
@@ -10153,7 +10153,7 @@
               <a:buNone/>
             </a:pPr>
             <a:r>
-              <a:rPr lang="en-US" sz="1320" dirty="0">
+              <a:rPr lang="en-US" sz="1220" dirty="0">
                 <a:solidFill>
                   <a:srgbClr val="17364A"/>
                 </a:solidFill>
@@ -10161,9 +10161,9 @@
                 <a:ea typeface="Aptos" pitchFamily="34" charset="-122"/>
                 <a:cs typeface="Aptos" pitchFamily="34" charset="-120"/>
               </a:rPr>
-              <a:t>Connect the concept to data quality, model performance, validation evidence, monitoring measures, and decisions that remain under human control.</a:t>
-            </a:r>
-            <a:endParaRPr lang="en-US" sz="1320" dirty="0"/>
+              <a:t>Connect the concept to data quality, model performance, validation evidence,.</a:t>
+            </a:r>
+            <a:endParaRPr lang="en-US" sz="1220" dirty="0"/>
           </a:p>
         </p:txBody>
       </p:sp>
@@ -10481,7 +10481,7 @@
                 <a:ea typeface="Aptos" pitchFamily="34" charset="-122"/>
                 <a:cs typeface="Aptos" pitchFamily="34" charset="-120"/>
               </a:rPr>
-              <a:t>• Electronic laboratory reporting supplies critical evidence for infectious disease.</a:t>
+              <a:t>• Electronic laboratory reporting supplies critical evidence for infectious.</a:t>
             </a:r>
             <a:endParaRPr lang="en-US" sz="2100" dirty="0"/>
           </a:p>
@@ -10498,7 +10498,7 @@
                 <a:ea typeface="Aptos" pitchFamily="34" charset="-122"/>
                 <a:cs typeface="Aptos" pitchFamily="34" charset="-120"/>
               </a:rPr>
-              <a:t>• AI tools that use laboratory data depend on the quality of test codes, result codes, units,.</a:t>
+              <a:t>• AI tools that use laboratory data depend on the quality of test codes,.</a:t>
             </a:r>
             <a:endParaRPr lang="en-US" sz="2100" dirty="0"/>
           </a:p>
@@ -10515,7 +10515,7 @@
                 <a:ea typeface="Aptos" pitchFamily="34" charset="-122"/>
                 <a:cs typeface="Aptos" pitchFamily="34" charset="-120"/>
               </a:rPr>
-              <a:t>• This module teaches learners how laboratory data quality and terminology mapping affect.</a:t>
+              <a:t>• This module teaches learners how laboratory data quality and terminology.</a:t>
             </a:r>
             <a:endParaRPr lang="en-US" sz="2100" dirty="0"/>
           </a:p>
@@ -10556,8 +10556,8 @@
         </p:nvSpPr>
         <p:spPr>
           <a:xfrm>
-            <a:off x="8074152" y="1563624"/>
-            <a:ext cx="2825496" cy="256032"/>
+            <a:off x="8074152" y="1545336"/>
+            <a:ext cx="2825496" cy="228600"/>
           </a:xfrm>
           <a:prstGeom prst="rect">
             <a:avLst/>
@@ -10573,7 +10573,7 @@
               <a:buNone/>
             </a:pPr>
             <a:r>
-              <a:rPr lang="en-US" sz="1300" b="1" dirty="0">
+              <a:rPr lang="en-US" sz="1220" b="1" dirty="0">
                 <a:solidFill>
                   <a:srgbClr val="0068B7"/>
                 </a:solidFill>
@@ -10583,7 +10583,7 @@
               </a:rPr>
               <a:t>Module details</a:t>
             </a:r>
-            <a:endParaRPr lang="en-US" sz="1300" dirty="0"/>
+            <a:endParaRPr lang="en-US" sz="1220" dirty="0"/>
           </a:p>
         </p:txBody>
       </p:sp>
@@ -10595,8 +10595,8 @@
         </p:nvSpPr>
         <p:spPr>
           <a:xfrm>
-            <a:off x="8074152" y="1892808"/>
-            <a:ext cx="2825496" cy="1353312"/>
+            <a:off x="8074152" y="1856232"/>
+            <a:ext cx="2825496" cy="1408176"/>
           </a:xfrm>
           <a:prstGeom prst="rect">
             <a:avLst/>
@@ -10614,7 +10614,7 @@
               <a:buNone/>
             </a:pPr>
             <a:r>
-              <a:rPr lang="en-US" sz="1320" dirty="0">
+              <a:rPr lang="en-US" sz="1220" dirty="0">
                 <a:solidFill>
                   <a:srgbClr val="17364A"/>
                 </a:solidFill>
@@ -10622,9 +10622,9 @@
                 <a:ea typeface="Aptos" pitchFamily="34" charset="-122"/>
                 <a:cs typeface="Aptos" pitchFamily="34" charset="-120"/>
               </a:rPr>
-              <a:t>Level: applied/foundational Primary track: Technical Architecture Track Appears in tracks: technical-architecture</a:t>
-            </a:r>
-            <a:endParaRPr lang="en-US" sz="1320" dirty="0"/>
+              <a:t>Level: applied/foundational Primary track: Technical Architecture Track Appears.</a:t>
+            </a:r>
+            <a:endParaRPr lang="en-US" sz="1220" dirty="0"/>
           </a:p>
         </p:txBody>
       </p:sp>
@@ -10663,8 +10663,8 @@
         </p:nvSpPr>
         <p:spPr>
           <a:xfrm>
-            <a:off x="8074152" y="3822192"/>
-            <a:ext cx="2825496" cy="256032"/>
+            <a:off x="8074152" y="3803904"/>
+            <a:ext cx="2825496" cy="228600"/>
           </a:xfrm>
           <a:prstGeom prst="rect">
             <a:avLst/>
@@ -10680,7 +10680,7 @@
               <a:buNone/>
             </a:pPr>
             <a:r>
-              <a:rPr lang="en-US" sz="1300" b="1" dirty="0">
+              <a:rPr lang="en-US" sz="1220" b="1" dirty="0">
                 <a:solidFill>
                   <a:srgbClr val="0068B7"/>
                 </a:solidFill>
@@ -10690,7 +10690,7 @@
               </a:rPr>
               <a:t>Learning sequence</a:t>
             </a:r>
-            <a:endParaRPr lang="en-US" sz="1300" dirty="0"/>
+            <a:endParaRPr lang="en-US" sz="1220" dirty="0"/>
           </a:p>
         </p:txBody>
       </p:sp>
@@ -10702,8 +10702,8 @@
         </p:nvSpPr>
         <p:spPr>
           <a:xfrm>
-            <a:off x="8092440" y="4187952"/>
-            <a:ext cx="2770632" cy="1033272"/>
+            <a:off x="8092440" y="4133088"/>
+            <a:ext cx="2770632" cy="1124712"/>
           </a:xfrm>
           <a:prstGeom prst="rect">
             <a:avLst/>
@@ -10721,7 +10721,7 @@
               <a:buNone/>
             </a:pPr>
             <a:r>
-              <a:rPr lang="en-US" sz="1220" dirty="0">
+              <a:rPr lang="en-US" sz="1140" dirty="0">
                 <a:solidFill>
                   <a:srgbClr val="17364A"/>
                 </a:solidFill>
@@ -10731,14 +10731,14 @@
               </a:rPr>
               <a:t>Read the module for shared vocabulary and context.</a:t>
             </a:r>
-            <a:endParaRPr lang="en-US" sz="1220" dirty="0"/>
-          </a:p>
-          <a:p>
-            <a:pPr indent="0" marL="0">
-              <a:buNone/>
-            </a:pPr>
-            <a:r>
-              <a:rPr lang="en-US" sz="1220" dirty="0">
+            <a:endParaRPr lang="en-US" sz="1140" dirty="0"/>
+          </a:p>
+          <a:p>
+            <a:pPr indent="0" marL="0">
+              <a:buNone/>
+            </a:pPr>
+            <a:r>
+              <a:rPr lang="en-US" sz="1140" dirty="0">
                 <a:solidFill>
                   <a:srgbClr val="17364A"/>
                 </a:solidFill>
@@ -10746,16 +10746,16 @@
                 <a:ea typeface="Aptos" pitchFamily="34" charset="-122"/>
                 <a:cs typeface="Aptos" pitchFamily="34" charset="-120"/>
               </a:rPr>
-              <a:t>Complete the practical exercise to apply the concept.</a:t>
-            </a:r>
-            <a:endParaRPr lang="en-US" sz="1220" dirty="0"/>
-          </a:p>
-          <a:p>
-            <a:pPr indent="0" marL="0">
-              <a:buNone/>
-            </a:pPr>
-            <a:r>
-              <a:rPr lang="en-US" sz="1220" dirty="0">
+              <a:t>Complete the practical exercise to apply the.</a:t>
+            </a:r>
+            <a:endParaRPr lang="en-US" sz="1140" dirty="0"/>
+          </a:p>
+          <a:p>
+            <a:pPr indent="0" marL="0">
+              <a:buNone/>
+            </a:pPr>
+            <a:r>
+              <a:rPr lang="en-US" sz="1140" dirty="0">
                 <a:solidFill>
                   <a:srgbClr val="17364A"/>
                 </a:solidFill>
@@ -10765,7 +10765,7 @@
               </a:rPr>
               <a:t>Use the notes and references for deeper review.</a:t>
             </a:r>
-            <a:endParaRPr lang="en-US" sz="1220" dirty="0"/>
+            <a:endParaRPr lang="en-US" sz="1140" dirty="0"/>
           </a:p>
         </p:txBody>
       </p:sp>
@@ -11056,8 +11056,8 @@
         </p:nvSpPr>
         <p:spPr>
           <a:xfrm>
-            <a:off x="868680" y="1508760"/>
-            <a:ext cx="6309360" cy="4160520"/>
+            <a:off x="822960" y="1463040"/>
+            <a:ext cx="6565392" cy="4343400"/>
           </a:xfrm>
           <a:prstGeom prst="rect">
             <a:avLst/>
@@ -11075,7 +11075,7 @@
               <a:buNone/>
             </a:pPr>
             <a:r>
-              <a:rPr lang="en-US" sz="2100" dirty="0">
+              <a:rPr lang="en-US" sz="1920" dirty="0">
                 <a:solidFill>
                   <a:srgbClr val="003A63"/>
                 </a:solidFill>
@@ -11085,7 +11085,7 @@
               </a:rPr>
               <a:t>• Data quality issue log</a:t>
             </a:r>
-            <a:endParaRPr lang="en-US" sz="2100" dirty="0"/>
+            <a:endParaRPr lang="en-US" sz="1920" dirty="0"/>
           </a:p>
         </p:txBody>
       </p:sp>
@@ -11097,12 +11097,12 @@
         </p:nvSpPr>
         <p:spPr>
           <a:xfrm>
-            <a:off x="7635240" y="1325880"/>
-            <a:ext cx="3474720" cy="1207008"/>
+            <a:off x="7543800" y="1325880"/>
+            <a:ext cx="3611880" cy="1261872"/>
           </a:xfrm>
           <a:prstGeom prst="roundRect">
             <a:avLst>
-              <a:gd name="adj" fmla="val 9091"/>
+              <a:gd name="adj" fmla="val 8696"/>
             </a:avLst>
           </a:prstGeom>
           <a:solidFill>
@@ -11124,8 +11124,8 @@
         </p:nvSpPr>
         <p:spPr>
           <a:xfrm>
-            <a:off x="7799832" y="1472184"/>
-            <a:ext cx="3145536" cy="256032"/>
+            <a:off x="7708392" y="1453896"/>
+            <a:ext cx="3282696" cy="228600"/>
           </a:xfrm>
           <a:prstGeom prst="rect">
             <a:avLst/>
@@ -11141,7 +11141,7 @@
               <a:buNone/>
             </a:pPr>
             <a:r>
-              <a:rPr lang="en-US" sz="1300" b="1" dirty="0">
+              <a:rPr lang="en-US" sz="1220" b="1" dirty="0">
                 <a:solidFill>
                   <a:srgbClr val="0068B7"/>
                 </a:solidFill>
@@ -11151,7 +11151,7 @@
               </a:rPr>
               <a:t>Data decision</a:t>
             </a:r>
-            <a:endParaRPr lang="en-US" sz="1300" dirty="0"/>
+            <a:endParaRPr lang="en-US" sz="1220" dirty="0"/>
           </a:p>
         </p:txBody>
       </p:sp>
@@ -11163,8 +11163,8 @@
         </p:nvSpPr>
         <p:spPr>
           <a:xfrm>
-            <a:off x="7799832" y="1801368"/>
-            <a:ext cx="3145536" cy="640080"/>
+            <a:off x="7708392" y="1764792"/>
+            <a:ext cx="3282696" cy="749808"/>
           </a:xfrm>
           <a:prstGeom prst="rect">
             <a:avLst/>
@@ -11182,7 +11182,7 @@
               <a:buNone/>
             </a:pPr>
             <a:r>
-              <a:rPr lang="en-US" sz="1320" dirty="0">
+              <a:rPr lang="en-US" sz="1220" dirty="0">
                 <a:solidFill>
                   <a:srgbClr val="17364A"/>
                 </a:solidFill>
@@ -11192,7 +11192,7 @@
               </a:rPr>
               <a:t>Data quality issue log</a:t>
             </a:r>
-            <a:endParaRPr lang="en-US" sz="1320" dirty="0"/>
+            <a:endParaRPr lang="en-US" sz="1220" dirty="0"/>
           </a:p>
         </p:txBody>
       </p:sp>
@@ -11204,12 +11204,12 @@
         </p:nvSpPr>
         <p:spPr>
           <a:xfrm>
-            <a:off x="7635240" y="2670048"/>
-            <a:ext cx="3474720" cy="1377086"/>
+            <a:off x="7543800" y="2724912"/>
+            <a:ext cx="3611880" cy="1527048"/>
           </a:xfrm>
           <a:prstGeom prst="roundRect">
             <a:avLst>
-              <a:gd name="adj" fmla="val 7968"/>
+              <a:gd name="adj" fmla="val 7186"/>
             </a:avLst>
           </a:prstGeom>
           <a:solidFill>
@@ -11231,8 +11231,8 @@
         </p:nvSpPr>
         <p:spPr>
           <a:xfrm>
-            <a:off x="7799832" y="2816352"/>
-            <a:ext cx="3145536" cy="256032"/>
+            <a:off x="7708392" y="2852928"/>
+            <a:ext cx="3282696" cy="228600"/>
           </a:xfrm>
           <a:prstGeom prst="rect">
             <a:avLst/>
@@ -11248,7 +11248,7 @@
               <a:buNone/>
             </a:pPr>
             <a:r>
-              <a:rPr lang="en-US" sz="1300" b="1" dirty="0">
+              <a:rPr lang="en-US" sz="1220" b="1" dirty="0">
                 <a:solidFill>
                   <a:srgbClr val="0068B7"/>
                 </a:solidFill>
@@ -11258,7 +11258,7 @@
               </a:rPr>
               <a:t>Concept checkpoints</a:t>
             </a:r>
-            <a:endParaRPr lang="en-US" sz="1300" dirty="0"/>
+            <a:endParaRPr lang="en-US" sz="1220" dirty="0"/>
           </a:p>
         </p:txBody>
       </p:sp>
@@ -11270,8 +11270,8 @@
         </p:nvSpPr>
         <p:spPr>
           <a:xfrm>
-            <a:off x="7818120" y="3182112"/>
-            <a:ext cx="3090672" cy="718718"/>
+            <a:off x="7726680" y="3182112"/>
+            <a:ext cx="3227832" cy="960120"/>
           </a:xfrm>
           <a:prstGeom prst="rect">
             <a:avLst/>
@@ -11289,7 +11289,7 @@
               <a:buNone/>
             </a:pPr>
             <a:r>
-              <a:rPr lang="en-US" sz="1220" dirty="0">
+              <a:rPr lang="en-US" sz="1140" dirty="0">
                 <a:solidFill>
                   <a:srgbClr val="17364A"/>
                 </a:solidFill>
@@ -11299,7 +11299,7 @@
               </a:rPr>
               <a:t>Data quality issue log</a:t>
             </a:r>
-            <a:endParaRPr lang="en-US" sz="1220" dirty="0"/>
+            <a:endParaRPr lang="en-US" sz="1140" dirty="0"/>
           </a:p>
         </p:txBody>
       </p:sp>
@@ -11311,12 +11311,12 @@
         </p:nvSpPr>
         <p:spPr>
           <a:xfrm>
-            <a:off x="7635240" y="4184294"/>
-            <a:ext cx="3474720" cy="1466698"/>
+            <a:off x="7543800" y="4389120"/>
+            <a:ext cx="3611880" cy="1261872"/>
           </a:xfrm>
           <a:prstGeom prst="roundRect">
             <a:avLst>
-              <a:gd name="adj" fmla="val 7481"/>
+              <a:gd name="adj" fmla="val 8696"/>
             </a:avLst>
           </a:prstGeom>
           <a:solidFill>
@@ -11338,8 +11338,8 @@
         </p:nvSpPr>
         <p:spPr>
           <a:xfrm>
-            <a:off x="7799832" y="4330598"/>
-            <a:ext cx="3145536" cy="256032"/>
+            <a:off x="7708392" y="4517136"/>
+            <a:ext cx="3282696" cy="228600"/>
           </a:xfrm>
           <a:prstGeom prst="rect">
             <a:avLst/>
@@ -11355,7 +11355,7 @@
               <a:buNone/>
             </a:pPr>
             <a:r>
-              <a:rPr lang="en-US" sz="1300" b="1" dirty="0">
+              <a:rPr lang="en-US" sz="1220" b="1" dirty="0">
                 <a:solidFill>
                   <a:srgbClr val="0068B7"/>
                 </a:solidFill>
@@ -11365,7 +11365,7 @@
               </a:rPr>
               <a:t>How to validate</a:t>
             </a:r>
-            <a:endParaRPr lang="en-US" sz="1300" dirty="0"/>
+            <a:endParaRPr lang="en-US" sz="1220" dirty="0"/>
           </a:p>
         </p:txBody>
       </p:sp>
@@ -11377,8 +11377,8 @@
         </p:nvSpPr>
         <p:spPr>
           <a:xfrm>
-            <a:off x="7799832" y="4659782"/>
-            <a:ext cx="3145536" cy="899770"/>
+            <a:off x="7708392" y="4828032"/>
+            <a:ext cx="3282696" cy="749808"/>
           </a:xfrm>
           <a:prstGeom prst="rect">
             <a:avLst/>
@@ -11396,7 +11396,7 @@
               <a:buNone/>
             </a:pPr>
             <a:r>
-              <a:rPr lang="en-US" sz="1320" dirty="0">
+              <a:rPr lang="en-US" sz="1220" dirty="0">
                 <a:solidFill>
                   <a:srgbClr val="17364A"/>
                 </a:solidFill>
@@ -11404,9 +11404,9 @@
                 <a:ea typeface="Aptos" pitchFamily="34" charset="-122"/>
                 <a:cs typeface="Aptos" pitchFamily="34" charset="-120"/>
               </a:rPr>
-              <a:t>Connect the concept to data quality, model performance, validation evidence, monitoring measures, and decisions that remain under human control.</a:t>
-            </a:r>
-            <a:endParaRPr lang="en-US" sz="1320" dirty="0"/>
+              <a:t>Connect the concept to data quality, model performance, validation evidence,.</a:t>
+            </a:r>
+            <a:endParaRPr lang="en-US" sz="1220" dirty="0"/>
           </a:p>
         </p:txBody>
       </p:sp>
@@ -11697,8 +11697,8 @@
         </p:nvSpPr>
         <p:spPr>
           <a:xfrm>
-            <a:off x="868680" y="1508760"/>
-            <a:ext cx="6309360" cy="4160520"/>
+            <a:off x="822960" y="1463040"/>
+            <a:ext cx="6565392" cy="4343400"/>
           </a:xfrm>
           <a:prstGeom prst="rect">
             <a:avLst/>
@@ -11716,7 +11716,7 @@
               <a:buNone/>
             </a:pPr>
             <a:r>
-              <a:rPr lang="en-US" sz="2100" dirty="0">
+              <a:rPr lang="en-US" sz="1920" dirty="0">
                 <a:solidFill>
                   <a:srgbClr val="003A63"/>
                 </a:solidFill>
@@ -11726,14 +11726,14 @@
               </a:rPr>
               <a:t>• Lab data quality checklist</a:t>
             </a:r>
-            <a:endParaRPr lang="en-US" sz="2100" dirty="0"/>
-          </a:p>
-          <a:p>
-            <a:pPr indent="0" marL="0">
-              <a:buNone/>
-            </a:pPr>
-            <a:r>
-              <a:rPr lang="en-US" sz="2100" dirty="0">
+            <a:endParaRPr lang="en-US" sz="1920" dirty="0"/>
+          </a:p>
+          <a:p>
+            <a:pPr indent="0" marL="0">
+              <a:buNone/>
+            </a:pPr>
+            <a:r>
+              <a:rPr lang="en-US" sz="1920" dirty="0">
                 <a:solidFill>
                   <a:srgbClr val="003A63"/>
                 </a:solidFill>
@@ -11743,14 +11743,14 @@
               </a:rPr>
               <a:t>• Terminology mapping questions</a:t>
             </a:r>
-            <a:endParaRPr lang="en-US" sz="2100" dirty="0"/>
-          </a:p>
-          <a:p>
-            <a:pPr indent="0" marL="0">
-              <a:buNone/>
-            </a:pPr>
-            <a:r>
-              <a:rPr lang="en-US" sz="2100" dirty="0">
+            <a:endParaRPr lang="en-US" sz="1920" dirty="0"/>
+          </a:p>
+          <a:p>
+            <a:pPr indent="0" marL="0">
+              <a:buNone/>
+            </a:pPr>
+            <a:r>
+              <a:rPr lang="en-US" sz="1920" dirty="0">
                 <a:solidFill>
                   <a:srgbClr val="003A63"/>
                 </a:solidFill>
@@ -11760,7 +11760,7 @@
               </a:rPr>
               <a:t>• Required-field list</a:t>
             </a:r>
-            <a:endParaRPr lang="en-US" sz="2100" dirty="0"/>
+            <a:endParaRPr lang="en-US" sz="1920" dirty="0"/>
           </a:p>
         </p:txBody>
       </p:sp>
@@ -11772,12 +11772,12 @@
         </p:nvSpPr>
         <p:spPr>
           <a:xfrm>
-            <a:off x="7635240" y="1325880"/>
-            <a:ext cx="3474720" cy="1207008"/>
+            <a:off x="7543800" y="1325880"/>
+            <a:ext cx="3611880" cy="1261872"/>
           </a:xfrm>
           <a:prstGeom prst="roundRect">
             <a:avLst>
-              <a:gd name="adj" fmla="val 9091"/>
+              <a:gd name="adj" fmla="val 8696"/>
             </a:avLst>
           </a:prstGeom>
           <a:solidFill>
@@ -11799,8 +11799,8 @@
         </p:nvSpPr>
         <p:spPr>
           <a:xfrm>
-            <a:off x="7799832" y="1472184"/>
-            <a:ext cx="3145536" cy="256032"/>
+            <a:off x="7708392" y="1453896"/>
+            <a:ext cx="3282696" cy="228600"/>
           </a:xfrm>
           <a:prstGeom prst="rect">
             <a:avLst/>
@@ -11816,7 +11816,7 @@
               <a:buNone/>
             </a:pPr>
             <a:r>
-              <a:rPr lang="en-US" sz="1300" b="1" dirty="0">
+              <a:rPr lang="en-US" sz="1220" b="1" dirty="0">
                 <a:solidFill>
                   <a:srgbClr val="0068B7"/>
                 </a:solidFill>
@@ -11826,7 +11826,7 @@
               </a:rPr>
               <a:t>Data decision</a:t>
             </a:r>
-            <a:endParaRPr lang="en-US" sz="1300" dirty="0"/>
+            <a:endParaRPr lang="en-US" sz="1220" dirty="0"/>
           </a:p>
         </p:txBody>
       </p:sp>
@@ -11838,8 +11838,8 @@
         </p:nvSpPr>
         <p:spPr>
           <a:xfrm>
-            <a:off x="7799832" y="1801368"/>
-            <a:ext cx="3145536" cy="640080"/>
+            <a:off x="7708392" y="1764792"/>
+            <a:ext cx="3282696" cy="749808"/>
           </a:xfrm>
           <a:prstGeom prst="rect">
             <a:avLst/>
@@ -11857,7 +11857,7 @@
               <a:buNone/>
             </a:pPr>
             <a:r>
-              <a:rPr lang="en-US" sz="1320" dirty="0">
+              <a:rPr lang="en-US" sz="1220" dirty="0">
                 <a:solidFill>
                   <a:srgbClr val="17364A"/>
                 </a:solidFill>
@@ -11867,7 +11867,7 @@
               </a:rPr>
               <a:t>Lab data quality checklist</a:t>
             </a:r>
-            <a:endParaRPr lang="en-US" sz="1320" dirty="0"/>
+            <a:endParaRPr lang="en-US" sz="1220" dirty="0"/>
           </a:p>
         </p:txBody>
       </p:sp>
@@ -11879,12 +11879,12 @@
         </p:nvSpPr>
         <p:spPr>
           <a:xfrm>
-            <a:off x="7635240" y="2670048"/>
-            <a:ext cx="3474720" cy="1377086"/>
+            <a:off x="7543800" y="2724912"/>
+            <a:ext cx="3611880" cy="1527048"/>
           </a:xfrm>
           <a:prstGeom prst="roundRect">
             <a:avLst>
-              <a:gd name="adj" fmla="val 7968"/>
+              <a:gd name="adj" fmla="val 7186"/>
             </a:avLst>
           </a:prstGeom>
           <a:solidFill>
@@ -11906,8 +11906,8 @@
         </p:nvSpPr>
         <p:spPr>
           <a:xfrm>
-            <a:off x="7799832" y="2816352"/>
-            <a:ext cx="3145536" cy="256032"/>
+            <a:off x="7708392" y="2852928"/>
+            <a:ext cx="3282696" cy="228600"/>
           </a:xfrm>
           <a:prstGeom prst="rect">
             <a:avLst/>
@@ -11923,7 +11923,7 @@
               <a:buNone/>
             </a:pPr>
             <a:r>
-              <a:rPr lang="en-US" sz="1300" b="1" dirty="0">
+              <a:rPr lang="en-US" sz="1220" b="1" dirty="0">
                 <a:solidFill>
                   <a:srgbClr val="0068B7"/>
                 </a:solidFill>
@@ -11933,7 +11933,7 @@
               </a:rPr>
               <a:t>Concept checkpoints</a:t>
             </a:r>
-            <a:endParaRPr lang="en-US" sz="1300" dirty="0"/>
+            <a:endParaRPr lang="en-US" sz="1220" dirty="0"/>
           </a:p>
         </p:txBody>
       </p:sp>
@@ -11945,8 +11945,8 @@
         </p:nvSpPr>
         <p:spPr>
           <a:xfrm>
-            <a:off x="7818120" y="3182112"/>
-            <a:ext cx="3090672" cy="718718"/>
+            <a:off x="7726680" y="3182112"/>
+            <a:ext cx="3227832" cy="960120"/>
           </a:xfrm>
           <a:prstGeom prst="rect">
             <a:avLst/>
@@ -11964,7 +11964,7 @@
               <a:buNone/>
             </a:pPr>
             <a:r>
-              <a:rPr lang="en-US" sz="1220" dirty="0">
+              <a:rPr lang="en-US" sz="1140" dirty="0">
                 <a:solidFill>
                   <a:srgbClr val="17364A"/>
                 </a:solidFill>
@@ -11974,14 +11974,14 @@
               </a:rPr>
               <a:t>Lab data quality checklist</a:t>
             </a:r>
-            <a:endParaRPr lang="en-US" sz="1220" dirty="0"/>
-          </a:p>
-          <a:p>
-            <a:pPr indent="0" marL="0">
-              <a:buNone/>
-            </a:pPr>
-            <a:r>
-              <a:rPr lang="en-US" sz="1220" dirty="0">
+            <a:endParaRPr lang="en-US" sz="1140" dirty="0"/>
+          </a:p>
+          <a:p>
+            <a:pPr indent="0" marL="0">
+              <a:buNone/>
+            </a:pPr>
+            <a:r>
+              <a:rPr lang="en-US" sz="1140" dirty="0">
                 <a:solidFill>
                   <a:srgbClr val="17364A"/>
                 </a:solidFill>
@@ -11991,14 +11991,14 @@
               </a:rPr>
               <a:t>Terminology mapping questions</a:t>
             </a:r>
-            <a:endParaRPr lang="en-US" sz="1220" dirty="0"/>
-          </a:p>
-          <a:p>
-            <a:pPr indent="0" marL="0">
-              <a:buNone/>
-            </a:pPr>
-            <a:r>
-              <a:rPr lang="en-US" sz="1220" dirty="0">
+            <a:endParaRPr lang="en-US" sz="1140" dirty="0"/>
+          </a:p>
+          <a:p>
+            <a:pPr indent="0" marL="0">
+              <a:buNone/>
+            </a:pPr>
+            <a:r>
+              <a:rPr lang="en-US" sz="1140" dirty="0">
                 <a:solidFill>
                   <a:srgbClr val="17364A"/>
                 </a:solidFill>
@@ -12008,7 +12008,7 @@
               </a:rPr>
               <a:t>Required-field list</a:t>
             </a:r>
-            <a:endParaRPr lang="en-US" sz="1220" dirty="0"/>
+            <a:endParaRPr lang="en-US" sz="1140" dirty="0"/>
           </a:p>
         </p:txBody>
       </p:sp>
@@ -12020,12 +12020,12 @@
         </p:nvSpPr>
         <p:spPr>
           <a:xfrm>
-            <a:off x="7635240" y="4184294"/>
-            <a:ext cx="3474720" cy="1466698"/>
+            <a:off x="7543800" y="4389120"/>
+            <a:ext cx="3611880" cy="1261872"/>
           </a:xfrm>
           <a:prstGeom prst="roundRect">
             <a:avLst>
-              <a:gd name="adj" fmla="val 7481"/>
+              <a:gd name="adj" fmla="val 8696"/>
             </a:avLst>
           </a:prstGeom>
           <a:solidFill>
@@ -12047,8 +12047,8 @@
         </p:nvSpPr>
         <p:spPr>
           <a:xfrm>
-            <a:off x="7799832" y="4330598"/>
-            <a:ext cx="3145536" cy="256032"/>
+            <a:off x="7708392" y="4517136"/>
+            <a:ext cx="3282696" cy="228600"/>
           </a:xfrm>
           <a:prstGeom prst="rect">
             <a:avLst/>
@@ -12064,7 +12064,7 @@
               <a:buNone/>
             </a:pPr>
             <a:r>
-              <a:rPr lang="en-US" sz="1300" b="1" dirty="0">
+              <a:rPr lang="en-US" sz="1220" b="1" dirty="0">
                 <a:solidFill>
                   <a:srgbClr val="0068B7"/>
                 </a:solidFill>
@@ -12074,7 +12074,7 @@
               </a:rPr>
               <a:t>How to validate</a:t>
             </a:r>
-            <a:endParaRPr lang="en-US" sz="1300" dirty="0"/>
+            <a:endParaRPr lang="en-US" sz="1220" dirty="0"/>
           </a:p>
         </p:txBody>
       </p:sp>
@@ -12086,8 +12086,8 @@
         </p:nvSpPr>
         <p:spPr>
           <a:xfrm>
-            <a:off x="7799832" y="4659782"/>
-            <a:ext cx="3145536" cy="899770"/>
+            <a:off x="7708392" y="4828032"/>
+            <a:ext cx="3282696" cy="749808"/>
           </a:xfrm>
           <a:prstGeom prst="rect">
             <a:avLst/>
@@ -12105,7 +12105,7 @@
               <a:buNone/>
             </a:pPr>
             <a:r>
-              <a:rPr lang="en-US" sz="1320" dirty="0">
+              <a:rPr lang="en-US" sz="1220" dirty="0">
                 <a:solidFill>
                   <a:srgbClr val="17364A"/>
                 </a:solidFill>
@@ -12113,9 +12113,9 @@
                 <a:ea typeface="Aptos" pitchFamily="34" charset="-122"/>
                 <a:cs typeface="Aptos" pitchFamily="34" charset="-120"/>
               </a:rPr>
-              <a:t>Use the assignment to test whether you can explain the concept, apply it to a realistic public health situation, and identify what would need review before the work moves forward.</a:t>
-            </a:r>
-            <a:endParaRPr lang="en-US" sz="1320" dirty="0"/>
+              <a:t>Use the assignment to test whether you can explain the concept, apply it to a.</a:t>
+            </a:r>
+            <a:endParaRPr lang="en-US" sz="1220" dirty="0"/>
           </a:p>
         </p:txBody>
       </p:sp>
@@ -12406,8 +12406,8 @@
         </p:nvSpPr>
         <p:spPr>
           <a:xfrm>
-            <a:off x="868680" y="1508760"/>
-            <a:ext cx="6309360" cy="4160520"/>
+            <a:off x="822960" y="1463040"/>
+            <a:ext cx="6565392" cy="4343400"/>
           </a:xfrm>
           <a:prstGeom prst="rect">
             <a:avLst/>
@@ -12425,7 +12425,7 @@
               <a:buNone/>
             </a:pPr>
             <a:r>
-              <a:rPr lang="en-US" sz="2100" dirty="0">
+              <a:rPr lang="en-US" sz="1920" dirty="0">
                 <a:solidFill>
                   <a:srgbClr val="003A63"/>
                 </a:solidFill>
@@ -12435,14 +12435,14 @@
               </a:rPr>
               <a:t>• 1. Why is terminology mapping important for AI-supported surveillance?</a:t>
             </a:r>
-            <a:endParaRPr lang="en-US" sz="2100" dirty="0"/>
-          </a:p>
-          <a:p>
-            <a:pPr indent="0" marL="0">
-              <a:buNone/>
-            </a:pPr>
-            <a:r>
-              <a:rPr lang="en-US" sz="2100" dirty="0">
+            <a:endParaRPr lang="en-US" sz="1920" dirty="0"/>
+          </a:p>
+          <a:p>
+            <a:pPr indent="0" marL="0">
+              <a:buNone/>
+            </a:pPr>
+            <a:r>
+              <a:rPr lang="en-US" sz="1920" dirty="0">
                 <a:solidFill>
                   <a:srgbClr val="003A63"/>
                 </a:solidFill>
@@ -12452,14 +12452,14 @@
               </a:rPr>
               <a:t>• 2. What is LOINC commonly used for?</a:t>
             </a:r>
-            <a:endParaRPr lang="en-US" sz="2100" dirty="0"/>
-          </a:p>
-          <a:p>
-            <a:pPr indent="0" marL="0">
-              <a:buNone/>
-            </a:pPr>
-            <a:r>
-              <a:rPr lang="en-US" sz="2100" dirty="0">
+            <a:endParaRPr lang="en-US" sz="1920" dirty="0"/>
+          </a:p>
+          <a:p>
+            <a:pPr indent="0" marL="0">
+              <a:buNone/>
+            </a:pPr>
+            <a:r>
+              <a:rPr lang="en-US" sz="1920" dirty="0">
                 <a:solidFill>
                   <a:srgbClr val="003A63"/>
                 </a:solidFill>
@@ -12469,7 +12469,7 @@
               </a:rPr>
               <a:t>• 3. Which issue can make a quantitative lab result difficult to interpret?</a:t>
             </a:r>
-            <a:endParaRPr lang="en-US" sz="2100" dirty="0"/>
+            <a:endParaRPr lang="en-US" sz="1920" dirty="0"/>
           </a:p>
         </p:txBody>
       </p:sp>
@@ -12481,12 +12481,12 @@
         </p:nvSpPr>
         <p:spPr>
           <a:xfrm>
-            <a:off x="7635240" y="1325880"/>
-            <a:ext cx="3474720" cy="1207008"/>
+            <a:off x="7543800" y="1325880"/>
+            <a:ext cx="3611880" cy="1261872"/>
           </a:xfrm>
           <a:prstGeom prst="roundRect">
             <a:avLst>
-              <a:gd name="adj" fmla="val 9091"/>
+              <a:gd name="adj" fmla="val 8696"/>
             </a:avLst>
           </a:prstGeom>
           <a:solidFill>
@@ -12508,8 +12508,8 @@
         </p:nvSpPr>
         <p:spPr>
           <a:xfrm>
-            <a:off x="7799832" y="1472184"/>
-            <a:ext cx="3145536" cy="256032"/>
+            <a:off x="7708392" y="1453896"/>
+            <a:ext cx="3282696" cy="228600"/>
           </a:xfrm>
           <a:prstGeom prst="rect">
             <a:avLst/>
@@ -12525,7 +12525,7 @@
               <a:buNone/>
             </a:pPr>
             <a:r>
-              <a:rPr lang="en-US" sz="1300" b="1" dirty="0">
+              <a:rPr lang="en-US" sz="1220" b="1" dirty="0">
                 <a:solidFill>
                   <a:srgbClr val="0068B7"/>
                 </a:solidFill>
@@ -12535,7 +12535,7 @@
               </a:rPr>
               <a:t>Data decision</a:t>
             </a:r>
-            <a:endParaRPr lang="en-US" sz="1300" dirty="0"/>
+            <a:endParaRPr lang="en-US" sz="1220" dirty="0"/>
           </a:p>
         </p:txBody>
       </p:sp>
@@ -12547,8 +12547,8 @@
         </p:nvSpPr>
         <p:spPr>
           <a:xfrm>
-            <a:off x="7799832" y="1801368"/>
-            <a:ext cx="3145536" cy="640080"/>
+            <a:off x="7708392" y="1764792"/>
+            <a:ext cx="3282696" cy="749808"/>
           </a:xfrm>
           <a:prstGeom prst="rect">
             <a:avLst/>
@@ -12566,7 +12566,7 @@
               <a:buNone/>
             </a:pPr>
             <a:r>
-              <a:rPr lang="en-US" sz="1320" dirty="0">
+              <a:rPr lang="en-US" sz="1220" dirty="0">
                 <a:solidFill>
                   <a:srgbClr val="17364A"/>
                 </a:solidFill>
@@ -12576,7 +12576,7 @@
               </a:rPr>
               <a:t>1. Why is terminology mapping important for AI-supported surveillance?</a:t>
             </a:r>
-            <a:endParaRPr lang="en-US" sz="1320" dirty="0"/>
+            <a:endParaRPr lang="en-US" sz="1220" dirty="0"/>
           </a:p>
         </p:txBody>
       </p:sp>
@@ -12588,12 +12588,12 @@
         </p:nvSpPr>
         <p:spPr>
           <a:xfrm>
-            <a:off x="7635240" y="2670048"/>
-            <a:ext cx="3474720" cy="1377086"/>
+            <a:off x="7543800" y="2724912"/>
+            <a:ext cx="3611880" cy="1527048"/>
           </a:xfrm>
           <a:prstGeom prst="roundRect">
             <a:avLst>
-              <a:gd name="adj" fmla="val 7968"/>
+              <a:gd name="adj" fmla="val 7186"/>
             </a:avLst>
           </a:prstGeom>
           <a:solidFill>
@@ -12615,8 +12615,8 @@
         </p:nvSpPr>
         <p:spPr>
           <a:xfrm>
-            <a:off x="7799832" y="2816352"/>
-            <a:ext cx="3145536" cy="256032"/>
+            <a:off x="7708392" y="2852928"/>
+            <a:ext cx="3282696" cy="228600"/>
           </a:xfrm>
           <a:prstGeom prst="rect">
             <a:avLst/>
@@ -12632,7 +12632,7 @@
               <a:buNone/>
             </a:pPr>
             <a:r>
-              <a:rPr lang="en-US" sz="1300" b="1" dirty="0">
+              <a:rPr lang="en-US" sz="1220" b="1" dirty="0">
                 <a:solidFill>
                   <a:srgbClr val="0068B7"/>
                 </a:solidFill>
@@ -12642,7 +12642,7 @@
               </a:rPr>
               <a:t>Concept checkpoints</a:t>
             </a:r>
-            <a:endParaRPr lang="en-US" sz="1300" dirty="0"/>
+            <a:endParaRPr lang="en-US" sz="1220" dirty="0"/>
           </a:p>
         </p:txBody>
       </p:sp>
@@ -12654,8 +12654,8 @@
         </p:nvSpPr>
         <p:spPr>
           <a:xfrm>
-            <a:off x="7818120" y="3182112"/>
-            <a:ext cx="3090672" cy="718718"/>
+            <a:off x="7726680" y="3182112"/>
+            <a:ext cx="3227832" cy="960120"/>
           </a:xfrm>
           <a:prstGeom prst="rect">
             <a:avLst/>
@@ -12673,7 +12673,7 @@
               <a:buNone/>
             </a:pPr>
             <a:r>
-              <a:rPr lang="en-US" sz="1220" dirty="0">
+              <a:rPr lang="en-US" sz="1140" dirty="0">
                 <a:solidFill>
                   <a:srgbClr val="17364A"/>
                 </a:solidFill>
@@ -12683,14 +12683,14 @@
               </a:rPr>
               <a:t>1.</a:t>
             </a:r>
-            <a:endParaRPr lang="en-US" sz="1220" dirty="0"/>
-          </a:p>
-          <a:p>
-            <a:pPr indent="0" marL="0">
-              <a:buNone/>
-            </a:pPr>
-            <a:r>
-              <a:rPr lang="en-US" sz="1220" dirty="0">
+            <a:endParaRPr lang="en-US" sz="1140" dirty="0"/>
+          </a:p>
+          <a:p>
+            <a:pPr indent="0" marL="0">
+              <a:buNone/>
+            </a:pPr>
+            <a:r>
+              <a:rPr lang="en-US" sz="1140" dirty="0">
                 <a:solidFill>
                   <a:srgbClr val="17364A"/>
                 </a:solidFill>
@@ -12698,16 +12698,16 @@
                 <a:ea typeface="Aptos" pitchFamily="34" charset="-122"/>
                 <a:cs typeface="Aptos" pitchFamily="34" charset="-120"/>
               </a:rPr>
-              <a:t>Why is terminology mapping important for AI-supported surveillance?</a:t>
-            </a:r>
-            <a:endParaRPr lang="en-US" sz="1220" dirty="0"/>
-          </a:p>
-          <a:p>
-            <a:pPr indent="0" marL="0">
-              <a:buNone/>
-            </a:pPr>
-            <a:r>
-              <a:rPr lang="en-US" sz="1220" dirty="0">
+              <a:t>Why is terminology mapping important for.</a:t>
+            </a:r>
+            <a:endParaRPr lang="en-US" sz="1140" dirty="0"/>
+          </a:p>
+          <a:p>
+            <a:pPr indent="0" marL="0">
+              <a:buNone/>
+            </a:pPr>
+            <a:r>
+              <a:rPr lang="en-US" sz="1140" dirty="0">
                 <a:solidFill>
                   <a:srgbClr val="17364A"/>
                 </a:solidFill>
@@ -12717,7 +12717,7 @@
               </a:rPr>
               <a:t>2.</a:t>
             </a:r>
-            <a:endParaRPr lang="en-US" sz="1220" dirty="0"/>
+            <a:endParaRPr lang="en-US" sz="1140" dirty="0"/>
           </a:p>
         </p:txBody>
       </p:sp>
@@ -12729,12 +12729,12 @@
         </p:nvSpPr>
         <p:spPr>
           <a:xfrm>
-            <a:off x="7635240" y="4184294"/>
-            <a:ext cx="3474720" cy="1466698"/>
+            <a:off x="7543800" y="4389120"/>
+            <a:ext cx="3611880" cy="1261872"/>
           </a:xfrm>
           <a:prstGeom prst="roundRect">
             <a:avLst>
-              <a:gd name="adj" fmla="val 7481"/>
+              <a:gd name="adj" fmla="val 8696"/>
             </a:avLst>
           </a:prstGeom>
           <a:solidFill>
@@ -12756,8 +12756,8 @@
         </p:nvSpPr>
         <p:spPr>
           <a:xfrm>
-            <a:off x="7799832" y="4330598"/>
-            <a:ext cx="3145536" cy="256032"/>
+            <a:off x="7708392" y="4517136"/>
+            <a:ext cx="3282696" cy="228600"/>
           </a:xfrm>
           <a:prstGeom prst="rect">
             <a:avLst/>
@@ -12773,7 +12773,7 @@
               <a:buNone/>
             </a:pPr>
             <a:r>
-              <a:rPr lang="en-US" sz="1300" b="1" dirty="0">
+              <a:rPr lang="en-US" sz="1220" b="1" dirty="0">
                 <a:solidFill>
                   <a:srgbClr val="0068B7"/>
                 </a:solidFill>
@@ -12783,7 +12783,7 @@
               </a:rPr>
               <a:t>How to validate</a:t>
             </a:r>
-            <a:endParaRPr lang="en-US" sz="1300" dirty="0"/>
+            <a:endParaRPr lang="en-US" sz="1220" dirty="0"/>
           </a:p>
         </p:txBody>
       </p:sp>
@@ -12795,8 +12795,8 @@
         </p:nvSpPr>
         <p:spPr>
           <a:xfrm>
-            <a:off x="7799832" y="4659782"/>
-            <a:ext cx="3145536" cy="899770"/>
+            <a:off x="7708392" y="4828032"/>
+            <a:ext cx="3282696" cy="749808"/>
           </a:xfrm>
           <a:prstGeom prst="rect">
             <a:avLst/>
@@ -12814,7 +12814,7 @@
               <a:buNone/>
             </a:pPr>
             <a:r>
-              <a:rPr lang="en-US" sz="1320" dirty="0">
+              <a:rPr lang="en-US" sz="1220" dirty="0">
                 <a:solidFill>
                   <a:srgbClr val="17364A"/>
                 </a:solidFill>
@@ -12822,9 +12822,9 @@
                 <a:ea typeface="Aptos" pitchFamily="34" charset="-122"/>
                 <a:cs typeface="Aptos" pitchFamily="34" charset="-120"/>
               </a:rPr>
-              <a:t>Use the assignment to test whether you can explain the concept, apply it to a realistic public health situation, and identify what would need review before the work moves forward.</a:t>
-            </a:r>
-            <a:endParaRPr lang="en-US" sz="1320" dirty="0"/>
+              <a:t>Use the assignment to test whether you can explain the concept, apply it to a.</a:t>
+            </a:r>
+            <a:endParaRPr lang="en-US" sz="1220" dirty="0"/>
           </a:p>
         </p:txBody>
       </p:sp>
@@ -13115,8 +13115,8 @@
         </p:nvSpPr>
         <p:spPr>
           <a:xfrm>
-            <a:off x="868680" y="1508760"/>
-            <a:ext cx="6309360" cy="4160520"/>
+            <a:off x="822960" y="1463040"/>
+            <a:ext cx="6565392" cy="4343400"/>
           </a:xfrm>
           <a:prstGeom prst="rect">
             <a:avLst/>
@@ -13134,7 +13134,7 @@
               <a:buNone/>
             </a:pPr>
             <a:r>
-              <a:rPr lang="en-US" sz="2100" dirty="0">
+              <a:rPr lang="en-US" sz="1920" dirty="0">
                 <a:solidFill>
                   <a:srgbClr val="003A63"/>
                 </a:solidFill>
@@ -13144,14 +13144,14 @@
               </a:rPr>
               <a:t>• CDC PHIN VADS</a:t>
             </a:r>
-            <a:endParaRPr lang="en-US" sz="2100" dirty="0"/>
-          </a:p>
-          <a:p>
-            <a:pPr indent="0" marL="0">
-              <a:buNone/>
-            </a:pPr>
-            <a:r>
-              <a:rPr lang="en-US" sz="2100" dirty="0">
+            <a:endParaRPr lang="en-US" sz="1920" dirty="0"/>
+          </a:p>
+          <a:p>
+            <a:pPr indent="0" marL="0">
+              <a:buNone/>
+            </a:pPr>
+            <a:r>
+              <a:rPr lang="en-US" sz="1920" dirty="0">
                 <a:solidFill>
                   <a:srgbClr val="003A63"/>
                 </a:solidFill>
@@ -13161,14 +13161,14 @@
               </a:rPr>
               <a:t>• Reportable Condition Mapping Table resources</a:t>
             </a:r>
-            <a:endParaRPr lang="en-US" sz="2100" dirty="0"/>
-          </a:p>
-          <a:p>
-            <a:pPr indent="0" marL="0">
-              <a:buNone/>
-            </a:pPr>
-            <a:r>
-              <a:rPr lang="en-US" sz="2100" dirty="0">
+            <a:endParaRPr lang="en-US" sz="1920" dirty="0"/>
+          </a:p>
+          <a:p>
+            <a:pPr indent="0" marL="0">
+              <a:buNone/>
+            </a:pPr>
+            <a:r>
+              <a:rPr lang="en-US" sz="1920" dirty="0">
                 <a:solidFill>
                   <a:srgbClr val="003A63"/>
                 </a:solidFill>
@@ -13178,7 +13178,7 @@
               </a:rPr>
               <a:t>• APHL laboratory informatics resources</a:t>
             </a:r>
-            <a:endParaRPr lang="en-US" sz="2100" dirty="0"/>
+            <a:endParaRPr lang="en-US" sz="1920" dirty="0"/>
           </a:p>
         </p:txBody>
       </p:sp>
@@ -13190,12 +13190,12 @@
         </p:nvSpPr>
         <p:spPr>
           <a:xfrm>
-            <a:off x="7635240" y="1325880"/>
-            <a:ext cx="3474720" cy="1207008"/>
+            <a:off x="7543800" y="1325880"/>
+            <a:ext cx="3611880" cy="1261872"/>
           </a:xfrm>
           <a:prstGeom prst="roundRect">
             <a:avLst>
-              <a:gd name="adj" fmla="val 9091"/>
+              <a:gd name="adj" fmla="val 8696"/>
             </a:avLst>
           </a:prstGeom>
           <a:solidFill>
@@ -13217,8 +13217,8 @@
         </p:nvSpPr>
         <p:spPr>
           <a:xfrm>
-            <a:off x="7799832" y="1472184"/>
-            <a:ext cx="3145536" cy="256032"/>
+            <a:off x="7708392" y="1453896"/>
+            <a:ext cx="3282696" cy="228600"/>
           </a:xfrm>
           <a:prstGeom prst="rect">
             <a:avLst/>
@@ -13234,7 +13234,7 @@
               <a:buNone/>
             </a:pPr>
             <a:r>
-              <a:rPr lang="en-US" sz="1300" b="1" dirty="0">
+              <a:rPr lang="en-US" sz="1220" b="1" dirty="0">
                 <a:solidFill>
                   <a:srgbClr val="0068B7"/>
                 </a:solidFill>
@@ -13244,7 +13244,7 @@
               </a:rPr>
               <a:t>Data decision</a:t>
             </a:r>
-            <a:endParaRPr lang="en-US" sz="1300" dirty="0"/>
+            <a:endParaRPr lang="en-US" sz="1220" dirty="0"/>
           </a:p>
         </p:txBody>
       </p:sp>
@@ -13256,8 +13256,8 @@
         </p:nvSpPr>
         <p:spPr>
           <a:xfrm>
-            <a:off x="7799832" y="1801368"/>
-            <a:ext cx="3145536" cy="640080"/>
+            <a:off x="7708392" y="1764792"/>
+            <a:ext cx="3282696" cy="749808"/>
           </a:xfrm>
           <a:prstGeom prst="rect">
             <a:avLst/>
@@ -13275,7 +13275,7 @@
               <a:buNone/>
             </a:pPr>
             <a:r>
-              <a:rPr lang="en-US" sz="1320" dirty="0">
+              <a:rPr lang="en-US" sz="1220" dirty="0">
                 <a:solidFill>
                   <a:srgbClr val="17364A"/>
                 </a:solidFill>
@@ -13285,7 +13285,7 @@
               </a:rPr>
               <a:t>CDC PHIN VADS</a:t>
             </a:r>
-            <a:endParaRPr lang="en-US" sz="1320" dirty="0"/>
+            <a:endParaRPr lang="en-US" sz="1220" dirty="0"/>
           </a:p>
         </p:txBody>
       </p:sp>
@@ -13297,12 +13297,12 @@
         </p:nvSpPr>
         <p:spPr>
           <a:xfrm>
-            <a:off x="7635240" y="2670048"/>
-            <a:ext cx="3474720" cy="1377086"/>
+            <a:off x="7543800" y="2724912"/>
+            <a:ext cx="3611880" cy="1527048"/>
           </a:xfrm>
           <a:prstGeom prst="roundRect">
             <a:avLst>
-              <a:gd name="adj" fmla="val 7968"/>
+              <a:gd name="adj" fmla="val 7186"/>
             </a:avLst>
           </a:prstGeom>
           <a:solidFill>
@@ -13324,8 +13324,8 @@
         </p:nvSpPr>
         <p:spPr>
           <a:xfrm>
-            <a:off x="7799832" y="2816352"/>
-            <a:ext cx="3145536" cy="256032"/>
+            <a:off x="7708392" y="2852928"/>
+            <a:ext cx="3282696" cy="228600"/>
           </a:xfrm>
           <a:prstGeom prst="rect">
             <a:avLst/>
@@ -13341,7 +13341,7 @@
               <a:buNone/>
             </a:pPr>
             <a:r>
-              <a:rPr lang="en-US" sz="1300" b="1" dirty="0">
+              <a:rPr lang="en-US" sz="1220" b="1" dirty="0">
                 <a:solidFill>
                   <a:srgbClr val="0068B7"/>
                 </a:solidFill>
@@ -13351,7 +13351,7 @@
               </a:rPr>
               <a:t>Concept checkpoints</a:t>
             </a:r>
-            <a:endParaRPr lang="en-US" sz="1300" dirty="0"/>
+            <a:endParaRPr lang="en-US" sz="1220" dirty="0"/>
           </a:p>
         </p:txBody>
       </p:sp>
@@ -13363,8 +13363,8 @@
         </p:nvSpPr>
         <p:spPr>
           <a:xfrm>
-            <a:off x="7818120" y="3182112"/>
-            <a:ext cx="3090672" cy="718718"/>
+            <a:off x="7726680" y="3182112"/>
+            <a:ext cx="3227832" cy="960120"/>
           </a:xfrm>
           <a:prstGeom prst="rect">
             <a:avLst/>
@@ -13382,7 +13382,7 @@
               <a:buNone/>
             </a:pPr>
             <a:r>
-              <a:rPr lang="en-US" sz="1220" dirty="0">
+              <a:rPr lang="en-US" sz="1140" dirty="0">
                 <a:solidFill>
                   <a:srgbClr val="17364A"/>
                 </a:solidFill>
@@ -13392,14 +13392,14 @@
               </a:rPr>
               <a:t>CDC PHIN VADS</a:t>
             </a:r>
-            <a:endParaRPr lang="en-US" sz="1220" dirty="0"/>
-          </a:p>
-          <a:p>
-            <a:pPr indent="0" marL="0">
-              <a:buNone/>
-            </a:pPr>
-            <a:r>
-              <a:rPr lang="en-US" sz="1220" dirty="0">
+            <a:endParaRPr lang="en-US" sz="1140" dirty="0"/>
+          </a:p>
+          <a:p>
+            <a:pPr indent="0" marL="0">
+              <a:buNone/>
+            </a:pPr>
+            <a:r>
+              <a:rPr lang="en-US" sz="1140" dirty="0">
                 <a:solidFill>
                   <a:srgbClr val="17364A"/>
                 </a:solidFill>
@@ -13409,14 +13409,14 @@
               </a:rPr>
               <a:t>Reportable Condition Mapping Table resources</a:t>
             </a:r>
-            <a:endParaRPr lang="en-US" sz="1220" dirty="0"/>
-          </a:p>
-          <a:p>
-            <a:pPr indent="0" marL="0">
-              <a:buNone/>
-            </a:pPr>
-            <a:r>
-              <a:rPr lang="en-US" sz="1220" dirty="0">
+            <a:endParaRPr lang="en-US" sz="1140" dirty="0"/>
+          </a:p>
+          <a:p>
+            <a:pPr indent="0" marL="0">
+              <a:buNone/>
+            </a:pPr>
+            <a:r>
+              <a:rPr lang="en-US" sz="1140" dirty="0">
                 <a:solidFill>
                   <a:srgbClr val="17364A"/>
                 </a:solidFill>
@@ -13426,7 +13426,7 @@
               </a:rPr>
               <a:t>APHL laboratory informatics resources</a:t>
             </a:r>
-            <a:endParaRPr lang="en-US" sz="1220" dirty="0"/>
+            <a:endParaRPr lang="en-US" sz="1140" dirty="0"/>
           </a:p>
         </p:txBody>
       </p:sp>
@@ -13438,12 +13438,12 @@
         </p:nvSpPr>
         <p:spPr>
           <a:xfrm>
-            <a:off x="7635240" y="4184294"/>
-            <a:ext cx="3474720" cy="1466698"/>
+            <a:off x="7543800" y="4389120"/>
+            <a:ext cx="3611880" cy="1261872"/>
           </a:xfrm>
           <a:prstGeom prst="roundRect">
             <a:avLst>
-              <a:gd name="adj" fmla="val 7481"/>
+              <a:gd name="adj" fmla="val 8696"/>
             </a:avLst>
           </a:prstGeom>
           <a:solidFill>
@@ -13465,8 +13465,8 @@
         </p:nvSpPr>
         <p:spPr>
           <a:xfrm>
-            <a:off x="7799832" y="4330598"/>
-            <a:ext cx="3145536" cy="256032"/>
+            <a:off x="7708392" y="4517136"/>
+            <a:ext cx="3282696" cy="228600"/>
           </a:xfrm>
           <a:prstGeom prst="rect">
             <a:avLst/>
@@ -13482,7 +13482,7 @@
               <a:buNone/>
             </a:pPr>
             <a:r>
-              <a:rPr lang="en-US" sz="1300" b="1" dirty="0">
+              <a:rPr lang="en-US" sz="1220" b="1" dirty="0">
                 <a:solidFill>
                   <a:srgbClr val="0068B7"/>
                 </a:solidFill>
@@ -13492,7 +13492,7 @@
               </a:rPr>
               <a:t>How to validate</a:t>
             </a:r>
-            <a:endParaRPr lang="en-US" sz="1300" dirty="0"/>
+            <a:endParaRPr lang="en-US" sz="1220" dirty="0"/>
           </a:p>
         </p:txBody>
       </p:sp>
@@ -13504,8 +13504,8 @@
         </p:nvSpPr>
         <p:spPr>
           <a:xfrm>
-            <a:off x="7799832" y="4659782"/>
-            <a:ext cx="3145536" cy="899770"/>
+            <a:off x="7708392" y="4828032"/>
+            <a:ext cx="3282696" cy="749808"/>
           </a:xfrm>
           <a:prstGeom prst="rect">
             <a:avLst/>
@@ -13523,7 +13523,7 @@
               <a:buNone/>
             </a:pPr>
             <a:r>
-              <a:rPr lang="en-US" sz="1320" dirty="0">
+              <a:rPr lang="en-US" sz="1220" dirty="0">
                 <a:solidFill>
                   <a:srgbClr val="17364A"/>
                 </a:solidFill>
@@ -13531,9 +13531,9 @@
                 <a:ea typeface="Aptos" pitchFamily="34" charset="-122"/>
                 <a:cs typeface="Aptos" pitchFamily="34" charset="-120"/>
               </a:rPr>
-              <a:t>Connect the concept to data quality, model performance, validation evidence, monitoring measures, and decisions that remain under human control.</a:t>
-            </a:r>
-            <a:endParaRPr lang="en-US" sz="1320" dirty="0"/>
+              <a:t>Connect the concept to data quality, model performance, validation evidence,.</a:t>
+            </a:r>
+            <a:endParaRPr lang="en-US" sz="1220" dirty="0"/>
           </a:p>
         </p:txBody>
       </p:sp>
@@ -13851,7 +13851,7 @@
                 <a:ea typeface="Aptos" pitchFamily="34" charset="-122"/>
                 <a:cs typeface="Aptos" pitchFamily="34" charset="-120"/>
               </a:rPr>
-              <a:t>• Play 11: Build and Deploy AI Solutions - This lesson informs Play 11 by helping learners.</a:t>
+              <a:t>• Play 11: Build and Deploy AI Solutions - This lesson informs Play 11 by.</a:t>
             </a:r>
             <a:endParaRPr lang="en-US" sz="1900" dirty="0"/>
           </a:p>
@@ -13868,7 +13868,7 @@
                 <a:ea typeface="Aptos" pitchFamily="34" charset="-122"/>
                 <a:cs typeface="Aptos" pitchFamily="34" charset="-120"/>
               </a:rPr>
-              <a:t>• Play 7: Prioritize Use Cases - This lesson informs Play 7 by helping learners connect the.</a:t>
+              <a:t>• Play 7: Prioritize Use Cases - This lesson informs Play 7 by helping.</a:t>
             </a:r>
             <a:endParaRPr lang="en-US" sz="1900" dirty="0"/>
           </a:p>
@@ -13885,7 +13885,7 @@
                 <a:ea typeface="Aptos" pitchFamily="34" charset="-122"/>
                 <a:cs typeface="Aptos" pitchFamily="34" charset="-120"/>
               </a:rPr>
-              <a:t>• Play 2: Readiness Assessment - This lesson informs Play 2 by helping learners connect the.</a:t>
+              <a:t>• Play 2: Readiness Assessment - This lesson informs Play 2 by helping.</a:t>
             </a:r>
             <a:endParaRPr lang="en-US" sz="1900" dirty="0"/>
           </a:p>
@@ -13902,7 +13902,7 @@
                 <a:ea typeface="Aptos" pitchFamily="34" charset="-122"/>
                 <a:cs typeface="Aptos" pitchFamily="34" charset="-120"/>
               </a:rPr>
-              <a:t>• Play 1: Vision &amp; Guardrails - This lesson informs Play 1 by helping learners connect the.</a:t>
+              <a:t>• Play 1: Vision &amp; Guardrails - This lesson informs Play 1 by helping learners.</a:t>
             </a:r>
             <a:endParaRPr lang="en-US" sz="1900" dirty="0"/>
           </a:p>
@@ -13943,8 +13943,8 @@
         </p:nvSpPr>
         <p:spPr>
           <a:xfrm>
-            <a:off x="8211312" y="1563624"/>
-            <a:ext cx="2734056" cy="256032"/>
+            <a:off x="8211312" y="1545336"/>
+            <a:ext cx="2734056" cy="228600"/>
           </a:xfrm>
           <a:prstGeom prst="rect">
             <a:avLst/>
@@ -13960,7 +13960,7 @@
               <a:buNone/>
             </a:pPr>
             <a:r>
-              <a:rPr lang="en-US" sz="1300" b="1" dirty="0">
+              <a:rPr lang="en-US" sz="1220" b="1" dirty="0">
                 <a:solidFill>
                   <a:srgbClr val="0068B7"/>
                 </a:solidFill>
@@ -13970,7 +13970,7 @@
               </a:rPr>
               <a:t>Apply the lesson</a:t>
             </a:r>
-            <a:endParaRPr lang="en-US" sz="1300" dirty="0"/>
+            <a:endParaRPr lang="en-US" sz="1220" dirty="0"/>
           </a:p>
         </p:txBody>
       </p:sp>
@@ -13982,8 +13982,8 @@
         </p:nvSpPr>
         <p:spPr>
           <a:xfrm>
-            <a:off x="8211312" y="1892808"/>
-            <a:ext cx="2734056" cy="1536192"/>
+            <a:off x="8211312" y="1856232"/>
+            <a:ext cx="2734056" cy="1591056"/>
           </a:xfrm>
           <a:prstGeom prst="rect">
             <a:avLst/>
@@ -14001,7 +14001,7 @@
               <a:buNone/>
             </a:pPr>
             <a:r>
-              <a:rPr lang="en-US" sz="1320" dirty="0">
+              <a:rPr lang="en-US" sz="1220" dirty="0">
                 <a:solidFill>
                   <a:srgbClr val="17364A"/>
                 </a:solidFill>
@@ -14009,9 +14009,9 @@
                 <a:ea typeface="Aptos" pitchFamily="34" charset="-122"/>
                 <a:cs typeface="Aptos" pitchFamily="34" charset="-120"/>
               </a:rPr>
-              <a:t>Use the related plays to identify decisions, participants, timing, approvals, and documentation needed for responsible implementation.</a:t>
-            </a:r>
-            <a:endParaRPr lang="en-US" sz="1320" dirty="0"/>
+              <a:t>Use the related plays to identify decisions, participants, timing, approvals,.</a:t>
+            </a:r>
+            <a:endParaRPr lang="en-US" sz="1220" dirty="0"/>
           </a:p>
         </p:txBody>
       </p:sp>
@@ -14050,8 +14050,8 @@
         </p:nvSpPr>
         <p:spPr>
           <a:xfrm>
-            <a:off x="8211312" y="3941064"/>
-            <a:ext cx="2734056" cy="256032"/>
+            <a:off x="8211312" y="3922776"/>
+            <a:ext cx="2734056" cy="228600"/>
           </a:xfrm>
           <a:prstGeom prst="rect">
             <a:avLst/>
@@ -14067,7 +14067,7 @@
               <a:buNone/>
             </a:pPr>
             <a:r>
-              <a:rPr lang="en-US" sz="1300" b="1" dirty="0">
+              <a:rPr lang="en-US" sz="1220" b="1" dirty="0">
                 <a:solidFill>
                   <a:srgbClr val="0068B7"/>
                 </a:solidFill>
@@ -14077,7 +14077,7 @@
               </a:rPr>
               <a:t>Use the play links to</a:t>
             </a:r>
-            <a:endParaRPr lang="en-US" sz="1300" dirty="0"/>
+            <a:endParaRPr lang="en-US" sz="1220" dirty="0"/>
           </a:p>
         </p:txBody>
       </p:sp>
@@ -14089,8 +14089,8 @@
         </p:nvSpPr>
         <p:spPr>
           <a:xfrm>
-            <a:off x="8229600" y="4306824"/>
-            <a:ext cx="2679192" cy="941832"/>
+            <a:off x="8229600" y="4251960"/>
+            <a:ext cx="2679192" cy="1033272"/>
           </a:xfrm>
           <a:prstGeom prst="rect">
             <a:avLst/>
@@ -14108,7 +14108,7 @@
               <a:buNone/>
             </a:pPr>
             <a:r>
-              <a:rPr lang="en-US" sz="1220" dirty="0">
+              <a:rPr lang="en-US" sz="1140" dirty="0">
                 <a:solidFill>
                   <a:srgbClr val="17364A"/>
                 </a:solidFill>
@@ -14118,14 +14118,14 @@
               </a:rPr>
               <a:t>Locate the decision point in the playbook sequence.</a:t>
             </a:r>
-            <a:endParaRPr lang="en-US" sz="1220" dirty="0"/>
-          </a:p>
-          <a:p>
-            <a:pPr indent="0" marL="0">
-              <a:buNone/>
-            </a:pPr>
-            <a:r>
-              <a:rPr lang="en-US" sz="1220" dirty="0">
+            <a:endParaRPr lang="en-US" sz="1140" dirty="0"/>
+          </a:p>
+          <a:p>
+            <a:pPr indent="0" marL="0">
+              <a:buNone/>
+            </a:pPr>
+            <a:r>
+              <a:rPr lang="en-US" sz="1140" dirty="0">
                 <a:solidFill>
                   <a:srgbClr val="17364A"/>
                 </a:solidFill>
@@ -14135,14 +14135,14 @@
               </a:rPr>
               <a:t>Identify who should participate in the work.</a:t>
             </a:r>
-            <a:endParaRPr lang="en-US" sz="1220" dirty="0"/>
-          </a:p>
-          <a:p>
-            <a:pPr indent="0" marL="0">
-              <a:buNone/>
-            </a:pPr>
-            <a:r>
-              <a:rPr lang="en-US" sz="1220" dirty="0">
+            <a:endParaRPr lang="en-US" sz="1140" dirty="0"/>
+          </a:p>
+          <a:p>
+            <a:pPr indent="0" marL="0">
+              <a:buNone/>
+            </a:pPr>
+            <a:r>
+              <a:rPr lang="en-US" sz="1140" dirty="0">
                 <a:solidFill>
                   <a:srgbClr val="17364A"/>
                 </a:solidFill>
@@ -14150,9 +14150,9 @@
                 <a:ea typeface="Aptos" pitchFamily="34" charset="-122"/>
                 <a:cs typeface="Aptos" pitchFamily="34" charset="-120"/>
               </a:rPr>
-              <a:t>Document the review, approval, or implementation step.</a:t>
-            </a:r>
-            <a:endParaRPr lang="en-US" sz="1220" dirty="0"/>
+              <a:t>Document the review, approval, or implementation.</a:t>
+            </a:r>
+            <a:endParaRPr lang="en-US" sz="1140" dirty="0"/>
           </a:p>
         </p:txBody>
       </p:sp>
@@ -14470,7 +14470,7 @@
                 <a:ea typeface="Aptos" pitchFamily="34" charset="-122"/>
                 <a:cs typeface="Aptos" pitchFamily="34" charset="-120"/>
               </a:rPr>
-              <a:t>• Tool 4: AI Policy Landscape Scan (Worksheet) - Use AI Policy Landscape Scan to translate this.</a:t>
+              <a:t>• Tool 4: AI Policy Landscape Scan (Worksheet) - Use AI Policy Landscape Scan.</a:t>
             </a:r>
             <a:endParaRPr lang="en-US" sz="1850" dirty="0"/>
           </a:p>
@@ -14487,7 +14487,7 @@
                 <a:ea typeface="Aptos" pitchFamily="34" charset="-122"/>
                 <a:cs typeface="Aptos" pitchFamily="34" charset="-120"/>
               </a:rPr>
-              <a:t>• Tool 5: AI Environmental and Resource Impact Review (Checklist) - Use AI Environmental and.</a:t>
+              <a:t>• Tool 5: AI Environmental and Resource Impact Review (Checklist) - Use AI.</a:t>
             </a:r>
             <a:endParaRPr lang="en-US" sz="1850" dirty="0"/>
           </a:p>
@@ -14504,7 +14504,7 @@
                 <a:ea typeface="Aptos" pitchFamily="34" charset="-122"/>
                 <a:cs typeface="Aptos" pitchFamily="34" charset="-120"/>
               </a:rPr>
-              <a:t>• Tool 6: Human-Centered AI Decision Rule Checklist (Checklist) - Use Human-Centered AI Decision.</a:t>
+              <a:t>• Tool 6: Human-Centered AI Decision Rule Checklist (Checklist) - Use.</a:t>
             </a:r>
             <a:endParaRPr lang="en-US" sz="1850" dirty="0"/>
           </a:p>
@@ -14521,7 +14521,7 @@
                 <a:ea typeface="Aptos" pitchFamily="34" charset="-122"/>
                 <a:cs typeface="Aptos" pitchFamily="34" charset="-120"/>
               </a:rPr>
-              <a:t>• Tool 8: AI Project Charter (Planning) - Use AI Project Charter to translate this lesson into a.</a:t>
+              <a:t>• Tool 8: AI Project Charter (Planning) - Use AI Project Charter to translate.</a:t>
             </a:r>
             <a:endParaRPr lang="en-US" sz="1850" dirty="0"/>
           </a:p>
@@ -14562,8 +14562,8 @@
         </p:nvSpPr>
         <p:spPr>
           <a:xfrm>
-            <a:off x="8211312" y="1563624"/>
-            <a:ext cx="2734056" cy="256032"/>
+            <a:off x="8211312" y="1545336"/>
+            <a:ext cx="2734056" cy="228600"/>
           </a:xfrm>
           <a:prstGeom prst="rect">
             <a:avLst/>
@@ -14579,7 +14579,7 @@
               <a:buNone/>
             </a:pPr>
             <a:r>
-              <a:rPr lang="en-US" sz="1300" b="1" dirty="0">
+              <a:rPr lang="en-US" sz="1220" b="1" dirty="0">
                 <a:solidFill>
                   <a:srgbClr val="0068B7"/>
                 </a:solidFill>
@@ -14589,7 +14589,7 @@
               </a:rPr>
               <a:t>Use the tools</a:t>
             </a:r>
-            <a:endParaRPr lang="en-US" sz="1300" dirty="0"/>
+            <a:endParaRPr lang="en-US" sz="1220" dirty="0"/>
           </a:p>
         </p:txBody>
       </p:sp>
@@ -14601,8 +14601,8 @@
         </p:nvSpPr>
         <p:spPr>
           <a:xfrm>
-            <a:off x="8211312" y="1892808"/>
-            <a:ext cx="2734056" cy="1536192"/>
+            <a:off x="8211312" y="1856232"/>
+            <a:ext cx="2734056" cy="1591056"/>
           </a:xfrm>
           <a:prstGeom prst="rect">
             <a:avLst/>
@@ -14620,7 +14620,7 @@
               <a:buNone/>
             </a:pPr>
             <a:r>
-              <a:rPr lang="en-US" sz="1320" dirty="0">
+              <a:rPr lang="en-US" sz="1220" dirty="0">
                 <a:solidFill>
                   <a:srgbClr val="17364A"/>
                 </a:solidFill>
@@ -14628,9 +14628,9 @@
                 <a:ea typeface="Aptos" pitchFamily="34" charset="-122"/>
                 <a:cs typeface="Aptos" pitchFamily="34" charset="-120"/>
               </a:rPr>
-              <a:t>Use linked tools when your department needs a structured worksheet, template, checklist, review process, or documentation artifact.</a:t>
-            </a:r>
-            <a:endParaRPr lang="en-US" sz="1320" dirty="0"/>
+              <a:t>Use linked tools when your department needs a structured worksheet, template,.</a:t>
+            </a:r>
+            <a:endParaRPr lang="en-US" sz="1220" dirty="0"/>
           </a:p>
         </p:txBody>
       </p:sp>
@@ -14669,8 +14669,8 @@
         </p:nvSpPr>
         <p:spPr>
           <a:xfrm>
-            <a:off x="8211312" y="3941064"/>
-            <a:ext cx="2734056" cy="256032"/>
+            <a:off x="8211312" y="3922776"/>
+            <a:ext cx="2734056" cy="228600"/>
           </a:xfrm>
           <a:prstGeom prst="rect">
             <a:avLst/>
@@ -14686,7 +14686,7 @@
               <a:buNone/>
             </a:pPr>
             <a:r>
-              <a:rPr lang="en-US" sz="1300" b="1" dirty="0">
+              <a:rPr lang="en-US" sz="1220" b="1" dirty="0">
                 <a:solidFill>
                   <a:srgbClr val="0068B7"/>
                 </a:solidFill>
@@ -14696,7 +14696,7 @@
               </a:rPr>
               <a:t>Tool selection cues</a:t>
             </a:r>
-            <a:endParaRPr lang="en-US" sz="1300" dirty="0"/>
+            <a:endParaRPr lang="en-US" sz="1220" dirty="0"/>
           </a:p>
         </p:txBody>
       </p:sp>
@@ -14708,8 +14708,8 @@
         </p:nvSpPr>
         <p:spPr>
           <a:xfrm>
-            <a:off x="8229600" y="4306824"/>
-            <a:ext cx="2679192" cy="941832"/>
+            <a:off x="8229600" y="4251960"/>
+            <a:ext cx="2679192" cy="1033272"/>
           </a:xfrm>
           <a:prstGeom prst="rect">
             <a:avLst/>
@@ -14727,7 +14727,7 @@
               <a:buNone/>
             </a:pPr>
             <a:r>
-              <a:rPr lang="en-US" sz="1220" dirty="0">
+              <a:rPr lang="en-US" sz="1140" dirty="0">
                 <a:solidFill>
                   <a:srgbClr val="17364A"/>
                 </a:solidFill>
@@ -14737,14 +14737,14 @@
               </a:rPr>
               <a:t>Use a tool when no comparable local process exists.</a:t>
             </a:r>
-            <a:endParaRPr lang="en-US" sz="1220" dirty="0"/>
-          </a:p>
-          <a:p>
-            <a:pPr indent="0" marL="0">
-              <a:buNone/>
-            </a:pPr>
-            <a:r>
-              <a:rPr lang="en-US" sz="1220" dirty="0">
+            <a:endParaRPr lang="en-US" sz="1140" dirty="0"/>
+          </a:p>
+          <a:p>
+            <a:pPr indent="0" marL="0">
+              <a:buNone/>
+            </a:pPr>
+            <a:r>
+              <a:rPr lang="en-US" sz="1140" dirty="0">
                 <a:solidFill>
                   <a:srgbClr val="17364A"/>
                 </a:solidFill>
@@ -14752,16 +14752,16 @@
                 <a:ea typeface="Aptos" pitchFamily="34" charset="-122"/>
                 <a:cs typeface="Aptos" pitchFamily="34" charset="-120"/>
               </a:rPr>
-              <a:t>Adapt existing department templates when they already fit the.</a:t>
-            </a:r>
-            <a:endParaRPr lang="en-US" sz="1220" dirty="0"/>
-          </a:p>
-          <a:p>
-            <a:pPr indent="0" marL="0">
-              <a:buNone/>
-            </a:pPr>
-            <a:r>
-              <a:rPr lang="en-US" sz="1220" dirty="0">
+              <a:t>Adapt existing department templates when they.</a:t>
+            </a:r>
+            <a:endParaRPr lang="en-US" sz="1140" dirty="0"/>
+          </a:p>
+          <a:p>
+            <a:pPr indent="0" marL="0">
+              <a:buNone/>
+            </a:pPr>
+            <a:r>
+              <a:rPr lang="en-US" sz="1140" dirty="0">
                 <a:solidFill>
                   <a:srgbClr val="17364A"/>
                 </a:solidFill>
@@ -14769,9 +14769,9 @@
                 <a:ea typeface="Aptos" pitchFamily="34" charset="-122"/>
                 <a:cs typeface="Aptos" pitchFamily="34" charset="-120"/>
               </a:rPr>
-              <a:t>Save the completed artifact as evidence of the decision.</a:t>
-            </a:r>
-            <a:endParaRPr lang="en-US" sz="1220" dirty="0"/>
+              <a:t>Save the completed artifact as evidence of the.</a:t>
+            </a:r>
+            <a:endParaRPr lang="en-US" sz="1140" dirty="0"/>
           </a:p>
         </p:txBody>
       </p:sp>
@@ -15062,8 +15062,8 @@
         </p:nvSpPr>
         <p:spPr>
           <a:xfrm>
-            <a:off x="868680" y="1508760"/>
-            <a:ext cx="6309360" cy="4160520"/>
+            <a:off x="822960" y="1463040"/>
+            <a:ext cx="6565392" cy="4343400"/>
           </a:xfrm>
           <a:prstGeom prst="rect">
             <a:avLst/>
@@ -15081,7 +15081,7 @@
               <a:buNone/>
             </a:pPr>
             <a:r>
-              <a:rPr lang="en-US" sz="2100" dirty="0">
+              <a:rPr lang="en-US" sz="1920" dirty="0">
                 <a:solidFill>
                   <a:srgbClr val="003A63"/>
                 </a:solidFill>
@@ -15091,14 +15091,14 @@
               </a:rPr>
               <a:t>• Describe how ELR supports public health surveillance and response.</a:t>
             </a:r>
-            <a:endParaRPr lang="en-US" sz="2100" dirty="0"/>
-          </a:p>
-          <a:p>
-            <a:pPr indent="0" marL="0">
-              <a:buNone/>
-            </a:pPr>
-            <a:r>
-              <a:rPr lang="en-US" sz="2100" dirty="0">
+            <a:endParaRPr lang="en-US" sz="1920" dirty="0"/>
+          </a:p>
+          <a:p>
+            <a:pPr indent="0" marL="0">
+              <a:buNone/>
+            </a:pPr>
+            <a:r>
+              <a:rPr lang="en-US" sz="1920" dirty="0">
                 <a:solidFill>
                   <a:srgbClr val="003A63"/>
                 </a:solidFill>
@@ -15106,16 +15106,16 @@
                 <a:ea typeface="Aptos" pitchFamily="34" charset="-122"/>
                 <a:cs typeface="Aptos" pitchFamily="34" charset="-120"/>
               </a:rPr>
-              <a:t>• Explain why LOINC, SNOMED CT, UCUM, local codes, and reportable condition mappings matter for.</a:t>
-            </a:r>
-            <a:endParaRPr lang="en-US" sz="2100" dirty="0"/>
-          </a:p>
-          <a:p>
-            <a:pPr indent="0" marL="0">
-              <a:buNone/>
-            </a:pPr>
-            <a:r>
-              <a:rPr lang="en-US" sz="2100" dirty="0">
+              <a:t>• Explain why LOINC, SNOMED CT, UCUM, local codes, and reportable condition.</a:t>
+            </a:r>
+            <a:endParaRPr lang="en-US" sz="1920" dirty="0"/>
+          </a:p>
+          <a:p>
+            <a:pPr indent="0" marL="0">
+              <a:buNone/>
+            </a:pPr>
+            <a:r>
+              <a:rPr lang="en-US" sz="1920" dirty="0">
                 <a:solidFill>
                   <a:srgbClr val="003A63"/>
                 </a:solidFill>
@@ -15125,7 +15125,7 @@
               </a:rPr>
               <a:t>• Identify common laboratory data quality problems that can affect AI outputs.</a:t>
             </a:r>
-            <a:endParaRPr lang="en-US" sz="2100" dirty="0"/>
+            <a:endParaRPr lang="en-US" sz="1920" dirty="0"/>
           </a:p>
         </p:txBody>
       </p:sp>
@@ -15137,12 +15137,12 @@
         </p:nvSpPr>
         <p:spPr>
           <a:xfrm>
-            <a:off x="7635240" y="1325880"/>
-            <a:ext cx="3474720" cy="1207008"/>
+            <a:off x="7543800" y="1325880"/>
+            <a:ext cx="3611880" cy="1261872"/>
           </a:xfrm>
           <a:prstGeom prst="roundRect">
             <a:avLst>
-              <a:gd name="adj" fmla="val 9091"/>
+              <a:gd name="adj" fmla="val 8696"/>
             </a:avLst>
           </a:prstGeom>
           <a:solidFill>
@@ -15164,8 +15164,8 @@
         </p:nvSpPr>
         <p:spPr>
           <a:xfrm>
-            <a:off x="7799832" y="1472184"/>
-            <a:ext cx="3145536" cy="256032"/>
+            <a:off x="7708392" y="1453896"/>
+            <a:ext cx="3282696" cy="228600"/>
           </a:xfrm>
           <a:prstGeom prst="rect">
             <a:avLst/>
@@ -15181,7 +15181,7 @@
               <a:buNone/>
             </a:pPr>
             <a:r>
-              <a:rPr lang="en-US" sz="1300" b="1" dirty="0">
+              <a:rPr lang="en-US" sz="1220" b="1" dirty="0">
                 <a:solidFill>
                   <a:srgbClr val="0068B7"/>
                 </a:solidFill>
@@ -15191,7 +15191,7 @@
               </a:rPr>
               <a:t>Data decision</a:t>
             </a:r>
-            <a:endParaRPr lang="en-US" sz="1300" dirty="0"/>
+            <a:endParaRPr lang="en-US" sz="1220" dirty="0"/>
           </a:p>
         </p:txBody>
       </p:sp>
@@ -15203,8 +15203,8 @@
         </p:nvSpPr>
         <p:spPr>
           <a:xfrm>
-            <a:off x="7799832" y="1801368"/>
-            <a:ext cx="3145536" cy="640080"/>
+            <a:off x="7708392" y="1764792"/>
+            <a:ext cx="3282696" cy="749808"/>
           </a:xfrm>
           <a:prstGeom prst="rect">
             <a:avLst/>
@@ -15222,7 +15222,7 @@
               <a:buNone/>
             </a:pPr>
             <a:r>
-              <a:rPr lang="en-US" sz="1320" dirty="0">
+              <a:rPr lang="en-US" sz="1220" dirty="0">
                 <a:solidFill>
                   <a:srgbClr val="17364A"/>
                 </a:solidFill>
@@ -15232,7 +15232,7 @@
               </a:rPr>
               <a:t>Describe how ELR supports public health surveillance and response.</a:t>
             </a:r>
-            <a:endParaRPr lang="en-US" sz="1320" dirty="0"/>
+            <a:endParaRPr lang="en-US" sz="1220" dirty="0"/>
           </a:p>
         </p:txBody>
       </p:sp>
@@ -15244,12 +15244,12 @@
         </p:nvSpPr>
         <p:spPr>
           <a:xfrm>
-            <a:off x="7635240" y="2670048"/>
-            <a:ext cx="3474720" cy="1377086"/>
+            <a:off x="7543800" y="2724912"/>
+            <a:ext cx="3611880" cy="1527048"/>
           </a:xfrm>
           <a:prstGeom prst="roundRect">
             <a:avLst>
-              <a:gd name="adj" fmla="val 7968"/>
+              <a:gd name="adj" fmla="val 7186"/>
             </a:avLst>
           </a:prstGeom>
           <a:solidFill>
@@ -15271,8 +15271,8 @@
         </p:nvSpPr>
         <p:spPr>
           <a:xfrm>
-            <a:off x="7799832" y="2816352"/>
-            <a:ext cx="3145536" cy="256032"/>
+            <a:off x="7708392" y="2852928"/>
+            <a:ext cx="3282696" cy="228600"/>
           </a:xfrm>
           <a:prstGeom prst="rect">
             <a:avLst/>
@@ -15288,7 +15288,7 @@
               <a:buNone/>
             </a:pPr>
             <a:r>
-              <a:rPr lang="en-US" sz="1300" b="1" dirty="0">
+              <a:rPr lang="en-US" sz="1220" b="1" dirty="0">
                 <a:solidFill>
                   <a:srgbClr val="0068B7"/>
                 </a:solidFill>
@@ -15298,7 +15298,7 @@
               </a:rPr>
               <a:t>Concept checkpoints</a:t>
             </a:r>
-            <a:endParaRPr lang="en-US" sz="1300" dirty="0"/>
+            <a:endParaRPr lang="en-US" sz="1220" dirty="0"/>
           </a:p>
         </p:txBody>
       </p:sp>
@@ -15310,8 +15310,8 @@
         </p:nvSpPr>
         <p:spPr>
           <a:xfrm>
-            <a:off x="7818120" y="3182112"/>
-            <a:ext cx="3090672" cy="718718"/>
+            <a:off x="7726680" y="3182112"/>
+            <a:ext cx="3227832" cy="960120"/>
           </a:xfrm>
           <a:prstGeom prst="rect">
             <a:avLst/>
@@ -15329,7 +15329,7 @@
               <a:buNone/>
             </a:pPr>
             <a:r>
-              <a:rPr lang="en-US" sz="1220" dirty="0">
+              <a:rPr lang="en-US" sz="1140" dirty="0">
                 <a:solidFill>
                   <a:srgbClr val="17364A"/>
                 </a:solidFill>
@@ -15337,16 +15337,16 @@
                 <a:ea typeface="Aptos" pitchFamily="34" charset="-122"/>
                 <a:cs typeface="Aptos" pitchFamily="34" charset="-120"/>
               </a:rPr>
-              <a:t>Assess whether lab data are fit for a specific AI-supported use.</a:t>
-            </a:r>
-            <a:endParaRPr lang="en-US" sz="1220" dirty="0"/>
-          </a:p>
-          <a:p>
-            <a:pPr indent="0" marL="0">
-              <a:buNone/>
-            </a:pPr>
-            <a:r>
-              <a:rPr lang="en-US" sz="1220" dirty="0">
+              <a:t>Assess whether lab data are fit for a specific.</a:t>
+            </a:r>
+            <a:endParaRPr lang="en-US" sz="1140" dirty="0"/>
+          </a:p>
+          <a:p>
+            <a:pPr indent="0" marL="0">
+              <a:buNone/>
+            </a:pPr>
+            <a:r>
+              <a:rPr lang="en-US" sz="1140" dirty="0">
                 <a:solidFill>
                   <a:srgbClr val="17364A"/>
                 </a:solidFill>
@@ -15354,9 +15354,9 @@
                 <a:ea typeface="Aptos" pitchFamily="34" charset="-122"/>
                 <a:cs typeface="Aptos" pitchFamily="34" charset="-120"/>
               </a:rPr>
-              <a:t>Produce a lab data quality checklist for an AI-supported.</a:t>
-            </a:r>
-            <a:endParaRPr lang="en-US" sz="1220" dirty="0"/>
+              <a:t>Produce a lab data quality checklist for an.</a:t>
+            </a:r>
+            <a:endParaRPr lang="en-US" sz="1140" dirty="0"/>
           </a:p>
         </p:txBody>
       </p:sp>
@@ -15368,12 +15368,12 @@
         </p:nvSpPr>
         <p:spPr>
           <a:xfrm>
-            <a:off x="7635240" y="4184294"/>
-            <a:ext cx="3474720" cy="1466698"/>
+            <a:off x="7543800" y="4389120"/>
+            <a:ext cx="3611880" cy="1261872"/>
           </a:xfrm>
           <a:prstGeom prst="roundRect">
             <a:avLst>
-              <a:gd name="adj" fmla="val 7481"/>
+              <a:gd name="adj" fmla="val 8696"/>
             </a:avLst>
           </a:prstGeom>
           <a:solidFill>
@@ -15395,8 +15395,8 @@
         </p:nvSpPr>
         <p:spPr>
           <a:xfrm>
-            <a:off x="7799832" y="4330598"/>
-            <a:ext cx="3145536" cy="256032"/>
+            <a:off x="7708392" y="4517136"/>
+            <a:ext cx="3282696" cy="228600"/>
           </a:xfrm>
           <a:prstGeom prst="rect">
             <a:avLst/>
@@ -15412,7 +15412,7 @@
               <a:buNone/>
             </a:pPr>
             <a:r>
-              <a:rPr lang="en-US" sz="1300" b="1" dirty="0">
+              <a:rPr lang="en-US" sz="1220" b="1" dirty="0">
                 <a:solidFill>
                   <a:srgbClr val="0068B7"/>
                 </a:solidFill>
@@ -15422,7 +15422,7 @@
               </a:rPr>
               <a:t>How to validate</a:t>
             </a:r>
-            <a:endParaRPr lang="en-US" sz="1300" dirty="0"/>
+            <a:endParaRPr lang="en-US" sz="1220" dirty="0"/>
           </a:p>
         </p:txBody>
       </p:sp>
@@ -15434,8 +15434,8 @@
         </p:nvSpPr>
         <p:spPr>
           <a:xfrm>
-            <a:off x="7799832" y="4659782"/>
-            <a:ext cx="3145536" cy="899770"/>
+            <a:off x="7708392" y="4828032"/>
+            <a:ext cx="3282696" cy="749808"/>
           </a:xfrm>
           <a:prstGeom prst="rect">
             <a:avLst/>
@@ -15453,7 +15453,7 @@
               <a:buNone/>
             </a:pPr>
             <a:r>
-              <a:rPr lang="en-US" sz="1320" dirty="0">
+              <a:rPr lang="en-US" sz="1220" dirty="0">
                 <a:solidFill>
                   <a:srgbClr val="17364A"/>
                 </a:solidFill>
@@ -15461,9 +15461,9 @@
                 <a:ea typeface="Aptos" pitchFamily="34" charset="-122"/>
                 <a:cs typeface="Aptos" pitchFamily="34" charset="-120"/>
               </a:rPr>
-              <a:t>Use the assignment to test whether you can explain the concept, apply it to a realistic public health situation, and identify what would need review before the work moves forward.</a:t>
-            </a:r>
-            <a:endParaRPr lang="en-US" sz="1320" dirty="0"/>
+              <a:t>Use the assignment to test whether you can explain the concept, apply it to a.</a:t>
+            </a:r>
+            <a:endParaRPr lang="en-US" sz="1220" dirty="0"/>
           </a:p>
         </p:txBody>
       </p:sp>
@@ -15754,8 +15754,8 @@
         </p:nvSpPr>
         <p:spPr>
           <a:xfrm>
-            <a:off x="868680" y="1508760"/>
-            <a:ext cx="6309360" cy="4160520"/>
+            <a:off x="822960" y="1463040"/>
+            <a:ext cx="6565392" cy="4343400"/>
           </a:xfrm>
           <a:prstGeom prst="rect">
             <a:avLst/>
@@ -15773,7 +15773,7 @@
               <a:buNone/>
             </a:pPr>
             <a:r>
-              <a:rPr lang="en-US" sz="2100" dirty="0">
+              <a:rPr lang="en-US" sz="1920" dirty="0">
                 <a:solidFill>
                   <a:srgbClr val="003A63"/>
                 </a:solidFill>
@@ -15781,16 +15781,16 @@
                 <a:ea typeface="Aptos" pitchFamily="34" charset="-122"/>
                 <a:cs typeface="Aptos" pitchFamily="34" charset="-120"/>
               </a:rPr>
-              <a:t>• Electronic laboratory reporting supplies critical evidence for infectious disease surveillance,.</a:t>
-            </a:r>
-            <a:endParaRPr lang="en-US" sz="2100" dirty="0"/>
-          </a:p>
-          <a:p>
-            <a:pPr indent="0" marL="0">
-              <a:buNone/>
-            </a:pPr>
-            <a:r>
-              <a:rPr lang="en-US" sz="2100" dirty="0">
+              <a:t>• Electronic laboratory reporting supplies critical evidence for infectious.</a:t>
+            </a:r>
+            <a:endParaRPr lang="en-US" sz="1920" dirty="0"/>
+          </a:p>
+          <a:p>
+            <a:pPr indent="0" marL="0">
+              <a:buNone/>
+            </a:pPr>
+            <a:r>
+              <a:rPr lang="en-US" sz="1920" dirty="0">
                 <a:solidFill>
                   <a:srgbClr val="003A63"/>
                 </a:solidFill>
@@ -15798,16 +15798,16 @@
                 <a:ea typeface="Aptos" pitchFamily="34" charset="-122"/>
                 <a:cs typeface="Aptos" pitchFamily="34" charset="-120"/>
               </a:rPr>
-              <a:t>• AI tools that use laboratory data depend on the quality of test codes, result codes, units,.</a:t>
-            </a:r>
-            <a:endParaRPr lang="en-US" sz="2100" dirty="0"/>
-          </a:p>
-          <a:p>
-            <a:pPr indent="0" marL="0">
-              <a:buNone/>
-            </a:pPr>
-            <a:r>
-              <a:rPr lang="en-US" sz="2100" dirty="0">
+              <a:t>• AI tools that use laboratory data depend on the quality of test codes,.</a:t>
+            </a:r>
+            <a:endParaRPr lang="en-US" sz="1920" dirty="0"/>
+          </a:p>
+          <a:p>
+            <a:pPr indent="0" marL="0">
+              <a:buNone/>
+            </a:pPr>
+            <a:r>
+              <a:rPr lang="en-US" sz="1920" dirty="0">
                 <a:solidFill>
                   <a:srgbClr val="003A63"/>
                 </a:solidFill>
@@ -15815,9 +15815,9 @@
                 <a:ea typeface="Aptos" pitchFamily="34" charset="-122"/>
                 <a:cs typeface="Aptos" pitchFamily="34" charset="-120"/>
               </a:rPr>
-              <a:t>• This module teaches learners how laboratory data quality and terminology mapping affect.</a:t>
-            </a:r>
-            <a:endParaRPr lang="en-US" sz="2100" dirty="0"/>
+              <a:t>• This module teaches learners how laboratory data quality and terminology.</a:t>
+            </a:r>
+            <a:endParaRPr lang="en-US" sz="1920" dirty="0"/>
           </a:p>
         </p:txBody>
       </p:sp>
@@ -15829,12 +15829,12 @@
         </p:nvSpPr>
         <p:spPr>
           <a:xfrm>
-            <a:off x="7635240" y="1325880"/>
-            <a:ext cx="3474720" cy="1255471"/>
+            <a:off x="7543800" y="1325880"/>
+            <a:ext cx="3611880" cy="1261872"/>
           </a:xfrm>
           <a:prstGeom prst="roundRect">
             <a:avLst>
-              <a:gd name="adj" fmla="val 8740"/>
+              <a:gd name="adj" fmla="val 8696"/>
             </a:avLst>
           </a:prstGeom>
           <a:solidFill>
@@ -15856,8 +15856,8 @@
         </p:nvSpPr>
         <p:spPr>
           <a:xfrm>
-            <a:off x="7799832" y="1472184"/>
-            <a:ext cx="3145536" cy="256032"/>
+            <a:off x="7708392" y="1453896"/>
+            <a:ext cx="3282696" cy="228600"/>
           </a:xfrm>
           <a:prstGeom prst="rect">
             <a:avLst/>
@@ -15873,7 +15873,7 @@
               <a:buNone/>
             </a:pPr>
             <a:r>
-              <a:rPr lang="en-US" sz="1300" b="1" dirty="0">
+              <a:rPr lang="en-US" sz="1220" b="1" dirty="0">
                 <a:solidFill>
                   <a:srgbClr val="0068B7"/>
                 </a:solidFill>
@@ -15883,7 +15883,7 @@
               </a:rPr>
               <a:t>Data decision</a:t>
             </a:r>
-            <a:endParaRPr lang="en-US" sz="1300" dirty="0"/>
+            <a:endParaRPr lang="en-US" sz="1220" dirty="0"/>
           </a:p>
         </p:txBody>
       </p:sp>
@@ -15895,8 +15895,8 @@
         </p:nvSpPr>
         <p:spPr>
           <a:xfrm>
-            <a:off x="7799832" y="1801368"/>
-            <a:ext cx="3145536" cy="688543"/>
+            <a:off x="7708392" y="1764792"/>
+            <a:ext cx="3282696" cy="749808"/>
           </a:xfrm>
           <a:prstGeom prst="rect">
             <a:avLst/>
@@ -15914,7 +15914,7 @@
               <a:buNone/>
             </a:pPr>
             <a:r>
-              <a:rPr lang="en-US" sz="1320" dirty="0">
+              <a:rPr lang="en-US" sz="1220" dirty="0">
                 <a:solidFill>
                   <a:srgbClr val="17364A"/>
                 </a:solidFill>
@@ -15922,9 +15922,9 @@
                 <a:ea typeface="Aptos" pitchFamily="34" charset="-122"/>
                 <a:cs typeface="Aptos" pitchFamily="34" charset="-120"/>
               </a:rPr>
-              <a:t>Electronic laboratory reporting supplies critical evidence for infectious disease surveillance,.</a:t>
-            </a:r>
-            <a:endParaRPr lang="en-US" sz="1320" dirty="0"/>
+              <a:t>Electronic laboratory reporting supplies critical evidence for infectious.</a:t>
+            </a:r>
+            <a:endParaRPr lang="en-US" sz="1220" dirty="0"/>
           </a:p>
         </p:txBody>
       </p:sp>
@@ -15936,12 +15936,12 @@
         </p:nvSpPr>
         <p:spPr>
           <a:xfrm>
-            <a:off x="7635240" y="2718511"/>
-            <a:ext cx="3474720" cy="1328623"/>
+            <a:off x="7543800" y="2724912"/>
+            <a:ext cx="3611880" cy="1527048"/>
           </a:xfrm>
           <a:prstGeom prst="roundRect">
             <a:avLst>
-              <a:gd name="adj" fmla="val 8259"/>
+              <a:gd name="adj" fmla="val 7186"/>
             </a:avLst>
           </a:prstGeom>
           <a:solidFill>
@@ -15963,24 +15963,26 @@
         </p:nvSpPr>
         <p:spPr>
           <a:xfrm>
-            <a:off x="7799832" y="2846527"/>
-            <a:ext cx="3145536" cy="237744"/>
-          </a:xfrm>
-          <a:prstGeom prst="rect">
-            <a:avLst/>
-          </a:prstGeom>
-          <a:noFill/>
-          <a:ln/>
-        </p:spPr>
-        <p:txBody>
-          <a:bodyPr wrap="square" lIns="0" tIns="0" rIns="0" bIns="0" rtlCol="0" anchor="ctr"/>
-          <a:lstStyle/>
-          <a:p>
-            <a:pPr indent="0" marL="0">
-              <a:buNone/>
-            </a:pPr>
-            <a:r>
-              <a:rPr lang="en-US" sz="1250" b="1" dirty="0">
+            <a:off x="7708392" y="2852928"/>
+            <a:ext cx="3282696" cy="219456"/>
+          </a:xfrm>
+          <a:prstGeom prst="rect">
+            <a:avLst/>
+          </a:prstGeom>
+          <a:noFill/>
+          <a:ln/>
+        </p:spPr>
+        <p:txBody>
+          <a:bodyPr wrap="square" lIns="0" tIns="0" rIns="0" bIns="0" rtlCol="0" anchor="ctr">
+            <a:normAutofit/>
+          </a:bodyPr>
+          <a:lstStyle/>
+          <a:p>
+            <a:pPr indent="0" marL="0">
+              <a:buNone/>
+            </a:pPr>
+            <a:r>
+              <a:rPr lang="en-US" sz="1160" b="1" dirty="0">
                 <a:solidFill>
                   <a:srgbClr val="0068B7"/>
                 </a:solidFill>
@@ -15990,7 +15992,7 @@
               </a:rPr>
               <a:t>Data-to-decision flow</a:t>
             </a:r>
-            <a:endParaRPr lang="en-US" sz="1250" dirty="0"/>
+            <a:endParaRPr lang="en-US" sz="1160" dirty="0"/>
           </a:p>
         </p:txBody>
       </p:sp>
@@ -16002,7 +16004,7 @@
         </p:nvSpPr>
         <p:spPr>
           <a:xfrm>
-            <a:off x="8763000" y="3399739"/>
+            <a:off x="8717280" y="3406140"/>
             <a:ext cx="164592" cy="0"/>
           </a:xfrm>
           <a:prstGeom prst="line">
@@ -16025,8 +16027,8 @@
         </p:nvSpPr>
         <p:spPr>
           <a:xfrm>
-            <a:off x="7872984" y="3248863"/>
-            <a:ext cx="890016" cy="301752"/>
+            <a:off x="7781544" y="3255264"/>
+            <a:ext cx="935736" cy="301752"/>
           </a:xfrm>
           <a:prstGeom prst="roundRect">
             <a:avLst>
@@ -16052,8 +16054,8 @@
         </p:nvSpPr>
         <p:spPr>
           <a:xfrm>
-            <a:off x="7909560" y="3322015"/>
-            <a:ext cx="816864" cy="146304"/>
+            <a:off x="7818120" y="3328416"/>
+            <a:ext cx="862584" cy="146304"/>
           </a:xfrm>
           <a:prstGeom prst="rect">
             <a:avLst/>
@@ -16093,7 +16095,7 @@
         </p:nvSpPr>
         <p:spPr>
           <a:xfrm>
-            <a:off x="9817608" y="3399739"/>
+            <a:off x="9817608" y="3406140"/>
             <a:ext cx="164592" cy="0"/>
           </a:xfrm>
           <a:prstGeom prst="line">
@@ -16116,8 +16118,8 @@
         </p:nvSpPr>
         <p:spPr>
           <a:xfrm>
-            <a:off x="8927592" y="3248863"/>
-            <a:ext cx="890016" cy="301752"/>
+            <a:off x="8881872" y="3255264"/>
+            <a:ext cx="935736" cy="301752"/>
           </a:xfrm>
           <a:prstGeom prst="roundRect">
             <a:avLst>
@@ -16143,8 +16145,8 @@
         </p:nvSpPr>
         <p:spPr>
           <a:xfrm>
-            <a:off x="8964168" y="3322015"/>
-            <a:ext cx="816864" cy="146304"/>
+            <a:off x="8918448" y="3328416"/>
+            <a:ext cx="862584" cy="146304"/>
           </a:xfrm>
           <a:prstGeom prst="rect">
             <a:avLst/>
@@ -16184,8 +16186,8 @@
         </p:nvSpPr>
         <p:spPr>
           <a:xfrm>
-            <a:off x="9982200" y="3248863"/>
-            <a:ext cx="890016" cy="301752"/>
+            <a:off x="9982200" y="3255264"/>
+            <a:ext cx="935736" cy="301752"/>
           </a:xfrm>
           <a:prstGeom prst="roundRect">
             <a:avLst>
@@ -16211,8 +16213,8 @@
         </p:nvSpPr>
         <p:spPr>
           <a:xfrm>
-            <a:off x="10018776" y="3322015"/>
-            <a:ext cx="816864" cy="146304"/>
+            <a:off x="10018776" y="3328416"/>
+            <a:ext cx="862584" cy="146304"/>
           </a:xfrm>
           <a:prstGeom prst="rect">
             <a:avLst/>
@@ -16252,8 +16254,8 @@
         </p:nvSpPr>
         <p:spPr>
           <a:xfrm>
-            <a:off x="7854696" y="3742639"/>
-            <a:ext cx="3035808" cy="158191"/>
+            <a:off x="7763256" y="3749040"/>
+            <a:ext cx="3172968" cy="356616"/>
           </a:xfrm>
           <a:prstGeom prst="rect">
             <a:avLst/>
@@ -16271,7 +16273,7 @@
               <a:buNone/>
             </a:pPr>
             <a:r>
-              <a:rPr lang="en-US" sz="1120" dirty="0">
+              <a:rPr lang="en-US" sz="1040" dirty="0">
                 <a:solidFill>
                   <a:srgbClr val="17364A"/>
                 </a:solidFill>
@@ -16279,9 +16281,9 @@
                 <a:ea typeface="Aptos" pitchFamily="34" charset="-122"/>
                 <a:cs typeface="Aptos" pitchFamily="34" charset="-120"/>
               </a:rPr>
-              <a:t>The important handoff is not from data to AI; it is from analysis to accountable human review.</a:t>
-            </a:r>
-            <a:endParaRPr lang="en-US" sz="1120" dirty="0"/>
+              <a:t>The important handoff is not from data to AI; it is from analysis to.</a:t>
+            </a:r>
+            <a:endParaRPr lang="en-US" sz="1040" dirty="0"/>
           </a:p>
         </p:txBody>
       </p:sp>
@@ -16293,12 +16295,12 @@
         </p:nvSpPr>
         <p:spPr>
           <a:xfrm>
-            <a:off x="7635240" y="4184294"/>
-            <a:ext cx="3474720" cy="1466698"/>
+            <a:off x="7543800" y="4389120"/>
+            <a:ext cx="3611880" cy="1261872"/>
           </a:xfrm>
           <a:prstGeom prst="roundRect">
             <a:avLst>
-              <a:gd name="adj" fmla="val 7481"/>
+              <a:gd name="adj" fmla="val 8696"/>
             </a:avLst>
           </a:prstGeom>
           <a:solidFill>
@@ -16320,8 +16322,8 @@
         </p:nvSpPr>
         <p:spPr>
           <a:xfrm>
-            <a:off x="7799832" y="4330598"/>
-            <a:ext cx="3145536" cy="256032"/>
+            <a:off x="7708392" y="4517136"/>
+            <a:ext cx="3282696" cy="228600"/>
           </a:xfrm>
           <a:prstGeom prst="rect">
             <a:avLst/>
@@ -16337,7 +16339,7 @@
               <a:buNone/>
             </a:pPr>
             <a:r>
-              <a:rPr lang="en-US" sz="1300" b="1" dirty="0">
+              <a:rPr lang="en-US" sz="1220" b="1" dirty="0">
                 <a:solidFill>
                   <a:srgbClr val="0068B7"/>
                 </a:solidFill>
@@ -16347,7 +16349,7 @@
               </a:rPr>
               <a:t>How to validate</a:t>
             </a:r>
-            <a:endParaRPr lang="en-US" sz="1300" dirty="0"/>
+            <a:endParaRPr lang="en-US" sz="1220" dirty="0"/>
           </a:p>
         </p:txBody>
       </p:sp>
@@ -16359,8 +16361,8 @@
         </p:nvSpPr>
         <p:spPr>
           <a:xfrm>
-            <a:off x="7799832" y="4659782"/>
-            <a:ext cx="3145536" cy="899770"/>
+            <a:off x="7708392" y="4828032"/>
+            <a:ext cx="3282696" cy="749808"/>
           </a:xfrm>
           <a:prstGeom prst="rect">
             <a:avLst/>
@@ -16378,7 +16380,7 @@
               <a:buNone/>
             </a:pPr>
             <a:r>
-              <a:rPr lang="en-US" sz="1320" dirty="0">
+              <a:rPr lang="en-US" sz="1220" dirty="0">
                 <a:solidFill>
                   <a:srgbClr val="17364A"/>
                 </a:solidFill>
@@ -16386,9 +16388,9 @@
                 <a:ea typeface="Aptos" pitchFamily="34" charset="-122"/>
                 <a:cs typeface="Aptos" pitchFamily="34" charset="-120"/>
               </a:rPr>
-              <a:t>Connect the concept to data quality, model performance, validation evidence, monitoring measures, and decisions that remain under human control.</a:t>
-            </a:r>
-            <a:endParaRPr lang="en-US" sz="1320" dirty="0"/>
+              <a:t>Connect the concept to data quality, model performance, validation evidence,.</a:t>
+            </a:r>
+            <a:endParaRPr lang="en-US" sz="1220" dirty="0"/>
           </a:p>
         </p:txBody>
       </p:sp>
@@ -16679,8 +16681,8 @@
         </p:nvSpPr>
         <p:spPr>
           <a:xfrm>
-            <a:off x="868680" y="1508760"/>
-            <a:ext cx="6309360" cy="4160520"/>
+            <a:off x="822960" y="1463040"/>
+            <a:ext cx="6565392" cy="4343400"/>
           </a:xfrm>
           <a:prstGeom prst="rect">
             <a:avLst/>
@@ -16698,7 +16700,7 @@
               <a:buNone/>
             </a:pPr>
             <a:r>
-              <a:rPr lang="en-US" sz="2100" dirty="0">
+              <a:rPr lang="en-US" sz="1920" dirty="0">
                 <a:solidFill>
                   <a:srgbClr val="003A63"/>
                 </a:solidFill>
@@ -16708,14 +16710,14 @@
               </a:rPr>
               <a:t>• This national-level module is intended for training and planning purposes.</a:t>
             </a:r>
-            <a:endParaRPr lang="en-US" sz="2100" dirty="0"/>
-          </a:p>
-          <a:p>
-            <a:pPr indent="0" marL="0">
-              <a:buNone/>
-            </a:pPr>
-            <a:r>
-              <a:rPr lang="en-US" sz="2100" dirty="0">
+            <a:endParaRPr lang="en-US" sz="1920" dirty="0"/>
+          </a:p>
+          <a:p>
+            <a:pPr indent="0" marL="0">
+              <a:buNone/>
+            </a:pPr>
+            <a:r>
+              <a:rPr lang="en-US" sz="1920" dirty="0">
                 <a:solidFill>
                   <a:srgbClr val="003A63"/>
                 </a:solidFill>
@@ -16723,16 +16725,16 @@
                 <a:ea typeface="Aptos" pitchFamily="34" charset="-122"/>
                 <a:cs typeface="Aptos" pitchFamily="34" charset="-120"/>
               </a:rPr>
-              <a:t>• It does not replace legal, privacy, procurement, civil rights, records, or agency policy review.</a:t>
-            </a:r>
-            <a:endParaRPr lang="en-US" sz="2100" dirty="0"/>
-          </a:p>
-          <a:p>
-            <a:pPr indent="0" marL="0">
-              <a:buNone/>
-            </a:pPr>
-            <a:r>
-              <a:rPr lang="en-US" sz="2100" dirty="0">
+              <a:t>• It does not replace legal, privacy, procurement, civil rights, records, or.</a:t>
+            </a:r>
+            <a:endParaRPr lang="en-US" sz="1920" dirty="0"/>
+          </a:p>
+          <a:p>
+            <a:pPr indent="0" marL="0">
+              <a:buNone/>
+            </a:pPr>
+            <a:r>
+              <a:rPr lang="en-US" sz="1920" dirty="0">
                 <a:solidFill>
                   <a:srgbClr val="003A63"/>
                 </a:solidFill>
@@ -16740,9 +16742,9 @@
                 <a:ea typeface="Aptos" pitchFamily="34" charset="-122"/>
                 <a:cs typeface="Aptos" pitchFamily="34" charset="-120"/>
               </a:rPr>
-              <a:t>• Learners should confirm applicable requirements in their own jurisdiction and organization.</a:t>
-            </a:r>
-            <a:endParaRPr lang="en-US" sz="2100" dirty="0"/>
+              <a:t>• Learners should confirm applicable requirements in their own jurisdiction.</a:t>
+            </a:r>
+            <a:endParaRPr lang="en-US" sz="1920" dirty="0"/>
           </a:p>
         </p:txBody>
       </p:sp>
@@ -16754,12 +16756,12 @@
         </p:nvSpPr>
         <p:spPr>
           <a:xfrm>
-            <a:off x="7635240" y="1325880"/>
-            <a:ext cx="3474720" cy="1207008"/>
+            <a:off x="7543800" y="1325880"/>
+            <a:ext cx="3611880" cy="1261872"/>
           </a:xfrm>
           <a:prstGeom prst="roundRect">
             <a:avLst>
-              <a:gd name="adj" fmla="val 9091"/>
+              <a:gd name="adj" fmla="val 8696"/>
             </a:avLst>
           </a:prstGeom>
           <a:solidFill>
@@ -16781,8 +16783,8 @@
         </p:nvSpPr>
         <p:spPr>
           <a:xfrm>
-            <a:off x="7799832" y="1472184"/>
-            <a:ext cx="3145536" cy="256032"/>
+            <a:off x="7708392" y="1453896"/>
+            <a:ext cx="3282696" cy="228600"/>
           </a:xfrm>
           <a:prstGeom prst="rect">
             <a:avLst/>
@@ -16798,7 +16800,7 @@
               <a:buNone/>
             </a:pPr>
             <a:r>
-              <a:rPr lang="en-US" sz="1300" b="1" dirty="0">
+              <a:rPr lang="en-US" sz="1220" b="1" dirty="0">
                 <a:solidFill>
                   <a:srgbClr val="0068B7"/>
                 </a:solidFill>
@@ -16808,7 +16810,7 @@
               </a:rPr>
               <a:t>Governance lens</a:t>
             </a:r>
-            <a:endParaRPr lang="en-US" sz="1300" dirty="0"/>
+            <a:endParaRPr lang="en-US" sz="1220" dirty="0"/>
           </a:p>
         </p:txBody>
       </p:sp>
@@ -16820,8 +16822,8 @@
         </p:nvSpPr>
         <p:spPr>
           <a:xfrm>
-            <a:off x="7799832" y="1801368"/>
-            <a:ext cx="3145536" cy="640080"/>
+            <a:off x="7708392" y="1764792"/>
+            <a:ext cx="3282696" cy="749808"/>
           </a:xfrm>
           <a:prstGeom prst="rect">
             <a:avLst/>
@@ -16839,7 +16841,7 @@
               <a:buNone/>
             </a:pPr>
             <a:r>
-              <a:rPr lang="en-US" sz="1320" dirty="0">
+              <a:rPr lang="en-US" sz="1220" dirty="0">
                 <a:solidFill>
                   <a:srgbClr val="17364A"/>
                 </a:solidFill>
@@ -16849,7 +16851,7 @@
               </a:rPr>
               <a:t>This national-level module is intended for training and planning purposes.</a:t>
             </a:r>
-            <a:endParaRPr lang="en-US" sz="1320" dirty="0"/>
+            <a:endParaRPr lang="en-US" sz="1220" dirty="0"/>
           </a:p>
         </p:txBody>
       </p:sp>
@@ -16861,12 +16863,12 @@
         </p:nvSpPr>
         <p:spPr>
           <a:xfrm>
-            <a:off x="7635240" y="2670048"/>
-            <a:ext cx="3474720" cy="1377086"/>
+            <a:off x="7543800" y="2724912"/>
+            <a:ext cx="3611880" cy="1527048"/>
           </a:xfrm>
           <a:prstGeom prst="roundRect">
             <a:avLst>
-              <a:gd name="adj" fmla="val 7968"/>
+              <a:gd name="adj" fmla="val 7186"/>
             </a:avLst>
           </a:prstGeom>
           <a:solidFill>
@@ -16888,24 +16890,26 @@
         </p:nvSpPr>
         <p:spPr>
           <a:xfrm>
-            <a:off x="7799832" y="2798064"/>
-            <a:ext cx="3145536" cy="237744"/>
-          </a:xfrm>
-          <a:prstGeom prst="rect">
-            <a:avLst/>
-          </a:prstGeom>
-          <a:noFill/>
-          <a:ln/>
-        </p:spPr>
-        <p:txBody>
-          <a:bodyPr wrap="square" lIns="0" tIns="0" rIns="0" bIns="0" rtlCol="0" anchor="ctr"/>
-          <a:lstStyle/>
-          <a:p>
-            <a:pPr indent="0" marL="0">
-              <a:buNone/>
-            </a:pPr>
-            <a:r>
-              <a:rPr lang="en-US" sz="1250" b="1" dirty="0">
+            <a:off x="7708392" y="2852928"/>
+            <a:ext cx="3282696" cy="219456"/>
+          </a:xfrm>
+          <a:prstGeom prst="rect">
+            <a:avLst/>
+          </a:prstGeom>
+          <a:noFill/>
+          <a:ln/>
+        </p:spPr>
+        <p:txBody>
+          <a:bodyPr wrap="square" lIns="0" tIns="0" rIns="0" bIns="0" rtlCol="0" anchor="ctr">
+            <a:normAutofit/>
+          </a:bodyPr>
+          <a:lstStyle/>
+          <a:p>
+            <a:pPr indent="0" marL="0">
+              <a:buNone/>
+            </a:pPr>
+            <a:r>
+              <a:rPr lang="en-US" sz="1160" b="1" dirty="0">
                 <a:solidFill>
                   <a:srgbClr val="0068B7"/>
                 </a:solidFill>
@@ -16915,7 +16919,7 @@
               </a:rPr>
               <a:t>Governance pathway</a:t>
             </a:r>
-            <a:endParaRPr lang="en-US" sz="1250" dirty="0"/>
+            <a:endParaRPr lang="en-US" sz="1160" dirty="0"/>
           </a:p>
         </p:txBody>
       </p:sp>
@@ -16927,7 +16931,7 @@
         </p:nvSpPr>
         <p:spPr>
           <a:xfrm>
-            <a:off x="8763000" y="3351276"/>
+            <a:off x="8717280" y="3406140"/>
             <a:ext cx="164592" cy="0"/>
           </a:xfrm>
           <a:prstGeom prst="line">
@@ -16950,8 +16954,8 @@
         </p:nvSpPr>
         <p:spPr>
           <a:xfrm>
-            <a:off x="7872984" y="3200400"/>
-            <a:ext cx="890016" cy="301752"/>
+            <a:off x="7781544" y="3255264"/>
+            <a:ext cx="935736" cy="301752"/>
           </a:xfrm>
           <a:prstGeom prst="roundRect">
             <a:avLst>
@@ -16977,8 +16981,8 @@
         </p:nvSpPr>
         <p:spPr>
           <a:xfrm>
-            <a:off x="7909560" y="3273552"/>
-            <a:ext cx="816864" cy="146304"/>
+            <a:off x="7818120" y="3328416"/>
+            <a:ext cx="862584" cy="146304"/>
           </a:xfrm>
           <a:prstGeom prst="rect">
             <a:avLst/>
@@ -17018,7 +17022,7 @@
         </p:nvSpPr>
         <p:spPr>
           <a:xfrm>
-            <a:off x="9817608" y="3351276"/>
+            <a:off x="9817608" y="3406140"/>
             <a:ext cx="164592" cy="0"/>
           </a:xfrm>
           <a:prstGeom prst="line">
@@ -17041,8 +17045,8 @@
         </p:nvSpPr>
         <p:spPr>
           <a:xfrm>
-            <a:off x="8927592" y="3200400"/>
-            <a:ext cx="890016" cy="301752"/>
+            <a:off x="8881872" y="3255264"/>
+            <a:ext cx="935736" cy="301752"/>
           </a:xfrm>
           <a:prstGeom prst="roundRect">
             <a:avLst>
@@ -17068,8 +17072,8 @@
         </p:nvSpPr>
         <p:spPr>
           <a:xfrm>
-            <a:off x="8964168" y="3273552"/>
-            <a:ext cx="816864" cy="146304"/>
+            <a:off x="8918448" y="3328416"/>
+            <a:ext cx="862584" cy="146304"/>
           </a:xfrm>
           <a:prstGeom prst="rect">
             <a:avLst/>
@@ -17109,8 +17113,8 @@
         </p:nvSpPr>
         <p:spPr>
           <a:xfrm>
-            <a:off x="9982200" y="3200400"/>
-            <a:ext cx="890016" cy="301752"/>
+            <a:off x="9982200" y="3255264"/>
+            <a:ext cx="935736" cy="301752"/>
           </a:xfrm>
           <a:prstGeom prst="roundRect">
             <a:avLst>
@@ -17136,8 +17140,8 @@
         </p:nvSpPr>
         <p:spPr>
           <a:xfrm>
-            <a:off x="10018776" y="3273552"/>
-            <a:ext cx="816864" cy="146304"/>
+            <a:off x="10018776" y="3328416"/>
+            <a:ext cx="862584" cy="146304"/>
           </a:xfrm>
           <a:prstGeom prst="rect">
             <a:avLst/>
@@ -17177,8 +17181,8 @@
         </p:nvSpPr>
         <p:spPr>
           <a:xfrm>
-            <a:off x="7854696" y="3694176"/>
-            <a:ext cx="3035808" cy="206654"/>
+            <a:off x="7763256" y="3749040"/>
+            <a:ext cx="3172968" cy="356616"/>
           </a:xfrm>
           <a:prstGeom prst="rect">
             <a:avLst/>
@@ -17196,7 +17200,7 @@
               <a:buNone/>
             </a:pPr>
             <a:r>
-              <a:rPr lang="en-US" sz="1120" dirty="0">
+              <a:rPr lang="en-US" sz="1040" dirty="0">
                 <a:solidFill>
                   <a:srgbClr val="17364A"/>
                 </a:solidFill>
@@ -17204,9 +17208,9 @@
                 <a:ea typeface="Aptos" pitchFamily="34" charset="-122"/>
                 <a:cs typeface="Aptos" pitchFamily="34" charset="-120"/>
               </a:rPr>
-              <a:t>A proposed AI use should move through documented review before it becomes an operational workflow.</a:t>
-            </a:r>
-            <a:endParaRPr lang="en-US" sz="1120" dirty="0"/>
+              <a:t>A proposed AI use should move through documented review before it.</a:t>
+            </a:r>
+            <a:endParaRPr lang="en-US" sz="1040" dirty="0"/>
           </a:p>
         </p:txBody>
       </p:sp>
@@ -17218,12 +17222,12 @@
         </p:nvSpPr>
         <p:spPr>
           <a:xfrm>
-            <a:off x="7635240" y="4184294"/>
-            <a:ext cx="3474720" cy="1466698"/>
+            <a:off x="7543800" y="4389120"/>
+            <a:ext cx="3611880" cy="1261872"/>
           </a:xfrm>
           <a:prstGeom prst="roundRect">
             <a:avLst>
-              <a:gd name="adj" fmla="val 7481"/>
+              <a:gd name="adj" fmla="val 8696"/>
             </a:avLst>
           </a:prstGeom>
           <a:solidFill>
@@ -17245,8 +17249,8 @@
         </p:nvSpPr>
         <p:spPr>
           <a:xfrm>
-            <a:off x="7799832" y="4330598"/>
-            <a:ext cx="3145536" cy="256032"/>
+            <a:off x="7708392" y="4517136"/>
+            <a:ext cx="3282696" cy="228600"/>
           </a:xfrm>
           <a:prstGeom prst="rect">
             <a:avLst/>
@@ -17262,7 +17266,7 @@
               <a:buNone/>
             </a:pPr>
             <a:r>
-              <a:rPr lang="en-US" sz="1300" b="1" dirty="0">
+              <a:rPr lang="en-US" sz="1220" b="1" dirty="0">
                 <a:solidFill>
                   <a:srgbClr val="0068B7"/>
                 </a:solidFill>
@@ -17272,7 +17276,7 @@
               </a:rPr>
               <a:t>What to document</a:t>
             </a:r>
-            <a:endParaRPr lang="en-US" sz="1300" dirty="0"/>
+            <a:endParaRPr lang="en-US" sz="1220" dirty="0"/>
           </a:p>
         </p:txBody>
       </p:sp>
@@ -17284,8 +17288,8 @@
         </p:nvSpPr>
         <p:spPr>
           <a:xfrm>
-            <a:off x="7799832" y="4659782"/>
-            <a:ext cx="3145536" cy="899770"/>
+            <a:off x="7708392" y="4828032"/>
+            <a:ext cx="3282696" cy="749808"/>
           </a:xfrm>
           <a:prstGeom prst="rect">
             <a:avLst/>
@@ -17303,7 +17307,7 @@
               <a:buNone/>
             </a:pPr>
             <a:r>
-              <a:rPr lang="en-US" sz="1320" dirty="0">
+              <a:rPr lang="en-US" sz="1220" dirty="0">
                 <a:solidFill>
                   <a:srgbClr val="17364A"/>
                 </a:solidFill>
@@ -17311,9 +17315,9 @@
                 <a:ea typeface="Aptos" pitchFamily="34" charset="-122"/>
                 <a:cs typeface="Aptos" pitchFamily="34" charset="-120"/>
               </a:rPr>
-              <a:t>Translate this concept into clear decision rights, review steps, documentation expectations, and escalation paths before an AI-supported workflow is approved.</a:t>
-            </a:r>
-            <a:endParaRPr lang="en-US" sz="1320" dirty="0"/>
+              <a:t>Translate this concept into clear decision rights, review steps, documentation.</a:t>
+            </a:r>
+            <a:endParaRPr lang="en-US" sz="1220" dirty="0"/>
           </a:p>
         </p:txBody>
       </p:sp>
@@ -17604,8 +17608,8 @@
         </p:nvSpPr>
         <p:spPr>
           <a:xfrm>
-            <a:off x="868680" y="1508760"/>
-            <a:ext cx="6309360" cy="4160520"/>
+            <a:off x="822960" y="1463040"/>
+            <a:ext cx="6565392" cy="4343400"/>
           </a:xfrm>
           <a:prstGeom prst="rect">
             <a:avLst/>
@@ -17623,7 +17627,7 @@
               <a:buNone/>
             </a:pPr>
             <a:r>
-              <a:rPr lang="en-US" sz="2100" dirty="0">
+              <a:rPr lang="en-US" sz="1920" dirty="0">
                 <a:solidFill>
                   <a:srgbClr val="003A63"/>
                 </a:solidFill>
@@ -17631,16 +17635,16 @@
                 <a:ea typeface="Aptos" pitchFamily="34" charset="-122"/>
                 <a:cs typeface="Aptos" pitchFamily="34" charset="-120"/>
               </a:rPr>
-              <a:t>• Laboratory data are often treated as objective because they come from tests and instruments,.</a:t>
-            </a:r>
-            <a:endParaRPr lang="en-US" sz="2100" dirty="0"/>
-          </a:p>
-          <a:p>
-            <a:pPr indent="0" marL="0">
-              <a:buNone/>
-            </a:pPr>
-            <a:r>
-              <a:rPr lang="en-US" sz="2100" dirty="0">
+              <a:t>• Laboratory data are often treated as objective because they come from tests.</a:t>
+            </a:r>
+            <a:endParaRPr lang="en-US" sz="1920" dirty="0"/>
+          </a:p>
+          <a:p>
+            <a:pPr indent="0" marL="0">
+              <a:buNone/>
+            </a:pPr>
+            <a:r>
+              <a:rPr lang="en-US" sz="1920" dirty="0">
                 <a:solidFill>
                   <a:srgbClr val="003A63"/>
                 </a:solidFill>
@@ -17648,16 +17652,16 @@
                 <a:ea typeface="Aptos" pitchFamily="34" charset="-122"/>
                 <a:cs typeface="Aptos" pitchFamily="34" charset="-120"/>
               </a:rPr>
-              <a:t>• A laboratory result can be difficult to use if the test code is local, the result is free.</a:t>
-            </a:r>
-            <a:endParaRPr lang="en-US" sz="2100" dirty="0"/>
-          </a:p>
-          <a:p>
-            <a:pPr indent="0" marL="0">
-              <a:buNone/>
-            </a:pPr>
-            <a:r>
-              <a:rPr lang="en-US" sz="2100" dirty="0">
+              <a:t>• A laboratory result can be difficult to use if the test code is local, the.</a:t>
+            </a:r>
+            <a:endParaRPr lang="en-US" sz="1920" dirty="0"/>
+          </a:p>
+          <a:p>
+            <a:pPr indent="0" marL="0">
+              <a:buNone/>
+            </a:pPr>
+            <a:r>
+              <a:rPr lang="en-US" sz="1920" dirty="0">
                 <a:solidFill>
                   <a:srgbClr val="003A63"/>
                 </a:solidFill>
@@ -17665,9 +17669,9 @@
                 <a:ea typeface="Aptos" pitchFamily="34" charset="-122"/>
                 <a:cs typeface="Aptos" pitchFamily="34" charset="-120"/>
               </a:rPr>
-              <a:t>• AI tools can magnify these problems by turning unclear data into confident summaries or.</a:t>
-            </a:r>
-            <a:endParaRPr lang="en-US" sz="2100" dirty="0"/>
+              <a:t>• AI tools can magnify these problems by turning unclear data into confident.</a:t>
+            </a:r>
+            <a:endParaRPr lang="en-US" sz="1920" dirty="0"/>
           </a:p>
         </p:txBody>
       </p:sp>
@@ -17679,12 +17683,12 @@
         </p:nvSpPr>
         <p:spPr>
           <a:xfrm>
-            <a:off x="7635240" y="1325880"/>
-            <a:ext cx="3474720" cy="1255471"/>
+            <a:off x="7543800" y="1325880"/>
+            <a:ext cx="3611880" cy="1261872"/>
           </a:xfrm>
           <a:prstGeom prst="roundRect">
             <a:avLst>
-              <a:gd name="adj" fmla="val 8740"/>
+              <a:gd name="adj" fmla="val 8696"/>
             </a:avLst>
           </a:prstGeom>
           <a:solidFill>
@@ -17706,8 +17710,8 @@
         </p:nvSpPr>
         <p:spPr>
           <a:xfrm>
-            <a:off x="7799832" y="1472184"/>
-            <a:ext cx="3145536" cy="256032"/>
+            <a:off x="7708392" y="1453896"/>
+            <a:ext cx="3282696" cy="228600"/>
           </a:xfrm>
           <a:prstGeom prst="rect">
             <a:avLst/>
@@ -17723,7 +17727,7 @@
               <a:buNone/>
             </a:pPr>
             <a:r>
-              <a:rPr lang="en-US" sz="1300" b="1" dirty="0">
+              <a:rPr lang="en-US" sz="1220" b="1" dirty="0">
                 <a:solidFill>
                   <a:srgbClr val="0068B7"/>
                 </a:solidFill>
@@ -17733,7 +17737,7 @@
               </a:rPr>
               <a:t>Data decision</a:t>
             </a:r>
-            <a:endParaRPr lang="en-US" sz="1300" dirty="0"/>
+            <a:endParaRPr lang="en-US" sz="1220" dirty="0"/>
           </a:p>
         </p:txBody>
       </p:sp>
@@ -17745,8 +17749,8 @@
         </p:nvSpPr>
         <p:spPr>
           <a:xfrm>
-            <a:off x="7799832" y="1801368"/>
-            <a:ext cx="3145536" cy="688543"/>
+            <a:off x="7708392" y="1764792"/>
+            <a:ext cx="3282696" cy="749808"/>
           </a:xfrm>
           <a:prstGeom prst="rect">
             <a:avLst/>
@@ -17764,7 +17768,7 @@
               <a:buNone/>
             </a:pPr>
             <a:r>
-              <a:rPr lang="en-US" sz="1320" dirty="0">
+              <a:rPr lang="en-US" sz="1220" dirty="0">
                 <a:solidFill>
                   <a:srgbClr val="17364A"/>
                 </a:solidFill>
@@ -17772,9 +17776,9 @@
                 <a:ea typeface="Aptos" pitchFamily="34" charset="-122"/>
                 <a:cs typeface="Aptos" pitchFamily="34" charset="-120"/>
               </a:rPr>
-              <a:t>Laboratory data are often treated as objective because they come from tests and instruments, but the.</a:t>
-            </a:r>
-            <a:endParaRPr lang="en-US" sz="1320" dirty="0"/>
+              <a:t>Laboratory data are often treated as objective because they come from tests and.</a:t>
+            </a:r>
+            <a:endParaRPr lang="en-US" sz="1220" dirty="0"/>
           </a:p>
         </p:txBody>
       </p:sp>
@@ -17786,12 +17790,12 @@
         </p:nvSpPr>
         <p:spPr>
           <a:xfrm>
-            <a:off x="7635240" y="2718511"/>
-            <a:ext cx="3474720" cy="1328623"/>
+            <a:off x="7543800" y="2724912"/>
+            <a:ext cx="3611880" cy="1527048"/>
           </a:xfrm>
           <a:prstGeom prst="roundRect">
             <a:avLst>
-              <a:gd name="adj" fmla="val 8259"/>
+              <a:gd name="adj" fmla="val 7186"/>
             </a:avLst>
           </a:prstGeom>
           <a:solidFill>
@@ -17813,24 +17817,26 @@
         </p:nvSpPr>
         <p:spPr>
           <a:xfrm>
-            <a:off x="7799832" y="2846527"/>
-            <a:ext cx="3145536" cy="237744"/>
-          </a:xfrm>
-          <a:prstGeom prst="rect">
-            <a:avLst/>
-          </a:prstGeom>
-          <a:noFill/>
-          <a:ln/>
-        </p:spPr>
-        <p:txBody>
-          <a:bodyPr wrap="square" lIns="0" tIns="0" rIns="0" bIns="0" rtlCol="0" anchor="ctr"/>
-          <a:lstStyle/>
-          <a:p>
-            <a:pPr indent="0" marL="0">
-              <a:buNone/>
-            </a:pPr>
-            <a:r>
-              <a:rPr lang="en-US" sz="1250" b="1" dirty="0">
+            <a:off x="7708392" y="2852928"/>
+            <a:ext cx="3282696" cy="219456"/>
+          </a:xfrm>
+          <a:prstGeom prst="rect">
+            <a:avLst/>
+          </a:prstGeom>
+          <a:noFill/>
+          <a:ln/>
+        </p:spPr>
+        <p:txBody>
+          <a:bodyPr wrap="square" lIns="0" tIns="0" rIns="0" bIns="0" rtlCol="0" anchor="ctr">
+            <a:normAutofit/>
+          </a:bodyPr>
+          <a:lstStyle/>
+          <a:p>
+            <a:pPr indent="0" marL="0">
+              <a:buNone/>
+            </a:pPr>
+            <a:r>
+              <a:rPr lang="en-US" sz="1160" b="1" dirty="0">
                 <a:solidFill>
                   <a:srgbClr val="0068B7"/>
                 </a:solidFill>
@@ -17840,7 +17846,7 @@
               </a:rPr>
               <a:t>Data-to-decision flow</a:t>
             </a:r>
-            <a:endParaRPr lang="en-US" sz="1250" dirty="0"/>
+            <a:endParaRPr lang="en-US" sz="1160" dirty="0"/>
           </a:p>
         </p:txBody>
       </p:sp>
@@ -17852,7 +17858,7 @@
         </p:nvSpPr>
         <p:spPr>
           <a:xfrm>
-            <a:off x="8763000" y="3399739"/>
+            <a:off x="8717280" y="3406140"/>
             <a:ext cx="164592" cy="0"/>
           </a:xfrm>
           <a:prstGeom prst="line">
@@ -17875,8 +17881,8 @@
         </p:nvSpPr>
         <p:spPr>
           <a:xfrm>
-            <a:off x="7872984" y="3248863"/>
-            <a:ext cx="890016" cy="301752"/>
+            <a:off x="7781544" y="3255264"/>
+            <a:ext cx="935736" cy="301752"/>
           </a:xfrm>
           <a:prstGeom prst="roundRect">
             <a:avLst>
@@ -17902,8 +17908,8 @@
         </p:nvSpPr>
         <p:spPr>
           <a:xfrm>
-            <a:off x="7909560" y="3322015"/>
-            <a:ext cx="816864" cy="146304"/>
+            <a:off x="7818120" y="3328416"/>
+            <a:ext cx="862584" cy="146304"/>
           </a:xfrm>
           <a:prstGeom prst="rect">
             <a:avLst/>
@@ -17943,7 +17949,7 @@
         </p:nvSpPr>
         <p:spPr>
           <a:xfrm>
-            <a:off x="9817608" y="3399739"/>
+            <a:off x="9817608" y="3406140"/>
             <a:ext cx="164592" cy="0"/>
           </a:xfrm>
           <a:prstGeom prst="line">
@@ -17966,8 +17972,8 @@
         </p:nvSpPr>
         <p:spPr>
           <a:xfrm>
-            <a:off x="8927592" y="3248863"/>
-            <a:ext cx="890016" cy="301752"/>
+            <a:off x="8881872" y="3255264"/>
+            <a:ext cx="935736" cy="301752"/>
           </a:xfrm>
           <a:prstGeom prst="roundRect">
             <a:avLst>
@@ -17993,8 +17999,8 @@
         </p:nvSpPr>
         <p:spPr>
           <a:xfrm>
-            <a:off x="8964168" y="3322015"/>
-            <a:ext cx="816864" cy="146304"/>
+            <a:off x="8918448" y="3328416"/>
+            <a:ext cx="862584" cy="146304"/>
           </a:xfrm>
           <a:prstGeom prst="rect">
             <a:avLst/>
@@ -18034,8 +18040,8 @@
         </p:nvSpPr>
         <p:spPr>
           <a:xfrm>
-            <a:off x="9982200" y="3248863"/>
-            <a:ext cx="890016" cy="301752"/>
+            <a:off x="9982200" y="3255264"/>
+            <a:ext cx="935736" cy="301752"/>
           </a:xfrm>
           <a:prstGeom prst="roundRect">
             <a:avLst>
@@ -18061,8 +18067,8 @@
         </p:nvSpPr>
         <p:spPr>
           <a:xfrm>
-            <a:off x="10018776" y="3322015"/>
-            <a:ext cx="816864" cy="146304"/>
+            <a:off x="10018776" y="3328416"/>
+            <a:ext cx="862584" cy="146304"/>
           </a:xfrm>
           <a:prstGeom prst="rect">
             <a:avLst/>
@@ -18102,8 +18108,8 @@
         </p:nvSpPr>
         <p:spPr>
           <a:xfrm>
-            <a:off x="7854696" y="3742639"/>
-            <a:ext cx="3035808" cy="158191"/>
+            <a:off x="7763256" y="3749040"/>
+            <a:ext cx="3172968" cy="356616"/>
           </a:xfrm>
           <a:prstGeom prst="rect">
             <a:avLst/>
@@ -18121,7 +18127,7 @@
               <a:buNone/>
             </a:pPr>
             <a:r>
-              <a:rPr lang="en-US" sz="1120" dirty="0">
+              <a:rPr lang="en-US" sz="1040" dirty="0">
                 <a:solidFill>
                   <a:srgbClr val="17364A"/>
                 </a:solidFill>
@@ -18129,9 +18135,9 @@
                 <a:ea typeface="Aptos" pitchFamily="34" charset="-122"/>
                 <a:cs typeface="Aptos" pitchFamily="34" charset="-120"/>
               </a:rPr>
-              <a:t>The important handoff is not from data to AI; it is from analysis to accountable human review.</a:t>
-            </a:r>
-            <a:endParaRPr lang="en-US" sz="1120" dirty="0"/>
+              <a:t>The important handoff is not from data to AI; it is from analysis to.</a:t>
+            </a:r>
+            <a:endParaRPr lang="en-US" sz="1040" dirty="0"/>
           </a:p>
         </p:txBody>
       </p:sp>
@@ -18143,12 +18149,12 @@
         </p:nvSpPr>
         <p:spPr>
           <a:xfrm>
-            <a:off x="7635240" y="4184294"/>
-            <a:ext cx="3474720" cy="1466698"/>
+            <a:off x="7543800" y="4389120"/>
+            <a:ext cx="3611880" cy="1261872"/>
           </a:xfrm>
           <a:prstGeom prst="roundRect">
             <a:avLst>
-              <a:gd name="adj" fmla="val 7481"/>
+              <a:gd name="adj" fmla="val 8696"/>
             </a:avLst>
           </a:prstGeom>
           <a:solidFill>
@@ -18170,8 +18176,8 @@
         </p:nvSpPr>
         <p:spPr>
           <a:xfrm>
-            <a:off x="7799832" y="4330598"/>
-            <a:ext cx="3145536" cy="256032"/>
+            <a:off x="7708392" y="4517136"/>
+            <a:ext cx="3282696" cy="228600"/>
           </a:xfrm>
           <a:prstGeom prst="rect">
             <a:avLst/>
@@ -18187,7 +18193,7 @@
               <a:buNone/>
             </a:pPr>
             <a:r>
-              <a:rPr lang="en-US" sz="1300" b="1" dirty="0">
+              <a:rPr lang="en-US" sz="1220" b="1" dirty="0">
                 <a:solidFill>
                   <a:srgbClr val="0068B7"/>
                 </a:solidFill>
@@ -18197,7 +18203,7 @@
               </a:rPr>
               <a:t>How to validate</a:t>
             </a:r>
-            <a:endParaRPr lang="en-US" sz="1300" dirty="0"/>
+            <a:endParaRPr lang="en-US" sz="1220" dirty="0"/>
           </a:p>
         </p:txBody>
       </p:sp>
@@ -18209,8 +18215,8 @@
         </p:nvSpPr>
         <p:spPr>
           <a:xfrm>
-            <a:off x="7799832" y="4659782"/>
-            <a:ext cx="3145536" cy="899770"/>
+            <a:off x="7708392" y="4828032"/>
+            <a:ext cx="3282696" cy="749808"/>
           </a:xfrm>
           <a:prstGeom prst="rect">
             <a:avLst/>
@@ -18228,7 +18234,7 @@
               <a:buNone/>
             </a:pPr>
             <a:r>
-              <a:rPr lang="en-US" sz="1320" dirty="0">
+              <a:rPr lang="en-US" sz="1220" dirty="0">
                 <a:solidFill>
                   <a:srgbClr val="17364A"/>
                 </a:solidFill>
@@ -18236,9 +18242,9 @@
                 <a:ea typeface="Aptos" pitchFamily="34" charset="-122"/>
                 <a:cs typeface="Aptos" pitchFamily="34" charset="-120"/>
               </a:rPr>
-              <a:t>Connect the concept to data quality, model performance, validation evidence, monitoring measures, and decisions that remain under human control.</a:t>
-            </a:r>
-            <a:endParaRPr lang="en-US" sz="1320" dirty="0"/>
+              <a:t>Connect the concept to data quality, model performance, validation evidence,.</a:t>
+            </a:r>
+            <a:endParaRPr lang="en-US" sz="1220" dirty="0"/>
           </a:p>
         </p:txBody>
       </p:sp>
@@ -18529,8 +18535,8 @@
         </p:nvSpPr>
         <p:spPr>
           <a:xfrm>
-            <a:off x="868680" y="1508760"/>
-            <a:ext cx="6309360" cy="4160520"/>
+            <a:off x="822960" y="1463040"/>
+            <a:ext cx="6565392" cy="4343400"/>
           </a:xfrm>
           <a:prstGeom prst="rect">
             <a:avLst/>
@@ -18548,7 +18554,7 @@
               <a:buNone/>
             </a:pPr>
             <a:r>
-              <a:rPr lang="en-US" sz="2100" dirty="0">
+              <a:rPr lang="en-US" sz="1920" dirty="0">
                 <a:solidFill>
                   <a:srgbClr val="003A63"/>
                 </a:solidFill>
@@ -18558,14 +18564,14 @@
               </a:rPr>
               <a:t>• ELR.</a:t>
             </a:r>
-            <a:endParaRPr lang="en-US" sz="2100" dirty="0"/>
-          </a:p>
-          <a:p>
-            <a:pPr indent="0" marL="0">
-              <a:buNone/>
-            </a:pPr>
-            <a:r>
-              <a:rPr lang="en-US" sz="2100" dirty="0">
+            <a:endParaRPr lang="en-US" sz="1920" dirty="0"/>
+          </a:p>
+          <a:p>
+            <a:pPr indent="0" marL="0">
+              <a:buNone/>
+            </a:pPr>
+            <a:r>
+              <a:rPr lang="en-US" sz="1920" dirty="0">
                 <a:solidFill>
                   <a:srgbClr val="003A63"/>
                 </a:solidFill>
@@ -18573,16 +18579,16 @@
                 <a:ea typeface="Aptos" pitchFamily="34" charset="-122"/>
                 <a:cs typeface="Aptos" pitchFamily="34" charset="-120"/>
               </a:rPr>
-              <a:t>• Electronic Laboratory Reporting is the electronic transmission of laboratory reports to public.</a:t>
-            </a:r>
-            <a:endParaRPr lang="en-US" sz="2100" dirty="0"/>
-          </a:p>
-          <a:p>
-            <a:pPr indent="0" marL="0">
-              <a:buNone/>
-            </a:pPr>
-            <a:r>
-              <a:rPr lang="en-US" sz="2100" dirty="0">
+              <a:t>• Electronic Laboratory Reporting is the electronic transmission of laboratory.</a:t>
+            </a:r>
+            <a:endParaRPr lang="en-US" sz="1920" dirty="0"/>
+          </a:p>
+          <a:p>
+            <a:pPr indent="0" marL="0">
+              <a:buNone/>
+            </a:pPr>
+            <a:r>
+              <a:rPr lang="en-US" sz="1920" dirty="0">
                 <a:solidFill>
                   <a:srgbClr val="003A63"/>
                 </a:solidFill>
@@ -18590,9 +18596,9 @@
                 <a:ea typeface="Aptos" pitchFamily="34" charset="-122"/>
                 <a:cs typeface="Aptos" pitchFamily="34" charset="-120"/>
               </a:rPr>
-              <a:t>• ELR can improve timeliness and completeness, but it requires interface onboarding, validation,.</a:t>
-            </a:r>
-            <a:endParaRPr lang="en-US" sz="2100" dirty="0"/>
+              <a:t>• ELR can improve timeliness and completeness, but it requires interface.</a:t>
+            </a:r>
+            <a:endParaRPr lang="en-US" sz="1920" dirty="0"/>
           </a:p>
         </p:txBody>
       </p:sp>
@@ -18604,12 +18610,12 @@
         </p:nvSpPr>
         <p:spPr>
           <a:xfrm>
-            <a:off x="7635240" y="1325880"/>
-            <a:ext cx="3474720" cy="1207008"/>
+            <a:off x="7543800" y="1325880"/>
+            <a:ext cx="3611880" cy="1261872"/>
           </a:xfrm>
           <a:prstGeom prst="roundRect">
             <a:avLst>
-              <a:gd name="adj" fmla="val 9091"/>
+              <a:gd name="adj" fmla="val 8696"/>
             </a:avLst>
           </a:prstGeom>
           <a:solidFill>
@@ -18631,8 +18637,8 @@
         </p:nvSpPr>
         <p:spPr>
           <a:xfrm>
-            <a:off x="7799832" y="1472184"/>
-            <a:ext cx="3145536" cy="256032"/>
+            <a:off x="7708392" y="1453896"/>
+            <a:ext cx="3282696" cy="228600"/>
           </a:xfrm>
           <a:prstGeom prst="rect">
             <a:avLst/>
@@ -18648,7 +18654,7 @@
               <a:buNone/>
             </a:pPr>
             <a:r>
-              <a:rPr lang="en-US" sz="1300" b="1" dirty="0">
+              <a:rPr lang="en-US" sz="1220" b="1" dirty="0">
                 <a:solidFill>
                   <a:srgbClr val="0068B7"/>
                 </a:solidFill>
@@ -18658,7 +18664,7 @@
               </a:rPr>
               <a:t>Data decision</a:t>
             </a:r>
-            <a:endParaRPr lang="en-US" sz="1300" dirty="0"/>
+            <a:endParaRPr lang="en-US" sz="1220" dirty="0"/>
           </a:p>
         </p:txBody>
       </p:sp>
@@ -18670,8 +18676,8 @@
         </p:nvSpPr>
         <p:spPr>
           <a:xfrm>
-            <a:off x="7799832" y="1801368"/>
-            <a:ext cx="3145536" cy="640080"/>
+            <a:off x="7708392" y="1764792"/>
+            <a:ext cx="3282696" cy="749808"/>
           </a:xfrm>
           <a:prstGeom prst="rect">
             <a:avLst/>
@@ -18689,7 +18695,7 @@
               <a:buNone/>
             </a:pPr>
             <a:r>
-              <a:rPr lang="en-US" sz="1320" dirty="0">
+              <a:rPr lang="en-US" sz="1220" dirty="0">
                 <a:solidFill>
                   <a:srgbClr val="17364A"/>
                 </a:solidFill>
@@ -18699,7 +18705,7 @@
               </a:rPr>
               <a:t>ELR.</a:t>
             </a:r>
-            <a:endParaRPr lang="en-US" sz="1320" dirty="0"/>
+            <a:endParaRPr lang="en-US" sz="1220" dirty="0"/>
           </a:p>
         </p:txBody>
       </p:sp>
@@ -18711,12 +18717,12 @@
         </p:nvSpPr>
         <p:spPr>
           <a:xfrm>
-            <a:off x="7635240" y="2670048"/>
-            <a:ext cx="3474720" cy="1377086"/>
+            <a:off x="7543800" y="2724912"/>
+            <a:ext cx="3611880" cy="1527048"/>
           </a:xfrm>
           <a:prstGeom prst="roundRect">
             <a:avLst>
-              <a:gd name="adj" fmla="val 7968"/>
+              <a:gd name="adj" fmla="val 7186"/>
             </a:avLst>
           </a:prstGeom>
           <a:solidFill>
@@ -18738,8 +18744,8 @@
         </p:nvSpPr>
         <p:spPr>
           <a:xfrm>
-            <a:off x="7799832" y="2816352"/>
-            <a:ext cx="3145536" cy="256032"/>
+            <a:off x="7708392" y="2852928"/>
+            <a:ext cx="3282696" cy="228600"/>
           </a:xfrm>
           <a:prstGeom prst="rect">
             <a:avLst/>
@@ -18755,7 +18761,7 @@
               <a:buNone/>
             </a:pPr>
             <a:r>
-              <a:rPr lang="en-US" sz="1300" b="1" dirty="0">
+              <a:rPr lang="en-US" sz="1220" b="1" dirty="0">
                 <a:solidFill>
                   <a:srgbClr val="0068B7"/>
                 </a:solidFill>
@@ -18765,7 +18771,7 @@
               </a:rPr>
               <a:t>Concept checkpoints</a:t>
             </a:r>
-            <a:endParaRPr lang="en-US" sz="1300" dirty="0"/>
+            <a:endParaRPr lang="en-US" sz="1220" dirty="0"/>
           </a:p>
         </p:txBody>
       </p:sp>
@@ -18777,8 +18783,8 @@
         </p:nvSpPr>
         <p:spPr>
           <a:xfrm>
-            <a:off x="7818120" y="3182112"/>
-            <a:ext cx="3090672" cy="718718"/>
+            <a:off x="7726680" y="3182112"/>
+            <a:ext cx="3227832" cy="960120"/>
           </a:xfrm>
           <a:prstGeom prst="rect">
             <a:avLst/>
@@ -18796,7 +18802,7 @@
               <a:buNone/>
             </a:pPr>
             <a:r>
-              <a:rPr lang="en-US" sz="1220" dirty="0">
+              <a:rPr lang="en-US" sz="1140" dirty="0">
                 <a:solidFill>
                   <a:srgbClr val="17364A"/>
                 </a:solidFill>
@@ -18804,16 +18810,16 @@
                 <a:ea typeface="Aptos" pitchFamily="34" charset="-122"/>
                 <a:cs typeface="Aptos" pitchFamily="34" charset="-120"/>
               </a:rPr>
-              <a:t>Electronic Laboratory Reporting is the electronic transmission of.</a:t>
-            </a:r>
-            <a:endParaRPr lang="en-US" sz="1220" dirty="0"/>
-          </a:p>
-          <a:p>
-            <a:pPr indent="0" marL="0">
-              <a:buNone/>
-            </a:pPr>
-            <a:r>
-              <a:rPr lang="en-US" sz="1220" dirty="0">
+              <a:t>Electronic Laboratory Reporting is the electronic.</a:t>
+            </a:r>
+            <a:endParaRPr lang="en-US" sz="1140" dirty="0"/>
+          </a:p>
+          <a:p>
+            <a:pPr indent="0" marL="0">
+              <a:buNone/>
+            </a:pPr>
+            <a:r>
+              <a:rPr lang="en-US" sz="1140" dirty="0">
                 <a:solidFill>
                   <a:srgbClr val="17364A"/>
                 </a:solidFill>
@@ -18821,16 +18827,16 @@
                 <a:ea typeface="Aptos" pitchFamily="34" charset="-122"/>
                 <a:cs typeface="Aptos" pitchFamily="34" charset="-120"/>
               </a:rPr>
-              <a:t>ELR can improve timeliness and completeness, but it requires.</a:t>
-            </a:r>
-            <a:endParaRPr lang="en-US" sz="1220" dirty="0"/>
-          </a:p>
-          <a:p>
-            <a:pPr indent="0" marL="0">
-              <a:buNone/>
-            </a:pPr>
-            <a:r>
-              <a:rPr lang="en-US" sz="1220" dirty="0">
+              <a:t>ELR can improve timeliness and completeness, but.</a:t>
+            </a:r>
+            <a:endParaRPr lang="en-US" sz="1140" dirty="0"/>
+          </a:p>
+          <a:p>
+            <a:pPr indent="0" marL="0">
+              <a:buNone/>
+            </a:pPr>
+            <a:r>
+              <a:rPr lang="en-US" sz="1140" dirty="0">
                 <a:solidFill>
                   <a:srgbClr val="17364A"/>
                 </a:solidFill>
@@ -18840,7 +18846,7 @@
               </a:rPr>
               <a:t>LOINC.</a:t>
             </a:r>
-            <a:endParaRPr lang="en-US" sz="1220" dirty="0"/>
+            <a:endParaRPr lang="en-US" sz="1140" dirty="0"/>
           </a:p>
         </p:txBody>
       </p:sp>
@@ -18852,12 +18858,12 @@
         </p:nvSpPr>
         <p:spPr>
           <a:xfrm>
-            <a:off x="7635240" y="4184294"/>
-            <a:ext cx="3474720" cy="1466698"/>
+            <a:off x="7543800" y="4389120"/>
+            <a:ext cx="3611880" cy="1261872"/>
           </a:xfrm>
           <a:prstGeom prst="roundRect">
             <a:avLst>
-              <a:gd name="adj" fmla="val 7481"/>
+              <a:gd name="adj" fmla="val 8696"/>
             </a:avLst>
           </a:prstGeom>
           <a:solidFill>
@@ -18879,8 +18885,8 @@
         </p:nvSpPr>
         <p:spPr>
           <a:xfrm>
-            <a:off x="7799832" y="4330598"/>
-            <a:ext cx="3145536" cy="256032"/>
+            <a:off x="7708392" y="4517136"/>
+            <a:ext cx="3282696" cy="228600"/>
           </a:xfrm>
           <a:prstGeom prst="rect">
             <a:avLst/>
@@ -18896,7 +18902,7 @@
               <a:buNone/>
             </a:pPr>
             <a:r>
-              <a:rPr lang="en-US" sz="1300" b="1" dirty="0">
+              <a:rPr lang="en-US" sz="1220" b="1" dirty="0">
                 <a:solidFill>
                   <a:srgbClr val="0068B7"/>
                 </a:solidFill>
@@ -18906,7 +18912,7 @@
               </a:rPr>
               <a:t>How to validate</a:t>
             </a:r>
-            <a:endParaRPr lang="en-US" sz="1300" dirty="0"/>
+            <a:endParaRPr lang="en-US" sz="1220" dirty="0"/>
           </a:p>
         </p:txBody>
       </p:sp>
@@ -18918,8 +18924,8 @@
         </p:nvSpPr>
         <p:spPr>
           <a:xfrm>
-            <a:off x="7799832" y="4659782"/>
-            <a:ext cx="3145536" cy="899770"/>
+            <a:off x="7708392" y="4828032"/>
+            <a:ext cx="3282696" cy="749808"/>
           </a:xfrm>
           <a:prstGeom prst="rect">
             <a:avLst/>
@@ -18937,7 +18943,7 @@
               <a:buNone/>
             </a:pPr>
             <a:r>
-              <a:rPr lang="en-US" sz="1320" dirty="0">
+              <a:rPr lang="en-US" sz="1220" dirty="0">
                 <a:solidFill>
                   <a:srgbClr val="17364A"/>
                 </a:solidFill>
@@ -18945,9 +18951,9 @@
                 <a:ea typeface="Aptos" pitchFamily="34" charset="-122"/>
                 <a:cs typeface="Aptos" pitchFamily="34" charset="-120"/>
               </a:rPr>
-              <a:t>Connect the concept to data quality, model performance, validation evidence, monitoring measures, and decisions that remain under human control.</a:t>
-            </a:r>
-            <a:endParaRPr lang="en-US" sz="1320" dirty="0"/>
+              <a:t>Connect the concept to data quality, model performance, validation evidence,.</a:t>
+            </a:r>
+            <a:endParaRPr lang="en-US" sz="1220" dirty="0"/>
           </a:p>
         </p:txBody>
       </p:sp>

--- a/downloads/presentations/modules/arc-240.pptx
+++ b/downloads/presentations/modules/arc-240.pptx
@@ -12433,7 +12433,7 @@
                 <a:ea typeface="Aptos" pitchFamily="34" charset="-122"/>
                 <a:cs typeface="Aptos" pitchFamily="34" charset="-120"/>
               </a:rPr>
-              <a:t>• 1. Why is terminology mapping important for AI-supported surveillance?</a:t>
+              <a:t>1. Why is terminology mapping important for AI-supported surveillance?</a:t>
             </a:r>
             <a:endParaRPr lang="en-US" sz="1920" dirty="0"/>
           </a:p>
@@ -12450,7 +12450,7 @@
                 <a:ea typeface="Aptos" pitchFamily="34" charset="-122"/>
                 <a:cs typeface="Aptos" pitchFamily="34" charset="-120"/>
               </a:rPr>
-              <a:t>• 2. What is LOINC commonly used for?</a:t>
+              <a:t>2. What is LOINC commonly used for?</a:t>
             </a:r>
             <a:endParaRPr lang="en-US" sz="1920" dirty="0"/>
           </a:p>
@@ -12467,7 +12467,7 @@
                 <a:ea typeface="Aptos" pitchFamily="34" charset="-122"/>
                 <a:cs typeface="Aptos" pitchFamily="34" charset="-120"/>
               </a:rPr>
-              <a:t>• 3. Which issue can make a quantitative lab result difficult to interpret?</a:t>
+              <a:t>3. Which issue can make a quantitative lab result difficult to interpret?</a:t>
             </a:r>
             <a:endParaRPr lang="en-US" sz="1920" dirty="0"/>
           </a:p>
@@ -12574,7 +12574,7 @@
                 <a:ea typeface="Aptos" pitchFamily="34" charset="-122"/>
                 <a:cs typeface="Aptos" pitchFamily="34" charset="-120"/>
               </a:rPr>
-              <a:t>1. Why is terminology mapping important for AI-supported surveillance?</a:t>
+              <a:t>Why is terminology mapping important for AI-supported surveillance?</a:t>
             </a:r>
             <a:endParaRPr lang="en-US" sz="1220" dirty="0"/>
           </a:p>
@@ -12681,41 +12681,7 @@
                 <a:ea typeface="Aptos" pitchFamily="34" charset="-122"/>
                 <a:cs typeface="Aptos" pitchFamily="34" charset="-120"/>
               </a:rPr>
-              <a:t>1.</a:t>
-            </a:r>
-            <a:endParaRPr lang="en-US" sz="1140" dirty="0"/>
-          </a:p>
-          <a:p>
-            <a:pPr indent="0" marL="0">
-              <a:buNone/>
-            </a:pPr>
-            <a:r>
-              <a:rPr lang="en-US" sz="1140" dirty="0">
-                <a:solidFill>
-                  <a:srgbClr val="17364A"/>
-                </a:solidFill>
-                <a:latin typeface="Aptos" pitchFamily="34" charset="0"/>
-                <a:ea typeface="Aptos" pitchFamily="34" charset="-122"/>
-                <a:cs typeface="Aptos" pitchFamily="34" charset="-120"/>
-              </a:rPr>
               <a:t>Why is terminology mapping important for.</a:t>
-            </a:r>
-            <a:endParaRPr lang="en-US" sz="1140" dirty="0"/>
-          </a:p>
-          <a:p>
-            <a:pPr indent="0" marL="0">
-              <a:buNone/>
-            </a:pPr>
-            <a:r>
-              <a:rPr lang="en-US" sz="1140" dirty="0">
-                <a:solidFill>
-                  <a:srgbClr val="17364A"/>
-                </a:solidFill>
-                <a:latin typeface="Aptos" pitchFamily="34" charset="0"/>
-                <a:ea typeface="Aptos" pitchFamily="34" charset="-122"/>
-                <a:cs typeface="Aptos" pitchFamily="34" charset="-120"/>
-              </a:rPr>
-              <a:t>2.</a:t>
             </a:r>
             <a:endParaRPr lang="en-US" sz="1140" dirty="0"/>
           </a:p>
